--- a/deck/ISE_Review1_Final.pptx
+++ b/deck/ISE_Review1_Final.pptx
@@ -15,9 +15,10 @@
     <p:sldId id="263" r:id="rId9"/>
     <p:sldId id="264" r:id="rId10"/>
     <p:sldId id="265" r:id="rId11"/>
+    <p:sldId id="266" r:id="rId12"/>
   </p:sldIdLst>
   <p:notesMasterIdLst>
-    <p:notesMasterId r:id="rId12"/>
+    <p:notesMasterId r:id="rId13"/>
   </p:notesMasterIdLst>
   <p:sldSz cx="12191695" cy="6858000"/>
   <p:notesSz cx="6858000" cy="12191695"/>
@@ -599,6 +600,94 @@
           <a:p>
             <a:r>
               <a:rPr lang="en-US" dirty="0"/>
+              <a:t>PH9</a:t>
+            </a:r>
+            <a:endParaRPr lang="en-US" dirty="0"/>
+          </a:p>
+        </p:txBody>
+      </p:sp>
+      <p:sp>
+        <p:nvSpPr>
+          <p:cNvPr id="4" name="Slide Number Placeholder 3"/>
+          <p:cNvSpPr>
+            <a:spLocks noGrp="1"/>
+          </p:cNvSpPr>
+          <p:nvPr>
+            <p:ph type="sldNum" sz="quarter" idx="10"/>
+          </p:nvPr>
+        </p:nvSpPr>
+        <p:spPr/>
+        <p:txBody>
+          <a:bodyPr/>
+          <a:lstStyle/>
+          <a:p>
+            <a:fld id="{F7021451-1387-4CA6-816F-3879F97B5CBC}" type="slidenum">
+              <a:rPr lang="en-US"/>
+              <a:t>10</a:t>
+            </a:fld>
+            <a:endParaRPr lang="en-US"/>
+          </a:p>
+        </p:txBody>
+      </p:sp>
+    </p:spTree>
+    <p:extLst>
+      <p:ext uri="{BB962C8B-B14F-4D97-AF65-F5344CB8AC3E}">
+        <p14:creationId xmlns:p14="http://schemas.microsoft.com/office/powerpoint/2010/main" val="1024086991"/>
+      </p:ext>
+    </p:extLst>
+  </p:cSld>
+  <p:clrMapOvr>
+    <a:masterClrMapping/>
+  </p:clrMapOvr>
+</p:notes>
+</file>
+
+<file path=ppt/notesSlides/notesSlide11.xml><?xml version="1.0" encoding="utf-8"?>
+<p:notes xmlns:a="http://schemas.openxmlformats.org/drawingml/2006/main" xmlns:r="http://schemas.openxmlformats.org/officeDocument/2006/relationships" xmlns:p="http://schemas.openxmlformats.org/presentationml/2006/main">
+  <p:cSld>
+    <p:spTree>
+      <p:nvGrpSpPr>
+        <p:cNvPr id="1" name=""/>
+        <p:cNvGrpSpPr/>
+        <p:nvPr/>
+      </p:nvGrpSpPr>
+      <p:grpSpPr>
+        <a:xfrm>
+          <a:off x="0" y="0"/>
+          <a:ext cx="0" cy="0"/>
+          <a:chOff x="0" y="0"/>
+          <a:chExt cx="0" cy="0"/>
+        </a:xfrm>
+      </p:grpSpPr>
+      <p:sp>
+        <p:nvSpPr>
+          <p:cNvPr id="2" name="Slide Image Placeholder 1"/>
+          <p:cNvSpPr>
+            <a:spLocks noGrp="1" noRot="1" noChangeAspect="1"/>
+          </p:cNvSpPr>
+          <p:nvPr>
+            <p:ph type="sldImg"/>
+          </p:nvPr>
+        </p:nvSpPr>
+        <p:spPr/>
+      </p:sp>
+      <p:sp>
+        <p:nvSpPr>
+          <p:cNvPr id="3" name="Notes Placeholder 2"/>
+          <p:cNvSpPr>
+            <a:spLocks noGrp="1"/>
+          </p:cNvSpPr>
+          <p:nvPr>
+            <p:ph type="body" idx="1"/>
+          </p:nvPr>
+        </p:nvSpPr>
+        <p:spPr/>
+        <p:txBody>
+          <a:bodyPr/>
+          <a:lstStyle/>
+          <a:p>
+            <a:r>
+              <a:rPr lang="en-US" dirty="0"/>
               <a:t>PH10</a:t>
             </a:r>
             <a:endParaRPr lang="en-US" dirty="0"/>
@@ -622,7 +711,7 @@
           <a:p>
             <a:fld id="{F7021451-1387-4CA6-816F-3879F97B5CBC}" type="slidenum">
               <a:rPr lang="en-US"/>
-              <a:t>10</a:t>
+              <a:t>11</a:t>
             </a:fld>
             <a:endParaRPr lang="en-US"/>
           </a:p>
@@ -1215,7 +1304,7 @@
           <a:p>
             <a:r>
               <a:rPr lang="en-US" dirty="0"/>
-              <a:t>PH8</a:t>
+              <a:t>PH8b</a:t>
             </a:r>
             <a:endParaRPr lang="en-US" dirty="0"/>
           </a:p>
@@ -1303,7 +1392,7 @@
           <a:p>
             <a:r>
               <a:rPr lang="en-US" dirty="0"/>
-              <a:t>PH9</a:t>
+              <a:t>PH8</a:t>
             </a:r>
             <a:endParaRPr lang="en-US" dirty="0"/>
           </a:p>
@@ -2277,6 +2366,1831 @@
       </p:grpSpPr>
       <p:sp>
         <p:nvSpPr>
+          <p:cNvPr id="2" name="Text 0"/>
+          <p:cNvSpPr/>
+          <p:nvPr/>
+        </p:nvSpPr>
+        <p:spPr>
+          <a:xfrm>
+            <a:off x="777240" y="347472"/>
+            <a:ext cx="10637215" cy="201168"/>
+          </a:xfrm>
+          <a:prstGeom prst="rect">
+            <a:avLst/>
+          </a:prstGeom>
+          <a:noFill/>
+          <a:ln/>
+        </p:spPr>
+        <p:txBody>
+          <a:bodyPr wrap="square" lIns="0" tIns="0" rIns="0" bIns="0" rtlCol="0" anchor="ctr"/>
+          <a:lstStyle/>
+          <a:p>
+            <a:pPr indent="0" marL="0">
+              <a:buNone/>
+            </a:pPr>
+            <a:r>
+              <a:rPr lang="en-US" sz="1000" b="1" spc="160" kern="0" dirty="0">
+                <a:solidFill>
+                  <a:srgbClr val="8C3A1E"/>
+                </a:solidFill>
+                <a:latin typeface="Calibri" pitchFamily="34" charset="0"/>
+                <a:ea typeface="Calibri" pitchFamily="34" charset="-122"/>
+                <a:cs typeface="Calibri" pitchFamily="34" charset="-120"/>
+              </a:rPr>
+              <a:t>WHAT FOLLOWS</a:t>
+            </a:r>
+            <a:endParaRPr lang="en-US" sz="1000" dirty="0"/>
+          </a:p>
+        </p:txBody>
+      </p:sp>
+      <p:sp>
+        <p:nvSpPr>
+          <p:cNvPr id="3" name="Text 1"/>
+          <p:cNvSpPr/>
+          <p:nvPr/>
+        </p:nvSpPr>
+        <p:spPr>
+          <a:xfrm>
+            <a:off x="777240" y="585216"/>
+            <a:ext cx="10637215" cy="493776"/>
+          </a:xfrm>
+          <a:prstGeom prst="rect">
+            <a:avLst/>
+          </a:prstGeom>
+          <a:noFill/>
+          <a:ln/>
+        </p:spPr>
+        <p:txBody>
+          <a:bodyPr wrap="square" lIns="0" tIns="0" rIns="0" bIns="0" rtlCol="0" anchor="ctr"/>
+          <a:lstStyle/>
+          <a:p>
+            <a:pPr indent="0" marL="0">
+              <a:buNone/>
+            </a:pPr>
+            <a:r>
+              <a:rPr lang="en-US" sz="2600" b="1" dirty="0">
+                <a:solidFill>
+                  <a:srgbClr val="1A1A1A"/>
+                </a:solidFill>
+                <a:latin typeface="Cambria" pitchFamily="34" charset="0"/>
+                <a:ea typeface="Cambria" pitchFamily="34" charset="-122"/>
+                <a:cs typeface="Cambria" pitchFamily="34" charset="-120"/>
+              </a:rPr>
+              <a:t>Three months, and the bar each step must clear</a:t>
+            </a:r>
+            <a:endParaRPr lang="en-US" sz="2600" dirty="0"/>
+          </a:p>
+        </p:txBody>
+      </p:sp>
+      <p:sp>
+        <p:nvSpPr>
+          <p:cNvPr id="4" name="Shape 2"/>
+          <p:cNvSpPr/>
+          <p:nvPr/>
+        </p:nvSpPr>
+        <p:spPr>
+          <a:xfrm>
+            <a:off x="777240" y="1188720"/>
+            <a:ext cx="10637215" cy="10973"/>
+          </a:xfrm>
+          <a:prstGeom prst="rect">
+            <a:avLst/>
+          </a:prstGeom>
+          <a:solidFill>
+            <a:srgbClr val="DEDCD7"/>
+          </a:solidFill>
+          <a:ln/>
+        </p:spPr>
+      </p:sp>
+      <p:graphicFrame>
+        <p:nvGraphicFramePr>
+          <p:cNvPr id="11" name="Table 0"/>
+          <p:cNvGraphicFramePr>
+            <a:graphicFrameLocks noGrp="1"/>
+          </p:cNvGraphicFramePr>
+          <p:nvPr>
+            <p:extLst>
+              <p:ext uri="{D42A27DB-BD31-4B8C-83A1-F6EECF244321}">
+                <p14:modId xmlns:p14="http://schemas.microsoft.com/office/powerpoint/2010/main" val="1579011935"/>
+              </p:ext>
+            </p:extLst>
+          </p:nvPr>
+        </p:nvGraphicFramePr>
+        <p:xfrm>
+          <a:off x="777240" y="1261872"/>
+          <a:ext cx="10637215" cy="914400"/>
+        </p:xfrm>
+        <a:graphic>
+          <a:graphicData uri="http://schemas.openxmlformats.org/drawingml/2006/table">
+            <a:tbl>
+              <a:tblPr/>
+              <a:tblGrid>
+                <a:gridCol w="1463040"/>
+                <a:gridCol w="1920240"/>
+                <a:gridCol w="4937760"/>
+                <a:gridCol w="2313432"/>
+              </a:tblGrid>
+              <a:tr h="640080">
+                <a:tc>
+                  <a:txBody>
+                    <a:bodyPr/>
+                    <a:lstStyle/>
+                    <a:p>
+                      <a:pPr indent="0" marL="0">
+                        <a:buNone/>
+                      </a:pPr>
+                      <a:r>
+                        <a:rPr lang="en-US" sz="1000" b="1" dirty="0">
+                          <a:solidFill>
+                            <a:srgbClr val="1A1A1A"/>
+                          </a:solidFill>
+                          <a:latin typeface="Calibri" pitchFamily="34" charset="0"/>
+                          <a:ea typeface="Calibri" pitchFamily="34" charset="-122"/>
+                          <a:cs typeface="Calibri" pitchFamily="34" charset="-120"/>
+                        </a:rPr>
+                        <a:t>Month</a:t>
+                      </a:r>
+                      <a:endParaRPr lang="en-US" sz="1000" dirty="0">
+                        <a:latin typeface="Calibri" charset="0"/>
+                        <a:ea typeface="Calibri" charset="0"/>
+                        <a:cs typeface="Calibri" charset="0"/>
+                      </a:endParaRPr>
+                    </a:p>
+                  </a:txBody>
+                  <a:tcPr marL="50800" marR="50800" marT="50800" marB="50800" anchor="t">
+                    <a:lnL w="6350" cap="flat" cmpd="sng" algn="ctr">
+                      <a:solidFill>
+                        <a:srgbClr val="DEDCD7"/>
+                      </a:solidFill>
+                      <a:prstDash val="solid"/>
+                      <a:round/>
+                      <a:headEnd type="none" w="med" len="med"/>
+                      <a:tailEnd type="none" w="med" len="med"/>
+                    </a:lnL>
+                    <a:lnR w="6350" cap="flat" cmpd="sng" algn="ctr">
+                      <a:solidFill>
+                        <a:srgbClr val="DEDCD7"/>
+                      </a:solidFill>
+                      <a:prstDash val="solid"/>
+                      <a:round/>
+                      <a:headEnd type="none" w="med" len="med"/>
+                      <a:tailEnd type="none" w="med" len="med"/>
+                    </a:lnR>
+                    <a:lnT w="6350" cap="flat" cmpd="sng" algn="ctr">
+                      <a:solidFill>
+                        <a:srgbClr val="DEDCD7"/>
+                      </a:solidFill>
+                      <a:prstDash val="solid"/>
+                      <a:round/>
+                      <a:headEnd type="none" w="med" len="med"/>
+                      <a:tailEnd type="none" w="med" len="med"/>
+                    </a:lnT>
+                    <a:lnB w="6350" cap="flat" cmpd="sng" algn="ctr">
+                      <a:solidFill>
+                        <a:srgbClr val="DEDCD7"/>
+                      </a:solidFill>
+                      <a:prstDash val="solid"/>
+                      <a:round/>
+                      <a:headEnd type="none" w="med" len="med"/>
+                      <a:tailEnd type="none" w="med" len="med"/>
+                    </a:lnB>
+                    <a:solidFill>
+                      <a:srgbClr val="F6F5F2"/>
+                    </a:solidFill>
+                  </a:tcPr>
+                </a:tc>
+                <a:tc>
+                  <a:txBody>
+                    <a:bodyPr/>
+                    <a:lstStyle/>
+                    <a:p>
+                      <a:pPr indent="0" marL="0">
+                        <a:buNone/>
+                      </a:pPr>
+                      <a:r>
+                        <a:rPr lang="en-US" sz="1000" b="1" dirty="0">
+                          <a:solidFill>
+                            <a:srgbClr val="1A1A1A"/>
+                          </a:solidFill>
+                          <a:latin typeface="Calibri" pitchFamily="34" charset="0"/>
+                          <a:ea typeface="Calibri" pitchFamily="34" charset="-122"/>
+                          <a:cs typeface="Calibri" pitchFamily="34" charset="-120"/>
+                        </a:rPr>
+                        <a:t>Focus</a:t>
+                      </a:r>
+                      <a:endParaRPr lang="en-US" sz="1000" dirty="0">
+                        <a:latin typeface="Calibri" charset="0"/>
+                        <a:ea typeface="Calibri" charset="0"/>
+                        <a:cs typeface="Calibri" charset="0"/>
+                      </a:endParaRPr>
+                    </a:p>
+                  </a:txBody>
+                  <a:tcPr marL="50800" marR="50800" marT="50800" marB="50800" anchor="t">
+                    <a:lnL w="6350" cap="flat" cmpd="sng" algn="ctr">
+                      <a:solidFill>
+                        <a:srgbClr val="DEDCD7"/>
+                      </a:solidFill>
+                      <a:prstDash val="solid"/>
+                      <a:round/>
+                      <a:headEnd type="none" w="med" len="med"/>
+                      <a:tailEnd type="none" w="med" len="med"/>
+                    </a:lnL>
+                    <a:lnR w="6350" cap="flat" cmpd="sng" algn="ctr">
+                      <a:solidFill>
+                        <a:srgbClr val="DEDCD7"/>
+                      </a:solidFill>
+                      <a:prstDash val="solid"/>
+                      <a:round/>
+                      <a:headEnd type="none" w="med" len="med"/>
+                      <a:tailEnd type="none" w="med" len="med"/>
+                    </a:lnR>
+                    <a:lnT w="6350" cap="flat" cmpd="sng" algn="ctr">
+                      <a:solidFill>
+                        <a:srgbClr val="DEDCD7"/>
+                      </a:solidFill>
+                      <a:prstDash val="solid"/>
+                      <a:round/>
+                      <a:headEnd type="none" w="med" len="med"/>
+                      <a:tailEnd type="none" w="med" len="med"/>
+                    </a:lnT>
+                    <a:lnB w="6350" cap="flat" cmpd="sng" algn="ctr">
+                      <a:solidFill>
+                        <a:srgbClr val="DEDCD7"/>
+                      </a:solidFill>
+                      <a:prstDash val="solid"/>
+                      <a:round/>
+                      <a:headEnd type="none" w="med" len="med"/>
+                      <a:tailEnd type="none" w="med" len="med"/>
+                    </a:lnB>
+                    <a:solidFill>
+                      <a:srgbClr val="F6F5F2"/>
+                    </a:solidFill>
+                  </a:tcPr>
+                </a:tc>
+                <a:tc>
+                  <a:txBody>
+                    <a:bodyPr/>
+                    <a:lstStyle/>
+                    <a:p>
+                      <a:pPr indent="0" marL="0">
+                        <a:buNone/>
+                      </a:pPr>
+                      <a:r>
+                        <a:rPr lang="en-US" sz="1000" b="1" dirty="0">
+                          <a:solidFill>
+                            <a:srgbClr val="1A1A1A"/>
+                          </a:solidFill>
+                          <a:latin typeface="Calibri" pitchFamily="34" charset="0"/>
+                          <a:ea typeface="Calibri" pitchFamily="34" charset="-122"/>
+                          <a:cs typeface="Calibri" pitchFamily="34" charset="-120"/>
+                        </a:rPr>
+                        <a:t>Deliverable</a:t>
+                      </a:r>
+                      <a:endParaRPr lang="en-US" sz="1000" dirty="0">
+                        <a:latin typeface="Calibri" charset="0"/>
+                        <a:ea typeface="Calibri" charset="0"/>
+                        <a:cs typeface="Calibri" charset="0"/>
+                      </a:endParaRPr>
+                    </a:p>
+                  </a:txBody>
+                  <a:tcPr marL="50800" marR="50800" marT="50800" marB="50800" anchor="t">
+                    <a:lnL w="6350" cap="flat" cmpd="sng" algn="ctr">
+                      <a:solidFill>
+                        <a:srgbClr val="DEDCD7"/>
+                      </a:solidFill>
+                      <a:prstDash val="solid"/>
+                      <a:round/>
+                      <a:headEnd type="none" w="med" len="med"/>
+                      <a:tailEnd type="none" w="med" len="med"/>
+                    </a:lnL>
+                    <a:lnR w="6350" cap="flat" cmpd="sng" algn="ctr">
+                      <a:solidFill>
+                        <a:srgbClr val="DEDCD7"/>
+                      </a:solidFill>
+                      <a:prstDash val="solid"/>
+                      <a:round/>
+                      <a:headEnd type="none" w="med" len="med"/>
+                      <a:tailEnd type="none" w="med" len="med"/>
+                    </a:lnR>
+                    <a:lnT w="6350" cap="flat" cmpd="sng" algn="ctr">
+                      <a:solidFill>
+                        <a:srgbClr val="DEDCD7"/>
+                      </a:solidFill>
+                      <a:prstDash val="solid"/>
+                      <a:round/>
+                      <a:headEnd type="none" w="med" len="med"/>
+                      <a:tailEnd type="none" w="med" len="med"/>
+                    </a:lnT>
+                    <a:lnB w="6350" cap="flat" cmpd="sng" algn="ctr">
+                      <a:solidFill>
+                        <a:srgbClr val="DEDCD7"/>
+                      </a:solidFill>
+                      <a:prstDash val="solid"/>
+                      <a:round/>
+                      <a:headEnd type="none" w="med" len="med"/>
+                      <a:tailEnd type="none" w="med" len="med"/>
+                    </a:lnB>
+                    <a:solidFill>
+                      <a:srgbClr val="F6F5F2"/>
+                    </a:solidFill>
+                  </a:tcPr>
+                </a:tc>
+                <a:tc>
+                  <a:txBody>
+                    <a:bodyPr/>
+                    <a:lstStyle/>
+                    <a:p>
+                      <a:pPr indent="0" marL="0">
+                        <a:buNone/>
+                      </a:pPr>
+                      <a:r>
+                        <a:rPr lang="en-US" sz="1000" b="1" dirty="0">
+                          <a:solidFill>
+                            <a:srgbClr val="1A1A1A"/>
+                          </a:solidFill>
+                          <a:latin typeface="Calibri" pitchFamily="34" charset="0"/>
+                          <a:ea typeface="Calibri" pitchFamily="34" charset="-122"/>
+                          <a:cs typeface="Calibri" pitchFamily="34" charset="-120"/>
+                        </a:rPr>
+                        <a:t>Must beat</a:t>
+                      </a:r>
+                      <a:endParaRPr lang="en-US" sz="1000" dirty="0">
+                        <a:latin typeface="Calibri" charset="0"/>
+                        <a:ea typeface="Calibri" charset="0"/>
+                        <a:cs typeface="Calibri" charset="0"/>
+                      </a:endParaRPr>
+                    </a:p>
+                  </a:txBody>
+                  <a:tcPr marL="50800" marR="50800" marT="50800" marB="50800" anchor="t">
+                    <a:lnL w="6350" cap="flat" cmpd="sng" algn="ctr">
+                      <a:solidFill>
+                        <a:srgbClr val="DEDCD7"/>
+                      </a:solidFill>
+                      <a:prstDash val="solid"/>
+                      <a:round/>
+                      <a:headEnd type="none" w="med" len="med"/>
+                      <a:tailEnd type="none" w="med" len="med"/>
+                    </a:lnL>
+                    <a:lnR w="6350" cap="flat" cmpd="sng" algn="ctr">
+                      <a:solidFill>
+                        <a:srgbClr val="DEDCD7"/>
+                      </a:solidFill>
+                      <a:prstDash val="solid"/>
+                      <a:round/>
+                      <a:headEnd type="none" w="med" len="med"/>
+                      <a:tailEnd type="none" w="med" len="med"/>
+                    </a:lnR>
+                    <a:lnT w="6350" cap="flat" cmpd="sng" algn="ctr">
+                      <a:solidFill>
+                        <a:srgbClr val="DEDCD7"/>
+                      </a:solidFill>
+                      <a:prstDash val="solid"/>
+                      <a:round/>
+                      <a:headEnd type="none" w="med" len="med"/>
+                      <a:tailEnd type="none" w="med" len="med"/>
+                    </a:lnT>
+                    <a:lnB w="6350" cap="flat" cmpd="sng" algn="ctr">
+                      <a:solidFill>
+                        <a:srgbClr val="DEDCD7"/>
+                      </a:solidFill>
+                      <a:prstDash val="solid"/>
+                      <a:round/>
+                      <a:headEnd type="none" w="med" len="med"/>
+                      <a:tailEnd type="none" w="med" len="med"/>
+                    </a:lnB>
+                    <a:solidFill>
+                      <a:srgbClr val="F6F5F2"/>
+                    </a:solidFill>
+                  </a:tcPr>
+                </a:tc>
+              </a:tr>
+              <a:tr h="640080">
+                <a:tc>
+                  <a:txBody>
+                    <a:bodyPr/>
+                    <a:lstStyle/>
+                    <a:p>
+                      <a:pPr indent="0" marL="0">
+                        <a:buNone/>
+                      </a:pPr>
+                      <a:r>
+                        <a:rPr lang="en-US" sz="1000" dirty="0">
+                          <a:solidFill>
+                            <a:srgbClr val="1A1A1A"/>
+                          </a:solidFill>
+                          <a:latin typeface="Calibri" pitchFamily="34" charset="0"/>
+                          <a:ea typeface="Calibri" pitchFamily="34" charset="-122"/>
+                          <a:cs typeface="Calibri" pitchFamily="34" charset="-120"/>
+                        </a:rPr>
+                        <a:t>1 · Sep–Oct</a:t>
+                      </a:r>
+                      <a:endParaRPr lang="en-US" sz="1000" dirty="0">
+                        <a:latin typeface="Calibri" charset="0"/>
+                        <a:ea typeface="Calibri" charset="0"/>
+                        <a:cs typeface="Calibri" charset="0"/>
+                      </a:endParaRPr>
+                    </a:p>
+                  </a:txBody>
+                  <a:tcPr marL="50800" marR="50800" marT="50800" marB="50800" anchor="t">
+                    <a:lnL w="6350" cap="flat" cmpd="sng" algn="ctr">
+                      <a:solidFill>
+                        <a:srgbClr val="DEDCD7"/>
+                      </a:solidFill>
+                      <a:prstDash val="solid"/>
+                      <a:round/>
+                      <a:headEnd type="none" w="med" len="med"/>
+                      <a:tailEnd type="none" w="med" len="med"/>
+                    </a:lnL>
+                    <a:lnR w="6350" cap="flat" cmpd="sng" algn="ctr">
+                      <a:solidFill>
+                        <a:srgbClr val="DEDCD7"/>
+                      </a:solidFill>
+                      <a:prstDash val="solid"/>
+                      <a:round/>
+                      <a:headEnd type="none" w="med" len="med"/>
+                      <a:tailEnd type="none" w="med" len="med"/>
+                    </a:lnR>
+                    <a:lnT w="6350" cap="flat" cmpd="sng" algn="ctr">
+                      <a:solidFill>
+                        <a:srgbClr val="DEDCD7"/>
+                      </a:solidFill>
+                      <a:prstDash val="solid"/>
+                      <a:round/>
+                      <a:headEnd type="none" w="med" len="med"/>
+                      <a:tailEnd type="none" w="med" len="med"/>
+                    </a:lnT>
+                    <a:lnB w="6350" cap="flat" cmpd="sng" algn="ctr">
+                      <a:solidFill>
+                        <a:srgbClr val="DEDCD7"/>
+                      </a:solidFill>
+                      <a:prstDash val="solid"/>
+                      <a:round/>
+                      <a:headEnd type="none" w="med" len="med"/>
+                      <a:tailEnd type="none" w="med" len="med"/>
+                    </a:lnB>
+                  </a:tcPr>
+                </a:tc>
+                <a:tc>
+                  <a:txBody>
+                    <a:bodyPr/>
+                    <a:lstStyle/>
+                    <a:p>
+                      <a:pPr indent="0" marL="0">
+                        <a:buNone/>
+                      </a:pPr>
+                      <a:r>
+                        <a:rPr lang="en-US" sz="1000" dirty="0">
+                          <a:solidFill>
+                            <a:srgbClr val="1A1A1A"/>
+                          </a:solidFill>
+                          <a:latin typeface="Calibri" pitchFamily="34" charset="0"/>
+                          <a:ea typeface="Calibri" pitchFamily="34" charset="-122"/>
+                          <a:cs typeface="Calibri" pitchFamily="34" charset="-120"/>
+                        </a:rPr>
+                        <a:t>Supervision at scale</a:t>
+                      </a:r>
+                      <a:endParaRPr lang="en-US" sz="1000" dirty="0">
+                        <a:latin typeface="Calibri" charset="0"/>
+                        <a:ea typeface="Calibri" charset="0"/>
+                        <a:cs typeface="Calibri" charset="0"/>
+                      </a:endParaRPr>
+                    </a:p>
+                  </a:txBody>
+                  <a:tcPr marL="50800" marR="50800" marT="50800" marB="50800" anchor="t">
+                    <a:lnL w="6350" cap="flat" cmpd="sng" algn="ctr">
+                      <a:solidFill>
+                        <a:srgbClr val="DEDCD7"/>
+                      </a:solidFill>
+                      <a:prstDash val="solid"/>
+                      <a:round/>
+                      <a:headEnd type="none" w="med" len="med"/>
+                      <a:tailEnd type="none" w="med" len="med"/>
+                    </a:lnL>
+                    <a:lnR w="6350" cap="flat" cmpd="sng" algn="ctr">
+                      <a:solidFill>
+                        <a:srgbClr val="DEDCD7"/>
+                      </a:solidFill>
+                      <a:prstDash val="solid"/>
+                      <a:round/>
+                      <a:headEnd type="none" w="med" len="med"/>
+                      <a:tailEnd type="none" w="med" len="med"/>
+                    </a:lnR>
+                    <a:lnT w="6350" cap="flat" cmpd="sng" algn="ctr">
+                      <a:solidFill>
+                        <a:srgbClr val="DEDCD7"/>
+                      </a:solidFill>
+                      <a:prstDash val="solid"/>
+                      <a:round/>
+                      <a:headEnd type="none" w="med" len="med"/>
+                      <a:tailEnd type="none" w="med" len="med"/>
+                    </a:lnT>
+                    <a:lnB w="6350" cap="flat" cmpd="sng" algn="ctr">
+                      <a:solidFill>
+                        <a:srgbClr val="DEDCD7"/>
+                      </a:solidFill>
+                      <a:prstDash val="solid"/>
+                      <a:round/>
+                      <a:headEnd type="none" w="med" len="med"/>
+                      <a:tailEnd type="none" w="med" len="med"/>
+                    </a:lnB>
+                  </a:tcPr>
+                </a:tc>
+                <a:tc>
+                  <a:txBody>
+                    <a:bodyPr/>
+                    <a:lstStyle/>
+                    <a:p>
+                      <a:pPr indent="0" marL="0">
+                        <a:buNone/>
+                      </a:pPr>
+                      <a:r>
+                        <a:rPr lang="en-US" sz="1000" dirty="0">
+                          <a:solidFill>
+                            <a:srgbClr val="1A1A1A"/>
+                          </a:solidFill>
+                          <a:latin typeface="Calibri" pitchFamily="34" charset="0"/>
+                          <a:ea typeface="Calibri" pitchFamily="34" charset="-122"/>
+                          <a:cs typeface="Calibri" pitchFamily="34" charset="-120"/>
+                        </a:rPr>
+                        <a:t>all 51 MagicBrush shards (~8,800 turns); re-measure the scaling curve</a:t>
+                      </a:r>
+                      <a:endParaRPr lang="en-US" sz="1000" dirty="0">
+                        <a:latin typeface="Calibri" charset="0"/>
+                        <a:ea typeface="Calibri" charset="0"/>
+                        <a:cs typeface="Calibri" charset="0"/>
+                      </a:endParaRPr>
+                    </a:p>
+                  </a:txBody>
+                  <a:tcPr marL="50800" marR="50800" marT="50800" marB="50800" anchor="t">
+                    <a:lnL w="6350" cap="flat" cmpd="sng" algn="ctr">
+                      <a:solidFill>
+                        <a:srgbClr val="DEDCD7"/>
+                      </a:solidFill>
+                      <a:prstDash val="solid"/>
+                      <a:round/>
+                      <a:headEnd type="none" w="med" len="med"/>
+                      <a:tailEnd type="none" w="med" len="med"/>
+                    </a:lnL>
+                    <a:lnR w="6350" cap="flat" cmpd="sng" algn="ctr">
+                      <a:solidFill>
+                        <a:srgbClr val="DEDCD7"/>
+                      </a:solidFill>
+                      <a:prstDash val="solid"/>
+                      <a:round/>
+                      <a:headEnd type="none" w="med" len="med"/>
+                      <a:tailEnd type="none" w="med" len="med"/>
+                    </a:lnR>
+                    <a:lnT w="6350" cap="flat" cmpd="sng" algn="ctr">
+                      <a:solidFill>
+                        <a:srgbClr val="DEDCD7"/>
+                      </a:solidFill>
+                      <a:prstDash val="solid"/>
+                      <a:round/>
+                      <a:headEnd type="none" w="med" len="med"/>
+                      <a:tailEnd type="none" w="med" len="med"/>
+                    </a:lnT>
+                    <a:lnB w="6350" cap="flat" cmpd="sng" algn="ctr">
+                      <a:solidFill>
+                        <a:srgbClr val="DEDCD7"/>
+                      </a:solidFill>
+                      <a:prstDash val="solid"/>
+                      <a:round/>
+                      <a:headEnd type="none" w="med" len="med"/>
+                      <a:tailEnd type="none" w="med" len="med"/>
+                    </a:lnB>
+                  </a:tcPr>
+                </a:tc>
+                <a:tc>
+                  <a:txBody>
+                    <a:bodyPr/>
+                    <a:lstStyle/>
+                    <a:p>
+                      <a:pPr indent="0" marL="0">
+                        <a:buNone/>
+                      </a:pPr>
+                      <a:r>
+                        <a:rPr lang="en-US" sz="1000" dirty="0">
+                          <a:solidFill>
+                            <a:srgbClr val="1A1A1A"/>
+                          </a:solidFill>
+                          <a:latin typeface="Calibri" pitchFamily="34" charset="0"/>
+                          <a:ea typeface="Calibri" pitchFamily="34" charset="-122"/>
+                          <a:cs typeface="Calibri" pitchFamily="34" charset="-120"/>
+                        </a:rPr>
+                        <a:t>0.1718 at 2,278 samples</a:t>
+                      </a:r>
+                      <a:endParaRPr lang="en-US" sz="1000" dirty="0">
+                        <a:latin typeface="Calibri" charset="0"/>
+                        <a:ea typeface="Calibri" charset="0"/>
+                        <a:cs typeface="Calibri" charset="0"/>
+                      </a:endParaRPr>
+                    </a:p>
+                  </a:txBody>
+                  <a:tcPr marL="50800" marR="50800" marT="50800" marB="50800" anchor="t">
+                    <a:lnL w="6350" cap="flat" cmpd="sng" algn="ctr">
+                      <a:solidFill>
+                        <a:srgbClr val="DEDCD7"/>
+                      </a:solidFill>
+                      <a:prstDash val="solid"/>
+                      <a:round/>
+                      <a:headEnd type="none" w="med" len="med"/>
+                      <a:tailEnd type="none" w="med" len="med"/>
+                    </a:lnL>
+                    <a:lnR w="6350" cap="flat" cmpd="sng" algn="ctr">
+                      <a:solidFill>
+                        <a:srgbClr val="DEDCD7"/>
+                      </a:solidFill>
+                      <a:prstDash val="solid"/>
+                      <a:round/>
+                      <a:headEnd type="none" w="med" len="med"/>
+                      <a:tailEnd type="none" w="med" len="med"/>
+                    </a:lnR>
+                    <a:lnT w="6350" cap="flat" cmpd="sng" algn="ctr">
+                      <a:solidFill>
+                        <a:srgbClr val="DEDCD7"/>
+                      </a:solidFill>
+                      <a:prstDash val="solid"/>
+                      <a:round/>
+                      <a:headEnd type="none" w="med" len="med"/>
+                      <a:tailEnd type="none" w="med" len="med"/>
+                    </a:lnT>
+                    <a:lnB w="6350" cap="flat" cmpd="sng" algn="ctr">
+                      <a:solidFill>
+                        <a:srgbClr val="DEDCD7"/>
+                      </a:solidFill>
+                      <a:prstDash val="solid"/>
+                      <a:round/>
+                      <a:headEnd type="none" w="med" len="med"/>
+                      <a:tailEnd type="none" w="med" len="med"/>
+                    </a:lnB>
+                  </a:tcPr>
+                </a:tc>
+              </a:tr>
+              <a:tr h="640080">
+                <a:tc>
+                  <a:txBody>
+                    <a:bodyPr/>
+                    <a:lstStyle/>
+                    <a:p>
+                      <a:pPr indent="0" marL="0">
+                        <a:buNone/>
+                      </a:pPr>
+                      <a:r>
+                        <a:rPr lang="en-US" sz="1000" dirty="0">
+                          <a:solidFill>
+                            <a:srgbClr val="1A1A1A"/>
+                          </a:solidFill>
+                          <a:latin typeface="Calibri" pitchFamily="34" charset="0"/>
+                          <a:ea typeface="Calibri" pitchFamily="34" charset="-122"/>
+                          <a:cs typeface="Calibri" pitchFamily="34" charset="-120"/>
+                        </a:rPr>
+                        <a:t>2 · Oct–Nov</a:t>
+                      </a:r>
+                      <a:endParaRPr lang="en-US" sz="1000" dirty="0">
+                        <a:latin typeface="Calibri" charset="0"/>
+                        <a:ea typeface="Calibri" charset="0"/>
+                        <a:cs typeface="Calibri" charset="0"/>
+                      </a:endParaRPr>
+                    </a:p>
+                  </a:txBody>
+                  <a:tcPr marL="50800" marR="50800" marT="50800" marB="50800" anchor="t">
+                    <a:lnL w="6350" cap="flat" cmpd="sng" algn="ctr">
+                      <a:solidFill>
+                        <a:srgbClr val="DEDCD7"/>
+                      </a:solidFill>
+                      <a:prstDash val="solid"/>
+                      <a:round/>
+                      <a:headEnd type="none" w="med" len="med"/>
+                      <a:tailEnd type="none" w="med" len="med"/>
+                    </a:lnL>
+                    <a:lnR w="6350" cap="flat" cmpd="sng" algn="ctr">
+                      <a:solidFill>
+                        <a:srgbClr val="DEDCD7"/>
+                      </a:solidFill>
+                      <a:prstDash val="solid"/>
+                      <a:round/>
+                      <a:headEnd type="none" w="med" len="med"/>
+                      <a:tailEnd type="none" w="med" len="med"/>
+                    </a:lnR>
+                    <a:lnT w="6350" cap="flat" cmpd="sng" algn="ctr">
+                      <a:solidFill>
+                        <a:srgbClr val="DEDCD7"/>
+                      </a:solidFill>
+                      <a:prstDash val="solid"/>
+                      <a:round/>
+                      <a:headEnd type="none" w="med" len="med"/>
+                      <a:tailEnd type="none" w="med" len="med"/>
+                    </a:lnT>
+                    <a:lnB w="6350" cap="flat" cmpd="sng" algn="ctr">
+                      <a:solidFill>
+                        <a:srgbClr val="DEDCD7"/>
+                      </a:solidFill>
+                      <a:prstDash val="solid"/>
+                      <a:round/>
+                      <a:headEnd type="none" w="med" len="med"/>
+                      <a:tailEnd type="none" w="med" len="med"/>
+                    </a:lnB>
+                  </a:tcPr>
+                </a:tc>
+                <a:tc>
+                  <a:txBody>
+                    <a:bodyPr/>
+                    <a:lstStyle/>
+                    <a:p>
+                      <a:pPr indent="0" marL="0">
+                        <a:buNone/>
+                      </a:pPr>
+                      <a:r>
+                        <a:rPr lang="en-US" sz="1000" dirty="0">
+                          <a:solidFill>
+                            <a:srgbClr val="1A1A1A"/>
+                          </a:solidFill>
+                          <a:latin typeface="Calibri" pitchFamily="34" charset="0"/>
+                          <a:ea typeface="Calibri" pitchFamily="34" charset="-122"/>
+                          <a:cs typeface="Calibri" pitchFamily="34" charset="-120"/>
+                        </a:rPr>
+                        <a:t>Features, not heads</a:t>
+                      </a:r>
+                      <a:endParaRPr lang="en-US" sz="1000" dirty="0">
+                        <a:latin typeface="Calibri" charset="0"/>
+                        <a:ea typeface="Calibri" charset="0"/>
+                        <a:cs typeface="Calibri" charset="0"/>
+                      </a:endParaRPr>
+                    </a:p>
+                  </a:txBody>
+                  <a:tcPr marL="50800" marR="50800" marT="50800" marB="50800" anchor="t">
+                    <a:lnL w="6350" cap="flat" cmpd="sng" algn="ctr">
+                      <a:solidFill>
+                        <a:srgbClr val="DEDCD7"/>
+                      </a:solidFill>
+                      <a:prstDash val="solid"/>
+                      <a:round/>
+                      <a:headEnd type="none" w="med" len="med"/>
+                      <a:tailEnd type="none" w="med" len="med"/>
+                    </a:lnL>
+                    <a:lnR w="6350" cap="flat" cmpd="sng" algn="ctr">
+                      <a:solidFill>
+                        <a:srgbClr val="DEDCD7"/>
+                      </a:solidFill>
+                      <a:prstDash val="solid"/>
+                      <a:round/>
+                      <a:headEnd type="none" w="med" len="med"/>
+                      <a:tailEnd type="none" w="med" len="med"/>
+                    </a:lnR>
+                    <a:lnT w="6350" cap="flat" cmpd="sng" algn="ctr">
+                      <a:solidFill>
+                        <a:srgbClr val="DEDCD7"/>
+                      </a:solidFill>
+                      <a:prstDash val="solid"/>
+                      <a:round/>
+                      <a:headEnd type="none" w="med" len="med"/>
+                      <a:tailEnd type="none" w="med" len="med"/>
+                    </a:lnT>
+                    <a:lnB w="6350" cap="flat" cmpd="sng" algn="ctr">
+                      <a:solidFill>
+                        <a:srgbClr val="DEDCD7"/>
+                      </a:solidFill>
+                      <a:prstDash val="solid"/>
+                      <a:round/>
+                      <a:headEnd type="none" w="med" len="med"/>
+                      <a:tailEnd type="none" w="med" len="med"/>
+                    </a:lnB>
+                  </a:tcPr>
+                </a:tc>
+                <a:tc>
+                  <a:txBody>
+                    <a:bodyPr/>
+                    <a:lstStyle/>
+                    <a:p>
+                      <a:pPr indent="0" marL="0">
+                        <a:buNone/>
+                      </a:pPr>
+                      <a:r>
+                        <a:rPr lang="en-US" sz="1000" dirty="0">
+                          <a:solidFill>
+                            <a:srgbClr val="1A1A1A"/>
+                          </a:solidFill>
+                          <a:latin typeface="Calibri" pitchFamily="34" charset="0"/>
+                          <a:ea typeface="Calibri" pitchFamily="34" charset="-122"/>
+                          <a:cs typeface="Calibri" pitchFamily="34" charset="-120"/>
+                        </a:rPr>
+                        <a:t>exp08/11 show the head is not the insertion bottleneck — test text-conditioned features</a:t>
+                      </a:r>
+                      <a:endParaRPr lang="en-US" sz="1000" dirty="0">
+                        <a:latin typeface="Calibri" charset="0"/>
+                        <a:ea typeface="Calibri" charset="0"/>
+                        <a:cs typeface="Calibri" charset="0"/>
+                      </a:endParaRPr>
+                    </a:p>
+                  </a:txBody>
+                  <a:tcPr marL="50800" marR="50800" marT="50800" marB="50800" anchor="t">
+                    <a:lnL w="6350" cap="flat" cmpd="sng" algn="ctr">
+                      <a:solidFill>
+                        <a:srgbClr val="DEDCD7"/>
+                      </a:solidFill>
+                      <a:prstDash val="solid"/>
+                      <a:round/>
+                      <a:headEnd type="none" w="med" len="med"/>
+                      <a:tailEnd type="none" w="med" len="med"/>
+                    </a:lnL>
+                    <a:lnR w="6350" cap="flat" cmpd="sng" algn="ctr">
+                      <a:solidFill>
+                        <a:srgbClr val="DEDCD7"/>
+                      </a:solidFill>
+                      <a:prstDash val="solid"/>
+                      <a:round/>
+                      <a:headEnd type="none" w="med" len="med"/>
+                      <a:tailEnd type="none" w="med" len="med"/>
+                    </a:lnR>
+                    <a:lnT w="6350" cap="flat" cmpd="sng" algn="ctr">
+                      <a:solidFill>
+                        <a:srgbClr val="DEDCD7"/>
+                      </a:solidFill>
+                      <a:prstDash val="solid"/>
+                      <a:round/>
+                      <a:headEnd type="none" w="med" len="med"/>
+                      <a:tailEnd type="none" w="med" len="med"/>
+                    </a:lnT>
+                    <a:lnB w="6350" cap="flat" cmpd="sng" algn="ctr">
+                      <a:solidFill>
+                        <a:srgbClr val="DEDCD7"/>
+                      </a:solidFill>
+                      <a:prstDash val="solid"/>
+                      <a:round/>
+                      <a:headEnd type="none" w="med" len="med"/>
+                      <a:tailEnd type="none" w="med" len="med"/>
+                    </a:lnB>
+                  </a:tcPr>
+                </a:tc>
+                <a:tc>
+                  <a:txBody>
+                    <a:bodyPr/>
+                    <a:lstStyle/>
+                    <a:p>
+                      <a:pPr indent="0" marL="0">
+                        <a:buNone/>
+                      </a:pPr>
+                      <a:r>
+                        <a:rPr lang="en-US" sz="1000" dirty="0">
+                          <a:solidFill>
+                            <a:srgbClr val="1A1A1A"/>
+                          </a:solidFill>
+                          <a:latin typeface="Calibri" pitchFamily="34" charset="0"/>
+                          <a:ea typeface="Calibri" pitchFamily="34" charset="-122"/>
+                          <a:cs typeface="Calibri" pitchFamily="34" charset="-120"/>
+                        </a:rPr>
+                        <a:t>a random-basis control of equal size</a:t>
+                      </a:r>
+                      <a:endParaRPr lang="en-US" sz="1000" dirty="0">
+                        <a:latin typeface="Calibri" charset="0"/>
+                        <a:ea typeface="Calibri" charset="0"/>
+                        <a:cs typeface="Calibri" charset="0"/>
+                      </a:endParaRPr>
+                    </a:p>
+                  </a:txBody>
+                  <a:tcPr marL="50800" marR="50800" marT="50800" marB="50800" anchor="t">
+                    <a:lnL w="6350" cap="flat" cmpd="sng" algn="ctr">
+                      <a:solidFill>
+                        <a:srgbClr val="DEDCD7"/>
+                      </a:solidFill>
+                      <a:prstDash val="solid"/>
+                      <a:round/>
+                      <a:headEnd type="none" w="med" len="med"/>
+                      <a:tailEnd type="none" w="med" len="med"/>
+                    </a:lnL>
+                    <a:lnR w="6350" cap="flat" cmpd="sng" algn="ctr">
+                      <a:solidFill>
+                        <a:srgbClr val="DEDCD7"/>
+                      </a:solidFill>
+                      <a:prstDash val="solid"/>
+                      <a:round/>
+                      <a:headEnd type="none" w="med" len="med"/>
+                      <a:tailEnd type="none" w="med" len="med"/>
+                    </a:lnR>
+                    <a:lnT w="6350" cap="flat" cmpd="sng" algn="ctr">
+                      <a:solidFill>
+                        <a:srgbClr val="DEDCD7"/>
+                      </a:solidFill>
+                      <a:prstDash val="solid"/>
+                      <a:round/>
+                      <a:headEnd type="none" w="med" len="med"/>
+                      <a:tailEnd type="none" w="med" len="med"/>
+                    </a:lnT>
+                    <a:lnB w="6350" cap="flat" cmpd="sng" algn="ctr">
+                      <a:solidFill>
+                        <a:srgbClr val="DEDCD7"/>
+                      </a:solidFill>
+                      <a:prstDash val="solid"/>
+                      <a:round/>
+                      <a:headEnd type="none" w="med" len="med"/>
+                      <a:tailEnd type="none" w="med" len="med"/>
+                    </a:lnB>
+                  </a:tcPr>
+                </a:tc>
+              </a:tr>
+              <a:tr h="640080">
+                <a:tc>
+                  <a:txBody>
+                    <a:bodyPr/>
+                    <a:lstStyle/>
+                    <a:p>
+                      <a:pPr indent="0" marL="0">
+                        <a:buNone/>
+                      </a:pPr>
+                      <a:r>
+                        <a:rPr lang="en-US" sz="1000" dirty="0">
+                          <a:solidFill>
+                            <a:srgbClr val="1A1A1A"/>
+                          </a:solidFill>
+                          <a:latin typeface="Calibri" pitchFamily="34" charset="0"/>
+                          <a:ea typeface="Calibri" pitchFamily="34" charset="-122"/>
+                          <a:cs typeface="Calibri" pitchFamily="34" charset="-120"/>
+                        </a:rPr>
+                        <a:t>3 · Nov–Dec</a:t>
+                      </a:r>
+                      <a:endParaRPr lang="en-US" sz="1000" dirty="0">
+                        <a:latin typeface="Calibri" charset="0"/>
+                        <a:ea typeface="Calibri" charset="0"/>
+                        <a:cs typeface="Calibri" charset="0"/>
+                      </a:endParaRPr>
+                    </a:p>
+                  </a:txBody>
+                  <a:tcPr marL="50800" marR="50800" marT="50800" marB="50800" anchor="t">
+                    <a:lnL w="6350" cap="flat" cmpd="sng" algn="ctr">
+                      <a:solidFill>
+                        <a:srgbClr val="DEDCD7"/>
+                      </a:solidFill>
+                      <a:prstDash val="solid"/>
+                      <a:round/>
+                      <a:headEnd type="none" w="med" len="med"/>
+                      <a:tailEnd type="none" w="med" len="med"/>
+                    </a:lnL>
+                    <a:lnR w="6350" cap="flat" cmpd="sng" algn="ctr">
+                      <a:solidFill>
+                        <a:srgbClr val="DEDCD7"/>
+                      </a:solidFill>
+                      <a:prstDash val="solid"/>
+                      <a:round/>
+                      <a:headEnd type="none" w="med" len="med"/>
+                      <a:tailEnd type="none" w="med" len="med"/>
+                    </a:lnR>
+                    <a:lnT w="6350" cap="flat" cmpd="sng" algn="ctr">
+                      <a:solidFill>
+                        <a:srgbClr val="DEDCD7"/>
+                      </a:solidFill>
+                      <a:prstDash val="solid"/>
+                      <a:round/>
+                      <a:headEnd type="none" w="med" len="med"/>
+                      <a:tailEnd type="none" w="med" len="med"/>
+                    </a:lnT>
+                    <a:lnB w="6350" cap="flat" cmpd="sng" algn="ctr">
+                      <a:solidFill>
+                        <a:srgbClr val="DEDCD7"/>
+                      </a:solidFill>
+                      <a:prstDash val="solid"/>
+                      <a:round/>
+                      <a:headEnd type="none" w="med" len="med"/>
+                      <a:tailEnd type="none" w="med" len="med"/>
+                    </a:lnB>
+                  </a:tcPr>
+                </a:tc>
+                <a:tc>
+                  <a:txBody>
+                    <a:bodyPr/>
+                    <a:lstStyle/>
+                    <a:p>
+                      <a:pPr indent="0" marL="0">
+                        <a:buNone/>
+                      </a:pPr>
+                      <a:r>
+                        <a:rPr lang="en-US" sz="1000" dirty="0">
+                          <a:solidFill>
+                            <a:srgbClr val="1A1A1A"/>
+                          </a:solidFill>
+                          <a:latin typeface="Calibri" pitchFamily="34" charset="0"/>
+                          <a:ea typeface="Calibri" pitchFamily="34" charset="-122"/>
+                          <a:cs typeface="Calibri" pitchFamily="34" charset="-120"/>
+                        </a:rPr>
+                        <a:t>Editing and evaluation</a:t>
+                      </a:r>
+                      <a:endParaRPr lang="en-US" sz="1000" dirty="0">
+                        <a:latin typeface="Calibri" charset="0"/>
+                        <a:ea typeface="Calibri" charset="0"/>
+                        <a:cs typeface="Calibri" charset="0"/>
+                      </a:endParaRPr>
+                    </a:p>
+                  </a:txBody>
+                  <a:tcPr marL="50800" marR="50800" marT="50800" marB="50800" anchor="t">
+                    <a:lnL w="6350" cap="flat" cmpd="sng" algn="ctr">
+                      <a:solidFill>
+                        <a:srgbClr val="DEDCD7"/>
+                      </a:solidFill>
+                      <a:prstDash val="solid"/>
+                      <a:round/>
+                      <a:headEnd type="none" w="med" len="med"/>
+                      <a:tailEnd type="none" w="med" len="med"/>
+                    </a:lnL>
+                    <a:lnR w="6350" cap="flat" cmpd="sng" algn="ctr">
+                      <a:solidFill>
+                        <a:srgbClr val="DEDCD7"/>
+                      </a:solidFill>
+                      <a:prstDash val="solid"/>
+                      <a:round/>
+                      <a:headEnd type="none" w="med" len="med"/>
+                      <a:tailEnd type="none" w="med" len="med"/>
+                    </a:lnR>
+                    <a:lnT w="6350" cap="flat" cmpd="sng" algn="ctr">
+                      <a:solidFill>
+                        <a:srgbClr val="DEDCD7"/>
+                      </a:solidFill>
+                      <a:prstDash val="solid"/>
+                      <a:round/>
+                      <a:headEnd type="none" w="med" len="med"/>
+                      <a:tailEnd type="none" w="med" len="med"/>
+                    </a:lnT>
+                    <a:lnB w="6350" cap="flat" cmpd="sng" algn="ctr">
+                      <a:solidFill>
+                        <a:srgbClr val="DEDCD7"/>
+                      </a:solidFill>
+                      <a:prstDash val="solid"/>
+                      <a:round/>
+                      <a:headEnd type="none" w="med" len="med"/>
+                      <a:tailEnd type="none" w="med" len="med"/>
+                    </a:lnB>
+                  </a:tcPr>
+                </a:tc>
+                <a:tc>
+                  <a:txBody>
+                    <a:bodyPr/>
+                    <a:lstStyle/>
+                    <a:p>
+                      <a:pPr indent="0" marL="0">
+                        <a:buNone/>
+                      </a:pPr>
+                      <a:r>
+                        <a:rPr lang="en-US" sz="1000" dirty="0">
+                          <a:solidFill>
+                            <a:srgbClr val="1A1A1A"/>
+                          </a:solidFill>
+                          <a:latin typeface="Calibri" pitchFamily="34" charset="0"/>
+                          <a:ea typeface="Calibri" pitchFamily="34" charset="-122"/>
+                          <a:cs typeface="Calibri" pitchFamily="34" charset="-120"/>
+                        </a:rPr>
+                        <a:t>mask-conditioned inpainting; collateral change outside the region — Review 2</a:t>
+                      </a:r>
+                      <a:endParaRPr lang="en-US" sz="1000" dirty="0">
+                        <a:latin typeface="Calibri" charset="0"/>
+                        <a:ea typeface="Calibri" charset="0"/>
+                        <a:cs typeface="Calibri" charset="0"/>
+                      </a:endParaRPr>
+                    </a:p>
+                  </a:txBody>
+                  <a:tcPr marL="50800" marR="50800" marT="50800" marB="50800" anchor="t">
+                    <a:lnL w="6350" cap="flat" cmpd="sng" algn="ctr">
+                      <a:solidFill>
+                        <a:srgbClr val="DEDCD7"/>
+                      </a:solidFill>
+                      <a:prstDash val="solid"/>
+                      <a:round/>
+                      <a:headEnd type="none" w="med" len="med"/>
+                      <a:tailEnd type="none" w="med" len="med"/>
+                    </a:lnL>
+                    <a:lnR w="6350" cap="flat" cmpd="sng" algn="ctr">
+                      <a:solidFill>
+                        <a:srgbClr val="DEDCD7"/>
+                      </a:solidFill>
+                      <a:prstDash val="solid"/>
+                      <a:round/>
+                      <a:headEnd type="none" w="med" len="med"/>
+                      <a:tailEnd type="none" w="med" len="med"/>
+                    </a:lnR>
+                    <a:lnT w="6350" cap="flat" cmpd="sng" algn="ctr">
+                      <a:solidFill>
+                        <a:srgbClr val="DEDCD7"/>
+                      </a:solidFill>
+                      <a:prstDash val="solid"/>
+                      <a:round/>
+                      <a:headEnd type="none" w="med" len="med"/>
+                      <a:tailEnd type="none" w="med" len="med"/>
+                    </a:lnT>
+                    <a:lnB w="6350" cap="flat" cmpd="sng" algn="ctr">
+                      <a:solidFill>
+                        <a:srgbClr val="DEDCD7"/>
+                      </a:solidFill>
+                      <a:prstDash val="solid"/>
+                      <a:round/>
+                      <a:headEnd type="none" w="med" len="med"/>
+                      <a:tailEnd type="none" w="med" len="med"/>
+                    </a:lnB>
+                  </a:tcPr>
+                </a:tc>
+                <a:tc>
+                  <a:txBody>
+                    <a:bodyPr/>
+                    <a:lstStyle/>
+                    <a:p>
+                      <a:pPr indent="0" marL="0">
+                        <a:buNone/>
+                      </a:pPr>
+                      <a:r>
+                        <a:rPr lang="en-US" sz="1000" dirty="0">
+                          <a:solidFill>
+                            <a:srgbClr val="1A1A1A"/>
+                          </a:solidFill>
+                          <a:latin typeface="Calibri" pitchFamily="34" charset="0"/>
+                          <a:ea typeface="Calibri" pitchFamily="34" charset="-122"/>
+                          <a:cs typeface="Calibri" pitchFamily="34" charset="-120"/>
+                        </a:rPr>
+                        <a:t>CLIPSeg at 0.1849</a:t>
+                      </a:r>
+                      <a:endParaRPr lang="en-US" sz="1000" dirty="0">
+                        <a:latin typeface="Calibri" charset="0"/>
+                        <a:ea typeface="Calibri" charset="0"/>
+                        <a:cs typeface="Calibri" charset="0"/>
+                      </a:endParaRPr>
+                    </a:p>
+                  </a:txBody>
+                  <a:tcPr marL="50800" marR="50800" marT="50800" marB="50800" anchor="t">
+                    <a:lnL w="6350" cap="flat" cmpd="sng" algn="ctr">
+                      <a:solidFill>
+                        <a:srgbClr val="DEDCD7"/>
+                      </a:solidFill>
+                      <a:prstDash val="solid"/>
+                      <a:round/>
+                      <a:headEnd type="none" w="med" len="med"/>
+                      <a:tailEnd type="none" w="med" len="med"/>
+                    </a:lnL>
+                    <a:lnR w="6350" cap="flat" cmpd="sng" algn="ctr">
+                      <a:solidFill>
+                        <a:srgbClr val="DEDCD7"/>
+                      </a:solidFill>
+                      <a:prstDash val="solid"/>
+                      <a:round/>
+                      <a:headEnd type="none" w="med" len="med"/>
+                      <a:tailEnd type="none" w="med" len="med"/>
+                    </a:lnR>
+                    <a:lnT w="6350" cap="flat" cmpd="sng" algn="ctr">
+                      <a:solidFill>
+                        <a:srgbClr val="DEDCD7"/>
+                      </a:solidFill>
+                      <a:prstDash val="solid"/>
+                      <a:round/>
+                      <a:headEnd type="none" w="med" len="med"/>
+                      <a:tailEnd type="none" w="med" len="med"/>
+                    </a:lnT>
+                    <a:lnB w="6350" cap="flat" cmpd="sng" algn="ctr">
+                      <a:solidFill>
+                        <a:srgbClr val="DEDCD7"/>
+                      </a:solidFill>
+                      <a:prstDash val="solid"/>
+                      <a:round/>
+                      <a:headEnd type="none" w="med" len="med"/>
+                      <a:tailEnd type="none" w="med" len="med"/>
+                    </a:lnB>
+                  </a:tcPr>
+                </a:tc>
+              </a:tr>
+            </a:tbl>
+          </a:graphicData>
+        </a:graphic>
+      </p:graphicFrame>
+      <p:sp>
+        <p:nvSpPr>
+          <p:cNvPr id="6" name="Text 3"/>
+          <p:cNvSpPr/>
+          <p:nvPr/>
+        </p:nvSpPr>
+        <p:spPr>
+          <a:xfrm>
+            <a:off x="777240" y="3794760"/>
+            <a:ext cx="8229600" cy="201168"/>
+          </a:xfrm>
+          <a:prstGeom prst="rect">
+            <a:avLst/>
+          </a:prstGeom>
+          <a:noFill/>
+          <a:ln/>
+        </p:spPr>
+        <p:txBody>
+          <a:bodyPr wrap="square" lIns="0" tIns="0" rIns="0" bIns="0" rtlCol="0" anchor="ctr"/>
+          <a:lstStyle/>
+          <a:p>
+            <a:pPr indent="0" marL="0">
+              <a:buNone/>
+            </a:pPr>
+            <a:r>
+              <a:rPr lang="en-US" sz="1050" b="1" spc="80" kern="0" dirty="0">
+                <a:solidFill>
+                  <a:srgbClr val="8C3A1E"/>
+                </a:solidFill>
+                <a:latin typeface="Calibri" pitchFamily="34" charset="0"/>
+                <a:ea typeface="Calibri" pitchFamily="34" charset="-122"/>
+                <a:cs typeface="Calibri" pitchFamily="34" charset="-120"/>
+              </a:rPr>
+              <a:t>The methodological bar this project already holds itself to</a:t>
+            </a:r>
+            <a:endParaRPr lang="en-US" sz="1050" dirty="0"/>
+          </a:p>
+        </p:txBody>
+      </p:sp>
+      <p:graphicFrame>
+        <p:nvGraphicFramePr>
+          <p:cNvPr id="21" name="Table 1"/>
+          <p:cNvGraphicFramePr>
+            <a:graphicFrameLocks noGrp="1"/>
+          </p:cNvGraphicFramePr>
+          <p:nvPr>
+            <p:extLst>
+              <p:ext uri="{D42A27DB-BD31-4B8C-83A1-F6EECF244321}">
+                <p14:modId xmlns:p14="http://schemas.microsoft.com/office/powerpoint/2010/main" val="1579011935"/>
+              </p:ext>
+            </p:extLst>
+          </p:nvPr>
+        </p:nvGraphicFramePr>
+        <p:xfrm>
+          <a:off x="777240" y="4050792"/>
+          <a:ext cx="10637215" cy="914400"/>
+        </p:xfrm>
+        <a:graphic>
+          <a:graphicData uri="http://schemas.openxmlformats.org/drawingml/2006/table">
+            <a:tbl>
+              <a:tblPr/>
+              <a:tblGrid>
+                <a:gridCol w="3566160"/>
+                <a:gridCol w="7068312"/>
+              </a:tblGrid>
+              <a:tr h="365760">
+                <a:tc>
+                  <a:txBody>
+                    <a:bodyPr/>
+                    <a:lstStyle/>
+                    <a:p>
+                      <a:pPr indent="0" marL="0">
+                        <a:buNone/>
+                      </a:pPr>
+                      <a:r>
+                        <a:rPr lang="en-US" sz="1000" b="1" dirty="0">
+                          <a:solidFill>
+                            <a:srgbClr val="1A1A1A"/>
+                          </a:solidFill>
+                          <a:latin typeface="Calibri" pitchFamily="34" charset="0"/>
+                          <a:ea typeface="Calibri" pitchFamily="34" charset="-122"/>
+                          <a:cs typeface="Calibri" pitchFamily="34" charset="-120"/>
+                        </a:rPr>
+                        <a:t>Every claim reports its ablation</a:t>
+                      </a:r>
+                      <a:endParaRPr lang="en-US" sz="1000" dirty="0">
+                        <a:latin typeface="Calibri" charset="0"/>
+                        <a:ea typeface="Calibri" charset="0"/>
+                        <a:cs typeface="Calibri" charset="0"/>
+                      </a:endParaRPr>
+                    </a:p>
+                  </a:txBody>
+                  <a:tcPr marL="50800" marR="50800" marT="50800" marB="50800" anchor="t">
+                    <a:lnL w="6350" cap="flat" cmpd="sng" algn="ctr">
+                      <a:solidFill>
+                        <a:srgbClr val="DEDCD7"/>
+                      </a:solidFill>
+                      <a:prstDash val="solid"/>
+                      <a:round/>
+                      <a:headEnd type="none" w="med" len="med"/>
+                      <a:tailEnd type="none" w="med" len="med"/>
+                    </a:lnL>
+                    <a:lnR w="6350" cap="flat" cmpd="sng" algn="ctr">
+                      <a:solidFill>
+                        <a:srgbClr val="DEDCD7"/>
+                      </a:solidFill>
+                      <a:prstDash val="solid"/>
+                      <a:round/>
+                      <a:headEnd type="none" w="med" len="med"/>
+                      <a:tailEnd type="none" w="med" len="med"/>
+                    </a:lnR>
+                    <a:lnT w="6350" cap="flat" cmpd="sng" algn="ctr">
+                      <a:solidFill>
+                        <a:srgbClr val="DEDCD7"/>
+                      </a:solidFill>
+                      <a:prstDash val="solid"/>
+                      <a:round/>
+                      <a:headEnd type="none" w="med" len="med"/>
+                      <a:tailEnd type="none" w="med" len="med"/>
+                    </a:lnT>
+                    <a:lnB w="6350" cap="flat" cmpd="sng" algn="ctr">
+                      <a:solidFill>
+                        <a:srgbClr val="DEDCD7"/>
+                      </a:solidFill>
+                      <a:prstDash val="solid"/>
+                      <a:round/>
+                      <a:headEnd type="none" w="med" len="med"/>
+                      <a:tailEnd type="none" w="med" len="med"/>
+                    </a:lnB>
+                    <a:solidFill>
+                      <a:srgbClr val="F6F5F2"/>
+                    </a:solidFill>
+                  </a:tcPr>
+                </a:tc>
+                <a:tc>
+                  <a:txBody>
+                    <a:bodyPr/>
+                    <a:lstStyle/>
+                    <a:p>
+                      <a:pPr indent="0" marL="0">
+                        <a:buNone/>
+                      </a:pPr>
+                      <a:r>
+                        <a:rPr lang="en-US" sz="1000" b="1" dirty="0">
+                          <a:solidFill>
+                            <a:srgbClr val="1A1A1A"/>
+                          </a:solidFill>
+                          <a:latin typeface="Calibri" pitchFamily="34" charset="0"/>
+                          <a:ea typeface="Calibri" pitchFamily="34" charset="-122"/>
+                          <a:cs typeface="Calibri" pitchFamily="34" charset="-120"/>
+                        </a:rPr>
+                        <a:t>a config scoring IoU 0.1429 with delta −0.0012 was a blob predictor ignoring the instruction</a:t>
+                      </a:r>
+                      <a:endParaRPr lang="en-US" sz="1000" dirty="0">
+                        <a:latin typeface="Calibri" charset="0"/>
+                        <a:ea typeface="Calibri" charset="0"/>
+                        <a:cs typeface="Calibri" charset="0"/>
+                      </a:endParaRPr>
+                    </a:p>
+                  </a:txBody>
+                  <a:tcPr marL="50800" marR="50800" marT="50800" marB="50800" anchor="t">
+                    <a:lnL w="6350" cap="flat" cmpd="sng" algn="ctr">
+                      <a:solidFill>
+                        <a:srgbClr val="DEDCD7"/>
+                      </a:solidFill>
+                      <a:prstDash val="solid"/>
+                      <a:round/>
+                      <a:headEnd type="none" w="med" len="med"/>
+                      <a:tailEnd type="none" w="med" len="med"/>
+                    </a:lnL>
+                    <a:lnR w="6350" cap="flat" cmpd="sng" algn="ctr">
+                      <a:solidFill>
+                        <a:srgbClr val="DEDCD7"/>
+                      </a:solidFill>
+                      <a:prstDash val="solid"/>
+                      <a:round/>
+                      <a:headEnd type="none" w="med" len="med"/>
+                      <a:tailEnd type="none" w="med" len="med"/>
+                    </a:lnR>
+                    <a:lnT w="6350" cap="flat" cmpd="sng" algn="ctr">
+                      <a:solidFill>
+                        <a:srgbClr val="DEDCD7"/>
+                      </a:solidFill>
+                      <a:prstDash val="solid"/>
+                      <a:round/>
+                      <a:headEnd type="none" w="med" len="med"/>
+                      <a:tailEnd type="none" w="med" len="med"/>
+                    </a:lnT>
+                    <a:lnB w="6350" cap="flat" cmpd="sng" algn="ctr">
+                      <a:solidFill>
+                        <a:srgbClr val="DEDCD7"/>
+                      </a:solidFill>
+                      <a:prstDash val="solid"/>
+                      <a:round/>
+                      <a:headEnd type="none" w="med" len="med"/>
+                      <a:tailEnd type="none" w="med" len="med"/>
+                    </a:lnB>
+                    <a:solidFill>
+                      <a:srgbClr val="F6F5F2"/>
+                    </a:solidFill>
+                  </a:tcPr>
+                </a:tc>
+              </a:tr>
+              <a:tr h="365760">
+                <a:tc>
+                  <a:txBody>
+                    <a:bodyPr/>
+                    <a:lstStyle/>
+                    <a:p>
+                      <a:pPr indent="0" marL="0">
+                        <a:buNone/>
+                      </a:pPr>
+                      <a:r>
+                        <a:rPr lang="en-US" sz="1000" dirty="0">
+                          <a:solidFill>
+                            <a:srgbClr val="1A1A1A"/>
+                          </a:solidFill>
+                          <a:latin typeface="Calibri" pitchFamily="34" charset="0"/>
+                          <a:ea typeface="Calibri" pitchFamily="34" charset="-122"/>
+                          <a:cs typeface="Calibri" pitchFamily="34" charset="-120"/>
+                        </a:rPr>
+                        <a:t>Every fix must beat its control</a:t>
+                      </a:r>
+                      <a:endParaRPr lang="en-US" sz="1000" dirty="0">
+                        <a:latin typeface="Calibri" charset="0"/>
+                        <a:ea typeface="Calibri" charset="0"/>
+                        <a:cs typeface="Calibri" charset="0"/>
+                      </a:endParaRPr>
+                    </a:p>
+                  </a:txBody>
+                  <a:tcPr marL="50800" marR="50800" marT="50800" marB="50800" anchor="t">
+                    <a:lnL w="6350" cap="flat" cmpd="sng" algn="ctr">
+                      <a:solidFill>
+                        <a:srgbClr val="DEDCD7"/>
+                      </a:solidFill>
+                      <a:prstDash val="solid"/>
+                      <a:round/>
+                      <a:headEnd type="none" w="med" len="med"/>
+                      <a:tailEnd type="none" w="med" len="med"/>
+                    </a:lnL>
+                    <a:lnR w="6350" cap="flat" cmpd="sng" algn="ctr">
+                      <a:solidFill>
+                        <a:srgbClr val="DEDCD7"/>
+                      </a:solidFill>
+                      <a:prstDash val="solid"/>
+                      <a:round/>
+                      <a:headEnd type="none" w="med" len="med"/>
+                      <a:tailEnd type="none" w="med" len="med"/>
+                    </a:lnR>
+                    <a:lnT w="6350" cap="flat" cmpd="sng" algn="ctr">
+                      <a:solidFill>
+                        <a:srgbClr val="DEDCD7"/>
+                      </a:solidFill>
+                      <a:prstDash val="solid"/>
+                      <a:round/>
+                      <a:headEnd type="none" w="med" len="med"/>
+                      <a:tailEnd type="none" w="med" len="med"/>
+                    </a:lnT>
+                    <a:lnB w="6350" cap="flat" cmpd="sng" algn="ctr">
+                      <a:solidFill>
+                        <a:srgbClr val="DEDCD7"/>
+                      </a:solidFill>
+                      <a:prstDash val="solid"/>
+                      <a:round/>
+                      <a:headEnd type="none" w="med" len="med"/>
+                      <a:tailEnd type="none" w="med" len="med"/>
+                    </a:lnB>
+                  </a:tcPr>
+                </a:tc>
+                <a:tc>
+                  <a:txBody>
+                    <a:bodyPr/>
+                    <a:lstStyle/>
+                    <a:p>
+                      <a:pPr indent="0" marL="0">
+                        <a:buNone/>
+                      </a:pPr>
+                      <a:r>
+                        <a:rPr lang="en-US" sz="1000" dirty="0">
+                          <a:solidFill>
+                            <a:srgbClr val="1A1A1A"/>
+                          </a:solidFill>
+                          <a:latin typeface="Calibri" pitchFamily="34" charset="0"/>
+                          <a:ea typeface="Calibri" pitchFamily="34" charset="-122"/>
+                          <a:cs typeface="Calibri" pitchFamily="34" charset="-120"/>
+                        </a:rPr>
+                        <a:t>free-space and geometric bases both lost to random noise and were dropped</a:t>
+                      </a:r>
+                      <a:endParaRPr lang="en-US" sz="1000" dirty="0">
+                        <a:latin typeface="Calibri" charset="0"/>
+                        <a:ea typeface="Calibri" charset="0"/>
+                        <a:cs typeface="Calibri" charset="0"/>
+                      </a:endParaRPr>
+                    </a:p>
+                  </a:txBody>
+                  <a:tcPr marL="50800" marR="50800" marT="50800" marB="50800" anchor="t">
+                    <a:lnL w="6350" cap="flat" cmpd="sng" algn="ctr">
+                      <a:solidFill>
+                        <a:srgbClr val="DEDCD7"/>
+                      </a:solidFill>
+                      <a:prstDash val="solid"/>
+                      <a:round/>
+                      <a:headEnd type="none" w="med" len="med"/>
+                      <a:tailEnd type="none" w="med" len="med"/>
+                    </a:lnL>
+                    <a:lnR w="6350" cap="flat" cmpd="sng" algn="ctr">
+                      <a:solidFill>
+                        <a:srgbClr val="DEDCD7"/>
+                      </a:solidFill>
+                      <a:prstDash val="solid"/>
+                      <a:round/>
+                      <a:headEnd type="none" w="med" len="med"/>
+                      <a:tailEnd type="none" w="med" len="med"/>
+                    </a:lnR>
+                    <a:lnT w="6350" cap="flat" cmpd="sng" algn="ctr">
+                      <a:solidFill>
+                        <a:srgbClr val="DEDCD7"/>
+                      </a:solidFill>
+                      <a:prstDash val="solid"/>
+                      <a:round/>
+                      <a:headEnd type="none" w="med" len="med"/>
+                      <a:tailEnd type="none" w="med" len="med"/>
+                    </a:lnT>
+                    <a:lnB w="6350" cap="flat" cmpd="sng" algn="ctr">
+                      <a:solidFill>
+                        <a:srgbClr val="DEDCD7"/>
+                      </a:solidFill>
+                      <a:prstDash val="solid"/>
+                      <a:round/>
+                      <a:headEnd type="none" w="med" len="med"/>
+                      <a:tailEnd type="none" w="med" len="med"/>
+                    </a:lnB>
+                  </a:tcPr>
+                </a:tc>
+              </a:tr>
+              <a:tr h="365760">
+                <a:tc>
+                  <a:txBody>
+                    <a:bodyPr/>
+                    <a:lstStyle/>
+                    <a:p>
+                      <a:pPr indent="0" marL="0">
+                        <a:buNone/>
+                      </a:pPr>
+                      <a:r>
+                        <a:rPr lang="en-US" sz="1000" dirty="0">
+                          <a:solidFill>
+                            <a:srgbClr val="1A1A1A"/>
+                          </a:solidFill>
+                          <a:latin typeface="Calibri" pitchFamily="34" charset="0"/>
+                          <a:ea typeface="Calibri" pitchFamily="34" charset="-122"/>
+                          <a:cs typeface="Calibri" pitchFamily="34" charset="-120"/>
+                        </a:rPr>
+                        <a:t>Every split is disjoint by construction</a:t>
+                      </a:r>
+                      <a:endParaRPr lang="en-US" sz="1000" dirty="0">
+                        <a:latin typeface="Calibri" charset="0"/>
+                        <a:ea typeface="Calibri" charset="0"/>
+                        <a:cs typeface="Calibri" charset="0"/>
+                      </a:endParaRPr>
+                    </a:p>
+                  </a:txBody>
+                  <a:tcPr marL="50800" marR="50800" marT="50800" marB="50800" anchor="t">
+                    <a:lnL w="6350" cap="flat" cmpd="sng" algn="ctr">
+                      <a:solidFill>
+                        <a:srgbClr val="DEDCD7"/>
+                      </a:solidFill>
+                      <a:prstDash val="solid"/>
+                      <a:round/>
+                      <a:headEnd type="none" w="med" len="med"/>
+                      <a:tailEnd type="none" w="med" len="med"/>
+                    </a:lnL>
+                    <a:lnR w="6350" cap="flat" cmpd="sng" algn="ctr">
+                      <a:solidFill>
+                        <a:srgbClr val="DEDCD7"/>
+                      </a:solidFill>
+                      <a:prstDash val="solid"/>
+                      <a:round/>
+                      <a:headEnd type="none" w="med" len="med"/>
+                      <a:tailEnd type="none" w="med" len="med"/>
+                    </a:lnR>
+                    <a:lnT w="6350" cap="flat" cmpd="sng" algn="ctr">
+                      <a:solidFill>
+                        <a:srgbClr val="DEDCD7"/>
+                      </a:solidFill>
+                      <a:prstDash val="solid"/>
+                      <a:round/>
+                      <a:headEnd type="none" w="med" len="med"/>
+                      <a:tailEnd type="none" w="med" len="med"/>
+                    </a:lnT>
+                    <a:lnB w="6350" cap="flat" cmpd="sng" algn="ctr">
+                      <a:solidFill>
+                        <a:srgbClr val="DEDCD7"/>
+                      </a:solidFill>
+                      <a:prstDash val="solid"/>
+                      <a:round/>
+                      <a:headEnd type="none" w="med" len="med"/>
+                      <a:tailEnd type="none" w="med" len="med"/>
+                    </a:lnB>
+                  </a:tcPr>
+                </a:tc>
+                <a:tc>
+                  <a:txBody>
+                    <a:bodyPr/>
+                    <a:lstStyle/>
+                    <a:p>
+                      <a:pPr indent="0" marL="0">
+                        <a:buNone/>
+                      </a:pPr>
+                      <a:r>
+                        <a:rPr lang="en-US" sz="1000" dirty="0">
+                          <a:solidFill>
+                            <a:srgbClr val="1A1A1A"/>
+                          </a:solidFill>
+                          <a:latin typeface="Calibri" pitchFamily="34" charset="0"/>
+                          <a:ea typeface="Calibri" pitchFamily="34" charset="-122"/>
+                          <a:cs typeface="Calibri" pitchFamily="34" charset="-120"/>
+                        </a:rPr>
+                        <a:t>train and dev come from different shard files, never merged</a:t>
+                      </a:r>
+                      <a:endParaRPr lang="en-US" sz="1000" dirty="0">
+                        <a:latin typeface="Calibri" charset="0"/>
+                        <a:ea typeface="Calibri" charset="0"/>
+                        <a:cs typeface="Calibri" charset="0"/>
+                      </a:endParaRPr>
+                    </a:p>
+                  </a:txBody>
+                  <a:tcPr marL="50800" marR="50800" marT="50800" marB="50800" anchor="t">
+                    <a:lnL w="6350" cap="flat" cmpd="sng" algn="ctr">
+                      <a:solidFill>
+                        <a:srgbClr val="DEDCD7"/>
+                      </a:solidFill>
+                      <a:prstDash val="solid"/>
+                      <a:round/>
+                      <a:headEnd type="none" w="med" len="med"/>
+                      <a:tailEnd type="none" w="med" len="med"/>
+                    </a:lnL>
+                    <a:lnR w="6350" cap="flat" cmpd="sng" algn="ctr">
+                      <a:solidFill>
+                        <a:srgbClr val="DEDCD7"/>
+                      </a:solidFill>
+                      <a:prstDash val="solid"/>
+                      <a:round/>
+                      <a:headEnd type="none" w="med" len="med"/>
+                      <a:tailEnd type="none" w="med" len="med"/>
+                    </a:lnR>
+                    <a:lnT w="6350" cap="flat" cmpd="sng" algn="ctr">
+                      <a:solidFill>
+                        <a:srgbClr val="DEDCD7"/>
+                      </a:solidFill>
+                      <a:prstDash val="solid"/>
+                      <a:round/>
+                      <a:headEnd type="none" w="med" len="med"/>
+                      <a:tailEnd type="none" w="med" len="med"/>
+                    </a:lnT>
+                    <a:lnB w="6350" cap="flat" cmpd="sng" algn="ctr">
+                      <a:solidFill>
+                        <a:srgbClr val="DEDCD7"/>
+                      </a:solidFill>
+                      <a:prstDash val="solid"/>
+                      <a:round/>
+                      <a:headEnd type="none" w="med" len="med"/>
+                      <a:tailEnd type="none" w="med" len="med"/>
+                    </a:lnB>
+                  </a:tcPr>
+                </a:tc>
+              </a:tr>
+              <a:tr h="365760">
+                <a:tc>
+                  <a:txBody>
+                    <a:bodyPr/>
+                    <a:lstStyle/>
+                    <a:p>
+                      <a:pPr indent="0" marL="0">
+                        <a:buNone/>
+                      </a:pPr>
+                      <a:r>
+                        <a:rPr lang="en-US" sz="1000" dirty="0">
+                          <a:solidFill>
+                            <a:srgbClr val="1A1A1A"/>
+                          </a:solidFill>
+                          <a:latin typeface="Calibri" pitchFamily="34" charset="0"/>
+                          <a:ea typeface="Calibri" pitchFamily="34" charset="-122"/>
+                          <a:cs typeface="Calibri" pitchFamily="34" charset="-120"/>
+                        </a:rPr>
+                        <a:t>Every figure regenerates from the data</a:t>
+                      </a:r>
+                      <a:endParaRPr lang="en-US" sz="1000" dirty="0">
+                        <a:latin typeface="Calibri" charset="0"/>
+                        <a:ea typeface="Calibri" charset="0"/>
+                        <a:cs typeface="Calibri" charset="0"/>
+                      </a:endParaRPr>
+                    </a:p>
+                  </a:txBody>
+                  <a:tcPr marL="50800" marR="50800" marT="50800" marB="50800" anchor="t">
+                    <a:lnL w="6350" cap="flat" cmpd="sng" algn="ctr">
+                      <a:solidFill>
+                        <a:srgbClr val="DEDCD7"/>
+                      </a:solidFill>
+                      <a:prstDash val="solid"/>
+                      <a:round/>
+                      <a:headEnd type="none" w="med" len="med"/>
+                      <a:tailEnd type="none" w="med" len="med"/>
+                    </a:lnL>
+                    <a:lnR w="6350" cap="flat" cmpd="sng" algn="ctr">
+                      <a:solidFill>
+                        <a:srgbClr val="DEDCD7"/>
+                      </a:solidFill>
+                      <a:prstDash val="solid"/>
+                      <a:round/>
+                      <a:headEnd type="none" w="med" len="med"/>
+                      <a:tailEnd type="none" w="med" len="med"/>
+                    </a:lnR>
+                    <a:lnT w="6350" cap="flat" cmpd="sng" algn="ctr">
+                      <a:solidFill>
+                        <a:srgbClr val="DEDCD7"/>
+                      </a:solidFill>
+                      <a:prstDash val="solid"/>
+                      <a:round/>
+                      <a:headEnd type="none" w="med" len="med"/>
+                      <a:tailEnd type="none" w="med" len="med"/>
+                    </a:lnT>
+                    <a:lnB w="6350" cap="flat" cmpd="sng" algn="ctr">
+                      <a:solidFill>
+                        <a:srgbClr val="DEDCD7"/>
+                      </a:solidFill>
+                      <a:prstDash val="solid"/>
+                      <a:round/>
+                      <a:headEnd type="none" w="med" len="med"/>
+                      <a:tailEnd type="none" w="med" len="med"/>
+                    </a:lnB>
+                  </a:tcPr>
+                </a:tc>
+                <a:tc>
+                  <a:txBody>
+                    <a:bodyPr/>
+                    <a:lstStyle/>
+                    <a:p>
+                      <a:pPr indent="0" marL="0">
+                        <a:buNone/>
+                      </a:pPr>
+                      <a:r>
+                        <a:rPr lang="en-US" sz="1000" dirty="0">
+                          <a:solidFill>
+                            <a:srgbClr val="1A1A1A"/>
+                          </a:solidFill>
+                          <a:latin typeface="Calibri" pitchFamily="34" charset="0"/>
+                          <a:ea typeface="Calibri" pitchFamily="34" charset="-122"/>
+                          <a:cs typeface="Calibri" pitchFamily="34" charset="-120"/>
+                        </a:rPr>
+                        <a:t>python train/figures.py reads only the committed result JSONs</a:t>
+                      </a:r>
+                      <a:endParaRPr lang="en-US" sz="1000" dirty="0">
+                        <a:latin typeface="Calibri" charset="0"/>
+                        <a:ea typeface="Calibri" charset="0"/>
+                        <a:cs typeface="Calibri" charset="0"/>
+                      </a:endParaRPr>
+                    </a:p>
+                  </a:txBody>
+                  <a:tcPr marL="50800" marR="50800" marT="50800" marB="50800" anchor="t">
+                    <a:lnL w="6350" cap="flat" cmpd="sng" algn="ctr">
+                      <a:solidFill>
+                        <a:srgbClr val="DEDCD7"/>
+                      </a:solidFill>
+                      <a:prstDash val="solid"/>
+                      <a:round/>
+                      <a:headEnd type="none" w="med" len="med"/>
+                      <a:tailEnd type="none" w="med" len="med"/>
+                    </a:lnL>
+                    <a:lnR w="6350" cap="flat" cmpd="sng" algn="ctr">
+                      <a:solidFill>
+                        <a:srgbClr val="DEDCD7"/>
+                      </a:solidFill>
+                      <a:prstDash val="solid"/>
+                      <a:round/>
+                      <a:headEnd type="none" w="med" len="med"/>
+                      <a:tailEnd type="none" w="med" len="med"/>
+                    </a:lnR>
+                    <a:lnT w="6350" cap="flat" cmpd="sng" algn="ctr">
+                      <a:solidFill>
+                        <a:srgbClr val="DEDCD7"/>
+                      </a:solidFill>
+                      <a:prstDash val="solid"/>
+                      <a:round/>
+                      <a:headEnd type="none" w="med" len="med"/>
+                      <a:tailEnd type="none" w="med" len="med"/>
+                    </a:lnT>
+                    <a:lnB w="6350" cap="flat" cmpd="sng" algn="ctr">
+                      <a:solidFill>
+                        <a:srgbClr val="DEDCD7"/>
+                      </a:solidFill>
+                      <a:prstDash val="solid"/>
+                      <a:round/>
+                      <a:headEnd type="none" w="med" len="med"/>
+                      <a:tailEnd type="none" w="med" len="med"/>
+                    </a:lnB>
+                  </a:tcPr>
+                </a:tc>
+              </a:tr>
+            </a:tbl>
+          </a:graphicData>
+        </a:graphic>
+      </p:graphicFrame>
+    </p:spTree>
+  </p:cSld>
+  <p:clrMapOvr>
+    <a:masterClrMapping/>
+  </p:clrMapOvr>
+</p:sld>
+</file>
+
+<file path=ppt/slides/slide11.xml><?xml version="1.0" encoding="utf-8"?>
+<p:sld xmlns:a="http://schemas.openxmlformats.org/drawingml/2006/main" xmlns:r="http://schemas.openxmlformats.org/officeDocument/2006/relationships" xmlns:p="http://schemas.openxmlformats.org/presentationml/2006/main">
+  <p:cSld name="Slide 11">
+    <p:bg>
+      <p:bgPr>
+        <a:solidFill>
+          <a:srgbClr val="FFFFFF"/>
+        </a:solidFill>
+      </p:bgPr>
+    </p:bg>
+    <p:spTree>
+      <p:nvGrpSpPr>
+        <p:cNvPr id="1" name=""/>
+        <p:cNvGrpSpPr/>
+        <p:nvPr/>
+      </p:nvGrpSpPr>
+      <p:grpSpPr>
+        <a:xfrm>
+          <a:off x="0" y="0"/>
+          <a:ext cx="0" cy="0"/>
+          <a:chOff x="0" y="0"/>
+          <a:chExt cx="0" cy="0"/>
+        </a:xfrm>
+      </p:grpSpPr>
+      <p:sp>
+        <p:nvSpPr>
           <p:cNvPr id="2" name="Shape 0"/>
           <p:cNvSpPr/>
           <p:nvPr/>
@@ -11664,6 +13578,2047 @@
                 <a:ea typeface="Calibri" pitchFamily="34" charset="-122"/>
                 <a:cs typeface="Calibri" pitchFamily="34" charset="-120"/>
               </a:rPr>
+              <a:t>STAGE 2</a:t>
+            </a:r>
+            <a:endParaRPr lang="en-US" sz="1000" dirty="0"/>
+          </a:p>
+        </p:txBody>
+      </p:sp>
+      <p:sp>
+        <p:nvSpPr>
+          <p:cNvPr id="3" name="Text 1"/>
+          <p:cNvSpPr/>
+          <p:nvPr/>
+        </p:nvSpPr>
+        <p:spPr>
+          <a:xfrm>
+            <a:off x="777240" y="585216"/>
+            <a:ext cx="10637215" cy="493776"/>
+          </a:xfrm>
+          <a:prstGeom prst="rect">
+            <a:avLst/>
+          </a:prstGeom>
+          <a:noFill/>
+          <a:ln/>
+        </p:spPr>
+        <p:txBody>
+          <a:bodyPr wrap="square" lIns="0" tIns="0" rIns="0" bIns="0" rtlCol="0" anchor="ctr"/>
+          <a:lstStyle/>
+          <a:p>
+            <a:pPr indent="0" marL="0">
+              <a:buNone/>
+            </a:pPr>
+            <a:r>
+              <a:rPr lang="en-US" sz="2600" b="1" dirty="0">
+                <a:solidFill>
+                  <a:srgbClr val="1A1A1A"/>
+                </a:solidFill>
+                <a:latin typeface="Cambria" pitchFamily="34" charset="0"/>
+                <a:ea typeface="Cambria" pitchFamily="34" charset="-122"/>
+                <a:cs typeface="Cambria" pitchFamily="34" charset="-120"/>
+              </a:rPr>
+              <a:t>Editing inside the predicted region — the premise, tested</a:t>
+            </a:r>
+            <a:endParaRPr lang="en-US" sz="2600" dirty="0"/>
+          </a:p>
+        </p:txBody>
+      </p:sp>
+      <p:sp>
+        <p:nvSpPr>
+          <p:cNvPr id="4" name="Text 2"/>
+          <p:cNvSpPr/>
+          <p:nvPr/>
+        </p:nvSpPr>
+        <p:spPr>
+          <a:xfrm>
+            <a:off x="777240" y="1115568"/>
+            <a:ext cx="10637215" cy="274320"/>
+          </a:xfrm>
+          <a:prstGeom prst="rect">
+            <a:avLst/>
+          </a:prstGeom>
+          <a:noFill/>
+          <a:ln/>
+        </p:spPr>
+        <p:txBody>
+          <a:bodyPr wrap="square" lIns="0" tIns="0" rIns="0" bIns="0" rtlCol="0" anchor="ctr"/>
+          <a:lstStyle/>
+          <a:p>
+            <a:pPr indent="0" marL="0">
+              <a:buNone/>
+            </a:pPr>
+            <a:r>
+              <a:rPr lang="en-US" sz="1200" dirty="0">
+                <a:solidFill>
+                  <a:srgbClr val="6E6E6E"/>
+                </a:solidFill>
+                <a:latin typeface="Calibri" pitchFamily="34" charset="0"/>
+                <a:ea typeface="Calibri" pitchFamily="34" charset="-122"/>
+                <a:cs typeface="Calibri" pitchFamily="34" charset="-120"/>
+              </a:rPr>
+              <a:t>60 held-out dev samples · one editor (InstructPix2Pix), only the gating mask varies</a:t>
+            </a:r>
+            <a:endParaRPr lang="en-US" sz="1200" dirty="0"/>
+          </a:p>
+        </p:txBody>
+      </p:sp>
+      <p:sp>
+        <p:nvSpPr>
+          <p:cNvPr id="5" name="Shape 3"/>
+          <p:cNvSpPr/>
+          <p:nvPr/>
+        </p:nvSpPr>
+        <p:spPr>
+          <a:xfrm>
+            <a:off x="777240" y="1444752"/>
+            <a:ext cx="10637215" cy="10973"/>
+          </a:xfrm>
+          <a:prstGeom prst="rect">
+            <a:avLst/>
+          </a:prstGeom>
+          <a:solidFill>
+            <a:srgbClr val="DEDCD7"/>
+          </a:solidFill>
+          <a:ln/>
+        </p:spPr>
+      </p:sp>
+      <p:graphicFrame>
+        <p:nvGraphicFramePr>
+          <p:cNvPr id="9" name="Table 0"/>
+          <p:cNvGraphicFramePr>
+            <a:graphicFrameLocks noGrp="1"/>
+          </p:cNvGraphicFramePr>
+          <p:nvPr>
+            <p:extLst>
+              <p:ext uri="{D42A27DB-BD31-4B8C-83A1-F6EECF244321}">
+                <p14:modId xmlns:p14="http://schemas.microsoft.com/office/powerpoint/2010/main" val="1579011935"/>
+              </p:ext>
+            </p:extLst>
+          </p:nvPr>
+        </p:nvGraphicFramePr>
+        <p:xfrm>
+          <a:off x="777240" y="1719072"/>
+          <a:ext cx="10637215" cy="914400"/>
+        </p:xfrm>
+        <a:graphic>
+          <a:graphicData uri="http://schemas.openxmlformats.org/drawingml/2006/table">
+            <a:tbl>
+              <a:tblPr/>
+              <a:tblGrid>
+                <a:gridCol w="3840480"/>
+                <a:gridCol w="2377440"/>
+                <a:gridCol w="2377440"/>
+                <a:gridCol w="2039112"/>
+              </a:tblGrid>
+              <a:tr h="365760">
+                <a:tc>
+                  <a:txBody>
+                    <a:bodyPr/>
+                    <a:lstStyle/>
+                    <a:p>
+                      <a:pPr indent="0" marL="0">
+                        <a:buNone/>
+                      </a:pPr>
+                      <a:r>
+                        <a:rPr lang="en-US" sz="1050" b="1" dirty="0">
+                          <a:solidFill>
+                            <a:srgbClr val="1A1A1A"/>
+                          </a:solidFill>
+                          <a:latin typeface="Calibri" pitchFamily="34" charset="0"/>
+                          <a:ea typeface="Calibri" pitchFamily="34" charset="-122"/>
+                          <a:cs typeface="Calibri" pitchFamily="34" charset="-120"/>
+                        </a:rPr>
+                        <a:t>gating mask</a:t>
+                      </a:r>
+                      <a:endParaRPr lang="en-US" sz="1050" dirty="0">
+                        <a:latin typeface="Calibri" charset="0"/>
+                        <a:ea typeface="Calibri" charset="0"/>
+                        <a:cs typeface="Calibri" charset="0"/>
+                      </a:endParaRPr>
+                    </a:p>
+                  </a:txBody>
+                  <a:tcPr marL="50800" marR="50800" marT="50800" marB="50800" anchor="t">
+                    <a:lnL w="6350" cap="flat" cmpd="sng" algn="ctr">
+                      <a:solidFill>
+                        <a:srgbClr val="DEDCD7"/>
+                      </a:solidFill>
+                      <a:prstDash val="solid"/>
+                      <a:round/>
+                      <a:headEnd type="none" w="med" len="med"/>
+                      <a:tailEnd type="none" w="med" len="med"/>
+                    </a:lnL>
+                    <a:lnR w="6350" cap="flat" cmpd="sng" algn="ctr">
+                      <a:solidFill>
+                        <a:srgbClr val="DEDCD7"/>
+                      </a:solidFill>
+                      <a:prstDash val="solid"/>
+                      <a:round/>
+                      <a:headEnd type="none" w="med" len="med"/>
+                      <a:tailEnd type="none" w="med" len="med"/>
+                    </a:lnR>
+                    <a:lnT w="6350" cap="flat" cmpd="sng" algn="ctr">
+                      <a:solidFill>
+                        <a:srgbClr val="DEDCD7"/>
+                      </a:solidFill>
+                      <a:prstDash val="solid"/>
+                      <a:round/>
+                      <a:headEnd type="none" w="med" len="med"/>
+                      <a:tailEnd type="none" w="med" len="med"/>
+                    </a:lnT>
+                    <a:lnB w="6350" cap="flat" cmpd="sng" algn="ctr">
+                      <a:solidFill>
+                        <a:srgbClr val="DEDCD7"/>
+                      </a:solidFill>
+                      <a:prstDash val="solid"/>
+                      <a:round/>
+                      <a:headEnd type="none" w="med" len="med"/>
+                      <a:tailEnd type="none" w="med" len="med"/>
+                    </a:lnB>
+                    <a:solidFill>
+                      <a:srgbClr val="F6F5F2"/>
+                    </a:solidFill>
+                  </a:tcPr>
+                </a:tc>
+                <a:tc>
+                  <a:txBody>
+                    <a:bodyPr/>
+                    <a:lstStyle/>
+                    <a:p>
+                      <a:pPr algn="ctr" indent="0" marL="0">
+                        <a:buNone/>
+                      </a:pPr>
+                      <a:r>
+                        <a:rPr lang="en-US" sz="1050" b="1" dirty="0">
+                          <a:solidFill>
+                            <a:srgbClr val="1A1A1A"/>
+                          </a:solidFill>
+                          <a:latin typeface="Calibri" pitchFamily="34" charset="0"/>
+                          <a:ea typeface="Calibri" pitchFamily="34" charset="-122"/>
+                          <a:cs typeface="Calibri" pitchFamily="34" charset="-120"/>
+                        </a:rPr>
+                        <a:t>recall of the edit ↑</a:t>
+                      </a:r>
+                      <a:endParaRPr lang="en-US" sz="1050" dirty="0">
+                        <a:latin typeface="Calibri" charset="0"/>
+                        <a:ea typeface="Calibri" charset="0"/>
+                        <a:cs typeface="Calibri" charset="0"/>
+                      </a:endParaRPr>
+                    </a:p>
+                  </a:txBody>
+                  <a:tcPr marL="50800" marR="50800" marT="50800" marB="50800" anchor="t">
+                    <a:lnL w="6350" cap="flat" cmpd="sng" algn="ctr">
+                      <a:solidFill>
+                        <a:srgbClr val="DEDCD7"/>
+                      </a:solidFill>
+                      <a:prstDash val="solid"/>
+                      <a:round/>
+                      <a:headEnd type="none" w="med" len="med"/>
+                      <a:tailEnd type="none" w="med" len="med"/>
+                    </a:lnL>
+                    <a:lnR w="6350" cap="flat" cmpd="sng" algn="ctr">
+                      <a:solidFill>
+                        <a:srgbClr val="DEDCD7"/>
+                      </a:solidFill>
+                      <a:prstDash val="solid"/>
+                      <a:round/>
+                      <a:headEnd type="none" w="med" len="med"/>
+                      <a:tailEnd type="none" w="med" len="med"/>
+                    </a:lnR>
+                    <a:lnT w="6350" cap="flat" cmpd="sng" algn="ctr">
+                      <a:solidFill>
+                        <a:srgbClr val="DEDCD7"/>
+                      </a:solidFill>
+                      <a:prstDash val="solid"/>
+                      <a:round/>
+                      <a:headEnd type="none" w="med" len="med"/>
+                      <a:tailEnd type="none" w="med" len="med"/>
+                    </a:lnT>
+                    <a:lnB w="6350" cap="flat" cmpd="sng" algn="ctr">
+                      <a:solidFill>
+                        <a:srgbClr val="DEDCD7"/>
+                      </a:solidFill>
+                      <a:prstDash val="solid"/>
+                      <a:round/>
+                      <a:headEnd type="none" w="med" len="med"/>
+                      <a:tailEnd type="none" w="med" len="med"/>
+                    </a:lnB>
+                    <a:solidFill>
+                      <a:srgbClr val="F6F5F2"/>
+                    </a:solidFill>
+                  </a:tcPr>
+                </a:tc>
+                <a:tc>
+                  <a:txBody>
+                    <a:bodyPr/>
+                    <a:lstStyle/>
+                    <a:p>
+                      <a:pPr algn="ctr" indent="0" marL="0">
+                        <a:buNone/>
+                      </a:pPr>
+                      <a:r>
+                        <a:rPr lang="en-US" sz="1050" b="1" dirty="0">
+                          <a:solidFill>
+                            <a:srgbClr val="1A1A1A"/>
+                          </a:solidFill>
+                          <a:latin typeface="Calibri" pitchFamily="34" charset="0"/>
+                          <a:ea typeface="Calibri" pitchFamily="34" charset="-122"/>
+                          <a:cs typeface="Calibri" pitchFamily="34" charset="-120"/>
+                        </a:rPr>
+                        <a:t>collateral change ↓</a:t>
+                      </a:r>
+                      <a:endParaRPr lang="en-US" sz="1050" dirty="0">
+                        <a:latin typeface="Calibri" charset="0"/>
+                        <a:ea typeface="Calibri" charset="0"/>
+                        <a:cs typeface="Calibri" charset="0"/>
+                      </a:endParaRPr>
+                    </a:p>
+                  </a:txBody>
+                  <a:tcPr marL="50800" marR="50800" marT="50800" marB="50800" anchor="t">
+                    <a:lnL w="6350" cap="flat" cmpd="sng" algn="ctr">
+                      <a:solidFill>
+                        <a:srgbClr val="DEDCD7"/>
+                      </a:solidFill>
+                      <a:prstDash val="solid"/>
+                      <a:round/>
+                      <a:headEnd type="none" w="med" len="med"/>
+                      <a:tailEnd type="none" w="med" len="med"/>
+                    </a:lnL>
+                    <a:lnR w="6350" cap="flat" cmpd="sng" algn="ctr">
+                      <a:solidFill>
+                        <a:srgbClr val="DEDCD7"/>
+                      </a:solidFill>
+                      <a:prstDash val="solid"/>
+                      <a:round/>
+                      <a:headEnd type="none" w="med" len="med"/>
+                      <a:tailEnd type="none" w="med" len="med"/>
+                    </a:lnR>
+                    <a:lnT w="6350" cap="flat" cmpd="sng" algn="ctr">
+                      <a:solidFill>
+                        <a:srgbClr val="DEDCD7"/>
+                      </a:solidFill>
+                      <a:prstDash val="solid"/>
+                      <a:round/>
+                      <a:headEnd type="none" w="med" len="med"/>
+                      <a:tailEnd type="none" w="med" len="med"/>
+                    </a:lnT>
+                    <a:lnB w="6350" cap="flat" cmpd="sng" algn="ctr">
+                      <a:solidFill>
+                        <a:srgbClr val="DEDCD7"/>
+                      </a:solidFill>
+                      <a:prstDash val="solid"/>
+                      <a:round/>
+                      <a:headEnd type="none" w="med" len="med"/>
+                      <a:tailEnd type="none" w="med" len="med"/>
+                    </a:lnB>
+                    <a:solidFill>
+                      <a:srgbClr val="F6F5F2"/>
+                    </a:solidFill>
+                  </a:tcPr>
+                </a:tc>
+                <a:tc>
+                  <a:txBody>
+                    <a:bodyPr/>
+                    <a:lstStyle/>
+                    <a:p>
+                      <a:pPr algn="ctr" indent="0" marL="0">
+                        <a:buNone/>
+                      </a:pPr>
+                      <a:r>
+                        <a:rPr lang="en-US" sz="1050" b="1" dirty="0">
+                          <a:solidFill>
+                            <a:srgbClr val="1A1A1A"/>
+                          </a:solidFill>
+                          <a:latin typeface="Calibri" pitchFamily="34" charset="0"/>
+                          <a:ea typeface="Calibri" pitchFamily="34" charset="-122"/>
+                          <a:cs typeface="Calibri" pitchFamily="34" charset="-120"/>
+                        </a:rPr>
+                        <a:t>net ↑</a:t>
+                      </a:r>
+                      <a:endParaRPr lang="en-US" sz="1050" dirty="0">
+                        <a:latin typeface="Calibri" charset="0"/>
+                        <a:ea typeface="Calibri" charset="0"/>
+                        <a:cs typeface="Calibri" charset="0"/>
+                      </a:endParaRPr>
+                    </a:p>
+                  </a:txBody>
+                  <a:tcPr marL="50800" marR="50800" marT="50800" marB="50800" anchor="t">
+                    <a:lnL w="6350" cap="flat" cmpd="sng" algn="ctr">
+                      <a:solidFill>
+                        <a:srgbClr val="DEDCD7"/>
+                      </a:solidFill>
+                      <a:prstDash val="solid"/>
+                      <a:round/>
+                      <a:headEnd type="none" w="med" len="med"/>
+                      <a:tailEnd type="none" w="med" len="med"/>
+                    </a:lnL>
+                    <a:lnR w="6350" cap="flat" cmpd="sng" algn="ctr">
+                      <a:solidFill>
+                        <a:srgbClr val="DEDCD7"/>
+                      </a:solidFill>
+                      <a:prstDash val="solid"/>
+                      <a:round/>
+                      <a:headEnd type="none" w="med" len="med"/>
+                      <a:tailEnd type="none" w="med" len="med"/>
+                    </a:lnR>
+                    <a:lnT w="6350" cap="flat" cmpd="sng" algn="ctr">
+                      <a:solidFill>
+                        <a:srgbClr val="DEDCD7"/>
+                      </a:solidFill>
+                      <a:prstDash val="solid"/>
+                      <a:round/>
+                      <a:headEnd type="none" w="med" len="med"/>
+                      <a:tailEnd type="none" w="med" len="med"/>
+                    </a:lnT>
+                    <a:lnB w="6350" cap="flat" cmpd="sng" algn="ctr">
+                      <a:solidFill>
+                        <a:srgbClr val="DEDCD7"/>
+                      </a:solidFill>
+                      <a:prstDash val="solid"/>
+                      <a:round/>
+                      <a:headEnd type="none" w="med" len="med"/>
+                      <a:tailEnd type="none" w="med" len="med"/>
+                    </a:lnB>
+                    <a:solidFill>
+                      <a:srgbClr val="F6F5F2"/>
+                    </a:solidFill>
+                  </a:tcPr>
+                </a:tc>
+              </a:tr>
+              <a:tr h="365760">
+                <a:tc>
+                  <a:txBody>
+                    <a:bodyPr/>
+                    <a:lstStyle/>
+                    <a:p>
+                      <a:pPr indent="0" marL="0">
+                        <a:buNone/>
+                      </a:pPr>
+                      <a:r>
+                        <a:rPr lang="en-US" sz="1050" dirty="0">
+                          <a:solidFill>
+                            <a:srgbClr val="1A1A1A"/>
+                          </a:solidFill>
+                          <a:latin typeface="Calibri" pitchFamily="34" charset="0"/>
+                          <a:ea typeface="Calibri" pitchFamily="34" charset="-122"/>
+                          <a:cs typeface="Calibri" pitchFamily="34" charset="-120"/>
+                        </a:rPr>
+                        <a:t>none — whole frame</a:t>
+                      </a:r>
+                      <a:endParaRPr lang="en-US" sz="1050" dirty="0">
+                        <a:latin typeface="Calibri" charset="0"/>
+                        <a:ea typeface="Calibri" charset="0"/>
+                        <a:cs typeface="Calibri" charset="0"/>
+                      </a:endParaRPr>
+                    </a:p>
+                  </a:txBody>
+                  <a:tcPr marL="50800" marR="50800" marT="50800" marB="50800" anchor="t">
+                    <a:lnL w="6350" cap="flat" cmpd="sng" algn="ctr">
+                      <a:solidFill>
+                        <a:srgbClr val="DEDCD7"/>
+                      </a:solidFill>
+                      <a:prstDash val="solid"/>
+                      <a:round/>
+                      <a:headEnd type="none" w="med" len="med"/>
+                      <a:tailEnd type="none" w="med" len="med"/>
+                    </a:lnL>
+                    <a:lnR w="6350" cap="flat" cmpd="sng" algn="ctr">
+                      <a:solidFill>
+                        <a:srgbClr val="DEDCD7"/>
+                      </a:solidFill>
+                      <a:prstDash val="solid"/>
+                      <a:round/>
+                      <a:headEnd type="none" w="med" len="med"/>
+                      <a:tailEnd type="none" w="med" len="med"/>
+                    </a:lnR>
+                    <a:lnT w="6350" cap="flat" cmpd="sng" algn="ctr">
+                      <a:solidFill>
+                        <a:srgbClr val="DEDCD7"/>
+                      </a:solidFill>
+                      <a:prstDash val="solid"/>
+                      <a:round/>
+                      <a:headEnd type="none" w="med" len="med"/>
+                      <a:tailEnd type="none" w="med" len="med"/>
+                    </a:lnT>
+                    <a:lnB w="6350" cap="flat" cmpd="sng" algn="ctr">
+                      <a:solidFill>
+                        <a:srgbClr val="DEDCD7"/>
+                      </a:solidFill>
+                      <a:prstDash val="solid"/>
+                      <a:round/>
+                      <a:headEnd type="none" w="med" len="med"/>
+                      <a:tailEnd type="none" w="med" len="med"/>
+                    </a:lnB>
+                  </a:tcPr>
+                </a:tc>
+                <a:tc>
+                  <a:txBody>
+                    <a:bodyPr/>
+                    <a:lstStyle/>
+                    <a:p>
+                      <a:pPr algn="ctr" indent="0" marL="0">
+                        <a:buNone/>
+                      </a:pPr>
+                      <a:r>
+                        <a:rPr lang="en-US" sz="1050" dirty="0">
+                          <a:solidFill>
+                            <a:srgbClr val="1A1A1A"/>
+                          </a:solidFill>
+                          <a:latin typeface="Calibri" pitchFamily="34" charset="0"/>
+                          <a:ea typeface="Calibri" pitchFamily="34" charset="-122"/>
+                          <a:cs typeface="Calibri" pitchFamily="34" charset="-120"/>
+                        </a:rPr>
+                        <a:t>33.3%</a:t>
+                      </a:r>
+                      <a:endParaRPr lang="en-US" sz="1050" dirty="0">
+                        <a:latin typeface="Calibri" charset="0"/>
+                        <a:ea typeface="Calibri" charset="0"/>
+                        <a:cs typeface="Calibri" charset="0"/>
+                      </a:endParaRPr>
+                    </a:p>
+                  </a:txBody>
+                  <a:tcPr marL="50800" marR="50800" marT="50800" marB="50800" anchor="t">
+                    <a:lnL w="6350" cap="flat" cmpd="sng" algn="ctr">
+                      <a:solidFill>
+                        <a:srgbClr val="DEDCD7"/>
+                      </a:solidFill>
+                      <a:prstDash val="solid"/>
+                      <a:round/>
+                      <a:headEnd type="none" w="med" len="med"/>
+                      <a:tailEnd type="none" w="med" len="med"/>
+                    </a:lnL>
+                    <a:lnR w="6350" cap="flat" cmpd="sng" algn="ctr">
+                      <a:solidFill>
+                        <a:srgbClr val="DEDCD7"/>
+                      </a:solidFill>
+                      <a:prstDash val="solid"/>
+                      <a:round/>
+                      <a:headEnd type="none" w="med" len="med"/>
+                      <a:tailEnd type="none" w="med" len="med"/>
+                    </a:lnR>
+                    <a:lnT w="6350" cap="flat" cmpd="sng" algn="ctr">
+                      <a:solidFill>
+                        <a:srgbClr val="DEDCD7"/>
+                      </a:solidFill>
+                      <a:prstDash val="solid"/>
+                      <a:round/>
+                      <a:headEnd type="none" w="med" len="med"/>
+                      <a:tailEnd type="none" w="med" len="med"/>
+                    </a:lnT>
+                    <a:lnB w="6350" cap="flat" cmpd="sng" algn="ctr">
+                      <a:solidFill>
+                        <a:srgbClr val="DEDCD7"/>
+                      </a:solidFill>
+                      <a:prstDash val="solid"/>
+                      <a:round/>
+                      <a:headEnd type="none" w="med" len="med"/>
+                      <a:tailEnd type="none" w="med" len="med"/>
+                    </a:lnB>
+                  </a:tcPr>
+                </a:tc>
+                <a:tc>
+                  <a:txBody>
+                    <a:bodyPr/>
+                    <a:lstStyle/>
+                    <a:p>
+                      <a:pPr algn="ctr" indent="0" marL="0">
+                        <a:buNone/>
+                      </a:pPr>
+                      <a:r>
+                        <a:rPr lang="en-US" sz="1050" dirty="0">
+                          <a:solidFill>
+                            <a:srgbClr val="1A1A1A"/>
+                          </a:solidFill>
+                          <a:latin typeface="Calibri" pitchFamily="34" charset="0"/>
+                          <a:ea typeface="Calibri" pitchFamily="34" charset="-122"/>
+                          <a:cs typeface="Calibri" pitchFamily="34" charset="-120"/>
+                        </a:rPr>
+                        <a:t>24.2%</a:t>
+                      </a:r>
+                      <a:endParaRPr lang="en-US" sz="1050" dirty="0">
+                        <a:latin typeface="Calibri" charset="0"/>
+                        <a:ea typeface="Calibri" charset="0"/>
+                        <a:cs typeface="Calibri" charset="0"/>
+                      </a:endParaRPr>
+                    </a:p>
+                  </a:txBody>
+                  <a:tcPr marL="50800" marR="50800" marT="50800" marB="50800" anchor="t">
+                    <a:lnL w="6350" cap="flat" cmpd="sng" algn="ctr">
+                      <a:solidFill>
+                        <a:srgbClr val="DEDCD7"/>
+                      </a:solidFill>
+                      <a:prstDash val="solid"/>
+                      <a:round/>
+                      <a:headEnd type="none" w="med" len="med"/>
+                      <a:tailEnd type="none" w="med" len="med"/>
+                    </a:lnL>
+                    <a:lnR w="6350" cap="flat" cmpd="sng" algn="ctr">
+                      <a:solidFill>
+                        <a:srgbClr val="DEDCD7"/>
+                      </a:solidFill>
+                      <a:prstDash val="solid"/>
+                      <a:round/>
+                      <a:headEnd type="none" w="med" len="med"/>
+                      <a:tailEnd type="none" w="med" len="med"/>
+                    </a:lnR>
+                    <a:lnT w="6350" cap="flat" cmpd="sng" algn="ctr">
+                      <a:solidFill>
+                        <a:srgbClr val="DEDCD7"/>
+                      </a:solidFill>
+                      <a:prstDash val="solid"/>
+                      <a:round/>
+                      <a:headEnd type="none" w="med" len="med"/>
+                      <a:tailEnd type="none" w="med" len="med"/>
+                    </a:lnT>
+                    <a:lnB w="6350" cap="flat" cmpd="sng" algn="ctr">
+                      <a:solidFill>
+                        <a:srgbClr val="DEDCD7"/>
+                      </a:solidFill>
+                      <a:prstDash val="solid"/>
+                      <a:round/>
+                      <a:headEnd type="none" w="med" len="med"/>
+                      <a:tailEnd type="none" w="med" len="med"/>
+                    </a:lnB>
+                  </a:tcPr>
+                </a:tc>
+                <a:tc>
+                  <a:txBody>
+                    <a:bodyPr/>
+                    <a:lstStyle/>
+                    <a:p>
+                      <a:pPr algn="ctr" indent="0" marL="0">
+                        <a:buNone/>
+                      </a:pPr>
+                      <a:r>
+                        <a:rPr lang="en-US" sz="1050" dirty="0">
+                          <a:solidFill>
+                            <a:srgbClr val="1A1A1A"/>
+                          </a:solidFill>
+                          <a:latin typeface="Calibri" pitchFamily="34" charset="0"/>
+                          <a:ea typeface="Calibri" pitchFamily="34" charset="-122"/>
+                          <a:cs typeface="Calibri" pitchFamily="34" charset="-120"/>
+                        </a:rPr>
+                        <a:t>+9.1%</a:t>
+                      </a:r>
+                      <a:endParaRPr lang="en-US" sz="1050" dirty="0">
+                        <a:latin typeface="Calibri" charset="0"/>
+                        <a:ea typeface="Calibri" charset="0"/>
+                        <a:cs typeface="Calibri" charset="0"/>
+                      </a:endParaRPr>
+                    </a:p>
+                  </a:txBody>
+                  <a:tcPr marL="50800" marR="50800" marT="50800" marB="50800" anchor="t">
+                    <a:lnL w="6350" cap="flat" cmpd="sng" algn="ctr">
+                      <a:solidFill>
+                        <a:srgbClr val="DEDCD7"/>
+                      </a:solidFill>
+                      <a:prstDash val="solid"/>
+                      <a:round/>
+                      <a:headEnd type="none" w="med" len="med"/>
+                      <a:tailEnd type="none" w="med" len="med"/>
+                    </a:lnL>
+                    <a:lnR w="6350" cap="flat" cmpd="sng" algn="ctr">
+                      <a:solidFill>
+                        <a:srgbClr val="DEDCD7"/>
+                      </a:solidFill>
+                      <a:prstDash val="solid"/>
+                      <a:round/>
+                      <a:headEnd type="none" w="med" len="med"/>
+                      <a:tailEnd type="none" w="med" len="med"/>
+                    </a:lnR>
+                    <a:lnT w="6350" cap="flat" cmpd="sng" algn="ctr">
+                      <a:solidFill>
+                        <a:srgbClr val="DEDCD7"/>
+                      </a:solidFill>
+                      <a:prstDash val="solid"/>
+                      <a:round/>
+                      <a:headEnd type="none" w="med" len="med"/>
+                      <a:tailEnd type="none" w="med" len="med"/>
+                    </a:lnT>
+                    <a:lnB w="6350" cap="flat" cmpd="sng" algn="ctr">
+                      <a:solidFill>
+                        <a:srgbClr val="DEDCD7"/>
+                      </a:solidFill>
+                      <a:prstDash val="solid"/>
+                      <a:round/>
+                      <a:headEnd type="none" w="med" len="med"/>
+                      <a:tailEnd type="none" w="med" len="med"/>
+                    </a:lnB>
+                  </a:tcPr>
+                </a:tc>
+              </a:tr>
+              <a:tr h="365760">
+                <a:tc>
+                  <a:txBody>
+                    <a:bodyPr/>
+                    <a:lstStyle/>
+                    <a:p>
+                      <a:pPr indent="0" marL="0">
+                        <a:buNone/>
+                      </a:pPr>
+                      <a:r>
+                        <a:rPr lang="en-US" sz="1050" dirty="0">
+                          <a:solidFill>
+                            <a:srgbClr val="1A1A1A"/>
+                          </a:solidFill>
+                          <a:latin typeface="Calibri" pitchFamily="34" charset="0"/>
+                          <a:ea typeface="Calibri" pitchFamily="34" charset="-122"/>
+                          <a:cs typeface="Calibri" pitchFamily="34" charset="-120"/>
+                        </a:rPr>
+                        <a:t>ours, as predicted</a:t>
+                      </a:r>
+                      <a:endParaRPr lang="en-US" sz="1050" dirty="0">
+                        <a:latin typeface="Calibri" charset="0"/>
+                        <a:ea typeface="Calibri" charset="0"/>
+                        <a:cs typeface="Calibri" charset="0"/>
+                      </a:endParaRPr>
+                    </a:p>
+                  </a:txBody>
+                  <a:tcPr marL="50800" marR="50800" marT="50800" marB="50800" anchor="t">
+                    <a:lnL w="6350" cap="flat" cmpd="sng" algn="ctr">
+                      <a:solidFill>
+                        <a:srgbClr val="DEDCD7"/>
+                      </a:solidFill>
+                      <a:prstDash val="solid"/>
+                      <a:round/>
+                      <a:headEnd type="none" w="med" len="med"/>
+                      <a:tailEnd type="none" w="med" len="med"/>
+                    </a:lnL>
+                    <a:lnR w="6350" cap="flat" cmpd="sng" algn="ctr">
+                      <a:solidFill>
+                        <a:srgbClr val="DEDCD7"/>
+                      </a:solidFill>
+                      <a:prstDash val="solid"/>
+                      <a:round/>
+                      <a:headEnd type="none" w="med" len="med"/>
+                      <a:tailEnd type="none" w="med" len="med"/>
+                    </a:lnR>
+                    <a:lnT w="6350" cap="flat" cmpd="sng" algn="ctr">
+                      <a:solidFill>
+                        <a:srgbClr val="DEDCD7"/>
+                      </a:solidFill>
+                      <a:prstDash val="solid"/>
+                      <a:round/>
+                      <a:headEnd type="none" w="med" len="med"/>
+                      <a:tailEnd type="none" w="med" len="med"/>
+                    </a:lnT>
+                    <a:lnB w="6350" cap="flat" cmpd="sng" algn="ctr">
+                      <a:solidFill>
+                        <a:srgbClr val="DEDCD7"/>
+                      </a:solidFill>
+                      <a:prstDash val="solid"/>
+                      <a:round/>
+                      <a:headEnd type="none" w="med" len="med"/>
+                      <a:tailEnd type="none" w="med" len="med"/>
+                    </a:lnB>
+                  </a:tcPr>
+                </a:tc>
+                <a:tc>
+                  <a:txBody>
+                    <a:bodyPr/>
+                    <a:lstStyle/>
+                    <a:p>
+                      <a:pPr algn="ctr" indent="0" marL="0">
+                        <a:buNone/>
+                      </a:pPr>
+                      <a:r>
+                        <a:rPr lang="en-US" sz="1050" dirty="0">
+                          <a:solidFill>
+                            <a:srgbClr val="1A1A1A"/>
+                          </a:solidFill>
+                          <a:latin typeface="Calibri" pitchFamily="34" charset="0"/>
+                          <a:ea typeface="Calibri" pitchFamily="34" charset="-122"/>
+                          <a:cs typeface="Calibri" pitchFamily="34" charset="-120"/>
+                        </a:rPr>
+                        <a:t>7.5%</a:t>
+                      </a:r>
+                      <a:endParaRPr lang="en-US" sz="1050" dirty="0">
+                        <a:latin typeface="Calibri" charset="0"/>
+                        <a:ea typeface="Calibri" charset="0"/>
+                        <a:cs typeface="Calibri" charset="0"/>
+                      </a:endParaRPr>
+                    </a:p>
+                  </a:txBody>
+                  <a:tcPr marL="50800" marR="50800" marT="50800" marB="50800" anchor="t">
+                    <a:lnL w="6350" cap="flat" cmpd="sng" algn="ctr">
+                      <a:solidFill>
+                        <a:srgbClr val="DEDCD7"/>
+                      </a:solidFill>
+                      <a:prstDash val="solid"/>
+                      <a:round/>
+                      <a:headEnd type="none" w="med" len="med"/>
+                      <a:tailEnd type="none" w="med" len="med"/>
+                    </a:lnL>
+                    <a:lnR w="6350" cap="flat" cmpd="sng" algn="ctr">
+                      <a:solidFill>
+                        <a:srgbClr val="DEDCD7"/>
+                      </a:solidFill>
+                      <a:prstDash val="solid"/>
+                      <a:round/>
+                      <a:headEnd type="none" w="med" len="med"/>
+                      <a:tailEnd type="none" w="med" len="med"/>
+                    </a:lnR>
+                    <a:lnT w="6350" cap="flat" cmpd="sng" algn="ctr">
+                      <a:solidFill>
+                        <a:srgbClr val="DEDCD7"/>
+                      </a:solidFill>
+                      <a:prstDash val="solid"/>
+                      <a:round/>
+                      <a:headEnd type="none" w="med" len="med"/>
+                      <a:tailEnd type="none" w="med" len="med"/>
+                    </a:lnT>
+                    <a:lnB w="6350" cap="flat" cmpd="sng" algn="ctr">
+                      <a:solidFill>
+                        <a:srgbClr val="DEDCD7"/>
+                      </a:solidFill>
+                      <a:prstDash val="solid"/>
+                      <a:round/>
+                      <a:headEnd type="none" w="med" len="med"/>
+                      <a:tailEnd type="none" w="med" len="med"/>
+                    </a:lnB>
+                  </a:tcPr>
+                </a:tc>
+                <a:tc>
+                  <a:txBody>
+                    <a:bodyPr/>
+                    <a:lstStyle/>
+                    <a:p>
+                      <a:pPr algn="ctr" indent="0" marL="0">
+                        <a:buNone/>
+                      </a:pPr>
+                      <a:r>
+                        <a:rPr lang="en-US" sz="1050" dirty="0">
+                          <a:solidFill>
+                            <a:srgbClr val="1A1A1A"/>
+                          </a:solidFill>
+                          <a:latin typeface="Calibri" pitchFamily="34" charset="0"/>
+                          <a:ea typeface="Calibri" pitchFamily="34" charset="-122"/>
+                          <a:cs typeface="Calibri" pitchFamily="34" charset="-120"/>
+                        </a:rPr>
+                        <a:t>1.5%</a:t>
+                      </a:r>
+                      <a:endParaRPr lang="en-US" sz="1050" dirty="0">
+                        <a:latin typeface="Calibri" charset="0"/>
+                        <a:ea typeface="Calibri" charset="0"/>
+                        <a:cs typeface="Calibri" charset="0"/>
+                      </a:endParaRPr>
+                    </a:p>
+                  </a:txBody>
+                  <a:tcPr marL="50800" marR="50800" marT="50800" marB="50800" anchor="t">
+                    <a:lnL w="6350" cap="flat" cmpd="sng" algn="ctr">
+                      <a:solidFill>
+                        <a:srgbClr val="DEDCD7"/>
+                      </a:solidFill>
+                      <a:prstDash val="solid"/>
+                      <a:round/>
+                      <a:headEnd type="none" w="med" len="med"/>
+                      <a:tailEnd type="none" w="med" len="med"/>
+                    </a:lnL>
+                    <a:lnR w="6350" cap="flat" cmpd="sng" algn="ctr">
+                      <a:solidFill>
+                        <a:srgbClr val="DEDCD7"/>
+                      </a:solidFill>
+                      <a:prstDash val="solid"/>
+                      <a:round/>
+                      <a:headEnd type="none" w="med" len="med"/>
+                      <a:tailEnd type="none" w="med" len="med"/>
+                    </a:lnR>
+                    <a:lnT w="6350" cap="flat" cmpd="sng" algn="ctr">
+                      <a:solidFill>
+                        <a:srgbClr val="DEDCD7"/>
+                      </a:solidFill>
+                      <a:prstDash val="solid"/>
+                      <a:round/>
+                      <a:headEnd type="none" w="med" len="med"/>
+                      <a:tailEnd type="none" w="med" len="med"/>
+                    </a:lnT>
+                    <a:lnB w="6350" cap="flat" cmpd="sng" algn="ctr">
+                      <a:solidFill>
+                        <a:srgbClr val="DEDCD7"/>
+                      </a:solidFill>
+                      <a:prstDash val="solid"/>
+                      <a:round/>
+                      <a:headEnd type="none" w="med" len="med"/>
+                      <a:tailEnd type="none" w="med" len="med"/>
+                    </a:lnB>
+                  </a:tcPr>
+                </a:tc>
+                <a:tc>
+                  <a:txBody>
+                    <a:bodyPr/>
+                    <a:lstStyle/>
+                    <a:p>
+                      <a:pPr algn="ctr" indent="0" marL="0">
+                        <a:buNone/>
+                      </a:pPr>
+                      <a:r>
+                        <a:rPr lang="en-US" sz="1050" dirty="0">
+                          <a:solidFill>
+                            <a:srgbClr val="1A1A1A"/>
+                          </a:solidFill>
+                          <a:latin typeface="Calibri" pitchFamily="34" charset="0"/>
+                          <a:ea typeface="Calibri" pitchFamily="34" charset="-122"/>
+                          <a:cs typeface="Calibri" pitchFamily="34" charset="-120"/>
+                        </a:rPr>
+                        <a:t>+6.0%</a:t>
+                      </a:r>
+                      <a:endParaRPr lang="en-US" sz="1050" dirty="0">
+                        <a:latin typeface="Calibri" charset="0"/>
+                        <a:ea typeface="Calibri" charset="0"/>
+                        <a:cs typeface="Calibri" charset="0"/>
+                      </a:endParaRPr>
+                    </a:p>
+                  </a:txBody>
+                  <a:tcPr marL="50800" marR="50800" marT="50800" marB="50800" anchor="t">
+                    <a:lnL w="6350" cap="flat" cmpd="sng" algn="ctr">
+                      <a:solidFill>
+                        <a:srgbClr val="DEDCD7"/>
+                      </a:solidFill>
+                      <a:prstDash val="solid"/>
+                      <a:round/>
+                      <a:headEnd type="none" w="med" len="med"/>
+                      <a:tailEnd type="none" w="med" len="med"/>
+                    </a:lnL>
+                    <a:lnR w="6350" cap="flat" cmpd="sng" algn="ctr">
+                      <a:solidFill>
+                        <a:srgbClr val="DEDCD7"/>
+                      </a:solidFill>
+                      <a:prstDash val="solid"/>
+                      <a:round/>
+                      <a:headEnd type="none" w="med" len="med"/>
+                      <a:tailEnd type="none" w="med" len="med"/>
+                    </a:lnR>
+                    <a:lnT w="6350" cap="flat" cmpd="sng" algn="ctr">
+                      <a:solidFill>
+                        <a:srgbClr val="DEDCD7"/>
+                      </a:solidFill>
+                      <a:prstDash val="solid"/>
+                      <a:round/>
+                      <a:headEnd type="none" w="med" len="med"/>
+                      <a:tailEnd type="none" w="med" len="med"/>
+                    </a:lnT>
+                    <a:lnB w="6350" cap="flat" cmpd="sng" algn="ctr">
+                      <a:solidFill>
+                        <a:srgbClr val="DEDCD7"/>
+                      </a:solidFill>
+                      <a:prstDash val="solid"/>
+                      <a:round/>
+                      <a:headEnd type="none" w="med" len="med"/>
+                      <a:tailEnd type="none" w="med" len="med"/>
+                    </a:lnB>
+                  </a:tcPr>
+                </a:tc>
+              </a:tr>
+              <a:tr h="365760">
+                <a:tc>
+                  <a:txBody>
+                    <a:bodyPr/>
+                    <a:lstStyle/>
+                    <a:p>
+                      <a:pPr indent="0" marL="0">
+                        <a:buNone/>
+                      </a:pPr>
+                      <a:r>
+                        <a:rPr lang="en-US" sz="1050" b="1" dirty="0">
+                          <a:solidFill>
+                            <a:srgbClr val="1A1A1A"/>
+                          </a:solidFill>
+                          <a:latin typeface="Calibri" pitchFamily="34" charset="0"/>
+                          <a:ea typeface="Calibri" pitchFamily="34" charset="-122"/>
+                          <a:cs typeface="Calibri" pitchFamily="34" charset="-120"/>
+                        </a:rPr>
+                        <a:t>ours, tuned (thr 0.2, dilate 64px)</a:t>
+                      </a:r>
+                      <a:endParaRPr lang="en-US" sz="1050" dirty="0">
+                        <a:latin typeface="Calibri" charset="0"/>
+                        <a:ea typeface="Calibri" charset="0"/>
+                        <a:cs typeface="Calibri" charset="0"/>
+                      </a:endParaRPr>
+                    </a:p>
+                  </a:txBody>
+                  <a:tcPr marL="50800" marR="50800" marT="50800" marB="50800" anchor="t">
+                    <a:lnL w="6350" cap="flat" cmpd="sng" algn="ctr">
+                      <a:solidFill>
+                        <a:srgbClr val="DEDCD7"/>
+                      </a:solidFill>
+                      <a:prstDash val="solid"/>
+                      <a:round/>
+                      <a:headEnd type="none" w="med" len="med"/>
+                      <a:tailEnd type="none" w="med" len="med"/>
+                    </a:lnL>
+                    <a:lnR w="6350" cap="flat" cmpd="sng" algn="ctr">
+                      <a:solidFill>
+                        <a:srgbClr val="DEDCD7"/>
+                      </a:solidFill>
+                      <a:prstDash val="solid"/>
+                      <a:round/>
+                      <a:headEnd type="none" w="med" len="med"/>
+                      <a:tailEnd type="none" w="med" len="med"/>
+                    </a:lnR>
+                    <a:lnT w="6350" cap="flat" cmpd="sng" algn="ctr">
+                      <a:solidFill>
+                        <a:srgbClr val="DEDCD7"/>
+                      </a:solidFill>
+                      <a:prstDash val="solid"/>
+                      <a:round/>
+                      <a:headEnd type="none" w="med" len="med"/>
+                      <a:tailEnd type="none" w="med" len="med"/>
+                    </a:lnT>
+                    <a:lnB w="6350" cap="flat" cmpd="sng" algn="ctr">
+                      <a:solidFill>
+                        <a:srgbClr val="DEDCD7"/>
+                      </a:solidFill>
+                      <a:prstDash val="solid"/>
+                      <a:round/>
+                      <a:headEnd type="none" w="med" len="med"/>
+                      <a:tailEnd type="none" w="med" len="med"/>
+                    </a:lnB>
+                    <a:solidFill>
+                      <a:srgbClr val="EAF5EE"/>
+                    </a:solidFill>
+                  </a:tcPr>
+                </a:tc>
+                <a:tc>
+                  <a:txBody>
+                    <a:bodyPr/>
+                    <a:lstStyle/>
+                    <a:p>
+                      <a:pPr algn="ctr" indent="0" marL="0">
+                        <a:buNone/>
+                      </a:pPr>
+                      <a:r>
+                        <a:rPr lang="en-US" sz="1050" b="1" dirty="0">
+                          <a:solidFill>
+                            <a:srgbClr val="1A1A1A"/>
+                          </a:solidFill>
+                          <a:latin typeface="Calibri" pitchFamily="34" charset="0"/>
+                          <a:ea typeface="Calibri" pitchFamily="34" charset="-122"/>
+                          <a:cs typeface="Calibri" pitchFamily="34" charset="-120"/>
+                        </a:rPr>
+                        <a:t>22.9%</a:t>
+                      </a:r>
+                      <a:endParaRPr lang="en-US" sz="1050" dirty="0">
+                        <a:latin typeface="Calibri" charset="0"/>
+                        <a:ea typeface="Calibri" charset="0"/>
+                        <a:cs typeface="Calibri" charset="0"/>
+                      </a:endParaRPr>
+                    </a:p>
+                  </a:txBody>
+                  <a:tcPr marL="50800" marR="50800" marT="50800" marB="50800" anchor="t">
+                    <a:lnL w="6350" cap="flat" cmpd="sng" algn="ctr">
+                      <a:solidFill>
+                        <a:srgbClr val="DEDCD7"/>
+                      </a:solidFill>
+                      <a:prstDash val="solid"/>
+                      <a:round/>
+                      <a:headEnd type="none" w="med" len="med"/>
+                      <a:tailEnd type="none" w="med" len="med"/>
+                    </a:lnL>
+                    <a:lnR w="6350" cap="flat" cmpd="sng" algn="ctr">
+                      <a:solidFill>
+                        <a:srgbClr val="DEDCD7"/>
+                      </a:solidFill>
+                      <a:prstDash val="solid"/>
+                      <a:round/>
+                      <a:headEnd type="none" w="med" len="med"/>
+                      <a:tailEnd type="none" w="med" len="med"/>
+                    </a:lnR>
+                    <a:lnT w="6350" cap="flat" cmpd="sng" algn="ctr">
+                      <a:solidFill>
+                        <a:srgbClr val="DEDCD7"/>
+                      </a:solidFill>
+                      <a:prstDash val="solid"/>
+                      <a:round/>
+                      <a:headEnd type="none" w="med" len="med"/>
+                      <a:tailEnd type="none" w="med" len="med"/>
+                    </a:lnT>
+                    <a:lnB w="6350" cap="flat" cmpd="sng" algn="ctr">
+                      <a:solidFill>
+                        <a:srgbClr val="DEDCD7"/>
+                      </a:solidFill>
+                      <a:prstDash val="solid"/>
+                      <a:round/>
+                      <a:headEnd type="none" w="med" len="med"/>
+                      <a:tailEnd type="none" w="med" len="med"/>
+                    </a:lnB>
+                    <a:solidFill>
+                      <a:srgbClr val="EAF5EE"/>
+                    </a:solidFill>
+                  </a:tcPr>
+                </a:tc>
+                <a:tc>
+                  <a:txBody>
+                    <a:bodyPr/>
+                    <a:lstStyle/>
+                    <a:p>
+                      <a:pPr algn="ctr" indent="0" marL="0">
+                        <a:buNone/>
+                      </a:pPr>
+                      <a:r>
+                        <a:rPr lang="en-US" sz="1050" b="1" dirty="0">
+                          <a:solidFill>
+                            <a:srgbClr val="1A1A1A"/>
+                          </a:solidFill>
+                          <a:latin typeface="Calibri" pitchFamily="34" charset="0"/>
+                          <a:ea typeface="Calibri" pitchFamily="34" charset="-122"/>
+                          <a:cs typeface="Calibri" pitchFamily="34" charset="-120"/>
+                        </a:rPr>
+                        <a:t>8.8%</a:t>
+                      </a:r>
+                      <a:endParaRPr lang="en-US" sz="1050" dirty="0">
+                        <a:latin typeface="Calibri" charset="0"/>
+                        <a:ea typeface="Calibri" charset="0"/>
+                        <a:cs typeface="Calibri" charset="0"/>
+                      </a:endParaRPr>
+                    </a:p>
+                  </a:txBody>
+                  <a:tcPr marL="50800" marR="50800" marT="50800" marB="50800" anchor="t">
+                    <a:lnL w="6350" cap="flat" cmpd="sng" algn="ctr">
+                      <a:solidFill>
+                        <a:srgbClr val="DEDCD7"/>
+                      </a:solidFill>
+                      <a:prstDash val="solid"/>
+                      <a:round/>
+                      <a:headEnd type="none" w="med" len="med"/>
+                      <a:tailEnd type="none" w="med" len="med"/>
+                    </a:lnL>
+                    <a:lnR w="6350" cap="flat" cmpd="sng" algn="ctr">
+                      <a:solidFill>
+                        <a:srgbClr val="DEDCD7"/>
+                      </a:solidFill>
+                      <a:prstDash val="solid"/>
+                      <a:round/>
+                      <a:headEnd type="none" w="med" len="med"/>
+                      <a:tailEnd type="none" w="med" len="med"/>
+                    </a:lnR>
+                    <a:lnT w="6350" cap="flat" cmpd="sng" algn="ctr">
+                      <a:solidFill>
+                        <a:srgbClr val="DEDCD7"/>
+                      </a:solidFill>
+                      <a:prstDash val="solid"/>
+                      <a:round/>
+                      <a:headEnd type="none" w="med" len="med"/>
+                      <a:tailEnd type="none" w="med" len="med"/>
+                    </a:lnT>
+                    <a:lnB w="6350" cap="flat" cmpd="sng" algn="ctr">
+                      <a:solidFill>
+                        <a:srgbClr val="DEDCD7"/>
+                      </a:solidFill>
+                      <a:prstDash val="solid"/>
+                      <a:round/>
+                      <a:headEnd type="none" w="med" len="med"/>
+                      <a:tailEnd type="none" w="med" len="med"/>
+                    </a:lnB>
+                    <a:solidFill>
+                      <a:srgbClr val="EAF5EE"/>
+                    </a:solidFill>
+                  </a:tcPr>
+                </a:tc>
+                <a:tc>
+                  <a:txBody>
+                    <a:bodyPr/>
+                    <a:lstStyle/>
+                    <a:p>
+                      <a:pPr algn="ctr" indent="0" marL="0">
+                        <a:buNone/>
+                      </a:pPr>
+                      <a:r>
+                        <a:rPr lang="en-US" sz="1050" b="1" dirty="0">
+                          <a:solidFill>
+                            <a:srgbClr val="1A1A1A"/>
+                          </a:solidFill>
+                          <a:latin typeface="Calibri" pitchFamily="34" charset="0"/>
+                          <a:ea typeface="Calibri" pitchFamily="34" charset="-122"/>
+                          <a:cs typeface="Calibri" pitchFamily="34" charset="-120"/>
+                        </a:rPr>
+                        <a:t>+14.2%</a:t>
+                      </a:r>
+                      <a:endParaRPr lang="en-US" sz="1050" dirty="0">
+                        <a:latin typeface="Calibri" charset="0"/>
+                        <a:ea typeface="Calibri" charset="0"/>
+                        <a:cs typeface="Calibri" charset="0"/>
+                      </a:endParaRPr>
+                    </a:p>
+                  </a:txBody>
+                  <a:tcPr marL="50800" marR="50800" marT="50800" marB="50800" anchor="t">
+                    <a:lnL w="6350" cap="flat" cmpd="sng" algn="ctr">
+                      <a:solidFill>
+                        <a:srgbClr val="DEDCD7"/>
+                      </a:solidFill>
+                      <a:prstDash val="solid"/>
+                      <a:round/>
+                      <a:headEnd type="none" w="med" len="med"/>
+                      <a:tailEnd type="none" w="med" len="med"/>
+                    </a:lnL>
+                    <a:lnR w="6350" cap="flat" cmpd="sng" algn="ctr">
+                      <a:solidFill>
+                        <a:srgbClr val="DEDCD7"/>
+                      </a:solidFill>
+                      <a:prstDash val="solid"/>
+                      <a:round/>
+                      <a:headEnd type="none" w="med" len="med"/>
+                      <a:tailEnd type="none" w="med" len="med"/>
+                    </a:lnR>
+                    <a:lnT w="6350" cap="flat" cmpd="sng" algn="ctr">
+                      <a:solidFill>
+                        <a:srgbClr val="DEDCD7"/>
+                      </a:solidFill>
+                      <a:prstDash val="solid"/>
+                      <a:round/>
+                      <a:headEnd type="none" w="med" len="med"/>
+                      <a:tailEnd type="none" w="med" len="med"/>
+                    </a:lnT>
+                    <a:lnB w="6350" cap="flat" cmpd="sng" algn="ctr">
+                      <a:solidFill>
+                        <a:srgbClr val="DEDCD7"/>
+                      </a:solidFill>
+                      <a:prstDash val="solid"/>
+                      <a:round/>
+                      <a:headEnd type="none" w="med" len="med"/>
+                      <a:tailEnd type="none" w="med" len="med"/>
+                    </a:lnB>
+                    <a:solidFill>
+                      <a:srgbClr val="EAF5EE"/>
+                    </a:solidFill>
+                  </a:tcPr>
+                </a:tc>
+              </a:tr>
+              <a:tr h="365760">
+                <a:tc>
+                  <a:txBody>
+                    <a:bodyPr/>
+                    <a:lstStyle/>
+                    <a:p>
+                      <a:pPr indent="0" marL="0">
+                        <a:buNone/>
+                      </a:pPr>
+                      <a:r>
+                        <a:rPr lang="en-US" sz="1050" dirty="0">
+                          <a:solidFill>
+                            <a:srgbClr val="1A1A1A"/>
+                          </a:solidFill>
+                          <a:latin typeface="Calibri" pitchFamily="34" charset="0"/>
+                          <a:ea typeface="Calibri" pitchFamily="34" charset="-122"/>
+                          <a:cs typeface="Calibri" pitchFamily="34" charset="-120"/>
+                        </a:rPr>
+                        <a:t>MagicBrush human mask</a:t>
+                      </a:r>
+                      <a:endParaRPr lang="en-US" sz="1050" dirty="0">
+                        <a:latin typeface="Calibri" charset="0"/>
+                        <a:ea typeface="Calibri" charset="0"/>
+                        <a:cs typeface="Calibri" charset="0"/>
+                      </a:endParaRPr>
+                    </a:p>
+                  </a:txBody>
+                  <a:tcPr marL="50800" marR="50800" marT="50800" marB="50800" anchor="t">
+                    <a:lnL w="6350" cap="flat" cmpd="sng" algn="ctr">
+                      <a:solidFill>
+                        <a:srgbClr val="DEDCD7"/>
+                      </a:solidFill>
+                      <a:prstDash val="solid"/>
+                      <a:round/>
+                      <a:headEnd type="none" w="med" len="med"/>
+                      <a:tailEnd type="none" w="med" len="med"/>
+                    </a:lnL>
+                    <a:lnR w="6350" cap="flat" cmpd="sng" algn="ctr">
+                      <a:solidFill>
+                        <a:srgbClr val="DEDCD7"/>
+                      </a:solidFill>
+                      <a:prstDash val="solid"/>
+                      <a:round/>
+                      <a:headEnd type="none" w="med" len="med"/>
+                      <a:tailEnd type="none" w="med" len="med"/>
+                    </a:lnR>
+                    <a:lnT w="6350" cap="flat" cmpd="sng" algn="ctr">
+                      <a:solidFill>
+                        <a:srgbClr val="DEDCD7"/>
+                      </a:solidFill>
+                      <a:prstDash val="solid"/>
+                      <a:round/>
+                      <a:headEnd type="none" w="med" len="med"/>
+                      <a:tailEnd type="none" w="med" len="med"/>
+                    </a:lnT>
+                    <a:lnB w="6350" cap="flat" cmpd="sng" algn="ctr">
+                      <a:solidFill>
+                        <a:srgbClr val="DEDCD7"/>
+                      </a:solidFill>
+                      <a:prstDash val="solid"/>
+                      <a:round/>
+                      <a:headEnd type="none" w="med" len="med"/>
+                      <a:tailEnd type="none" w="med" len="med"/>
+                    </a:lnB>
+                  </a:tcPr>
+                </a:tc>
+                <a:tc>
+                  <a:txBody>
+                    <a:bodyPr/>
+                    <a:lstStyle/>
+                    <a:p>
+                      <a:pPr algn="ctr" indent="0" marL="0">
+                        <a:buNone/>
+                      </a:pPr>
+                      <a:r>
+                        <a:rPr lang="en-US" sz="1050" dirty="0">
+                          <a:solidFill>
+                            <a:srgbClr val="1A1A1A"/>
+                          </a:solidFill>
+                          <a:latin typeface="Calibri" pitchFamily="34" charset="0"/>
+                          <a:ea typeface="Calibri" pitchFamily="34" charset="-122"/>
+                          <a:cs typeface="Calibri" pitchFamily="34" charset="-120"/>
+                        </a:rPr>
+                        <a:t>31.5%</a:t>
+                      </a:r>
+                      <a:endParaRPr lang="en-US" sz="1050" dirty="0">
+                        <a:latin typeface="Calibri" charset="0"/>
+                        <a:ea typeface="Calibri" charset="0"/>
+                        <a:cs typeface="Calibri" charset="0"/>
+                      </a:endParaRPr>
+                    </a:p>
+                  </a:txBody>
+                  <a:tcPr marL="50800" marR="50800" marT="50800" marB="50800" anchor="t">
+                    <a:lnL w="6350" cap="flat" cmpd="sng" algn="ctr">
+                      <a:solidFill>
+                        <a:srgbClr val="DEDCD7"/>
+                      </a:solidFill>
+                      <a:prstDash val="solid"/>
+                      <a:round/>
+                      <a:headEnd type="none" w="med" len="med"/>
+                      <a:tailEnd type="none" w="med" len="med"/>
+                    </a:lnL>
+                    <a:lnR w="6350" cap="flat" cmpd="sng" algn="ctr">
+                      <a:solidFill>
+                        <a:srgbClr val="DEDCD7"/>
+                      </a:solidFill>
+                      <a:prstDash val="solid"/>
+                      <a:round/>
+                      <a:headEnd type="none" w="med" len="med"/>
+                      <a:tailEnd type="none" w="med" len="med"/>
+                    </a:lnR>
+                    <a:lnT w="6350" cap="flat" cmpd="sng" algn="ctr">
+                      <a:solidFill>
+                        <a:srgbClr val="DEDCD7"/>
+                      </a:solidFill>
+                      <a:prstDash val="solid"/>
+                      <a:round/>
+                      <a:headEnd type="none" w="med" len="med"/>
+                      <a:tailEnd type="none" w="med" len="med"/>
+                    </a:lnT>
+                    <a:lnB w="6350" cap="flat" cmpd="sng" algn="ctr">
+                      <a:solidFill>
+                        <a:srgbClr val="DEDCD7"/>
+                      </a:solidFill>
+                      <a:prstDash val="solid"/>
+                      <a:round/>
+                      <a:headEnd type="none" w="med" len="med"/>
+                      <a:tailEnd type="none" w="med" len="med"/>
+                    </a:lnB>
+                  </a:tcPr>
+                </a:tc>
+                <a:tc>
+                  <a:txBody>
+                    <a:bodyPr/>
+                    <a:lstStyle/>
+                    <a:p>
+                      <a:pPr algn="ctr" indent="0" marL="0">
+                        <a:buNone/>
+                      </a:pPr>
+                      <a:r>
+                        <a:rPr lang="en-US" sz="1050" dirty="0">
+                          <a:solidFill>
+                            <a:srgbClr val="1A1A1A"/>
+                          </a:solidFill>
+                          <a:latin typeface="Calibri" pitchFamily="34" charset="0"/>
+                          <a:ea typeface="Calibri" pitchFamily="34" charset="-122"/>
+                          <a:cs typeface="Calibri" pitchFamily="34" charset="-120"/>
+                        </a:rPr>
+                        <a:t>13.0%</a:t>
+                      </a:r>
+                      <a:endParaRPr lang="en-US" sz="1050" dirty="0">
+                        <a:latin typeface="Calibri" charset="0"/>
+                        <a:ea typeface="Calibri" charset="0"/>
+                        <a:cs typeface="Calibri" charset="0"/>
+                      </a:endParaRPr>
+                    </a:p>
+                  </a:txBody>
+                  <a:tcPr marL="50800" marR="50800" marT="50800" marB="50800" anchor="t">
+                    <a:lnL w="6350" cap="flat" cmpd="sng" algn="ctr">
+                      <a:solidFill>
+                        <a:srgbClr val="DEDCD7"/>
+                      </a:solidFill>
+                      <a:prstDash val="solid"/>
+                      <a:round/>
+                      <a:headEnd type="none" w="med" len="med"/>
+                      <a:tailEnd type="none" w="med" len="med"/>
+                    </a:lnL>
+                    <a:lnR w="6350" cap="flat" cmpd="sng" algn="ctr">
+                      <a:solidFill>
+                        <a:srgbClr val="DEDCD7"/>
+                      </a:solidFill>
+                      <a:prstDash val="solid"/>
+                      <a:round/>
+                      <a:headEnd type="none" w="med" len="med"/>
+                      <a:tailEnd type="none" w="med" len="med"/>
+                    </a:lnR>
+                    <a:lnT w="6350" cap="flat" cmpd="sng" algn="ctr">
+                      <a:solidFill>
+                        <a:srgbClr val="DEDCD7"/>
+                      </a:solidFill>
+                      <a:prstDash val="solid"/>
+                      <a:round/>
+                      <a:headEnd type="none" w="med" len="med"/>
+                      <a:tailEnd type="none" w="med" len="med"/>
+                    </a:lnT>
+                    <a:lnB w="6350" cap="flat" cmpd="sng" algn="ctr">
+                      <a:solidFill>
+                        <a:srgbClr val="DEDCD7"/>
+                      </a:solidFill>
+                      <a:prstDash val="solid"/>
+                      <a:round/>
+                      <a:headEnd type="none" w="med" len="med"/>
+                      <a:tailEnd type="none" w="med" len="med"/>
+                    </a:lnB>
+                  </a:tcPr>
+                </a:tc>
+                <a:tc>
+                  <a:txBody>
+                    <a:bodyPr/>
+                    <a:lstStyle/>
+                    <a:p>
+                      <a:pPr algn="ctr" indent="0" marL="0">
+                        <a:buNone/>
+                      </a:pPr>
+                      <a:r>
+                        <a:rPr lang="en-US" sz="1050" dirty="0">
+                          <a:solidFill>
+                            <a:srgbClr val="1A1A1A"/>
+                          </a:solidFill>
+                          <a:latin typeface="Calibri" pitchFamily="34" charset="0"/>
+                          <a:ea typeface="Calibri" pitchFamily="34" charset="-122"/>
+                          <a:cs typeface="Calibri" pitchFamily="34" charset="-120"/>
+                        </a:rPr>
+                        <a:t>+18.5%</a:t>
+                      </a:r>
+                      <a:endParaRPr lang="en-US" sz="1050" dirty="0">
+                        <a:latin typeface="Calibri" charset="0"/>
+                        <a:ea typeface="Calibri" charset="0"/>
+                        <a:cs typeface="Calibri" charset="0"/>
+                      </a:endParaRPr>
+                    </a:p>
+                  </a:txBody>
+                  <a:tcPr marL="50800" marR="50800" marT="50800" marB="50800" anchor="t">
+                    <a:lnL w="6350" cap="flat" cmpd="sng" algn="ctr">
+                      <a:solidFill>
+                        <a:srgbClr val="DEDCD7"/>
+                      </a:solidFill>
+                      <a:prstDash val="solid"/>
+                      <a:round/>
+                      <a:headEnd type="none" w="med" len="med"/>
+                      <a:tailEnd type="none" w="med" len="med"/>
+                    </a:lnL>
+                    <a:lnR w="6350" cap="flat" cmpd="sng" algn="ctr">
+                      <a:solidFill>
+                        <a:srgbClr val="DEDCD7"/>
+                      </a:solidFill>
+                      <a:prstDash val="solid"/>
+                      <a:round/>
+                      <a:headEnd type="none" w="med" len="med"/>
+                      <a:tailEnd type="none" w="med" len="med"/>
+                    </a:lnR>
+                    <a:lnT w="6350" cap="flat" cmpd="sng" algn="ctr">
+                      <a:solidFill>
+                        <a:srgbClr val="DEDCD7"/>
+                      </a:solidFill>
+                      <a:prstDash val="solid"/>
+                      <a:round/>
+                      <a:headEnd type="none" w="med" len="med"/>
+                      <a:tailEnd type="none" w="med" len="med"/>
+                    </a:lnT>
+                    <a:lnB w="6350" cap="flat" cmpd="sng" algn="ctr">
+                      <a:solidFill>
+                        <a:srgbClr val="DEDCD7"/>
+                      </a:solidFill>
+                      <a:prstDash val="solid"/>
+                      <a:round/>
+                      <a:headEnd type="none" w="med" len="med"/>
+                      <a:tailEnd type="none" w="med" len="med"/>
+                    </a:lnB>
+                  </a:tcPr>
+                </a:tc>
+              </a:tr>
+              <a:tr h="365760">
+                <a:tc>
+                  <a:txBody>
+                    <a:bodyPr/>
+                    <a:lstStyle/>
+                    <a:p>
+                      <a:pPr indent="0" marL="0">
+                        <a:buNone/>
+                      </a:pPr>
+                      <a:r>
+                        <a:rPr lang="en-US" sz="1050" dirty="0">
+                          <a:solidFill>
+                            <a:srgbClr val="1A1A1A"/>
+                          </a:solidFill>
+                          <a:latin typeface="Calibri" pitchFamily="34" charset="0"/>
+                          <a:ea typeface="Calibri" pitchFamily="34" charset="-122"/>
+                          <a:cs typeface="Calibri" pitchFamily="34" charset="-120"/>
+                        </a:rPr>
+                        <a:t>ground-truth region</a:t>
+                      </a:r>
+                      <a:endParaRPr lang="en-US" sz="1050" dirty="0">
+                        <a:latin typeface="Calibri" charset="0"/>
+                        <a:ea typeface="Calibri" charset="0"/>
+                        <a:cs typeface="Calibri" charset="0"/>
+                      </a:endParaRPr>
+                    </a:p>
+                  </a:txBody>
+                  <a:tcPr marL="50800" marR="50800" marT="50800" marB="50800" anchor="t">
+                    <a:lnL w="6350" cap="flat" cmpd="sng" algn="ctr">
+                      <a:solidFill>
+                        <a:srgbClr val="DEDCD7"/>
+                      </a:solidFill>
+                      <a:prstDash val="solid"/>
+                      <a:round/>
+                      <a:headEnd type="none" w="med" len="med"/>
+                      <a:tailEnd type="none" w="med" len="med"/>
+                    </a:lnL>
+                    <a:lnR w="6350" cap="flat" cmpd="sng" algn="ctr">
+                      <a:solidFill>
+                        <a:srgbClr val="DEDCD7"/>
+                      </a:solidFill>
+                      <a:prstDash val="solid"/>
+                      <a:round/>
+                      <a:headEnd type="none" w="med" len="med"/>
+                      <a:tailEnd type="none" w="med" len="med"/>
+                    </a:lnR>
+                    <a:lnT w="6350" cap="flat" cmpd="sng" algn="ctr">
+                      <a:solidFill>
+                        <a:srgbClr val="DEDCD7"/>
+                      </a:solidFill>
+                      <a:prstDash val="solid"/>
+                      <a:round/>
+                      <a:headEnd type="none" w="med" len="med"/>
+                      <a:tailEnd type="none" w="med" len="med"/>
+                    </a:lnT>
+                    <a:lnB w="6350" cap="flat" cmpd="sng" algn="ctr">
+                      <a:solidFill>
+                        <a:srgbClr val="DEDCD7"/>
+                      </a:solidFill>
+                      <a:prstDash val="solid"/>
+                      <a:round/>
+                      <a:headEnd type="none" w="med" len="med"/>
+                      <a:tailEnd type="none" w="med" len="med"/>
+                    </a:lnB>
+                  </a:tcPr>
+                </a:tc>
+                <a:tc>
+                  <a:txBody>
+                    <a:bodyPr/>
+                    <a:lstStyle/>
+                    <a:p>
+                      <a:pPr algn="ctr" indent="0" marL="0">
+                        <a:buNone/>
+                      </a:pPr>
+                      <a:r>
+                        <a:rPr lang="en-US" sz="1050" dirty="0">
+                          <a:solidFill>
+                            <a:srgbClr val="1A1A1A"/>
+                          </a:solidFill>
+                          <a:latin typeface="Calibri" pitchFamily="34" charset="0"/>
+                          <a:ea typeface="Calibri" pitchFamily="34" charset="-122"/>
+                          <a:cs typeface="Calibri" pitchFamily="34" charset="-120"/>
+                        </a:rPr>
+                        <a:t>30.2%</a:t>
+                      </a:r>
+                      <a:endParaRPr lang="en-US" sz="1050" dirty="0">
+                        <a:latin typeface="Calibri" charset="0"/>
+                        <a:ea typeface="Calibri" charset="0"/>
+                        <a:cs typeface="Calibri" charset="0"/>
+                      </a:endParaRPr>
+                    </a:p>
+                  </a:txBody>
+                  <a:tcPr marL="50800" marR="50800" marT="50800" marB="50800" anchor="t">
+                    <a:lnL w="6350" cap="flat" cmpd="sng" algn="ctr">
+                      <a:solidFill>
+                        <a:srgbClr val="DEDCD7"/>
+                      </a:solidFill>
+                      <a:prstDash val="solid"/>
+                      <a:round/>
+                      <a:headEnd type="none" w="med" len="med"/>
+                      <a:tailEnd type="none" w="med" len="med"/>
+                    </a:lnL>
+                    <a:lnR w="6350" cap="flat" cmpd="sng" algn="ctr">
+                      <a:solidFill>
+                        <a:srgbClr val="DEDCD7"/>
+                      </a:solidFill>
+                      <a:prstDash val="solid"/>
+                      <a:round/>
+                      <a:headEnd type="none" w="med" len="med"/>
+                      <a:tailEnd type="none" w="med" len="med"/>
+                    </a:lnR>
+                    <a:lnT w="6350" cap="flat" cmpd="sng" algn="ctr">
+                      <a:solidFill>
+                        <a:srgbClr val="DEDCD7"/>
+                      </a:solidFill>
+                      <a:prstDash val="solid"/>
+                      <a:round/>
+                      <a:headEnd type="none" w="med" len="med"/>
+                      <a:tailEnd type="none" w="med" len="med"/>
+                    </a:lnT>
+                    <a:lnB w="6350" cap="flat" cmpd="sng" algn="ctr">
+                      <a:solidFill>
+                        <a:srgbClr val="DEDCD7"/>
+                      </a:solidFill>
+                      <a:prstDash val="solid"/>
+                      <a:round/>
+                      <a:headEnd type="none" w="med" len="med"/>
+                      <a:tailEnd type="none" w="med" len="med"/>
+                    </a:lnB>
+                  </a:tcPr>
+                </a:tc>
+                <a:tc>
+                  <a:txBody>
+                    <a:bodyPr/>
+                    <a:lstStyle/>
+                    <a:p>
+                      <a:pPr algn="ctr" indent="0" marL="0">
+                        <a:buNone/>
+                      </a:pPr>
+                      <a:r>
+                        <a:rPr lang="en-US" sz="1050" dirty="0">
+                          <a:solidFill>
+                            <a:srgbClr val="1A1A1A"/>
+                          </a:solidFill>
+                          <a:latin typeface="Calibri" pitchFamily="34" charset="0"/>
+                          <a:ea typeface="Calibri" pitchFamily="34" charset="-122"/>
+                          <a:cs typeface="Calibri" pitchFamily="34" charset="-120"/>
+                        </a:rPr>
+                        <a:t>0.1%</a:t>
+                      </a:r>
+                      <a:endParaRPr lang="en-US" sz="1050" dirty="0">
+                        <a:latin typeface="Calibri" charset="0"/>
+                        <a:ea typeface="Calibri" charset="0"/>
+                        <a:cs typeface="Calibri" charset="0"/>
+                      </a:endParaRPr>
+                    </a:p>
+                  </a:txBody>
+                  <a:tcPr marL="50800" marR="50800" marT="50800" marB="50800" anchor="t">
+                    <a:lnL w="6350" cap="flat" cmpd="sng" algn="ctr">
+                      <a:solidFill>
+                        <a:srgbClr val="DEDCD7"/>
+                      </a:solidFill>
+                      <a:prstDash val="solid"/>
+                      <a:round/>
+                      <a:headEnd type="none" w="med" len="med"/>
+                      <a:tailEnd type="none" w="med" len="med"/>
+                    </a:lnL>
+                    <a:lnR w="6350" cap="flat" cmpd="sng" algn="ctr">
+                      <a:solidFill>
+                        <a:srgbClr val="DEDCD7"/>
+                      </a:solidFill>
+                      <a:prstDash val="solid"/>
+                      <a:round/>
+                      <a:headEnd type="none" w="med" len="med"/>
+                      <a:tailEnd type="none" w="med" len="med"/>
+                    </a:lnR>
+                    <a:lnT w="6350" cap="flat" cmpd="sng" algn="ctr">
+                      <a:solidFill>
+                        <a:srgbClr val="DEDCD7"/>
+                      </a:solidFill>
+                      <a:prstDash val="solid"/>
+                      <a:round/>
+                      <a:headEnd type="none" w="med" len="med"/>
+                      <a:tailEnd type="none" w="med" len="med"/>
+                    </a:lnT>
+                    <a:lnB w="6350" cap="flat" cmpd="sng" algn="ctr">
+                      <a:solidFill>
+                        <a:srgbClr val="DEDCD7"/>
+                      </a:solidFill>
+                      <a:prstDash val="solid"/>
+                      <a:round/>
+                      <a:headEnd type="none" w="med" len="med"/>
+                      <a:tailEnd type="none" w="med" len="med"/>
+                    </a:lnB>
+                  </a:tcPr>
+                </a:tc>
+                <a:tc>
+                  <a:txBody>
+                    <a:bodyPr/>
+                    <a:lstStyle/>
+                    <a:p>
+                      <a:pPr algn="ctr" indent="0" marL="0">
+                        <a:buNone/>
+                      </a:pPr>
+                      <a:r>
+                        <a:rPr lang="en-US" sz="1050" dirty="0">
+                          <a:solidFill>
+                            <a:srgbClr val="1A1A1A"/>
+                          </a:solidFill>
+                          <a:latin typeface="Calibri" pitchFamily="34" charset="0"/>
+                          <a:ea typeface="Calibri" pitchFamily="34" charset="-122"/>
+                          <a:cs typeface="Calibri" pitchFamily="34" charset="-120"/>
+                        </a:rPr>
+                        <a:t>+30.1%</a:t>
+                      </a:r>
+                      <a:endParaRPr lang="en-US" sz="1050" dirty="0">
+                        <a:latin typeface="Calibri" charset="0"/>
+                        <a:ea typeface="Calibri" charset="0"/>
+                        <a:cs typeface="Calibri" charset="0"/>
+                      </a:endParaRPr>
+                    </a:p>
+                  </a:txBody>
+                  <a:tcPr marL="50800" marR="50800" marT="50800" marB="50800" anchor="t">
+                    <a:lnL w="6350" cap="flat" cmpd="sng" algn="ctr">
+                      <a:solidFill>
+                        <a:srgbClr val="DEDCD7"/>
+                      </a:solidFill>
+                      <a:prstDash val="solid"/>
+                      <a:round/>
+                      <a:headEnd type="none" w="med" len="med"/>
+                      <a:tailEnd type="none" w="med" len="med"/>
+                    </a:lnL>
+                    <a:lnR w="6350" cap="flat" cmpd="sng" algn="ctr">
+                      <a:solidFill>
+                        <a:srgbClr val="DEDCD7"/>
+                      </a:solidFill>
+                      <a:prstDash val="solid"/>
+                      <a:round/>
+                      <a:headEnd type="none" w="med" len="med"/>
+                      <a:tailEnd type="none" w="med" len="med"/>
+                    </a:lnR>
+                    <a:lnT w="6350" cap="flat" cmpd="sng" algn="ctr">
+                      <a:solidFill>
+                        <a:srgbClr val="DEDCD7"/>
+                      </a:solidFill>
+                      <a:prstDash val="solid"/>
+                      <a:round/>
+                      <a:headEnd type="none" w="med" len="med"/>
+                      <a:tailEnd type="none" w="med" len="med"/>
+                    </a:lnT>
+                    <a:lnB w="6350" cap="flat" cmpd="sng" algn="ctr">
+                      <a:solidFill>
+                        <a:srgbClr val="DEDCD7"/>
+                      </a:solidFill>
+                      <a:prstDash val="solid"/>
+                      <a:round/>
+                      <a:headEnd type="none" w="med" len="med"/>
+                      <a:tailEnd type="none" w="med" len="med"/>
+                    </a:lnB>
+                  </a:tcPr>
+                </a:tc>
+              </a:tr>
+            </a:tbl>
+          </a:graphicData>
+        </a:graphic>
+      </p:graphicFrame>
+      <p:sp>
+        <p:nvSpPr>
+          <p:cNvPr id="7" name="Shape 4"/>
+          <p:cNvSpPr/>
+          <p:nvPr/>
+        </p:nvSpPr>
+        <p:spPr>
+          <a:xfrm>
+            <a:off x="777240" y="4114800"/>
+            <a:ext cx="5577840" cy="1417320"/>
+          </a:xfrm>
+          <a:prstGeom prst="rect">
+            <a:avLst/>
+          </a:prstGeom>
+          <a:solidFill>
+            <a:srgbClr val="EAF5EE"/>
+          </a:solidFill>
+          <a:ln/>
+        </p:spPr>
+      </p:sp>
+      <p:sp>
+        <p:nvSpPr>
+          <p:cNvPr id="8" name="Text 5"/>
+          <p:cNvSpPr/>
+          <p:nvPr/>
+        </p:nvSpPr>
+        <p:spPr>
+          <a:xfrm>
+            <a:off x="1051560" y="4297680"/>
+            <a:ext cx="5029200" cy="201168"/>
+          </a:xfrm>
+          <a:prstGeom prst="rect">
+            <a:avLst/>
+          </a:prstGeom>
+          <a:noFill/>
+          <a:ln/>
+        </p:spPr>
+        <p:txBody>
+          <a:bodyPr wrap="square" lIns="0" tIns="0" rIns="0" bIns="0" rtlCol="0" anchor="ctr"/>
+          <a:lstStyle/>
+          <a:p>
+            <a:pPr indent="0" marL="0">
+              <a:buNone/>
+            </a:pPr>
+            <a:r>
+              <a:rPr lang="en-US" sz="1050" b="1" spc="80" kern="0" dirty="0">
+                <a:solidFill>
+                  <a:srgbClr val="1B7A4B"/>
+                </a:solidFill>
+                <a:latin typeface="Calibri" pitchFamily="34" charset="0"/>
+                <a:ea typeface="Calibri" pitchFamily="34" charset="-122"/>
+                <a:cs typeface="Calibri" pitchFamily="34" charset="-120"/>
+              </a:rPr>
+              <a:t>The premise holds</a:t>
+            </a:r>
+            <a:endParaRPr lang="en-US" sz="1050" dirty="0"/>
+          </a:p>
+        </p:txBody>
+      </p:sp>
+      <p:sp>
+        <p:nvSpPr>
+          <p:cNvPr id="9" name="Text 6"/>
+          <p:cNvSpPr/>
+          <p:nvPr/>
+        </p:nvSpPr>
+        <p:spPr>
+          <a:xfrm>
+            <a:off x="1051560" y="4553712"/>
+            <a:ext cx="5029200" cy="822960"/>
+          </a:xfrm>
+          <a:prstGeom prst="rect">
+            <a:avLst/>
+          </a:prstGeom>
+          <a:noFill/>
+          <a:ln/>
+        </p:spPr>
+        <p:txBody>
+          <a:bodyPr wrap="square" lIns="0" tIns="0" rIns="0" bIns="0" rtlCol="0" anchor="ctr"/>
+          <a:lstStyle/>
+          <a:p>
+            <a:pPr indent="0" marL="0">
+              <a:lnSpc>
+                <a:spcPts val="1500"/>
+              </a:lnSpc>
+              <a:buNone/>
+            </a:pPr>
+            <a:r>
+              <a:rPr lang="en-US" sz="1100" dirty="0">
+                <a:solidFill>
+                  <a:srgbClr val="1B7A4B"/>
+                </a:solidFill>
+                <a:latin typeface="Calibri" pitchFamily="34" charset="0"/>
+                <a:ea typeface="Calibri" pitchFamily="34" charset="-122"/>
+                <a:cs typeface="Calibri" pitchFamily="34" charset="-120"/>
+              </a:rPr>
+              <a:t>Editing inside the correct region is worth 3.3× — net +30.1% against +9.1% for editing the whole frame. Our tuned mask reaches +14.2%, 1.56× better than the status quo.</a:t>
+            </a:r>
+            <a:endParaRPr lang="en-US" sz="1100" dirty="0"/>
+          </a:p>
+        </p:txBody>
+      </p:sp>
+      <p:sp>
+        <p:nvSpPr>
+          <p:cNvPr id="10" name="Shape 7"/>
+          <p:cNvSpPr/>
+          <p:nvPr/>
+        </p:nvSpPr>
+        <p:spPr>
+          <a:xfrm>
+            <a:off x="6629400" y="4114800"/>
+            <a:ext cx="4785055" cy="1417320"/>
+          </a:xfrm>
+          <a:prstGeom prst="rect">
+            <a:avLst/>
+          </a:prstGeom>
+          <a:solidFill>
+            <a:srgbClr val="F6F5F2"/>
+          </a:solidFill>
+          <a:ln/>
+        </p:spPr>
+      </p:sp>
+      <p:sp>
+        <p:nvSpPr>
+          <p:cNvPr id="11" name="Text 8"/>
+          <p:cNvSpPr/>
+          <p:nvPr/>
+        </p:nvSpPr>
+        <p:spPr>
+          <a:xfrm>
+            <a:off x="6903720" y="4297680"/>
+            <a:ext cx="4114800" cy="201168"/>
+          </a:xfrm>
+          <a:prstGeom prst="rect">
+            <a:avLst/>
+          </a:prstGeom>
+          <a:noFill/>
+          <a:ln/>
+        </p:spPr>
+        <p:txBody>
+          <a:bodyPr wrap="square" lIns="0" tIns="0" rIns="0" bIns="0" rtlCol="0" anchor="ctr"/>
+          <a:lstStyle/>
+          <a:p>
+            <a:pPr indent="0" marL="0">
+              <a:buNone/>
+            </a:pPr>
+            <a:r>
+              <a:rPr lang="en-US" sz="1050" b="1" spc="80" kern="0" dirty="0">
+                <a:solidFill>
+                  <a:srgbClr val="8C3A1E"/>
+                </a:solidFill>
+                <a:latin typeface="Calibri" pitchFamily="34" charset="0"/>
+                <a:ea typeface="Calibri" pitchFamily="34" charset="-122"/>
+                <a:cs typeface="Calibri" pitchFamily="34" charset="-120"/>
+              </a:rPr>
+              <a:t>And the diagnosis is precise</a:t>
+            </a:r>
+            <a:endParaRPr lang="en-US" sz="1050" dirty="0"/>
+          </a:p>
+        </p:txBody>
+      </p:sp>
+      <p:sp>
+        <p:nvSpPr>
+          <p:cNvPr id="12" name="Text 9"/>
+          <p:cNvSpPr/>
+          <p:nvPr/>
+        </p:nvSpPr>
+        <p:spPr>
+          <a:xfrm>
+            <a:off x="6903720" y="4553712"/>
+            <a:ext cx="3931920" cy="822960"/>
+          </a:xfrm>
+          <a:prstGeom prst="rect">
+            <a:avLst/>
+          </a:prstGeom>
+          <a:noFill/>
+          <a:ln/>
+        </p:spPr>
+        <p:txBody>
+          <a:bodyPr wrap="square" lIns="0" tIns="0" rIns="0" bIns="0" rtlCol="0" anchor="ctr"/>
+          <a:lstStyle/>
+          <a:p>
+            <a:pPr indent="0" marL="0">
+              <a:lnSpc>
+                <a:spcPts val="1500"/>
+              </a:lnSpc>
+              <a:buNone/>
+            </a:pPr>
+            <a:r>
+              <a:rPr lang="en-US" sz="1100" dirty="0">
+                <a:solidFill>
+                  <a:srgbClr val="1A1A1A"/>
+                </a:solidFill>
+                <a:latin typeface="Calibri" pitchFamily="34" charset="0"/>
+                <a:ea typeface="Calibri" pitchFamily="34" charset="-122"/>
+                <a:cs typeface="Calibri" pitchFamily="34" charset="-120"/>
+              </a:rPr>
+              <a:t>Our mask is precision-biased — 1.5% collateral but only 7.5% recall, so gating discarded the edit. MagicBrush’s is the mirror: 9× too large, 13% collateral. Dilation trades one for the other.</a:t>
+            </a:r>
+            <a:endParaRPr lang="en-US" sz="1100" dirty="0"/>
+          </a:p>
+        </p:txBody>
+      </p:sp>
+      <p:sp>
+        <p:nvSpPr>
+          <p:cNvPr id="13" name="Text 10"/>
+          <p:cNvSpPr/>
+          <p:nvPr/>
+        </p:nvSpPr>
+        <p:spPr>
+          <a:xfrm>
+            <a:off x="777240" y="5687568"/>
+            <a:ext cx="10637215" cy="457200"/>
+          </a:xfrm>
+          <a:prstGeom prst="rect">
+            <a:avLst/>
+          </a:prstGeom>
+          <a:noFill/>
+          <a:ln/>
+        </p:spPr>
+        <p:txBody>
+          <a:bodyPr wrap="square" lIns="0" tIns="0" rIns="0" bIns="0" rtlCol="0" anchor="ctr"/>
+          <a:lstStyle/>
+          <a:p>
+            <a:pPr indent="0" marL="0">
+              <a:lnSpc>
+                <a:spcPts val="1400"/>
+              </a:lnSpc>
+              <a:buNone/>
+            </a:pPr>
+            <a:r>
+              <a:rPr lang="en-US" sz="1050" dirty="0">
+                <a:solidFill>
+                  <a:srgbClr val="6E6E6E"/>
+                </a:solidFill>
+                <a:latin typeface="Calibri" pitchFamily="34" charset="0"/>
+                <a:ea typeface="Calibri" pitchFamily="34" charset="-122"/>
+                <a:cs typeface="Calibri" pitchFamily="34" charset="-120"/>
+              </a:rPr>
+              <a:t>Coarse supervision costs at the editing stage too, not only on the mask metric: the MagicBrush mask loses 11.6 points of net against the ground-truth region.</a:t>
+            </a:r>
+            <a:endParaRPr lang="en-US" sz="1050" dirty="0"/>
+          </a:p>
+        </p:txBody>
+      </p:sp>
+    </p:spTree>
+  </p:cSld>
+  <p:clrMapOvr>
+    <a:masterClrMapping/>
+  </p:clrMapOvr>
+</p:sld>
+</file>
+
+<file path=ppt/slides/slide9.xml><?xml version="1.0" encoding="utf-8"?>
+<p:sld xmlns:a="http://schemas.openxmlformats.org/drawingml/2006/main" xmlns:r="http://schemas.openxmlformats.org/officeDocument/2006/relationships" xmlns:p="http://schemas.openxmlformats.org/presentationml/2006/main">
+  <p:cSld name="Slide 9">
+    <p:bg>
+      <p:bgPr>
+        <a:solidFill>
+          <a:srgbClr val="FFFFFF"/>
+        </a:solidFill>
+      </p:bgPr>
+    </p:bg>
+    <p:spTree>
+      <p:nvGrpSpPr>
+        <p:cNvPr id="1" name=""/>
+        <p:cNvGrpSpPr/>
+        <p:nvPr/>
+      </p:nvGrpSpPr>
+      <p:grpSpPr>
+        <a:xfrm>
+          <a:off x="0" y="0"/>
+          <a:ext cx="0" cy="0"/>
+          <a:chOff x="0" y="0"/>
+          <a:chExt cx="0" cy="0"/>
+        </a:xfrm>
+      </p:grpSpPr>
+      <p:sp>
+        <p:nvSpPr>
+          <p:cNvPr id="2" name="Text 0"/>
+          <p:cNvSpPr/>
+          <p:nvPr/>
+        </p:nvSpPr>
+        <p:spPr>
+          <a:xfrm>
+            <a:off x="777240" y="347472"/>
+            <a:ext cx="10637215" cy="201168"/>
+          </a:xfrm>
+          <a:prstGeom prst="rect">
+            <a:avLst/>
+          </a:prstGeom>
+          <a:noFill/>
+          <a:ln/>
+        </p:spPr>
+        <p:txBody>
+          <a:bodyPr wrap="square" lIns="0" tIns="0" rIns="0" bIns="0" rtlCol="0" anchor="ctr"/>
+          <a:lstStyle/>
+          <a:p>
+            <a:pPr indent="0" marL="0">
+              <a:buNone/>
+            </a:pPr>
+            <a:r>
+              <a:rPr lang="en-US" sz="1000" b="1" spc="160" kern="0" dirty="0">
+                <a:solidFill>
+                  <a:srgbClr val="8C3A1E"/>
+                </a:solidFill>
+                <a:latin typeface="Calibri" pitchFamily="34" charset="0"/>
+                <a:ea typeface="Calibri" pitchFamily="34" charset="-122"/>
+                <a:cs typeface="Calibri" pitchFamily="34" charset="-120"/>
+              </a:rPr>
               <a:t>WHAT WE CHECKED ON OURSELVES</a:t>
             </a:r>
             <a:endParaRPr lang="en-US" sz="1000" dirty="0"/>
@@ -11731,7 +15686,7 @@
       </p:sp>
       <p:graphicFrame>
         <p:nvGraphicFramePr>
-          <p:cNvPr id="9" name="Table 0"/>
+          <p:cNvPr id="10" name="Table 0"/>
           <p:cNvGraphicFramePr>
             <a:graphicFrameLocks noGrp="1"/>
           </p:cNvGraphicFramePr>
@@ -12697,1831 +16652,6 @@
           </a:p>
         </p:txBody>
       </p:sp>
-    </p:spTree>
-  </p:cSld>
-  <p:clrMapOvr>
-    <a:masterClrMapping/>
-  </p:clrMapOvr>
-</p:sld>
-</file>
-
-<file path=ppt/slides/slide9.xml><?xml version="1.0" encoding="utf-8"?>
-<p:sld xmlns:a="http://schemas.openxmlformats.org/drawingml/2006/main" xmlns:r="http://schemas.openxmlformats.org/officeDocument/2006/relationships" xmlns:p="http://schemas.openxmlformats.org/presentationml/2006/main">
-  <p:cSld name="Slide 9">
-    <p:bg>
-      <p:bgPr>
-        <a:solidFill>
-          <a:srgbClr val="FFFFFF"/>
-        </a:solidFill>
-      </p:bgPr>
-    </p:bg>
-    <p:spTree>
-      <p:nvGrpSpPr>
-        <p:cNvPr id="1" name=""/>
-        <p:cNvGrpSpPr/>
-        <p:nvPr/>
-      </p:nvGrpSpPr>
-      <p:grpSpPr>
-        <a:xfrm>
-          <a:off x="0" y="0"/>
-          <a:ext cx="0" cy="0"/>
-          <a:chOff x="0" y="0"/>
-          <a:chExt cx="0" cy="0"/>
-        </a:xfrm>
-      </p:grpSpPr>
-      <p:sp>
-        <p:nvSpPr>
-          <p:cNvPr id="2" name="Text 0"/>
-          <p:cNvSpPr/>
-          <p:nvPr/>
-        </p:nvSpPr>
-        <p:spPr>
-          <a:xfrm>
-            <a:off x="777240" y="347472"/>
-            <a:ext cx="10637215" cy="201168"/>
-          </a:xfrm>
-          <a:prstGeom prst="rect">
-            <a:avLst/>
-          </a:prstGeom>
-          <a:noFill/>
-          <a:ln/>
-        </p:spPr>
-        <p:txBody>
-          <a:bodyPr wrap="square" lIns="0" tIns="0" rIns="0" bIns="0" rtlCol="0" anchor="ctr"/>
-          <a:lstStyle/>
-          <a:p>
-            <a:pPr indent="0" marL="0">
-              <a:buNone/>
-            </a:pPr>
-            <a:r>
-              <a:rPr lang="en-US" sz="1000" b="1" spc="160" kern="0" dirty="0">
-                <a:solidFill>
-                  <a:srgbClr val="8C3A1E"/>
-                </a:solidFill>
-                <a:latin typeface="Calibri" pitchFamily="34" charset="0"/>
-                <a:ea typeface="Calibri" pitchFamily="34" charset="-122"/>
-                <a:cs typeface="Calibri" pitchFamily="34" charset="-120"/>
-              </a:rPr>
-              <a:t>WHAT FOLLOWS</a:t>
-            </a:r>
-            <a:endParaRPr lang="en-US" sz="1000" dirty="0"/>
-          </a:p>
-        </p:txBody>
-      </p:sp>
-      <p:sp>
-        <p:nvSpPr>
-          <p:cNvPr id="3" name="Text 1"/>
-          <p:cNvSpPr/>
-          <p:nvPr/>
-        </p:nvSpPr>
-        <p:spPr>
-          <a:xfrm>
-            <a:off x="777240" y="585216"/>
-            <a:ext cx="10637215" cy="493776"/>
-          </a:xfrm>
-          <a:prstGeom prst="rect">
-            <a:avLst/>
-          </a:prstGeom>
-          <a:noFill/>
-          <a:ln/>
-        </p:spPr>
-        <p:txBody>
-          <a:bodyPr wrap="square" lIns="0" tIns="0" rIns="0" bIns="0" rtlCol="0" anchor="ctr"/>
-          <a:lstStyle/>
-          <a:p>
-            <a:pPr indent="0" marL="0">
-              <a:buNone/>
-            </a:pPr>
-            <a:r>
-              <a:rPr lang="en-US" sz="2600" b="1" dirty="0">
-                <a:solidFill>
-                  <a:srgbClr val="1A1A1A"/>
-                </a:solidFill>
-                <a:latin typeface="Cambria" pitchFamily="34" charset="0"/>
-                <a:ea typeface="Cambria" pitchFamily="34" charset="-122"/>
-                <a:cs typeface="Cambria" pitchFamily="34" charset="-120"/>
-              </a:rPr>
-              <a:t>Three months, and the bar each step must clear</a:t>
-            </a:r>
-            <a:endParaRPr lang="en-US" sz="2600" dirty="0"/>
-          </a:p>
-        </p:txBody>
-      </p:sp>
-      <p:sp>
-        <p:nvSpPr>
-          <p:cNvPr id="4" name="Shape 2"/>
-          <p:cNvSpPr/>
-          <p:nvPr/>
-        </p:nvSpPr>
-        <p:spPr>
-          <a:xfrm>
-            <a:off x="777240" y="1188720"/>
-            <a:ext cx="10637215" cy="10973"/>
-          </a:xfrm>
-          <a:prstGeom prst="rect">
-            <a:avLst/>
-          </a:prstGeom>
-          <a:solidFill>
-            <a:srgbClr val="DEDCD7"/>
-          </a:solidFill>
-          <a:ln/>
-        </p:spPr>
-      </p:sp>
-      <p:graphicFrame>
-        <p:nvGraphicFramePr>
-          <p:cNvPr id="10" name="Table 0"/>
-          <p:cNvGraphicFramePr>
-            <a:graphicFrameLocks noGrp="1"/>
-          </p:cNvGraphicFramePr>
-          <p:nvPr>
-            <p:extLst>
-              <p:ext uri="{D42A27DB-BD31-4B8C-83A1-F6EECF244321}">
-                <p14:modId xmlns:p14="http://schemas.microsoft.com/office/powerpoint/2010/main" val="1579011935"/>
-              </p:ext>
-            </p:extLst>
-          </p:nvPr>
-        </p:nvGraphicFramePr>
-        <p:xfrm>
-          <a:off x="777240" y="1261872"/>
-          <a:ext cx="10637215" cy="914400"/>
-        </p:xfrm>
-        <a:graphic>
-          <a:graphicData uri="http://schemas.openxmlformats.org/drawingml/2006/table">
-            <a:tbl>
-              <a:tblPr/>
-              <a:tblGrid>
-                <a:gridCol w="1463040"/>
-                <a:gridCol w="1920240"/>
-                <a:gridCol w="4937760"/>
-                <a:gridCol w="2313432"/>
-              </a:tblGrid>
-              <a:tr h="640080">
-                <a:tc>
-                  <a:txBody>
-                    <a:bodyPr/>
-                    <a:lstStyle/>
-                    <a:p>
-                      <a:pPr indent="0" marL="0">
-                        <a:buNone/>
-                      </a:pPr>
-                      <a:r>
-                        <a:rPr lang="en-US" sz="1000" b="1" dirty="0">
-                          <a:solidFill>
-                            <a:srgbClr val="1A1A1A"/>
-                          </a:solidFill>
-                          <a:latin typeface="Calibri" pitchFamily="34" charset="0"/>
-                          <a:ea typeface="Calibri" pitchFamily="34" charset="-122"/>
-                          <a:cs typeface="Calibri" pitchFamily="34" charset="-120"/>
-                        </a:rPr>
-                        <a:t>Month</a:t>
-                      </a:r>
-                      <a:endParaRPr lang="en-US" sz="1000" dirty="0">
-                        <a:latin typeface="Calibri" charset="0"/>
-                        <a:ea typeface="Calibri" charset="0"/>
-                        <a:cs typeface="Calibri" charset="0"/>
-                      </a:endParaRPr>
-                    </a:p>
-                  </a:txBody>
-                  <a:tcPr marL="50800" marR="50800" marT="50800" marB="50800" anchor="t">
-                    <a:lnL w="6350" cap="flat" cmpd="sng" algn="ctr">
-                      <a:solidFill>
-                        <a:srgbClr val="DEDCD7"/>
-                      </a:solidFill>
-                      <a:prstDash val="solid"/>
-                      <a:round/>
-                      <a:headEnd type="none" w="med" len="med"/>
-                      <a:tailEnd type="none" w="med" len="med"/>
-                    </a:lnL>
-                    <a:lnR w="6350" cap="flat" cmpd="sng" algn="ctr">
-                      <a:solidFill>
-                        <a:srgbClr val="DEDCD7"/>
-                      </a:solidFill>
-                      <a:prstDash val="solid"/>
-                      <a:round/>
-                      <a:headEnd type="none" w="med" len="med"/>
-                      <a:tailEnd type="none" w="med" len="med"/>
-                    </a:lnR>
-                    <a:lnT w="6350" cap="flat" cmpd="sng" algn="ctr">
-                      <a:solidFill>
-                        <a:srgbClr val="DEDCD7"/>
-                      </a:solidFill>
-                      <a:prstDash val="solid"/>
-                      <a:round/>
-                      <a:headEnd type="none" w="med" len="med"/>
-                      <a:tailEnd type="none" w="med" len="med"/>
-                    </a:lnT>
-                    <a:lnB w="6350" cap="flat" cmpd="sng" algn="ctr">
-                      <a:solidFill>
-                        <a:srgbClr val="DEDCD7"/>
-                      </a:solidFill>
-                      <a:prstDash val="solid"/>
-                      <a:round/>
-                      <a:headEnd type="none" w="med" len="med"/>
-                      <a:tailEnd type="none" w="med" len="med"/>
-                    </a:lnB>
-                    <a:solidFill>
-                      <a:srgbClr val="F6F5F2"/>
-                    </a:solidFill>
-                  </a:tcPr>
-                </a:tc>
-                <a:tc>
-                  <a:txBody>
-                    <a:bodyPr/>
-                    <a:lstStyle/>
-                    <a:p>
-                      <a:pPr indent="0" marL="0">
-                        <a:buNone/>
-                      </a:pPr>
-                      <a:r>
-                        <a:rPr lang="en-US" sz="1000" b="1" dirty="0">
-                          <a:solidFill>
-                            <a:srgbClr val="1A1A1A"/>
-                          </a:solidFill>
-                          <a:latin typeface="Calibri" pitchFamily="34" charset="0"/>
-                          <a:ea typeface="Calibri" pitchFamily="34" charset="-122"/>
-                          <a:cs typeface="Calibri" pitchFamily="34" charset="-120"/>
-                        </a:rPr>
-                        <a:t>Focus</a:t>
-                      </a:r>
-                      <a:endParaRPr lang="en-US" sz="1000" dirty="0">
-                        <a:latin typeface="Calibri" charset="0"/>
-                        <a:ea typeface="Calibri" charset="0"/>
-                        <a:cs typeface="Calibri" charset="0"/>
-                      </a:endParaRPr>
-                    </a:p>
-                  </a:txBody>
-                  <a:tcPr marL="50800" marR="50800" marT="50800" marB="50800" anchor="t">
-                    <a:lnL w="6350" cap="flat" cmpd="sng" algn="ctr">
-                      <a:solidFill>
-                        <a:srgbClr val="DEDCD7"/>
-                      </a:solidFill>
-                      <a:prstDash val="solid"/>
-                      <a:round/>
-                      <a:headEnd type="none" w="med" len="med"/>
-                      <a:tailEnd type="none" w="med" len="med"/>
-                    </a:lnL>
-                    <a:lnR w="6350" cap="flat" cmpd="sng" algn="ctr">
-                      <a:solidFill>
-                        <a:srgbClr val="DEDCD7"/>
-                      </a:solidFill>
-                      <a:prstDash val="solid"/>
-                      <a:round/>
-                      <a:headEnd type="none" w="med" len="med"/>
-                      <a:tailEnd type="none" w="med" len="med"/>
-                    </a:lnR>
-                    <a:lnT w="6350" cap="flat" cmpd="sng" algn="ctr">
-                      <a:solidFill>
-                        <a:srgbClr val="DEDCD7"/>
-                      </a:solidFill>
-                      <a:prstDash val="solid"/>
-                      <a:round/>
-                      <a:headEnd type="none" w="med" len="med"/>
-                      <a:tailEnd type="none" w="med" len="med"/>
-                    </a:lnT>
-                    <a:lnB w="6350" cap="flat" cmpd="sng" algn="ctr">
-                      <a:solidFill>
-                        <a:srgbClr val="DEDCD7"/>
-                      </a:solidFill>
-                      <a:prstDash val="solid"/>
-                      <a:round/>
-                      <a:headEnd type="none" w="med" len="med"/>
-                      <a:tailEnd type="none" w="med" len="med"/>
-                    </a:lnB>
-                    <a:solidFill>
-                      <a:srgbClr val="F6F5F2"/>
-                    </a:solidFill>
-                  </a:tcPr>
-                </a:tc>
-                <a:tc>
-                  <a:txBody>
-                    <a:bodyPr/>
-                    <a:lstStyle/>
-                    <a:p>
-                      <a:pPr indent="0" marL="0">
-                        <a:buNone/>
-                      </a:pPr>
-                      <a:r>
-                        <a:rPr lang="en-US" sz="1000" b="1" dirty="0">
-                          <a:solidFill>
-                            <a:srgbClr val="1A1A1A"/>
-                          </a:solidFill>
-                          <a:latin typeface="Calibri" pitchFamily="34" charset="0"/>
-                          <a:ea typeface="Calibri" pitchFamily="34" charset="-122"/>
-                          <a:cs typeface="Calibri" pitchFamily="34" charset="-120"/>
-                        </a:rPr>
-                        <a:t>Deliverable</a:t>
-                      </a:r>
-                      <a:endParaRPr lang="en-US" sz="1000" dirty="0">
-                        <a:latin typeface="Calibri" charset="0"/>
-                        <a:ea typeface="Calibri" charset="0"/>
-                        <a:cs typeface="Calibri" charset="0"/>
-                      </a:endParaRPr>
-                    </a:p>
-                  </a:txBody>
-                  <a:tcPr marL="50800" marR="50800" marT="50800" marB="50800" anchor="t">
-                    <a:lnL w="6350" cap="flat" cmpd="sng" algn="ctr">
-                      <a:solidFill>
-                        <a:srgbClr val="DEDCD7"/>
-                      </a:solidFill>
-                      <a:prstDash val="solid"/>
-                      <a:round/>
-                      <a:headEnd type="none" w="med" len="med"/>
-                      <a:tailEnd type="none" w="med" len="med"/>
-                    </a:lnL>
-                    <a:lnR w="6350" cap="flat" cmpd="sng" algn="ctr">
-                      <a:solidFill>
-                        <a:srgbClr val="DEDCD7"/>
-                      </a:solidFill>
-                      <a:prstDash val="solid"/>
-                      <a:round/>
-                      <a:headEnd type="none" w="med" len="med"/>
-                      <a:tailEnd type="none" w="med" len="med"/>
-                    </a:lnR>
-                    <a:lnT w="6350" cap="flat" cmpd="sng" algn="ctr">
-                      <a:solidFill>
-                        <a:srgbClr val="DEDCD7"/>
-                      </a:solidFill>
-                      <a:prstDash val="solid"/>
-                      <a:round/>
-                      <a:headEnd type="none" w="med" len="med"/>
-                      <a:tailEnd type="none" w="med" len="med"/>
-                    </a:lnT>
-                    <a:lnB w="6350" cap="flat" cmpd="sng" algn="ctr">
-                      <a:solidFill>
-                        <a:srgbClr val="DEDCD7"/>
-                      </a:solidFill>
-                      <a:prstDash val="solid"/>
-                      <a:round/>
-                      <a:headEnd type="none" w="med" len="med"/>
-                      <a:tailEnd type="none" w="med" len="med"/>
-                    </a:lnB>
-                    <a:solidFill>
-                      <a:srgbClr val="F6F5F2"/>
-                    </a:solidFill>
-                  </a:tcPr>
-                </a:tc>
-                <a:tc>
-                  <a:txBody>
-                    <a:bodyPr/>
-                    <a:lstStyle/>
-                    <a:p>
-                      <a:pPr indent="0" marL="0">
-                        <a:buNone/>
-                      </a:pPr>
-                      <a:r>
-                        <a:rPr lang="en-US" sz="1000" b="1" dirty="0">
-                          <a:solidFill>
-                            <a:srgbClr val="1A1A1A"/>
-                          </a:solidFill>
-                          <a:latin typeface="Calibri" pitchFamily="34" charset="0"/>
-                          <a:ea typeface="Calibri" pitchFamily="34" charset="-122"/>
-                          <a:cs typeface="Calibri" pitchFamily="34" charset="-120"/>
-                        </a:rPr>
-                        <a:t>Must beat</a:t>
-                      </a:r>
-                      <a:endParaRPr lang="en-US" sz="1000" dirty="0">
-                        <a:latin typeface="Calibri" charset="0"/>
-                        <a:ea typeface="Calibri" charset="0"/>
-                        <a:cs typeface="Calibri" charset="0"/>
-                      </a:endParaRPr>
-                    </a:p>
-                  </a:txBody>
-                  <a:tcPr marL="50800" marR="50800" marT="50800" marB="50800" anchor="t">
-                    <a:lnL w="6350" cap="flat" cmpd="sng" algn="ctr">
-                      <a:solidFill>
-                        <a:srgbClr val="DEDCD7"/>
-                      </a:solidFill>
-                      <a:prstDash val="solid"/>
-                      <a:round/>
-                      <a:headEnd type="none" w="med" len="med"/>
-                      <a:tailEnd type="none" w="med" len="med"/>
-                    </a:lnL>
-                    <a:lnR w="6350" cap="flat" cmpd="sng" algn="ctr">
-                      <a:solidFill>
-                        <a:srgbClr val="DEDCD7"/>
-                      </a:solidFill>
-                      <a:prstDash val="solid"/>
-                      <a:round/>
-                      <a:headEnd type="none" w="med" len="med"/>
-                      <a:tailEnd type="none" w="med" len="med"/>
-                    </a:lnR>
-                    <a:lnT w="6350" cap="flat" cmpd="sng" algn="ctr">
-                      <a:solidFill>
-                        <a:srgbClr val="DEDCD7"/>
-                      </a:solidFill>
-                      <a:prstDash val="solid"/>
-                      <a:round/>
-                      <a:headEnd type="none" w="med" len="med"/>
-                      <a:tailEnd type="none" w="med" len="med"/>
-                    </a:lnT>
-                    <a:lnB w="6350" cap="flat" cmpd="sng" algn="ctr">
-                      <a:solidFill>
-                        <a:srgbClr val="DEDCD7"/>
-                      </a:solidFill>
-                      <a:prstDash val="solid"/>
-                      <a:round/>
-                      <a:headEnd type="none" w="med" len="med"/>
-                      <a:tailEnd type="none" w="med" len="med"/>
-                    </a:lnB>
-                    <a:solidFill>
-                      <a:srgbClr val="F6F5F2"/>
-                    </a:solidFill>
-                  </a:tcPr>
-                </a:tc>
-              </a:tr>
-              <a:tr h="640080">
-                <a:tc>
-                  <a:txBody>
-                    <a:bodyPr/>
-                    <a:lstStyle/>
-                    <a:p>
-                      <a:pPr indent="0" marL="0">
-                        <a:buNone/>
-                      </a:pPr>
-                      <a:r>
-                        <a:rPr lang="en-US" sz="1000" dirty="0">
-                          <a:solidFill>
-                            <a:srgbClr val="1A1A1A"/>
-                          </a:solidFill>
-                          <a:latin typeface="Calibri" pitchFamily="34" charset="0"/>
-                          <a:ea typeface="Calibri" pitchFamily="34" charset="-122"/>
-                          <a:cs typeface="Calibri" pitchFamily="34" charset="-120"/>
-                        </a:rPr>
-                        <a:t>1 · Sep–Oct</a:t>
-                      </a:r>
-                      <a:endParaRPr lang="en-US" sz="1000" dirty="0">
-                        <a:latin typeface="Calibri" charset="0"/>
-                        <a:ea typeface="Calibri" charset="0"/>
-                        <a:cs typeface="Calibri" charset="0"/>
-                      </a:endParaRPr>
-                    </a:p>
-                  </a:txBody>
-                  <a:tcPr marL="50800" marR="50800" marT="50800" marB="50800" anchor="t">
-                    <a:lnL w="6350" cap="flat" cmpd="sng" algn="ctr">
-                      <a:solidFill>
-                        <a:srgbClr val="DEDCD7"/>
-                      </a:solidFill>
-                      <a:prstDash val="solid"/>
-                      <a:round/>
-                      <a:headEnd type="none" w="med" len="med"/>
-                      <a:tailEnd type="none" w="med" len="med"/>
-                    </a:lnL>
-                    <a:lnR w="6350" cap="flat" cmpd="sng" algn="ctr">
-                      <a:solidFill>
-                        <a:srgbClr val="DEDCD7"/>
-                      </a:solidFill>
-                      <a:prstDash val="solid"/>
-                      <a:round/>
-                      <a:headEnd type="none" w="med" len="med"/>
-                      <a:tailEnd type="none" w="med" len="med"/>
-                    </a:lnR>
-                    <a:lnT w="6350" cap="flat" cmpd="sng" algn="ctr">
-                      <a:solidFill>
-                        <a:srgbClr val="DEDCD7"/>
-                      </a:solidFill>
-                      <a:prstDash val="solid"/>
-                      <a:round/>
-                      <a:headEnd type="none" w="med" len="med"/>
-                      <a:tailEnd type="none" w="med" len="med"/>
-                    </a:lnT>
-                    <a:lnB w="6350" cap="flat" cmpd="sng" algn="ctr">
-                      <a:solidFill>
-                        <a:srgbClr val="DEDCD7"/>
-                      </a:solidFill>
-                      <a:prstDash val="solid"/>
-                      <a:round/>
-                      <a:headEnd type="none" w="med" len="med"/>
-                      <a:tailEnd type="none" w="med" len="med"/>
-                    </a:lnB>
-                  </a:tcPr>
-                </a:tc>
-                <a:tc>
-                  <a:txBody>
-                    <a:bodyPr/>
-                    <a:lstStyle/>
-                    <a:p>
-                      <a:pPr indent="0" marL="0">
-                        <a:buNone/>
-                      </a:pPr>
-                      <a:r>
-                        <a:rPr lang="en-US" sz="1000" dirty="0">
-                          <a:solidFill>
-                            <a:srgbClr val="1A1A1A"/>
-                          </a:solidFill>
-                          <a:latin typeface="Calibri" pitchFamily="34" charset="0"/>
-                          <a:ea typeface="Calibri" pitchFamily="34" charset="-122"/>
-                          <a:cs typeface="Calibri" pitchFamily="34" charset="-120"/>
-                        </a:rPr>
-                        <a:t>Supervision at scale</a:t>
-                      </a:r>
-                      <a:endParaRPr lang="en-US" sz="1000" dirty="0">
-                        <a:latin typeface="Calibri" charset="0"/>
-                        <a:ea typeface="Calibri" charset="0"/>
-                        <a:cs typeface="Calibri" charset="0"/>
-                      </a:endParaRPr>
-                    </a:p>
-                  </a:txBody>
-                  <a:tcPr marL="50800" marR="50800" marT="50800" marB="50800" anchor="t">
-                    <a:lnL w="6350" cap="flat" cmpd="sng" algn="ctr">
-                      <a:solidFill>
-                        <a:srgbClr val="DEDCD7"/>
-                      </a:solidFill>
-                      <a:prstDash val="solid"/>
-                      <a:round/>
-                      <a:headEnd type="none" w="med" len="med"/>
-                      <a:tailEnd type="none" w="med" len="med"/>
-                    </a:lnL>
-                    <a:lnR w="6350" cap="flat" cmpd="sng" algn="ctr">
-                      <a:solidFill>
-                        <a:srgbClr val="DEDCD7"/>
-                      </a:solidFill>
-                      <a:prstDash val="solid"/>
-                      <a:round/>
-                      <a:headEnd type="none" w="med" len="med"/>
-                      <a:tailEnd type="none" w="med" len="med"/>
-                    </a:lnR>
-                    <a:lnT w="6350" cap="flat" cmpd="sng" algn="ctr">
-                      <a:solidFill>
-                        <a:srgbClr val="DEDCD7"/>
-                      </a:solidFill>
-                      <a:prstDash val="solid"/>
-                      <a:round/>
-                      <a:headEnd type="none" w="med" len="med"/>
-                      <a:tailEnd type="none" w="med" len="med"/>
-                    </a:lnT>
-                    <a:lnB w="6350" cap="flat" cmpd="sng" algn="ctr">
-                      <a:solidFill>
-                        <a:srgbClr val="DEDCD7"/>
-                      </a:solidFill>
-                      <a:prstDash val="solid"/>
-                      <a:round/>
-                      <a:headEnd type="none" w="med" len="med"/>
-                      <a:tailEnd type="none" w="med" len="med"/>
-                    </a:lnB>
-                  </a:tcPr>
-                </a:tc>
-                <a:tc>
-                  <a:txBody>
-                    <a:bodyPr/>
-                    <a:lstStyle/>
-                    <a:p>
-                      <a:pPr indent="0" marL="0">
-                        <a:buNone/>
-                      </a:pPr>
-                      <a:r>
-                        <a:rPr lang="en-US" sz="1000" dirty="0">
-                          <a:solidFill>
-                            <a:srgbClr val="1A1A1A"/>
-                          </a:solidFill>
-                          <a:latin typeface="Calibri" pitchFamily="34" charset="0"/>
-                          <a:ea typeface="Calibri" pitchFamily="34" charset="-122"/>
-                          <a:cs typeface="Calibri" pitchFamily="34" charset="-120"/>
-                        </a:rPr>
-                        <a:t>all 51 MagicBrush shards (~8,800 turns); re-measure the scaling curve</a:t>
-                      </a:r>
-                      <a:endParaRPr lang="en-US" sz="1000" dirty="0">
-                        <a:latin typeface="Calibri" charset="0"/>
-                        <a:ea typeface="Calibri" charset="0"/>
-                        <a:cs typeface="Calibri" charset="0"/>
-                      </a:endParaRPr>
-                    </a:p>
-                  </a:txBody>
-                  <a:tcPr marL="50800" marR="50800" marT="50800" marB="50800" anchor="t">
-                    <a:lnL w="6350" cap="flat" cmpd="sng" algn="ctr">
-                      <a:solidFill>
-                        <a:srgbClr val="DEDCD7"/>
-                      </a:solidFill>
-                      <a:prstDash val="solid"/>
-                      <a:round/>
-                      <a:headEnd type="none" w="med" len="med"/>
-                      <a:tailEnd type="none" w="med" len="med"/>
-                    </a:lnL>
-                    <a:lnR w="6350" cap="flat" cmpd="sng" algn="ctr">
-                      <a:solidFill>
-                        <a:srgbClr val="DEDCD7"/>
-                      </a:solidFill>
-                      <a:prstDash val="solid"/>
-                      <a:round/>
-                      <a:headEnd type="none" w="med" len="med"/>
-                      <a:tailEnd type="none" w="med" len="med"/>
-                    </a:lnR>
-                    <a:lnT w="6350" cap="flat" cmpd="sng" algn="ctr">
-                      <a:solidFill>
-                        <a:srgbClr val="DEDCD7"/>
-                      </a:solidFill>
-                      <a:prstDash val="solid"/>
-                      <a:round/>
-                      <a:headEnd type="none" w="med" len="med"/>
-                      <a:tailEnd type="none" w="med" len="med"/>
-                    </a:lnT>
-                    <a:lnB w="6350" cap="flat" cmpd="sng" algn="ctr">
-                      <a:solidFill>
-                        <a:srgbClr val="DEDCD7"/>
-                      </a:solidFill>
-                      <a:prstDash val="solid"/>
-                      <a:round/>
-                      <a:headEnd type="none" w="med" len="med"/>
-                      <a:tailEnd type="none" w="med" len="med"/>
-                    </a:lnB>
-                  </a:tcPr>
-                </a:tc>
-                <a:tc>
-                  <a:txBody>
-                    <a:bodyPr/>
-                    <a:lstStyle/>
-                    <a:p>
-                      <a:pPr indent="0" marL="0">
-                        <a:buNone/>
-                      </a:pPr>
-                      <a:r>
-                        <a:rPr lang="en-US" sz="1000" dirty="0">
-                          <a:solidFill>
-                            <a:srgbClr val="1A1A1A"/>
-                          </a:solidFill>
-                          <a:latin typeface="Calibri" pitchFamily="34" charset="0"/>
-                          <a:ea typeface="Calibri" pitchFamily="34" charset="-122"/>
-                          <a:cs typeface="Calibri" pitchFamily="34" charset="-120"/>
-                        </a:rPr>
-                        <a:t>0.1718 at 2,278 samples</a:t>
-                      </a:r>
-                      <a:endParaRPr lang="en-US" sz="1000" dirty="0">
-                        <a:latin typeface="Calibri" charset="0"/>
-                        <a:ea typeface="Calibri" charset="0"/>
-                        <a:cs typeface="Calibri" charset="0"/>
-                      </a:endParaRPr>
-                    </a:p>
-                  </a:txBody>
-                  <a:tcPr marL="50800" marR="50800" marT="50800" marB="50800" anchor="t">
-                    <a:lnL w="6350" cap="flat" cmpd="sng" algn="ctr">
-                      <a:solidFill>
-                        <a:srgbClr val="DEDCD7"/>
-                      </a:solidFill>
-                      <a:prstDash val="solid"/>
-                      <a:round/>
-                      <a:headEnd type="none" w="med" len="med"/>
-                      <a:tailEnd type="none" w="med" len="med"/>
-                    </a:lnL>
-                    <a:lnR w="6350" cap="flat" cmpd="sng" algn="ctr">
-                      <a:solidFill>
-                        <a:srgbClr val="DEDCD7"/>
-                      </a:solidFill>
-                      <a:prstDash val="solid"/>
-                      <a:round/>
-                      <a:headEnd type="none" w="med" len="med"/>
-                      <a:tailEnd type="none" w="med" len="med"/>
-                    </a:lnR>
-                    <a:lnT w="6350" cap="flat" cmpd="sng" algn="ctr">
-                      <a:solidFill>
-                        <a:srgbClr val="DEDCD7"/>
-                      </a:solidFill>
-                      <a:prstDash val="solid"/>
-                      <a:round/>
-                      <a:headEnd type="none" w="med" len="med"/>
-                      <a:tailEnd type="none" w="med" len="med"/>
-                    </a:lnT>
-                    <a:lnB w="6350" cap="flat" cmpd="sng" algn="ctr">
-                      <a:solidFill>
-                        <a:srgbClr val="DEDCD7"/>
-                      </a:solidFill>
-                      <a:prstDash val="solid"/>
-                      <a:round/>
-                      <a:headEnd type="none" w="med" len="med"/>
-                      <a:tailEnd type="none" w="med" len="med"/>
-                    </a:lnB>
-                  </a:tcPr>
-                </a:tc>
-              </a:tr>
-              <a:tr h="640080">
-                <a:tc>
-                  <a:txBody>
-                    <a:bodyPr/>
-                    <a:lstStyle/>
-                    <a:p>
-                      <a:pPr indent="0" marL="0">
-                        <a:buNone/>
-                      </a:pPr>
-                      <a:r>
-                        <a:rPr lang="en-US" sz="1000" dirty="0">
-                          <a:solidFill>
-                            <a:srgbClr val="1A1A1A"/>
-                          </a:solidFill>
-                          <a:latin typeface="Calibri" pitchFamily="34" charset="0"/>
-                          <a:ea typeface="Calibri" pitchFamily="34" charset="-122"/>
-                          <a:cs typeface="Calibri" pitchFamily="34" charset="-120"/>
-                        </a:rPr>
-                        <a:t>2 · Oct–Nov</a:t>
-                      </a:r>
-                      <a:endParaRPr lang="en-US" sz="1000" dirty="0">
-                        <a:latin typeface="Calibri" charset="0"/>
-                        <a:ea typeface="Calibri" charset="0"/>
-                        <a:cs typeface="Calibri" charset="0"/>
-                      </a:endParaRPr>
-                    </a:p>
-                  </a:txBody>
-                  <a:tcPr marL="50800" marR="50800" marT="50800" marB="50800" anchor="t">
-                    <a:lnL w="6350" cap="flat" cmpd="sng" algn="ctr">
-                      <a:solidFill>
-                        <a:srgbClr val="DEDCD7"/>
-                      </a:solidFill>
-                      <a:prstDash val="solid"/>
-                      <a:round/>
-                      <a:headEnd type="none" w="med" len="med"/>
-                      <a:tailEnd type="none" w="med" len="med"/>
-                    </a:lnL>
-                    <a:lnR w="6350" cap="flat" cmpd="sng" algn="ctr">
-                      <a:solidFill>
-                        <a:srgbClr val="DEDCD7"/>
-                      </a:solidFill>
-                      <a:prstDash val="solid"/>
-                      <a:round/>
-                      <a:headEnd type="none" w="med" len="med"/>
-                      <a:tailEnd type="none" w="med" len="med"/>
-                    </a:lnR>
-                    <a:lnT w="6350" cap="flat" cmpd="sng" algn="ctr">
-                      <a:solidFill>
-                        <a:srgbClr val="DEDCD7"/>
-                      </a:solidFill>
-                      <a:prstDash val="solid"/>
-                      <a:round/>
-                      <a:headEnd type="none" w="med" len="med"/>
-                      <a:tailEnd type="none" w="med" len="med"/>
-                    </a:lnT>
-                    <a:lnB w="6350" cap="flat" cmpd="sng" algn="ctr">
-                      <a:solidFill>
-                        <a:srgbClr val="DEDCD7"/>
-                      </a:solidFill>
-                      <a:prstDash val="solid"/>
-                      <a:round/>
-                      <a:headEnd type="none" w="med" len="med"/>
-                      <a:tailEnd type="none" w="med" len="med"/>
-                    </a:lnB>
-                  </a:tcPr>
-                </a:tc>
-                <a:tc>
-                  <a:txBody>
-                    <a:bodyPr/>
-                    <a:lstStyle/>
-                    <a:p>
-                      <a:pPr indent="0" marL="0">
-                        <a:buNone/>
-                      </a:pPr>
-                      <a:r>
-                        <a:rPr lang="en-US" sz="1000" dirty="0">
-                          <a:solidFill>
-                            <a:srgbClr val="1A1A1A"/>
-                          </a:solidFill>
-                          <a:latin typeface="Calibri" pitchFamily="34" charset="0"/>
-                          <a:ea typeface="Calibri" pitchFamily="34" charset="-122"/>
-                          <a:cs typeface="Calibri" pitchFamily="34" charset="-120"/>
-                        </a:rPr>
-                        <a:t>Features, not heads</a:t>
-                      </a:r>
-                      <a:endParaRPr lang="en-US" sz="1000" dirty="0">
-                        <a:latin typeface="Calibri" charset="0"/>
-                        <a:ea typeface="Calibri" charset="0"/>
-                        <a:cs typeface="Calibri" charset="0"/>
-                      </a:endParaRPr>
-                    </a:p>
-                  </a:txBody>
-                  <a:tcPr marL="50800" marR="50800" marT="50800" marB="50800" anchor="t">
-                    <a:lnL w="6350" cap="flat" cmpd="sng" algn="ctr">
-                      <a:solidFill>
-                        <a:srgbClr val="DEDCD7"/>
-                      </a:solidFill>
-                      <a:prstDash val="solid"/>
-                      <a:round/>
-                      <a:headEnd type="none" w="med" len="med"/>
-                      <a:tailEnd type="none" w="med" len="med"/>
-                    </a:lnL>
-                    <a:lnR w="6350" cap="flat" cmpd="sng" algn="ctr">
-                      <a:solidFill>
-                        <a:srgbClr val="DEDCD7"/>
-                      </a:solidFill>
-                      <a:prstDash val="solid"/>
-                      <a:round/>
-                      <a:headEnd type="none" w="med" len="med"/>
-                      <a:tailEnd type="none" w="med" len="med"/>
-                    </a:lnR>
-                    <a:lnT w="6350" cap="flat" cmpd="sng" algn="ctr">
-                      <a:solidFill>
-                        <a:srgbClr val="DEDCD7"/>
-                      </a:solidFill>
-                      <a:prstDash val="solid"/>
-                      <a:round/>
-                      <a:headEnd type="none" w="med" len="med"/>
-                      <a:tailEnd type="none" w="med" len="med"/>
-                    </a:lnT>
-                    <a:lnB w="6350" cap="flat" cmpd="sng" algn="ctr">
-                      <a:solidFill>
-                        <a:srgbClr val="DEDCD7"/>
-                      </a:solidFill>
-                      <a:prstDash val="solid"/>
-                      <a:round/>
-                      <a:headEnd type="none" w="med" len="med"/>
-                      <a:tailEnd type="none" w="med" len="med"/>
-                    </a:lnB>
-                  </a:tcPr>
-                </a:tc>
-                <a:tc>
-                  <a:txBody>
-                    <a:bodyPr/>
-                    <a:lstStyle/>
-                    <a:p>
-                      <a:pPr indent="0" marL="0">
-                        <a:buNone/>
-                      </a:pPr>
-                      <a:r>
-                        <a:rPr lang="en-US" sz="1000" dirty="0">
-                          <a:solidFill>
-                            <a:srgbClr val="1A1A1A"/>
-                          </a:solidFill>
-                          <a:latin typeface="Calibri" pitchFamily="34" charset="0"/>
-                          <a:ea typeface="Calibri" pitchFamily="34" charset="-122"/>
-                          <a:cs typeface="Calibri" pitchFamily="34" charset="-120"/>
-                        </a:rPr>
-                        <a:t>exp08/11 show the head is not the insertion bottleneck — test text-conditioned features</a:t>
-                      </a:r>
-                      <a:endParaRPr lang="en-US" sz="1000" dirty="0">
-                        <a:latin typeface="Calibri" charset="0"/>
-                        <a:ea typeface="Calibri" charset="0"/>
-                        <a:cs typeface="Calibri" charset="0"/>
-                      </a:endParaRPr>
-                    </a:p>
-                  </a:txBody>
-                  <a:tcPr marL="50800" marR="50800" marT="50800" marB="50800" anchor="t">
-                    <a:lnL w="6350" cap="flat" cmpd="sng" algn="ctr">
-                      <a:solidFill>
-                        <a:srgbClr val="DEDCD7"/>
-                      </a:solidFill>
-                      <a:prstDash val="solid"/>
-                      <a:round/>
-                      <a:headEnd type="none" w="med" len="med"/>
-                      <a:tailEnd type="none" w="med" len="med"/>
-                    </a:lnL>
-                    <a:lnR w="6350" cap="flat" cmpd="sng" algn="ctr">
-                      <a:solidFill>
-                        <a:srgbClr val="DEDCD7"/>
-                      </a:solidFill>
-                      <a:prstDash val="solid"/>
-                      <a:round/>
-                      <a:headEnd type="none" w="med" len="med"/>
-                      <a:tailEnd type="none" w="med" len="med"/>
-                    </a:lnR>
-                    <a:lnT w="6350" cap="flat" cmpd="sng" algn="ctr">
-                      <a:solidFill>
-                        <a:srgbClr val="DEDCD7"/>
-                      </a:solidFill>
-                      <a:prstDash val="solid"/>
-                      <a:round/>
-                      <a:headEnd type="none" w="med" len="med"/>
-                      <a:tailEnd type="none" w="med" len="med"/>
-                    </a:lnT>
-                    <a:lnB w="6350" cap="flat" cmpd="sng" algn="ctr">
-                      <a:solidFill>
-                        <a:srgbClr val="DEDCD7"/>
-                      </a:solidFill>
-                      <a:prstDash val="solid"/>
-                      <a:round/>
-                      <a:headEnd type="none" w="med" len="med"/>
-                      <a:tailEnd type="none" w="med" len="med"/>
-                    </a:lnB>
-                  </a:tcPr>
-                </a:tc>
-                <a:tc>
-                  <a:txBody>
-                    <a:bodyPr/>
-                    <a:lstStyle/>
-                    <a:p>
-                      <a:pPr indent="0" marL="0">
-                        <a:buNone/>
-                      </a:pPr>
-                      <a:r>
-                        <a:rPr lang="en-US" sz="1000" dirty="0">
-                          <a:solidFill>
-                            <a:srgbClr val="1A1A1A"/>
-                          </a:solidFill>
-                          <a:latin typeface="Calibri" pitchFamily="34" charset="0"/>
-                          <a:ea typeface="Calibri" pitchFamily="34" charset="-122"/>
-                          <a:cs typeface="Calibri" pitchFamily="34" charset="-120"/>
-                        </a:rPr>
-                        <a:t>a random-basis control of equal size</a:t>
-                      </a:r>
-                      <a:endParaRPr lang="en-US" sz="1000" dirty="0">
-                        <a:latin typeface="Calibri" charset="0"/>
-                        <a:ea typeface="Calibri" charset="0"/>
-                        <a:cs typeface="Calibri" charset="0"/>
-                      </a:endParaRPr>
-                    </a:p>
-                  </a:txBody>
-                  <a:tcPr marL="50800" marR="50800" marT="50800" marB="50800" anchor="t">
-                    <a:lnL w="6350" cap="flat" cmpd="sng" algn="ctr">
-                      <a:solidFill>
-                        <a:srgbClr val="DEDCD7"/>
-                      </a:solidFill>
-                      <a:prstDash val="solid"/>
-                      <a:round/>
-                      <a:headEnd type="none" w="med" len="med"/>
-                      <a:tailEnd type="none" w="med" len="med"/>
-                    </a:lnL>
-                    <a:lnR w="6350" cap="flat" cmpd="sng" algn="ctr">
-                      <a:solidFill>
-                        <a:srgbClr val="DEDCD7"/>
-                      </a:solidFill>
-                      <a:prstDash val="solid"/>
-                      <a:round/>
-                      <a:headEnd type="none" w="med" len="med"/>
-                      <a:tailEnd type="none" w="med" len="med"/>
-                    </a:lnR>
-                    <a:lnT w="6350" cap="flat" cmpd="sng" algn="ctr">
-                      <a:solidFill>
-                        <a:srgbClr val="DEDCD7"/>
-                      </a:solidFill>
-                      <a:prstDash val="solid"/>
-                      <a:round/>
-                      <a:headEnd type="none" w="med" len="med"/>
-                      <a:tailEnd type="none" w="med" len="med"/>
-                    </a:lnT>
-                    <a:lnB w="6350" cap="flat" cmpd="sng" algn="ctr">
-                      <a:solidFill>
-                        <a:srgbClr val="DEDCD7"/>
-                      </a:solidFill>
-                      <a:prstDash val="solid"/>
-                      <a:round/>
-                      <a:headEnd type="none" w="med" len="med"/>
-                      <a:tailEnd type="none" w="med" len="med"/>
-                    </a:lnB>
-                  </a:tcPr>
-                </a:tc>
-              </a:tr>
-              <a:tr h="640080">
-                <a:tc>
-                  <a:txBody>
-                    <a:bodyPr/>
-                    <a:lstStyle/>
-                    <a:p>
-                      <a:pPr indent="0" marL="0">
-                        <a:buNone/>
-                      </a:pPr>
-                      <a:r>
-                        <a:rPr lang="en-US" sz="1000" dirty="0">
-                          <a:solidFill>
-                            <a:srgbClr val="1A1A1A"/>
-                          </a:solidFill>
-                          <a:latin typeface="Calibri" pitchFamily="34" charset="0"/>
-                          <a:ea typeface="Calibri" pitchFamily="34" charset="-122"/>
-                          <a:cs typeface="Calibri" pitchFamily="34" charset="-120"/>
-                        </a:rPr>
-                        <a:t>3 · Nov–Dec</a:t>
-                      </a:r>
-                      <a:endParaRPr lang="en-US" sz="1000" dirty="0">
-                        <a:latin typeface="Calibri" charset="0"/>
-                        <a:ea typeface="Calibri" charset="0"/>
-                        <a:cs typeface="Calibri" charset="0"/>
-                      </a:endParaRPr>
-                    </a:p>
-                  </a:txBody>
-                  <a:tcPr marL="50800" marR="50800" marT="50800" marB="50800" anchor="t">
-                    <a:lnL w="6350" cap="flat" cmpd="sng" algn="ctr">
-                      <a:solidFill>
-                        <a:srgbClr val="DEDCD7"/>
-                      </a:solidFill>
-                      <a:prstDash val="solid"/>
-                      <a:round/>
-                      <a:headEnd type="none" w="med" len="med"/>
-                      <a:tailEnd type="none" w="med" len="med"/>
-                    </a:lnL>
-                    <a:lnR w="6350" cap="flat" cmpd="sng" algn="ctr">
-                      <a:solidFill>
-                        <a:srgbClr val="DEDCD7"/>
-                      </a:solidFill>
-                      <a:prstDash val="solid"/>
-                      <a:round/>
-                      <a:headEnd type="none" w="med" len="med"/>
-                      <a:tailEnd type="none" w="med" len="med"/>
-                    </a:lnR>
-                    <a:lnT w="6350" cap="flat" cmpd="sng" algn="ctr">
-                      <a:solidFill>
-                        <a:srgbClr val="DEDCD7"/>
-                      </a:solidFill>
-                      <a:prstDash val="solid"/>
-                      <a:round/>
-                      <a:headEnd type="none" w="med" len="med"/>
-                      <a:tailEnd type="none" w="med" len="med"/>
-                    </a:lnT>
-                    <a:lnB w="6350" cap="flat" cmpd="sng" algn="ctr">
-                      <a:solidFill>
-                        <a:srgbClr val="DEDCD7"/>
-                      </a:solidFill>
-                      <a:prstDash val="solid"/>
-                      <a:round/>
-                      <a:headEnd type="none" w="med" len="med"/>
-                      <a:tailEnd type="none" w="med" len="med"/>
-                    </a:lnB>
-                  </a:tcPr>
-                </a:tc>
-                <a:tc>
-                  <a:txBody>
-                    <a:bodyPr/>
-                    <a:lstStyle/>
-                    <a:p>
-                      <a:pPr indent="0" marL="0">
-                        <a:buNone/>
-                      </a:pPr>
-                      <a:r>
-                        <a:rPr lang="en-US" sz="1000" dirty="0">
-                          <a:solidFill>
-                            <a:srgbClr val="1A1A1A"/>
-                          </a:solidFill>
-                          <a:latin typeface="Calibri" pitchFamily="34" charset="0"/>
-                          <a:ea typeface="Calibri" pitchFamily="34" charset="-122"/>
-                          <a:cs typeface="Calibri" pitchFamily="34" charset="-120"/>
-                        </a:rPr>
-                        <a:t>Editing and evaluation</a:t>
-                      </a:r>
-                      <a:endParaRPr lang="en-US" sz="1000" dirty="0">
-                        <a:latin typeface="Calibri" charset="0"/>
-                        <a:ea typeface="Calibri" charset="0"/>
-                        <a:cs typeface="Calibri" charset="0"/>
-                      </a:endParaRPr>
-                    </a:p>
-                  </a:txBody>
-                  <a:tcPr marL="50800" marR="50800" marT="50800" marB="50800" anchor="t">
-                    <a:lnL w="6350" cap="flat" cmpd="sng" algn="ctr">
-                      <a:solidFill>
-                        <a:srgbClr val="DEDCD7"/>
-                      </a:solidFill>
-                      <a:prstDash val="solid"/>
-                      <a:round/>
-                      <a:headEnd type="none" w="med" len="med"/>
-                      <a:tailEnd type="none" w="med" len="med"/>
-                    </a:lnL>
-                    <a:lnR w="6350" cap="flat" cmpd="sng" algn="ctr">
-                      <a:solidFill>
-                        <a:srgbClr val="DEDCD7"/>
-                      </a:solidFill>
-                      <a:prstDash val="solid"/>
-                      <a:round/>
-                      <a:headEnd type="none" w="med" len="med"/>
-                      <a:tailEnd type="none" w="med" len="med"/>
-                    </a:lnR>
-                    <a:lnT w="6350" cap="flat" cmpd="sng" algn="ctr">
-                      <a:solidFill>
-                        <a:srgbClr val="DEDCD7"/>
-                      </a:solidFill>
-                      <a:prstDash val="solid"/>
-                      <a:round/>
-                      <a:headEnd type="none" w="med" len="med"/>
-                      <a:tailEnd type="none" w="med" len="med"/>
-                    </a:lnT>
-                    <a:lnB w="6350" cap="flat" cmpd="sng" algn="ctr">
-                      <a:solidFill>
-                        <a:srgbClr val="DEDCD7"/>
-                      </a:solidFill>
-                      <a:prstDash val="solid"/>
-                      <a:round/>
-                      <a:headEnd type="none" w="med" len="med"/>
-                      <a:tailEnd type="none" w="med" len="med"/>
-                    </a:lnB>
-                  </a:tcPr>
-                </a:tc>
-                <a:tc>
-                  <a:txBody>
-                    <a:bodyPr/>
-                    <a:lstStyle/>
-                    <a:p>
-                      <a:pPr indent="0" marL="0">
-                        <a:buNone/>
-                      </a:pPr>
-                      <a:r>
-                        <a:rPr lang="en-US" sz="1000" dirty="0">
-                          <a:solidFill>
-                            <a:srgbClr val="1A1A1A"/>
-                          </a:solidFill>
-                          <a:latin typeface="Calibri" pitchFamily="34" charset="0"/>
-                          <a:ea typeface="Calibri" pitchFamily="34" charset="-122"/>
-                          <a:cs typeface="Calibri" pitchFamily="34" charset="-120"/>
-                        </a:rPr>
-                        <a:t>mask-conditioned inpainting; collateral change outside the region — Review 2</a:t>
-                      </a:r>
-                      <a:endParaRPr lang="en-US" sz="1000" dirty="0">
-                        <a:latin typeface="Calibri" charset="0"/>
-                        <a:ea typeface="Calibri" charset="0"/>
-                        <a:cs typeface="Calibri" charset="0"/>
-                      </a:endParaRPr>
-                    </a:p>
-                  </a:txBody>
-                  <a:tcPr marL="50800" marR="50800" marT="50800" marB="50800" anchor="t">
-                    <a:lnL w="6350" cap="flat" cmpd="sng" algn="ctr">
-                      <a:solidFill>
-                        <a:srgbClr val="DEDCD7"/>
-                      </a:solidFill>
-                      <a:prstDash val="solid"/>
-                      <a:round/>
-                      <a:headEnd type="none" w="med" len="med"/>
-                      <a:tailEnd type="none" w="med" len="med"/>
-                    </a:lnL>
-                    <a:lnR w="6350" cap="flat" cmpd="sng" algn="ctr">
-                      <a:solidFill>
-                        <a:srgbClr val="DEDCD7"/>
-                      </a:solidFill>
-                      <a:prstDash val="solid"/>
-                      <a:round/>
-                      <a:headEnd type="none" w="med" len="med"/>
-                      <a:tailEnd type="none" w="med" len="med"/>
-                    </a:lnR>
-                    <a:lnT w="6350" cap="flat" cmpd="sng" algn="ctr">
-                      <a:solidFill>
-                        <a:srgbClr val="DEDCD7"/>
-                      </a:solidFill>
-                      <a:prstDash val="solid"/>
-                      <a:round/>
-                      <a:headEnd type="none" w="med" len="med"/>
-                      <a:tailEnd type="none" w="med" len="med"/>
-                    </a:lnT>
-                    <a:lnB w="6350" cap="flat" cmpd="sng" algn="ctr">
-                      <a:solidFill>
-                        <a:srgbClr val="DEDCD7"/>
-                      </a:solidFill>
-                      <a:prstDash val="solid"/>
-                      <a:round/>
-                      <a:headEnd type="none" w="med" len="med"/>
-                      <a:tailEnd type="none" w="med" len="med"/>
-                    </a:lnB>
-                  </a:tcPr>
-                </a:tc>
-                <a:tc>
-                  <a:txBody>
-                    <a:bodyPr/>
-                    <a:lstStyle/>
-                    <a:p>
-                      <a:pPr indent="0" marL="0">
-                        <a:buNone/>
-                      </a:pPr>
-                      <a:r>
-                        <a:rPr lang="en-US" sz="1000" dirty="0">
-                          <a:solidFill>
-                            <a:srgbClr val="1A1A1A"/>
-                          </a:solidFill>
-                          <a:latin typeface="Calibri" pitchFamily="34" charset="0"/>
-                          <a:ea typeface="Calibri" pitchFamily="34" charset="-122"/>
-                          <a:cs typeface="Calibri" pitchFamily="34" charset="-120"/>
-                        </a:rPr>
-                        <a:t>CLIPSeg at 0.1849</a:t>
-                      </a:r>
-                      <a:endParaRPr lang="en-US" sz="1000" dirty="0">
-                        <a:latin typeface="Calibri" charset="0"/>
-                        <a:ea typeface="Calibri" charset="0"/>
-                        <a:cs typeface="Calibri" charset="0"/>
-                      </a:endParaRPr>
-                    </a:p>
-                  </a:txBody>
-                  <a:tcPr marL="50800" marR="50800" marT="50800" marB="50800" anchor="t">
-                    <a:lnL w="6350" cap="flat" cmpd="sng" algn="ctr">
-                      <a:solidFill>
-                        <a:srgbClr val="DEDCD7"/>
-                      </a:solidFill>
-                      <a:prstDash val="solid"/>
-                      <a:round/>
-                      <a:headEnd type="none" w="med" len="med"/>
-                      <a:tailEnd type="none" w="med" len="med"/>
-                    </a:lnL>
-                    <a:lnR w="6350" cap="flat" cmpd="sng" algn="ctr">
-                      <a:solidFill>
-                        <a:srgbClr val="DEDCD7"/>
-                      </a:solidFill>
-                      <a:prstDash val="solid"/>
-                      <a:round/>
-                      <a:headEnd type="none" w="med" len="med"/>
-                      <a:tailEnd type="none" w="med" len="med"/>
-                    </a:lnR>
-                    <a:lnT w="6350" cap="flat" cmpd="sng" algn="ctr">
-                      <a:solidFill>
-                        <a:srgbClr val="DEDCD7"/>
-                      </a:solidFill>
-                      <a:prstDash val="solid"/>
-                      <a:round/>
-                      <a:headEnd type="none" w="med" len="med"/>
-                      <a:tailEnd type="none" w="med" len="med"/>
-                    </a:lnT>
-                    <a:lnB w="6350" cap="flat" cmpd="sng" algn="ctr">
-                      <a:solidFill>
-                        <a:srgbClr val="DEDCD7"/>
-                      </a:solidFill>
-                      <a:prstDash val="solid"/>
-                      <a:round/>
-                      <a:headEnd type="none" w="med" len="med"/>
-                      <a:tailEnd type="none" w="med" len="med"/>
-                    </a:lnB>
-                  </a:tcPr>
-                </a:tc>
-              </a:tr>
-            </a:tbl>
-          </a:graphicData>
-        </a:graphic>
-      </p:graphicFrame>
-      <p:sp>
-        <p:nvSpPr>
-          <p:cNvPr id="6" name="Text 3"/>
-          <p:cNvSpPr/>
-          <p:nvPr/>
-        </p:nvSpPr>
-        <p:spPr>
-          <a:xfrm>
-            <a:off x="777240" y="3794760"/>
-            <a:ext cx="8229600" cy="201168"/>
-          </a:xfrm>
-          <a:prstGeom prst="rect">
-            <a:avLst/>
-          </a:prstGeom>
-          <a:noFill/>
-          <a:ln/>
-        </p:spPr>
-        <p:txBody>
-          <a:bodyPr wrap="square" lIns="0" tIns="0" rIns="0" bIns="0" rtlCol="0" anchor="ctr"/>
-          <a:lstStyle/>
-          <a:p>
-            <a:pPr indent="0" marL="0">
-              <a:buNone/>
-            </a:pPr>
-            <a:r>
-              <a:rPr lang="en-US" sz="1050" b="1" spc="80" kern="0" dirty="0">
-                <a:solidFill>
-                  <a:srgbClr val="8C3A1E"/>
-                </a:solidFill>
-                <a:latin typeface="Calibri" pitchFamily="34" charset="0"/>
-                <a:ea typeface="Calibri" pitchFamily="34" charset="-122"/>
-                <a:cs typeface="Calibri" pitchFamily="34" charset="-120"/>
-              </a:rPr>
-              <a:t>The methodological bar this project already holds itself to</a:t>
-            </a:r>
-            <a:endParaRPr lang="en-US" sz="1050" dirty="0"/>
-          </a:p>
-        </p:txBody>
-      </p:sp>
-      <p:graphicFrame>
-        <p:nvGraphicFramePr>
-          <p:cNvPr id="19" name="Table 1"/>
-          <p:cNvGraphicFramePr>
-            <a:graphicFrameLocks noGrp="1"/>
-          </p:cNvGraphicFramePr>
-          <p:nvPr>
-            <p:extLst>
-              <p:ext uri="{D42A27DB-BD31-4B8C-83A1-F6EECF244321}">
-                <p14:modId xmlns:p14="http://schemas.microsoft.com/office/powerpoint/2010/main" val="1579011935"/>
-              </p:ext>
-            </p:extLst>
-          </p:nvPr>
-        </p:nvGraphicFramePr>
-        <p:xfrm>
-          <a:off x="777240" y="4050792"/>
-          <a:ext cx="10637215" cy="914400"/>
-        </p:xfrm>
-        <a:graphic>
-          <a:graphicData uri="http://schemas.openxmlformats.org/drawingml/2006/table">
-            <a:tbl>
-              <a:tblPr/>
-              <a:tblGrid>
-                <a:gridCol w="3566160"/>
-                <a:gridCol w="7068312"/>
-              </a:tblGrid>
-              <a:tr h="365760">
-                <a:tc>
-                  <a:txBody>
-                    <a:bodyPr/>
-                    <a:lstStyle/>
-                    <a:p>
-                      <a:pPr indent="0" marL="0">
-                        <a:buNone/>
-                      </a:pPr>
-                      <a:r>
-                        <a:rPr lang="en-US" sz="1000" b="1" dirty="0">
-                          <a:solidFill>
-                            <a:srgbClr val="1A1A1A"/>
-                          </a:solidFill>
-                          <a:latin typeface="Calibri" pitchFamily="34" charset="0"/>
-                          <a:ea typeface="Calibri" pitchFamily="34" charset="-122"/>
-                          <a:cs typeface="Calibri" pitchFamily="34" charset="-120"/>
-                        </a:rPr>
-                        <a:t>Every claim reports its ablation</a:t>
-                      </a:r>
-                      <a:endParaRPr lang="en-US" sz="1000" dirty="0">
-                        <a:latin typeface="Calibri" charset="0"/>
-                        <a:ea typeface="Calibri" charset="0"/>
-                        <a:cs typeface="Calibri" charset="0"/>
-                      </a:endParaRPr>
-                    </a:p>
-                  </a:txBody>
-                  <a:tcPr marL="50800" marR="50800" marT="50800" marB="50800" anchor="t">
-                    <a:lnL w="6350" cap="flat" cmpd="sng" algn="ctr">
-                      <a:solidFill>
-                        <a:srgbClr val="DEDCD7"/>
-                      </a:solidFill>
-                      <a:prstDash val="solid"/>
-                      <a:round/>
-                      <a:headEnd type="none" w="med" len="med"/>
-                      <a:tailEnd type="none" w="med" len="med"/>
-                    </a:lnL>
-                    <a:lnR w="6350" cap="flat" cmpd="sng" algn="ctr">
-                      <a:solidFill>
-                        <a:srgbClr val="DEDCD7"/>
-                      </a:solidFill>
-                      <a:prstDash val="solid"/>
-                      <a:round/>
-                      <a:headEnd type="none" w="med" len="med"/>
-                      <a:tailEnd type="none" w="med" len="med"/>
-                    </a:lnR>
-                    <a:lnT w="6350" cap="flat" cmpd="sng" algn="ctr">
-                      <a:solidFill>
-                        <a:srgbClr val="DEDCD7"/>
-                      </a:solidFill>
-                      <a:prstDash val="solid"/>
-                      <a:round/>
-                      <a:headEnd type="none" w="med" len="med"/>
-                      <a:tailEnd type="none" w="med" len="med"/>
-                    </a:lnT>
-                    <a:lnB w="6350" cap="flat" cmpd="sng" algn="ctr">
-                      <a:solidFill>
-                        <a:srgbClr val="DEDCD7"/>
-                      </a:solidFill>
-                      <a:prstDash val="solid"/>
-                      <a:round/>
-                      <a:headEnd type="none" w="med" len="med"/>
-                      <a:tailEnd type="none" w="med" len="med"/>
-                    </a:lnB>
-                    <a:solidFill>
-                      <a:srgbClr val="F6F5F2"/>
-                    </a:solidFill>
-                  </a:tcPr>
-                </a:tc>
-                <a:tc>
-                  <a:txBody>
-                    <a:bodyPr/>
-                    <a:lstStyle/>
-                    <a:p>
-                      <a:pPr indent="0" marL="0">
-                        <a:buNone/>
-                      </a:pPr>
-                      <a:r>
-                        <a:rPr lang="en-US" sz="1000" b="1" dirty="0">
-                          <a:solidFill>
-                            <a:srgbClr val="1A1A1A"/>
-                          </a:solidFill>
-                          <a:latin typeface="Calibri" pitchFamily="34" charset="0"/>
-                          <a:ea typeface="Calibri" pitchFamily="34" charset="-122"/>
-                          <a:cs typeface="Calibri" pitchFamily="34" charset="-120"/>
-                        </a:rPr>
-                        <a:t>a config scoring IoU 0.1429 with delta −0.0012 was a blob predictor ignoring the instruction</a:t>
-                      </a:r>
-                      <a:endParaRPr lang="en-US" sz="1000" dirty="0">
-                        <a:latin typeface="Calibri" charset="0"/>
-                        <a:ea typeface="Calibri" charset="0"/>
-                        <a:cs typeface="Calibri" charset="0"/>
-                      </a:endParaRPr>
-                    </a:p>
-                  </a:txBody>
-                  <a:tcPr marL="50800" marR="50800" marT="50800" marB="50800" anchor="t">
-                    <a:lnL w="6350" cap="flat" cmpd="sng" algn="ctr">
-                      <a:solidFill>
-                        <a:srgbClr val="DEDCD7"/>
-                      </a:solidFill>
-                      <a:prstDash val="solid"/>
-                      <a:round/>
-                      <a:headEnd type="none" w="med" len="med"/>
-                      <a:tailEnd type="none" w="med" len="med"/>
-                    </a:lnL>
-                    <a:lnR w="6350" cap="flat" cmpd="sng" algn="ctr">
-                      <a:solidFill>
-                        <a:srgbClr val="DEDCD7"/>
-                      </a:solidFill>
-                      <a:prstDash val="solid"/>
-                      <a:round/>
-                      <a:headEnd type="none" w="med" len="med"/>
-                      <a:tailEnd type="none" w="med" len="med"/>
-                    </a:lnR>
-                    <a:lnT w="6350" cap="flat" cmpd="sng" algn="ctr">
-                      <a:solidFill>
-                        <a:srgbClr val="DEDCD7"/>
-                      </a:solidFill>
-                      <a:prstDash val="solid"/>
-                      <a:round/>
-                      <a:headEnd type="none" w="med" len="med"/>
-                      <a:tailEnd type="none" w="med" len="med"/>
-                    </a:lnT>
-                    <a:lnB w="6350" cap="flat" cmpd="sng" algn="ctr">
-                      <a:solidFill>
-                        <a:srgbClr val="DEDCD7"/>
-                      </a:solidFill>
-                      <a:prstDash val="solid"/>
-                      <a:round/>
-                      <a:headEnd type="none" w="med" len="med"/>
-                      <a:tailEnd type="none" w="med" len="med"/>
-                    </a:lnB>
-                    <a:solidFill>
-                      <a:srgbClr val="F6F5F2"/>
-                    </a:solidFill>
-                  </a:tcPr>
-                </a:tc>
-              </a:tr>
-              <a:tr h="365760">
-                <a:tc>
-                  <a:txBody>
-                    <a:bodyPr/>
-                    <a:lstStyle/>
-                    <a:p>
-                      <a:pPr indent="0" marL="0">
-                        <a:buNone/>
-                      </a:pPr>
-                      <a:r>
-                        <a:rPr lang="en-US" sz="1000" dirty="0">
-                          <a:solidFill>
-                            <a:srgbClr val="1A1A1A"/>
-                          </a:solidFill>
-                          <a:latin typeface="Calibri" pitchFamily="34" charset="0"/>
-                          <a:ea typeface="Calibri" pitchFamily="34" charset="-122"/>
-                          <a:cs typeface="Calibri" pitchFamily="34" charset="-120"/>
-                        </a:rPr>
-                        <a:t>Every fix must beat its control</a:t>
-                      </a:r>
-                      <a:endParaRPr lang="en-US" sz="1000" dirty="0">
-                        <a:latin typeface="Calibri" charset="0"/>
-                        <a:ea typeface="Calibri" charset="0"/>
-                        <a:cs typeface="Calibri" charset="0"/>
-                      </a:endParaRPr>
-                    </a:p>
-                  </a:txBody>
-                  <a:tcPr marL="50800" marR="50800" marT="50800" marB="50800" anchor="t">
-                    <a:lnL w="6350" cap="flat" cmpd="sng" algn="ctr">
-                      <a:solidFill>
-                        <a:srgbClr val="DEDCD7"/>
-                      </a:solidFill>
-                      <a:prstDash val="solid"/>
-                      <a:round/>
-                      <a:headEnd type="none" w="med" len="med"/>
-                      <a:tailEnd type="none" w="med" len="med"/>
-                    </a:lnL>
-                    <a:lnR w="6350" cap="flat" cmpd="sng" algn="ctr">
-                      <a:solidFill>
-                        <a:srgbClr val="DEDCD7"/>
-                      </a:solidFill>
-                      <a:prstDash val="solid"/>
-                      <a:round/>
-                      <a:headEnd type="none" w="med" len="med"/>
-                      <a:tailEnd type="none" w="med" len="med"/>
-                    </a:lnR>
-                    <a:lnT w="6350" cap="flat" cmpd="sng" algn="ctr">
-                      <a:solidFill>
-                        <a:srgbClr val="DEDCD7"/>
-                      </a:solidFill>
-                      <a:prstDash val="solid"/>
-                      <a:round/>
-                      <a:headEnd type="none" w="med" len="med"/>
-                      <a:tailEnd type="none" w="med" len="med"/>
-                    </a:lnT>
-                    <a:lnB w="6350" cap="flat" cmpd="sng" algn="ctr">
-                      <a:solidFill>
-                        <a:srgbClr val="DEDCD7"/>
-                      </a:solidFill>
-                      <a:prstDash val="solid"/>
-                      <a:round/>
-                      <a:headEnd type="none" w="med" len="med"/>
-                      <a:tailEnd type="none" w="med" len="med"/>
-                    </a:lnB>
-                  </a:tcPr>
-                </a:tc>
-                <a:tc>
-                  <a:txBody>
-                    <a:bodyPr/>
-                    <a:lstStyle/>
-                    <a:p>
-                      <a:pPr indent="0" marL="0">
-                        <a:buNone/>
-                      </a:pPr>
-                      <a:r>
-                        <a:rPr lang="en-US" sz="1000" dirty="0">
-                          <a:solidFill>
-                            <a:srgbClr val="1A1A1A"/>
-                          </a:solidFill>
-                          <a:latin typeface="Calibri" pitchFamily="34" charset="0"/>
-                          <a:ea typeface="Calibri" pitchFamily="34" charset="-122"/>
-                          <a:cs typeface="Calibri" pitchFamily="34" charset="-120"/>
-                        </a:rPr>
-                        <a:t>free-space and geometric bases both lost to random noise and were dropped</a:t>
-                      </a:r>
-                      <a:endParaRPr lang="en-US" sz="1000" dirty="0">
-                        <a:latin typeface="Calibri" charset="0"/>
-                        <a:ea typeface="Calibri" charset="0"/>
-                        <a:cs typeface="Calibri" charset="0"/>
-                      </a:endParaRPr>
-                    </a:p>
-                  </a:txBody>
-                  <a:tcPr marL="50800" marR="50800" marT="50800" marB="50800" anchor="t">
-                    <a:lnL w="6350" cap="flat" cmpd="sng" algn="ctr">
-                      <a:solidFill>
-                        <a:srgbClr val="DEDCD7"/>
-                      </a:solidFill>
-                      <a:prstDash val="solid"/>
-                      <a:round/>
-                      <a:headEnd type="none" w="med" len="med"/>
-                      <a:tailEnd type="none" w="med" len="med"/>
-                    </a:lnL>
-                    <a:lnR w="6350" cap="flat" cmpd="sng" algn="ctr">
-                      <a:solidFill>
-                        <a:srgbClr val="DEDCD7"/>
-                      </a:solidFill>
-                      <a:prstDash val="solid"/>
-                      <a:round/>
-                      <a:headEnd type="none" w="med" len="med"/>
-                      <a:tailEnd type="none" w="med" len="med"/>
-                    </a:lnR>
-                    <a:lnT w="6350" cap="flat" cmpd="sng" algn="ctr">
-                      <a:solidFill>
-                        <a:srgbClr val="DEDCD7"/>
-                      </a:solidFill>
-                      <a:prstDash val="solid"/>
-                      <a:round/>
-                      <a:headEnd type="none" w="med" len="med"/>
-                      <a:tailEnd type="none" w="med" len="med"/>
-                    </a:lnT>
-                    <a:lnB w="6350" cap="flat" cmpd="sng" algn="ctr">
-                      <a:solidFill>
-                        <a:srgbClr val="DEDCD7"/>
-                      </a:solidFill>
-                      <a:prstDash val="solid"/>
-                      <a:round/>
-                      <a:headEnd type="none" w="med" len="med"/>
-                      <a:tailEnd type="none" w="med" len="med"/>
-                    </a:lnB>
-                  </a:tcPr>
-                </a:tc>
-              </a:tr>
-              <a:tr h="365760">
-                <a:tc>
-                  <a:txBody>
-                    <a:bodyPr/>
-                    <a:lstStyle/>
-                    <a:p>
-                      <a:pPr indent="0" marL="0">
-                        <a:buNone/>
-                      </a:pPr>
-                      <a:r>
-                        <a:rPr lang="en-US" sz="1000" dirty="0">
-                          <a:solidFill>
-                            <a:srgbClr val="1A1A1A"/>
-                          </a:solidFill>
-                          <a:latin typeface="Calibri" pitchFamily="34" charset="0"/>
-                          <a:ea typeface="Calibri" pitchFamily="34" charset="-122"/>
-                          <a:cs typeface="Calibri" pitchFamily="34" charset="-120"/>
-                        </a:rPr>
-                        <a:t>Every split is disjoint by construction</a:t>
-                      </a:r>
-                      <a:endParaRPr lang="en-US" sz="1000" dirty="0">
-                        <a:latin typeface="Calibri" charset="0"/>
-                        <a:ea typeface="Calibri" charset="0"/>
-                        <a:cs typeface="Calibri" charset="0"/>
-                      </a:endParaRPr>
-                    </a:p>
-                  </a:txBody>
-                  <a:tcPr marL="50800" marR="50800" marT="50800" marB="50800" anchor="t">
-                    <a:lnL w="6350" cap="flat" cmpd="sng" algn="ctr">
-                      <a:solidFill>
-                        <a:srgbClr val="DEDCD7"/>
-                      </a:solidFill>
-                      <a:prstDash val="solid"/>
-                      <a:round/>
-                      <a:headEnd type="none" w="med" len="med"/>
-                      <a:tailEnd type="none" w="med" len="med"/>
-                    </a:lnL>
-                    <a:lnR w="6350" cap="flat" cmpd="sng" algn="ctr">
-                      <a:solidFill>
-                        <a:srgbClr val="DEDCD7"/>
-                      </a:solidFill>
-                      <a:prstDash val="solid"/>
-                      <a:round/>
-                      <a:headEnd type="none" w="med" len="med"/>
-                      <a:tailEnd type="none" w="med" len="med"/>
-                    </a:lnR>
-                    <a:lnT w="6350" cap="flat" cmpd="sng" algn="ctr">
-                      <a:solidFill>
-                        <a:srgbClr val="DEDCD7"/>
-                      </a:solidFill>
-                      <a:prstDash val="solid"/>
-                      <a:round/>
-                      <a:headEnd type="none" w="med" len="med"/>
-                      <a:tailEnd type="none" w="med" len="med"/>
-                    </a:lnT>
-                    <a:lnB w="6350" cap="flat" cmpd="sng" algn="ctr">
-                      <a:solidFill>
-                        <a:srgbClr val="DEDCD7"/>
-                      </a:solidFill>
-                      <a:prstDash val="solid"/>
-                      <a:round/>
-                      <a:headEnd type="none" w="med" len="med"/>
-                      <a:tailEnd type="none" w="med" len="med"/>
-                    </a:lnB>
-                  </a:tcPr>
-                </a:tc>
-                <a:tc>
-                  <a:txBody>
-                    <a:bodyPr/>
-                    <a:lstStyle/>
-                    <a:p>
-                      <a:pPr indent="0" marL="0">
-                        <a:buNone/>
-                      </a:pPr>
-                      <a:r>
-                        <a:rPr lang="en-US" sz="1000" dirty="0">
-                          <a:solidFill>
-                            <a:srgbClr val="1A1A1A"/>
-                          </a:solidFill>
-                          <a:latin typeface="Calibri" pitchFamily="34" charset="0"/>
-                          <a:ea typeface="Calibri" pitchFamily="34" charset="-122"/>
-                          <a:cs typeface="Calibri" pitchFamily="34" charset="-120"/>
-                        </a:rPr>
-                        <a:t>train and dev come from different shard files, never merged</a:t>
-                      </a:r>
-                      <a:endParaRPr lang="en-US" sz="1000" dirty="0">
-                        <a:latin typeface="Calibri" charset="0"/>
-                        <a:ea typeface="Calibri" charset="0"/>
-                        <a:cs typeface="Calibri" charset="0"/>
-                      </a:endParaRPr>
-                    </a:p>
-                  </a:txBody>
-                  <a:tcPr marL="50800" marR="50800" marT="50800" marB="50800" anchor="t">
-                    <a:lnL w="6350" cap="flat" cmpd="sng" algn="ctr">
-                      <a:solidFill>
-                        <a:srgbClr val="DEDCD7"/>
-                      </a:solidFill>
-                      <a:prstDash val="solid"/>
-                      <a:round/>
-                      <a:headEnd type="none" w="med" len="med"/>
-                      <a:tailEnd type="none" w="med" len="med"/>
-                    </a:lnL>
-                    <a:lnR w="6350" cap="flat" cmpd="sng" algn="ctr">
-                      <a:solidFill>
-                        <a:srgbClr val="DEDCD7"/>
-                      </a:solidFill>
-                      <a:prstDash val="solid"/>
-                      <a:round/>
-                      <a:headEnd type="none" w="med" len="med"/>
-                      <a:tailEnd type="none" w="med" len="med"/>
-                    </a:lnR>
-                    <a:lnT w="6350" cap="flat" cmpd="sng" algn="ctr">
-                      <a:solidFill>
-                        <a:srgbClr val="DEDCD7"/>
-                      </a:solidFill>
-                      <a:prstDash val="solid"/>
-                      <a:round/>
-                      <a:headEnd type="none" w="med" len="med"/>
-                      <a:tailEnd type="none" w="med" len="med"/>
-                    </a:lnT>
-                    <a:lnB w="6350" cap="flat" cmpd="sng" algn="ctr">
-                      <a:solidFill>
-                        <a:srgbClr val="DEDCD7"/>
-                      </a:solidFill>
-                      <a:prstDash val="solid"/>
-                      <a:round/>
-                      <a:headEnd type="none" w="med" len="med"/>
-                      <a:tailEnd type="none" w="med" len="med"/>
-                    </a:lnB>
-                  </a:tcPr>
-                </a:tc>
-              </a:tr>
-              <a:tr h="365760">
-                <a:tc>
-                  <a:txBody>
-                    <a:bodyPr/>
-                    <a:lstStyle/>
-                    <a:p>
-                      <a:pPr indent="0" marL="0">
-                        <a:buNone/>
-                      </a:pPr>
-                      <a:r>
-                        <a:rPr lang="en-US" sz="1000" dirty="0">
-                          <a:solidFill>
-                            <a:srgbClr val="1A1A1A"/>
-                          </a:solidFill>
-                          <a:latin typeface="Calibri" pitchFamily="34" charset="0"/>
-                          <a:ea typeface="Calibri" pitchFamily="34" charset="-122"/>
-                          <a:cs typeface="Calibri" pitchFamily="34" charset="-120"/>
-                        </a:rPr>
-                        <a:t>Every figure regenerates from the data</a:t>
-                      </a:r>
-                      <a:endParaRPr lang="en-US" sz="1000" dirty="0">
-                        <a:latin typeface="Calibri" charset="0"/>
-                        <a:ea typeface="Calibri" charset="0"/>
-                        <a:cs typeface="Calibri" charset="0"/>
-                      </a:endParaRPr>
-                    </a:p>
-                  </a:txBody>
-                  <a:tcPr marL="50800" marR="50800" marT="50800" marB="50800" anchor="t">
-                    <a:lnL w="6350" cap="flat" cmpd="sng" algn="ctr">
-                      <a:solidFill>
-                        <a:srgbClr val="DEDCD7"/>
-                      </a:solidFill>
-                      <a:prstDash val="solid"/>
-                      <a:round/>
-                      <a:headEnd type="none" w="med" len="med"/>
-                      <a:tailEnd type="none" w="med" len="med"/>
-                    </a:lnL>
-                    <a:lnR w="6350" cap="flat" cmpd="sng" algn="ctr">
-                      <a:solidFill>
-                        <a:srgbClr val="DEDCD7"/>
-                      </a:solidFill>
-                      <a:prstDash val="solid"/>
-                      <a:round/>
-                      <a:headEnd type="none" w="med" len="med"/>
-                      <a:tailEnd type="none" w="med" len="med"/>
-                    </a:lnR>
-                    <a:lnT w="6350" cap="flat" cmpd="sng" algn="ctr">
-                      <a:solidFill>
-                        <a:srgbClr val="DEDCD7"/>
-                      </a:solidFill>
-                      <a:prstDash val="solid"/>
-                      <a:round/>
-                      <a:headEnd type="none" w="med" len="med"/>
-                      <a:tailEnd type="none" w="med" len="med"/>
-                    </a:lnT>
-                    <a:lnB w="6350" cap="flat" cmpd="sng" algn="ctr">
-                      <a:solidFill>
-                        <a:srgbClr val="DEDCD7"/>
-                      </a:solidFill>
-                      <a:prstDash val="solid"/>
-                      <a:round/>
-                      <a:headEnd type="none" w="med" len="med"/>
-                      <a:tailEnd type="none" w="med" len="med"/>
-                    </a:lnB>
-                  </a:tcPr>
-                </a:tc>
-                <a:tc>
-                  <a:txBody>
-                    <a:bodyPr/>
-                    <a:lstStyle/>
-                    <a:p>
-                      <a:pPr indent="0" marL="0">
-                        <a:buNone/>
-                      </a:pPr>
-                      <a:r>
-                        <a:rPr lang="en-US" sz="1000" dirty="0">
-                          <a:solidFill>
-                            <a:srgbClr val="1A1A1A"/>
-                          </a:solidFill>
-                          <a:latin typeface="Calibri" pitchFamily="34" charset="0"/>
-                          <a:ea typeface="Calibri" pitchFamily="34" charset="-122"/>
-                          <a:cs typeface="Calibri" pitchFamily="34" charset="-120"/>
-                        </a:rPr>
-                        <a:t>python train/figures.py reads only the committed result JSONs</a:t>
-                      </a:r>
-                      <a:endParaRPr lang="en-US" sz="1000" dirty="0">
-                        <a:latin typeface="Calibri" charset="0"/>
-                        <a:ea typeface="Calibri" charset="0"/>
-                        <a:cs typeface="Calibri" charset="0"/>
-                      </a:endParaRPr>
-                    </a:p>
-                  </a:txBody>
-                  <a:tcPr marL="50800" marR="50800" marT="50800" marB="50800" anchor="t">
-                    <a:lnL w="6350" cap="flat" cmpd="sng" algn="ctr">
-                      <a:solidFill>
-                        <a:srgbClr val="DEDCD7"/>
-                      </a:solidFill>
-                      <a:prstDash val="solid"/>
-                      <a:round/>
-                      <a:headEnd type="none" w="med" len="med"/>
-                      <a:tailEnd type="none" w="med" len="med"/>
-                    </a:lnL>
-                    <a:lnR w="6350" cap="flat" cmpd="sng" algn="ctr">
-                      <a:solidFill>
-                        <a:srgbClr val="DEDCD7"/>
-                      </a:solidFill>
-                      <a:prstDash val="solid"/>
-                      <a:round/>
-                      <a:headEnd type="none" w="med" len="med"/>
-                      <a:tailEnd type="none" w="med" len="med"/>
-                    </a:lnR>
-                    <a:lnT w="6350" cap="flat" cmpd="sng" algn="ctr">
-                      <a:solidFill>
-                        <a:srgbClr val="DEDCD7"/>
-                      </a:solidFill>
-                      <a:prstDash val="solid"/>
-                      <a:round/>
-                      <a:headEnd type="none" w="med" len="med"/>
-                      <a:tailEnd type="none" w="med" len="med"/>
-                    </a:lnT>
-                    <a:lnB w="6350" cap="flat" cmpd="sng" algn="ctr">
-                      <a:solidFill>
-                        <a:srgbClr val="DEDCD7"/>
-                      </a:solidFill>
-                      <a:prstDash val="solid"/>
-                      <a:round/>
-                      <a:headEnd type="none" w="med" len="med"/>
-                      <a:tailEnd type="none" w="med" len="med"/>
-                    </a:lnB>
-                  </a:tcPr>
-                </a:tc>
-              </a:tr>
-            </a:tbl>
-          </a:graphicData>
-        </a:graphic>
-      </p:graphicFrame>
     </p:spTree>
   </p:cSld>
   <p:clrMapOvr>

--- a/deck/ISE_Review1_Final.pptx
+++ b/deck/ISE_Review1_Final.pptx
@@ -14526,7 +14526,7 @@
                           <a:ea typeface="Calibri" pitchFamily="34" charset="-122"/>
                           <a:cs typeface="Calibri" pitchFamily="34" charset="-120"/>
                         </a:rPr>
-                        <a:t>ours, tuned (thr 0.2, dilate 64px)</a:t>
+                        <a:t>ours, tuned — peak of the sweep</a:t>
                       </a:r>
                       <a:endParaRPr lang="en-US" sz="1050" dirty="0">
                         <a:latin typeface="Calibri" charset="0"/>
@@ -15506,7 +15506,7 @@
                 <a:ea typeface="Calibri" pitchFamily="34" charset="-122"/>
                 <a:cs typeface="Calibri" pitchFamily="34" charset="-120"/>
               </a:rPr>
-              <a:t>Our mask is precision-biased — 1.5% collateral but only 7.5% recall, so gating discarded the edit. MagicBrush’s is the mirror: 9× too large, 13% collateral. Dilation trades one for the other.</a:t>
+              <a:t>Our mask is precision-biased — 1.5% collateral but only 7.5% recall, so gating discarded the edit. Dilation trades precision for recall; swept to 200 px, net peaks at 64 px and falls away either side.</a:t>
             </a:r>
             <a:endParaRPr lang="en-US" sz="1100" dirty="0"/>
           </a:p>
@@ -15548,7 +15548,7 @@
                 <a:ea typeface="Calibri" pitchFamily="34" charset="-122"/>
                 <a:cs typeface="Calibri" pitchFamily="34" charset="-120"/>
               </a:rPr>
-              <a:t>Coarse supervision costs at the editing stage too, not only on the mask metric: the MagicBrush mask loses 11.6 points of net against the ground-truth region.</a:t>
+              <a:t>Coarse supervision costs at the editing stage too, not only on the mask metric: the MagicBrush mask — measured 9.1× too large — loses 11.6 points of net against the ground-truth region.</a:t>
             </a:r>
             <a:endParaRPr lang="en-US" sz="1050" dirty="0"/>
           </a:p>

--- a/deck/ISE_Review1_Final.pptx
+++ b/deck/ISE_Review1_Final.pptx
@@ -16,9 +16,11 @@
     <p:sldId id="264" r:id="rId10"/>
     <p:sldId id="265" r:id="rId11"/>
     <p:sldId id="266" r:id="rId12"/>
+    <p:sldId id="267" r:id="rId13"/>
+    <p:sldId id="268" r:id="rId14"/>
   </p:sldIdLst>
   <p:notesMasterIdLst>
-    <p:notesMasterId r:id="rId13"/>
+    <p:notesMasterId r:id="rId15"/>
   </p:notesMasterIdLst>
   <p:sldSz cx="12191695" cy="6858000"/>
   <p:notesSz cx="6858000" cy="12191695"/>
@@ -600,7 +602,7 @@
           <a:p>
             <a:r>
               <a:rPr lang="en-US" dirty="0"/>
-              <a:t>PH9</a:t>
+              <a:t>PH8b</a:t>
             </a:r>
             <a:endParaRPr lang="en-US" dirty="0"/>
           </a:p>
@@ -688,6 +690,182 @@
           <a:p>
             <a:r>
               <a:rPr lang="en-US" dirty="0"/>
+              <a:t>PH8</a:t>
+            </a:r>
+            <a:endParaRPr lang="en-US" dirty="0"/>
+          </a:p>
+        </p:txBody>
+      </p:sp>
+      <p:sp>
+        <p:nvSpPr>
+          <p:cNvPr id="4" name="Slide Number Placeholder 3"/>
+          <p:cNvSpPr>
+            <a:spLocks noGrp="1"/>
+          </p:cNvSpPr>
+          <p:nvPr>
+            <p:ph type="sldNum" sz="quarter" idx="10"/>
+          </p:nvPr>
+        </p:nvSpPr>
+        <p:spPr/>
+        <p:txBody>
+          <a:bodyPr/>
+          <a:lstStyle/>
+          <a:p>
+            <a:fld id="{F7021451-1387-4CA6-816F-3879F97B5CBC}" type="slidenum">
+              <a:rPr lang="en-US"/>
+              <a:t>11</a:t>
+            </a:fld>
+            <a:endParaRPr lang="en-US"/>
+          </a:p>
+        </p:txBody>
+      </p:sp>
+    </p:spTree>
+    <p:extLst>
+      <p:ext uri="{BB962C8B-B14F-4D97-AF65-F5344CB8AC3E}">
+        <p14:creationId xmlns:p14="http://schemas.microsoft.com/office/powerpoint/2010/main" val="1024086991"/>
+      </p:ext>
+    </p:extLst>
+  </p:cSld>
+  <p:clrMapOvr>
+    <a:masterClrMapping/>
+  </p:clrMapOvr>
+</p:notes>
+</file>
+
+<file path=ppt/notesSlides/notesSlide12.xml><?xml version="1.0" encoding="utf-8"?>
+<p:notes xmlns:a="http://schemas.openxmlformats.org/drawingml/2006/main" xmlns:r="http://schemas.openxmlformats.org/officeDocument/2006/relationships" xmlns:p="http://schemas.openxmlformats.org/presentationml/2006/main">
+  <p:cSld>
+    <p:spTree>
+      <p:nvGrpSpPr>
+        <p:cNvPr id="1" name=""/>
+        <p:cNvGrpSpPr/>
+        <p:nvPr/>
+      </p:nvGrpSpPr>
+      <p:grpSpPr>
+        <a:xfrm>
+          <a:off x="0" y="0"/>
+          <a:ext cx="0" cy="0"/>
+          <a:chOff x="0" y="0"/>
+          <a:chExt cx="0" cy="0"/>
+        </a:xfrm>
+      </p:grpSpPr>
+      <p:sp>
+        <p:nvSpPr>
+          <p:cNvPr id="2" name="Slide Image Placeholder 1"/>
+          <p:cNvSpPr>
+            <a:spLocks noGrp="1" noRot="1" noChangeAspect="1"/>
+          </p:cNvSpPr>
+          <p:nvPr>
+            <p:ph type="sldImg"/>
+          </p:nvPr>
+        </p:nvSpPr>
+        <p:spPr/>
+      </p:sp>
+      <p:sp>
+        <p:nvSpPr>
+          <p:cNvPr id="3" name="Notes Placeholder 2"/>
+          <p:cNvSpPr>
+            <a:spLocks noGrp="1"/>
+          </p:cNvSpPr>
+          <p:nvPr>
+            <p:ph type="body" idx="1"/>
+          </p:nvPr>
+        </p:nvSpPr>
+        <p:spPr/>
+        <p:txBody>
+          <a:bodyPr/>
+          <a:lstStyle/>
+          <a:p>
+            <a:r>
+              <a:rPr lang="en-US" dirty="0"/>
+              <a:t>PH9</a:t>
+            </a:r>
+            <a:endParaRPr lang="en-US" dirty="0"/>
+          </a:p>
+        </p:txBody>
+      </p:sp>
+      <p:sp>
+        <p:nvSpPr>
+          <p:cNvPr id="4" name="Slide Number Placeholder 3"/>
+          <p:cNvSpPr>
+            <a:spLocks noGrp="1"/>
+          </p:cNvSpPr>
+          <p:nvPr>
+            <p:ph type="sldNum" sz="quarter" idx="10"/>
+          </p:nvPr>
+        </p:nvSpPr>
+        <p:spPr/>
+        <p:txBody>
+          <a:bodyPr/>
+          <a:lstStyle/>
+          <a:p>
+            <a:fld id="{F7021451-1387-4CA6-816F-3879F97B5CBC}" type="slidenum">
+              <a:rPr lang="en-US"/>
+              <a:t>12</a:t>
+            </a:fld>
+            <a:endParaRPr lang="en-US"/>
+          </a:p>
+        </p:txBody>
+      </p:sp>
+    </p:spTree>
+    <p:extLst>
+      <p:ext uri="{BB962C8B-B14F-4D97-AF65-F5344CB8AC3E}">
+        <p14:creationId xmlns:p14="http://schemas.microsoft.com/office/powerpoint/2010/main" val="1024086991"/>
+      </p:ext>
+    </p:extLst>
+  </p:cSld>
+  <p:clrMapOvr>
+    <a:masterClrMapping/>
+  </p:clrMapOvr>
+</p:notes>
+</file>
+
+<file path=ppt/notesSlides/notesSlide13.xml><?xml version="1.0" encoding="utf-8"?>
+<p:notes xmlns:a="http://schemas.openxmlformats.org/drawingml/2006/main" xmlns:r="http://schemas.openxmlformats.org/officeDocument/2006/relationships" xmlns:p="http://schemas.openxmlformats.org/presentationml/2006/main">
+  <p:cSld>
+    <p:spTree>
+      <p:nvGrpSpPr>
+        <p:cNvPr id="1" name=""/>
+        <p:cNvGrpSpPr/>
+        <p:nvPr/>
+      </p:nvGrpSpPr>
+      <p:grpSpPr>
+        <a:xfrm>
+          <a:off x="0" y="0"/>
+          <a:ext cx="0" cy="0"/>
+          <a:chOff x="0" y="0"/>
+          <a:chExt cx="0" cy="0"/>
+        </a:xfrm>
+      </p:grpSpPr>
+      <p:sp>
+        <p:nvSpPr>
+          <p:cNvPr id="2" name="Slide Image Placeholder 1"/>
+          <p:cNvSpPr>
+            <a:spLocks noGrp="1" noRot="1" noChangeAspect="1"/>
+          </p:cNvSpPr>
+          <p:nvPr>
+            <p:ph type="sldImg"/>
+          </p:nvPr>
+        </p:nvSpPr>
+        <p:spPr/>
+      </p:sp>
+      <p:sp>
+        <p:nvSpPr>
+          <p:cNvPr id="3" name="Notes Placeholder 2"/>
+          <p:cNvSpPr>
+            <a:spLocks noGrp="1"/>
+          </p:cNvSpPr>
+          <p:nvPr>
+            <p:ph type="body" idx="1"/>
+          </p:nvPr>
+        </p:nvSpPr>
+        <p:spPr/>
+        <p:txBody>
+          <a:bodyPr/>
+          <a:lstStyle/>
+          <a:p>
+            <a:r>
+              <a:rPr lang="en-US" dirty="0"/>
               <a:t>PH10</a:t>
             </a:r>
             <a:endParaRPr lang="en-US" dirty="0"/>
@@ -711,7 +889,7 @@
           <a:p>
             <a:fld id="{F7021451-1387-4CA6-816F-3879F97B5CBC}" type="slidenum">
               <a:rPr lang="en-US"/>
-              <a:t>11</a:t>
+              <a:t>13</a:t>
             </a:fld>
             <a:endParaRPr lang="en-US"/>
           </a:p>
@@ -1216,7 +1394,7 @@
           <a:p>
             <a:r>
               <a:rPr lang="en-US" dirty="0"/>
-              <a:t>PH7</a:t>
+              <a:t>PH6b</a:t>
             </a:r>
             <a:endParaRPr lang="en-US" dirty="0"/>
           </a:p>
@@ -1304,7 +1482,7 @@
           <a:p>
             <a:r>
               <a:rPr lang="en-US" dirty="0"/>
-              <a:t>PH8b</a:t>
+              <a:t>PH6c</a:t>
             </a:r>
             <a:endParaRPr lang="en-US" dirty="0"/>
           </a:p>
@@ -1392,7 +1570,7 @@
           <a:p>
             <a:r>
               <a:rPr lang="en-US" dirty="0"/>
-              <a:t>PH8</a:t>
+              <a:t>PH7</a:t>
             </a:r>
             <a:endParaRPr lang="en-US" dirty="0"/>
           </a:p>
@@ -2185,7 +2363,7 @@
                 <a:ea typeface="Calibri" pitchFamily="34" charset="-122"/>
                 <a:cs typeface="Calibri" pitchFamily="34" charset="-120"/>
               </a:rPr>
-              <a:t>IoU 0.1718</a:t>
+              <a:t>IoU 0.2065</a:t>
             </a:r>
             <a:pPr indent="0" marL="0">
               <a:lnSpc>
@@ -2202,7 +2380,7 @@
                 <a:ea typeface="Calibri" pitchFamily="34" charset="-122"/>
                 <a:cs typeface="Calibri" pitchFamily="34" charset="-120"/>
               </a:rPr>
-              <a:t>  ·  beats the human annotations the base paper trains on (0.1511)
+              <a:t>  ·  beats CLIPSeg (0.1849) and the human annotations (0.1511)
 </a:t>
             </a:r>
             <a:pPr indent="0" marL="0">
@@ -2220,7 +2398,7 @@
                 <a:ea typeface="Calibri" pitchFamily="34" charset="-122"/>
                 <a:cs typeface="Calibri" pitchFamily="34" charset="-120"/>
               </a:rPr>
-              <a:t>+71%</a:t>
+              <a:t>+120%</a:t>
             </a:r>
             <a:pPr indent="0" marL="0">
               <a:lnSpc>
@@ -2255,7 +2433,7 @@
                 <a:ea typeface="Calibri" pitchFamily="34" charset="-122"/>
                 <a:cs typeface="Calibri" pitchFamily="34" charset="-120"/>
               </a:rPr>
-              <a:t>9.7×</a:t>
+              <a:t>10.3×</a:t>
             </a:r>
             <a:pPr indent="0" marL="0">
               <a:lnSpc>
@@ -2289,7 +2467,7 @@
                 <a:ea typeface="Calibri" pitchFamily="34" charset="-122"/>
                 <a:cs typeface="Calibri" pitchFamily="34" charset="-120"/>
               </a:rPr>
-              <a:t>108×</a:t>
+              <a:t>32×</a:t>
             </a:r>
             <a:pPr indent="0" marL="0">
               <a:lnSpc>
@@ -2343,6 +2521,3409 @@
 <file path=ppt/slides/slide10.xml><?xml version="1.0" encoding="utf-8"?>
 <p:sld xmlns:a="http://schemas.openxmlformats.org/drawingml/2006/main" xmlns:r="http://schemas.openxmlformats.org/officeDocument/2006/relationships" xmlns:p="http://schemas.openxmlformats.org/presentationml/2006/main">
   <p:cSld name="Slide 10">
+    <p:bg>
+      <p:bgPr>
+        <a:solidFill>
+          <a:srgbClr val="FFFFFF"/>
+        </a:solidFill>
+      </p:bgPr>
+    </p:bg>
+    <p:spTree>
+      <p:nvGrpSpPr>
+        <p:cNvPr id="1" name=""/>
+        <p:cNvGrpSpPr/>
+        <p:nvPr/>
+      </p:nvGrpSpPr>
+      <p:grpSpPr>
+        <a:xfrm>
+          <a:off x="0" y="0"/>
+          <a:ext cx="0" cy="0"/>
+          <a:chOff x="0" y="0"/>
+          <a:chExt cx="0" cy="0"/>
+        </a:xfrm>
+      </p:grpSpPr>
+      <p:sp>
+        <p:nvSpPr>
+          <p:cNvPr id="2" name="Text 0"/>
+          <p:cNvSpPr/>
+          <p:nvPr/>
+        </p:nvSpPr>
+        <p:spPr>
+          <a:xfrm>
+            <a:off x="777240" y="347472"/>
+            <a:ext cx="10637215" cy="201168"/>
+          </a:xfrm>
+          <a:prstGeom prst="rect">
+            <a:avLst/>
+          </a:prstGeom>
+          <a:noFill/>
+          <a:ln/>
+        </p:spPr>
+        <p:txBody>
+          <a:bodyPr wrap="square" lIns="0" tIns="0" rIns="0" bIns="0" rtlCol="0" anchor="ctr"/>
+          <a:lstStyle/>
+          <a:p>
+            <a:pPr indent="0" marL="0">
+              <a:buNone/>
+            </a:pPr>
+            <a:r>
+              <a:rPr lang="en-US" sz="1000" b="1" spc="160" kern="0" dirty="0">
+                <a:solidFill>
+                  <a:srgbClr val="8C3A1E"/>
+                </a:solidFill>
+                <a:latin typeface="Calibri" pitchFamily="34" charset="0"/>
+                <a:ea typeface="Calibri" pitchFamily="34" charset="-122"/>
+                <a:cs typeface="Calibri" pitchFamily="34" charset="-120"/>
+              </a:rPr>
+              <a:t>STAGE 2</a:t>
+            </a:r>
+            <a:endParaRPr lang="en-US" sz="1000" dirty="0"/>
+          </a:p>
+        </p:txBody>
+      </p:sp>
+      <p:sp>
+        <p:nvSpPr>
+          <p:cNvPr id="3" name="Text 1"/>
+          <p:cNvSpPr/>
+          <p:nvPr/>
+        </p:nvSpPr>
+        <p:spPr>
+          <a:xfrm>
+            <a:off x="777240" y="585216"/>
+            <a:ext cx="10637215" cy="493776"/>
+          </a:xfrm>
+          <a:prstGeom prst="rect">
+            <a:avLst/>
+          </a:prstGeom>
+          <a:noFill/>
+          <a:ln/>
+        </p:spPr>
+        <p:txBody>
+          <a:bodyPr wrap="square" lIns="0" tIns="0" rIns="0" bIns="0" rtlCol="0" anchor="ctr"/>
+          <a:lstStyle/>
+          <a:p>
+            <a:pPr indent="0" marL="0">
+              <a:buNone/>
+            </a:pPr>
+            <a:r>
+              <a:rPr lang="en-US" sz="2600" b="1" dirty="0">
+                <a:solidFill>
+                  <a:srgbClr val="1A1A1A"/>
+                </a:solidFill>
+                <a:latin typeface="Cambria" pitchFamily="34" charset="0"/>
+                <a:ea typeface="Cambria" pitchFamily="34" charset="-122"/>
+                <a:cs typeface="Cambria" pitchFamily="34" charset="-120"/>
+              </a:rPr>
+              <a:t>Editing inside the predicted region — the premise, tested</a:t>
+            </a:r>
+            <a:endParaRPr lang="en-US" sz="2600" dirty="0"/>
+          </a:p>
+        </p:txBody>
+      </p:sp>
+      <p:sp>
+        <p:nvSpPr>
+          <p:cNvPr id="4" name="Text 2"/>
+          <p:cNvSpPr/>
+          <p:nvPr/>
+        </p:nvSpPr>
+        <p:spPr>
+          <a:xfrm>
+            <a:off x="777240" y="1115568"/>
+            <a:ext cx="10637215" cy="274320"/>
+          </a:xfrm>
+          <a:prstGeom prst="rect">
+            <a:avLst/>
+          </a:prstGeom>
+          <a:noFill/>
+          <a:ln/>
+        </p:spPr>
+        <p:txBody>
+          <a:bodyPr wrap="square" lIns="0" tIns="0" rIns="0" bIns="0" rtlCol="0" anchor="ctr"/>
+          <a:lstStyle/>
+          <a:p>
+            <a:pPr indent="0" marL="0">
+              <a:buNone/>
+            </a:pPr>
+            <a:r>
+              <a:rPr lang="en-US" sz="1200" dirty="0">
+                <a:solidFill>
+                  <a:srgbClr val="6E6E6E"/>
+                </a:solidFill>
+                <a:latin typeface="Calibri" pitchFamily="34" charset="0"/>
+                <a:ea typeface="Calibri" pitchFamily="34" charset="-122"/>
+                <a:cs typeface="Calibri" pitchFamily="34" charset="-120"/>
+              </a:rPr>
+              <a:t>60 held-out dev samples · one editor (InstructPix2Pix), only the gating mask varies</a:t>
+            </a:r>
+            <a:endParaRPr lang="en-US" sz="1200" dirty="0"/>
+          </a:p>
+        </p:txBody>
+      </p:sp>
+      <p:sp>
+        <p:nvSpPr>
+          <p:cNvPr id="5" name="Shape 3"/>
+          <p:cNvSpPr/>
+          <p:nvPr/>
+        </p:nvSpPr>
+        <p:spPr>
+          <a:xfrm>
+            <a:off x="777240" y="1444752"/>
+            <a:ext cx="10637215" cy="10973"/>
+          </a:xfrm>
+          <a:prstGeom prst="rect">
+            <a:avLst/>
+          </a:prstGeom>
+          <a:solidFill>
+            <a:srgbClr val="DEDCD7"/>
+          </a:solidFill>
+          <a:ln/>
+        </p:spPr>
+      </p:sp>
+      <p:graphicFrame>
+        <p:nvGraphicFramePr>
+          <p:cNvPr id="11" name="Table 0"/>
+          <p:cNvGraphicFramePr>
+            <a:graphicFrameLocks noGrp="1"/>
+          </p:cNvGraphicFramePr>
+          <p:nvPr>
+            <p:extLst>
+              <p:ext uri="{D42A27DB-BD31-4B8C-83A1-F6EECF244321}">
+                <p14:modId xmlns:p14="http://schemas.microsoft.com/office/powerpoint/2010/main" val="1579011935"/>
+              </p:ext>
+            </p:extLst>
+          </p:nvPr>
+        </p:nvGraphicFramePr>
+        <p:xfrm>
+          <a:off x="777240" y="1719072"/>
+          <a:ext cx="10637215" cy="914400"/>
+        </p:xfrm>
+        <a:graphic>
+          <a:graphicData uri="http://schemas.openxmlformats.org/drawingml/2006/table">
+            <a:tbl>
+              <a:tblPr/>
+              <a:tblGrid>
+                <a:gridCol w="3840480"/>
+                <a:gridCol w="2377440"/>
+                <a:gridCol w="2377440"/>
+                <a:gridCol w="2039112"/>
+              </a:tblGrid>
+              <a:tr h="365760">
+                <a:tc>
+                  <a:txBody>
+                    <a:bodyPr/>
+                    <a:lstStyle/>
+                    <a:p>
+                      <a:pPr indent="0" marL="0">
+                        <a:buNone/>
+                      </a:pPr>
+                      <a:r>
+                        <a:rPr lang="en-US" sz="1050" b="1" dirty="0">
+                          <a:solidFill>
+                            <a:srgbClr val="1A1A1A"/>
+                          </a:solidFill>
+                          <a:latin typeface="Calibri" pitchFamily="34" charset="0"/>
+                          <a:ea typeface="Calibri" pitchFamily="34" charset="-122"/>
+                          <a:cs typeface="Calibri" pitchFamily="34" charset="-120"/>
+                        </a:rPr>
+                        <a:t>gating mask</a:t>
+                      </a:r>
+                      <a:endParaRPr lang="en-US" sz="1050" dirty="0">
+                        <a:latin typeface="Calibri" charset="0"/>
+                        <a:ea typeface="Calibri" charset="0"/>
+                        <a:cs typeface="Calibri" charset="0"/>
+                      </a:endParaRPr>
+                    </a:p>
+                  </a:txBody>
+                  <a:tcPr marL="50800" marR="50800" marT="50800" marB="50800" anchor="t">
+                    <a:lnL w="6350" cap="flat" cmpd="sng" algn="ctr">
+                      <a:solidFill>
+                        <a:srgbClr val="DEDCD7"/>
+                      </a:solidFill>
+                      <a:prstDash val="solid"/>
+                      <a:round/>
+                      <a:headEnd type="none" w="med" len="med"/>
+                      <a:tailEnd type="none" w="med" len="med"/>
+                    </a:lnL>
+                    <a:lnR w="6350" cap="flat" cmpd="sng" algn="ctr">
+                      <a:solidFill>
+                        <a:srgbClr val="DEDCD7"/>
+                      </a:solidFill>
+                      <a:prstDash val="solid"/>
+                      <a:round/>
+                      <a:headEnd type="none" w="med" len="med"/>
+                      <a:tailEnd type="none" w="med" len="med"/>
+                    </a:lnR>
+                    <a:lnT w="6350" cap="flat" cmpd="sng" algn="ctr">
+                      <a:solidFill>
+                        <a:srgbClr val="DEDCD7"/>
+                      </a:solidFill>
+                      <a:prstDash val="solid"/>
+                      <a:round/>
+                      <a:headEnd type="none" w="med" len="med"/>
+                      <a:tailEnd type="none" w="med" len="med"/>
+                    </a:lnT>
+                    <a:lnB w="6350" cap="flat" cmpd="sng" algn="ctr">
+                      <a:solidFill>
+                        <a:srgbClr val="DEDCD7"/>
+                      </a:solidFill>
+                      <a:prstDash val="solid"/>
+                      <a:round/>
+                      <a:headEnd type="none" w="med" len="med"/>
+                      <a:tailEnd type="none" w="med" len="med"/>
+                    </a:lnB>
+                    <a:solidFill>
+                      <a:srgbClr val="F6F5F2"/>
+                    </a:solidFill>
+                  </a:tcPr>
+                </a:tc>
+                <a:tc>
+                  <a:txBody>
+                    <a:bodyPr/>
+                    <a:lstStyle/>
+                    <a:p>
+                      <a:pPr algn="ctr" indent="0" marL="0">
+                        <a:buNone/>
+                      </a:pPr>
+                      <a:r>
+                        <a:rPr lang="en-US" sz="1050" b="1" dirty="0">
+                          <a:solidFill>
+                            <a:srgbClr val="1A1A1A"/>
+                          </a:solidFill>
+                          <a:latin typeface="Calibri" pitchFamily="34" charset="0"/>
+                          <a:ea typeface="Calibri" pitchFamily="34" charset="-122"/>
+                          <a:cs typeface="Calibri" pitchFamily="34" charset="-120"/>
+                        </a:rPr>
+                        <a:t>recall of the edit ↑</a:t>
+                      </a:r>
+                      <a:endParaRPr lang="en-US" sz="1050" dirty="0">
+                        <a:latin typeface="Calibri" charset="0"/>
+                        <a:ea typeface="Calibri" charset="0"/>
+                        <a:cs typeface="Calibri" charset="0"/>
+                      </a:endParaRPr>
+                    </a:p>
+                  </a:txBody>
+                  <a:tcPr marL="50800" marR="50800" marT="50800" marB="50800" anchor="t">
+                    <a:lnL w="6350" cap="flat" cmpd="sng" algn="ctr">
+                      <a:solidFill>
+                        <a:srgbClr val="DEDCD7"/>
+                      </a:solidFill>
+                      <a:prstDash val="solid"/>
+                      <a:round/>
+                      <a:headEnd type="none" w="med" len="med"/>
+                      <a:tailEnd type="none" w="med" len="med"/>
+                    </a:lnL>
+                    <a:lnR w="6350" cap="flat" cmpd="sng" algn="ctr">
+                      <a:solidFill>
+                        <a:srgbClr val="DEDCD7"/>
+                      </a:solidFill>
+                      <a:prstDash val="solid"/>
+                      <a:round/>
+                      <a:headEnd type="none" w="med" len="med"/>
+                      <a:tailEnd type="none" w="med" len="med"/>
+                    </a:lnR>
+                    <a:lnT w="6350" cap="flat" cmpd="sng" algn="ctr">
+                      <a:solidFill>
+                        <a:srgbClr val="DEDCD7"/>
+                      </a:solidFill>
+                      <a:prstDash val="solid"/>
+                      <a:round/>
+                      <a:headEnd type="none" w="med" len="med"/>
+                      <a:tailEnd type="none" w="med" len="med"/>
+                    </a:lnT>
+                    <a:lnB w="6350" cap="flat" cmpd="sng" algn="ctr">
+                      <a:solidFill>
+                        <a:srgbClr val="DEDCD7"/>
+                      </a:solidFill>
+                      <a:prstDash val="solid"/>
+                      <a:round/>
+                      <a:headEnd type="none" w="med" len="med"/>
+                      <a:tailEnd type="none" w="med" len="med"/>
+                    </a:lnB>
+                    <a:solidFill>
+                      <a:srgbClr val="F6F5F2"/>
+                    </a:solidFill>
+                  </a:tcPr>
+                </a:tc>
+                <a:tc>
+                  <a:txBody>
+                    <a:bodyPr/>
+                    <a:lstStyle/>
+                    <a:p>
+                      <a:pPr algn="ctr" indent="0" marL="0">
+                        <a:buNone/>
+                      </a:pPr>
+                      <a:r>
+                        <a:rPr lang="en-US" sz="1050" b="1" dirty="0">
+                          <a:solidFill>
+                            <a:srgbClr val="1A1A1A"/>
+                          </a:solidFill>
+                          <a:latin typeface="Calibri" pitchFamily="34" charset="0"/>
+                          <a:ea typeface="Calibri" pitchFamily="34" charset="-122"/>
+                          <a:cs typeface="Calibri" pitchFamily="34" charset="-120"/>
+                        </a:rPr>
+                        <a:t>collateral change ↓</a:t>
+                      </a:r>
+                      <a:endParaRPr lang="en-US" sz="1050" dirty="0">
+                        <a:latin typeface="Calibri" charset="0"/>
+                        <a:ea typeface="Calibri" charset="0"/>
+                        <a:cs typeface="Calibri" charset="0"/>
+                      </a:endParaRPr>
+                    </a:p>
+                  </a:txBody>
+                  <a:tcPr marL="50800" marR="50800" marT="50800" marB="50800" anchor="t">
+                    <a:lnL w="6350" cap="flat" cmpd="sng" algn="ctr">
+                      <a:solidFill>
+                        <a:srgbClr val="DEDCD7"/>
+                      </a:solidFill>
+                      <a:prstDash val="solid"/>
+                      <a:round/>
+                      <a:headEnd type="none" w="med" len="med"/>
+                      <a:tailEnd type="none" w="med" len="med"/>
+                    </a:lnL>
+                    <a:lnR w="6350" cap="flat" cmpd="sng" algn="ctr">
+                      <a:solidFill>
+                        <a:srgbClr val="DEDCD7"/>
+                      </a:solidFill>
+                      <a:prstDash val="solid"/>
+                      <a:round/>
+                      <a:headEnd type="none" w="med" len="med"/>
+                      <a:tailEnd type="none" w="med" len="med"/>
+                    </a:lnR>
+                    <a:lnT w="6350" cap="flat" cmpd="sng" algn="ctr">
+                      <a:solidFill>
+                        <a:srgbClr val="DEDCD7"/>
+                      </a:solidFill>
+                      <a:prstDash val="solid"/>
+                      <a:round/>
+                      <a:headEnd type="none" w="med" len="med"/>
+                      <a:tailEnd type="none" w="med" len="med"/>
+                    </a:lnT>
+                    <a:lnB w="6350" cap="flat" cmpd="sng" algn="ctr">
+                      <a:solidFill>
+                        <a:srgbClr val="DEDCD7"/>
+                      </a:solidFill>
+                      <a:prstDash val="solid"/>
+                      <a:round/>
+                      <a:headEnd type="none" w="med" len="med"/>
+                      <a:tailEnd type="none" w="med" len="med"/>
+                    </a:lnB>
+                    <a:solidFill>
+                      <a:srgbClr val="F6F5F2"/>
+                    </a:solidFill>
+                  </a:tcPr>
+                </a:tc>
+                <a:tc>
+                  <a:txBody>
+                    <a:bodyPr/>
+                    <a:lstStyle/>
+                    <a:p>
+                      <a:pPr algn="ctr" indent="0" marL="0">
+                        <a:buNone/>
+                      </a:pPr>
+                      <a:r>
+                        <a:rPr lang="en-US" sz="1050" b="1" dirty="0">
+                          <a:solidFill>
+                            <a:srgbClr val="1A1A1A"/>
+                          </a:solidFill>
+                          <a:latin typeface="Calibri" pitchFamily="34" charset="0"/>
+                          <a:ea typeface="Calibri" pitchFamily="34" charset="-122"/>
+                          <a:cs typeface="Calibri" pitchFamily="34" charset="-120"/>
+                        </a:rPr>
+                        <a:t>net ↑</a:t>
+                      </a:r>
+                      <a:endParaRPr lang="en-US" sz="1050" dirty="0">
+                        <a:latin typeface="Calibri" charset="0"/>
+                        <a:ea typeface="Calibri" charset="0"/>
+                        <a:cs typeface="Calibri" charset="0"/>
+                      </a:endParaRPr>
+                    </a:p>
+                  </a:txBody>
+                  <a:tcPr marL="50800" marR="50800" marT="50800" marB="50800" anchor="t">
+                    <a:lnL w="6350" cap="flat" cmpd="sng" algn="ctr">
+                      <a:solidFill>
+                        <a:srgbClr val="DEDCD7"/>
+                      </a:solidFill>
+                      <a:prstDash val="solid"/>
+                      <a:round/>
+                      <a:headEnd type="none" w="med" len="med"/>
+                      <a:tailEnd type="none" w="med" len="med"/>
+                    </a:lnL>
+                    <a:lnR w="6350" cap="flat" cmpd="sng" algn="ctr">
+                      <a:solidFill>
+                        <a:srgbClr val="DEDCD7"/>
+                      </a:solidFill>
+                      <a:prstDash val="solid"/>
+                      <a:round/>
+                      <a:headEnd type="none" w="med" len="med"/>
+                      <a:tailEnd type="none" w="med" len="med"/>
+                    </a:lnR>
+                    <a:lnT w="6350" cap="flat" cmpd="sng" algn="ctr">
+                      <a:solidFill>
+                        <a:srgbClr val="DEDCD7"/>
+                      </a:solidFill>
+                      <a:prstDash val="solid"/>
+                      <a:round/>
+                      <a:headEnd type="none" w="med" len="med"/>
+                      <a:tailEnd type="none" w="med" len="med"/>
+                    </a:lnT>
+                    <a:lnB w="6350" cap="flat" cmpd="sng" algn="ctr">
+                      <a:solidFill>
+                        <a:srgbClr val="DEDCD7"/>
+                      </a:solidFill>
+                      <a:prstDash val="solid"/>
+                      <a:round/>
+                      <a:headEnd type="none" w="med" len="med"/>
+                      <a:tailEnd type="none" w="med" len="med"/>
+                    </a:lnB>
+                    <a:solidFill>
+                      <a:srgbClr val="F6F5F2"/>
+                    </a:solidFill>
+                  </a:tcPr>
+                </a:tc>
+              </a:tr>
+              <a:tr h="365760">
+                <a:tc>
+                  <a:txBody>
+                    <a:bodyPr/>
+                    <a:lstStyle/>
+                    <a:p>
+                      <a:pPr indent="0" marL="0">
+                        <a:buNone/>
+                      </a:pPr>
+                      <a:r>
+                        <a:rPr lang="en-US" sz="1050" dirty="0">
+                          <a:solidFill>
+                            <a:srgbClr val="1A1A1A"/>
+                          </a:solidFill>
+                          <a:latin typeface="Calibri" pitchFamily="34" charset="0"/>
+                          <a:ea typeface="Calibri" pitchFamily="34" charset="-122"/>
+                          <a:cs typeface="Calibri" pitchFamily="34" charset="-120"/>
+                        </a:rPr>
+                        <a:t>none — whole frame</a:t>
+                      </a:r>
+                      <a:endParaRPr lang="en-US" sz="1050" dirty="0">
+                        <a:latin typeface="Calibri" charset="0"/>
+                        <a:ea typeface="Calibri" charset="0"/>
+                        <a:cs typeface="Calibri" charset="0"/>
+                      </a:endParaRPr>
+                    </a:p>
+                  </a:txBody>
+                  <a:tcPr marL="50800" marR="50800" marT="50800" marB="50800" anchor="t">
+                    <a:lnL w="6350" cap="flat" cmpd="sng" algn="ctr">
+                      <a:solidFill>
+                        <a:srgbClr val="DEDCD7"/>
+                      </a:solidFill>
+                      <a:prstDash val="solid"/>
+                      <a:round/>
+                      <a:headEnd type="none" w="med" len="med"/>
+                      <a:tailEnd type="none" w="med" len="med"/>
+                    </a:lnL>
+                    <a:lnR w="6350" cap="flat" cmpd="sng" algn="ctr">
+                      <a:solidFill>
+                        <a:srgbClr val="DEDCD7"/>
+                      </a:solidFill>
+                      <a:prstDash val="solid"/>
+                      <a:round/>
+                      <a:headEnd type="none" w="med" len="med"/>
+                      <a:tailEnd type="none" w="med" len="med"/>
+                    </a:lnR>
+                    <a:lnT w="6350" cap="flat" cmpd="sng" algn="ctr">
+                      <a:solidFill>
+                        <a:srgbClr val="DEDCD7"/>
+                      </a:solidFill>
+                      <a:prstDash val="solid"/>
+                      <a:round/>
+                      <a:headEnd type="none" w="med" len="med"/>
+                      <a:tailEnd type="none" w="med" len="med"/>
+                    </a:lnT>
+                    <a:lnB w="6350" cap="flat" cmpd="sng" algn="ctr">
+                      <a:solidFill>
+                        <a:srgbClr val="DEDCD7"/>
+                      </a:solidFill>
+                      <a:prstDash val="solid"/>
+                      <a:round/>
+                      <a:headEnd type="none" w="med" len="med"/>
+                      <a:tailEnd type="none" w="med" len="med"/>
+                    </a:lnB>
+                  </a:tcPr>
+                </a:tc>
+                <a:tc>
+                  <a:txBody>
+                    <a:bodyPr/>
+                    <a:lstStyle/>
+                    <a:p>
+                      <a:pPr algn="ctr" indent="0" marL="0">
+                        <a:buNone/>
+                      </a:pPr>
+                      <a:r>
+                        <a:rPr lang="en-US" sz="1050" dirty="0">
+                          <a:solidFill>
+                            <a:srgbClr val="1A1A1A"/>
+                          </a:solidFill>
+                          <a:latin typeface="Calibri" pitchFamily="34" charset="0"/>
+                          <a:ea typeface="Calibri" pitchFamily="34" charset="-122"/>
+                          <a:cs typeface="Calibri" pitchFamily="34" charset="-120"/>
+                        </a:rPr>
+                        <a:t>33.3%</a:t>
+                      </a:r>
+                      <a:endParaRPr lang="en-US" sz="1050" dirty="0">
+                        <a:latin typeface="Calibri" charset="0"/>
+                        <a:ea typeface="Calibri" charset="0"/>
+                        <a:cs typeface="Calibri" charset="0"/>
+                      </a:endParaRPr>
+                    </a:p>
+                  </a:txBody>
+                  <a:tcPr marL="50800" marR="50800" marT="50800" marB="50800" anchor="t">
+                    <a:lnL w="6350" cap="flat" cmpd="sng" algn="ctr">
+                      <a:solidFill>
+                        <a:srgbClr val="DEDCD7"/>
+                      </a:solidFill>
+                      <a:prstDash val="solid"/>
+                      <a:round/>
+                      <a:headEnd type="none" w="med" len="med"/>
+                      <a:tailEnd type="none" w="med" len="med"/>
+                    </a:lnL>
+                    <a:lnR w="6350" cap="flat" cmpd="sng" algn="ctr">
+                      <a:solidFill>
+                        <a:srgbClr val="DEDCD7"/>
+                      </a:solidFill>
+                      <a:prstDash val="solid"/>
+                      <a:round/>
+                      <a:headEnd type="none" w="med" len="med"/>
+                      <a:tailEnd type="none" w="med" len="med"/>
+                    </a:lnR>
+                    <a:lnT w="6350" cap="flat" cmpd="sng" algn="ctr">
+                      <a:solidFill>
+                        <a:srgbClr val="DEDCD7"/>
+                      </a:solidFill>
+                      <a:prstDash val="solid"/>
+                      <a:round/>
+                      <a:headEnd type="none" w="med" len="med"/>
+                      <a:tailEnd type="none" w="med" len="med"/>
+                    </a:lnT>
+                    <a:lnB w="6350" cap="flat" cmpd="sng" algn="ctr">
+                      <a:solidFill>
+                        <a:srgbClr val="DEDCD7"/>
+                      </a:solidFill>
+                      <a:prstDash val="solid"/>
+                      <a:round/>
+                      <a:headEnd type="none" w="med" len="med"/>
+                      <a:tailEnd type="none" w="med" len="med"/>
+                    </a:lnB>
+                  </a:tcPr>
+                </a:tc>
+                <a:tc>
+                  <a:txBody>
+                    <a:bodyPr/>
+                    <a:lstStyle/>
+                    <a:p>
+                      <a:pPr algn="ctr" indent="0" marL="0">
+                        <a:buNone/>
+                      </a:pPr>
+                      <a:r>
+                        <a:rPr lang="en-US" sz="1050" dirty="0">
+                          <a:solidFill>
+                            <a:srgbClr val="1A1A1A"/>
+                          </a:solidFill>
+                          <a:latin typeface="Calibri" pitchFamily="34" charset="0"/>
+                          <a:ea typeface="Calibri" pitchFamily="34" charset="-122"/>
+                          <a:cs typeface="Calibri" pitchFamily="34" charset="-120"/>
+                        </a:rPr>
+                        <a:t>24.2%</a:t>
+                      </a:r>
+                      <a:endParaRPr lang="en-US" sz="1050" dirty="0">
+                        <a:latin typeface="Calibri" charset="0"/>
+                        <a:ea typeface="Calibri" charset="0"/>
+                        <a:cs typeface="Calibri" charset="0"/>
+                      </a:endParaRPr>
+                    </a:p>
+                  </a:txBody>
+                  <a:tcPr marL="50800" marR="50800" marT="50800" marB="50800" anchor="t">
+                    <a:lnL w="6350" cap="flat" cmpd="sng" algn="ctr">
+                      <a:solidFill>
+                        <a:srgbClr val="DEDCD7"/>
+                      </a:solidFill>
+                      <a:prstDash val="solid"/>
+                      <a:round/>
+                      <a:headEnd type="none" w="med" len="med"/>
+                      <a:tailEnd type="none" w="med" len="med"/>
+                    </a:lnL>
+                    <a:lnR w="6350" cap="flat" cmpd="sng" algn="ctr">
+                      <a:solidFill>
+                        <a:srgbClr val="DEDCD7"/>
+                      </a:solidFill>
+                      <a:prstDash val="solid"/>
+                      <a:round/>
+                      <a:headEnd type="none" w="med" len="med"/>
+                      <a:tailEnd type="none" w="med" len="med"/>
+                    </a:lnR>
+                    <a:lnT w="6350" cap="flat" cmpd="sng" algn="ctr">
+                      <a:solidFill>
+                        <a:srgbClr val="DEDCD7"/>
+                      </a:solidFill>
+                      <a:prstDash val="solid"/>
+                      <a:round/>
+                      <a:headEnd type="none" w="med" len="med"/>
+                      <a:tailEnd type="none" w="med" len="med"/>
+                    </a:lnT>
+                    <a:lnB w="6350" cap="flat" cmpd="sng" algn="ctr">
+                      <a:solidFill>
+                        <a:srgbClr val="DEDCD7"/>
+                      </a:solidFill>
+                      <a:prstDash val="solid"/>
+                      <a:round/>
+                      <a:headEnd type="none" w="med" len="med"/>
+                      <a:tailEnd type="none" w="med" len="med"/>
+                    </a:lnB>
+                  </a:tcPr>
+                </a:tc>
+                <a:tc>
+                  <a:txBody>
+                    <a:bodyPr/>
+                    <a:lstStyle/>
+                    <a:p>
+                      <a:pPr algn="ctr" indent="0" marL="0">
+                        <a:buNone/>
+                      </a:pPr>
+                      <a:r>
+                        <a:rPr lang="en-US" sz="1050" dirty="0">
+                          <a:solidFill>
+                            <a:srgbClr val="1A1A1A"/>
+                          </a:solidFill>
+                          <a:latin typeface="Calibri" pitchFamily="34" charset="0"/>
+                          <a:ea typeface="Calibri" pitchFamily="34" charset="-122"/>
+                          <a:cs typeface="Calibri" pitchFamily="34" charset="-120"/>
+                        </a:rPr>
+                        <a:t>+9.1%</a:t>
+                      </a:r>
+                      <a:endParaRPr lang="en-US" sz="1050" dirty="0">
+                        <a:latin typeface="Calibri" charset="0"/>
+                        <a:ea typeface="Calibri" charset="0"/>
+                        <a:cs typeface="Calibri" charset="0"/>
+                      </a:endParaRPr>
+                    </a:p>
+                  </a:txBody>
+                  <a:tcPr marL="50800" marR="50800" marT="50800" marB="50800" anchor="t">
+                    <a:lnL w="6350" cap="flat" cmpd="sng" algn="ctr">
+                      <a:solidFill>
+                        <a:srgbClr val="DEDCD7"/>
+                      </a:solidFill>
+                      <a:prstDash val="solid"/>
+                      <a:round/>
+                      <a:headEnd type="none" w="med" len="med"/>
+                      <a:tailEnd type="none" w="med" len="med"/>
+                    </a:lnL>
+                    <a:lnR w="6350" cap="flat" cmpd="sng" algn="ctr">
+                      <a:solidFill>
+                        <a:srgbClr val="DEDCD7"/>
+                      </a:solidFill>
+                      <a:prstDash val="solid"/>
+                      <a:round/>
+                      <a:headEnd type="none" w="med" len="med"/>
+                      <a:tailEnd type="none" w="med" len="med"/>
+                    </a:lnR>
+                    <a:lnT w="6350" cap="flat" cmpd="sng" algn="ctr">
+                      <a:solidFill>
+                        <a:srgbClr val="DEDCD7"/>
+                      </a:solidFill>
+                      <a:prstDash val="solid"/>
+                      <a:round/>
+                      <a:headEnd type="none" w="med" len="med"/>
+                      <a:tailEnd type="none" w="med" len="med"/>
+                    </a:lnT>
+                    <a:lnB w="6350" cap="flat" cmpd="sng" algn="ctr">
+                      <a:solidFill>
+                        <a:srgbClr val="DEDCD7"/>
+                      </a:solidFill>
+                      <a:prstDash val="solid"/>
+                      <a:round/>
+                      <a:headEnd type="none" w="med" len="med"/>
+                      <a:tailEnd type="none" w="med" len="med"/>
+                    </a:lnB>
+                  </a:tcPr>
+                </a:tc>
+              </a:tr>
+              <a:tr h="365760">
+                <a:tc>
+                  <a:txBody>
+                    <a:bodyPr/>
+                    <a:lstStyle/>
+                    <a:p>
+                      <a:pPr indent="0" marL="0">
+                        <a:buNone/>
+                      </a:pPr>
+                      <a:r>
+                        <a:rPr lang="en-US" sz="1050" dirty="0">
+                          <a:solidFill>
+                            <a:srgbClr val="1A1A1A"/>
+                          </a:solidFill>
+                          <a:latin typeface="Calibri" pitchFamily="34" charset="0"/>
+                          <a:ea typeface="Calibri" pitchFamily="34" charset="-122"/>
+                          <a:cs typeface="Calibri" pitchFamily="34" charset="-120"/>
+                        </a:rPr>
+                        <a:t>ours, as predicted</a:t>
+                      </a:r>
+                      <a:endParaRPr lang="en-US" sz="1050" dirty="0">
+                        <a:latin typeface="Calibri" charset="0"/>
+                        <a:ea typeface="Calibri" charset="0"/>
+                        <a:cs typeface="Calibri" charset="0"/>
+                      </a:endParaRPr>
+                    </a:p>
+                  </a:txBody>
+                  <a:tcPr marL="50800" marR="50800" marT="50800" marB="50800" anchor="t">
+                    <a:lnL w="6350" cap="flat" cmpd="sng" algn="ctr">
+                      <a:solidFill>
+                        <a:srgbClr val="DEDCD7"/>
+                      </a:solidFill>
+                      <a:prstDash val="solid"/>
+                      <a:round/>
+                      <a:headEnd type="none" w="med" len="med"/>
+                      <a:tailEnd type="none" w="med" len="med"/>
+                    </a:lnL>
+                    <a:lnR w="6350" cap="flat" cmpd="sng" algn="ctr">
+                      <a:solidFill>
+                        <a:srgbClr val="DEDCD7"/>
+                      </a:solidFill>
+                      <a:prstDash val="solid"/>
+                      <a:round/>
+                      <a:headEnd type="none" w="med" len="med"/>
+                      <a:tailEnd type="none" w="med" len="med"/>
+                    </a:lnR>
+                    <a:lnT w="6350" cap="flat" cmpd="sng" algn="ctr">
+                      <a:solidFill>
+                        <a:srgbClr val="DEDCD7"/>
+                      </a:solidFill>
+                      <a:prstDash val="solid"/>
+                      <a:round/>
+                      <a:headEnd type="none" w="med" len="med"/>
+                      <a:tailEnd type="none" w="med" len="med"/>
+                    </a:lnT>
+                    <a:lnB w="6350" cap="flat" cmpd="sng" algn="ctr">
+                      <a:solidFill>
+                        <a:srgbClr val="DEDCD7"/>
+                      </a:solidFill>
+                      <a:prstDash val="solid"/>
+                      <a:round/>
+                      <a:headEnd type="none" w="med" len="med"/>
+                      <a:tailEnd type="none" w="med" len="med"/>
+                    </a:lnB>
+                  </a:tcPr>
+                </a:tc>
+                <a:tc>
+                  <a:txBody>
+                    <a:bodyPr/>
+                    <a:lstStyle/>
+                    <a:p>
+                      <a:pPr algn="ctr" indent="0" marL="0">
+                        <a:buNone/>
+                      </a:pPr>
+                      <a:r>
+                        <a:rPr lang="en-US" sz="1050" dirty="0">
+                          <a:solidFill>
+                            <a:srgbClr val="1A1A1A"/>
+                          </a:solidFill>
+                          <a:latin typeface="Calibri" pitchFamily="34" charset="0"/>
+                          <a:ea typeface="Calibri" pitchFamily="34" charset="-122"/>
+                          <a:cs typeface="Calibri" pitchFamily="34" charset="-120"/>
+                        </a:rPr>
+                        <a:t>7.5%</a:t>
+                      </a:r>
+                      <a:endParaRPr lang="en-US" sz="1050" dirty="0">
+                        <a:latin typeface="Calibri" charset="0"/>
+                        <a:ea typeface="Calibri" charset="0"/>
+                        <a:cs typeface="Calibri" charset="0"/>
+                      </a:endParaRPr>
+                    </a:p>
+                  </a:txBody>
+                  <a:tcPr marL="50800" marR="50800" marT="50800" marB="50800" anchor="t">
+                    <a:lnL w="6350" cap="flat" cmpd="sng" algn="ctr">
+                      <a:solidFill>
+                        <a:srgbClr val="DEDCD7"/>
+                      </a:solidFill>
+                      <a:prstDash val="solid"/>
+                      <a:round/>
+                      <a:headEnd type="none" w="med" len="med"/>
+                      <a:tailEnd type="none" w="med" len="med"/>
+                    </a:lnL>
+                    <a:lnR w="6350" cap="flat" cmpd="sng" algn="ctr">
+                      <a:solidFill>
+                        <a:srgbClr val="DEDCD7"/>
+                      </a:solidFill>
+                      <a:prstDash val="solid"/>
+                      <a:round/>
+                      <a:headEnd type="none" w="med" len="med"/>
+                      <a:tailEnd type="none" w="med" len="med"/>
+                    </a:lnR>
+                    <a:lnT w="6350" cap="flat" cmpd="sng" algn="ctr">
+                      <a:solidFill>
+                        <a:srgbClr val="DEDCD7"/>
+                      </a:solidFill>
+                      <a:prstDash val="solid"/>
+                      <a:round/>
+                      <a:headEnd type="none" w="med" len="med"/>
+                      <a:tailEnd type="none" w="med" len="med"/>
+                    </a:lnT>
+                    <a:lnB w="6350" cap="flat" cmpd="sng" algn="ctr">
+                      <a:solidFill>
+                        <a:srgbClr val="DEDCD7"/>
+                      </a:solidFill>
+                      <a:prstDash val="solid"/>
+                      <a:round/>
+                      <a:headEnd type="none" w="med" len="med"/>
+                      <a:tailEnd type="none" w="med" len="med"/>
+                    </a:lnB>
+                  </a:tcPr>
+                </a:tc>
+                <a:tc>
+                  <a:txBody>
+                    <a:bodyPr/>
+                    <a:lstStyle/>
+                    <a:p>
+                      <a:pPr algn="ctr" indent="0" marL="0">
+                        <a:buNone/>
+                      </a:pPr>
+                      <a:r>
+                        <a:rPr lang="en-US" sz="1050" dirty="0">
+                          <a:solidFill>
+                            <a:srgbClr val="1A1A1A"/>
+                          </a:solidFill>
+                          <a:latin typeface="Calibri" pitchFamily="34" charset="0"/>
+                          <a:ea typeface="Calibri" pitchFamily="34" charset="-122"/>
+                          <a:cs typeface="Calibri" pitchFamily="34" charset="-120"/>
+                        </a:rPr>
+                        <a:t>1.5%</a:t>
+                      </a:r>
+                      <a:endParaRPr lang="en-US" sz="1050" dirty="0">
+                        <a:latin typeface="Calibri" charset="0"/>
+                        <a:ea typeface="Calibri" charset="0"/>
+                        <a:cs typeface="Calibri" charset="0"/>
+                      </a:endParaRPr>
+                    </a:p>
+                  </a:txBody>
+                  <a:tcPr marL="50800" marR="50800" marT="50800" marB="50800" anchor="t">
+                    <a:lnL w="6350" cap="flat" cmpd="sng" algn="ctr">
+                      <a:solidFill>
+                        <a:srgbClr val="DEDCD7"/>
+                      </a:solidFill>
+                      <a:prstDash val="solid"/>
+                      <a:round/>
+                      <a:headEnd type="none" w="med" len="med"/>
+                      <a:tailEnd type="none" w="med" len="med"/>
+                    </a:lnL>
+                    <a:lnR w="6350" cap="flat" cmpd="sng" algn="ctr">
+                      <a:solidFill>
+                        <a:srgbClr val="DEDCD7"/>
+                      </a:solidFill>
+                      <a:prstDash val="solid"/>
+                      <a:round/>
+                      <a:headEnd type="none" w="med" len="med"/>
+                      <a:tailEnd type="none" w="med" len="med"/>
+                    </a:lnR>
+                    <a:lnT w="6350" cap="flat" cmpd="sng" algn="ctr">
+                      <a:solidFill>
+                        <a:srgbClr val="DEDCD7"/>
+                      </a:solidFill>
+                      <a:prstDash val="solid"/>
+                      <a:round/>
+                      <a:headEnd type="none" w="med" len="med"/>
+                      <a:tailEnd type="none" w="med" len="med"/>
+                    </a:lnT>
+                    <a:lnB w="6350" cap="flat" cmpd="sng" algn="ctr">
+                      <a:solidFill>
+                        <a:srgbClr val="DEDCD7"/>
+                      </a:solidFill>
+                      <a:prstDash val="solid"/>
+                      <a:round/>
+                      <a:headEnd type="none" w="med" len="med"/>
+                      <a:tailEnd type="none" w="med" len="med"/>
+                    </a:lnB>
+                  </a:tcPr>
+                </a:tc>
+                <a:tc>
+                  <a:txBody>
+                    <a:bodyPr/>
+                    <a:lstStyle/>
+                    <a:p>
+                      <a:pPr algn="ctr" indent="0" marL="0">
+                        <a:buNone/>
+                      </a:pPr>
+                      <a:r>
+                        <a:rPr lang="en-US" sz="1050" dirty="0">
+                          <a:solidFill>
+                            <a:srgbClr val="1A1A1A"/>
+                          </a:solidFill>
+                          <a:latin typeface="Calibri" pitchFamily="34" charset="0"/>
+                          <a:ea typeface="Calibri" pitchFamily="34" charset="-122"/>
+                          <a:cs typeface="Calibri" pitchFamily="34" charset="-120"/>
+                        </a:rPr>
+                        <a:t>+6.0%</a:t>
+                      </a:r>
+                      <a:endParaRPr lang="en-US" sz="1050" dirty="0">
+                        <a:latin typeface="Calibri" charset="0"/>
+                        <a:ea typeface="Calibri" charset="0"/>
+                        <a:cs typeface="Calibri" charset="0"/>
+                      </a:endParaRPr>
+                    </a:p>
+                  </a:txBody>
+                  <a:tcPr marL="50800" marR="50800" marT="50800" marB="50800" anchor="t">
+                    <a:lnL w="6350" cap="flat" cmpd="sng" algn="ctr">
+                      <a:solidFill>
+                        <a:srgbClr val="DEDCD7"/>
+                      </a:solidFill>
+                      <a:prstDash val="solid"/>
+                      <a:round/>
+                      <a:headEnd type="none" w="med" len="med"/>
+                      <a:tailEnd type="none" w="med" len="med"/>
+                    </a:lnL>
+                    <a:lnR w="6350" cap="flat" cmpd="sng" algn="ctr">
+                      <a:solidFill>
+                        <a:srgbClr val="DEDCD7"/>
+                      </a:solidFill>
+                      <a:prstDash val="solid"/>
+                      <a:round/>
+                      <a:headEnd type="none" w="med" len="med"/>
+                      <a:tailEnd type="none" w="med" len="med"/>
+                    </a:lnR>
+                    <a:lnT w="6350" cap="flat" cmpd="sng" algn="ctr">
+                      <a:solidFill>
+                        <a:srgbClr val="DEDCD7"/>
+                      </a:solidFill>
+                      <a:prstDash val="solid"/>
+                      <a:round/>
+                      <a:headEnd type="none" w="med" len="med"/>
+                      <a:tailEnd type="none" w="med" len="med"/>
+                    </a:lnT>
+                    <a:lnB w="6350" cap="flat" cmpd="sng" algn="ctr">
+                      <a:solidFill>
+                        <a:srgbClr val="DEDCD7"/>
+                      </a:solidFill>
+                      <a:prstDash val="solid"/>
+                      <a:round/>
+                      <a:headEnd type="none" w="med" len="med"/>
+                      <a:tailEnd type="none" w="med" len="med"/>
+                    </a:lnB>
+                  </a:tcPr>
+                </a:tc>
+              </a:tr>
+              <a:tr h="365760">
+                <a:tc>
+                  <a:txBody>
+                    <a:bodyPr/>
+                    <a:lstStyle/>
+                    <a:p>
+                      <a:pPr indent="0" marL="0">
+                        <a:buNone/>
+                      </a:pPr>
+                      <a:r>
+                        <a:rPr lang="en-US" sz="1050" b="1" dirty="0">
+                          <a:solidFill>
+                            <a:srgbClr val="1A1A1A"/>
+                          </a:solidFill>
+                          <a:latin typeface="Calibri" pitchFamily="34" charset="0"/>
+                          <a:ea typeface="Calibri" pitchFamily="34" charset="-122"/>
+                          <a:cs typeface="Calibri" pitchFamily="34" charset="-120"/>
+                        </a:rPr>
+                        <a:t>ours, tuned — peak of the sweep</a:t>
+                      </a:r>
+                      <a:endParaRPr lang="en-US" sz="1050" dirty="0">
+                        <a:latin typeface="Calibri" charset="0"/>
+                        <a:ea typeface="Calibri" charset="0"/>
+                        <a:cs typeface="Calibri" charset="0"/>
+                      </a:endParaRPr>
+                    </a:p>
+                  </a:txBody>
+                  <a:tcPr marL="50800" marR="50800" marT="50800" marB="50800" anchor="t">
+                    <a:lnL w="6350" cap="flat" cmpd="sng" algn="ctr">
+                      <a:solidFill>
+                        <a:srgbClr val="DEDCD7"/>
+                      </a:solidFill>
+                      <a:prstDash val="solid"/>
+                      <a:round/>
+                      <a:headEnd type="none" w="med" len="med"/>
+                      <a:tailEnd type="none" w="med" len="med"/>
+                    </a:lnL>
+                    <a:lnR w="6350" cap="flat" cmpd="sng" algn="ctr">
+                      <a:solidFill>
+                        <a:srgbClr val="DEDCD7"/>
+                      </a:solidFill>
+                      <a:prstDash val="solid"/>
+                      <a:round/>
+                      <a:headEnd type="none" w="med" len="med"/>
+                      <a:tailEnd type="none" w="med" len="med"/>
+                    </a:lnR>
+                    <a:lnT w="6350" cap="flat" cmpd="sng" algn="ctr">
+                      <a:solidFill>
+                        <a:srgbClr val="DEDCD7"/>
+                      </a:solidFill>
+                      <a:prstDash val="solid"/>
+                      <a:round/>
+                      <a:headEnd type="none" w="med" len="med"/>
+                      <a:tailEnd type="none" w="med" len="med"/>
+                    </a:lnT>
+                    <a:lnB w="6350" cap="flat" cmpd="sng" algn="ctr">
+                      <a:solidFill>
+                        <a:srgbClr val="DEDCD7"/>
+                      </a:solidFill>
+                      <a:prstDash val="solid"/>
+                      <a:round/>
+                      <a:headEnd type="none" w="med" len="med"/>
+                      <a:tailEnd type="none" w="med" len="med"/>
+                    </a:lnB>
+                    <a:solidFill>
+                      <a:srgbClr val="EAF5EE"/>
+                    </a:solidFill>
+                  </a:tcPr>
+                </a:tc>
+                <a:tc>
+                  <a:txBody>
+                    <a:bodyPr/>
+                    <a:lstStyle/>
+                    <a:p>
+                      <a:pPr algn="ctr" indent="0" marL="0">
+                        <a:buNone/>
+                      </a:pPr>
+                      <a:r>
+                        <a:rPr lang="en-US" sz="1050" b="1" dirty="0">
+                          <a:solidFill>
+                            <a:srgbClr val="1A1A1A"/>
+                          </a:solidFill>
+                          <a:latin typeface="Calibri" pitchFamily="34" charset="0"/>
+                          <a:ea typeface="Calibri" pitchFamily="34" charset="-122"/>
+                          <a:cs typeface="Calibri" pitchFamily="34" charset="-120"/>
+                        </a:rPr>
+                        <a:t>22.9%</a:t>
+                      </a:r>
+                      <a:endParaRPr lang="en-US" sz="1050" dirty="0">
+                        <a:latin typeface="Calibri" charset="0"/>
+                        <a:ea typeface="Calibri" charset="0"/>
+                        <a:cs typeface="Calibri" charset="0"/>
+                      </a:endParaRPr>
+                    </a:p>
+                  </a:txBody>
+                  <a:tcPr marL="50800" marR="50800" marT="50800" marB="50800" anchor="t">
+                    <a:lnL w="6350" cap="flat" cmpd="sng" algn="ctr">
+                      <a:solidFill>
+                        <a:srgbClr val="DEDCD7"/>
+                      </a:solidFill>
+                      <a:prstDash val="solid"/>
+                      <a:round/>
+                      <a:headEnd type="none" w="med" len="med"/>
+                      <a:tailEnd type="none" w="med" len="med"/>
+                    </a:lnL>
+                    <a:lnR w="6350" cap="flat" cmpd="sng" algn="ctr">
+                      <a:solidFill>
+                        <a:srgbClr val="DEDCD7"/>
+                      </a:solidFill>
+                      <a:prstDash val="solid"/>
+                      <a:round/>
+                      <a:headEnd type="none" w="med" len="med"/>
+                      <a:tailEnd type="none" w="med" len="med"/>
+                    </a:lnR>
+                    <a:lnT w="6350" cap="flat" cmpd="sng" algn="ctr">
+                      <a:solidFill>
+                        <a:srgbClr val="DEDCD7"/>
+                      </a:solidFill>
+                      <a:prstDash val="solid"/>
+                      <a:round/>
+                      <a:headEnd type="none" w="med" len="med"/>
+                      <a:tailEnd type="none" w="med" len="med"/>
+                    </a:lnT>
+                    <a:lnB w="6350" cap="flat" cmpd="sng" algn="ctr">
+                      <a:solidFill>
+                        <a:srgbClr val="DEDCD7"/>
+                      </a:solidFill>
+                      <a:prstDash val="solid"/>
+                      <a:round/>
+                      <a:headEnd type="none" w="med" len="med"/>
+                      <a:tailEnd type="none" w="med" len="med"/>
+                    </a:lnB>
+                    <a:solidFill>
+                      <a:srgbClr val="EAF5EE"/>
+                    </a:solidFill>
+                  </a:tcPr>
+                </a:tc>
+                <a:tc>
+                  <a:txBody>
+                    <a:bodyPr/>
+                    <a:lstStyle/>
+                    <a:p>
+                      <a:pPr algn="ctr" indent="0" marL="0">
+                        <a:buNone/>
+                      </a:pPr>
+                      <a:r>
+                        <a:rPr lang="en-US" sz="1050" b="1" dirty="0">
+                          <a:solidFill>
+                            <a:srgbClr val="1A1A1A"/>
+                          </a:solidFill>
+                          <a:latin typeface="Calibri" pitchFamily="34" charset="0"/>
+                          <a:ea typeface="Calibri" pitchFamily="34" charset="-122"/>
+                          <a:cs typeface="Calibri" pitchFamily="34" charset="-120"/>
+                        </a:rPr>
+                        <a:t>8.8%</a:t>
+                      </a:r>
+                      <a:endParaRPr lang="en-US" sz="1050" dirty="0">
+                        <a:latin typeface="Calibri" charset="0"/>
+                        <a:ea typeface="Calibri" charset="0"/>
+                        <a:cs typeface="Calibri" charset="0"/>
+                      </a:endParaRPr>
+                    </a:p>
+                  </a:txBody>
+                  <a:tcPr marL="50800" marR="50800" marT="50800" marB="50800" anchor="t">
+                    <a:lnL w="6350" cap="flat" cmpd="sng" algn="ctr">
+                      <a:solidFill>
+                        <a:srgbClr val="DEDCD7"/>
+                      </a:solidFill>
+                      <a:prstDash val="solid"/>
+                      <a:round/>
+                      <a:headEnd type="none" w="med" len="med"/>
+                      <a:tailEnd type="none" w="med" len="med"/>
+                    </a:lnL>
+                    <a:lnR w="6350" cap="flat" cmpd="sng" algn="ctr">
+                      <a:solidFill>
+                        <a:srgbClr val="DEDCD7"/>
+                      </a:solidFill>
+                      <a:prstDash val="solid"/>
+                      <a:round/>
+                      <a:headEnd type="none" w="med" len="med"/>
+                      <a:tailEnd type="none" w="med" len="med"/>
+                    </a:lnR>
+                    <a:lnT w="6350" cap="flat" cmpd="sng" algn="ctr">
+                      <a:solidFill>
+                        <a:srgbClr val="DEDCD7"/>
+                      </a:solidFill>
+                      <a:prstDash val="solid"/>
+                      <a:round/>
+                      <a:headEnd type="none" w="med" len="med"/>
+                      <a:tailEnd type="none" w="med" len="med"/>
+                    </a:lnT>
+                    <a:lnB w="6350" cap="flat" cmpd="sng" algn="ctr">
+                      <a:solidFill>
+                        <a:srgbClr val="DEDCD7"/>
+                      </a:solidFill>
+                      <a:prstDash val="solid"/>
+                      <a:round/>
+                      <a:headEnd type="none" w="med" len="med"/>
+                      <a:tailEnd type="none" w="med" len="med"/>
+                    </a:lnB>
+                    <a:solidFill>
+                      <a:srgbClr val="EAF5EE"/>
+                    </a:solidFill>
+                  </a:tcPr>
+                </a:tc>
+                <a:tc>
+                  <a:txBody>
+                    <a:bodyPr/>
+                    <a:lstStyle/>
+                    <a:p>
+                      <a:pPr algn="ctr" indent="0" marL="0">
+                        <a:buNone/>
+                      </a:pPr>
+                      <a:r>
+                        <a:rPr lang="en-US" sz="1050" b="1" dirty="0">
+                          <a:solidFill>
+                            <a:srgbClr val="1A1A1A"/>
+                          </a:solidFill>
+                          <a:latin typeface="Calibri" pitchFamily="34" charset="0"/>
+                          <a:ea typeface="Calibri" pitchFamily="34" charset="-122"/>
+                          <a:cs typeface="Calibri" pitchFamily="34" charset="-120"/>
+                        </a:rPr>
+                        <a:t>+14.2%</a:t>
+                      </a:r>
+                      <a:endParaRPr lang="en-US" sz="1050" dirty="0">
+                        <a:latin typeface="Calibri" charset="0"/>
+                        <a:ea typeface="Calibri" charset="0"/>
+                        <a:cs typeface="Calibri" charset="0"/>
+                      </a:endParaRPr>
+                    </a:p>
+                  </a:txBody>
+                  <a:tcPr marL="50800" marR="50800" marT="50800" marB="50800" anchor="t">
+                    <a:lnL w="6350" cap="flat" cmpd="sng" algn="ctr">
+                      <a:solidFill>
+                        <a:srgbClr val="DEDCD7"/>
+                      </a:solidFill>
+                      <a:prstDash val="solid"/>
+                      <a:round/>
+                      <a:headEnd type="none" w="med" len="med"/>
+                      <a:tailEnd type="none" w="med" len="med"/>
+                    </a:lnL>
+                    <a:lnR w="6350" cap="flat" cmpd="sng" algn="ctr">
+                      <a:solidFill>
+                        <a:srgbClr val="DEDCD7"/>
+                      </a:solidFill>
+                      <a:prstDash val="solid"/>
+                      <a:round/>
+                      <a:headEnd type="none" w="med" len="med"/>
+                      <a:tailEnd type="none" w="med" len="med"/>
+                    </a:lnR>
+                    <a:lnT w="6350" cap="flat" cmpd="sng" algn="ctr">
+                      <a:solidFill>
+                        <a:srgbClr val="DEDCD7"/>
+                      </a:solidFill>
+                      <a:prstDash val="solid"/>
+                      <a:round/>
+                      <a:headEnd type="none" w="med" len="med"/>
+                      <a:tailEnd type="none" w="med" len="med"/>
+                    </a:lnT>
+                    <a:lnB w="6350" cap="flat" cmpd="sng" algn="ctr">
+                      <a:solidFill>
+                        <a:srgbClr val="DEDCD7"/>
+                      </a:solidFill>
+                      <a:prstDash val="solid"/>
+                      <a:round/>
+                      <a:headEnd type="none" w="med" len="med"/>
+                      <a:tailEnd type="none" w="med" len="med"/>
+                    </a:lnB>
+                    <a:solidFill>
+                      <a:srgbClr val="EAF5EE"/>
+                    </a:solidFill>
+                  </a:tcPr>
+                </a:tc>
+              </a:tr>
+              <a:tr h="365760">
+                <a:tc>
+                  <a:txBody>
+                    <a:bodyPr/>
+                    <a:lstStyle/>
+                    <a:p>
+                      <a:pPr indent="0" marL="0">
+                        <a:buNone/>
+                      </a:pPr>
+                      <a:r>
+                        <a:rPr lang="en-US" sz="1050" dirty="0">
+                          <a:solidFill>
+                            <a:srgbClr val="1A1A1A"/>
+                          </a:solidFill>
+                          <a:latin typeface="Calibri" pitchFamily="34" charset="0"/>
+                          <a:ea typeface="Calibri" pitchFamily="34" charset="-122"/>
+                          <a:cs typeface="Calibri" pitchFamily="34" charset="-120"/>
+                        </a:rPr>
+                        <a:t>MagicBrush human mask</a:t>
+                      </a:r>
+                      <a:endParaRPr lang="en-US" sz="1050" dirty="0">
+                        <a:latin typeface="Calibri" charset="0"/>
+                        <a:ea typeface="Calibri" charset="0"/>
+                        <a:cs typeface="Calibri" charset="0"/>
+                      </a:endParaRPr>
+                    </a:p>
+                  </a:txBody>
+                  <a:tcPr marL="50800" marR="50800" marT="50800" marB="50800" anchor="t">
+                    <a:lnL w="6350" cap="flat" cmpd="sng" algn="ctr">
+                      <a:solidFill>
+                        <a:srgbClr val="DEDCD7"/>
+                      </a:solidFill>
+                      <a:prstDash val="solid"/>
+                      <a:round/>
+                      <a:headEnd type="none" w="med" len="med"/>
+                      <a:tailEnd type="none" w="med" len="med"/>
+                    </a:lnL>
+                    <a:lnR w="6350" cap="flat" cmpd="sng" algn="ctr">
+                      <a:solidFill>
+                        <a:srgbClr val="DEDCD7"/>
+                      </a:solidFill>
+                      <a:prstDash val="solid"/>
+                      <a:round/>
+                      <a:headEnd type="none" w="med" len="med"/>
+                      <a:tailEnd type="none" w="med" len="med"/>
+                    </a:lnR>
+                    <a:lnT w="6350" cap="flat" cmpd="sng" algn="ctr">
+                      <a:solidFill>
+                        <a:srgbClr val="DEDCD7"/>
+                      </a:solidFill>
+                      <a:prstDash val="solid"/>
+                      <a:round/>
+                      <a:headEnd type="none" w="med" len="med"/>
+                      <a:tailEnd type="none" w="med" len="med"/>
+                    </a:lnT>
+                    <a:lnB w="6350" cap="flat" cmpd="sng" algn="ctr">
+                      <a:solidFill>
+                        <a:srgbClr val="DEDCD7"/>
+                      </a:solidFill>
+                      <a:prstDash val="solid"/>
+                      <a:round/>
+                      <a:headEnd type="none" w="med" len="med"/>
+                      <a:tailEnd type="none" w="med" len="med"/>
+                    </a:lnB>
+                  </a:tcPr>
+                </a:tc>
+                <a:tc>
+                  <a:txBody>
+                    <a:bodyPr/>
+                    <a:lstStyle/>
+                    <a:p>
+                      <a:pPr algn="ctr" indent="0" marL="0">
+                        <a:buNone/>
+                      </a:pPr>
+                      <a:r>
+                        <a:rPr lang="en-US" sz="1050" dirty="0">
+                          <a:solidFill>
+                            <a:srgbClr val="1A1A1A"/>
+                          </a:solidFill>
+                          <a:latin typeface="Calibri" pitchFamily="34" charset="0"/>
+                          <a:ea typeface="Calibri" pitchFamily="34" charset="-122"/>
+                          <a:cs typeface="Calibri" pitchFamily="34" charset="-120"/>
+                        </a:rPr>
+                        <a:t>31.5%</a:t>
+                      </a:r>
+                      <a:endParaRPr lang="en-US" sz="1050" dirty="0">
+                        <a:latin typeface="Calibri" charset="0"/>
+                        <a:ea typeface="Calibri" charset="0"/>
+                        <a:cs typeface="Calibri" charset="0"/>
+                      </a:endParaRPr>
+                    </a:p>
+                  </a:txBody>
+                  <a:tcPr marL="50800" marR="50800" marT="50800" marB="50800" anchor="t">
+                    <a:lnL w="6350" cap="flat" cmpd="sng" algn="ctr">
+                      <a:solidFill>
+                        <a:srgbClr val="DEDCD7"/>
+                      </a:solidFill>
+                      <a:prstDash val="solid"/>
+                      <a:round/>
+                      <a:headEnd type="none" w="med" len="med"/>
+                      <a:tailEnd type="none" w="med" len="med"/>
+                    </a:lnL>
+                    <a:lnR w="6350" cap="flat" cmpd="sng" algn="ctr">
+                      <a:solidFill>
+                        <a:srgbClr val="DEDCD7"/>
+                      </a:solidFill>
+                      <a:prstDash val="solid"/>
+                      <a:round/>
+                      <a:headEnd type="none" w="med" len="med"/>
+                      <a:tailEnd type="none" w="med" len="med"/>
+                    </a:lnR>
+                    <a:lnT w="6350" cap="flat" cmpd="sng" algn="ctr">
+                      <a:solidFill>
+                        <a:srgbClr val="DEDCD7"/>
+                      </a:solidFill>
+                      <a:prstDash val="solid"/>
+                      <a:round/>
+                      <a:headEnd type="none" w="med" len="med"/>
+                      <a:tailEnd type="none" w="med" len="med"/>
+                    </a:lnT>
+                    <a:lnB w="6350" cap="flat" cmpd="sng" algn="ctr">
+                      <a:solidFill>
+                        <a:srgbClr val="DEDCD7"/>
+                      </a:solidFill>
+                      <a:prstDash val="solid"/>
+                      <a:round/>
+                      <a:headEnd type="none" w="med" len="med"/>
+                      <a:tailEnd type="none" w="med" len="med"/>
+                    </a:lnB>
+                  </a:tcPr>
+                </a:tc>
+                <a:tc>
+                  <a:txBody>
+                    <a:bodyPr/>
+                    <a:lstStyle/>
+                    <a:p>
+                      <a:pPr algn="ctr" indent="0" marL="0">
+                        <a:buNone/>
+                      </a:pPr>
+                      <a:r>
+                        <a:rPr lang="en-US" sz="1050" dirty="0">
+                          <a:solidFill>
+                            <a:srgbClr val="1A1A1A"/>
+                          </a:solidFill>
+                          <a:latin typeface="Calibri" pitchFamily="34" charset="0"/>
+                          <a:ea typeface="Calibri" pitchFamily="34" charset="-122"/>
+                          <a:cs typeface="Calibri" pitchFamily="34" charset="-120"/>
+                        </a:rPr>
+                        <a:t>13.0%</a:t>
+                      </a:r>
+                      <a:endParaRPr lang="en-US" sz="1050" dirty="0">
+                        <a:latin typeface="Calibri" charset="0"/>
+                        <a:ea typeface="Calibri" charset="0"/>
+                        <a:cs typeface="Calibri" charset="0"/>
+                      </a:endParaRPr>
+                    </a:p>
+                  </a:txBody>
+                  <a:tcPr marL="50800" marR="50800" marT="50800" marB="50800" anchor="t">
+                    <a:lnL w="6350" cap="flat" cmpd="sng" algn="ctr">
+                      <a:solidFill>
+                        <a:srgbClr val="DEDCD7"/>
+                      </a:solidFill>
+                      <a:prstDash val="solid"/>
+                      <a:round/>
+                      <a:headEnd type="none" w="med" len="med"/>
+                      <a:tailEnd type="none" w="med" len="med"/>
+                    </a:lnL>
+                    <a:lnR w="6350" cap="flat" cmpd="sng" algn="ctr">
+                      <a:solidFill>
+                        <a:srgbClr val="DEDCD7"/>
+                      </a:solidFill>
+                      <a:prstDash val="solid"/>
+                      <a:round/>
+                      <a:headEnd type="none" w="med" len="med"/>
+                      <a:tailEnd type="none" w="med" len="med"/>
+                    </a:lnR>
+                    <a:lnT w="6350" cap="flat" cmpd="sng" algn="ctr">
+                      <a:solidFill>
+                        <a:srgbClr val="DEDCD7"/>
+                      </a:solidFill>
+                      <a:prstDash val="solid"/>
+                      <a:round/>
+                      <a:headEnd type="none" w="med" len="med"/>
+                      <a:tailEnd type="none" w="med" len="med"/>
+                    </a:lnT>
+                    <a:lnB w="6350" cap="flat" cmpd="sng" algn="ctr">
+                      <a:solidFill>
+                        <a:srgbClr val="DEDCD7"/>
+                      </a:solidFill>
+                      <a:prstDash val="solid"/>
+                      <a:round/>
+                      <a:headEnd type="none" w="med" len="med"/>
+                      <a:tailEnd type="none" w="med" len="med"/>
+                    </a:lnB>
+                  </a:tcPr>
+                </a:tc>
+                <a:tc>
+                  <a:txBody>
+                    <a:bodyPr/>
+                    <a:lstStyle/>
+                    <a:p>
+                      <a:pPr algn="ctr" indent="0" marL="0">
+                        <a:buNone/>
+                      </a:pPr>
+                      <a:r>
+                        <a:rPr lang="en-US" sz="1050" dirty="0">
+                          <a:solidFill>
+                            <a:srgbClr val="1A1A1A"/>
+                          </a:solidFill>
+                          <a:latin typeface="Calibri" pitchFamily="34" charset="0"/>
+                          <a:ea typeface="Calibri" pitchFamily="34" charset="-122"/>
+                          <a:cs typeface="Calibri" pitchFamily="34" charset="-120"/>
+                        </a:rPr>
+                        <a:t>+18.5%</a:t>
+                      </a:r>
+                      <a:endParaRPr lang="en-US" sz="1050" dirty="0">
+                        <a:latin typeface="Calibri" charset="0"/>
+                        <a:ea typeface="Calibri" charset="0"/>
+                        <a:cs typeface="Calibri" charset="0"/>
+                      </a:endParaRPr>
+                    </a:p>
+                  </a:txBody>
+                  <a:tcPr marL="50800" marR="50800" marT="50800" marB="50800" anchor="t">
+                    <a:lnL w="6350" cap="flat" cmpd="sng" algn="ctr">
+                      <a:solidFill>
+                        <a:srgbClr val="DEDCD7"/>
+                      </a:solidFill>
+                      <a:prstDash val="solid"/>
+                      <a:round/>
+                      <a:headEnd type="none" w="med" len="med"/>
+                      <a:tailEnd type="none" w="med" len="med"/>
+                    </a:lnL>
+                    <a:lnR w="6350" cap="flat" cmpd="sng" algn="ctr">
+                      <a:solidFill>
+                        <a:srgbClr val="DEDCD7"/>
+                      </a:solidFill>
+                      <a:prstDash val="solid"/>
+                      <a:round/>
+                      <a:headEnd type="none" w="med" len="med"/>
+                      <a:tailEnd type="none" w="med" len="med"/>
+                    </a:lnR>
+                    <a:lnT w="6350" cap="flat" cmpd="sng" algn="ctr">
+                      <a:solidFill>
+                        <a:srgbClr val="DEDCD7"/>
+                      </a:solidFill>
+                      <a:prstDash val="solid"/>
+                      <a:round/>
+                      <a:headEnd type="none" w="med" len="med"/>
+                      <a:tailEnd type="none" w="med" len="med"/>
+                    </a:lnT>
+                    <a:lnB w="6350" cap="flat" cmpd="sng" algn="ctr">
+                      <a:solidFill>
+                        <a:srgbClr val="DEDCD7"/>
+                      </a:solidFill>
+                      <a:prstDash val="solid"/>
+                      <a:round/>
+                      <a:headEnd type="none" w="med" len="med"/>
+                      <a:tailEnd type="none" w="med" len="med"/>
+                    </a:lnB>
+                  </a:tcPr>
+                </a:tc>
+              </a:tr>
+              <a:tr h="365760">
+                <a:tc>
+                  <a:txBody>
+                    <a:bodyPr/>
+                    <a:lstStyle/>
+                    <a:p>
+                      <a:pPr indent="0" marL="0">
+                        <a:buNone/>
+                      </a:pPr>
+                      <a:r>
+                        <a:rPr lang="en-US" sz="1050" dirty="0">
+                          <a:solidFill>
+                            <a:srgbClr val="1A1A1A"/>
+                          </a:solidFill>
+                          <a:latin typeface="Calibri" pitchFamily="34" charset="0"/>
+                          <a:ea typeface="Calibri" pitchFamily="34" charset="-122"/>
+                          <a:cs typeface="Calibri" pitchFamily="34" charset="-120"/>
+                        </a:rPr>
+                        <a:t>ground-truth region</a:t>
+                      </a:r>
+                      <a:endParaRPr lang="en-US" sz="1050" dirty="0">
+                        <a:latin typeface="Calibri" charset="0"/>
+                        <a:ea typeface="Calibri" charset="0"/>
+                        <a:cs typeface="Calibri" charset="0"/>
+                      </a:endParaRPr>
+                    </a:p>
+                  </a:txBody>
+                  <a:tcPr marL="50800" marR="50800" marT="50800" marB="50800" anchor="t">
+                    <a:lnL w="6350" cap="flat" cmpd="sng" algn="ctr">
+                      <a:solidFill>
+                        <a:srgbClr val="DEDCD7"/>
+                      </a:solidFill>
+                      <a:prstDash val="solid"/>
+                      <a:round/>
+                      <a:headEnd type="none" w="med" len="med"/>
+                      <a:tailEnd type="none" w="med" len="med"/>
+                    </a:lnL>
+                    <a:lnR w="6350" cap="flat" cmpd="sng" algn="ctr">
+                      <a:solidFill>
+                        <a:srgbClr val="DEDCD7"/>
+                      </a:solidFill>
+                      <a:prstDash val="solid"/>
+                      <a:round/>
+                      <a:headEnd type="none" w="med" len="med"/>
+                      <a:tailEnd type="none" w="med" len="med"/>
+                    </a:lnR>
+                    <a:lnT w="6350" cap="flat" cmpd="sng" algn="ctr">
+                      <a:solidFill>
+                        <a:srgbClr val="DEDCD7"/>
+                      </a:solidFill>
+                      <a:prstDash val="solid"/>
+                      <a:round/>
+                      <a:headEnd type="none" w="med" len="med"/>
+                      <a:tailEnd type="none" w="med" len="med"/>
+                    </a:lnT>
+                    <a:lnB w="6350" cap="flat" cmpd="sng" algn="ctr">
+                      <a:solidFill>
+                        <a:srgbClr val="DEDCD7"/>
+                      </a:solidFill>
+                      <a:prstDash val="solid"/>
+                      <a:round/>
+                      <a:headEnd type="none" w="med" len="med"/>
+                      <a:tailEnd type="none" w="med" len="med"/>
+                    </a:lnB>
+                  </a:tcPr>
+                </a:tc>
+                <a:tc>
+                  <a:txBody>
+                    <a:bodyPr/>
+                    <a:lstStyle/>
+                    <a:p>
+                      <a:pPr algn="ctr" indent="0" marL="0">
+                        <a:buNone/>
+                      </a:pPr>
+                      <a:r>
+                        <a:rPr lang="en-US" sz="1050" dirty="0">
+                          <a:solidFill>
+                            <a:srgbClr val="1A1A1A"/>
+                          </a:solidFill>
+                          <a:latin typeface="Calibri" pitchFamily="34" charset="0"/>
+                          <a:ea typeface="Calibri" pitchFamily="34" charset="-122"/>
+                          <a:cs typeface="Calibri" pitchFamily="34" charset="-120"/>
+                        </a:rPr>
+                        <a:t>30.2%</a:t>
+                      </a:r>
+                      <a:endParaRPr lang="en-US" sz="1050" dirty="0">
+                        <a:latin typeface="Calibri" charset="0"/>
+                        <a:ea typeface="Calibri" charset="0"/>
+                        <a:cs typeface="Calibri" charset="0"/>
+                      </a:endParaRPr>
+                    </a:p>
+                  </a:txBody>
+                  <a:tcPr marL="50800" marR="50800" marT="50800" marB="50800" anchor="t">
+                    <a:lnL w="6350" cap="flat" cmpd="sng" algn="ctr">
+                      <a:solidFill>
+                        <a:srgbClr val="DEDCD7"/>
+                      </a:solidFill>
+                      <a:prstDash val="solid"/>
+                      <a:round/>
+                      <a:headEnd type="none" w="med" len="med"/>
+                      <a:tailEnd type="none" w="med" len="med"/>
+                    </a:lnL>
+                    <a:lnR w="6350" cap="flat" cmpd="sng" algn="ctr">
+                      <a:solidFill>
+                        <a:srgbClr val="DEDCD7"/>
+                      </a:solidFill>
+                      <a:prstDash val="solid"/>
+                      <a:round/>
+                      <a:headEnd type="none" w="med" len="med"/>
+                      <a:tailEnd type="none" w="med" len="med"/>
+                    </a:lnR>
+                    <a:lnT w="6350" cap="flat" cmpd="sng" algn="ctr">
+                      <a:solidFill>
+                        <a:srgbClr val="DEDCD7"/>
+                      </a:solidFill>
+                      <a:prstDash val="solid"/>
+                      <a:round/>
+                      <a:headEnd type="none" w="med" len="med"/>
+                      <a:tailEnd type="none" w="med" len="med"/>
+                    </a:lnT>
+                    <a:lnB w="6350" cap="flat" cmpd="sng" algn="ctr">
+                      <a:solidFill>
+                        <a:srgbClr val="DEDCD7"/>
+                      </a:solidFill>
+                      <a:prstDash val="solid"/>
+                      <a:round/>
+                      <a:headEnd type="none" w="med" len="med"/>
+                      <a:tailEnd type="none" w="med" len="med"/>
+                    </a:lnB>
+                  </a:tcPr>
+                </a:tc>
+                <a:tc>
+                  <a:txBody>
+                    <a:bodyPr/>
+                    <a:lstStyle/>
+                    <a:p>
+                      <a:pPr algn="ctr" indent="0" marL="0">
+                        <a:buNone/>
+                      </a:pPr>
+                      <a:r>
+                        <a:rPr lang="en-US" sz="1050" dirty="0">
+                          <a:solidFill>
+                            <a:srgbClr val="1A1A1A"/>
+                          </a:solidFill>
+                          <a:latin typeface="Calibri" pitchFamily="34" charset="0"/>
+                          <a:ea typeface="Calibri" pitchFamily="34" charset="-122"/>
+                          <a:cs typeface="Calibri" pitchFamily="34" charset="-120"/>
+                        </a:rPr>
+                        <a:t>0.1%</a:t>
+                      </a:r>
+                      <a:endParaRPr lang="en-US" sz="1050" dirty="0">
+                        <a:latin typeface="Calibri" charset="0"/>
+                        <a:ea typeface="Calibri" charset="0"/>
+                        <a:cs typeface="Calibri" charset="0"/>
+                      </a:endParaRPr>
+                    </a:p>
+                  </a:txBody>
+                  <a:tcPr marL="50800" marR="50800" marT="50800" marB="50800" anchor="t">
+                    <a:lnL w="6350" cap="flat" cmpd="sng" algn="ctr">
+                      <a:solidFill>
+                        <a:srgbClr val="DEDCD7"/>
+                      </a:solidFill>
+                      <a:prstDash val="solid"/>
+                      <a:round/>
+                      <a:headEnd type="none" w="med" len="med"/>
+                      <a:tailEnd type="none" w="med" len="med"/>
+                    </a:lnL>
+                    <a:lnR w="6350" cap="flat" cmpd="sng" algn="ctr">
+                      <a:solidFill>
+                        <a:srgbClr val="DEDCD7"/>
+                      </a:solidFill>
+                      <a:prstDash val="solid"/>
+                      <a:round/>
+                      <a:headEnd type="none" w="med" len="med"/>
+                      <a:tailEnd type="none" w="med" len="med"/>
+                    </a:lnR>
+                    <a:lnT w="6350" cap="flat" cmpd="sng" algn="ctr">
+                      <a:solidFill>
+                        <a:srgbClr val="DEDCD7"/>
+                      </a:solidFill>
+                      <a:prstDash val="solid"/>
+                      <a:round/>
+                      <a:headEnd type="none" w="med" len="med"/>
+                      <a:tailEnd type="none" w="med" len="med"/>
+                    </a:lnT>
+                    <a:lnB w="6350" cap="flat" cmpd="sng" algn="ctr">
+                      <a:solidFill>
+                        <a:srgbClr val="DEDCD7"/>
+                      </a:solidFill>
+                      <a:prstDash val="solid"/>
+                      <a:round/>
+                      <a:headEnd type="none" w="med" len="med"/>
+                      <a:tailEnd type="none" w="med" len="med"/>
+                    </a:lnB>
+                  </a:tcPr>
+                </a:tc>
+                <a:tc>
+                  <a:txBody>
+                    <a:bodyPr/>
+                    <a:lstStyle/>
+                    <a:p>
+                      <a:pPr algn="ctr" indent="0" marL="0">
+                        <a:buNone/>
+                      </a:pPr>
+                      <a:r>
+                        <a:rPr lang="en-US" sz="1050" dirty="0">
+                          <a:solidFill>
+                            <a:srgbClr val="1A1A1A"/>
+                          </a:solidFill>
+                          <a:latin typeface="Calibri" pitchFamily="34" charset="0"/>
+                          <a:ea typeface="Calibri" pitchFamily="34" charset="-122"/>
+                          <a:cs typeface="Calibri" pitchFamily="34" charset="-120"/>
+                        </a:rPr>
+                        <a:t>+30.1%</a:t>
+                      </a:r>
+                      <a:endParaRPr lang="en-US" sz="1050" dirty="0">
+                        <a:latin typeface="Calibri" charset="0"/>
+                        <a:ea typeface="Calibri" charset="0"/>
+                        <a:cs typeface="Calibri" charset="0"/>
+                      </a:endParaRPr>
+                    </a:p>
+                  </a:txBody>
+                  <a:tcPr marL="50800" marR="50800" marT="50800" marB="50800" anchor="t">
+                    <a:lnL w="6350" cap="flat" cmpd="sng" algn="ctr">
+                      <a:solidFill>
+                        <a:srgbClr val="DEDCD7"/>
+                      </a:solidFill>
+                      <a:prstDash val="solid"/>
+                      <a:round/>
+                      <a:headEnd type="none" w="med" len="med"/>
+                      <a:tailEnd type="none" w="med" len="med"/>
+                    </a:lnL>
+                    <a:lnR w="6350" cap="flat" cmpd="sng" algn="ctr">
+                      <a:solidFill>
+                        <a:srgbClr val="DEDCD7"/>
+                      </a:solidFill>
+                      <a:prstDash val="solid"/>
+                      <a:round/>
+                      <a:headEnd type="none" w="med" len="med"/>
+                      <a:tailEnd type="none" w="med" len="med"/>
+                    </a:lnR>
+                    <a:lnT w="6350" cap="flat" cmpd="sng" algn="ctr">
+                      <a:solidFill>
+                        <a:srgbClr val="DEDCD7"/>
+                      </a:solidFill>
+                      <a:prstDash val="solid"/>
+                      <a:round/>
+                      <a:headEnd type="none" w="med" len="med"/>
+                      <a:tailEnd type="none" w="med" len="med"/>
+                    </a:lnT>
+                    <a:lnB w="6350" cap="flat" cmpd="sng" algn="ctr">
+                      <a:solidFill>
+                        <a:srgbClr val="DEDCD7"/>
+                      </a:solidFill>
+                      <a:prstDash val="solid"/>
+                      <a:round/>
+                      <a:headEnd type="none" w="med" len="med"/>
+                      <a:tailEnd type="none" w="med" len="med"/>
+                    </a:lnB>
+                  </a:tcPr>
+                </a:tc>
+              </a:tr>
+            </a:tbl>
+          </a:graphicData>
+        </a:graphic>
+      </p:graphicFrame>
+      <p:sp>
+        <p:nvSpPr>
+          <p:cNvPr id="7" name="Shape 4"/>
+          <p:cNvSpPr/>
+          <p:nvPr/>
+        </p:nvSpPr>
+        <p:spPr>
+          <a:xfrm>
+            <a:off x="777240" y="4114800"/>
+            <a:ext cx="5577840" cy="1417320"/>
+          </a:xfrm>
+          <a:prstGeom prst="rect">
+            <a:avLst/>
+          </a:prstGeom>
+          <a:solidFill>
+            <a:srgbClr val="EAF5EE"/>
+          </a:solidFill>
+          <a:ln/>
+        </p:spPr>
+      </p:sp>
+      <p:sp>
+        <p:nvSpPr>
+          <p:cNvPr id="8" name="Text 5"/>
+          <p:cNvSpPr/>
+          <p:nvPr/>
+        </p:nvSpPr>
+        <p:spPr>
+          <a:xfrm>
+            <a:off x="1051560" y="4297680"/>
+            <a:ext cx="5029200" cy="201168"/>
+          </a:xfrm>
+          <a:prstGeom prst="rect">
+            <a:avLst/>
+          </a:prstGeom>
+          <a:noFill/>
+          <a:ln/>
+        </p:spPr>
+        <p:txBody>
+          <a:bodyPr wrap="square" lIns="0" tIns="0" rIns="0" bIns="0" rtlCol="0" anchor="ctr"/>
+          <a:lstStyle/>
+          <a:p>
+            <a:pPr indent="0" marL="0">
+              <a:buNone/>
+            </a:pPr>
+            <a:r>
+              <a:rPr lang="en-US" sz="1050" b="1" spc="80" kern="0" dirty="0">
+                <a:solidFill>
+                  <a:srgbClr val="1B7A4B"/>
+                </a:solidFill>
+                <a:latin typeface="Calibri" pitchFamily="34" charset="0"/>
+                <a:ea typeface="Calibri" pitchFamily="34" charset="-122"/>
+                <a:cs typeface="Calibri" pitchFamily="34" charset="-120"/>
+              </a:rPr>
+              <a:t>The premise holds</a:t>
+            </a:r>
+            <a:endParaRPr lang="en-US" sz="1050" dirty="0"/>
+          </a:p>
+        </p:txBody>
+      </p:sp>
+      <p:sp>
+        <p:nvSpPr>
+          <p:cNvPr id="9" name="Text 6"/>
+          <p:cNvSpPr/>
+          <p:nvPr/>
+        </p:nvSpPr>
+        <p:spPr>
+          <a:xfrm>
+            <a:off x="1051560" y="4553712"/>
+            <a:ext cx="5029200" cy="822960"/>
+          </a:xfrm>
+          <a:prstGeom prst="rect">
+            <a:avLst/>
+          </a:prstGeom>
+          <a:noFill/>
+          <a:ln/>
+        </p:spPr>
+        <p:txBody>
+          <a:bodyPr wrap="square" lIns="0" tIns="0" rIns="0" bIns="0" rtlCol="0" anchor="ctr"/>
+          <a:lstStyle/>
+          <a:p>
+            <a:pPr indent="0" marL="0">
+              <a:lnSpc>
+                <a:spcPts val="1500"/>
+              </a:lnSpc>
+              <a:buNone/>
+            </a:pPr>
+            <a:r>
+              <a:rPr lang="en-US" sz="1100" dirty="0">
+                <a:solidFill>
+                  <a:srgbClr val="1B7A4B"/>
+                </a:solidFill>
+                <a:latin typeface="Calibri" pitchFamily="34" charset="0"/>
+                <a:ea typeface="Calibri" pitchFamily="34" charset="-122"/>
+                <a:cs typeface="Calibri" pitchFamily="34" charset="-120"/>
+              </a:rPr>
+              <a:t>Editing inside the correct region is worth 3.3× — net +30.1% against +9.1% for editing the whole frame. Our tuned mask reaches +14.2%, 1.56× better than the status quo.</a:t>
+            </a:r>
+            <a:endParaRPr lang="en-US" sz="1100" dirty="0"/>
+          </a:p>
+        </p:txBody>
+      </p:sp>
+      <p:sp>
+        <p:nvSpPr>
+          <p:cNvPr id="10" name="Shape 7"/>
+          <p:cNvSpPr/>
+          <p:nvPr/>
+        </p:nvSpPr>
+        <p:spPr>
+          <a:xfrm>
+            <a:off x="6629400" y="4114800"/>
+            <a:ext cx="4785055" cy="1417320"/>
+          </a:xfrm>
+          <a:prstGeom prst="rect">
+            <a:avLst/>
+          </a:prstGeom>
+          <a:solidFill>
+            <a:srgbClr val="F6F5F2"/>
+          </a:solidFill>
+          <a:ln/>
+        </p:spPr>
+      </p:sp>
+      <p:sp>
+        <p:nvSpPr>
+          <p:cNvPr id="11" name="Text 8"/>
+          <p:cNvSpPr/>
+          <p:nvPr/>
+        </p:nvSpPr>
+        <p:spPr>
+          <a:xfrm>
+            <a:off x="6903720" y="4297680"/>
+            <a:ext cx="4114800" cy="201168"/>
+          </a:xfrm>
+          <a:prstGeom prst="rect">
+            <a:avLst/>
+          </a:prstGeom>
+          <a:noFill/>
+          <a:ln/>
+        </p:spPr>
+        <p:txBody>
+          <a:bodyPr wrap="square" lIns="0" tIns="0" rIns="0" bIns="0" rtlCol="0" anchor="ctr"/>
+          <a:lstStyle/>
+          <a:p>
+            <a:pPr indent="0" marL="0">
+              <a:buNone/>
+            </a:pPr>
+            <a:r>
+              <a:rPr lang="en-US" sz="1050" b="1" spc="80" kern="0" dirty="0">
+                <a:solidFill>
+                  <a:srgbClr val="8C3A1E"/>
+                </a:solidFill>
+                <a:latin typeface="Calibri" pitchFamily="34" charset="0"/>
+                <a:ea typeface="Calibri" pitchFamily="34" charset="-122"/>
+                <a:cs typeface="Calibri" pitchFamily="34" charset="-120"/>
+              </a:rPr>
+              <a:t>And the diagnosis is precise</a:t>
+            </a:r>
+            <a:endParaRPr lang="en-US" sz="1050" dirty="0"/>
+          </a:p>
+        </p:txBody>
+      </p:sp>
+      <p:sp>
+        <p:nvSpPr>
+          <p:cNvPr id="12" name="Text 9"/>
+          <p:cNvSpPr/>
+          <p:nvPr/>
+        </p:nvSpPr>
+        <p:spPr>
+          <a:xfrm>
+            <a:off x="6903720" y="4553712"/>
+            <a:ext cx="3931920" cy="822960"/>
+          </a:xfrm>
+          <a:prstGeom prst="rect">
+            <a:avLst/>
+          </a:prstGeom>
+          <a:noFill/>
+          <a:ln/>
+        </p:spPr>
+        <p:txBody>
+          <a:bodyPr wrap="square" lIns="0" tIns="0" rIns="0" bIns="0" rtlCol="0" anchor="ctr"/>
+          <a:lstStyle/>
+          <a:p>
+            <a:pPr indent="0" marL="0">
+              <a:lnSpc>
+                <a:spcPts val="1500"/>
+              </a:lnSpc>
+              <a:buNone/>
+            </a:pPr>
+            <a:r>
+              <a:rPr lang="en-US" sz="1100" dirty="0">
+                <a:solidFill>
+                  <a:srgbClr val="1A1A1A"/>
+                </a:solidFill>
+                <a:latin typeface="Calibri" pitchFamily="34" charset="0"/>
+                <a:ea typeface="Calibri" pitchFamily="34" charset="-122"/>
+                <a:cs typeface="Calibri" pitchFamily="34" charset="-120"/>
+              </a:rPr>
+              <a:t>Our mask is precision-biased — 1.5% collateral but only 7.5% recall, so gating discarded the edit. Dilation trades precision for recall; swept to 200 px, net peaks at 64 px and falls away either side.</a:t>
+            </a:r>
+            <a:endParaRPr lang="en-US" sz="1100" dirty="0"/>
+          </a:p>
+        </p:txBody>
+      </p:sp>
+      <p:sp>
+        <p:nvSpPr>
+          <p:cNvPr id="13" name="Text 10"/>
+          <p:cNvSpPr/>
+          <p:nvPr/>
+        </p:nvSpPr>
+        <p:spPr>
+          <a:xfrm>
+            <a:off x="777240" y="5687568"/>
+            <a:ext cx="10637215" cy="457200"/>
+          </a:xfrm>
+          <a:prstGeom prst="rect">
+            <a:avLst/>
+          </a:prstGeom>
+          <a:noFill/>
+          <a:ln/>
+        </p:spPr>
+        <p:txBody>
+          <a:bodyPr wrap="square" lIns="0" tIns="0" rIns="0" bIns="0" rtlCol="0" anchor="ctr"/>
+          <a:lstStyle/>
+          <a:p>
+            <a:pPr indent="0" marL="0">
+              <a:lnSpc>
+                <a:spcPts val="1400"/>
+              </a:lnSpc>
+              <a:buNone/>
+            </a:pPr>
+            <a:r>
+              <a:rPr lang="en-US" sz="1050" dirty="0">
+                <a:solidFill>
+                  <a:srgbClr val="6E6E6E"/>
+                </a:solidFill>
+                <a:latin typeface="Calibri" pitchFamily="34" charset="0"/>
+                <a:ea typeface="Calibri" pitchFamily="34" charset="-122"/>
+                <a:cs typeface="Calibri" pitchFamily="34" charset="-120"/>
+              </a:rPr>
+              <a:t>Coarse supervision costs at the editing stage too, not only on the mask metric: the MagicBrush mask — measured 9.1× too large — loses 11.6 points of net against the ground-truth region.</a:t>
+            </a:r>
+            <a:endParaRPr lang="en-US" sz="1050" dirty="0"/>
+          </a:p>
+        </p:txBody>
+      </p:sp>
+    </p:spTree>
+  </p:cSld>
+  <p:clrMapOvr>
+    <a:masterClrMapping/>
+  </p:clrMapOvr>
+</p:sld>
+</file>
+
+<file path=ppt/slides/slide11.xml><?xml version="1.0" encoding="utf-8"?>
+<p:sld xmlns:a="http://schemas.openxmlformats.org/drawingml/2006/main" xmlns:r="http://schemas.openxmlformats.org/officeDocument/2006/relationships" xmlns:p="http://schemas.openxmlformats.org/presentationml/2006/main">
+  <p:cSld name="Slide 11">
+    <p:bg>
+      <p:bgPr>
+        <a:solidFill>
+          <a:srgbClr val="FFFFFF"/>
+        </a:solidFill>
+      </p:bgPr>
+    </p:bg>
+    <p:spTree>
+      <p:nvGrpSpPr>
+        <p:cNvPr id="1" name=""/>
+        <p:cNvGrpSpPr/>
+        <p:nvPr/>
+      </p:nvGrpSpPr>
+      <p:grpSpPr>
+        <a:xfrm>
+          <a:off x="0" y="0"/>
+          <a:ext cx="0" cy="0"/>
+          <a:chOff x="0" y="0"/>
+          <a:chExt cx="0" cy="0"/>
+        </a:xfrm>
+      </p:grpSpPr>
+      <p:sp>
+        <p:nvSpPr>
+          <p:cNvPr id="2" name="Text 0"/>
+          <p:cNvSpPr/>
+          <p:nvPr/>
+        </p:nvSpPr>
+        <p:spPr>
+          <a:xfrm>
+            <a:off x="777240" y="347472"/>
+            <a:ext cx="10637215" cy="201168"/>
+          </a:xfrm>
+          <a:prstGeom prst="rect">
+            <a:avLst/>
+          </a:prstGeom>
+          <a:noFill/>
+          <a:ln/>
+        </p:spPr>
+        <p:txBody>
+          <a:bodyPr wrap="square" lIns="0" tIns="0" rIns="0" bIns="0" rtlCol="0" anchor="ctr"/>
+          <a:lstStyle/>
+          <a:p>
+            <a:pPr indent="0" marL="0">
+              <a:buNone/>
+            </a:pPr>
+            <a:r>
+              <a:rPr lang="en-US" sz="1000" b="1" spc="160" kern="0" dirty="0">
+                <a:solidFill>
+                  <a:srgbClr val="8C3A1E"/>
+                </a:solidFill>
+                <a:latin typeface="Calibri" pitchFamily="34" charset="0"/>
+                <a:ea typeface="Calibri" pitchFamily="34" charset="-122"/>
+                <a:cs typeface="Calibri" pitchFamily="34" charset="-120"/>
+              </a:rPr>
+              <a:t>WHAT WE CHECKED ON OURSELVES</a:t>
+            </a:r>
+            <a:endParaRPr lang="en-US" sz="1000" dirty="0"/>
+          </a:p>
+        </p:txBody>
+      </p:sp>
+      <p:sp>
+        <p:nvSpPr>
+          <p:cNvPr id="3" name="Text 1"/>
+          <p:cNvSpPr/>
+          <p:nvPr/>
+        </p:nvSpPr>
+        <p:spPr>
+          <a:xfrm>
+            <a:off x="777240" y="585216"/>
+            <a:ext cx="10637215" cy="493776"/>
+          </a:xfrm>
+          <a:prstGeom prst="rect">
+            <a:avLst/>
+          </a:prstGeom>
+          <a:noFill/>
+          <a:ln/>
+        </p:spPr>
+        <p:txBody>
+          <a:bodyPr wrap="square" lIns="0" tIns="0" rIns="0" bIns="0" rtlCol="0" anchor="ctr"/>
+          <a:lstStyle/>
+          <a:p>
+            <a:pPr indent="0" marL="0">
+              <a:buNone/>
+            </a:pPr>
+            <a:r>
+              <a:rPr lang="en-US" sz="2600" b="1" dirty="0">
+                <a:solidFill>
+                  <a:srgbClr val="1A1A1A"/>
+                </a:solidFill>
+                <a:latin typeface="Cambria" pitchFamily="34" charset="0"/>
+                <a:ea typeface="Cambria" pitchFamily="34" charset="-122"/>
+                <a:cs typeface="Cambria" pitchFamily="34" charset="-120"/>
+              </a:rPr>
+              <a:t>Every number here survived an attempt to break it</a:t>
+            </a:r>
+            <a:endParaRPr lang="en-US" sz="2600" dirty="0"/>
+          </a:p>
+        </p:txBody>
+      </p:sp>
+      <p:sp>
+        <p:nvSpPr>
+          <p:cNvPr id="4" name="Shape 2"/>
+          <p:cNvSpPr/>
+          <p:nvPr/>
+        </p:nvSpPr>
+        <p:spPr>
+          <a:xfrm>
+            <a:off x="777240" y="1188720"/>
+            <a:ext cx="10637215" cy="10973"/>
+          </a:xfrm>
+          <a:prstGeom prst="rect">
+            <a:avLst/>
+          </a:prstGeom>
+          <a:solidFill>
+            <a:srgbClr val="DEDCD7"/>
+          </a:solidFill>
+          <a:ln/>
+        </p:spPr>
+      </p:sp>
+      <p:graphicFrame>
+        <p:nvGraphicFramePr>
+          <p:cNvPr id="12" name="Table 0"/>
+          <p:cNvGraphicFramePr>
+            <a:graphicFrameLocks noGrp="1"/>
+          </p:cNvGraphicFramePr>
+          <p:nvPr>
+            <p:extLst>
+              <p:ext uri="{D42A27DB-BD31-4B8C-83A1-F6EECF244321}">
+                <p14:modId xmlns:p14="http://schemas.microsoft.com/office/powerpoint/2010/main" val="1579011935"/>
+              </p:ext>
+            </p:extLst>
+          </p:nvPr>
+        </p:nvGraphicFramePr>
+        <p:xfrm>
+          <a:off x="777240" y="1298448"/>
+          <a:ext cx="10637215" cy="914400"/>
+        </p:xfrm>
+        <a:graphic>
+          <a:graphicData uri="http://schemas.openxmlformats.org/drawingml/2006/table">
+            <a:tbl>
+              <a:tblPr/>
+              <a:tblGrid>
+                <a:gridCol w="2651760"/>
+                <a:gridCol w="7982712"/>
+              </a:tblGrid>
+              <a:tr h="429768">
+                <a:tc>
+                  <a:txBody>
+                    <a:bodyPr/>
+                    <a:lstStyle/>
+                    <a:p>
+                      <a:pPr indent="0" marL="0">
+                        <a:buNone/>
+                      </a:pPr>
+                      <a:r>
+                        <a:rPr lang="en-US" sz="950" b="1" dirty="0">
+                          <a:solidFill>
+                            <a:srgbClr val="1A1A1A"/>
+                          </a:solidFill>
+                          <a:latin typeface="Calibri" pitchFamily="34" charset="0"/>
+                          <a:ea typeface="Calibri" pitchFamily="34" charset="-122"/>
+                          <a:cs typeface="Calibri" pitchFamily="34" charset="-120"/>
+                        </a:rPr>
+                        <a:t>Check</a:t>
+                      </a:r>
+                      <a:endParaRPr lang="en-US" sz="950" dirty="0">
+                        <a:latin typeface="Calibri" charset="0"/>
+                        <a:ea typeface="Calibri" charset="0"/>
+                        <a:cs typeface="Calibri" charset="0"/>
+                      </a:endParaRPr>
+                    </a:p>
+                  </a:txBody>
+                  <a:tcPr marL="50800" marR="50800" marT="50800" marB="50800" anchor="t">
+                    <a:lnL w="6350" cap="flat" cmpd="sng" algn="ctr">
+                      <a:solidFill>
+                        <a:srgbClr val="DEDCD7"/>
+                      </a:solidFill>
+                      <a:prstDash val="solid"/>
+                      <a:round/>
+                      <a:headEnd type="none" w="med" len="med"/>
+                      <a:tailEnd type="none" w="med" len="med"/>
+                    </a:lnL>
+                    <a:lnR w="6350" cap="flat" cmpd="sng" algn="ctr">
+                      <a:solidFill>
+                        <a:srgbClr val="DEDCD7"/>
+                      </a:solidFill>
+                      <a:prstDash val="solid"/>
+                      <a:round/>
+                      <a:headEnd type="none" w="med" len="med"/>
+                      <a:tailEnd type="none" w="med" len="med"/>
+                    </a:lnR>
+                    <a:lnT w="6350" cap="flat" cmpd="sng" algn="ctr">
+                      <a:solidFill>
+                        <a:srgbClr val="DEDCD7"/>
+                      </a:solidFill>
+                      <a:prstDash val="solid"/>
+                      <a:round/>
+                      <a:headEnd type="none" w="med" len="med"/>
+                      <a:tailEnd type="none" w="med" len="med"/>
+                    </a:lnT>
+                    <a:lnB w="6350" cap="flat" cmpd="sng" algn="ctr">
+                      <a:solidFill>
+                        <a:srgbClr val="DEDCD7"/>
+                      </a:solidFill>
+                      <a:prstDash val="solid"/>
+                      <a:round/>
+                      <a:headEnd type="none" w="med" len="med"/>
+                      <a:tailEnd type="none" w="med" len="med"/>
+                    </a:lnB>
+                    <a:solidFill>
+                      <a:srgbClr val="F6F5F2"/>
+                    </a:solidFill>
+                  </a:tcPr>
+                </a:tc>
+                <a:tc>
+                  <a:txBody>
+                    <a:bodyPr/>
+                    <a:lstStyle/>
+                    <a:p>
+                      <a:pPr indent="0" marL="0">
+                        <a:buNone/>
+                      </a:pPr>
+                      <a:r>
+                        <a:rPr lang="en-US" sz="950" b="1" dirty="0">
+                          <a:solidFill>
+                            <a:srgbClr val="1A1A1A"/>
+                          </a:solidFill>
+                          <a:latin typeface="Calibri" pitchFamily="34" charset="0"/>
+                          <a:ea typeface="Calibri" pitchFamily="34" charset="-122"/>
+                          <a:cs typeface="Calibri" pitchFamily="34" charset="-120"/>
+                        </a:rPr>
+                        <a:t>What it caught</a:t>
+                      </a:r>
+                      <a:endParaRPr lang="en-US" sz="950" dirty="0">
+                        <a:latin typeface="Calibri" charset="0"/>
+                        <a:ea typeface="Calibri" charset="0"/>
+                        <a:cs typeface="Calibri" charset="0"/>
+                      </a:endParaRPr>
+                    </a:p>
+                  </a:txBody>
+                  <a:tcPr marL="50800" marR="50800" marT="50800" marB="50800" anchor="t">
+                    <a:lnL w="6350" cap="flat" cmpd="sng" algn="ctr">
+                      <a:solidFill>
+                        <a:srgbClr val="DEDCD7"/>
+                      </a:solidFill>
+                      <a:prstDash val="solid"/>
+                      <a:round/>
+                      <a:headEnd type="none" w="med" len="med"/>
+                      <a:tailEnd type="none" w="med" len="med"/>
+                    </a:lnL>
+                    <a:lnR w="6350" cap="flat" cmpd="sng" algn="ctr">
+                      <a:solidFill>
+                        <a:srgbClr val="DEDCD7"/>
+                      </a:solidFill>
+                      <a:prstDash val="solid"/>
+                      <a:round/>
+                      <a:headEnd type="none" w="med" len="med"/>
+                      <a:tailEnd type="none" w="med" len="med"/>
+                    </a:lnR>
+                    <a:lnT w="6350" cap="flat" cmpd="sng" algn="ctr">
+                      <a:solidFill>
+                        <a:srgbClr val="DEDCD7"/>
+                      </a:solidFill>
+                      <a:prstDash val="solid"/>
+                      <a:round/>
+                      <a:headEnd type="none" w="med" len="med"/>
+                      <a:tailEnd type="none" w="med" len="med"/>
+                    </a:lnT>
+                    <a:lnB w="6350" cap="flat" cmpd="sng" algn="ctr">
+                      <a:solidFill>
+                        <a:srgbClr val="DEDCD7"/>
+                      </a:solidFill>
+                      <a:prstDash val="solid"/>
+                      <a:round/>
+                      <a:headEnd type="none" w="med" len="med"/>
+                      <a:tailEnd type="none" w="med" len="med"/>
+                    </a:lnB>
+                    <a:solidFill>
+                      <a:srgbClr val="F6F5F2"/>
+                    </a:solidFill>
+                  </a:tcPr>
+                </a:tc>
+              </a:tr>
+              <a:tr h="429768">
+                <a:tc>
+                  <a:txBody>
+                    <a:bodyPr/>
+                    <a:lstStyle/>
+                    <a:p>
+                      <a:pPr indent="0" marL="0">
+                        <a:buNone/>
+                      </a:pPr>
+                      <a:r>
+                        <a:rPr lang="en-US" sz="950" dirty="0">
+                          <a:solidFill>
+                            <a:srgbClr val="1A1A1A"/>
+                          </a:solidFill>
+                          <a:latin typeface="Calibri" pitchFamily="34" charset="0"/>
+                          <a:ea typeface="Calibri" pitchFamily="34" charset="-122"/>
+                          <a:cs typeface="Calibri" pitchFamily="34" charset="-120"/>
+                        </a:rPr>
+                        <a:t>Contamination audit</a:t>
+                      </a:r>
+                      <a:endParaRPr lang="en-US" sz="950" dirty="0">
+                        <a:latin typeface="Calibri" charset="0"/>
+                        <a:ea typeface="Calibri" charset="0"/>
+                        <a:cs typeface="Calibri" charset="0"/>
+                      </a:endParaRPr>
+                    </a:p>
+                  </a:txBody>
+                  <a:tcPr marL="50800" marR="50800" marT="50800" marB="50800" anchor="t">
+                    <a:lnL w="6350" cap="flat" cmpd="sng" algn="ctr">
+                      <a:solidFill>
+                        <a:srgbClr val="DEDCD7"/>
+                      </a:solidFill>
+                      <a:prstDash val="solid"/>
+                      <a:round/>
+                      <a:headEnd type="none" w="med" len="med"/>
+                      <a:tailEnd type="none" w="med" len="med"/>
+                    </a:lnL>
+                    <a:lnR w="6350" cap="flat" cmpd="sng" algn="ctr">
+                      <a:solidFill>
+                        <a:srgbClr val="DEDCD7"/>
+                      </a:solidFill>
+                      <a:prstDash val="solid"/>
+                      <a:round/>
+                      <a:headEnd type="none" w="med" len="med"/>
+                      <a:tailEnd type="none" w="med" len="med"/>
+                    </a:lnR>
+                    <a:lnT w="6350" cap="flat" cmpd="sng" algn="ctr">
+                      <a:solidFill>
+                        <a:srgbClr val="DEDCD7"/>
+                      </a:solidFill>
+                      <a:prstDash val="solid"/>
+                      <a:round/>
+                      <a:headEnd type="none" w="med" len="med"/>
+                      <a:tailEnd type="none" w="med" len="med"/>
+                    </a:lnT>
+                    <a:lnB w="6350" cap="flat" cmpd="sng" algn="ctr">
+                      <a:solidFill>
+                        <a:srgbClr val="DEDCD7"/>
+                      </a:solidFill>
+                      <a:prstDash val="solid"/>
+                      <a:round/>
+                      <a:headEnd type="none" w="med" len="med"/>
+                      <a:tailEnd type="none" w="med" len="med"/>
+                    </a:lnB>
+                  </a:tcPr>
+                </a:tc>
+                <a:tc>
+                  <a:txBody>
+                    <a:bodyPr/>
+                    <a:lstStyle/>
+                    <a:p>
+                      <a:pPr indent="0" marL="0">
+                        <a:buNone/>
+                      </a:pPr>
+                      <a:r>
+                        <a:rPr lang="en-US" sz="950" dirty="0">
+                          <a:solidFill>
+                            <a:srgbClr val="1A1A1A"/>
+                          </a:solidFill>
+                          <a:latin typeface="Calibri" pitchFamily="34" charset="0"/>
+                          <a:ea typeface="Calibri" pitchFamily="34" charset="-122"/>
+                          <a:cs typeface="Calibri" pitchFamily="34" charset="-120"/>
+                        </a:rPr>
+                        <a:t>an early headline trained on the evaluation split; retracted in the repository and re-run on disjoint shards</a:t>
+                      </a:r>
+                      <a:endParaRPr lang="en-US" sz="950" dirty="0">
+                        <a:latin typeface="Calibri" charset="0"/>
+                        <a:ea typeface="Calibri" charset="0"/>
+                        <a:cs typeface="Calibri" charset="0"/>
+                      </a:endParaRPr>
+                    </a:p>
+                  </a:txBody>
+                  <a:tcPr marL="50800" marR="50800" marT="50800" marB="50800" anchor="t">
+                    <a:lnL w="6350" cap="flat" cmpd="sng" algn="ctr">
+                      <a:solidFill>
+                        <a:srgbClr val="DEDCD7"/>
+                      </a:solidFill>
+                      <a:prstDash val="solid"/>
+                      <a:round/>
+                      <a:headEnd type="none" w="med" len="med"/>
+                      <a:tailEnd type="none" w="med" len="med"/>
+                    </a:lnL>
+                    <a:lnR w="6350" cap="flat" cmpd="sng" algn="ctr">
+                      <a:solidFill>
+                        <a:srgbClr val="DEDCD7"/>
+                      </a:solidFill>
+                      <a:prstDash val="solid"/>
+                      <a:round/>
+                      <a:headEnd type="none" w="med" len="med"/>
+                      <a:tailEnd type="none" w="med" len="med"/>
+                    </a:lnR>
+                    <a:lnT w="6350" cap="flat" cmpd="sng" algn="ctr">
+                      <a:solidFill>
+                        <a:srgbClr val="DEDCD7"/>
+                      </a:solidFill>
+                      <a:prstDash val="solid"/>
+                      <a:round/>
+                      <a:headEnd type="none" w="med" len="med"/>
+                      <a:tailEnd type="none" w="med" len="med"/>
+                    </a:lnT>
+                    <a:lnB w="6350" cap="flat" cmpd="sng" algn="ctr">
+                      <a:solidFill>
+                        <a:srgbClr val="DEDCD7"/>
+                      </a:solidFill>
+                      <a:prstDash val="solid"/>
+                      <a:round/>
+                      <a:headEnd type="none" w="med" len="med"/>
+                      <a:tailEnd type="none" w="med" len="med"/>
+                    </a:lnB>
+                  </a:tcPr>
+                </a:tc>
+              </a:tr>
+              <a:tr h="429768">
+                <a:tc>
+                  <a:txBody>
+                    <a:bodyPr/>
+                    <a:lstStyle/>
+                    <a:p>
+                      <a:pPr indent="0" marL="0">
+                        <a:buNone/>
+                      </a:pPr>
+                      <a:r>
+                        <a:rPr lang="en-US" sz="950" dirty="0">
+                          <a:solidFill>
+                            <a:srgbClr val="1A1A1A"/>
+                          </a:solidFill>
+                          <a:latin typeface="Calibri" pitchFamily="34" charset="0"/>
+                          <a:ea typeface="Calibri" pitchFamily="34" charset="-122"/>
+                          <a:cs typeface="Calibri" pitchFamily="34" charset="-120"/>
+                        </a:rPr>
+                        <a:t>Selection-bias audit</a:t>
+                      </a:r>
+                      <a:endParaRPr lang="en-US" sz="950" dirty="0">
+                        <a:latin typeface="Calibri" charset="0"/>
+                        <a:ea typeface="Calibri" charset="0"/>
+                        <a:cs typeface="Calibri" charset="0"/>
+                      </a:endParaRPr>
+                    </a:p>
+                  </a:txBody>
+                  <a:tcPr marL="50800" marR="50800" marT="50800" marB="50800" anchor="t">
+                    <a:lnL w="6350" cap="flat" cmpd="sng" algn="ctr">
+                      <a:solidFill>
+                        <a:srgbClr val="DEDCD7"/>
+                      </a:solidFill>
+                      <a:prstDash val="solid"/>
+                      <a:round/>
+                      <a:headEnd type="none" w="med" len="med"/>
+                      <a:tailEnd type="none" w="med" len="med"/>
+                    </a:lnL>
+                    <a:lnR w="6350" cap="flat" cmpd="sng" algn="ctr">
+                      <a:solidFill>
+                        <a:srgbClr val="DEDCD7"/>
+                      </a:solidFill>
+                      <a:prstDash val="solid"/>
+                      <a:round/>
+                      <a:headEnd type="none" w="med" len="med"/>
+                      <a:tailEnd type="none" w="med" len="med"/>
+                    </a:lnR>
+                    <a:lnT w="6350" cap="flat" cmpd="sng" algn="ctr">
+                      <a:solidFill>
+                        <a:srgbClr val="DEDCD7"/>
+                      </a:solidFill>
+                      <a:prstDash val="solid"/>
+                      <a:round/>
+                      <a:headEnd type="none" w="med" len="med"/>
+                      <a:tailEnd type="none" w="med" len="med"/>
+                    </a:lnT>
+                    <a:lnB w="6350" cap="flat" cmpd="sng" algn="ctr">
+                      <a:solidFill>
+                        <a:srgbClr val="DEDCD7"/>
+                      </a:solidFill>
+                      <a:prstDash val="solid"/>
+                      <a:round/>
+                      <a:headEnd type="none" w="med" len="med"/>
+                      <a:tailEnd type="none" w="med" len="med"/>
+                    </a:lnB>
+                  </a:tcPr>
+                </a:tc>
+                <a:tc>
+                  <a:txBody>
+                    <a:bodyPr/>
+                    <a:lstStyle/>
+                    <a:p>
+                      <a:pPr indent="0" marL="0">
+                        <a:buNone/>
+                      </a:pPr>
+                      <a:r>
+                        <a:rPr lang="en-US" sz="950" dirty="0">
+                          <a:solidFill>
+                            <a:srgbClr val="1A1A1A"/>
+                          </a:solidFill>
+                          <a:latin typeface="Calibri" pitchFamily="34" charset="0"/>
+                          <a:ea typeface="Calibri" pitchFamily="34" charset="-122"/>
+                          <a:cs typeface="Calibri" pitchFamily="34" charset="-120"/>
+                        </a:rPr>
+                        <a:t>choosing the best epoch by dev IoU had inverted the v1/v2 conclusion; selection moved to a held-out slice of train</a:t>
+                      </a:r>
+                      <a:endParaRPr lang="en-US" sz="950" dirty="0">
+                        <a:latin typeface="Calibri" charset="0"/>
+                        <a:ea typeface="Calibri" charset="0"/>
+                        <a:cs typeface="Calibri" charset="0"/>
+                      </a:endParaRPr>
+                    </a:p>
+                  </a:txBody>
+                  <a:tcPr marL="50800" marR="50800" marT="50800" marB="50800" anchor="t">
+                    <a:lnL w="6350" cap="flat" cmpd="sng" algn="ctr">
+                      <a:solidFill>
+                        <a:srgbClr val="DEDCD7"/>
+                      </a:solidFill>
+                      <a:prstDash val="solid"/>
+                      <a:round/>
+                      <a:headEnd type="none" w="med" len="med"/>
+                      <a:tailEnd type="none" w="med" len="med"/>
+                    </a:lnL>
+                    <a:lnR w="6350" cap="flat" cmpd="sng" algn="ctr">
+                      <a:solidFill>
+                        <a:srgbClr val="DEDCD7"/>
+                      </a:solidFill>
+                      <a:prstDash val="solid"/>
+                      <a:round/>
+                      <a:headEnd type="none" w="med" len="med"/>
+                      <a:tailEnd type="none" w="med" len="med"/>
+                    </a:lnR>
+                    <a:lnT w="6350" cap="flat" cmpd="sng" algn="ctr">
+                      <a:solidFill>
+                        <a:srgbClr val="DEDCD7"/>
+                      </a:solidFill>
+                      <a:prstDash val="solid"/>
+                      <a:round/>
+                      <a:headEnd type="none" w="med" len="med"/>
+                      <a:tailEnd type="none" w="med" len="med"/>
+                    </a:lnT>
+                    <a:lnB w="6350" cap="flat" cmpd="sng" algn="ctr">
+                      <a:solidFill>
+                        <a:srgbClr val="DEDCD7"/>
+                      </a:solidFill>
+                      <a:prstDash val="solid"/>
+                      <a:round/>
+                      <a:headEnd type="none" w="med" len="med"/>
+                      <a:tailEnd type="none" w="med" len="med"/>
+                    </a:lnB>
+                  </a:tcPr>
+                </a:tc>
+              </a:tr>
+              <a:tr h="429768">
+                <a:tc>
+                  <a:txBody>
+                    <a:bodyPr/>
+                    <a:lstStyle/>
+                    <a:p>
+                      <a:pPr indent="0" marL="0">
+                        <a:buNone/>
+                      </a:pPr>
+                      <a:r>
+                        <a:rPr lang="en-US" sz="950" dirty="0">
+                          <a:solidFill>
+                            <a:srgbClr val="1A1A1A"/>
+                          </a:solidFill>
+                          <a:latin typeface="Calibri" pitchFamily="34" charset="0"/>
+                          <a:ea typeface="Calibri" pitchFamily="34" charset="-122"/>
+                          <a:cs typeface="Calibri" pitchFamily="34" charset="-120"/>
+                        </a:rPr>
+                        <a:t>Random-basis controls</a:t>
+                      </a:r>
+                      <a:endParaRPr lang="en-US" sz="950" dirty="0">
+                        <a:latin typeface="Calibri" charset="0"/>
+                        <a:ea typeface="Calibri" charset="0"/>
+                        <a:cs typeface="Calibri" charset="0"/>
+                      </a:endParaRPr>
+                    </a:p>
+                  </a:txBody>
+                  <a:tcPr marL="50800" marR="50800" marT="50800" marB="50800" anchor="t">
+                    <a:lnL w="6350" cap="flat" cmpd="sng" algn="ctr">
+                      <a:solidFill>
+                        <a:srgbClr val="DEDCD7"/>
+                      </a:solidFill>
+                      <a:prstDash val="solid"/>
+                      <a:round/>
+                      <a:headEnd type="none" w="med" len="med"/>
+                      <a:tailEnd type="none" w="med" len="med"/>
+                    </a:lnL>
+                    <a:lnR w="6350" cap="flat" cmpd="sng" algn="ctr">
+                      <a:solidFill>
+                        <a:srgbClr val="DEDCD7"/>
+                      </a:solidFill>
+                      <a:prstDash val="solid"/>
+                      <a:round/>
+                      <a:headEnd type="none" w="med" len="med"/>
+                      <a:tailEnd type="none" w="med" len="med"/>
+                    </a:lnR>
+                    <a:lnT w="6350" cap="flat" cmpd="sng" algn="ctr">
+                      <a:solidFill>
+                        <a:srgbClr val="DEDCD7"/>
+                      </a:solidFill>
+                      <a:prstDash val="solid"/>
+                      <a:round/>
+                      <a:headEnd type="none" w="med" len="med"/>
+                      <a:tailEnd type="none" w="med" len="med"/>
+                    </a:lnT>
+                    <a:lnB w="6350" cap="flat" cmpd="sng" algn="ctr">
+                      <a:solidFill>
+                        <a:srgbClr val="DEDCD7"/>
+                      </a:solidFill>
+                      <a:prstDash val="solid"/>
+                      <a:round/>
+                      <a:headEnd type="none" w="med" len="med"/>
+                      <a:tailEnd type="none" w="med" len="med"/>
+                    </a:lnB>
+                  </a:tcPr>
+                </a:tc>
+                <a:tc>
+                  <a:txBody>
+                    <a:bodyPr/>
+                    <a:lstStyle/>
+                    <a:p>
+                      <a:pPr indent="0" marL="0">
+                        <a:buNone/>
+                      </a:pPr>
+                      <a:r>
+                        <a:rPr lang="en-US" sz="950" dirty="0">
+                          <a:solidFill>
+                            <a:srgbClr val="1A1A1A"/>
+                          </a:solidFill>
+                          <a:latin typeface="Calibri" pitchFamily="34" charset="0"/>
+                          <a:ea typeface="Calibri" pitchFamily="34" charset="-122"/>
+                          <a:cs typeface="Calibri" pitchFamily="34" charset="-120"/>
+                        </a:rPr>
+                        <a:t>two proposed improvements — free-space and geometric bases — failed against noise and were dropped</a:t>
+                      </a:r>
+                      <a:endParaRPr lang="en-US" sz="950" dirty="0">
+                        <a:latin typeface="Calibri" charset="0"/>
+                        <a:ea typeface="Calibri" charset="0"/>
+                        <a:cs typeface="Calibri" charset="0"/>
+                      </a:endParaRPr>
+                    </a:p>
+                  </a:txBody>
+                  <a:tcPr marL="50800" marR="50800" marT="50800" marB="50800" anchor="t">
+                    <a:lnL w="6350" cap="flat" cmpd="sng" algn="ctr">
+                      <a:solidFill>
+                        <a:srgbClr val="DEDCD7"/>
+                      </a:solidFill>
+                      <a:prstDash val="solid"/>
+                      <a:round/>
+                      <a:headEnd type="none" w="med" len="med"/>
+                      <a:tailEnd type="none" w="med" len="med"/>
+                    </a:lnL>
+                    <a:lnR w="6350" cap="flat" cmpd="sng" algn="ctr">
+                      <a:solidFill>
+                        <a:srgbClr val="DEDCD7"/>
+                      </a:solidFill>
+                      <a:prstDash val="solid"/>
+                      <a:round/>
+                      <a:headEnd type="none" w="med" len="med"/>
+                      <a:tailEnd type="none" w="med" len="med"/>
+                    </a:lnR>
+                    <a:lnT w="6350" cap="flat" cmpd="sng" algn="ctr">
+                      <a:solidFill>
+                        <a:srgbClr val="DEDCD7"/>
+                      </a:solidFill>
+                      <a:prstDash val="solid"/>
+                      <a:round/>
+                      <a:headEnd type="none" w="med" len="med"/>
+                      <a:tailEnd type="none" w="med" len="med"/>
+                    </a:lnT>
+                    <a:lnB w="6350" cap="flat" cmpd="sng" algn="ctr">
+                      <a:solidFill>
+                        <a:srgbClr val="DEDCD7"/>
+                      </a:solidFill>
+                      <a:prstDash val="solid"/>
+                      <a:round/>
+                      <a:headEnd type="none" w="med" len="med"/>
+                      <a:tailEnd type="none" w="med" len="med"/>
+                    </a:lnB>
+                  </a:tcPr>
+                </a:tc>
+              </a:tr>
+              <a:tr h="429768">
+                <a:tc>
+                  <a:txBody>
+                    <a:bodyPr/>
+                    <a:lstStyle/>
+                    <a:p>
+                      <a:pPr indent="0" marL="0">
+                        <a:buNone/>
+                      </a:pPr>
+                      <a:r>
+                        <a:rPr lang="en-US" sz="950" dirty="0">
+                          <a:solidFill>
+                            <a:srgbClr val="1A1A1A"/>
+                          </a:solidFill>
+                          <a:latin typeface="Calibri" pitchFamily="34" charset="0"/>
+                          <a:ea typeface="Calibri" pitchFamily="34" charset="-122"/>
+                          <a:cs typeface="Calibri" pitchFamily="34" charset="-120"/>
+                        </a:rPr>
+                        <a:t>Latency fairness</a:t>
+                      </a:r>
+                      <a:endParaRPr lang="en-US" sz="950" dirty="0">
+                        <a:latin typeface="Calibri" charset="0"/>
+                        <a:ea typeface="Calibri" charset="0"/>
+                        <a:cs typeface="Calibri" charset="0"/>
+                      </a:endParaRPr>
+                    </a:p>
+                  </a:txBody>
+                  <a:tcPr marL="50800" marR="50800" marT="50800" marB="50800" anchor="t">
+                    <a:lnL w="6350" cap="flat" cmpd="sng" algn="ctr">
+                      <a:solidFill>
+                        <a:srgbClr val="DEDCD7"/>
+                      </a:solidFill>
+                      <a:prstDash val="solid"/>
+                      <a:round/>
+                      <a:headEnd type="none" w="med" len="med"/>
+                      <a:tailEnd type="none" w="med" len="med"/>
+                    </a:lnL>
+                    <a:lnR w="6350" cap="flat" cmpd="sng" algn="ctr">
+                      <a:solidFill>
+                        <a:srgbClr val="DEDCD7"/>
+                      </a:solidFill>
+                      <a:prstDash val="solid"/>
+                      <a:round/>
+                      <a:headEnd type="none" w="med" len="med"/>
+                      <a:tailEnd type="none" w="med" len="med"/>
+                    </a:lnR>
+                    <a:lnT w="6350" cap="flat" cmpd="sng" algn="ctr">
+                      <a:solidFill>
+                        <a:srgbClr val="DEDCD7"/>
+                      </a:solidFill>
+                      <a:prstDash val="solid"/>
+                      <a:round/>
+                      <a:headEnd type="none" w="med" len="med"/>
+                      <a:tailEnd type="none" w="med" len="med"/>
+                    </a:lnT>
+                    <a:lnB w="6350" cap="flat" cmpd="sng" algn="ctr">
+                      <a:solidFill>
+                        <a:srgbClr val="DEDCD7"/>
+                      </a:solidFill>
+                      <a:prstDash val="solid"/>
+                      <a:round/>
+                      <a:headEnd type="none" w="med" len="med"/>
+                      <a:tailEnd type="none" w="med" len="med"/>
+                    </a:lnB>
+                  </a:tcPr>
+                </a:tc>
+                <a:tc>
+                  <a:txBody>
+                    <a:bodyPr/>
+                    <a:lstStyle/>
+                    <a:p>
+                      <a:pPr indent="0" marL="0">
+                        <a:buNone/>
+                      </a:pPr>
+                      <a:r>
+                        <a:rPr lang="en-US" sz="950" dirty="0">
+                          <a:solidFill>
+                            <a:srgbClr val="1A1A1A"/>
+                          </a:solidFill>
+                          <a:latin typeface="Calibri" pitchFamily="34" charset="0"/>
+                          <a:ea typeface="Calibri" pitchFamily="34" charset="-122"/>
+                          <a:cs typeface="Calibri" pitchFamily="34" charset="-120"/>
+                        </a:rPr>
+                        <a:t>measured at 640 px against CLIPSeg’s 352 px, and only for v1 — re-measured matched and for the reported head: v2 is 10.3×</a:t>
+                      </a:r>
+                      <a:endParaRPr lang="en-US" sz="950" dirty="0">
+                        <a:latin typeface="Calibri" charset="0"/>
+                        <a:ea typeface="Calibri" charset="0"/>
+                        <a:cs typeface="Calibri" charset="0"/>
+                      </a:endParaRPr>
+                    </a:p>
+                  </a:txBody>
+                  <a:tcPr marL="50800" marR="50800" marT="50800" marB="50800" anchor="t">
+                    <a:lnL w="6350" cap="flat" cmpd="sng" algn="ctr">
+                      <a:solidFill>
+                        <a:srgbClr val="DEDCD7"/>
+                      </a:solidFill>
+                      <a:prstDash val="solid"/>
+                      <a:round/>
+                      <a:headEnd type="none" w="med" len="med"/>
+                      <a:tailEnd type="none" w="med" len="med"/>
+                    </a:lnL>
+                    <a:lnR w="6350" cap="flat" cmpd="sng" algn="ctr">
+                      <a:solidFill>
+                        <a:srgbClr val="DEDCD7"/>
+                      </a:solidFill>
+                      <a:prstDash val="solid"/>
+                      <a:round/>
+                      <a:headEnd type="none" w="med" len="med"/>
+                      <a:tailEnd type="none" w="med" len="med"/>
+                    </a:lnR>
+                    <a:lnT w="6350" cap="flat" cmpd="sng" algn="ctr">
+                      <a:solidFill>
+                        <a:srgbClr val="DEDCD7"/>
+                      </a:solidFill>
+                      <a:prstDash val="solid"/>
+                      <a:round/>
+                      <a:headEnd type="none" w="med" len="med"/>
+                      <a:tailEnd type="none" w="med" len="med"/>
+                    </a:lnT>
+                    <a:lnB w="6350" cap="flat" cmpd="sng" algn="ctr">
+                      <a:solidFill>
+                        <a:srgbClr val="DEDCD7"/>
+                      </a:solidFill>
+                      <a:prstDash val="solid"/>
+                      <a:round/>
+                      <a:headEnd type="none" w="med" len="med"/>
+                      <a:tailEnd type="none" w="med" len="med"/>
+                    </a:lnB>
+                  </a:tcPr>
+                </a:tc>
+              </a:tr>
+              <a:tr h="429768">
+                <a:tc>
+                  <a:txBody>
+                    <a:bodyPr/>
+                    <a:lstStyle/>
+                    <a:p>
+                      <a:pPr indent="0" marL="0">
+                        <a:buNone/>
+                      </a:pPr>
+                      <a:r>
+                        <a:rPr lang="en-US" sz="950" dirty="0">
+                          <a:solidFill>
+                            <a:srgbClr val="1A1A1A"/>
+                          </a:solidFill>
+                          <a:latin typeface="Calibri" pitchFamily="34" charset="0"/>
+                          <a:ea typeface="Calibri" pitchFamily="34" charset="-122"/>
+                          <a:cs typeface="Calibri" pitchFamily="34" charset="-120"/>
+                        </a:rPr>
+                        <a:t>Ceiling consistency</a:t>
+                      </a:r>
+                      <a:endParaRPr lang="en-US" sz="950" dirty="0">
+                        <a:latin typeface="Calibri" charset="0"/>
+                        <a:ea typeface="Calibri" charset="0"/>
+                        <a:cs typeface="Calibri" charset="0"/>
+                      </a:endParaRPr>
+                    </a:p>
+                  </a:txBody>
+                  <a:tcPr marL="50800" marR="50800" marT="50800" marB="50800" anchor="t">
+                    <a:lnL w="6350" cap="flat" cmpd="sng" algn="ctr">
+                      <a:solidFill>
+                        <a:srgbClr val="DEDCD7"/>
+                      </a:solidFill>
+                      <a:prstDash val="solid"/>
+                      <a:round/>
+                      <a:headEnd type="none" w="med" len="med"/>
+                      <a:tailEnd type="none" w="med" len="med"/>
+                    </a:lnL>
+                    <a:lnR w="6350" cap="flat" cmpd="sng" algn="ctr">
+                      <a:solidFill>
+                        <a:srgbClr val="DEDCD7"/>
+                      </a:solidFill>
+                      <a:prstDash val="solid"/>
+                      <a:round/>
+                      <a:headEnd type="none" w="med" len="med"/>
+                      <a:tailEnd type="none" w="med" len="med"/>
+                    </a:lnR>
+                    <a:lnT w="6350" cap="flat" cmpd="sng" algn="ctr">
+                      <a:solidFill>
+                        <a:srgbClr val="DEDCD7"/>
+                      </a:solidFill>
+                      <a:prstDash val="solid"/>
+                      <a:round/>
+                      <a:headEnd type="none" w="med" len="med"/>
+                      <a:tailEnd type="none" w="med" len="med"/>
+                    </a:lnT>
+                    <a:lnB w="6350" cap="flat" cmpd="sng" algn="ctr">
+                      <a:solidFill>
+                        <a:srgbClr val="DEDCD7"/>
+                      </a:solidFill>
+                      <a:prstDash val="solid"/>
+                      <a:round/>
+                      <a:headEnd type="none" w="med" len="med"/>
+                      <a:tailEnd type="none" w="med" len="med"/>
+                    </a:lnB>
+                  </a:tcPr>
+                </a:tc>
+                <a:tc>
+                  <a:txBody>
+                    <a:bodyPr/>
+                    <a:lstStyle/>
+                    <a:p>
+                      <a:pPr indent="0" marL="0">
+                        <a:buNone/>
+                      </a:pPr>
+                      <a:r>
+                        <a:rPr lang="en-US" sz="950" dirty="0">
+                          <a:solidFill>
+                            <a:srgbClr val="1A1A1A"/>
+                          </a:solidFill>
+                          <a:latin typeface="Calibri" pitchFamily="34" charset="0"/>
+                          <a:ea typeface="Calibri" pitchFamily="34" charset="-122"/>
+                          <a:cs typeface="Calibri" pitchFamily="34" charset="-120"/>
+                        </a:rPr>
+                        <a:t>the headroom figure compared a train-set bound to a dev score; recomputed on dev</a:t>
+                      </a:r>
+                      <a:endParaRPr lang="en-US" sz="950" dirty="0">
+                        <a:latin typeface="Calibri" charset="0"/>
+                        <a:ea typeface="Calibri" charset="0"/>
+                        <a:cs typeface="Calibri" charset="0"/>
+                      </a:endParaRPr>
+                    </a:p>
+                  </a:txBody>
+                  <a:tcPr marL="50800" marR="50800" marT="50800" marB="50800" anchor="t">
+                    <a:lnL w="6350" cap="flat" cmpd="sng" algn="ctr">
+                      <a:solidFill>
+                        <a:srgbClr val="DEDCD7"/>
+                      </a:solidFill>
+                      <a:prstDash val="solid"/>
+                      <a:round/>
+                      <a:headEnd type="none" w="med" len="med"/>
+                      <a:tailEnd type="none" w="med" len="med"/>
+                    </a:lnL>
+                    <a:lnR w="6350" cap="flat" cmpd="sng" algn="ctr">
+                      <a:solidFill>
+                        <a:srgbClr val="DEDCD7"/>
+                      </a:solidFill>
+                      <a:prstDash val="solid"/>
+                      <a:round/>
+                      <a:headEnd type="none" w="med" len="med"/>
+                      <a:tailEnd type="none" w="med" len="med"/>
+                    </a:lnR>
+                    <a:lnT w="6350" cap="flat" cmpd="sng" algn="ctr">
+                      <a:solidFill>
+                        <a:srgbClr val="DEDCD7"/>
+                      </a:solidFill>
+                      <a:prstDash val="solid"/>
+                      <a:round/>
+                      <a:headEnd type="none" w="med" len="med"/>
+                      <a:tailEnd type="none" w="med" len="med"/>
+                    </a:lnT>
+                    <a:lnB w="6350" cap="flat" cmpd="sng" algn="ctr">
+                      <a:solidFill>
+                        <a:srgbClr val="DEDCD7"/>
+                      </a:solidFill>
+                      <a:prstDash val="solid"/>
+                      <a:round/>
+                      <a:headEnd type="none" w="med" len="med"/>
+                      <a:tailEnd type="none" w="med" len="med"/>
+                    </a:lnB>
+                  </a:tcPr>
+                </a:tc>
+              </a:tr>
+              <a:tr h="429768">
+                <a:tc>
+                  <a:txBody>
+                    <a:bodyPr/>
+                    <a:lstStyle/>
+                    <a:p>
+                      <a:pPr indent="0" marL="0">
+                        <a:buNone/>
+                      </a:pPr>
+                      <a:r>
+                        <a:rPr lang="en-US" sz="950" dirty="0">
+                          <a:solidFill>
+                            <a:srgbClr val="1A1A1A"/>
+                          </a:solidFill>
+                          <a:latin typeface="Calibri" pitchFamily="34" charset="0"/>
+                          <a:ea typeface="Calibri" pitchFamily="34" charset="-122"/>
+                          <a:cs typeface="Calibri" pitchFamily="34" charset="-120"/>
+                        </a:rPr>
+                        <a:t>Leakage audit</a:t>
+                      </a:r>
+                      <a:endParaRPr lang="en-US" sz="950" dirty="0">
+                        <a:latin typeface="Calibri" charset="0"/>
+                        <a:ea typeface="Calibri" charset="0"/>
+                        <a:cs typeface="Calibri" charset="0"/>
+                      </a:endParaRPr>
+                    </a:p>
+                  </a:txBody>
+                  <a:tcPr marL="50800" marR="50800" marT="50800" marB="50800" anchor="t">
+                    <a:lnL w="6350" cap="flat" cmpd="sng" algn="ctr">
+                      <a:solidFill>
+                        <a:srgbClr val="DEDCD7"/>
+                      </a:solidFill>
+                      <a:prstDash val="solid"/>
+                      <a:round/>
+                      <a:headEnd type="none" w="med" len="med"/>
+                      <a:tailEnd type="none" w="med" len="med"/>
+                    </a:lnL>
+                    <a:lnR w="6350" cap="flat" cmpd="sng" algn="ctr">
+                      <a:solidFill>
+                        <a:srgbClr val="DEDCD7"/>
+                      </a:solidFill>
+                      <a:prstDash val="solid"/>
+                      <a:round/>
+                      <a:headEnd type="none" w="med" len="med"/>
+                      <a:tailEnd type="none" w="med" len="med"/>
+                    </a:lnR>
+                    <a:lnT w="6350" cap="flat" cmpd="sng" algn="ctr">
+                      <a:solidFill>
+                        <a:srgbClr val="DEDCD7"/>
+                      </a:solidFill>
+                      <a:prstDash val="solid"/>
+                      <a:round/>
+                      <a:headEnd type="none" w="med" len="med"/>
+                      <a:tailEnd type="none" w="med" len="med"/>
+                    </a:lnT>
+                    <a:lnB w="6350" cap="flat" cmpd="sng" algn="ctr">
+                      <a:solidFill>
+                        <a:srgbClr val="DEDCD7"/>
+                      </a:solidFill>
+                      <a:prstDash val="solid"/>
+                      <a:round/>
+                      <a:headEnd type="none" w="med" len="med"/>
+                      <a:tailEnd type="none" w="med" len="med"/>
+                    </a:lnB>
+                  </a:tcPr>
+                </a:tc>
+                <a:tc>
+                  <a:txBody>
+                    <a:bodyPr/>
+                    <a:lstStyle/>
+                    <a:p>
+                      <a:pPr indent="0" marL="0">
+                        <a:buNone/>
+                      </a:pPr>
+                      <a:r>
+                        <a:rPr lang="en-US" sz="950" dirty="0">
+                          <a:solidFill>
+                            <a:srgbClr val="1A1A1A"/>
+                          </a:solidFill>
+                          <a:latin typeface="Calibri" pitchFamily="34" charset="0"/>
+                          <a:ea typeface="Calibri" pitchFamily="34" charset="-122"/>
+                          <a:cs typeface="Calibri" pitchFamily="34" charset="-120"/>
+                        </a:rPr>
+                        <a:t>MagicBrush is multi-turn, so before scaling 3.65× we hashed every image on both sides — 0 of 794 dev images appear in train</a:t>
+                      </a:r>
+                      <a:endParaRPr lang="en-US" sz="950" dirty="0">
+                        <a:latin typeface="Calibri" charset="0"/>
+                        <a:ea typeface="Calibri" charset="0"/>
+                        <a:cs typeface="Calibri" charset="0"/>
+                      </a:endParaRPr>
+                    </a:p>
+                  </a:txBody>
+                  <a:tcPr marL="50800" marR="50800" marT="50800" marB="50800" anchor="t">
+                    <a:lnL w="6350" cap="flat" cmpd="sng" algn="ctr">
+                      <a:solidFill>
+                        <a:srgbClr val="DEDCD7"/>
+                      </a:solidFill>
+                      <a:prstDash val="solid"/>
+                      <a:round/>
+                      <a:headEnd type="none" w="med" len="med"/>
+                      <a:tailEnd type="none" w="med" len="med"/>
+                    </a:lnL>
+                    <a:lnR w="6350" cap="flat" cmpd="sng" algn="ctr">
+                      <a:solidFill>
+                        <a:srgbClr val="DEDCD7"/>
+                      </a:solidFill>
+                      <a:prstDash val="solid"/>
+                      <a:round/>
+                      <a:headEnd type="none" w="med" len="med"/>
+                      <a:tailEnd type="none" w="med" len="med"/>
+                    </a:lnR>
+                    <a:lnT w="6350" cap="flat" cmpd="sng" algn="ctr">
+                      <a:solidFill>
+                        <a:srgbClr val="DEDCD7"/>
+                      </a:solidFill>
+                      <a:prstDash val="solid"/>
+                      <a:round/>
+                      <a:headEnd type="none" w="med" len="med"/>
+                      <a:tailEnd type="none" w="med" len="med"/>
+                    </a:lnT>
+                    <a:lnB w="6350" cap="flat" cmpd="sng" algn="ctr">
+                      <a:solidFill>
+                        <a:srgbClr val="DEDCD7"/>
+                      </a:solidFill>
+                      <a:prstDash val="solid"/>
+                      <a:round/>
+                      <a:headEnd type="none" w="med" len="med"/>
+                      <a:tailEnd type="none" w="med" len="med"/>
+                    </a:lnB>
+                  </a:tcPr>
+                </a:tc>
+              </a:tr>
+              <a:tr h="429768">
+                <a:tc>
+                  <a:txBody>
+                    <a:bodyPr/>
+                    <a:lstStyle/>
+                    <a:p>
+                      <a:pPr indent="0" marL="0">
+                        <a:buNone/>
+                      </a:pPr>
+                      <a:r>
+                        <a:rPr lang="en-US" sz="950" dirty="0">
+                          <a:solidFill>
+                            <a:srgbClr val="1A1A1A"/>
+                          </a:solidFill>
+                          <a:latin typeface="Calibri" pitchFamily="34" charset="0"/>
+                          <a:ea typeface="Calibri" pitchFamily="34" charset="-122"/>
+                          <a:cs typeface="Calibri" pitchFamily="34" charset="-120"/>
+                        </a:rPr>
+                        <a:t>Threshold selection</a:t>
+                      </a:r>
+                      <a:endParaRPr lang="en-US" sz="950" dirty="0">
+                        <a:latin typeface="Calibri" charset="0"/>
+                        <a:ea typeface="Calibri" charset="0"/>
+                        <a:cs typeface="Calibri" charset="0"/>
+                      </a:endParaRPr>
+                    </a:p>
+                  </a:txBody>
+                  <a:tcPr marL="50800" marR="50800" marT="50800" marB="50800" anchor="t">
+                    <a:lnL w="6350" cap="flat" cmpd="sng" algn="ctr">
+                      <a:solidFill>
+                        <a:srgbClr val="DEDCD7"/>
+                      </a:solidFill>
+                      <a:prstDash val="solid"/>
+                      <a:round/>
+                      <a:headEnd type="none" w="med" len="med"/>
+                      <a:tailEnd type="none" w="med" len="med"/>
+                    </a:lnL>
+                    <a:lnR w="6350" cap="flat" cmpd="sng" algn="ctr">
+                      <a:solidFill>
+                        <a:srgbClr val="DEDCD7"/>
+                      </a:solidFill>
+                      <a:prstDash val="solid"/>
+                      <a:round/>
+                      <a:headEnd type="none" w="med" len="med"/>
+                      <a:tailEnd type="none" w="med" len="med"/>
+                    </a:lnR>
+                    <a:lnT w="6350" cap="flat" cmpd="sng" algn="ctr">
+                      <a:solidFill>
+                        <a:srgbClr val="DEDCD7"/>
+                      </a:solidFill>
+                      <a:prstDash val="solid"/>
+                      <a:round/>
+                      <a:headEnd type="none" w="med" len="med"/>
+                      <a:tailEnd type="none" w="med" len="med"/>
+                    </a:lnT>
+                    <a:lnB w="6350" cap="flat" cmpd="sng" algn="ctr">
+                      <a:solidFill>
+                        <a:srgbClr val="DEDCD7"/>
+                      </a:solidFill>
+                      <a:prstDash val="solid"/>
+                      <a:round/>
+                      <a:headEnd type="none" w="med" len="med"/>
+                      <a:tailEnd type="none" w="med" len="med"/>
+                    </a:lnB>
+                  </a:tcPr>
+                </a:tc>
+                <a:tc>
+                  <a:txBody>
+                    <a:bodyPr/>
+                    <a:lstStyle/>
+                    <a:p>
+                      <a:pPr indent="0" marL="0">
+                        <a:buNone/>
+                      </a:pPr>
+                      <a:r>
+                        <a:rPr lang="en-US" sz="950" dirty="0">
+                          <a:solidFill>
+                            <a:srgbClr val="1A1A1A"/>
+                          </a:solidFill>
+                          <a:latin typeface="Calibri" pitchFamily="34" charset="0"/>
+                          <a:ea typeface="Calibri" pitchFamily="34" charset="-122"/>
+                          <a:cs typeface="Calibri" pitchFamily="34" charset="-120"/>
+                        </a:rPr>
+                        <a:t>dev peaks at 0.3, but adopting it would be test-set tuning; the threshold is chosen on train-val instead</a:t>
+                      </a:r>
+                      <a:endParaRPr lang="en-US" sz="950" dirty="0">
+                        <a:latin typeface="Calibri" charset="0"/>
+                        <a:ea typeface="Calibri" charset="0"/>
+                        <a:cs typeface="Calibri" charset="0"/>
+                      </a:endParaRPr>
+                    </a:p>
+                  </a:txBody>
+                  <a:tcPr marL="50800" marR="50800" marT="50800" marB="50800" anchor="t">
+                    <a:lnL w="6350" cap="flat" cmpd="sng" algn="ctr">
+                      <a:solidFill>
+                        <a:srgbClr val="DEDCD7"/>
+                      </a:solidFill>
+                      <a:prstDash val="solid"/>
+                      <a:round/>
+                      <a:headEnd type="none" w="med" len="med"/>
+                      <a:tailEnd type="none" w="med" len="med"/>
+                    </a:lnL>
+                    <a:lnR w="6350" cap="flat" cmpd="sng" algn="ctr">
+                      <a:solidFill>
+                        <a:srgbClr val="DEDCD7"/>
+                      </a:solidFill>
+                      <a:prstDash val="solid"/>
+                      <a:round/>
+                      <a:headEnd type="none" w="med" len="med"/>
+                      <a:tailEnd type="none" w="med" len="med"/>
+                    </a:lnR>
+                    <a:lnT w="6350" cap="flat" cmpd="sng" algn="ctr">
+                      <a:solidFill>
+                        <a:srgbClr val="DEDCD7"/>
+                      </a:solidFill>
+                      <a:prstDash val="solid"/>
+                      <a:round/>
+                      <a:headEnd type="none" w="med" len="med"/>
+                      <a:tailEnd type="none" w="med" len="med"/>
+                    </a:lnT>
+                    <a:lnB w="6350" cap="flat" cmpd="sng" algn="ctr">
+                      <a:solidFill>
+                        <a:srgbClr val="DEDCD7"/>
+                      </a:solidFill>
+                      <a:prstDash val="solid"/>
+                      <a:round/>
+                      <a:headEnd type="none" w="med" len="med"/>
+                      <a:tailEnd type="none" w="med" len="med"/>
+                    </a:lnB>
+                  </a:tcPr>
+                </a:tc>
+              </a:tr>
+            </a:tbl>
+          </a:graphicData>
+        </a:graphic>
+      </p:graphicFrame>
+      <p:sp>
+        <p:nvSpPr>
+          <p:cNvPr id="6" name="Shape 3"/>
+          <p:cNvSpPr/>
+          <p:nvPr/>
+        </p:nvSpPr>
+        <p:spPr>
+          <a:xfrm>
+            <a:off x="777240" y="4663440"/>
+            <a:ext cx="10637215" cy="868680"/>
+          </a:xfrm>
+          <a:prstGeom prst="rect">
+            <a:avLst/>
+          </a:prstGeom>
+          <a:solidFill>
+            <a:srgbClr val="F6F5F2"/>
+          </a:solidFill>
+          <a:ln/>
+        </p:spPr>
+      </p:sp>
+      <p:sp>
+        <p:nvSpPr>
+          <p:cNvPr id="7" name="Text 4"/>
+          <p:cNvSpPr/>
+          <p:nvPr/>
+        </p:nvSpPr>
+        <p:spPr>
+          <a:xfrm>
+            <a:off x="1069848" y="4864608"/>
+            <a:ext cx="10051999" cy="548640"/>
+          </a:xfrm>
+          <a:prstGeom prst="rect">
+            <a:avLst/>
+          </a:prstGeom>
+          <a:noFill/>
+          <a:ln/>
+        </p:spPr>
+        <p:txBody>
+          <a:bodyPr wrap="square" lIns="0" tIns="0" rIns="0" bIns="0" rtlCol="0" anchor="ctr"/>
+          <a:lstStyle/>
+          <a:p>
+            <a:pPr indent="0" marL="0">
+              <a:lnSpc>
+                <a:spcPts val="1700"/>
+              </a:lnSpc>
+              <a:buNone/>
+            </a:pPr>
+            <a:r>
+              <a:rPr lang="en-US" sz="1300" dirty="0">
+                <a:solidFill>
+                  <a:srgbClr val="1A1A1A"/>
+                </a:solidFill>
+                <a:latin typeface="Cambria" pitchFamily="34" charset="0"/>
+                <a:ea typeface="Cambria" pitchFamily="34" charset="-122"/>
+                <a:cs typeface="Cambria" pitchFamily="34" charset="-120"/>
+              </a:rPr>
+              <a:t>Two claims were retracted and two proposed improvements rejected by their own controls. That is why the three results that remain are worth stating.</a:t>
+            </a:r>
+            <a:endParaRPr lang="en-US" sz="1300" dirty="0"/>
+          </a:p>
+        </p:txBody>
+      </p:sp>
+      <p:sp>
+        <p:nvSpPr>
+          <p:cNvPr id="8" name="Text 5"/>
+          <p:cNvSpPr/>
+          <p:nvPr/>
+        </p:nvSpPr>
+        <p:spPr>
+          <a:xfrm>
+            <a:off x="777240" y="5715000"/>
+            <a:ext cx="9144000" cy="201168"/>
+          </a:xfrm>
+          <a:prstGeom prst="rect">
+            <a:avLst/>
+          </a:prstGeom>
+          <a:noFill/>
+          <a:ln/>
+        </p:spPr>
+        <p:txBody>
+          <a:bodyPr wrap="square" lIns="0" tIns="0" rIns="0" bIns="0" rtlCol="0" anchor="ctr"/>
+          <a:lstStyle/>
+          <a:p>
+            <a:pPr indent="0" marL="0">
+              <a:buNone/>
+            </a:pPr>
+            <a:r>
+              <a:rPr lang="en-US" sz="1050" b="1" spc="80" kern="0" dirty="0">
+                <a:solidFill>
+                  <a:srgbClr val="8C3A1E"/>
+                </a:solidFill>
+                <a:latin typeface="Calibri" pitchFamily="34" charset="0"/>
+                <a:ea typeface="Calibri" pitchFamily="34" charset="-122"/>
+                <a:cs typeface="Calibri" pitchFamily="34" charset="-120"/>
+              </a:rPr>
+              <a:t>Known limitation, not yet quantified</a:t>
+            </a:r>
+            <a:endParaRPr lang="en-US" sz="1050" dirty="0"/>
+          </a:p>
+        </p:txBody>
+      </p:sp>
+      <p:sp>
+        <p:nvSpPr>
+          <p:cNvPr id="9" name="Text 6"/>
+          <p:cNvSpPr/>
+          <p:nvPr/>
+        </p:nvSpPr>
+        <p:spPr>
+          <a:xfrm>
+            <a:off x="777240" y="5943600"/>
+            <a:ext cx="10637215" cy="365760"/>
+          </a:xfrm>
+          <a:prstGeom prst="rect">
+            <a:avLst/>
+          </a:prstGeom>
+          <a:noFill/>
+          <a:ln/>
+        </p:spPr>
+        <p:txBody>
+          <a:bodyPr wrap="square" lIns="0" tIns="0" rIns="0" bIns="0" rtlCol="0" anchor="ctr"/>
+          <a:lstStyle/>
+          <a:p>
+            <a:pPr indent="0" marL="0">
+              <a:buNone/>
+            </a:pPr>
+            <a:r>
+              <a:rPr lang="en-US" sz="1050" dirty="0">
+                <a:solidFill>
+                  <a:srgbClr val="6E6E6E"/>
+                </a:solidFill>
+                <a:latin typeface="Calibri" pitchFamily="34" charset="0"/>
+                <a:ea typeface="Calibri" pitchFamily="34" charset="-122"/>
+                <a:cs typeface="Calibri" pitchFamily="34" charset="-120"/>
+              </a:rPr>
+              <a:t>The remove ceiling on dev rests on 32 samples and carries uncertainty the figure does not show.</a:t>
+            </a:r>
+            <a:endParaRPr lang="en-US" sz="1050" dirty="0"/>
+          </a:p>
+        </p:txBody>
+      </p:sp>
+    </p:spTree>
+  </p:cSld>
+  <p:clrMapOvr>
+    <a:masterClrMapping/>
+  </p:clrMapOvr>
+</p:sld>
+</file>
+
+<file path=ppt/slides/slide12.xml><?xml version="1.0" encoding="utf-8"?>
+<p:sld xmlns:a="http://schemas.openxmlformats.org/drawingml/2006/main" xmlns:r="http://schemas.openxmlformats.org/officeDocument/2006/relationships" xmlns:p="http://schemas.openxmlformats.org/presentationml/2006/main">
+  <p:cSld name="Slide 12">
     <p:bg>
       <p:bgPr>
         <a:solidFill>
@@ -2464,7 +6045,7 @@
       </p:sp>
       <p:graphicFrame>
         <p:nvGraphicFramePr>
-          <p:cNvPr id="11" name="Table 0"/>
+          <p:cNvPr id="13" name="Table 0"/>
           <p:cNvGraphicFramePr>
             <a:graphicFrameLocks noGrp="1"/>
           </p:cNvGraphicFramePr>
@@ -2847,7 +6428,7 @@
                           <a:ea typeface="Calibri" pitchFamily="34" charset="-122"/>
                           <a:cs typeface="Calibri" pitchFamily="34" charset="-120"/>
                         </a:rPr>
-                        <a:t>Supervision at scale</a:t>
+                        <a:t>Supervision at scale — DONE</a:t>
                       </a:r>
                       <a:endParaRPr lang="en-US" sz="1000" dirty="0">
                         <a:latin typeface="Calibri" charset="0"/>
@@ -2912,7 +6493,7 @@
                           <a:ea typeface="Calibri" pitchFamily="34" charset="-122"/>
                           <a:cs typeface="Calibri" pitchFamily="34" charset="-120"/>
                         </a:rPr>
-                        <a:t>all 51 MagicBrush shards (~8,800 turns); re-measure the scaling curve</a:t>
+                        <a:t>all 51 shards trained: 8,306 turns, 24 seeded runs, 0.1718 → 0.2065</a:t>
                       </a:r>
                       <a:endParaRPr lang="en-US" sz="1000" dirty="0">
                         <a:latin typeface="Calibri" charset="0"/>
@@ -2977,7 +6558,7 @@
                           <a:ea typeface="Calibri" pitchFamily="34" charset="-122"/>
                           <a:cs typeface="Calibri" pitchFamily="34" charset="-120"/>
                         </a:rPr>
-                        <a:t>0.1718 at 2,278 samples</a:t>
+                        <a:t>0.1718 — cleared, p=4.1e-09</a:t>
                       </a:r>
                       <a:endParaRPr lang="en-US" sz="1000" dirty="0">
                         <a:latin typeface="Calibri" charset="0"/>
@@ -3501,7 +7082,7 @@
                           <a:ea typeface="Calibri" pitchFamily="34" charset="-122"/>
                           <a:cs typeface="Calibri" pitchFamily="34" charset="-120"/>
                         </a:rPr>
-                        <a:t>CLIPSeg at 0.1849</a:t>
+                        <a:t>MagicBrush mask at +18.5% net</a:t>
                       </a:r>
                       <a:endParaRPr lang="en-US" sz="1000" dirty="0">
                         <a:latin typeface="Calibri" charset="0"/>
@@ -3595,7 +7176,7 @@
       </p:sp>
       <p:graphicFrame>
         <p:nvGraphicFramePr>
-          <p:cNvPr id="21" name="Table 1"/>
+          <p:cNvPr id="25" name="Table 1"/>
           <p:cNvGraphicFramePr>
             <a:graphicFrameLocks noGrp="1"/>
           </p:cNvGraphicFramePr>
@@ -4165,9 +7746,9 @@
 </p:sld>
 </file>
 
-<file path=ppt/slides/slide11.xml><?xml version="1.0" encoding="utf-8"?>
+<file path=ppt/slides/slide13.xml><?xml version="1.0" encoding="utf-8"?>
 <p:sld xmlns:a="http://schemas.openxmlformats.org/drawingml/2006/main" xmlns:r="http://schemas.openxmlformats.org/officeDocument/2006/relationships" xmlns:p="http://schemas.openxmlformats.org/presentationml/2006/main">
-  <p:cSld name="Slide 11">
+  <p:cSld name="Slide 13">
     <p:bg>
       <p:bgPr>
         <a:solidFill>
@@ -12165,7 +15746,7 @@
                           <a:ea typeface="Calibri" pitchFamily="34" charset="-122"/>
                           <a:cs typeface="Calibri" pitchFamily="34" charset="-120"/>
                         </a:rPr>
-                        <a:t>0.1590</a:t>
+                        <a:t>0.1907</a:t>
                       </a:r>
                       <a:endParaRPr lang="en-US" sz="1000" dirty="0">
                         <a:latin typeface="Calibri" charset="0"/>
@@ -12368,7 +15949,7 @@
                           <a:ea typeface="Calibri" pitchFamily="34" charset="-122"/>
                           <a:cs typeface="Calibri" pitchFamily="34" charset="-120"/>
                         </a:rPr>
-                        <a:t>0.1718</a:t>
+                        <a:t>0.2065</a:t>
                       </a:r>
                       <a:endParaRPr lang="en-US" sz="1000" dirty="0">
                         <a:latin typeface="Calibri" charset="0"/>
@@ -12432,8 +16013,8 @@
         </p:nvSpPr>
         <p:spPr>
           <a:xfrm>
-            <a:off x="6949440" y="3456432"/>
-            <a:ext cx="4023360" cy="457200"/>
+            <a:off x="6949440" y="3419856"/>
+            <a:ext cx="4023360" cy="566928"/>
           </a:xfrm>
           <a:prstGeom prst="rect">
             <a:avLst/>
@@ -12447,12 +16028,12 @@
           <a:p>
             <a:pPr indent="0" marL="0">
               <a:lnSpc>
-                <a:spcPts val="1400"/>
+                <a:spcPts val="1300"/>
               </a:lnSpc>
               <a:buNone/>
             </a:pPr>
             <a:r>
-              <a:rPr lang="en-US" sz="1050" dirty="0">
+              <a:rPr lang="en-US" sz="950" dirty="0">
                 <a:solidFill>
                   <a:srgbClr val="1B7A4B"/>
                 </a:solidFill>
@@ -12460,19 +16041,19 @@
                 <a:ea typeface="Calibri" pitchFamily="34" charset="-122"/>
                 <a:cs typeface="Calibri" pitchFamily="34" charset="-120"/>
               </a:rPr>
-              <a:t>Identical inputs, data, loss, schedule and seeds.</a:t>
+              <a:t>Identical inputs, data, loss, schedule and seeds; 8,306 samples.</a:t>
             </a:r>
-            <a:endParaRPr lang="en-US" sz="1050" dirty="0"/>
+            <a:endParaRPr lang="en-US" sz="950" dirty="0"/>
           </a:p>
           <a:p>
             <a:pPr indent="0" marL="0">
               <a:lnSpc>
-                <a:spcPts val="1400"/>
+                <a:spcPts val="1300"/>
               </a:lnSpc>
               <a:buNone/>
             </a:pPr>
             <a:r>
-              <a:rPr lang="en-US" sz="1050" dirty="0">
+              <a:rPr lang="en-US" sz="950" dirty="0">
                 <a:solidFill>
                   <a:srgbClr val="1B7A4B"/>
                 </a:solidFill>
@@ -12480,9 +16061,29 @@
                 <a:ea typeface="Calibri" pitchFamily="34" charset="-122"/>
                 <a:cs typeface="Calibri" pitchFamily="34" charset="-120"/>
               </a:rPr>
-              <a:t>Spatial vs global:  p = 0.0070  (12 seeds).</a:t>
+              <a:t>Spatial vs global:  p = 5.4e-06,  Cohen's d = 2.50  (12 seeds).</a:t>
             </a:r>
-            <a:endParaRPr lang="en-US" sz="1050" dirty="0"/>
+            <a:endParaRPr lang="en-US" sz="950" dirty="0"/>
+          </a:p>
+          <a:p>
+            <a:pPr indent="0" marL="0">
+              <a:lnSpc>
+                <a:spcPts val="1300"/>
+              </a:lnSpc>
+              <a:buNone/>
+            </a:pPr>
+            <a:r>
+              <a:rPr lang="en-US" sz="950" dirty="0">
+                <a:solidFill>
+                  <a:srgbClr val="1B7A4B"/>
+                </a:solidFill>
+                <a:latin typeface="Calibri" pitchFamily="34" charset="0"/>
+                <a:ea typeface="Calibri" pitchFamily="34" charset="-122"/>
+                <a:cs typeface="Calibri" pitchFamily="34" charset="-120"/>
+              </a:rPr>
+              <a:t>Their mechanism was measured at 2,278 only.</a:t>
+            </a:r>
+            <a:endParaRPr lang="en-US" sz="950" dirty="0"/>
           </a:p>
         </p:txBody>
       </p:sp>
@@ -12691,7 +16292,7 @@
                 <a:ea typeface="Cambria" pitchFamily="34" charset="-122"/>
                 <a:cs typeface="Cambria" pitchFamily="34" charset="-120"/>
               </a:rPr>
-              <a:t>Accuracy against cost, and where the win is</a:t>
+              <a:t>Every seed, at both training-set sizes</a:t>
             </a:r>
             <a:endParaRPr lang="en-US" sz="2600" dirty="0"/>
           </a:p>
@@ -12730,7 +16331,7 @@
                 <a:ea typeface="Calibri" pitchFamily="34" charset="-122"/>
                 <a:cs typeface="Calibri" pitchFamily="34" charset="-120"/>
               </a:rPr>
-              <a:t>503 held-out dev samples · trained on 2,278 disjoint samples · 12 seeds</a:t>
+              <a:t>503 held-out dev samples · 8,306 training samples · 12 seeds per configuration</a:t>
             </a:r>
             <a:endParaRPr lang="en-US" sz="1200" dirty="0"/>
           </a:p>
@@ -12758,7 +16359,7 @@
       </p:sp>
       <p:pic>
         <p:nvPicPr>
-          <p:cNvPr id="6" name="Image 0" descr="img/frontier.png">    </p:cNvPr>
+          <p:cNvPr id="6" name="Image 0" descr="img/results.png">    </p:cNvPr>
           <p:cNvPicPr>
             <a:picLocks noChangeAspect="1"/>
           </p:cNvPicPr>
@@ -12772,24 +16373,1058 @@
         </p:blipFill>
         <p:spPr>
           <a:xfrm>
-            <a:off x="777240" y="1700784"/>
-            <a:ext cx="10637215" cy="3785486"/>
+            <a:off x="777240" y="1645920"/>
+            <a:ext cx="6446520" cy="3707027"/>
           </a:xfrm>
           <a:prstGeom prst="rect">
             <a:avLst/>
           </a:prstGeom>
         </p:spPr>
       </p:pic>
+      <p:graphicFrame>
+        <p:nvGraphicFramePr>
+          <p:cNvPr id="7" name="Table 0"/>
+          <p:cNvGraphicFramePr>
+            <a:graphicFrameLocks noGrp="1"/>
+          </p:cNvGraphicFramePr>
+          <p:nvPr>
+            <p:extLst>
+              <p:ext uri="{D42A27DB-BD31-4B8C-83A1-F6EECF244321}">
+                <p14:modId xmlns:p14="http://schemas.microsoft.com/office/powerpoint/2010/main" val="1579011935"/>
+              </p:ext>
+            </p:extLst>
+          </p:nvPr>
+        </p:nvGraphicFramePr>
+        <p:xfrm>
+          <a:off x="7498080" y="1755648"/>
+          <a:ext cx="3913632" cy="914400"/>
+        </p:xfrm>
+        <a:graphic>
+          <a:graphicData uri="http://schemas.openxmlformats.org/drawingml/2006/table">
+            <a:tbl>
+              <a:tblPr/>
+              <a:tblGrid>
+                <a:gridCol w="1536192"/>
+                <a:gridCol w="1225296"/>
+                <a:gridCol w="1152144"/>
+              </a:tblGrid>
+              <a:tr h="310896">
+                <a:tc>
+                  <a:txBody>
+                    <a:bodyPr/>
+                    <a:lstStyle/>
+                    <a:p>
+                      <a:pPr indent="0" marL="0">
+                        <a:buNone/>
+                      </a:pPr>
+                      <a:r>
+                        <a:rPr lang="en-US" sz="1000" b="1" dirty="0">
+                          <a:solidFill>
+                            <a:srgbClr val="1A1A1A"/>
+                          </a:solidFill>
+                          <a:latin typeface="Calibri" pitchFamily="34" charset="0"/>
+                          <a:ea typeface="Calibri" pitchFamily="34" charset="-122"/>
+                          <a:cs typeface="Calibri" pitchFamily="34" charset="-120"/>
+                        </a:rPr>
+                        <a:t>metric</a:t>
+                      </a:r>
+                      <a:endParaRPr lang="en-US" sz="1000" dirty="0">
+                        <a:latin typeface="Calibri" charset="0"/>
+                        <a:ea typeface="Calibri" charset="0"/>
+                        <a:cs typeface="Calibri" charset="0"/>
+                      </a:endParaRPr>
+                    </a:p>
+                  </a:txBody>
+                  <a:tcPr marL="50800" marR="50800" marT="50800" marB="50800" anchor="t">
+                    <a:lnL w="6350" cap="flat" cmpd="sng" algn="ctr">
+                      <a:solidFill>
+                        <a:srgbClr val="DEDCD7"/>
+                      </a:solidFill>
+                      <a:prstDash val="solid"/>
+                      <a:round/>
+                      <a:headEnd type="none" w="med" len="med"/>
+                      <a:tailEnd type="none" w="med" len="med"/>
+                    </a:lnL>
+                    <a:lnR w="6350" cap="flat" cmpd="sng" algn="ctr">
+                      <a:solidFill>
+                        <a:srgbClr val="DEDCD7"/>
+                      </a:solidFill>
+                      <a:prstDash val="solid"/>
+                      <a:round/>
+                      <a:headEnd type="none" w="med" len="med"/>
+                      <a:tailEnd type="none" w="med" len="med"/>
+                    </a:lnR>
+                    <a:lnT w="6350" cap="flat" cmpd="sng" algn="ctr">
+                      <a:solidFill>
+                        <a:srgbClr val="DEDCD7"/>
+                      </a:solidFill>
+                      <a:prstDash val="solid"/>
+                      <a:round/>
+                      <a:headEnd type="none" w="med" len="med"/>
+                      <a:tailEnd type="none" w="med" len="med"/>
+                    </a:lnT>
+                    <a:lnB w="6350" cap="flat" cmpd="sng" algn="ctr">
+                      <a:solidFill>
+                        <a:srgbClr val="DEDCD7"/>
+                      </a:solidFill>
+                      <a:prstDash val="solid"/>
+                      <a:round/>
+                      <a:headEnd type="none" w="med" len="med"/>
+                      <a:tailEnd type="none" w="med" len="med"/>
+                    </a:lnB>
+                    <a:solidFill>
+                      <a:srgbClr val="F6F5F2"/>
+                    </a:solidFill>
+                  </a:tcPr>
+                </a:tc>
+                <a:tc>
+                  <a:txBody>
+                    <a:bodyPr/>
+                    <a:lstStyle/>
+                    <a:p>
+                      <a:pPr algn="ctr" indent="0" marL="0">
+                        <a:buNone/>
+                      </a:pPr>
+                      <a:r>
+                        <a:rPr lang="en-US" sz="1000" b="1" dirty="0">
+                          <a:solidFill>
+                            <a:srgbClr val="1A1A1A"/>
+                          </a:solidFill>
+                          <a:latin typeface="Calibri" pitchFamily="34" charset="0"/>
+                          <a:ea typeface="Calibri" pitchFamily="34" charset="-122"/>
+                          <a:cs typeface="Calibri" pitchFamily="34" charset="-120"/>
+                        </a:rPr>
+                        <a:t>v2 spatial</a:t>
+                      </a:r>
+                      <a:endParaRPr lang="en-US" sz="1000" dirty="0">
+                        <a:latin typeface="Calibri" charset="0"/>
+                        <a:ea typeface="Calibri" charset="0"/>
+                        <a:cs typeface="Calibri" charset="0"/>
+                      </a:endParaRPr>
+                    </a:p>
+                  </a:txBody>
+                  <a:tcPr marL="50800" marR="50800" marT="50800" marB="50800" anchor="t">
+                    <a:lnL w="6350" cap="flat" cmpd="sng" algn="ctr">
+                      <a:solidFill>
+                        <a:srgbClr val="DEDCD7"/>
+                      </a:solidFill>
+                      <a:prstDash val="solid"/>
+                      <a:round/>
+                      <a:headEnd type="none" w="med" len="med"/>
+                      <a:tailEnd type="none" w="med" len="med"/>
+                    </a:lnL>
+                    <a:lnR w="6350" cap="flat" cmpd="sng" algn="ctr">
+                      <a:solidFill>
+                        <a:srgbClr val="DEDCD7"/>
+                      </a:solidFill>
+                      <a:prstDash val="solid"/>
+                      <a:round/>
+                      <a:headEnd type="none" w="med" len="med"/>
+                      <a:tailEnd type="none" w="med" len="med"/>
+                    </a:lnR>
+                    <a:lnT w="6350" cap="flat" cmpd="sng" algn="ctr">
+                      <a:solidFill>
+                        <a:srgbClr val="DEDCD7"/>
+                      </a:solidFill>
+                      <a:prstDash val="solid"/>
+                      <a:round/>
+                      <a:headEnd type="none" w="med" len="med"/>
+                      <a:tailEnd type="none" w="med" len="med"/>
+                    </a:lnT>
+                    <a:lnB w="6350" cap="flat" cmpd="sng" algn="ctr">
+                      <a:solidFill>
+                        <a:srgbClr val="DEDCD7"/>
+                      </a:solidFill>
+                      <a:prstDash val="solid"/>
+                      <a:round/>
+                      <a:headEnd type="none" w="med" len="med"/>
+                      <a:tailEnd type="none" w="med" len="med"/>
+                    </a:lnB>
+                    <a:solidFill>
+                      <a:srgbClr val="F6F5F2"/>
+                    </a:solidFill>
+                  </a:tcPr>
+                </a:tc>
+                <a:tc>
+                  <a:txBody>
+                    <a:bodyPr/>
+                    <a:lstStyle/>
+                    <a:p>
+                      <a:pPr algn="ctr" indent="0" marL="0">
+                        <a:buNone/>
+                      </a:pPr>
+                      <a:r>
+                        <a:rPr lang="en-US" sz="1000" b="1" dirty="0">
+                          <a:solidFill>
+                            <a:srgbClr val="1A1A1A"/>
+                          </a:solidFill>
+                          <a:latin typeface="Calibri" pitchFamily="34" charset="0"/>
+                          <a:ea typeface="Calibri" pitchFamily="34" charset="-122"/>
+                          <a:cs typeface="Calibri" pitchFamily="34" charset="-120"/>
+                        </a:rPr>
+                        <a:t>v1 global</a:t>
+                      </a:r>
+                      <a:endParaRPr lang="en-US" sz="1000" dirty="0">
+                        <a:latin typeface="Calibri" charset="0"/>
+                        <a:ea typeface="Calibri" charset="0"/>
+                        <a:cs typeface="Calibri" charset="0"/>
+                      </a:endParaRPr>
+                    </a:p>
+                  </a:txBody>
+                  <a:tcPr marL="50800" marR="50800" marT="50800" marB="50800" anchor="t">
+                    <a:lnL w="6350" cap="flat" cmpd="sng" algn="ctr">
+                      <a:solidFill>
+                        <a:srgbClr val="DEDCD7"/>
+                      </a:solidFill>
+                      <a:prstDash val="solid"/>
+                      <a:round/>
+                      <a:headEnd type="none" w="med" len="med"/>
+                      <a:tailEnd type="none" w="med" len="med"/>
+                    </a:lnL>
+                    <a:lnR w="6350" cap="flat" cmpd="sng" algn="ctr">
+                      <a:solidFill>
+                        <a:srgbClr val="DEDCD7"/>
+                      </a:solidFill>
+                      <a:prstDash val="solid"/>
+                      <a:round/>
+                      <a:headEnd type="none" w="med" len="med"/>
+                      <a:tailEnd type="none" w="med" len="med"/>
+                    </a:lnR>
+                    <a:lnT w="6350" cap="flat" cmpd="sng" algn="ctr">
+                      <a:solidFill>
+                        <a:srgbClr val="DEDCD7"/>
+                      </a:solidFill>
+                      <a:prstDash val="solid"/>
+                      <a:round/>
+                      <a:headEnd type="none" w="med" len="med"/>
+                      <a:tailEnd type="none" w="med" len="med"/>
+                    </a:lnT>
+                    <a:lnB w="6350" cap="flat" cmpd="sng" algn="ctr">
+                      <a:solidFill>
+                        <a:srgbClr val="DEDCD7"/>
+                      </a:solidFill>
+                      <a:prstDash val="solid"/>
+                      <a:round/>
+                      <a:headEnd type="none" w="med" len="med"/>
+                      <a:tailEnd type="none" w="med" len="med"/>
+                    </a:lnB>
+                    <a:solidFill>
+                      <a:srgbClr val="F6F5F2"/>
+                    </a:solidFill>
+                  </a:tcPr>
+                </a:tc>
+              </a:tr>
+              <a:tr h="310896">
+                <a:tc>
+                  <a:txBody>
+                    <a:bodyPr/>
+                    <a:lstStyle/>
+                    <a:p>
+                      <a:pPr indent="0" marL="0">
+                        <a:buNone/>
+                      </a:pPr>
+                      <a:r>
+                        <a:rPr lang="en-US" sz="1000" b="1" dirty="0">
+                          <a:solidFill>
+                            <a:srgbClr val="1A1A1A"/>
+                          </a:solidFill>
+                          <a:latin typeface="Calibri" pitchFamily="34" charset="0"/>
+                          <a:ea typeface="Calibri" pitchFamily="34" charset="-122"/>
+                          <a:cs typeface="Calibri" pitchFamily="34" charset="-120"/>
+                        </a:rPr>
+                        <a:t>IoU</a:t>
+                      </a:r>
+                      <a:endParaRPr lang="en-US" sz="1000" dirty="0">
+                        <a:latin typeface="Calibri" charset="0"/>
+                        <a:ea typeface="Calibri" charset="0"/>
+                        <a:cs typeface="Calibri" charset="0"/>
+                      </a:endParaRPr>
+                    </a:p>
+                  </a:txBody>
+                  <a:tcPr marL="50800" marR="50800" marT="50800" marB="50800" anchor="t">
+                    <a:lnL w="6350" cap="flat" cmpd="sng" algn="ctr">
+                      <a:solidFill>
+                        <a:srgbClr val="DEDCD7"/>
+                      </a:solidFill>
+                      <a:prstDash val="solid"/>
+                      <a:round/>
+                      <a:headEnd type="none" w="med" len="med"/>
+                      <a:tailEnd type="none" w="med" len="med"/>
+                    </a:lnL>
+                    <a:lnR w="6350" cap="flat" cmpd="sng" algn="ctr">
+                      <a:solidFill>
+                        <a:srgbClr val="DEDCD7"/>
+                      </a:solidFill>
+                      <a:prstDash val="solid"/>
+                      <a:round/>
+                      <a:headEnd type="none" w="med" len="med"/>
+                      <a:tailEnd type="none" w="med" len="med"/>
+                    </a:lnR>
+                    <a:lnT w="6350" cap="flat" cmpd="sng" algn="ctr">
+                      <a:solidFill>
+                        <a:srgbClr val="DEDCD7"/>
+                      </a:solidFill>
+                      <a:prstDash val="solid"/>
+                      <a:round/>
+                      <a:headEnd type="none" w="med" len="med"/>
+                      <a:tailEnd type="none" w="med" len="med"/>
+                    </a:lnT>
+                    <a:lnB w="6350" cap="flat" cmpd="sng" algn="ctr">
+                      <a:solidFill>
+                        <a:srgbClr val="DEDCD7"/>
+                      </a:solidFill>
+                      <a:prstDash val="solid"/>
+                      <a:round/>
+                      <a:headEnd type="none" w="med" len="med"/>
+                      <a:tailEnd type="none" w="med" len="med"/>
+                    </a:lnB>
+                    <a:solidFill>
+                      <a:srgbClr val="EAF5EE"/>
+                    </a:solidFill>
+                  </a:tcPr>
+                </a:tc>
+                <a:tc>
+                  <a:txBody>
+                    <a:bodyPr/>
+                    <a:lstStyle/>
+                    <a:p>
+                      <a:pPr algn="ctr" indent="0" marL="0">
+                        <a:buNone/>
+                      </a:pPr>
+                      <a:r>
+                        <a:rPr lang="en-US" sz="1000" b="1" dirty="0">
+                          <a:solidFill>
+                            <a:srgbClr val="1A1A1A"/>
+                          </a:solidFill>
+                          <a:latin typeface="Calibri" pitchFamily="34" charset="0"/>
+                          <a:ea typeface="Calibri" pitchFamily="34" charset="-122"/>
+                          <a:cs typeface="Calibri" pitchFamily="34" charset="-120"/>
+                        </a:rPr>
+                        <a:t>0.2065</a:t>
+                      </a:r>
+                      <a:endParaRPr lang="en-US" sz="1000" dirty="0">
+                        <a:latin typeface="Calibri" charset="0"/>
+                        <a:ea typeface="Calibri" charset="0"/>
+                        <a:cs typeface="Calibri" charset="0"/>
+                      </a:endParaRPr>
+                    </a:p>
+                  </a:txBody>
+                  <a:tcPr marL="50800" marR="50800" marT="50800" marB="50800" anchor="t">
+                    <a:lnL w="6350" cap="flat" cmpd="sng" algn="ctr">
+                      <a:solidFill>
+                        <a:srgbClr val="DEDCD7"/>
+                      </a:solidFill>
+                      <a:prstDash val="solid"/>
+                      <a:round/>
+                      <a:headEnd type="none" w="med" len="med"/>
+                      <a:tailEnd type="none" w="med" len="med"/>
+                    </a:lnL>
+                    <a:lnR w="6350" cap="flat" cmpd="sng" algn="ctr">
+                      <a:solidFill>
+                        <a:srgbClr val="DEDCD7"/>
+                      </a:solidFill>
+                      <a:prstDash val="solid"/>
+                      <a:round/>
+                      <a:headEnd type="none" w="med" len="med"/>
+                      <a:tailEnd type="none" w="med" len="med"/>
+                    </a:lnR>
+                    <a:lnT w="6350" cap="flat" cmpd="sng" algn="ctr">
+                      <a:solidFill>
+                        <a:srgbClr val="DEDCD7"/>
+                      </a:solidFill>
+                      <a:prstDash val="solid"/>
+                      <a:round/>
+                      <a:headEnd type="none" w="med" len="med"/>
+                      <a:tailEnd type="none" w="med" len="med"/>
+                    </a:lnT>
+                    <a:lnB w="6350" cap="flat" cmpd="sng" algn="ctr">
+                      <a:solidFill>
+                        <a:srgbClr val="DEDCD7"/>
+                      </a:solidFill>
+                      <a:prstDash val="solid"/>
+                      <a:round/>
+                      <a:headEnd type="none" w="med" len="med"/>
+                      <a:tailEnd type="none" w="med" len="med"/>
+                    </a:lnB>
+                    <a:solidFill>
+                      <a:srgbClr val="EAF5EE"/>
+                    </a:solidFill>
+                  </a:tcPr>
+                </a:tc>
+                <a:tc>
+                  <a:txBody>
+                    <a:bodyPr/>
+                    <a:lstStyle/>
+                    <a:p>
+                      <a:pPr algn="ctr" indent="0" marL="0">
+                        <a:buNone/>
+                      </a:pPr>
+                      <a:r>
+                        <a:rPr lang="en-US" sz="1000" b="1" dirty="0">
+                          <a:solidFill>
+                            <a:srgbClr val="1A1A1A"/>
+                          </a:solidFill>
+                          <a:latin typeface="Calibri" pitchFamily="34" charset="0"/>
+                          <a:ea typeface="Calibri" pitchFamily="34" charset="-122"/>
+                          <a:cs typeface="Calibri" pitchFamily="34" charset="-120"/>
+                        </a:rPr>
+                        <a:t>0.1907</a:t>
+                      </a:r>
+                      <a:endParaRPr lang="en-US" sz="1000" dirty="0">
+                        <a:latin typeface="Calibri" charset="0"/>
+                        <a:ea typeface="Calibri" charset="0"/>
+                        <a:cs typeface="Calibri" charset="0"/>
+                      </a:endParaRPr>
+                    </a:p>
+                  </a:txBody>
+                  <a:tcPr marL="50800" marR="50800" marT="50800" marB="50800" anchor="t">
+                    <a:lnL w="6350" cap="flat" cmpd="sng" algn="ctr">
+                      <a:solidFill>
+                        <a:srgbClr val="DEDCD7"/>
+                      </a:solidFill>
+                      <a:prstDash val="solid"/>
+                      <a:round/>
+                      <a:headEnd type="none" w="med" len="med"/>
+                      <a:tailEnd type="none" w="med" len="med"/>
+                    </a:lnL>
+                    <a:lnR w="6350" cap="flat" cmpd="sng" algn="ctr">
+                      <a:solidFill>
+                        <a:srgbClr val="DEDCD7"/>
+                      </a:solidFill>
+                      <a:prstDash val="solid"/>
+                      <a:round/>
+                      <a:headEnd type="none" w="med" len="med"/>
+                      <a:tailEnd type="none" w="med" len="med"/>
+                    </a:lnR>
+                    <a:lnT w="6350" cap="flat" cmpd="sng" algn="ctr">
+                      <a:solidFill>
+                        <a:srgbClr val="DEDCD7"/>
+                      </a:solidFill>
+                      <a:prstDash val="solid"/>
+                      <a:round/>
+                      <a:headEnd type="none" w="med" len="med"/>
+                      <a:tailEnd type="none" w="med" len="med"/>
+                    </a:lnT>
+                    <a:lnB w="6350" cap="flat" cmpd="sng" algn="ctr">
+                      <a:solidFill>
+                        <a:srgbClr val="DEDCD7"/>
+                      </a:solidFill>
+                      <a:prstDash val="solid"/>
+                      <a:round/>
+                      <a:headEnd type="none" w="med" len="med"/>
+                      <a:tailEnd type="none" w="med" len="med"/>
+                    </a:lnB>
+                    <a:solidFill>
+                      <a:srgbClr val="EAF5EE"/>
+                    </a:solidFill>
+                  </a:tcPr>
+                </a:tc>
+              </a:tr>
+              <a:tr h="310896">
+                <a:tc>
+                  <a:txBody>
+                    <a:bodyPr/>
+                    <a:lstStyle/>
+                    <a:p>
+                      <a:pPr indent="0" marL="0">
+                        <a:buNone/>
+                      </a:pPr>
+                      <a:r>
+                        <a:rPr lang="en-US" sz="1000" dirty="0">
+                          <a:solidFill>
+                            <a:srgbClr val="1A1A1A"/>
+                          </a:solidFill>
+                          <a:latin typeface="Calibri" pitchFamily="34" charset="0"/>
+                          <a:ea typeface="Calibri" pitchFamily="34" charset="-122"/>
+                          <a:cs typeface="Calibri" pitchFamily="34" charset="-120"/>
+                        </a:rPr>
+                        <a:t>Precision</a:t>
+                      </a:r>
+                      <a:endParaRPr lang="en-US" sz="1000" dirty="0">
+                        <a:latin typeface="Calibri" charset="0"/>
+                        <a:ea typeface="Calibri" charset="0"/>
+                        <a:cs typeface="Calibri" charset="0"/>
+                      </a:endParaRPr>
+                    </a:p>
+                  </a:txBody>
+                  <a:tcPr marL="50800" marR="50800" marT="50800" marB="50800" anchor="t">
+                    <a:lnL w="6350" cap="flat" cmpd="sng" algn="ctr">
+                      <a:solidFill>
+                        <a:srgbClr val="DEDCD7"/>
+                      </a:solidFill>
+                      <a:prstDash val="solid"/>
+                      <a:round/>
+                      <a:headEnd type="none" w="med" len="med"/>
+                      <a:tailEnd type="none" w="med" len="med"/>
+                    </a:lnL>
+                    <a:lnR w="6350" cap="flat" cmpd="sng" algn="ctr">
+                      <a:solidFill>
+                        <a:srgbClr val="DEDCD7"/>
+                      </a:solidFill>
+                      <a:prstDash val="solid"/>
+                      <a:round/>
+                      <a:headEnd type="none" w="med" len="med"/>
+                      <a:tailEnd type="none" w="med" len="med"/>
+                    </a:lnR>
+                    <a:lnT w="6350" cap="flat" cmpd="sng" algn="ctr">
+                      <a:solidFill>
+                        <a:srgbClr val="DEDCD7"/>
+                      </a:solidFill>
+                      <a:prstDash val="solid"/>
+                      <a:round/>
+                      <a:headEnd type="none" w="med" len="med"/>
+                      <a:tailEnd type="none" w="med" len="med"/>
+                    </a:lnT>
+                    <a:lnB w="6350" cap="flat" cmpd="sng" algn="ctr">
+                      <a:solidFill>
+                        <a:srgbClr val="DEDCD7"/>
+                      </a:solidFill>
+                      <a:prstDash val="solid"/>
+                      <a:round/>
+                      <a:headEnd type="none" w="med" len="med"/>
+                      <a:tailEnd type="none" w="med" len="med"/>
+                    </a:lnB>
+                  </a:tcPr>
+                </a:tc>
+                <a:tc>
+                  <a:txBody>
+                    <a:bodyPr/>
+                    <a:lstStyle/>
+                    <a:p>
+                      <a:pPr algn="ctr" indent="0" marL="0">
+                        <a:buNone/>
+                      </a:pPr>
+                      <a:r>
+                        <a:rPr lang="en-US" sz="1000" dirty="0">
+                          <a:solidFill>
+                            <a:srgbClr val="1A1A1A"/>
+                          </a:solidFill>
+                          <a:latin typeface="Calibri" pitchFamily="34" charset="0"/>
+                          <a:ea typeface="Calibri" pitchFamily="34" charset="-122"/>
+                          <a:cs typeface="Calibri" pitchFamily="34" charset="-120"/>
+                        </a:rPr>
+                        <a:t>0.3126</a:t>
+                      </a:r>
+                      <a:endParaRPr lang="en-US" sz="1000" dirty="0">
+                        <a:latin typeface="Calibri" charset="0"/>
+                        <a:ea typeface="Calibri" charset="0"/>
+                        <a:cs typeface="Calibri" charset="0"/>
+                      </a:endParaRPr>
+                    </a:p>
+                  </a:txBody>
+                  <a:tcPr marL="50800" marR="50800" marT="50800" marB="50800" anchor="t">
+                    <a:lnL w="6350" cap="flat" cmpd="sng" algn="ctr">
+                      <a:solidFill>
+                        <a:srgbClr val="DEDCD7"/>
+                      </a:solidFill>
+                      <a:prstDash val="solid"/>
+                      <a:round/>
+                      <a:headEnd type="none" w="med" len="med"/>
+                      <a:tailEnd type="none" w="med" len="med"/>
+                    </a:lnL>
+                    <a:lnR w="6350" cap="flat" cmpd="sng" algn="ctr">
+                      <a:solidFill>
+                        <a:srgbClr val="DEDCD7"/>
+                      </a:solidFill>
+                      <a:prstDash val="solid"/>
+                      <a:round/>
+                      <a:headEnd type="none" w="med" len="med"/>
+                      <a:tailEnd type="none" w="med" len="med"/>
+                    </a:lnR>
+                    <a:lnT w="6350" cap="flat" cmpd="sng" algn="ctr">
+                      <a:solidFill>
+                        <a:srgbClr val="DEDCD7"/>
+                      </a:solidFill>
+                      <a:prstDash val="solid"/>
+                      <a:round/>
+                      <a:headEnd type="none" w="med" len="med"/>
+                      <a:tailEnd type="none" w="med" len="med"/>
+                    </a:lnT>
+                    <a:lnB w="6350" cap="flat" cmpd="sng" algn="ctr">
+                      <a:solidFill>
+                        <a:srgbClr val="DEDCD7"/>
+                      </a:solidFill>
+                      <a:prstDash val="solid"/>
+                      <a:round/>
+                      <a:headEnd type="none" w="med" len="med"/>
+                      <a:tailEnd type="none" w="med" len="med"/>
+                    </a:lnB>
+                  </a:tcPr>
+                </a:tc>
+                <a:tc>
+                  <a:txBody>
+                    <a:bodyPr/>
+                    <a:lstStyle/>
+                    <a:p>
+                      <a:pPr algn="ctr" indent="0" marL="0">
+                        <a:buNone/>
+                      </a:pPr>
+                      <a:r>
+                        <a:rPr lang="en-US" sz="1000" dirty="0">
+                          <a:solidFill>
+                            <a:srgbClr val="1A1A1A"/>
+                          </a:solidFill>
+                          <a:latin typeface="Calibri" pitchFamily="34" charset="0"/>
+                          <a:ea typeface="Calibri" pitchFamily="34" charset="-122"/>
+                          <a:cs typeface="Calibri" pitchFamily="34" charset="-120"/>
+                        </a:rPr>
+                        <a:t>0.2972</a:t>
+                      </a:r>
+                      <a:endParaRPr lang="en-US" sz="1000" dirty="0">
+                        <a:latin typeface="Calibri" charset="0"/>
+                        <a:ea typeface="Calibri" charset="0"/>
+                        <a:cs typeface="Calibri" charset="0"/>
+                      </a:endParaRPr>
+                    </a:p>
+                  </a:txBody>
+                  <a:tcPr marL="50800" marR="50800" marT="50800" marB="50800" anchor="t">
+                    <a:lnL w="6350" cap="flat" cmpd="sng" algn="ctr">
+                      <a:solidFill>
+                        <a:srgbClr val="DEDCD7"/>
+                      </a:solidFill>
+                      <a:prstDash val="solid"/>
+                      <a:round/>
+                      <a:headEnd type="none" w="med" len="med"/>
+                      <a:tailEnd type="none" w="med" len="med"/>
+                    </a:lnL>
+                    <a:lnR w="6350" cap="flat" cmpd="sng" algn="ctr">
+                      <a:solidFill>
+                        <a:srgbClr val="DEDCD7"/>
+                      </a:solidFill>
+                      <a:prstDash val="solid"/>
+                      <a:round/>
+                      <a:headEnd type="none" w="med" len="med"/>
+                      <a:tailEnd type="none" w="med" len="med"/>
+                    </a:lnR>
+                    <a:lnT w="6350" cap="flat" cmpd="sng" algn="ctr">
+                      <a:solidFill>
+                        <a:srgbClr val="DEDCD7"/>
+                      </a:solidFill>
+                      <a:prstDash val="solid"/>
+                      <a:round/>
+                      <a:headEnd type="none" w="med" len="med"/>
+                      <a:tailEnd type="none" w="med" len="med"/>
+                    </a:lnT>
+                    <a:lnB w="6350" cap="flat" cmpd="sng" algn="ctr">
+                      <a:solidFill>
+                        <a:srgbClr val="DEDCD7"/>
+                      </a:solidFill>
+                      <a:prstDash val="solid"/>
+                      <a:round/>
+                      <a:headEnd type="none" w="med" len="med"/>
+                      <a:tailEnd type="none" w="med" len="med"/>
+                    </a:lnB>
+                  </a:tcPr>
+                </a:tc>
+              </a:tr>
+              <a:tr h="310896">
+                <a:tc>
+                  <a:txBody>
+                    <a:bodyPr/>
+                    <a:lstStyle/>
+                    <a:p>
+                      <a:pPr indent="0" marL="0">
+                        <a:buNone/>
+                      </a:pPr>
+                      <a:r>
+                        <a:rPr lang="en-US" sz="1000" dirty="0">
+                          <a:solidFill>
+                            <a:srgbClr val="1A1A1A"/>
+                          </a:solidFill>
+                          <a:latin typeface="Calibri" pitchFamily="34" charset="0"/>
+                          <a:ea typeface="Calibri" pitchFamily="34" charset="-122"/>
+                          <a:cs typeface="Calibri" pitchFamily="34" charset="-120"/>
+                        </a:rPr>
+                        <a:t>Recall</a:t>
+                      </a:r>
+                      <a:endParaRPr lang="en-US" sz="1000" dirty="0">
+                        <a:latin typeface="Calibri" charset="0"/>
+                        <a:ea typeface="Calibri" charset="0"/>
+                        <a:cs typeface="Calibri" charset="0"/>
+                      </a:endParaRPr>
+                    </a:p>
+                  </a:txBody>
+                  <a:tcPr marL="50800" marR="50800" marT="50800" marB="50800" anchor="t">
+                    <a:lnL w="6350" cap="flat" cmpd="sng" algn="ctr">
+                      <a:solidFill>
+                        <a:srgbClr val="DEDCD7"/>
+                      </a:solidFill>
+                      <a:prstDash val="solid"/>
+                      <a:round/>
+                      <a:headEnd type="none" w="med" len="med"/>
+                      <a:tailEnd type="none" w="med" len="med"/>
+                    </a:lnL>
+                    <a:lnR w="6350" cap="flat" cmpd="sng" algn="ctr">
+                      <a:solidFill>
+                        <a:srgbClr val="DEDCD7"/>
+                      </a:solidFill>
+                      <a:prstDash val="solid"/>
+                      <a:round/>
+                      <a:headEnd type="none" w="med" len="med"/>
+                      <a:tailEnd type="none" w="med" len="med"/>
+                    </a:lnR>
+                    <a:lnT w="6350" cap="flat" cmpd="sng" algn="ctr">
+                      <a:solidFill>
+                        <a:srgbClr val="DEDCD7"/>
+                      </a:solidFill>
+                      <a:prstDash val="solid"/>
+                      <a:round/>
+                      <a:headEnd type="none" w="med" len="med"/>
+                      <a:tailEnd type="none" w="med" len="med"/>
+                    </a:lnT>
+                    <a:lnB w="6350" cap="flat" cmpd="sng" algn="ctr">
+                      <a:solidFill>
+                        <a:srgbClr val="DEDCD7"/>
+                      </a:solidFill>
+                      <a:prstDash val="solid"/>
+                      <a:round/>
+                      <a:headEnd type="none" w="med" len="med"/>
+                      <a:tailEnd type="none" w="med" len="med"/>
+                    </a:lnB>
+                  </a:tcPr>
+                </a:tc>
+                <a:tc>
+                  <a:txBody>
+                    <a:bodyPr/>
+                    <a:lstStyle/>
+                    <a:p>
+                      <a:pPr algn="ctr" indent="0" marL="0">
+                        <a:buNone/>
+                      </a:pPr>
+                      <a:r>
+                        <a:rPr lang="en-US" sz="1000" dirty="0">
+                          <a:solidFill>
+                            <a:srgbClr val="1A1A1A"/>
+                          </a:solidFill>
+                          <a:latin typeface="Calibri" pitchFamily="34" charset="0"/>
+                          <a:ea typeface="Calibri" pitchFamily="34" charset="-122"/>
+                          <a:cs typeface="Calibri" pitchFamily="34" charset="-120"/>
+                        </a:rPr>
+                        <a:t>0.3878</a:t>
+                      </a:r>
+                      <a:endParaRPr lang="en-US" sz="1000" dirty="0">
+                        <a:latin typeface="Calibri" charset="0"/>
+                        <a:ea typeface="Calibri" charset="0"/>
+                        <a:cs typeface="Calibri" charset="0"/>
+                      </a:endParaRPr>
+                    </a:p>
+                  </a:txBody>
+                  <a:tcPr marL="50800" marR="50800" marT="50800" marB="50800" anchor="t">
+                    <a:lnL w="6350" cap="flat" cmpd="sng" algn="ctr">
+                      <a:solidFill>
+                        <a:srgbClr val="DEDCD7"/>
+                      </a:solidFill>
+                      <a:prstDash val="solid"/>
+                      <a:round/>
+                      <a:headEnd type="none" w="med" len="med"/>
+                      <a:tailEnd type="none" w="med" len="med"/>
+                    </a:lnL>
+                    <a:lnR w="6350" cap="flat" cmpd="sng" algn="ctr">
+                      <a:solidFill>
+                        <a:srgbClr val="DEDCD7"/>
+                      </a:solidFill>
+                      <a:prstDash val="solid"/>
+                      <a:round/>
+                      <a:headEnd type="none" w="med" len="med"/>
+                      <a:tailEnd type="none" w="med" len="med"/>
+                    </a:lnR>
+                    <a:lnT w="6350" cap="flat" cmpd="sng" algn="ctr">
+                      <a:solidFill>
+                        <a:srgbClr val="DEDCD7"/>
+                      </a:solidFill>
+                      <a:prstDash val="solid"/>
+                      <a:round/>
+                      <a:headEnd type="none" w="med" len="med"/>
+                      <a:tailEnd type="none" w="med" len="med"/>
+                    </a:lnT>
+                    <a:lnB w="6350" cap="flat" cmpd="sng" algn="ctr">
+                      <a:solidFill>
+                        <a:srgbClr val="DEDCD7"/>
+                      </a:solidFill>
+                      <a:prstDash val="solid"/>
+                      <a:round/>
+                      <a:headEnd type="none" w="med" len="med"/>
+                      <a:tailEnd type="none" w="med" len="med"/>
+                    </a:lnB>
+                  </a:tcPr>
+                </a:tc>
+                <a:tc>
+                  <a:txBody>
+                    <a:bodyPr/>
+                    <a:lstStyle/>
+                    <a:p>
+                      <a:pPr algn="ctr" indent="0" marL="0">
+                        <a:buNone/>
+                      </a:pPr>
+                      <a:r>
+                        <a:rPr lang="en-US" sz="1000" dirty="0">
+                          <a:solidFill>
+                            <a:srgbClr val="1A1A1A"/>
+                          </a:solidFill>
+                          <a:latin typeface="Calibri" pitchFamily="34" charset="0"/>
+                          <a:ea typeface="Calibri" pitchFamily="34" charset="-122"/>
+                          <a:cs typeface="Calibri" pitchFamily="34" charset="-120"/>
+                        </a:rPr>
+                        <a:t>0.3510</a:t>
+                      </a:r>
+                      <a:endParaRPr lang="en-US" sz="1000" dirty="0">
+                        <a:latin typeface="Calibri" charset="0"/>
+                        <a:ea typeface="Calibri" charset="0"/>
+                        <a:cs typeface="Calibri" charset="0"/>
+                      </a:endParaRPr>
+                    </a:p>
+                  </a:txBody>
+                  <a:tcPr marL="50800" marR="50800" marT="50800" marB="50800" anchor="t">
+                    <a:lnL w="6350" cap="flat" cmpd="sng" algn="ctr">
+                      <a:solidFill>
+                        <a:srgbClr val="DEDCD7"/>
+                      </a:solidFill>
+                      <a:prstDash val="solid"/>
+                      <a:round/>
+                      <a:headEnd type="none" w="med" len="med"/>
+                      <a:tailEnd type="none" w="med" len="med"/>
+                    </a:lnL>
+                    <a:lnR w="6350" cap="flat" cmpd="sng" algn="ctr">
+                      <a:solidFill>
+                        <a:srgbClr val="DEDCD7"/>
+                      </a:solidFill>
+                      <a:prstDash val="solid"/>
+                      <a:round/>
+                      <a:headEnd type="none" w="med" len="med"/>
+                      <a:tailEnd type="none" w="med" len="med"/>
+                    </a:lnR>
+                    <a:lnT w="6350" cap="flat" cmpd="sng" algn="ctr">
+                      <a:solidFill>
+                        <a:srgbClr val="DEDCD7"/>
+                      </a:solidFill>
+                      <a:prstDash val="solid"/>
+                      <a:round/>
+                      <a:headEnd type="none" w="med" len="med"/>
+                      <a:tailEnd type="none" w="med" len="med"/>
+                    </a:lnT>
+                    <a:lnB w="6350" cap="flat" cmpd="sng" algn="ctr">
+                      <a:solidFill>
+                        <a:srgbClr val="DEDCD7"/>
+                      </a:solidFill>
+                      <a:prstDash val="solid"/>
+                      <a:round/>
+                      <a:headEnd type="none" w="med" len="med"/>
+                      <a:tailEnd type="none" w="med" len="med"/>
+                    </a:lnB>
+                  </a:tcPr>
+                </a:tc>
+              </a:tr>
+              <a:tr h="310896">
+                <a:tc>
+                  <a:txBody>
+                    <a:bodyPr/>
+                    <a:lstStyle/>
+                    <a:p>
+                      <a:pPr indent="0" marL="0">
+                        <a:buNone/>
+                      </a:pPr>
+                      <a:r>
+                        <a:rPr lang="en-US" sz="1000" dirty="0">
+                          <a:solidFill>
+                            <a:srgbClr val="1A1A1A"/>
+                          </a:solidFill>
+                          <a:latin typeface="Calibri" pitchFamily="34" charset="0"/>
+                          <a:ea typeface="Calibri" pitchFamily="34" charset="-122"/>
+                          <a:cs typeface="Calibri" pitchFamily="34" charset="-120"/>
+                        </a:rPr>
+                        <a:t>F1 / Dice</a:t>
+                      </a:r>
+                      <a:endParaRPr lang="en-US" sz="1000" dirty="0">
+                        <a:latin typeface="Calibri" charset="0"/>
+                        <a:ea typeface="Calibri" charset="0"/>
+                        <a:cs typeface="Calibri" charset="0"/>
+                      </a:endParaRPr>
+                    </a:p>
+                  </a:txBody>
+                  <a:tcPr marL="50800" marR="50800" marT="50800" marB="50800" anchor="t">
+                    <a:lnL w="6350" cap="flat" cmpd="sng" algn="ctr">
+                      <a:solidFill>
+                        <a:srgbClr val="DEDCD7"/>
+                      </a:solidFill>
+                      <a:prstDash val="solid"/>
+                      <a:round/>
+                      <a:headEnd type="none" w="med" len="med"/>
+                      <a:tailEnd type="none" w="med" len="med"/>
+                    </a:lnL>
+                    <a:lnR w="6350" cap="flat" cmpd="sng" algn="ctr">
+                      <a:solidFill>
+                        <a:srgbClr val="DEDCD7"/>
+                      </a:solidFill>
+                      <a:prstDash val="solid"/>
+                      <a:round/>
+                      <a:headEnd type="none" w="med" len="med"/>
+                      <a:tailEnd type="none" w="med" len="med"/>
+                    </a:lnR>
+                    <a:lnT w="6350" cap="flat" cmpd="sng" algn="ctr">
+                      <a:solidFill>
+                        <a:srgbClr val="DEDCD7"/>
+                      </a:solidFill>
+                      <a:prstDash val="solid"/>
+                      <a:round/>
+                      <a:headEnd type="none" w="med" len="med"/>
+                      <a:tailEnd type="none" w="med" len="med"/>
+                    </a:lnT>
+                    <a:lnB w="6350" cap="flat" cmpd="sng" algn="ctr">
+                      <a:solidFill>
+                        <a:srgbClr val="DEDCD7"/>
+                      </a:solidFill>
+                      <a:prstDash val="solid"/>
+                      <a:round/>
+                      <a:headEnd type="none" w="med" len="med"/>
+                      <a:tailEnd type="none" w="med" len="med"/>
+                    </a:lnB>
+                  </a:tcPr>
+                </a:tc>
+                <a:tc>
+                  <a:txBody>
+                    <a:bodyPr/>
+                    <a:lstStyle/>
+                    <a:p>
+                      <a:pPr algn="ctr" indent="0" marL="0">
+                        <a:buNone/>
+                      </a:pPr>
+                      <a:r>
+                        <a:rPr lang="en-US" sz="1000" dirty="0">
+                          <a:solidFill>
+                            <a:srgbClr val="1A1A1A"/>
+                          </a:solidFill>
+                          <a:latin typeface="Calibri" pitchFamily="34" charset="0"/>
+                          <a:ea typeface="Calibri" pitchFamily="34" charset="-122"/>
+                          <a:cs typeface="Calibri" pitchFamily="34" charset="-120"/>
+                        </a:rPr>
+                        <a:t>0.2976</a:t>
+                      </a:r>
+                      <a:endParaRPr lang="en-US" sz="1000" dirty="0">
+                        <a:latin typeface="Calibri" charset="0"/>
+                        <a:ea typeface="Calibri" charset="0"/>
+                        <a:cs typeface="Calibri" charset="0"/>
+                      </a:endParaRPr>
+                    </a:p>
+                  </a:txBody>
+                  <a:tcPr marL="50800" marR="50800" marT="50800" marB="50800" anchor="t">
+                    <a:lnL w="6350" cap="flat" cmpd="sng" algn="ctr">
+                      <a:solidFill>
+                        <a:srgbClr val="DEDCD7"/>
+                      </a:solidFill>
+                      <a:prstDash val="solid"/>
+                      <a:round/>
+                      <a:headEnd type="none" w="med" len="med"/>
+                      <a:tailEnd type="none" w="med" len="med"/>
+                    </a:lnL>
+                    <a:lnR w="6350" cap="flat" cmpd="sng" algn="ctr">
+                      <a:solidFill>
+                        <a:srgbClr val="DEDCD7"/>
+                      </a:solidFill>
+                      <a:prstDash val="solid"/>
+                      <a:round/>
+                      <a:headEnd type="none" w="med" len="med"/>
+                      <a:tailEnd type="none" w="med" len="med"/>
+                    </a:lnR>
+                    <a:lnT w="6350" cap="flat" cmpd="sng" algn="ctr">
+                      <a:solidFill>
+                        <a:srgbClr val="DEDCD7"/>
+                      </a:solidFill>
+                      <a:prstDash val="solid"/>
+                      <a:round/>
+                      <a:headEnd type="none" w="med" len="med"/>
+                      <a:tailEnd type="none" w="med" len="med"/>
+                    </a:lnT>
+                    <a:lnB w="6350" cap="flat" cmpd="sng" algn="ctr">
+                      <a:solidFill>
+                        <a:srgbClr val="DEDCD7"/>
+                      </a:solidFill>
+                      <a:prstDash val="solid"/>
+                      <a:round/>
+                      <a:headEnd type="none" w="med" len="med"/>
+                      <a:tailEnd type="none" w="med" len="med"/>
+                    </a:lnB>
+                  </a:tcPr>
+                </a:tc>
+                <a:tc>
+                  <a:txBody>
+                    <a:bodyPr/>
+                    <a:lstStyle/>
+                    <a:p>
+                      <a:pPr algn="ctr" indent="0" marL="0">
+                        <a:buNone/>
+                      </a:pPr>
+                      <a:r>
+                        <a:rPr lang="en-US" sz="1000" dirty="0">
+                          <a:solidFill>
+                            <a:srgbClr val="1A1A1A"/>
+                          </a:solidFill>
+                          <a:latin typeface="Calibri" pitchFamily="34" charset="0"/>
+                          <a:ea typeface="Calibri" pitchFamily="34" charset="-122"/>
+                          <a:cs typeface="Calibri" pitchFamily="34" charset="-120"/>
+                        </a:rPr>
+                        <a:t>0.2757</a:t>
+                      </a:r>
+                      <a:endParaRPr lang="en-US" sz="1000" dirty="0">
+                        <a:latin typeface="Calibri" charset="0"/>
+                        <a:ea typeface="Calibri" charset="0"/>
+                        <a:cs typeface="Calibri" charset="0"/>
+                      </a:endParaRPr>
+                    </a:p>
+                  </a:txBody>
+                  <a:tcPr marL="50800" marR="50800" marT="50800" marB="50800" anchor="t">
+                    <a:lnL w="6350" cap="flat" cmpd="sng" algn="ctr">
+                      <a:solidFill>
+                        <a:srgbClr val="DEDCD7"/>
+                      </a:solidFill>
+                      <a:prstDash val="solid"/>
+                      <a:round/>
+                      <a:headEnd type="none" w="med" len="med"/>
+                      <a:tailEnd type="none" w="med" len="med"/>
+                    </a:lnL>
+                    <a:lnR w="6350" cap="flat" cmpd="sng" algn="ctr">
+                      <a:solidFill>
+                        <a:srgbClr val="DEDCD7"/>
+                      </a:solidFill>
+                      <a:prstDash val="solid"/>
+                      <a:round/>
+                      <a:headEnd type="none" w="med" len="med"/>
+                      <a:tailEnd type="none" w="med" len="med"/>
+                    </a:lnR>
+                    <a:lnT w="6350" cap="flat" cmpd="sng" algn="ctr">
+                      <a:solidFill>
+                        <a:srgbClr val="DEDCD7"/>
+                      </a:solidFill>
+                      <a:prstDash val="solid"/>
+                      <a:round/>
+                      <a:headEnd type="none" w="med" len="med"/>
+                      <a:tailEnd type="none" w="med" len="med"/>
+                    </a:lnT>
+                    <a:lnB w="6350" cap="flat" cmpd="sng" algn="ctr">
+                      <a:solidFill>
+                        <a:srgbClr val="DEDCD7"/>
+                      </a:solidFill>
+                      <a:prstDash val="solid"/>
+                      <a:round/>
+                      <a:headEnd type="none" w="med" len="med"/>
+                      <a:tailEnd type="none" w="med" len="med"/>
+                    </a:lnB>
+                  </a:tcPr>
+                </a:tc>
+              </a:tr>
+            </a:tbl>
+          </a:graphicData>
+        </a:graphic>
+      </p:graphicFrame>
       <p:sp>
         <p:nvSpPr>
-          <p:cNvPr id="7" name="Shape 4"/>
+          <p:cNvPr id="8" name="Shape 4"/>
           <p:cNvSpPr/>
           <p:nvPr/>
         </p:nvSpPr>
         <p:spPr>
           <a:xfrm>
-            <a:off x="777240" y="5577840"/>
-            <a:ext cx="10637215" cy="868680"/>
+            <a:off x="7498080" y="3657600"/>
+            <a:ext cx="3913632" cy="1481328"/>
           </a:xfrm>
           <a:prstGeom prst="rect">
             <a:avLst/>
@@ -12802,14 +17437,53 @@
       </p:sp>
       <p:sp>
         <p:nvSpPr>
-          <p:cNvPr id="8" name="Text 5"/>
+          <p:cNvPr id="9" name="Text 5"/>
           <p:cNvSpPr/>
           <p:nvPr/>
         </p:nvSpPr>
         <p:spPr>
           <a:xfrm>
-            <a:off x="1069848" y="5760720"/>
-            <a:ext cx="10051999" cy="566928"/>
+            <a:off x="7680960" y="3822192"/>
+            <a:ext cx="3566160" cy="201168"/>
+          </a:xfrm>
+          <a:prstGeom prst="rect">
+            <a:avLst/>
+          </a:prstGeom>
+          <a:noFill/>
+          <a:ln/>
+        </p:spPr>
+        <p:txBody>
+          <a:bodyPr wrap="square" lIns="0" tIns="0" rIns="0" bIns="0" rtlCol="0" anchor="ctr"/>
+          <a:lstStyle/>
+          <a:p>
+            <a:pPr indent="0" marL="0">
+              <a:buNone/>
+            </a:pPr>
+            <a:r>
+              <a:rPr lang="en-US" sz="1050" b="1" spc="80" kern="0" dirty="0">
+                <a:solidFill>
+                  <a:srgbClr val="1B7A4B"/>
+                </a:solidFill>
+                <a:latin typeface="Calibri" pitchFamily="34" charset="0"/>
+                <a:ea typeface="Calibri" pitchFamily="34" charset="-122"/>
+                <a:cs typeface="Calibri" pitchFamily="34" charset="-120"/>
+              </a:rPr>
+              <a:t>Against the baselines</a:t>
+            </a:r>
+            <a:endParaRPr lang="en-US" sz="1050" dirty="0"/>
+          </a:p>
+        </p:txBody>
+      </p:sp>
+      <p:sp>
+        <p:nvSpPr>
+          <p:cNvPr id="10" name="Text 6"/>
+          <p:cNvSpPr/>
+          <p:nvPr/>
+        </p:nvSpPr>
+        <p:spPr>
+          <a:xfrm>
+            <a:off x="7680960" y="4059936"/>
+            <a:ext cx="3566160" cy="1005840"/>
           </a:xfrm>
           <a:prstGeom prst="rect">
             <a:avLst/>
@@ -12823,12 +17497,12 @@
           <a:p>
             <a:pPr indent="0" marL="0">
               <a:lnSpc>
-                <a:spcPts val="1600"/>
+                <a:spcPts val="1500"/>
               </a:lnSpc>
               <a:buNone/>
             </a:pPr>
             <a:r>
-              <a:rPr lang="en-US" sz="1150" b="1" dirty="0">
+              <a:rPr lang="en-US" sz="1050" dirty="0">
                 <a:solidFill>
                   <a:srgbClr val="1B7A4B"/>
                 </a:solidFill>
@@ -12836,16 +17510,19 @@
                 <a:ea typeface="Calibri" pitchFamily="34" charset="-122"/>
                 <a:cs typeface="Calibri" pitchFamily="34" charset="-120"/>
               </a:rPr>
-              <a:t>0.1718 ± 0.0099</a:t>
+              <a:t>CLIPSeg  0.1849   +0.0216  p=5.2e-07</a:t>
             </a:r>
+            <a:endParaRPr lang="en-US" sz="1050" dirty="0"/>
+          </a:p>
+          <a:p>
             <a:pPr indent="0" marL="0">
               <a:lnSpc>
-                <a:spcPts val="1600"/>
+                <a:spcPts val="1500"/>
               </a:lnSpc>
               <a:buNone/>
             </a:pPr>
             <a:r>
-              <a:rPr lang="en-US" sz="1150" dirty="0">
+              <a:rPr lang="en-US" sz="1050" dirty="0">
                 <a:solidFill>
                   <a:srgbClr val="1B7A4B"/>
                 </a:solidFill>
@@ -12853,16 +17530,19 @@
                 <a:ea typeface="Calibri" pitchFamily="34" charset="-122"/>
                 <a:cs typeface="Calibri" pitchFamily="34" charset="-120"/>
               </a:rPr>
-              <a:t>  —  above the human masks (0.1511) and 93% of CLIPSeg (0.1849), at </a:t>
+              <a:t>Human masks  0.1511   +0.0554</a:t>
             </a:r>
+            <a:endParaRPr lang="en-US" sz="1050" dirty="0"/>
+          </a:p>
+          <a:p>
             <a:pPr indent="0" marL="0">
               <a:lnSpc>
-                <a:spcPts val="1600"/>
+                <a:spcPts val="1500"/>
               </a:lnSpc>
               <a:buNone/>
             </a:pPr>
             <a:r>
-              <a:rPr lang="en-US" sz="1150" b="1" dirty="0">
+              <a:rPr lang="en-US" sz="1050" dirty="0">
                 <a:solidFill>
                   <a:srgbClr val="1B7A4B"/>
                 </a:solidFill>
@@ -12870,16 +17550,112 @@
                 <a:ea typeface="Calibri" pitchFamily="34" charset="-122"/>
                 <a:cs typeface="Calibri" pitchFamily="34" charset="-120"/>
               </a:rPr>
-              <a:t>108× fewer trainable parameters</a:t>
+              <a:t>All 12 seeds clear CLIPSeg.</a:t>
             </a:r>
+            <a:endParaRPr lang="en-US" sz="1050" dirty="0"/>
+          </a:p>
+        </p:txBody>
+      </p:sp>
+      <p:sp>
+        <p:nvSpPr>
+          <p:cNvPr id="11" name="Shape 7"/>
+          <p:cNvSpPr/>
+          <p:nvPr/>
+        </p:nvSpPr>
+        <p:spPr>
+          <a:xfrm>
+            <a:off x="777240" y="5742432"/>
+            <a:ext cx="10637215" cy="731520"/>
+          </a:xfrm>
+          <a:prstGeom prst="rect">
+            <a:avLst/>
+          </a:prstGeom>
+          <a:solidFill>
+            <a:srgbClr val="EAF5EE"/>
+          </a:solidFill>
+          <a:ln/>
+        </p:spPr>
+      </p:sp>
+      <p:sp>
+        <p:nvSpPr>
+          <p:cNvPr id="12" name="Text 8"/>
+          <p:cNvSpPr/>
+          <p:nvPr/>
+        </p:nvSpPr>
+        <p:spPr>
+          <a:xfrm>
+            <a:off x="1069848" y="5888736"/>
+            <a:ext cx="10051999" cy="512064"/>
+          </a:xfrm>
+          <a:prstGeom prst="rect">
+            <a:avLst/>
+          </a:prstGeom>
+          <a:noFill/>
+          <a:ln/>
+        </p:spPr>
+        <p:txBody>
+          <a:bodyPr wrap="square" lIns="0" tIns="0" rIns="0" bIns="0" rtlCol="0" anchor="ctr"/>
+          <a:lstStyle/>
+          <a:p>
             <a:pPr indent="0" marL="0">
               <a:lnSpc>
-                <a:spcPts val="1600"/>
+                <a:spcPts val="1500"/>
               </a:lnSpc>
               <a:buNone/>
             </a:pPr>
             <a:r>
-              <a:rPr lang="en-US" sz="1150" dirty="0">
+              <a:rPr lang="en-US" sz="1100" b="1" dirty="0">
+                <a:solidFill>
+                  <a:srgbClr val="1B7A4B"/>
+                </a:solidFill>
+                <a:latin typeface="Calibri" pitchFamily="34" charset="0"/>
+                <a:ea typeface="Calibri" pitchFamily="34" charset="-122"/>
+                <a:cs typeface="Calibri" pitchFamily="34" charset="-120"/>
+              </a:rPr>
+              <a:t>0.2065 ± 0.0072</a:t>
+            </a:r>
+            <a:pPr indent="0" marL="0">
+              <a:lnSpc>
+                <a:spcPts val="1500"/>
+              </a:lnSpc>
+              <a:buNone/>
+            </a:pPr>
+            <a:r>
+              <a:rPr lang="en-US" sz="1100" dirty="0">
+                <a:solidFill>
+                  <a:srgbClr val="1B7A4B"/>
+                </a:solidFill>
+                <a:latin typeface="Calibri" pitchFamily="34" charset="0"/>
+                <a:ea typeface="Calibri" pitchFamily="34" charset="-122"/>
+                <a:cs typeface="Calibri" pitchFamily="34" charset="-120"/>
+              </a:rPr>
+              <a:t>  —  now above CLIPSeg (0.1849) as well as the human masks, at </a:t>
+            </a:r>
+            <a:pPr indent="0" marL="0">
+              <a:lnSpc>
+                <a:spcPts val="1500"/>
+              </a:lnSpc>
+              <a:buNone/>
+            </a:pPr>
+            <a:r>
+              <a:rPr lang="en-US" sz="1100" b="1" dirty="0">
+                <a:solidFill>
+                  <a:srgbClr val="1B7A4B"/>
+                </a:solidFill>
+                <a:latin typeface="Calibri" pitchFamily="34" charset="0"/>
+                <a:ea typeface="Calibri" pitchFamily="34" charset="-122"/>
+                <a:cs typeface="Calibri" pitchFamily="34" charset="-120"/>
+              </a:rPr>
+              <a:t>32× fewer trainable parameters</a:t>
+            </a:r>
+            <a:pPr indent="0" marL="0">
+              <a:lnSpc>
+                <a:spcPts val="1500"/>
+              </a:lnSpc>
+              <a:buNone/>
+            </a:pPr>
+            <a:r>
+              <a:rPr lang="en-US" sz="1100" dirty="0">
                 <a:solidFill>
                   <a:srgbClr val="1B7A4B"/>
                 </a:solidFill>
@@ -12891,12 +17667,12 @@
             </a:r>
             <a:pPr indent="0" marL="0">
               <a:lnSpc>
-                <a:spcPts val="1600"/>
+                <a:spcPts val="1500"/>
               </a:lnSpc>
               <a:buNone/>
             </a:pPr>
             <a:r>
-              <a:rPr lang="en-US" sz="1150" b="1" dirty="0">
+              <a:rPr lang="en-US" sz="1100" b="1" dirty="0">
                 <a:solidFill>
                   <a:srgbClr val="1B7A4B"/>
                 </a:solidFill>
@@ -12904,16 +17680,16 @@
                 <a:ea typeface="Calibri" pitchFamily="34" charset="-122"/>
                 <a:cs typeface="Calibri" pitchFamily="34" charset="-120"/>
               </a:rPr>
-              <a:t>9.7× lower latency</a:t>
+              <a:t>10.3× lower per-instruction latency</a:t>
             </a:r>
             <a:pPr indent="0" marL="0">
               <a:lnSpc>
-                <a:spcPts val="1600"/>
+                <a:spcPts val="1500"/>
               </a:lnSpc>
               <a:buNone/>
             </a:pPr>
             <a:r>
-              <a:rPr lang="en-US" sz="1150" dirty="0">
+              <a:rPr lang="en-US" sz="1100" dirty="0">
                 <a:solidFill>
                   <a:srgbClr val="1B7A4B"/>
                 </a:solidFill>
@@ -12921,9 +17697,9 @@
                 <a:ea typeface="Calibri" pitchFamily="34" charset="-122"/>
                 <a:cs typeface="Calibri" pitchFamily="34" charset="-120"/>
               </a:rPr>
-              <a:t>.  On insertion we beat CLIPSeg by 71%; the human masks still lead there.</a:t>
+              <a:t>.  Insertion 0.1186 vs CLIPSeg 0.054 — +120%.</a:t>
             </a:r>
-            <a:endParaRPr lang="en-US" sz="1150" dirty="0"/>
+            <a:endParaRPr lang="en-US" sz="1100" dirty="0"/>
           </a:p>
         </p:txBody>
       </p:sp>
@@ -12992,7 +17768,7 @@
                 <a:ea typeface="Calibri" pitchFamily="34" charset="-122"/>
                 <a:cs typeface="Calibri" pitchFamily="34" charset="-120"/>
               </a:rPr>
-              <a:t>ANALYSIS</a:t>
+              <a:t>CONFIGURATION</a:t>
             </a:r>
             <a:endParaRPr lang="en-US" sz="1000" dirty="0"/>
           </a:p>
@@ -13031,7 +17807,7 @@
                 <a:ea typeface="Cambria" pitchFamily="34" charset="-122"/>
                 <a:cs typeface="Cambria" pitchFamily="34" charset="-120"/>
               </a:rPr>
-              <a:t>Cost, controls, and how much headroom is left</a:t>
+              <a:t>Every parameter behind those numbers</a:t>
             </a:r>
             <a:endParaRPr lang="en-US" sz="2600" dirty="0"/>
           </a:p>
@@ -13039,13 +17815,52 @@
       </p:sp>
       <p:sp>
         <p:nvSpPr>
-          <p:cNvPr id="4" name="Shape 2"/>
+          <p:cNvPr id="4" name="Text 2"/>
           <p:cNvSpPr/>
           <p:nvPr/>
         </p:nvSpPr>
         <p:spPr>
           <a:xfrm>
-            <a:off x="777240" y="1188720"/>
+            <a:off x="777240" y="1115568"/>
+            <a:ext cx="10637215" cy="274320"/>
+          </a:xfrm>
+          <a:prstGeom prst="rect">
+            <a:avLst/>
+          </a:prstGeom>
+          <a:noFill/>
+          <a:ln/>
+        </p:spPr>
+        <p:txBody>
+          <a:bodyPr wrap="square" lIns="0" tIns="0" rIns="0" bIns="0" rtlCol="0" anchor="ctr"/>
+          <a:lstStyle/>
+          <a:p>
+            <a:pPr indent="0" marL="0">
+              <a:buNone/>
+            </a:pPr>
+            <a:r>
+              <a:rPr lang="en-US" sz="1200" dirty="0">
+                <a:solidFill>
+                  <a:srgbClr val="6E6E6E"/>
+                </a:solidFill>
+                <a:latin typeface="Calibri" pitchFamily="34" charset="0"/>
+                <a:ea typeface="Calibri" pitchFamily="34" charset="-122"/>
+                <a:cs typeface="Calibri" pitchFamily="34" charset="-120"/>
+              </a:rPr>
+              <a:t>Taken from the source, not from notes</a:t>
+            </a:r>
+            <a:endParaRPr lang="en-US" sz="1200" dirty="0"/>
+          </a:p>
+        </p:txBody>
+      </p:sp>
+      <p:sp>
+        <p:nvSpPr>
+          <p:cNvPr id="5" name="Shape 3"/>
+          <p:cNvSpPr/>
+          <p:nvPr/>
+        </p:nvSpPr>
+        <p:spPr>
+          <a:xfrm>
+            <a:off x="777240" y="1444752"/>
             <a:ext cx="10637215" cy="10973"/>
           </a:xfrm>
           <a:prstGeom prst="rect">
@@ -13057,30 +17872,6 @@
           <a:ln/>
         </p:spPr>
       </p:sp>
-      <p:pic>
-        <p:nvPicPr>
-          <p:cNvPr id="5" name="Image 0" descr="img/analysis.png">    </p:cNvPr>
-          <p:cNvPicPr>
-            <a:picLocks noChangeAspect="1"/>
-          </p:cNvPicPr>
-          <p:nvPr/>
-        </p:nvPicPr>
-        <p:blipFill>
-          <a:blip r:embed="rId1"/>
-          <a:stretch>
-            <a:fillRect/>
-          </a:stretch>
-        </p:blipFill>
-        <p:spPr>
-          <a:xfrm>
-            <a:off x="777240" y="1417320"/>
-            <a:ext cx="10637215" cy="3184795"/>
-          </a:xfrm>
-          <a:prstGeom prst="rect">
-            <a:avLst/>
-          </a:prstGeom>
-        </p:spPr>
-      </p:pic>
       <p:graphicFrame>
         <p:nvGraphicFramePr>
           <p:cNvPr id="8" name="Table 0"/>
@@ -13096,7 +17887,7 @@
           </p:nvPr>
         </p:nvGraphicFramePr>
         <p:xfrm>
-          <a:off x="777240" y="4846320"/>
+          <a:off x="777240" y="1627632"/>
           <a:ext cx="10637215" cy="914400"/>
         </p:xfrm>
         <a:graphic>
@@ -13104,10 +17895,11 @@
             <a:tbl>
               <a:tblPr/>
               <a:tblGrid>
-                <a:gridCol w="2377440"/>
-                <a:gridCol w="8257032"/>
+                <a:gridCol w="1828800"/>
+                <a:gridCol w="2834640"/>
+                <a:gridCol w="5971032"/>
               </a:tblGrid>
-              <a:tr h="384048">
+              <a:tr h="324612">
                 <a:tc>
                   <a:txBody>
                     <a:bodyPr/>
@@ -13125,7 +17917,7 @@
                           <a:ea typeface="Calibri" pitchFamily="34" charset="-122"/>
                           <a:cs typeface="Calibri" pitchFamily="34" charset="-120"/>
                         </a:rPr>
-                        <a:t>Cost amortises</a:t>
+                        <a:t>group</a:t>
                       </a:r>
                       <a:endParaRPr lang="en-US" sz="1000" dirty="0">
                         <a:latin typeface="Calibri" charset="0"/>
@@ -13193,7 +17985,7 @@
                           <a:ea typeface="Calibri" pitchFamily="34" charset="-122"/>
                           <a:cs typeface="Calibri" pitchFamily="34" charset="-120"/>
                         </a:rPr>
-                        <a:t>break-even at N = 2 instructions on one image; 9.0× at N = 100, because the backbone runs once and each instruction costs 5.6 ms</a:t>
+                        <a:t>parameter</a:t>
                       </a:r>
                       <a:endParaRPr lang="en-US" sz="1000" dirty="0">
                         <a:latin typeface="Calibri" charset="0"/>
@@ -13244,8 +18036,76 @@
                     </a:solidFill>
                   </a:tcPr>
                 </a:tc>
+                <a:tc>
+                  <a:txBody>
+                    <a:bodyPr/>
+                    <a:lstStyle/>
+                    <a:p>
+                      <a:pPr indent="0" marL="0">
+                        <a:buNone/>
+                      </a:pPr>
+                      <a:r>
+                        <a:rPr lang="en-US" sz="1000" b="1" dirty="0">
+                          <a:solidFill>
+                            <a:srgbClr val="1A1A1A"/>
+                          </a:solidFill>
+                          <a:latin typeface="Calibri" pitchFamily="34" charset="0"/>
+                          <a:ea typeface="Calibri" pitchFamily="34" charset="-122"/>
+                          <a:cs typeface="Calibri" pitchFamily="34" charset="-120"/>
+                        </a:rPr>
+                        <a:t>value</a:t>
+                      </a:r>
+                      <a:endParaRPr lang="en-US" sz="1000" dirty="0">
+                        <a:latin typeface="Calibri" charset="0"/>
+                        <a:ea typeface="Calibri" charset="0"/>
+                        <a:cs typeface="Calibri" charset="0"/>
+                      </a:endParaRPr>
+                    </a:p>
+                  </a:txBody>
+                  <a:tcPr marL="50800" marR="50800" marT="50800" marB="50800" anchor="t">
+                    <a:lnL w="6350" cap="flat" cmpd="sng" algn="ctr">
+                      <a:solidFill>
+                        <a:srgbClr val="DEDCD7"/>
+                      </a:solidFill>
+                      <a:prstDash val="solid"/>
+                      <a:round/>
+                      <a:headEnd type="none" w="med" len="med"/>
+                      <a:tailEnd type="none" w="med" len="med"/>
+                    </a:lnL>
+                    <a:lnR w="6350" cap="flat" cmpd="sng" algn="ctr">
+                      <a:solidFill>
+                        <a:srgbClr val="DEDCD7"/>
+                      </a:solidFill>
+                      <a:prstDash val="solid"/>
+                      <a:round/>
+                      <a:headEnd type="none" w="med" len="med"/>
+                      <a:tailEnd type="none" w="med" len="med"/>
+                    </a:lnR>
+                    <a:lnT w="6350" cap="flat" cmpd="sng" algn="ctr">
+                      <a:solidFill>
+                        <a:srgbClr val="DEDCD7"/>
+                      </a:solidFill>
+                      <a:prstDash val="solid"/>
+                      <a:round/>
+                      <a:headEnd type="none" w="med" len="med"/>
+                      <a:tailEnd type="none" w="med" len="med"/>
+                    </a:lnT>
+                    <a:lnB w="6350" cap="flat" cmpd="sng" algn="ctr">
+                      <a:solidFill>
+                        <a:srgbClr val="DEDCD7"/>
+                      </a:solidFill>
+                      <a:prstDash val="solid"/>
+                      <a:round/>
+                      <a:headEnd type="none" w="med" len="med"/>
+                      <a:tailEnd type="none" w="med" len="med"/>
+                    </a:lnB>
+                    <a:solidFill>
+                      <a:srgbClr val="F6F5F2"/>
+                    </a:solidFill>
+                  </a:tcPr>
+                </a:tc>
               </a:tr>
-              <a:tr h="384048">
+              <a:tr h="324612">
                 <a:tc>
                   <a:txBody>
                     <a:bodyPr/>
@@ -13263,7 +18123,7 @@
                           <a:ea typeface="Calibri" pitchFamily="34" charset="-122"/>
                           <a:cs typeface="Calibri" pitchFamily="34" charset="-120"/>
                         </a:rPr>
-                        <a:t>Controls included</a:t>
+                        <a:t>Supervision</a:t>
                       </a:r>
                       <a:endParaRPr lang="en-US" sz="1000" dirty="0">
                         <a:latin typeface="Calibri" charset="0"/>
@@ -13328,7 +18188,7 @@
                           <a:ea typeface="Calibri" pitchFamily="34" charset="-122"/>
                           <a:cs typeface="Calibri" pitchFamily="34" charset="-120"/>
                         </a:rPr>
-                        <a:t>the spatial field is significant (p = 0.0070); the geometric basis is not (p = 0.33 against a random control) and was dropped</a:t>
+                        <a:t>ΔE metric / threshold</a:t>
                       </a:r>
                       <a:endParaRPr lang="en-US" sz="1000" dirty="0">
                         <a:latin typeface="Calibri" charset="0"/>
@@ -13376,8 +18236,73 @@
                     </a:lnB>
                   </a:tcPr>
                 </a:tc>
+                <a:tc>
+                  <a:txBody>
+                    <a:bodyPr/>
+                    <a:lstStyle/>
+                    <a:p>
+                      <a:pPr indent="0" marL="0">
+                        <a:buNone/>
+                      </a:pPr>
+                      <a:r>
+                        <a:rPr lang="en-US" sz="1000" dirty="0">
+                          <a:solidFill>
+                            <a:srgbClr val="1A1A1A"/>
+                          </a:solidFill>
+                          <a:latin typeface="Calibri" pitchFamily="34" charset="0"/>
+                          <a:ea typeface="Calibri" pitchFamily="34" charset="-122"/>
+                          <a:cs typeface="Calibri" pitchFamily="34" charset="-120"/>
+                        </a:rPr>
+                        <a:t>CIE76 in L*a*b*  ·  12.0</a:t>
+                      </a:r>
+                      <a:endParaRPr lang="en-US" sz="1000" dirty="0">
+                        <a:latin typeface="Calibri" charset="0"/>
+                        <a:ea typeface="Calibri" charset="0"/>
+                        <a:cs typeface="Calibri" charset="0"/>
+                      </a:endParaRPr>
+                    </a:p>
+                  </a:txBody>
+                  <a:tcPr marL="50800" marR="50800" marT="50800" marB="50800" anchor="t">
+                    <a:lnL w="6350" cap="flat" cmpd="sng" algn="ctr">
+                      <a:solidFill>
+                        <a:srgbClr val="DEDCD7"/>
+                      </a:solidFill>
+                      <a:prstDash val="solid"/>
+                      <a:round/>
+                      <a:headEnd type="none" w="med" len="med"/>
+                      <a:tailEnd type="none" w="med" len="med"/>
+                    </a:lnL>
+                    <a:lnR w="6350" cap="flat" cmpd="sng" algn="ctr">
+                      <a:solidFill>
+                        <a:srgbClr val="DEDCD7"/>
+                      </a:solidFill>
+                      <a:prstDash val="solid"/>
+                      <a:round/>
+                      <a:headEnd type="none" w="med" len="med"/>
+                      <a:tailEnd type="none" w="med" len="med"/>
+                    </a:lnR>
+                    <a:lnT w="6350" cap="flat" cmpd="sng" algn="ctr">
+                      <a:solidFill>
+                        <a:srgbClr val="DEDCD7"/>
+                      </a:solidFill>
+                      <a:prstDash val="solid"/>
+                      <a:round/>
+                      <a:headEnd type="none" w="med" len="med"/>
+                      <a:tailEnd type="none" w="med" len="med"/>
+                    </a:lnT>
+                    <a:lnB w="6350" cap="flat" cmpd="sng" algn="ctr">
+                      <a:solidFill>
+                        <a:srgbClr val="DEDCD7"/>
+                      </a:solidFill>
+                      <a:prstDash val="solid"/>
+                      <a:round/>
+                      <a:headEnd type="none" w="med" len="med"/>
+                      <a:tailEnd type="none" w="med" len="med"/>
+                    </a:lnB>
+                  </a:tcPr>
+                </a:tc>
               </a:tr>
-              <a:tr h="384048">
+              <a:tr h="324612">
                 <a:tc>
                   <a:txBody>
                     <a:bodyPr/>
@@ -13386,6 +18311,60 @@
                       <a:pPr indent="0" marL="0">
                         <a:buNone/>
                       </a:pPr>
+                      <a:endParaRPr lang="en-US" sz="1000" dirty="0">
+                        <a:latin typeface="Calibri" charset="0"/>
+                        <a:ea typeface="Calibri" charset="0"/>
+                        <a:cs typeface="Calibri" charset="0"/>
+                      </a:endParaRPr>
+                    </a:p>
+                  </a:txBody>
+                  <a:tcPr marL="50800" marR="50800" marT="50800" marB="50800" anchor="t">
+                    <a:lnL w="6350" cap="flat" cmpd="sng" algn="ctr">
+                      <a:solidFill>
+                        <a:srgbClr val="DEDCD7"/>
+                      </a:solidFill>
+                      <a:prstDash val="solid"/>
+                      <a:round/>
+                      <a:headEnd type="none" w="med" len="med"/>
+                      <a:tailEnd type="none" w="med" len="med"/>
+                    </a:lnL>
+                    <a:lnR w="6350" cap="flat" cmpd="sng" algn="ctr">
+                      <a:solidFill>
+                        <a:srgbClr val="DEDCD7"/>
+                      </a:solidFill>
+                      <a:prstDash val="solid"/>
+                      <a:round/>
+                      <a:headEnd type="none" w="med" len="med"/>
+                      <a:tailEnd type="none" w="med" len="med"/>
+                    </a:lnR>
+                    <a:lnT w="6350" cap="flat" cmpd="sng" algn="ctr">
+                      <a:solidFill>
+                        <a:srgbClr val="DEDCD7"/>
+                      </a:solidFill>
+                      <a:prstDash val="solid"/>
+                      <a:round/>
+                      <a:headEnd type="none" w="med" len="med"/>
+                      <a:tailEnd type="none" w="med" len="med"/>
+                    </a:lnT>
+                    <a:lnB w="6350" cap="flat" cmpd="sng" algn="ctr">
+                      <a:solidFill>
+                        <a:srgbClr val="DEDCD7"/>
+                      </a:solidFill>
+                      <a:prstDash val="solid"/>
+                      <a:round/>
+                      <a:headEnd type="none" w="med" len="med"/>
+                      <a:tailEnd type="none" w="med" len="med"/>
+                    </a:lnB>
+                  </a:tcPr>
+                </a:tc>
+                <a:tc>
+                  <a:txBody>
+                    <a:bodyPr/>
+                    <a:lstStyle/>
+                    <a:p>
+                      <a:pPr indent="0" marL="0">
+                        <a:buNone/>
+                      </a:pPr>
                       <a:r>
                         <a:rPr lang="en-US" sz="1000" dirty="0">
                           <a:solidFill>
@@ -13395,7 +18374,7 @@
                           <a:ea typeface="Calibri" pitchFamily="34" charset="-122"/>
                           <a:cs typeface="Calibri" pitchFamily="34" charset="-120"/>
                         </a:rPr>
-                        <a:t>Headroom is known</a:t>
+                        <a:t>morph kernel · min component</a:t>
                       </a:r>
                       <a:endParaRPr lang="en-US" sz="1000" dirty="0">
                         <a:latin typeface="Calibri" charset="0"/>
@@ -13460,7 +18439,1725 @@
                           <a:ea typeface="Calibri" pitchFamily="34" charset="-122"/>
                           <a:cs typeface="Calibri" pitchFamily="34" charset="-120"/>
                         </a:rPr>
-                        <a:t>we reach 44% / 50% / 42% of the least-squares ceiling — the bound on any coefficient predictor over this basis</a:t>
+                        <a:t>5×5  ·  40 px</a:t>
+                      </a:r>
+                      <a:endParaRPr lang="en-US" sz="1000" dirty="0">
+                        <a:latin typeface="Calibri" charset="0"/>
+                        <a:ea typeface="Calibri" charset="0"/>
+                        <a:cs typeface="Calibri" charset="0"/>
+                      </a:endParaRPr>
+                    </a:p>
+                  </a:txBody>
+                  <a:tcPr marL="50800" marR="50800" marT="50800" marB="50800" anchor="t">
+                    <a:lnL w="6350" cap="flat" cmpd="sng" algn="ctr">
+                      <a:solidFill>
+                        <a:srgbClr val="DEDCD7"/>
+                      </a:solidFill>
+                      <a:prstDash val="solid"/>
+                      <a:round/>
+                      <a:headEnd type="none" w="med" len="med"/>
+                      <a:tailEnd type="none" w="med" len="med"/>
+                    </a:lnL>
+                    <a:lnR w="6350" cap="flat" cmpd="sng" algn="ctr">
+                      <a:solidFill>
+                        <a:srgbClr val="DEDCD7"/>
+                      </a:solidFill>
+                      <a:prstDash val="solid"/>
+                      <a:round/>
+                      <a:headEnd type="none" w="med" len="med"/>
+                      <a:tailEnd type="none" w="med" len="med"/>
+                    </a:lnR>
+                    <a:lnT w="6350" cap="flat" cmpd="sng" algn="ctr">
+                      <a:solidFill>
+                        <a:srgbClr val="DEDCD7"/>
+                      </a:solidFill>
+                      <a:prstDash val="solid"/>
+                      <a:round/>
+                      <a:headEnd type="none" w="med" len="med"/>
+                      <a:tailEnd type="none" w="med" len="med"/>
+                    </a:lnT>
+                    <a:lnB w="6350" cap="flat" cmpd="sng" algn="ctr">
+                      <a:solidFill>
+                        <a:srgbClr val="DEDCD7"/>
+                      </a:solidFill>
+                      <a:prstDash val="solid"/>
+                      <a:round/>
+                      <a:headEnd type="none" w="med" len="med"/>
+                      <a:tailEnd type="none" w="med" len="med"/>
+                    </a:lnB>
+                  </a:tcPr>
+                </a:tc>
+              </a:tr>
+              <a:tr h="324612">
+                <a:tc>
+                  <a:txBody>
+                    <a:bodyPr/>
+                    <a:lstStyle/>
+                    <a:p>
+                      <a:pPr indent="0" marL="0">
+                        <a:buNone/>
+                      </a:pPr>
+                      <a:endParaRPr lang="en-US" sz="1000" dirty="0">
+                        <a:latin typeface="Calibri" charset="0"/>
+                        <a:ea typeface="Calibri" charset="0"/>
+                        <a:cs typeface="Calibri" charset="0"/>
+                      </a:endParaRPr>
+                    </a:p>
+                  </a:txBody>
+                  <a:tcPr marL="50800" marR="50800" marT="50800" marB="50800" anchor="t">
+                    <a:lnL w="6350" cap="flat" cmpd="sng" algn="ctr">
+                      <a:solidFill>
+                        <a:srgbClr val="DEDCD7"/>
+                      </a:solidFill>
+                      <a:prstDash val="solid"/>
+                      <a:round/>
+                      <a:headEnd type="none" w="med" len="med"/>
+                      <a:tailEnd type="none" w="med" len="med"/>
+                    </a:lnL>
+                    <a:lnR w="6350" cap="flat" cmpd="sng" algn="ctr">
+                      <a:solidFill>
+                        <a:srgbClr val="DEDCD7"/>
+                      </a:solidFill>
+                      <a:prstDash val="solid"/>
+                      <a:round/>
+                      <a:headEnd type="none" w="med" len="med"/>
+                      <a:tailEnd type="none" w="med" len="med"/>
+                    </a:lnR>
+                    <a:lnT w="6350" cap="flat" cmpd="sng" algn="ctr">
+                      <a:solidFill>
+                        <a:srgbClr val="DEDCD7"/>
+                      </a:solidFill>
+                      <a:prstDash val="solid"/>
+                      <a:round/>
+                      <a:headEnd type="none" w="med" len="med"/>
+                      <a:tailEnd type="none" w="med" len="med"/>
+                    </a:lnT>
+                    <a:lnB w="6350" cap="flat" cmpd="sng" algn="ctr">
+                      <a:solidFill>
+                        <a:srgbClr val="DEDCD7"/>
+                      </a:solidFill>
+                      <a:prstDash val="solid"/>
+                      <a:round/>
+                      <a:headEnd type="none" w="med" len="med"/>
+                      <a:tailEnd type="none" w="med" len="med"/>
+                    </a:lnB>
+                  </a:tcPr>
+                </a:tc>
+                <a:tc>
+                  <a:txBody>
+                    <a:bodyPr/>
+                    <a:lstStyle/>
+                    <a:p>
+                      <a:pPr indent="0" marL="0">
+                        <a:buNone/>
+                      </a:pPr>
+                      <a:r>
+                        <a:rPr lang="en-US" sz="1000" dirty="0">
+                          <a:solidFill>
+                            <a:srgbClr val="1A1A1A"/>
+                          </a:solidFill>
+                          <a:latin typeface="Calibri" pitchFamily="34" charset="0"/>
+                          <a:ea typeface="Calibri" pitchFamily="34" charset="-122"/>
+                          <a:cs typeface="Calibri" pitchFamily="34" charset="-120"/>
+                        </a:rPr>
+                        <a:t>sample filter (changed area)</a:t>
+                      </a:r>
+                      <a:endParaRPr lang="en-US" sz="1000" dirty="0">
+                        <a:latin typeface="Calibri" charset="0"/>
+                        <a:ea typeface="Calibri" charset="0"/>
+                        <a:cs typeface="Calibri" charset="0"/>
+                      </a:endParaRPr>
+                    </a:p>
+                  </a:txBody>
+                  <a:tcPr marL="50800" marR="50800" marT="50800" marB="50800" anchor="t">
+                    <a:lnL w="6350" cap="flat" cmpd="sng" algn="ctr">
+                      <a:solidFill>
+                        <a:srgbClr val="DEDCD7"/>
+                      </a:solidFill>
+                      <a:prstDash val="solid"/>
+                      <a:round/>
+                      <a:headEnd type="none" w="med" len="med"/>
+                      <a:tailEnd type="none" w="med" len="med"/>
+                    </a:lnL>
+                    <a:lnR w="6350" cap="flat" cmpd="sng" algn="ctr">
+                      <a:solidFill>
+                        <a:srgbClr val="DEDCD7"/>
+                      </a:solidFill>
+                      <a:prstDash val="solid"/>
+                      <a:round/>
+                      <a:headEnd type="none" w="med" len="med"/>
+                      <a:tailEnd type="none" w="med" len="med"/>
+                    </a:lnR>
+                    <a:lnT w="6350" cap="flat" cmpd="sng" algn="ctr">
+                      <a:solidFill>
+                        <a:srgbClr val="DEDCD7"/>
+                      </a:solidFill>
+                      <a:prstDash val="solid"/>
+                      <a:round/>
+                      <a:headEnd type="none" w="med" len="med"/>
+                      <a:tailEnd type="none" w="med" len="med"/>
+                    </a:lnT>
+                    <a:lnB w="6350" cap="flat" cmpd="sng" algn="ctr">
+                      <a:solidFill>
+                        <a:srgbClr val="DEDCD7"/>
+                      </a:solidFill>
+                      <a:prstDash val="solid"/>
+                      <a:round/>
+                      <a:headEnd type="none" w="med" len="med"/>
+                      <a:tailEnd type="none" w="med" len="med"/>
+                    </a:lnB>
+                  </a:tcPr>
+                </a:tc>
+                <a:tc>
+                  <a:txBody>
+                    <a:bodyPr/>
+                    <a:lstStyle/>
+                    <a:p>
+                      <a:pPr indent="0" marL="0">
+                        <a:buNone/>
+                      </a:pPr>
+                      <a:r>
+                        <a:rPr lang="en-US" sz="1000" dirty="0">
+                          <a:solidFill>
+                            <a:srgbClr val="1A1A1A"/>
+                          </a:solidFill>
+                          <a:latin typeface="Calibri" pitchFamily="34" charset="0"/>
+                          <a:ea typeface="Calibri" pitchFamily="34" charset="-122"/>
+                          <a:cs typeface="Calibri" pitchFamily="34" charset="-120"/>
+                        </a:rPr>
+                        <a:t>0.4% – 45%</a:t>
+                      </a:r>
+                      <a:endParaRPr lang="en-US" sz="1000" dirty="0">
+                        <a:latin typeface="Calibri" charset="0"/>
+                        <a:ea typeface="Calibri" charset="0"/>
+                        <a:cs typeface="Calibri" charset="0"/>
+                      </a:endParaRPr>
+                    </a:p>
+                  </a:txBody>
+                  <a:tcPr marL="50800" marR="50800" marT="50800" marB="50800" anchor="t">
+                    <a:lnL w="6350" cap="flat" cmpd="sng" algn="ctr">
+                      <a:solidFill>
+                        <a:srgbClr val="DEDCD7"/>
+                      </a:solidFill>
+                      <a:prstDash val="solid"/>
+                      <a:round/>
+                      <a:headEnd type="none" w="med" len="med"/>
+                      <a:tailEnd type="none" w="med" len="med"/>
+                    </a:lnL>
+                    <a:lnR w="6350" cap="flat" cmpd="sng" algn="ctr">
+                      <a:solidFill>
+                        <a:srgbClr val="DEDCD7"/>
+                      </a:solidFill>
+                      <a:prstDash val="solid"/>
+                      <a:round/>
+                      <a:headEnd type="none" w="med" len="med"/>
+                      <a:tailEnd type="none" w="med" len="med"/>
+                    </a:lnR>
+                    <a:lnT w="6350" cap="flat" cmpd="sng" algn="ctr">
+                      <a:solidFill>
+                        <a:srgbClr val="DEDCD7"/>
+                      </a:solidFill>
+                      <a:prstDash val="solid"/>
+                      <a:round/>
+                      <a:headEnd type="none" w="med" len="med"/>
+                      <a:tailEnd type="none" w="med" len="med"/>
+                    </a:lnT>
+                    <a:lnB w="6350" cap="flat" cmpd="sng" algn="ctr">
+                      <a:solidFill>
+                        <a:srgbClr val="DEDCD7"/>
+                      </a:solidFill>
+                      <a:prstDash val="solid"/>
+                      <a:round/>
+                      <a:headEnd type="none" w="med" len="med"/>
+                      <a:tailEnd type="none" w="med" len="med"/>
+                    </a:lnB>
+                  </a:tcPr>
+                </a:tc>
+              </a:tr>
+              <a:tr h="324612">
+                <a:tc>
+                  <a:txBody>
+                    <a:bodyPr/>
+                    <a:lstStyle/>
+                    <a:p>
+                      <a:pPr indent="0" marL="0">
+                        <a:buNone/>
+                      </a:pPr>
+                      <a:r>
+                        <a:rPr lang="en-US" sz="1000" dirty="0">
+                          <a:solidFill>
+                            <a:srgbClr val="1A1A1A"/>
+                          </a:solidFill>
+                          <a:latin typeface="Calibri" pitchFamily="34" charset="0"/>
+                          <a:ea typeface="Calibri" pitchFamily="34" charset="-122"/>
+                          <a:cs typeface="Calibri" pitchFamily="34" charset="-120"/>
+                        </a:rPr>
+                        <a:t>Representation</a:t>
+                      </a:r>
+                      <a:endParaRPr lang="en-US" sz="1000" dirty="0">
+                        <a:latin typeface="Calibri" charset="0"/>
+                        <a:ea typeface="Calibri" charset="0"/>
+                        <a:cs typeface="Calibri" charset="0"/>
+                      </a:endParaRPr>
+                    </a:p>
+                  </a:txBody>
+                  <a:tcPr marL="50800" marR="50800" marT="50800" marB="50800" anchor="t">
+                    <a:lnL w="6350" cap="flat" cmpd="sng" algn="ctr">
+                      <a:solidFill>
+                        <a:srgbClr val="DEDCD7"/>
+                      </a:solidFill>
+                      <a:prstDash val="solid"/>
+                      <a:round/>
+                      <a:headEnd type="none" w="med" len="med"/>
+                      <a:tailEnd type="none" w="med" len="med"/>
+                    </a:lnL>
+                    <a:lnR w="6350" cap="flat" cmpd="sng" algn="ctr">
+                      <a:solidFill>
+                        <a:srgbClr val="DEDCD7"/>
+                      </a:solidFill>
+                      <a:prstDash val="solid"/>
+                      <a:round/>
+                      <a:headEnd type="none" w="med" len="med"/>
+                      <a:tailEnd type="none" w="med" len="med"/>
+                    </a:lnR>
+                    <a:lnT w="6350" cap="flat" cmpd="sng" algn="ctr">
+                      <a:solidFill>
+                        <a:srgbClr val="DEDCD7"/>
+                      </a:solidFill>
+                      <a:prstDash val="solid"/>
+                      <a:round/>
+                      <a:headEnd type="none" w="med" len="med"/>
+                      <a:tailEnd type="none" w="med" len="med"/>
+                    </a:lnT>
+                    <a:lnB w="6350" cap="flat" cmpd="sng" algn="ctr">
+                      <a:solidFill>
+                        <a:srgbClr val="DEDCD7"/>
+                      </a:solidFill>
+                      <a:prstDash val="solid"/>
+                      <a:round/>
+                      <a:headEnd type="none" w="med" len="med"/>
+                      <a:tailEnd type="none" w="med" len="med"/>
+                    </a:lnB>
+                  </a:tcPr>
+                </a:tc>
+                <a:tc>
+                  <a:txBody>
+                    <a:bodyPr/>
+                    <a:lstStyle/>
+                    <a:p>
+                      <a:pPr indent="0" marL="0">
+                        <a:buNone/>
+                      </a:pPr>
+                      <a:r>
+                        <a:rPr lang="en-US" sz="1000" dirty="0">
+                          <a:solidFill>
+                            <a:srgbClr val="1A1A1A"/>
+                          </a:solidFill>
+                          <a:latin typeface="Calibri" pitchFamily="34" charset="0"/>
+                          <a:ea typeface="Calibri" pitchFamily="34" charset="-122"/>
+                          <a:cs typeface="Calibri" pitchFamily="34" charset="-120"/>
+                        </a:rPr>
+                        <a:t>input · prototypes</a:t>
+                      </a:r>
+                      <a:endParaRPr lang="en-US" sz="1000" dirty="0">
+                        <a:latin typeface="Calibri" charset="0"/>
+                        <a:ea typeface="Calibri" charset="0"/>
+                        <a:cs typeface="Calibri" charset="0"/>
+                      </a:endParaRPr>
+                    </a:p>
+                  </a:txBody>
+                  <a:tcPr marL="50800" marR="50800" marT="50800" marB="50800" anchor="t">
+                    <a:lnL w="6350" cap="flat" cmpd="sng" algn="ctr">
+                      <a:solidFill>
+                        <a:srgbClr val="DEDCD7"/>
+                      </a:solidFill>
+                      <a:prstDash val="solid"/>
+                      <a:round/>
+                      <a:headEnd type="none" w="med" len="med"/>
+                      <a:tailEnd type="none" w="med" len="med"/>
+                    </a:lnL>
+                    <a:lnR w="6350" cap="flat" cmpd="sng" algn="ctr">
+                      <a:solidFill>
+                        <a:srgbClr val="DEDCD7"/>
+                      </a:solidFill>
+                      <a:prstDash val="solid"/>
+                      <a:round/>
+                      <a:headEnd type="none" w="med" len="med"/>
+                      <a:tailEnd type="none" w="med" len="med"/>
+                    </a:lnR>
+                    <a:lnT w="6350" cap="flat" cmpd="sng" algn="ctr">
+                      <a:solidFill>
+                        <a:srgbClr val="DEDCD7"/>
+                      </a:solidFill>
+                      <a:prstDash val="solid"/>
+                      <a:round/>
+                      <a:headEnd type="none" w="med" len="med"/>
+                      <a:tailEnd type="none" w="med" len="med"/>
+                    </a:lnT>
+                    <a:lnB w="6350" cap="flat" cmpd="sng" algn="ctr">
+                      <a:solidFill>
+                        <a:srgbClr val="DEDCD7"/>
+                      </a:solidFill>
+                      <a:prstDash val="solid"/>
+                      <a:round/>
+                      <a:headEnd type="none" w="med" len="med"/>
+                      <a:tailEnd type="none" w="med" len="med"/>
+                    </a:lnB>
+                  </a:tcPr>
+                </a:tc>
+                <a:tc>
+                  <a:txBody>
+                    <a:bodyPr/>
+                    <a:lstStyle/>
+                    <a:p>
+                      <a:pPr indent="0" marL="0">
+                        <a:buNone/>
+                      </a:pPr>
+                      <a:r>
+                        <a:rPr lang="en-US" sz="1000" dirty="0">
+                          <a:solidFill>
+                            <a:srgbClr val="1A1A1A"/>
+                          </a:solidFill>
+                          <a:latin typeface="Calibri" pitchFamily="34" charset="0"/>
+                          <a:ea typeface="Calibri" pitchFamily="34" charset="-122"/>
+                          <a:cs typeface="Calibri" pitchFamily="34" charset="-120"/>
+                        </a:rPr>
+                        <a:t>640×640  ·  32 at 160×160</a:t>
+                      </a:r>
+                      <a:endParaRPr lang="en-US" sz="1000" dirty="0">
+                        <a:latin typeface="Calibri" charset="0"/>
+                        <a:ea typeface="Calibri" charset="0"/>
+                        <a:cs typeface="Calibri" charset="0"/>
+                      </a:endParaRPr>
+                    </a:p>
+                  </a:txBody>
+                  <a:tcPr marL="50800" marR="50800" marT="50800" marB="50800" anchor="t">
+                    <a:lnL w="6350" cap="flat" cmpd="sng" algn="ctr">
+                      <a:solidFill>
+                        <a:srgbClr val="DEDCD7"/>
+                      </a:solidFill>
+                      <a:prstDash val="solid"/>
+                      <a:round/>
+                      <a:headEnd type="none" w="med" len="med"/>
+                      <a:tailEnd type="none" w="med" len="med"/>
+                    </a:lnL>
+                    <a:lnR w="6350" cap="flat" cmpd="sng" algn="ctr">
+                      <a:solidFill>
+                        <a:srgbClr val="DEDCD7"/>
+                      </a:solidFill>
+                      <a:prstDash val="solid"/>
+                      <a:round/>
+                      <a:headEnd type="none" w="med" len="med"/>
+                      <a:tailEnd type="none" w="med" len="med"/>
+                    </a:lnR>
+                    <a:lnT w="6350" cap="flat" cmpd="sng" algn="ctr">
+                      <a:solidFill>
+                        <a:srgbClr val="DEDCD7"/>
+                      </a:solidFill>
+                      <a:prstDash val="solid"/>
+                      <a:round/>
+                      <a:headEnd type="none" w="med" len="med"/>
+                      <a:tailEnd type="none" w="med" len="med"/>
+                    </a:lnT>
+                    <a:lnB w="6350" cap="flat" cmpd="sng" algn="ctr">
+                      <a:solidFill>
+                        <a:srgbClr val="DEDCD7"/>
+                      </a:solidFill>
+                      <a:prstDash val="solid"/>
+                      <a:round/>
+                      <a:headEnd type="none" w="med" len="med"/>
+                      <a:tailEnd type="none" w="med" len="med"/>
+                    </a:lnB>
+                  </a:tcPr>
+                </a:tc>
+              </a:tr>
+              <a:tr h="324612">
+                <a:tc>
+                  <a:txBody>
+                    <a:bodyPr/>
+                    <a:lstStyle/>
+                    <a:p>
+                      <a:pPr indent="0" marL="0">
+                        <a:buNone/>
+                      </a:pPr>
+                      <a:endParaRPr lang="en-US" sz="1000" dirty="0">
+                        <a:latin typeface="Calibri" charset="0"/>
+                        <a:ea typeface="Calibri" charset="0"/>
+                        <a:cs typeface="Calibri" charset="0"/>
+                      </a:endParaRPr>
+                    </a:p>
+                  </a:txBody>
+                  <a:tcPr marL="50800" marR="50800" marT="50800" marB="50800" anchor="t">
+                    <a:lnL w="6350" cap="flat" cmpd="sng" algn="ctr">
+                      <a:solidFill>
+                        <a:srgbClr val="DEDCD7"/>
+                      </a:solidFill>
+                      <a:prstDash val="solid"/>
+                      <a:round/>
+                      <a:headEnd type="none" w="med" len="med"/>
+                      <a:tailEnd type="none" w="med" len="med"/>
+                    </a:lnL>
+                    <a:lnR w="6350" cap="flat" cmpd="sng" algn="ctr">
+                      <a:solidFill>
+                        <a:srgbClr val="DEDCD7"/>
+                      </a:solidFill>
+                      <a:prstDash val="solid"/>
+                      <a:round/>
+                      <a:headEnd type="none" w="med" len="med"/>
+                      <a:tailEnd type="none" w="med" len="med"/>
+                    </a:lnR>
+                    <a:lnT w="6350" cap="flat" cmpd="sng" algn="ctr">
+                      <a:solidFill>
+                        <a:srgbClr val="DEDCD7"/>
+                      </a:solidFill>
+                      <a:prstDash val="solid"/>
+                      <a:round/>
+                      <a:headEnd type="none" w="med" len="med"/>
+                      <a:tailEnd type="none" w="med" len="med"/>
+                    </a:lnT>
+                    <a:lnB w="6350" cap="flat" cmpd="sng" algn="ctr">
+                      <a:solidFill>
+                        <a:srgbClr val="DEDCD7"/>
+                      </a:solidFill>
+                      <a:prstDash val="solid"/>
+                      <a:round/>
+                      <a:headEnd type="none" w="med" len="med"/>
+                      <a:tailEnd type="none" w="med" len="med"/>
+                    </a:lnB>
+                  </a:tcPr>
+                </a:tc>
+                <a:tc>
+                  <a:txBody>
+                    <a:bodyPr/>
+                    <a:lstStyle/>
+                    <a:p>
+                      <a:pPr indent="0" marL="0">
+                        <a:buNone/>
+                      </a:pPr>
+                      <a:r>
+                        <a:rPr lang="en-US" sz="1000" dirty="0">
+                          <a:solidFill>
+                            <a:srgbClr val="1A1A1A"/>
+                          </a:solidFill>
+                          <a:latin typeface="Calibri" pitchFamily="34" charset="0"/>
+                          <a:ea typeface="Calibri" pitchFamily="34" charset="-122"/>
+                          <a:cs typeface="Calibri" pitchFamily="34" charset="-120"/>
+                        </a:rPr>
+                        <a:t>text · image context</a:t>
+                      </a:r>
+                      <a:endParaRPr lang="en-US" sz="1000" dirty="0">
+                        <a:latin typeface="Calibri" charset="0"/>
+                        <a:ea typeface="Calibri" charset="0"/>
+                        <a:cs typeface="Calibri" charset="0"/>
+                      </a:endParaRPr>
+                    </a:p>
+                  </a:txBody>
+                  <a:tcPr marL="50800" marR="50800" marT="50800" marB="50800" anchor="t">
+                    <a:lnL w="6350" cap="flat" cmpd="sng" algn="ctr">
+                      <a:solidFill>
+                        <a:srgbClr val="DEDCD7"/>
+                      </a:solidFill>
+                      <a:prstDash val="solid"/>
+                      <a:round/>
+                      <a:headEnd type="none" w="med" len="med"/>
+                      <a:tailEnd type="none" w="med" len="med"/>
+                    </a:lnL>
+                    <a:lnR w="6350" cap="flat" cmpd="sng" algn="ctr">
+                      <a:solidFill>
+                        <a:srgbClr val="DEDCD7"/>
+                      </a:solidFill>
+                      <a:prstDash val="solid"/>
+                      <a:round/>
+                      <a:headEnd type="none" w="med" len="med"/>
+                      <a:tailEnd type="none" w="med" len="med"/>
+                    </a:lnR>
+                    <a:lnT w="6350" cap="flat" cmpd="sng" algn="ctr">
+                      <a:solidFill>
+                        <a:srgbClr val="DEDCD7"/>
+                      </a:solidFill>
+                      <a:prstDash val="solid"/>
+                      <a:round/>
+                      <a:headEnd type="none" w="med" len="med"/>
+                      <a:tailEnd type="none" w="med" len="med"/>
+                    </a:lnT>
+                    <a:lnB w="6350" cap="flat" cmpd="sng" algn="ctr">
+                      <a:solidFill>
+                        <a:srgbClr val="DEDCD7"/>
+                      </a:solidFill>
+                      <a:prstDash val="solid"/>
+                      <a:round/>
+                      <a:headEnd type="none" w="med" len="med"/>
+                      <a:tailEnd type="none" w="med" len="med"/>
+                    </a:lnB>
+                  </a:tcPr>
+                </a:tc>
+                <a:tc>
+                  <a:txBody>
+                    <a:bodyPr/>
+                    <a:lstStyle/>
+                    <a:p>
+                      <a:pPr indent="0" marL="0">
+                        <a:buNone/>
+                      </a:pPr>
+                      <a:r>
+                        <a:rPr lang="en-US" sz="1000" dirty="0">
+                          <a:solidFill>
+                            <a:srgbClr val="1A1A1A"/>
+                          </a:solidFill>
+                          <a:latin typeface="Calibri" pitchFamily="34" charset="0"/>
+                          <a:ea typeface="Calibri" pitchFamily="34" charset="-122"/>
+                          <a:cs typeface="Calibri" pitchFamily="34" charset="-120"/>
+                        </a:rPr>
+                        <a:t>512-d CLIP  ·  640-d SPPF   (both frozen)</a:t>
+                      </a:r>
+                      <a:endParaRPr lang="en-US" sz="1000" dirty="0">
+                        <a:latin typeface="Calibri" charset="0"/>
+                        <a:ea typeface="Calibri" charset="0"/>
+                        <a:cs typeface="Calibri" charset="0"/>
+                      </a:endParaRPr>
+                    </a:p>
+                  </a:txBody>
+                  <a:tcPr marL="50800" marR="50800" marT="50800" marB="50800" anchor="t">
+                    <a:lnL w="6350" cap="flat" cmpd="sng" algn="ctr">
+                      <a:solidFill>
+                        <a:srgbClr val="DEDCD7"/>
+                      </a:solidFill>
+                      <a:prstDash val="solid"/>
+                      <a:round/>
+                      <a:headEnd type="none" w="med" len="med"/>
+                      <a:tailEnd type="none" w="med" len="med"/>
+                    </a:lnL>
+                    <a:lnR w="6350" cap="flat" cmpd="sng" algn="ctr">
+                      <a:solidFill>
+                        <a:srgbClr val="DEDCD7"/>
+                      </a:solidFill>
+                      <a:prstDash val="solid"/>
+                      <a:round/>
+                      <a:headEnd type="none" w="med" len="med"/>
+                      <a:tailEnd type="none" w="med" len="med"/>
+                    </a:lnR>
+                    <a:lnT w="6350" cap="flat" cmpd="sng" algn="ctr">
+                      <a:solidFill>
+                        <a:srgbClr val="DEDCD7"/>
+                      </a:solidFill>
+                      <a:prstDash val="solid"/>
+                      <a:round/>
+                      <a:headEnd type="none" w="med" len="med"/>
+                      <a:tailEnd type="none" w="med" len="med"/>
+                    </a:lnT>
+                    <a:lnB w="6350" cap="flat" cmpd="sng" algn="ctr">
+                      <a:solidFill>
+                        <a:srgbClr val="DEDCD7"/>
+                      </a:solidFill>
+                      <a:prstDash val="solid"/>
+                      <a:round/>
+                      <a:headEnd type="none" w="med" len="med"/>
+                      <a:tailEnd type="none" w="med" len="med"/>
+                    </a:lnB>
+                  </a:tcPr>
+                </a:tc>
+              </a:tr>
+              <a:tr h="324612">
+                <a:tc>
+                  <a:txBody>
+                    <a:bodyPr/>
+                    <a:lstStyle/>
+                    <a:p>
+                      <a:pPr indent="0" marL="0">
+                        <a:buNone/>
+                      </a:pPr>
+                      <a:r>
+                        <a:rPr lang="en-US" sz="1000" dirty="0">
+                          <a:solidFill>
+                            <a:srgbClr val="1A1A1A"/>
+                          </a:solidFill>
+                          <a:latin typeface="Calibri" pitchFamily="34" charset="0"/>
+                          <a:ea typeface="Calibri" pitchFamily="34" charset="-122"/>
+                          <a:cs typeface="Calibri" pitchFamily="34" charset="-120"/>
+                        </a:rPr>
+                        <a:t>Head (v2)</a:t>
+                      </a:r>
+                      <a:endParaRPr lang="en-US" sz="1000" dirty="0">
+                        <a:latin typeface="Calibri" charset="0"/>
+                        <a:ea typeface="Calibri" charset="0"/>
+                        <a:cs typeface="Calibri" charset="0"/>
+                      </a:endParaRPr>
+                    </a:p>
+                  </a:txBody>
+                  <a:tcPr marL="50800" marR="50800" marT="50800" marB="50800" anchor="t">
+                    <a:lnL w="6350" cap="flat" cmpd="sng" algn="ctr">
+                      <a:solidFill>
+                        <a:srgbClr val="DEDCD7"/>
+                      </a:solidFill>
+                      <a:prstDash val="solid"/>
+                      <a:round/>
+                      <a:headEnd type="none" w="med" len="med"/>
+                      <a:tailEnd type="none" w="med" len="med"/>
+                    </a:lnL>
+                    <a:lnR w="6350" cap="flat" cmpd="sng" algn="ctr">
+                      <a:solidFill>
+                        <a:srgbClr val="DEDCD7"/>
+                      </a:solidFill>
+                      <a:prstDash val="solid"/>
+                      <a:round/>
+                      <a:headEnd type="none" w="med" len="med"/>
+                      <a:tailEnd type="none" w="med" len="med"/>
+                    </a:lnR>
+                    <a:lnT w="6350" cap="flat" cmpd="sng" algn="ctr">
+                      <a:solidFill>
+                        <a:srgbClr val="DEDCD7"/>
+                      </a:solidFill>
+                      <a:prstDash val="solid"/>
+                      <a:round/>
+                      <a:headEnd type="none" w="med" len="med"/>
+                      <a:tailEnd type="none" w="med" len="med"/>
+                    </a:lnT>
+                    <a:lnB w="6350" cap="flat" cmpd="sng" algn="ctr">
+                      <a:solidFill>
+                        <a:srgbClr val="DEDCD7"/>
+                      </a:solidFill>
+                      <a:prstDash val="solid"/>
+                      <a:round/>
+                      <a:headEnd type="none" w="med" len="med"/>
+                      <a:tailEnd type="none" w="med" len="med"/>
+                    </a:lnB>
+                  </a:tcPr>
+                </a:tc>
+                <a:tc>
+                  <a:txBody>
+                    <a:bodyPr/>
+                    <a:lstStyle/>
+                    <a:p>
+                      <a:pPr indent="0" marL="0">
+                        <a:buNone/>
+                      </a:pPr>
+                      <a:r>
+                        <a:rPr lang="en-US" sz="1000" dirty="0">
+                          <a:solidFill>
+                            <a:srgbClr val="1A1A1A"/>
+                          </a:solidFill>
+                          <a:latin typeface="Calibri" pitchFamily="34" charset="0"/>
+                          <a:ea typeface="Calibri" pitchFamily="34" charset="-122"/>
+                          <a:cs typeface="Calibri" pitchFamily="34" charset="-120"/>
+                        </a:rPr>
+                        <a:t>coefficient grid · hidden</a:t>
+                      </a:r>
+                      <a:endParaRPr lang="en-US" sz="1000" dirty="0">
+                        <a:latin typeface="Calibri" charset="0"/>
+                        <a:ea typeface="Calibri" charset="0"/>
+                        <a:cs typeface="Calibri" charset="0"/>
+                      </a:endParaRPr>
+                    </a:p>
+                  </a:txBody>
+                  <a:tcPr marL="50800" marR="50800" marT="50800" marB="50800" anchor="t">
+                    <a:lnL w="6350" cap="flat" cmpd="sng" algn="ctr">
+                      <a:solidFill>
+                        <a:srgbClr val="DEDCD7"/>
+                      </a:solidFill>
+                      <a:prstDash val="solid"/>
+                      <a:round/>
+                      <a:headEnd type="none" w="med" len="med"/>
+                      <a:tailEnd type="none" w="med" len="med"/>
+                    </a:lnL>
+                    <a:lnR w="6350" cap="flat" cmpd="sng" algn="ctr">
+                      <a:solidFill>
+                        <a:srgbClr val="DEDCD7"/>
+                      </a:solidFill>
+                      <a:prstDash val="solid"/>
+                      <a:round/>
+                      <a:headEnd type="none" w="med" len="med"/>
+                      <a:tailEnd type="none" w="med" len="med"/>
+                    </a:lnR>
+                    <a:lnT w="6350" cap="flat" cmpd="sng" algn="ctr">
+                      <a:solidFill>
+                        <a:srgbClr val="DEDCD7"/>
+                      </a:solidFill>
+                      <a:prstDash val="solid"/>
+                      <a:round/>
+                      <a:headEnd type="none" w="med" len="med"/>
+                      <a:tailEnd type="none" w="med" len="med"/>
+                    </a:lnT>
+                    <a:lnB w="6350" cap="flat" cmpd="sng" algn="ctr">
+                      <a:solidFill>
+                        <a:srgbClr val="DEDCD7"/>
+                      </a:solidFill>
+                      <a:prstDash val="solid"/>
+                      <a:round/>
+                      <a:headEnd type="none" w="med" len="med"/>
+                      <a:tailEnd type="none" w="med" len="med"/>
+                    </a:lnB>
+                  </a:tcPr>
+                </a:tc>
+                <a:tc>
+                  <a:txBody>
+                    <a:bodyPr/>
+                    <a:lstStyle/>
+                    <a:p>
+                      <a:pPr indent="0" marL="0">
+                        <a:buNone/>
+                      </a:pPr>
+                      <a:r>
+                        <a:rPr lang="en-US" sz="1000" dirty="0">
+                          <a:solidFill>
+                            <a:srgbClr val="1A1A1A"/>
+                          </a:solidFill>
+                          <a:latin typeface="Calibri" pitchFamily="34" charset="0"/>
+                          <a:ea typeface="Calibri" pitchFamily="34" charset="-122"/>
+                          <a:cs typeface="Calibri" pitchFamily="34" charset="-120"/>
+                        </a:rPr>
+                        <a:t>20×20 bilinear  ·  512  ·  dropout 0</a:t>
+                      </a:r>
+                      <a:endParaRPr lang="en-US" sz="1000" dirty="0">
+                        <a:latin typeface="Calibri" charset="0"/>
+                        <a:ea typeface="Calibri" charset="0"/>
+                        <a:cs typeface="Calibri" charset="0"/>
+                      </a:endParaRPr>
+                    </a:p>
+                  </a:txBody>
+                  <a:tcPr marL="50800" marR="50800" marT="50800" marB="50800" anchor="t">
+                    <a:lnL w="6350" cap="flat" cmpd="sng" algn="ctr">
+                      <a:solidFill>
+                        <a:srgbClr val="DEDCD7"/>
+                      </a:solidFill>
+                      <a:prstDash val="solid"/>
+                      <a:round/>
+                      <a:headEnd type="none" w="med" len="med"/>
+                      <a:tailEnd type="none" w="med" len="med"/>
+                    </a:lnL>
+                    <a:lnR w="6350" cap="flat" cmpd="sng" algn="ctr">
+                      <a:solidFill>
+                        <a:srgbClr val="DEDCD7"/>
+                      </a:solidFill>
+                      <a:prstDash val="solid"/>
+                      <a:round/>
+                      <a:headEnd type="none" w="med" len="med"/>
+                      <a:tailEnd type="none" w="med" len="med"/>
+                    </a:lnR>
+                    <a:lnT w="6350" cap="flat" cmpd="sng" algn="ctr">
+                      <a:solidFill>
+                        <a:srgbClr val="DEDCD7"/>
+                      </a:solidFill>
+                      <a:prstDash val="solid"/>
+                      <a:round/>
+                      <a:headEnd type="none" w="med" len="med"/>
+                      <a:tailEnd type="none" w="med" len="med"/>
+                    </a:lnT>
+                    <a:lnB w="6350" cap="flat" cmpd="sng" algn="ctr">
+                      <a:solidFill>
+                        <a:srgbClr val="DEDCD7"/>
+                      </a:solidFill>
+                      <a:prstDash val="solid"/>
+                      <a:round/>
+                      <a:headEnd type="none" w="med" len="med"/>
+                      <a:tailEnd type="none" w="med" len="med"/>
+                    </a:lnB>
+                  </a:tcPr>
+                </a:tc>
+              </a:tr>
+              <a:tr h="324612">
+                <a:tc>
+                  <a:txBody>
+                    <a:bodyPr/>
+                    <a:lstStyle/>
+                    <a:p>
+                      <a:pPr indent="0" marL="0">
+                        <a:buNone/>
+                      </a:pPr>
+                      <a:r>
+                        <a:rPr lang="en-US" sz="1000" dirty="0">
+                          <a:solidFill>
+                            <a:srgbClr val="1A1A1A"/>
+                          </a:solidFill>
+                          <a:latin typeface="Calibri" pitchFamily="34" charset="0"/>
+                          <a:ea typeface="Calibri" pitchFamily="34" charset="-122"/>
+                          <a:cs typeface="Calibri" pitchFamily="34" charset="-120"/>
+                        </a:rPr>
+                        <a:t>Optimisation</a:t>
+                      </a:r>
+                      <a:endParaRPr lang="en-US" sz="1000" dirty="0">
+                        <a:latin typeface="Calibri" charset="0"/>
+                        <a:ea typeface="Calibri" charset="0"/>
+                        <a:cs typeface="Calibri" charset="0"/>
+                      </a:endParaRPr>
+                    </a:p>
+                  </a:txBody>
+                  <a:tcPr marL="50800" marR="50800" marT="50800" marB="50800" anchor="t">
+                    <a:lnL w="6350" cap="flat" cmpd="sng" algn="ctr">
+                      <a:solidFill>
+                        <a:srgbClr val="DEDCD7"/>
+                      </a:solidFill>
+                      <a:prstDash val="solid"/>
+                      <a:round/>
+                      <a:headEnd type="none" w="med" len="med"/>
+                      <a:tailEnd type="none" w="med" len="med"/>
+                    </a:lnL>
+                    <a:lnR w="6350" cap="flat" cmpd="sng" algn="ctr">
+                      <a:solidFill>
+                        <a:srgbClr val="DEDCD7"/>
+                      </a:solidFill>
+                      <a:prstDash val="solid"/>
+                      <a:round/>
+                      <a:headEnd type="none" w="med" len="med"/>
+                      <a:tailEnd type="none" w="med" len="med"/>
+                    </a:lnR>
+                    <a:lnT w="6350" cap="flat" cmpd="sng" algn="ctr">
+                      <a:solidFill>
+                        <a:srgbClr val="DEDCD7"/>
+                      </a:solidFill>
+                      <a:prstDash val="solid"/>
+                      <a:round/>
+                      <a:headEnd type="none" w="med" len="med"/>
+                      <a:tailEnd type="none" w="med" len="med"/>
+                    </a:lnT>
+                    <a:lnB w="6350" cap="flat" cmpd="sng" algn="ctr">
+                      <a:solidFill>
+                        <a:srgbClr val="DEDCD7"/>
+                      </a:solidFill>
+                      <a:prstDash val="solid"/>
+                      <a:round/>
+                      <a:headEnd type="none" w="med" len="med"/>
+                      <a:tailEnd type="none" w="med" len="med"/>
+                    </a:lnB>
+                  </a:tcPr>
+                </a:tc>
+                <a:tc>
+                  <a:txBody>
+                    <a:bodyPr/>
+                    <a:lstStyle/>
+                    <a:p>
+                      <a:pPr indent="0" marL="0">
+                        <a:buNone/>
+                      </a:pPr>
+                      <a:r>
+                        <a:rPr lang="en-US" sz="1000" dirty="0">
+                          <a:solidFill>
+                            <a:srgbClr val="1A1A1A"/>
+                          </a:solidFill>
+                          <a:latin typeface="Calibri" pitchFamily="34" charset="0"/>
+                          <a:ea typeface="Calibri" pitchFamily="34" charset="-122"/>
+                          <a:cs typeface="Calibri" pitchFamily="34" charset="-120"/>
+                        </a:rPr>
+                        <a:t>AdamW · lr · decay</a:t>
+                      </a:r>
+                      <a:endParaRPr lang="en-US" sz="1000" dirty="0">
+                        <a:latin typeface="Calibri" charset="0"/>
+                        <a:ea typeface="Calibri" charset="0"/>
+                        <a:cs typeface="Calibri" charset="0"/>
+                      </a:endParaRPr>
+                    </a:p>
+                  </a:txBody>
+                  <a:tcPr marL="50800" marR="50800" marT="50800" marB="50800" anchor="t">
+                    <a:lnL w="6350" cap="flat" cmpd="sng" algn="ctr">
+                      <a:solidFill>
+                        <a:srgbClr val="DEDCD7"/>
+                      </a:solidFill>
+                      <a:prstDash val="solid"/>
+                      <a:round/>
+                      <a:headEnd type="none" w="med" len="med"/>
+                      <a:tailEnd type="none" w="med" len="med"/>
+                    </a:lnL>
+                    <a:lnR w="6350" cap="flat" cmpd="sng" algn="ctr">
+                      <a:solidFill>
+                        <a:srgbClr val="DEDCD7"/>
+                      </a:solidFill>
+                      <a:prstDash val="solid"/>
+                      <a:round/>
+                      <a:headEnd type="none" w="med" len="med"/>
+                      <a:tailEnd type="none" w="med" len="med"/>
+                    </a:lnR>
+                    <a:lnT w="6350" cap="flat" cmpd="sng" algn="ctr">
+                      <a:solidFill>
+                        <a:srgbClr val="DEDCD7"/>
+                      </a:solidFill>
+                      <a:prstDash val="solid"/>
+                      <a:round/>
+                      <a:headEnd type="none" w="med" len="med"/>
+                      <a:tailEnd type="none" w="med" len="med"/>
+                    </a:lnT>
+                    <a:lnB w="6350" cap="flat" cmpd="sng" algn="ctr">
+                      <a:solidFill>
+                        <a:srgbClr val="DEDCD7"/>
+                      </a:solidFill>
+                      <a:prstDash val="solid"/>
+                      <a:round/>
+                      <a:headEnd type="none" w="med" len="med"/>
+                      <a:tailEnd type="none" w="med" len="med"/>
+                    </a:lnB>
+                  </a:tcPr>
+                </a:tc>
+                <a:tc>
+                  <a:txBody>
+                    <a:bodyPr/>
+                    <a:lstStyle/>
+                    <a:p>
+                      <a:pPr indent="0" marL="0">
+                        <a:buNone/>
+                      </a:pPr>
+                      <a:r>
+                        <a:rPr lang="en-US" sz="1000" dirty="0">
+                          <a:solidFill>
+                            <a:srgbClr val="1A1A1A"/>
+                          </a:solidFill>
+                          <a:latin typeface="Calibri" pitchFamily="34" charset="0"/>
+                          <a:ea typeface="Calibri" pitchFamily="34" charset="-122"/>
+                          <a:cs typeface="Calibri" pitchFamily="34" charset="-120"/>
+                        </a:rPr>
+                        <a:t>1e-3 cosine to 0  ·  0.01</a:t>
+                      </a:r>
+                      <a:endParaRPr lang="en-US" sz="1000" dirty="0">
+                        <a:latin typeface="Calibri" charset="0"/>
+                        <a:ea typeface="Calibri" charset="0"/>
+                        <a:cs typeface="Calibri" charset="0"/>
+                      </a:endParaRPr>
+                    </a:p>
+                  </a:txBody>
+                  <a:tcPr marL="50800" marR="50800" marT="50800" marB="50800" anchor="t">
+                    <a:lnL w="6350" cap="flat" cmpd="sng" algn="ctr">
+                      <a:solidFill>
+                        <a:srgbClr val="DEDCD7"/>
+                      </a:solidFill>
+                      <a:prstDash val="solid"/>
+                      <a:round/>
+                      <a:headEnd type="none" w="med" len="med"/>
+                      <a:tailEnd type="none" w="med" len="med"/>
+                    </a:lnL>
+                    <a:lnR w="6350" cap="flat" cmpd="sng" algn="ctr">
+                      <a:solidFill>
+                        <a:srgbClr val="DEDCD7"/>
+                      </a:solidFill>
+                      <a:prstDash val="solid"/>
+                      <a:round/>
+                      <a:headEnd type="none" w="med" len="med"/>
+                      <a:tailEnd type="none" w="med" len="med"/>
+                    </a:lnR>
+                    <a:lnT w="6350" cap="flat" cmpd="sng" algn="ctr">
+                      <a:solidFill>
+                        <a:srgbClr val="DEDCD7"/>
+                      </a:solidFill>
+                      <a:prstDash val="solid"/>
+                      <a:round/>
+                      <a:headEnd type="none" w="med" len="med"/>
+                      <a:tailEnd type="none" w="med" len="med"/>
+                    </a:lnT>
+                    <a:lnB w="6350" cap="flat" cmpd="sng" algn="ctr">
+                      <a:solidFill>
+                        <a:srgbClr val="DEDCD7"/>
+                      </a:solidFill>
+                      <a:prstDash val="solid"/>
+                      <a:round/>
+                      <a:headEnd type="none" w="med" len="med"/>
+                      <a:tailEnd type="none" w="med" len="med"/>
+                    </a:lnB>
+                  </a:tcPr>
+                </a:tc>
+              </a:tr>
+              <a:tr h="324612">
+                <a:tc>
+                  <a:txBody>
+                    <a:bodyPr/>
+                    <a:lstStyle/>
+                    <a:p>
+                      <a:pPr indent="0" marL="0">
+                        <a:buNone/>
+                      </a:pPr>
+                      <a:endParaRPr lang="en-US" sz="1000" dirty="0">
+                        <a:latin typeface="Calibri" charset="0"/>
+                        <a:ea typeface="Calibri" charset="0"/>
+                        <a:cs typeface="Calibri" charset="0"/>
+                      </a:endParaRPr>
+                    </a:p>
+                  </a:txBody>
+                  <a:tcPr marL="50800" marR="50800" marT="50800" marB="50800" anchor="t">
+                    <a:lnL w="6350" cap="flat" cmpd="sng" algn="ctr">
+                      <a:solidFill>
+                        <a:srgbClr val="DEDCD7"/>
+                      </a:solidFill>
+                      <a:prstDash val="solid"/>
+                      <a:round/>
+                      <a:headEnd type="none" w="med" len="med"/>
+                      <a:tailEnd type="none" w="med" len="med"/>
+                    </a:lnL>
+                    <a:lnR w="6350" cap="flat" cmpd="sng" algn="ctr">
+                      <a:solidFill>
+                        <a:srgbClr val="DEDCD7"/>
+                      </a:solidFill>
+                      <a:prstDash val="solid"/>
+                      <a:round/>
+                      <a:headEnd type="none" w="med" len="med"/>
+                      <a:tailEnd type="none" w="med" len="med"/>
+                    </a:lnR>
+                    <a:lnT w="6350" cap="flat" cmpd="sng" algn="ctr">
+                      <a:solidFill>
+                        <a:srgbClr val="DEDCD7"/>
+                      </a:solidFill>
+                      <a:prstDash val="solid"/>
+                      <a:round/>
+                      <a:headEnd type="none" w="med" len="med"/>
+                      <a:tailEnd type="none" w="med" len="med"/>
+                    </a:lnT>
+                    <a:lnB w="6350" cap="flat" cmpd="sng" algn="ctr">
+                      <a:solidFill>
+                        <a:srgbClr val="DEDCD7"/>
+                      </a:solidFill>
+                      <a:prstDash val="solid"/>
+                      <a:round/>
+                      <a:headEnd type="none" w="med" len="med"/>
+                      <a:tailEnd type="none" w="med" len="med"/>
+                    </a:lnB>
+                  </a:tcPr>
+                </a:tc>
+                <a:tc>
+                  <a:txBody>
+                    <a:bodyPr/>
+                    <a:lstStyle/>
+                    <a:p>
+                      <a:pPr indent="0" marL="0">
+                        <a:buNone/>
+                      </a:pPr>
+                      <a:r>
+                        <a:rPr lang="en-US" sz="1000" dirty="0">
+                          <a:solidFill>
+                            <a:srgbClr val="1A1A1A"/>
+                          </a:solidFill>
+                          <a:latin typeface="Calibri" pitchFamily="34" charset="0"/>
+                          <a:ea typeface="Calibri" pitchFamily="34" charset="-122"/>
+                          <a:cs typeface="Calibri" pitchFamily="34" charset="-120"/>
+                        </a:rPr>
+                        <a:t>batch · loss · clip</a:t>
+                      </a:r>
+                      <a:endParaRPr lang="en-US" sz="1000" dirty="0">
+                        <a:latin typeface="Calibri" charset="0"/>
+                        <a:ea typeface="Calibri" charset="0"/>
+                        <a:cs typeface="Calibri" charset="0"/>
+                      </a:endParaRPr>
+                    </a:p>
+                  </a:txBody>
+                  <a:tcPr marL="50800" marR="50800" marT="50800" marB="50800" anchor="t">
+                    <a:lnL w="6350" cap="flat" cmpd="sng" algn="ctr">
+                      <a:solidFill>
+                        <a:srgbClr val="DEDCD7"/>
+                      </a:solidFill>
+                      <a:prstDash val="solid"/>
+                      <a:round/>
+                      <a:headEnd type="none" w="med" len="med"/>
+                      <a:tailEnd type="none" w="med" len="med"/>
+                    </a:lnL>
+                    <a:lnR w="6350" cap="flat" cmpd="sng" algn="ctr">
+                      <a:solidFill>
+                        <a:srgbClr val="DEDCD7"/>
+                      </a:solidFill>
+                      <a:prstDash val="solid"/>
+                      <a:round/>
+                      <a:headEnd type="none" w="med" len="med"/>
+                      <a:tailEnd type="none" w="med" len="med"/>
+                    </a:lnR>
+                    <a:lnT w="6350" cap="flat" cmpd="sng" algn="ctr">
+                      <a:solidFill>
+                        <a:srgbClr val="DEDCD7"/>
+                      </a:solidFill>
+                      <a:prstDash val="solid"/>
+                      <a:round/>
+                      <a:headEnd type="none" w="med" len="med"/>
+                      <a:tailEnd type="none" w="med" len="med"/>
+                    </a:lnT>
+                    <a:lnB w="6350" cap="flat" cmpd="sng" algn="ctr">
+                      <a:solidFill>
+                        <a:srgbClr val="DEDCD7"/>
+                      </a:solidFill>
+                      <a:prstDash val="solid"/>
+                      <a:round/>
+                      <a:headEnd type="none" w="med" len="med"/>
+                      <a:tailEnd type="none" w="med" len="med"/>
+                    </a:lnB>
+                  </a:tcPr>
+                </a:tc>
+                <a:tc>
+                  <a:txBody>
+                    <a:bodyPr/>
+                    <a:lstStyle/>
+                    <a:p>
+                      <a:pPr indent="0" marL="0">
+                        <a:buNone/>
+                      </a:pPr>
+                      <a:r>
+                        <a:rPr lang="en-US" sz="1000" dirty="0">
+                          <a:solidFill>
+                            <a:srgbClr val="1A1A1A"/>
+                          </a:solidFill>
+                          <a:latin typeface="Calibri" pitchFamily="34" charset="0"/>
+                          <a:ea typeface="Calibri" pitchFamily="34" charset="-122"/>
+                          <a:cs typeface="Calibri" pitchFamily="34" charset="-120"/>
+                        </a:rPr>
+                        <a:t>32  ·  BCE + 2×Dice  ·  norm 1.0</a:t>
+                      </a:r>
+                      <a:endParaRPr lang="en-US" sz="1000" dirty="0">
+                        <a:latin typeface="Calibri" charset="0"/>
+                        <a:ea typeface="Calibri" charset="0"/>
+                        <a:cs typeface="Calibri" charset="0"/>
+                      </a:endParaRPr>
+                    </a:p>
+                  </a:txBody>
+                  <a:tcPr marL="50800" marR="50800" marT="50800" marB="50800" anchor="t">
+                    <a:lnL w="6350" cap="flat" cmpd="sng" algn="ctr">
+                      <a:solidFill>
+                        <a:srgbClr val="DEDCD7"/>
+                      </a:solidFill>
+                      <a:prstDash val="solid"/>
+                      <a:round/>
+                      <a:headEnd type="none" w="med" len="med"/>
+                      <a:tailEnd type="none" w="med" len="med"/>
+                    </a:lnL>
+                    <a:lnR w="6350" cap="flat" cmpd="sng" algn="ctr">
+                      <a:solidFill>
+                        <a:srgbClr val="DEDCD7"/>
+                      </a:solidFill>
+                      <a:prstDash val="solid"/>
+                      <a:round/>
+                      <a:headEnd type="none" w="med" len="med"/>
+                      <a:tailEnd type="none" w="med" len="med"/>
+                    </a:lnR>
+                    <a:lnT w="6350" cap="flat" cmpd="sng" algn="ctr">
+                      <a:solidFill>
+                        <a:srgbClr val="DEDCD7"/>
+                      </a:solidFill>
+                      <a:prstDash val="solid"/>
+                      <a:round/>
+                      <a:headEnd type="none" w="med" len="med"/>
+                      <a:tailEnd type="none" w="med" len="med"/>
+                    </a:lnT>
+                    <a:lnB w="6350" cap="flat" cmpd="sng" algn="ctr">
+                      <a:solidFill>
+                        <a:srgbClr val="DEDCD7"/>
+                      </a:solidFill>
+                      <a:prstDash val="solid"/>
+                      <a:round/>
+                      <a:headEnd type="none" w="med" len="med"/>
+                      <a:tailEnd type="none" w="med" len="med"/>
+                    </a:lnB>
+                  </a:tcPr>
+                </a:tc>
+              </a:tr>
+              <a:tr h="324612">
+                <a:tc>
+                  <a:txBody>
+                    <a:bodyPr/>
+                    <a:lstStyle/>
+                    <a:p>
+                      <a:pPr indent="0" marL="0">
+                        <a:buNone/>
+                      </a:pPr>
+                      <a:r>
+                        <a:rPr lang="en-US" sz="1000" dirty="0">
+                          <a:solidFill>
+                            <a:srgbClr val="1A1A1A"/>
+                          </a:solidFill>
+                          <a:latin typeface="Calibri" pitchFamily="34" charset="0"/>
+                          <a:ea typeface="Calibri" pitchFamily="34" charset="-122"/>
+                          <a:cs typeface="Calibri" pitchFamily="34" charset="-120"/>
+                        </a:rPr>
+                        <a:t>Evaluation</a:t>
+                      </a:r>
+                      <a:endParaRPr lang="en-US" sz="1000" dirty="0">
+                        <a:latin typeface="Calibri" charset="0"/>
+                        <a:ea typeface="Calibri" charset="0"/>
+                        <a:cs typeface="Calibri" charset="0"/>
+                      </a:endParaRPr>
+                    </a:p>
+                  </a:txBody>
+                  <a:tcPr marL="50800" marR="50800" marT="50800" marB="50800" anchor="t">
+                    <a:lnL w="6350" cap="flat" cmpd="sng" algn="ctr">
+                      <a:solidFill>
+                        <a:srgbClr val="DEDCD7"/>
+                      </a:solidFill>
+                      <a:prstDash val="solid"/>
+                      <a:round/>
+                      <a:headEnd type="none" w="med" len="med"/>
+                      <a:tailEnd type="none" w="med" len="med"/>
+                    </a:lnL>
+                    <a:lnR w="6350" cap="flat" cmpd="sng" algn="ctr">
+                      <a:solidFill>
+                        <a:srgbClr val="DEDCD7"/>
+                      </a:solidFill>
+                      <a:prstDash val="solid"/>
+                      <a:round/>
+                      <a:headEnd type="none" w="med" len="med"/>
+                      <a:tailEnd type="none" w="med" len="med"/>
+                    </a:lnR>
+                    <a:lnT w="6350" cap="flat" cmpd="sng" algn="ctr">
+                      <a:solidFill>
+                        <a:srgbClr val="DEDCD7"/>
+                      </a:solidFill>
+                      <a:prstDash val="solid"/>
+                      <a:round/>
+                      <a:headEnd type="none" w="med" len="med"/>
+                      <a:tailEnd type="none" w="med" len="med"/>
+                    </a:lnT>
+                    <a:lnB w="6350" cap="flat" cmpd="sng" algn="ctr">
+                      <a:solidFill>
+                        <a:srgbClr val="DEDCD7"/>
+                      </a:solidFill>
+                      <a:prstDash val="solid"/>
+                      <a:round/>
+                      <a:headEnd type="none" w="med" len="med"/>
+                      <a:tailEnd type="none" w="med" len="med"/>
+                    </a:lnB>
+                  </a:tcPr>
+                </a:tc>
+                <a:tc>
+                  <a:txBody>
+                    <a:bodyPr/>
+                    <a:lstStyle/>
+                    <a:p>
+                      <a:pPr indent="0" marL="0">
+                        <a:buNone/>
+                      </a:pPr>
+                      <a:r>
+                        <a:rPr lang="en-US" sz="1000" dirty="0">
+                          <a:solidFill>
+                            <a:srgbClr val="1A1A1A"/>
+                          </a:solidFill>
+                          <a:latin typeface="Calibri" pitchFamily="34" charset="0"/>
+                          <a:ea typeface="Calibri" pitchFamily="34" charset="-122"/>
+                          <a:cs typeface="Calibri" pitchFamily="34" charset="-120"/>
+                        </a:rPr>
+                        <a:t>epochs · selection</a:t>
+                      </a:r>
+                      <a:endParaRPr lang="en-US" sz="1000" dirty="0">
+                        <a:latin typeface="Calibri" charset="0"/>
+                        <a:ea typeface="Calibri" charset="0"/>
+                        <a:cs typeface="Calibri" charset="0"/>
+                      </a:endParaRPr>
+                    </a:p>
+                  </a:txBody>
+                  <a:tcPr marL="50800" marR="50800" marT="50800" marB="50800" anchor="t">
+                    <a:lnL w="6350" cap="flat" cmpd="sng" algn="ctr">
+                      <a:solidFill>
+                        <a:srgbClr val="DEDCD7"/>
+                      </a:solidFill>
+                      <a:prstDash val="solid"/>
+                      <a:round/>
+                      <a:headEnd type="none" w="med" len="med"/>
+                      <a:tailEnd type="none" w="med" len="med"/>
+                    </a:lnL>
+                    <a:lnR w="6350" cap="flat" cmpd="sng" algn="ctr">
+                      <a:solidFill>
+                        <a:srgbClr val="DEDCD7"/>
+                      </a:solidFill>
+                      <a:prstDash val="solid"/>
+                      <a:round/>
+                      <a:headEnd type="none" w="med" len="med"/>
+                      <a:tailEnd type="none" w="med" len="med"/>
+                    </a:lnR>
+                    <a:lnT w="6350" cap="flat" cmpd="sng" algn="ctr">
+                      <a:solidFill>
+                        <a:srgbClr val="DEDCD7"/>
+                      </a:solidFill>
+                      <a:prstDash val="solid"/>
+                      <a:round/>
+                      <a:headEnd type="none" w="med" len="med"/>
+                      <a:tailEnd type="none" w="med" len="med"/>
+                    </a:lnT>
+                    <a:lnB w="6350" cap="flat" cmpd="sng" algn="ctr">
+                      <a:solidFill>
+                        <a:srgbClr val="DEDCD7"/>
+                      </a:solidFill>
+                      <a:prstDash val="solid"/>
+                      <a:round/>
+                      <a:headEnd type="none" w="med" len="med"/>
+                      <a:tailEnd type="none" w="med" len="med"/>
+                    </a:lnB>
+                  </a:tcPr>
+                </a:tc>
+                <a:tc>
+                  <a:txBody>
+                    <a:bodyPr/>
+                    <a:lstStyle/>
+                    <a:p>
+                      <a:pPr indent="0" marL="0">
+                        <a:buNone/>
+                      </a:pPr>
+                      <a:r>
+                        <a:rPr lang="en-US" sz="1000" dirty="0">
+                          <a:solidFill>
+                            <a:srgbClr val="1A1A1A"/>
+                          </a:solidFill>
+                          <a:latin typeface="Calibri" pitchFamily="34" charset="0"/>
+                          <a:ea typeface="Calibri" pitchFamily="34" charset="-122"/>
+                          <a:cs typeface="Calibri" pitchFamily="34" charset="-120"/>
+                        </a:rPr>
+                        <a:t>60  ·  best on train-val, never dev</a:t>
+                      </a:r>
+                      <a:endParaRPr lang="en-US" sz="1000" dirty="0">
+                        <a:latin typeface="Calibri" charset="0"/>
+                        <a:ea typeface="Calibri" charset="0"/>
+                        <a:cs typeface="Calibri" charset="0"/>
+                      </a:endParaRPr>
+                    </a:p>
+                  </a:txBody>
+                  <a:tcPr marL="50800" marR="50800" marT="50800" marB="50800" anchor="t">
+                    <a:lnL w="6350" cap="flat" cmpd="sng" algn="ctr">
+                      <a:solidFill>
+                        <a:srgbClr val="DEDCD7"/>
+                      </a:solidFill>
+                      <a:prstDash val="solid"/>
+                      <a:round/>
+                      <a:headEnd type="none" w="med" len="med"/>
+                      <a:tailEnd type="none" w="med" len="med"/>
+                    </a:lnL>
+                    <a:lnR w="6350" cap="flat" cmpd="sng" algn="ctr">
+                      <a:solidFill>
+                        <a:srgbClr val="DEDCD7"/>
+                      </a:solidFill>
+                      <a:prstDash val="solid"/>
+                      <a:round/>
+                      <a:headEnd type="none" w="med" len="med"/>
+                      <a:tailEnd type="none" w="med" len="med"/>
+                    </a:lnR>
+                    <a:lnT w="6350" cap="flat" cmpd="sng" algn="ctr">
+                      <a:solidFill>
+                        <a:srgbClr val="DEDCD7"/>
+                      </a:solidFill>
+                      <a:prstDash val="solid"/>
+                      <a:round/>
+                      <a:headEnd type="none" w="med" len="med"/>
+                      <a:tailEnd type="none" w="med" len="med"/>
+                    </a:lnT>
+                    <a:lnB w="6350" cap="flat" cmpd="sng" algn="ctr">
+                      <a:solidFill>
+                        <a:srgbClr val="DEDCD7"/>
+                      </a:solidFill>
+                      <a:prstDash val="solid"/>
+                      <a:round/>
+                      <a:headEnd type="none" w="med" len="med"/>
+                      <a:tailEnd type="none" w="med" len="med"/>
+                    </a:lnB>
+                  </a:tcPr>
+                </a:tc>
+              </a:tr>
+              <a:tr h="324612">
+                <a:tc>
+                  <a:txBody>
+                    <a:bodyPr/>
+                    <a:lstStyle/>
+                    <a:p>
+                      <a:pPr indent="0" marL="0">
+                        <a:buNone/>
+                      </a:pPr>
+                      <a:endParaRPr lang="en-US" sz="1000" dirty="0">
+                        <a:latin typeface="Calibri" charset="0"/>
+                        <a:ea typeface="Calibri" charset="0"/>
+                        <a:cs typeface="Calibri" charset="0"/>
+                      </a:endParaRPr>
+                    </a:p>
+                  </a:txBody>
+                  <a:tcPr marL="50800" marR="50800" marT="50800" marB="50800" anchor="t">
+                    <a:lnL w="6350" cap="flat" cmpd="sng" algn="ctr">
+                      <a:solidFill>
+                        <a:srgbClr val="DEDCD7"/>
+                      </a:solidFill>
+                      <a:prstDash val="solid"/>
+                      <a:round/>
+                      <a:headEnd type="none" w="med" len="med"/>
+                      <a:tailEnd type="none" w="med" len="med"/>
+                    </a:lnL>
+                    <a:lnR w="6350" cap="flat" cmpd="sng" algn="ctr">
+                      <a:solidFill>
+                        <a:srgbClr val="DEDCD7"/>
+                      </a:solidFill>
+                      <a:prstDash val="solid"/>
+                      <a:round/>
+                      <a:headEnd type="none" w="med" len="med"/>
+                      <a:tailEnd type="none" w="med" len="med"/>
+                    </a:lnR>
+                    <a:lnT w="6350" cap="flat" cmpd="sng" algn="ctr">
+                      <a:solidFill>
+                        <a:srgbClr val="DEDCD7"/>
+                      </a:solidFill>
+                      <a:prstDash val="solid"/>
+                      <a:round/>
+                      <a:headEnd type="none" w="med" len="med"/>
+                      <a:tailEnd type="none" w="med" len="med"/>
+                    </a:lnT>
+                    <a:lnB w="6350" cap="flat" cmpd="sng" algn="ctr">
+                      <a:solidFill>
+                        <a:srgbClr val="DEDCD7"/>
+                      </a:solidFill>
+                      <a:prstDash val="solid"/>
+                      <a:round/>
+                      <a:headEnd type="none" w="med" len="med"/>
+                      <a:tailEnd type="none" w="med" len="med"/>
+                    </a:lnB>
+                  </a:tcPr>
+                </a:tc>
+                <a:tc>
+                  <a:txBody>
+                    <a:bodyPr/>
+                    <a:lstStyle/>
+                    <a:p>
+                      <a:pPr indent="0" marL="0">
+                        <a:buNone/>
+                      </a:pPr>
+                      <a:r>
+                        <a:rPr lang="en-US" sz="1000" dirty="0">
+                          <a:solidFill>
+                            <a:srgbClr val="1A1A1A"/>
+                          </a:solidFill>
+                          <a:latin typeface="Calibri" pitchFamily="34" charset="0"/>
+                          <a:ea typeface="Calibri" pitchFamily="34" charset="-122"/>
+                          <a:cs typeface="Calibri" pitchFamily="34" charset="-120"/>
+                        </a:rPr>
+                        <a:t>threshold · seeds</a:t>
+                      </a:r>
+                      <a:endParaRPr lang="en-US" sz="1000" dirty="0">
+                        <a:latin typeface="Calibri" charset="0"/>
+                        <a:ea typeface="Calibri" charset="0"/>
+                        <a:cs typeface="Calibri" charset="0"/>
+                      </a:endParaRPr>
+                    </a:p>
+                  </a:txBody>
+                  <a:tcPr marL="50800" marR="50800" marT="50800" marB="50800" anchor="t">
+                    <a:lnL w="6350" cap="flat" cmpd="sng" algn="ctr">
+                      <a:solidFill>
+                        <a:srgbClr val="DEDCD7"/>
+                      </a:solidFill>
+                      <a:prstDash val="solid"/>
+                      <a:round/>
+                      <a:headEnd type="none" w="med" len="med"/>
+                      <a:tailEnd type="none" w="med" len="med"/>
+                    </a:lnL>
+                    <a:lnR w="6350" cap="flat" cmpd="sng" algn="ctr">
+                      <a:solidFill>
+                        <a:srgbClr val="DEDCD7"/>
+                      </a:solidFill>
+                      <a:prstDash val="solid"/>
+                      <a:round/>
+                      <a:headEnd type="none" w="med" len="med"/>
+                      <a:tailEnd type="none" w="med" len="med"/>
+                    </a:lnR>
+                    <a:lnT w="6350" cap="flat" cmpd="sng" algn="ctr">
+                      <a:solidFill>
+                        <a:srgbClr val="DEDCD7"/>
+                      </a:solidFill>
+                      <a:prstDash val="solid"/>
+                      <a:round/>
+                      <a:headEnd type="none" w="med" len="med"/>
+                      <a:tailEnd type="none" w="med" len="med"/>
+                    </a:lnT>
+                    <a:lnB w="6350" cap="flat" cmpd="sng" algn="ctr">
+                      <a:solidFill>
+                        <a:srgbClr val="DEDCD7"/>
+                      </a:solidFill>
+                      <a:prstDash val="solid"/>
+                      <a:round/>
+                      <a:headEnd type="none" w="med" len="med"/>
+                      <a:tailEnd type="none" w="med" len="med"/>
+                    </a:lnB>
+                  </a:tcPr>
+                </a:tc>
+                <a:tc>
+                  <a:txBody>
+                    <a:bodyPr/>
+                    <a:lstStyle/>
+                    <a:p>
+                      <a:pPr indent="0" marL="0">
+                        <a:buNone/>
+                      </a:pPr>
+                      <a:r>
+                        <a:rPr lang="en-US" sz="1000" dirty="0">
+                          <a:solidFill>
+                            <a:srgbClr val="1A1A1A"/>
+                          </a:solidFill>
+                          <a:latin typeface="Calibri" pitchFamily="34" charset="0"/>
+                          <a:ea typeface="Calibri" pitchFamily="34" charset="-122"/>
+                          <a:cs typeface="Calibri" pitchFamily="34" charset="-120"/>
+                        </a:rPr>
+                        <a:t>0.5 fixed  ·  12 (1368, 1–11)</a:t>
+                      </a:r>
+                      <a:endParaRPr lang="en-US" sz="1000" dirty="0">
+                        <a:latin typeface="Calibri" charset="0"/>
+                        <a:ea typeface="Calibri" charset="0"/>
+                        <a:cs typeface="Calibri" charset="0"/>
+                      </a:endParaRPr>
+                    </a:p>
+                  </a:txBody>
+                  <a:tcPr marL="50800" marR="50800" marT="50800" marB="50800" anchor="t">
+                    <a:lnL w="6350" cap="flat" cmpd="sng" algn="ctr">
+                      <a:solidFill>
+                        <a:srgbClr val="DEDCD7"/>
+                      </a:solidFill>
+                      <a:prstDash val="solid"/>
+                      <a:round/>
+                      <a:headEnd type="none" w="med" len="med"/>
+                      <a:tailEnd type="none" w="med" len="med"/>
+                    </a:lnL>
+                    <a:lnR w="6350" cap="flat" cmpd="sng" algn="ctr">
+                      <a:solidFill>
+                        <a:srgbClr val="DEDCD7"/>
+                      </a:solidFill>
+                      <a:prstDash val="solid"/>
+                      <a:round/>
+                      <a:headEnd type="none" w="med" len="med"/>
+                      <a:tailEnd type="none" w="med" len="med"/>
+                    </a:lnR>
+                    <a:lnT w="6350" cap="flat" cmpd="sng" algn="ctr">
+                      <a:solidFill>
+                        <a:srgbClr val="DEDCD7"/>
+                      </a:solidFill>
+                      <a:prstDash val="solid"/>
+                      <a:round/>
+                      <a:headEnd type="none" w="med" len="med"/>
+                      <a:tailEnd type="none" w="med" len="med"/>
+                    </a:lnT>
+                    <a:lnB w="6350" cap="flat" cmpd="sng" algn="ctr">
+                      <a:solidFill>
+                        <a:srgbClr val="DEDCD7"/>
+                      </a:solidFill>
+                      <a:prstDash val="solid"/>
+                      <a:round/>
+                      <a:headEnd type="none" w="med" len="med"/>
+                      <a:tailEnd type="none" w="med" len="med"/>
+                    </a:lnB>
+                  </a:tcPr>
+                </a:tc>
+              </a:tr>
+              <a:tr h="324612">
+                <a:tc>
+                  <a:txBody>
+                    <a:bodyPr/>
+                    <a:lstStyle/>
+                    <a:p>
+                      <a:pPr indent="0" marL="0">
+                        <a:buNone/>
+                      </a:pPr>
+                      <a:endParaRPr lang="en-US" sz="1000" dirty="0">
+                        <a:latin typeface="Calibri" charset="0"/>
+                        <a:ea typeface="Calibri" charset="0"/>
+                        <a:cs typeface="Calibri" charset="0"/>
+                      </a:endParaRPr>
+                    </a:p>
+                  </a:txBody>
+                  <a:tcPr marL="50800" marR="50800" marT="50800" marB="50800" anchor="t">
+                    <a:lnL w="6350" cap="flat" cmpd="sng" algn="ctr">
+                      <a:solidFill>
+                        <a:srgbClr val="DEDCD7"/>
+                      </a:solidFill>
+                      <a:prstDash val="solid"/>
+                      <a:round/>
+                      <a:headEnd type="none" w="med" len="med"/>
+                      <a:tailEnd type="none" w="med" len="med"/>
+                    </a:lnL>
+                    <a:lnR w="6350" cap="flat" cmpd="sng" algn="ctr">
+                      <a:solidFill>
+                        <a:srgbClr val="DEDCD7"/>
+                      </a:solidFill>
+                      <a:prstDash val="solid"/>
+                      <a:round/>
+                      <a:headEnd type="none" w="med" len="med"/>
+                      <a:tailEnd type="none" w="med" len="med"/>
+                    </a:lnR>
+                    <a:lnT w="6350" cap="flat" cmpd="sng" algn="ctr">
+                      <a:solidFill>
+                        <a:srgbClr val="DEDCD7"/>
+                      </a:solidFill>
+                      <a:prstDash val="solid"/>
+                      <a:round/>
+                      <a:headEnd type="none" w="med" len="med"/>
+                      <a:tailEnd type="none" w="med" len="med"/>
+                    </a:lnT>
+                    <a:lnB w="6350" cap="flat" cmpd="sng" algn="ctr">
+                      <a:solidFill>
+                        <a:srgbClr val="DEDCD7"/>
+                      </a:solidFill>
+                      <a:prstDash val="solid"/>
+                      <a:round/>
+                      <a:headEnd type="none" w="med" len="med"/>
+                      <a:tailEnd type="none" w="med" len="med"/>
+                    </a:lnB>
+                  </a:tcPr>
+                </a:tc>
+                <a:tc>
+                  <a:txBody>
+                    <a:bodyPr/>
+                    <a:lstStyle/>
+                    <a:p>
+                      <a:pPr indent="0" marL="0">
+                        <a:buNone/>
+                      </a:pPr>
+                      <a:r>
+                        <a:rPr lang="en-US" sz="1000" dirty="0">
+                          <a:solidFill>
+                            <a:srgbClr val="1A1A1A"/>
+                          </a:solidFill>
+                          <a:latin typeface="Calibri" pitchFamily="34" charset="0"/>
+                          <a:ea typeface="Calibri" pitchFamily="34" charset="-122"/>
+                          <a:cs typeface="Calibri" pitchFamily="34" charset="-120"/>
+                        </a:rPr>
+                        <a:t>baseline</a:t>
+                      </a:r>
+                      <a:endParaRPr lang="en-US" sz="1000" dirty="0">
+                        <a:latin typeface="Calibri" charset="0"/>
+                        <a:ea typeface="Calibri" charset="0"/>
+                        <a:cs typeface="Calibri" charset="0"/>
+                      </a:endParaRPr>
+                    </a:p>
+                  </a:txBody>
+                  <a:tcPr marL="50800" marR="50800" marT="50800" marB="50800" anchor="t">
+                    <a:lnL w="6350" cap="flat" cmpd="sng" algn="ctr">
+                      <a:solidFill>
+                        <a:srgbClr val="DEDCD7"/>
+                      </a:solidFill>
+                      <a:prstDash val="solid"/>
+                      <a:round/>
+                      <a:headEnd type="none" w="med" len="med"/>
+                      <a:tailEnd type="none" w="med" len="med"/>
+                    </a:lnL>
+                    <a:lnR w="6350" cap="flat" cmpd="sng" algn="ctr">
+                      <a:solidFill>
+                        <a:srgbClr val="DEDCD7"/>
+                      </a:solidFill>
+                      <a:prstDash val="solid"/>
+                      <a:round/>
+                      <a:headEnd type="none" w="med" len="med"/>
+                      <a:tailEnd type="none" w="med" len="med"/>
+                    </a:lnR>
+                    <a:lnT w="6350" cap="flat" cmpd="sng" algn="ctr">
+                      <a:solidFill>
+                        <a:srgbClr val="DEDCD7"/>
+                      </a:solidFill>
+                      <a:prstDash val="solid"/>
+                      <a:round/>
+                      <a:headEnd type="none" w="med" len="med"/>
+                      <a:tailEnd type="none" w="med" len="med"/>
+                    </a:lnT>
+                    <a:lnB w="6350" cap="flat" cmpd="sng" algn="ctr">
+                      <a:solidFill>
+                        <a:srgbClr val="DEDCD7"/>
+                      </a:solidFill>
+                      <a:prstDash val="solid"/>
+                      <a:round/>
+                      <a:headEnd type="none" w="med" len="med"/>
+                      <a:tailEnd type="none" w="med" len="med"/>
+                    </a:lnB>
+                  </a:tcPr>
+                </a:tc>
+                <a:tc>
+                  <a:txBody>
+                    <a:bodyPr/>
+                    <a:lstStyle/>
+                    <a:p>
+                      <a:pPr indent="0" marL="0">
+                        <a:buNone/>
+                      </a:pPr>
+                      <a:r>
+                        <a:rPr lang="en-US" sz="1000" dirty="0">
+                          <a:solidFill>
+                            <a:srgbClr val="1A1A1A"/>
+                          </a:solidFill>
+                          <a:latin typeface="Calibri" pitchFamily="34" charset="0"/>
+                          <a:ea typeface="Calibri" pitchFamily="34" charset="-122"/>
+                          <a:cs typeface="Calibri" pitchFamily="34" charset="-120"/>
+                        </a:rPr>
+                        <a:t>CIDAS/clipseg-rd64-refined</a:t>
                       </a:r>
                       <a:endParaRPr lang="en-US" sz="1000" dirty="0">
                         <a:latin typeface="Calibri" charset="0"/>
@@ -13513,6 +20210,68 @@
           </a:graphicData>
         </a:graphic>
       </p:graphicFrame>
+      <p:sp>
+        <p:nvSpPr>
+          <p:cNvPr id="7" name="Shape 4"/>
+          <p:cNvSpPr/>
+          <p:nvPr/>
+        </p:nvSpPr>
+        <p:spPr>
+          <a:xfrm>
+            <a:off x="777240" y="5779008"/>
+            <a:ext cx="10637215" cy="713232"/>
+          </a:xfrm>
+          <a:prstGeom prst="rect">
+            <a:avLst/>
+          </a:prstGeom>
+          <a:solidFill>
+            <a:srgbClr val="F6F5F2"/>
+          </a:solidFill>
+          <a:ln/>
+        </p:spPr>
+      </p:sp>
+      <p:sp>
+        <p:nvSpPr>
+          <p:cNvPr id="8" name="Text 5"/>
+          <p:cNvSpPr/>
+          <p:nvPr/>
+        </p:nvSpPr>
+        <p:spPr>
+          <a:xfrm>
+            <a:off x="1069848" y="5943600"/>
+            <a:ext cx="10051999" cy="457200"/>
+          </a:xfrm>
+          <a:prstGeom prst="rect">
+            <a:avLst/>
+          </a:prstGeom>
+          <a:noFill/>
+          <a:ln/>
+        </p:spPr>
+        <p:txBody>
+          <a:bodyPr wrap="square" lIns="0" tIns="0" rIns="0" bIns="0" rtlCol="0" anchor="ctr"/>
+          <a:lstStyle/>
+          <a:p>
+            <a:pPr indent="0" marL="0">
+              <a:lnSpc>
+                <a:spcPts val="1500"/>
+              </a:lnSpc>
+              <a:buNone/>
+            </a:pPr>
+            <a:r>
+              <a:rPr lang="en-US" sz="1100" dirty="0">
+                <a:solidFill>
+                  <a:srgbClr val="1A1A1A"/>
+                </a:solidFill>
+                <a:latin typeface="Calibri" pitchFamily="34" charset="0"/>
+                <a:ea typeface="Calibri" pitchFamily="34" charset="-122"/>
+                <a:cs typeface="Calibri" pitchFamily="34" charset="-120"/>
+              </a:rPr>
+              <a:t>8,306 usable training turns from all 51 MagicBrush shards (8,807 rows, 501 rejected as degenerate).  Splits verified image-disjoint: 794 dev images, 13,317 train, 0 overlap.</a:t>
+            </a:r>
+            <a:endParaRPr lang="en-US" sz="1100" dirty="0"/>
+          </a:p>
+        </p:txBody>
+      </p:sp>
     </p:spTree>
   </p:cSld>
   <p:clrMapOvr>
@@ -13578,7 +20337,7 @@
                 <a:ea typeface="Calibri" pitchFamily="34" charset="-122"/>
                 <a:cs typeface="Calibri" pitchFamily="34" charset="-120"/>
               </a:rPr>
-              <a:t>STAGE 2</a:t>
+              <a:t>OPERATING POINT</a:t>
             </a:r>
             <a:endParaRPr lang="en-US" sz="1000" dirty="0"/>
           </a:p>
@@ -13617,7 +20376,7 @@
                 <a:ea typeface="Cambria" pitchFamily="34" charset="-122"/>
                 <a:cs typeface="Cambria" pitchFamily="34" charset="-120"/>
               </a:rPr>
-              <a:t>Editing inside the predicted region — the premise, tested</a:t>
+              <a:t>IoU alone hides the precision/recall trade-off</a:t>
             </a:r>
             <a:endParaRPr lang="en-US" sz="2600" dirty="0"/>
           </a:p>
@@ -13656,7 +20415,7 @@
                 <a:ea typeface="Calibri" pitchFamily="34" charset="-122"/>
                 <a:cs typeface="Calibri" pitchFamily="34" charset="-120"/>
               </a:rPr>
-              <a:t>60 held-out dev samples · one editor (InstructPix2Pix), only the gating mask varies</a:t>
+              <a:t>Threshold chosen on train-val, never on dev</a:t>
             </a:r>
             <a:endParaRPr lang="en-US" sz="1200" dirty="0"/>
           </a:p>
@@ -13697,7 +20456,7 @@
           </p:nvPr>
         </p:nvGraphicFramePr>
         <p:xfrm>
-          <a:off x="777240" y="1719072"/>
+          <a:off x="777240" y="1645920"/>
           <a:ext cx="10637215" cy="914400"/>
         </p:xfrm>
         <a:graphic>
@@ -13705,12 +20464,13 @@
             <a:tbl>
               <a:tblPr/>
               <a:tblGrid>
-                <a:gridCol w="3840480"/>
-                <a:gridCol w="2377440"/>
-                <a:gridCol w="2377440"/>
-                <a:gridCol w="2039112"/>
+                <a:gridCol w="2286000"/>
+                <a:gridCol w="2011680"/>
+                <a:gridCol w="2103120"/>
+                <a:gridCol w="2103120"/>
+                <a:gridCol w="2130552"/>
               </a:tblGrid>
-              <a:tr h="365760">
+              <a:tr h="347472">
                 <a:tc>
                   <a:txBody>
                     <a:bodyPr/>
@@ -13728,7 +20488,7 @@
                           <a:ea typeface="Calibri" pitchFamily="34" charset="-122"/>
                           <a:cs typeface="Calibri" pitchFamily="34" charset="-120"/>
                         </a:rPr>
-                        <a:t>gating mask</a:t>
+                        <a:t>threshold</a:t>
                       </a:r>
                       <a:endParaRPr lang="en-US" sz="1050" dirty="0">
                         <a:latin typeface="Calibri" charset="0"/>
@@ -13796,7 +20556,7 @@
                           <a:ea typeface="Calibri" pitchFamily="34" charset="-122"/>
                           <a:cs typeface="Calibri" pitchFamily="34" charset="-120"/>
                         </a:rPr>
-                        <a:t>recall of the edit ↑</a:t>
+                        <a:t>IoU</a:t>
                       </a:r>
                       <a:endParaRPr lang="en-US" sz="1050" dirty="0">
                         <a:latin typeface="Calibri" charset="0"/>
@@ -13864,7 +20624,7 @@
                           <a:ea typeface="Calibri" pitchFamily="34" charset="-122"/>
                           <a:cs typeface="Calibri" pitchFamily="34" charset="-120"/>
                         </a:rPr>
-                        <a:t>collateral change ↓</a:t>
+                        <a:t>precision</a:t>
                       </a:r>
                       <a:endParaRPr lang="en-US" sz="1050" dirty="0">
                         <a:latin typeface="Calibri" charset="0"/>
@@ -13932,7 +20692,7 @@
                           <a:ea typeface="Calibri" pitchFamily="34" charset="-122"/>
                           <a:cs typeface="Calibri" pitchFamily="34" charset="-120"/>
                         </a:rPr>
-                        <a:t>net ↑</a:t>
+                        <a:t>recall</a:t>
                       </a:r>
                       <a:endParaRPr lang="en-US" sz="1050" dirty="0">
                         <a:latin typeface="Calibri" charset="0"/>
@@ -13983,8 +20743,76 @@
                     </a:solidFill>
                   </a:tcPr>
                 </a:tc>
+                <a:tc>
+                  <a:txBody>
+                    <a:bodyPr/>
+                    <a:lstStyle/>
+                    <a:p>
+                      <a:pPr algn="ctr" indent="0" marL="0">
+                        <a:buNone/>
+                      </a:pPr>
+                      <a:r>
+                        <a:rPr lang="en-US" sz="1050" b="1" dirty="0">
+                          <a:solidFill>
+                            <a:srgbClr val="1A1A1A"/>
+                          </a:solidFill>
+                          <a:latin typeface="Calibri" pitchFamily="34" charset="0"/>
+                          <a:ea typeface="Calibri" pitchFamily="34" charset="-122"/>
+                          <a:cs typeface="Calibri" pitchFamily="34" charset="-120"/>
+                        </a:rPr>
+                        <a:t>predicted area</a:t>
+                      </a:r>
+                      <a:endParaRPr lang="en-US" sz="1050" dirty="0">
+                        <a:latin typeface="Calibri" charset="0"/>
+                        <a:ea typeface="Calibri" charset="0"/>
+                        <a:cs typeface="Calibri" charset="0"/>
+                      </a:endParaRPr>
+                    </a:p>
+                  </a:txBody>
+                  <a:tcPr marL="50800" marR="50800" marT="50800" marB="50800" anchor="t">
+                    <a:lnL w="6350" cap="flat" cmpd="sng" algn="ctr">
+                      <a:solidFill>
+                        <a:srgbClr val="DEDCD7"/>
+                      </a:solidFill>
+                      <a:prstDash val="solid"/>
+                      <a:round/>
+                      <a:headEnd type="none" w="med" len="med"/>
+                      <a:tailEnd type="none" w="med" len="med"/>
+                    </a:lnL>
+                    <a:lnR w="6350" cap="flat" cmpd="sng" algn="ctr">
+                      <a:solidFill>
+                        <a:srgbClr val="DEDCD7"/>
+                      </a:solidFill>
+                      <a:prstDash val="solid"/>
+                      <a:round/>
+                      <a:headEnd type="none" w="med" len="med"/>
+                      <a:tailEnd type="none" w="med" len="med"/>
+                    </a:lnR>
+                    <a:lnT w="6350" cap="flat" cmpd="sng" algn="ctr">
+                      <a:solidFill>
+                        <a:srgbClr val="DEDCD7"/>
+                      </a:solidFill>
+                      <a:prstDash val="solid"/>
+                      <a:round/>
+                      <a:headEnd type="none" w="med" len="med"/>
+                      <a:tailEnd type="none" w="med" len="med"/>
+                    </a:lnT>
+                    <a:lnB w="6350" cap="flat" cmpd="sng" algn="ctr">
+                      <a:solidFill>
+                        <a:srgbClr val="DEDCD7"/>
+                      </a:solidFill>
+                      <a:prstDash val="solid"/>
+                      <a:round/>
+                      <a:headEnd type="none" w="med" len="med"/>
+                      <a:tailEnd type="none" w="med" len="med"/>
+                    </a:lnB>
+                    <a:solidFill>
+                      <a:srgbClr val="F6F5F2"/>
+                    </a:solidFill>
+                  </a:tcPr>
+                </a:tc>
               </a:tr>
-              <a:tr h="365760">
+              <a:tr h="347472">
                 <a:tc>
                   <a:txBody>
                     <a:bodyPr/>
@@ -14002,7 +20830,7 @@
                           <a:ea typeface="Calibri" pitchFamily="34" charset="-122"/>
                           <a:cs typeface="Calibri" pitchFamily="34" charset="-120"/>
                         </a:rPr>
-                        <a:t>none — whole frame</a:t>
+                        <a:t>0.2</a:t>
                       </a:r>
                       <a:endParaRPr lang="en-US" sz="1050" dirty="0">
                         <a:latin typeface="Calibri" charset="0"/>
@@ -14067,7 +20895,7 @@
                           <a:ea typeface="Calibri" pitchFamily="34" charset="-122"/>
                           <a:cs typeface="Calibri" pitchFamily="34" charset="-120"/>
                         </a:rPr>
-                        <a:t>33.3%</a:t>
+                        <a:t>0.2172</a:t>
                       </a:r>
                       <a:endParaRPr lang="en-US" sz="1050" dirty="0">
                         <a:latin typeface="Calibri" charset="0"/>
@@ -14132,7 +20960,7 @@
                           <a:ea typeface="Calibri" pitchFamily="34" charset="-122"/>
                           <a:cs typeface="Calibri" pitchFamily="34" charset="-120"/>
                         </a:rPr>
-                        <a:t>24.2%</a:t>
+                        <a:t>0.2637</a:t>
                       </a:r>
                       <a:endParaRPr lang="en-US" sz="1050" dirty="0">
                         <a:latin typeface="Calibri" charset="0"/>
@@ -14197,7 +21025,7 @@
                           <a:ea typeface="Calibri" pitchFamily="34" charset="-122"/>
                           <a:cs typeface="Calibri" pitchFamily="34" charset="-120"/>
                         </a:rPr>
-                        <a:t>+9.1%</a:t>
+                        <a:t>0.5775</a:t>
                       </a:r>
                       <a:endParaRPr lang="en-US" sz="1050" dirty="0">
                         <a:latin typeface="Calibri" charset="0"/>
@@ -14245,8 +21073,73 @@
                     </a:lnB>
                   </a:tcPr>
                 </a:tc>
+                <a:tc>
+                  <a:txBody>
+                    <a:bodyPr/>
+                    <a:lstStyle/>
+                    <a:p>
+                      <a:pPr algn="ctr" indent="0" marL="0">
+                        <a:buNone/>
+                      </a:pPr>
+                      <a:r>
+                        <a:rPr lang="en-US" sz="1050" dirty="0">
+                          <a:solidFill>
+                            <a:srgbClr val="1A1A1A"/>
+                          </a:solidFill>
+                          <a:latin typeface="Calibri" pitchFamily="34" charset="0"/>
+                          <a:ea typeface="Calibri" pitchFamily="34" charset="-122"/>
+                          <a:cs typeface="Calibri" pitchFamily="34" charset="-120"/>
+                        </a:rPr>
+                        <a:t>22.74%</a:t>
+                      </a:r>
+                      <a:endParaRPr lang="en-US" sz="1050" dirty="0">
+                        <a:latin typeface="Calibri" charset="0"/>
+                        <a:ea typeface="Calibri" charset="0"/>
+                        <a:cs typeface="Calibri" charset="0"/>
+                      </a:endParaRPr>
+                    </a:p>
+                  </a:txBody>
+                  <a:tcPr marL="50800" marR="50800" marT="50800" marB="50800" anchor="t">
+                    <a:lnL w="6350" cap="flat" cmpd="sng" algn="ctr">
+                      <a:solidFill>
+                        <a:srgbClr val="DEDCD7"/>
+                      </a:solidFill>
+                      <a:prstDash val="solid"/>
+                      <a:round/>
+                      <a:headEnd type="none" w="med" len="med"/>
+                      <a:tailEnd type="none" w="med" len="med"/>
+                    </a:lnL>
+                    <a:lnR w="6350" cap="flat" cmpd="sng" algn="ctr">
+                      <a:solidFill>
+                        <a:srgbClr val="DEDCD7"/>
+                      </a:solidFill>
+                      <a:prstDash val="solid"/>
+                      <a:round/>
+                      <a:headEnd type="none" w="med" len="med"/>
+                      <a:tailEnd type="none" w="med" len="med"/>
+                    </a:lnR>
+                    <a:lnT w="6350" cap="flat" cmpd="sng" algn="ctr">
+                      <a:solidFill>
+                        <a:srgbClr val="DEDCD7"/>
+                      </a:solidFill>
+                      <a:prstDash val="solid"/>
+                      <a:round/>
+                      <a:headEnd type="none" w="med" len="med"/>
+                      <a:tailEnd type="none" w="med" len="med"/>
+                    </a:lnT>
+                    <a:lnB w="6350" cap="flat" cmpd="sng" algn="ctr">
+                      <a:solidFill>
+                        <a:srgbClr val="DEDCD7"/>
+                      </a:solidFill>
+                      <a:prstDash val="solid"/>
+                      <a:round/>
+                      <a:headEnd type="none" w="med" len="med"/>
+                      <a:tailEnd type="none" w="med" len="med"/>
+                    </a:lnB>
+                  </a:tcPr>
+                </a:tc>
               </a:tr>
-              <a:tr h="365760">
+              <a:tr h="347472">
                 <a:tc>
                   <a:txBody>
                     <a:bodyPr/>
@@ -14264,7 +21157,7 @@
                           <a:ea typeface="Calibri" pitchFamily="34" charset="-122"/>
                           <a:cs typeface="Calibri" pitchFamily="34" charset="-120"/>
                         </a:rPr>
-                        <a:t>ours, as predicted</a:t>
+                        <a:t>0.3</a:t>
                       </a:r>
                       <a:endParaRPr lang="en-US" sz="1050" dirty="0">
                         <a:latin typeface="Calibri" charset="0"/>
@@ -14329,7 +21222,7 @@
                           <a:ea typeface="Calibri" pitchFamily="34" charset="-122"/>
                           <a:cs typeface="Calibri" pitchFamily="34" charset="-120"/>
                         </a:rPr>
-                        <a:t>7.5%</a:t>
+                        <a:t>0.2180</a:t>
                       </a:r>
                       <a:endParaRPr lang="en-US" sz="1050" dirty="0">
                         <a:latin typeface="Calibri" charset="0"/>
@@ -14394,7 +21287,7 @@
                           <a:ea typeface="Calibri" pitchFamily="34" charset="-122"/>
                           <a:cs typeface="Calibri" pitchFamily="34" charset="-120"/>
                         </a:rPr>
-                        <a:t>1.5%</a:t>
+                        <a:t>0.2818</a:t>
                       </a:r>
                       <a:endParaRPr lang="en-US" sz="1050" dirty="0">
                         <a:latin typeface="Calibri" charset="0"/>
@@ -14459,7 +21352,7 @@
                           <a:ea typeface="Calibri" pitchFamily="34" charset="-122"/>
                           <a:cs typeface="Calibri" pitchFamily="34" charset="-120"/>
                         </a:rPr>
-                        <a:t>+6.0%</a:t>
+                        <a:t>0.5063</a:t>
                       </a:r>
                       <a:endParaRPr lang="en-US" sz="1050" dirty="0">
                         <a:latin typeface="Calibri" charset="0"/>
@@ -14507,8 +21400,73 @@
                     </a:lnB>
                   </a:tcPr>
                 </a:tc>
+                <a:tc>
+                  <a:txBody>
+                    <a:bodyPr/>
+                    <a:lstStyle/>
+                    <a:p>
+                      <a:pPr algn="ctr" indent="0" marL="0">
+                        <a:buNone/>
+                      </a:pPr>
+                      <a:r>
+                        <a:rPr lang="en-US" sz="1050" dirty="0">
+                          <a:solidFill>
+                            <a:srgbClr val="1A1A1A"/>
+                          </a:solidFill>
+                          <a:latin typeface="Calibri" pitchFamily="34" charset="0"/>
+                          <a:ea typeface="Calibri" pitchFamily="34" charset="-122"/>
+                          <a:cs typeface="Calibri" pitchFamily="34" charset="-120"/>
+                        </a:rPr>
+                        <a:t>18.10%</a:t>
+                      </a:r>
+                      <a:endParaRPr lang="en-US" sz="1050" dirty="0">
+                        <a:latin typeface="Calibri" charset="0"/>
+                        <a:ea typeface="Calibri" charset="0"/>
+                        <a:cs typeface="Calibri" charset="0"/>
+                      </a:endParaRPr>
+                    </a:p>
+                  </a:txBody>
+                  <a:tcPr marL="50800" marR="50800" marT="50800" marB="50800" anchor="t">
+                    <a:lnL w="6350" cap="flat" cmpd="sng" algn="ctr">
+                      <a:solidFill>
+                        <a:srgbClr val="DEDCD7"/>
+                      </a:solidFill>
+                      <a:prstDash val="solid"/>
+                      <a:round/>
+                      <a:headEnd type="none" w="med" len="med"/>
+                      <a:tailEnd type="none" w="med" len="med"/>
+                    </a:lnL>
+                    <a:lnR w="6350" cap="flat" cmpd="sng" algn="ctr">
+                      <a:solidFill>
+                        <a:srgbClr val="DEDCD7"/>
+                      </a:solidFill>
+                      <a:prstDash val="solid"/>
+                      <a:round/>
+                      <a:headEnd type="none" w="med" len="med"/>
+                      <a:tailEnd type="none" w="med" len="med"/>
+                    </a:lnR>
+                    <a:lnT w="6350" cap="flat" cmpd="sng" algn="ctr">
+                      <a:solidFill>
+                        <a:srgbClr val="DEDCD7"/>
+                      </a:solidFill>
+                      <a:prstDash val="solid"/>
+                      <a:round/>
+                      <a:headEnd type="none" w="med" len="med"/>
+                      <a:tailEnd type="none" w="med" len="med"/>
+                    </a:lnT>
+                    <a:lnB w="6350" cap="flat" cmpd="sng" algn="ctr">
+                      <a:solidFill>
+                        <a:srgbClr val="DEDCD7"/>
+                      </a:solidFill>
+                      <a:prstDash val="solid"/>
+                      <a:round/>
+                      <a:headEnd type="none" w="med" len="med"/>
+                      <a:tailEnd type="none" w="med" len="med"/>
+                    </a:lnB>
+                  </a:tcPr>
+                </a:tc>
               </a:tr>
-              <a:tr h="365760">
+              <a:tr h="347472">
                 <a:tc>
                   <a:txBody>
                     <a:bodyPr/>
@@ -14526,7 +21484,7 @@
                           <a:ea typeface="Calibri" pitchFamily="34" charset="-122"/>
                           <a:cs typeface="Calibri" pitchFamily="34" charset="-120"/>
                         </a:rPr>
-                        <a:t>ours, tuned — peak of the sweep</a:t>
+                        <a:t>0.5  (reported)</a:t>
                       </a:r>
                       <a:endParaRPr lang="en-US" sz="1050" dirty="0">
                         <a:latin typeface="Calibri" charset="0"/>
@@ -14594,7 +21552,7 @@
                           <a:ea typeface="Calibri" pitchFamily="34" charset="-122"/>
                           <a:cs typeface="Calibri" pitchFamily="34" charset="-120"/>
                         </a:rPr>
-                        <a:t>22.9%</a:t>
+                        <a:t>0.2065</a:t>
                       </a:r>
                       <a:endParaRPr lang="en-US" sz="1050" dirty="0">
                         <a:latin typeface="Calibri" charset="0"/>
@@ -14662,7 +21620,7 @@
                           <a:ea typeface="Calibri" pitchFamily="34" charset="-122"/>
                           <a:cs typeface="Calibri" pitchFamily="34" charset="-120"/>
                         </a:rPr>
-                        <a:t>8.8%</a:t>
+                        <a:t>0.3126</a:t>
                       </a:r>
                       <a:endParaRPr lang="en-US" sz="1050" dirty="0">
                         <a:latin typeface="Calibri" charset="0"/>
@@ -14730,7 +21688,7 @@
                           <a:ea typeface="Calibri" pitchFamily="34" charset="-122"/>
                           <a:cs typeface="Calibri" pitchFamily="34" charset="-120"/>
                         </a:rPr>
-                        <a:t>+14.2%</a:t>
+                        <a:t>0.3878</a:t>
                       </a:r>
                       <a:endParaRPr lang="en-US" sz="1050" dirty="0">
                         <a:latin typeface="Calibri" charset="0"/>
@@ -14781,8 +21739,76 @@
                     </a:solidFill>
                   </a:tcPr>
                 </a:tc>
+                <a:tc>
+                  <a:txBody>
+                    <a:bodyPr/>
+                    <a:lstStyle/>
+                    <a:p>
+                      <a:pPr algn="ctr" indent="0" marL="0">
+                        <a:buNone/>
+                      </a:pPr>
+                      <a:r>
+                        <a:rPr lang="en-US" sz="1050" b="1" dirty="0">
+                          <a:solidFill>
+                            <a:srgbClr val="1A1A1A"/>
+                          </a:solidFill>
+                          <a:latin typeface="Calibri" pitchFamily="34" charset="0"/>
+                          <a:ea typeface="Calibri" pitchFamily="34" charset="-122"/>
+                          <a:cs typeface="Calibri" pitchFamily="34" charset="-120"/>
+                        </a:rPr>
+                        <a:t>11.70%</a:t>
+                      </a:r>
+                      <a:endParaRPr lang="en-US" sz="1050" dirty="0">
+                        <a:latin typeface="Calibri" charset="0"/>
+                        <a:ea typeface="Calibri" charset="0"/>
+                        <a:cs typeface="Calibri" charset="0"/>
+                      </a:endParaRPr>
+                    </a:p>
+                  </a:txBody>
+                  <a:tcPr marL="50800" marR="50800" marT="50800" marB="50800" anchor="t">
+                    <a:lnL w="6350" cap="flat" cmpd="sng" algn="ctr">
+                      <a:solidFill>
+                        <a:srgbClr val="DEDCD7"/>
+                      </a:solidFill>
+                      <a:prstDash val="solid"/>
+                      <a:round/>
+                      <a:headEnd type="none" w="med" len="med"/>
+                      <a:tailEnd type="none" w="med" len="med"/>
+                    </a:lnL>
+                    <a:lnR w="6350" cap="flat" cmpd="sng" algn="ctr">
+                      <a:solidFill>
+                        <a:srgbClr val="DEDCD7"/>
+                      </a:solidFill>
+                      <a:prstDash val="solid"/>
+                      <a:round/>
+                      <a:headEnd type="none" w="med" len="med"/>
+                      <a:tailEnd type="none" w="med" len="med"/>
+                    </a:lnR>
+                    <a:lnT w="6350" cap="flat" cmpd="sng" algn="ctr">
+                      <a:solidFill>
+                        <a:srgbClr val="DEDCD7"/>
+                      </a:solidFill>
+                      <a:prstDash val="solid"/>
+                      <a:round/>
+                      <a:headEnd type="none" w="med" len="med"/>
+                      <a:tailEnd type="none" w="med" len="med"/>
+                    </a:lnT>
+                    <a:lnB w="6350" cap="flat" cmpd="sng" algn="ctr">
+                      <a:solidFill>
+                        <a:srgbClr val="DEDCD7"/>
+                      </a:solidFill>
+                      <a:prstDash val="solid"/>
+                      <a:round/>
+                      <a:headEnd type="none" w="med" len="med"/>
+                      <a:tailEnd type="none" w="med" len="med"/>
+                    </a:lnB>
+                    <a:solidFill>
+                      <a:srgbClr val="EAF5EE"/>
+                    </a:solidFill>
+                  </a:tcPr>
+                </a:tc>
               </a:tr>
-              <a:tr h="365760">
+              <a:tr h="347472">
                 <a:tc>
                   <a:txBody>
                     <a:bodyPr/>
@@ -14800,7 +21826,7 @@
                           <a:ea typeface="Calibri" pitchFamily="34" charset="-122"/>
                           <a:cs typeface="Calibri" pitchFamily="34" charset="-120"/>
                         </a:rPr>
-                        <a:t>MagicBrush human mask</a:t>
+                        <a:t>0.7</a:t>
                       </a:r>
                       <a:endParaRPr lang="en-US" sz="1050" dirty="0">
                         <a:latin typeface="Calibri" charset="0"/>
@@ -14865,7 +21891,7 @@
                           <a:ea typeface="Calibri" pitchFamily="34" charset="-122"/>
                           <a:cs typeface="Calibri" pitchFamily="34" charset="-120"/>
                         </a:rPr>
-                        <a:t>31.5%</a:t>
+                        <a:t>0.1747</a:t>
                       </a:r>
                       <a:endParaRPr lang="en-US" sz="1050" dirty="0">
                         <a:latin typeface="Calibri" charset="0"/>
@@ -14930,7 +21956,7 @@
                           <a:ea typeface="Calibri" pitchFamily="34" charset="-122"/>
                           <a:cs typeface="Calibri" pitchFamily="34" charset="-120"/>
                         </a:rPr>
-                        <a:t>13.0%</a:t>
+                        <a:t>0.3458</a:t>
                       </a:r>
                       <a:endParaRPr lang="en-US" sz="1050" dirty="0">
                         <a:latin typeface="Calibri" charset="0"/>
@@ -14995,7 +22021,7 @@
                           <a:ea typeface="Calibri" pitchFamily="34" charset="-122"/>
                           <a:cs typeface="Calibri" pitchFamily="34" charset="-120"/>
                         </a:rPr>
-                        <a:t>+18.5%</a:t>
+                        <a:t>0.2750</a:t>
                       </a:r>
                       <a:endParaRPr lang="en-US" sz="1050" dirty="0">
                         <a:latin typeface="Calibri" charset="0"/>
@@ -15043,8 +22069,73 @@
                     </a:lnB>
                   </a:tcPr>
                 </a:tc>
+                <a:tc>
+                  <a:txBody>
+                    <a:bodyPr/>
+                    <a:lstStyle/>
+                    <a:p>
+                      <a:pPr algn="ctr" indent="0" marL="0">
+                        <a:buNone/>
+                      </a:pPr>
+                      <a:r>
+                        <a:rPr lang="en-US" sz="1050" dirty="0">
+                          <a:solidFill>
+                            <a:srgbClr val="1A1A1A"/>
+                          </a:solidFill>
+                          <a:latin typeface="Calibri" pitchFamily="34" charset="0"/>
+                          <a:ea typeface="Calibri" pitchFamily="34" charset="-122"/>
+                          <a:cs typeface="Calibri" pitchFamily="34" charset="-120"/>
+                        </a:rPr>
+                        <a:t>6.90%</a:t>
+                      </a:r>
+                      <a:endParaRPr lang="en-US" sz="1050" dirty="0">
+                        <a:latin typeface="Calibri" charset="0"/>
+                        <a:ea typeface="Calibri" charset="0"/>
+                        <a:cs typeface="Calibri" charset="0"/>
+                      </a:endParaRPr>
+                    </a:p>
+                  </a:txBody>
+                  <a:tcPr marL="50800" marR="50800" marT="50800" marB="50800" anchor="t">
+                    <a:lnL w="6350" cap="flat" cmpd="sng" algn="ctr">
+                      <a:solidFill>
+                        <a:srgbClr val="DEDCD7"/>
+                      </a:solidFill>
+                      <a:prstDash val="solid"/>
+                      <a:round/>
+                      <a:headEnd type="none" w="med" len="med"/>
+                      <a:tailEnd type="none" w="med" len="med"/>
+                    </a:lnL>
+                    <a:lnR w="6350" cap="flat" cmpd="sng" algn="ctr">
+                      <a:solidFill>
+                        <a:srgbClr val="DEDCD7"/>
+                      </a:solidFill>
+                      <a:prstDash val="solid"/>
+                      <a:round/>
+                      <a:headEnd type="none" w="med" len="med"/>
+                      <a:tailEnd type="none" w="med" len="med"/>
+                    </a:lnR>
+                    <a:lnT w="6350" cap="flat" cmpd="sng" algn="ctr">
+                      <a:solidFill>
+                        <a:srgbClr val="DEDCD7"/>
+                      </a:solidFill>
+                      <a:prstDash val="solid"/>
+                      <a:round/>
+                      <a:headEnd type="none" w="med" len="med"/>
+                      <a:tailEnd type="none" w="med" len="med"/>
+                    </a:lnT>
+                    <a:lnB w="6350" cap="flat" cmpd="sng" algn="ctr">
+                      <a:solidFill>
+                        <a:srgbClr val="DEDCD7"/>
+                      </a:solidFill>
+                      <a:prstDash val="solid"/>
+                      <a:round/>
+                      <a:headEnd type="none" w="med" len="med"/>
+                      <a:tailEnd type="none" w="med" len="med"/>
+                    </a:lnB>
+                  </a:tcPr>
+                </a:tc>
               </a:tr>
-              <a:tr h="365760">
+              <a:tr h="347472">
                 <a:tc>
                   <a:txBody>
                     <a:bodyPr/>
@@ -15062,7 +22153,7 @@
                           <a:ea typeface="Calibri" pitchFamily="34" charset="-122"/>
                           <a:cs typeface="Calibri" pitchFamily="34" charset="-120"/>
                         </a:rPr>
-                        <a:t>ground-truth region</a:t>
+                        <a:t>0.9</a:t>
                       </a:r>
                       <a:endParaRPr lang="en-US" sz="1050" dirty="0">
                         <a:latin typeface="Calibri" charset="0"/>
@@ -15127,7 +22218,7 @@
                           <a:ea typeface="Calibri" pitchFamily="34" charset="-122"/>
                           <a:cs typeface="Calibri" pitchFamily="34" charset="-120"/>
                         </a:rPr>
-                        <a:t>30.2%</a:t>
+                        <a:t>0.1119</a:t>
                       </a:r>
                       <a:endParaRPr lang="en-US" sz="1050" dirty="0">
                         <a:latin typeface="Calibri" charset="0"/>
@@ -15192,7 +22283,7 @@
                           <a:ea typeface="Calibri" pitchFamily="34" charset="-122"/>
                           <a:cs typeface="Calibri" pitchFamily="34" charset="-120"/>
                         </a:rPr>
-                        <a:t>0.1%</a:t>
+                        <a:t>0.3705</a:t>
                       </a:r>
                       <a:endParaRPr lang="en-US" sz="1050" dirty="0">
                         <a:latin typeface="Calibri" charset="0"/>
@@ -15257,7 +22348,72 @@
                           <a:ea typeface="Calibri" pitchFamily="34" charset="-122"/>
                           <a:cs typeface="Calibri" pitchFamily="34" charset="-120"/>
                         </a:rPr>
-                        <a:t>+30.1%</a:t>
+                        <a:t>0.1479</a:t>
+                      </a:r>
+                      <a:endParaRPr lang="en-US" sz="1050" dirty="0">
+                        <a:latin typeface="Calibri" charset="0"/>
+                        <a:ea typeface="Calibri" charset="0"/>
+                        <a:cs typeface="Calibri" charset="0"/>
+                      </a:endParaRPr>
+                    </a:p>
+                  </a:txBody>
+                  <a:tcPr marL="50800" marR="50800" marT="50800" marB="50800" anchor="t">
+                    <a:lnL w="6350" cap="flat" cmpd="sng" algn="ctr">
+                      <a:solidFill>
+                        <a:srgbClr val="DEDCD7"/>
+                      </a:solidFill>
+                      <a:prstDash val="solid"/>
+                      <a:round/>
+                      <a:headEnd type="none" w="med" len="med"/>
+                      <a:tailEnd type="none" w="med" len="med"/>
+                    </a:lnL>
+                    <a:lnR w="6350" cap="flat" cmpd="sng" algn="ctr">
+                      <a:solidFill>
+                        <a:srgbClr val="DEDCD7"/>
+                      </a:solidFill>
+                      <a:prstDash val="solid"/>
+                      <a:round/>
+                      <a:headEnd type="none" w="med" len="med"/>
+                      <a:tailEnd type="none" w="med" len="med"/>
+                    </a:lnR>
+                    <a:lnT w="6350" cap="flat" cmpd="sng" algn="ctr">
+                      <a:solidFill>
+                        <a:srgbClr val="DEDCD7"/>
+                      </a:solidFill>
+                      <a:prstDash val="solid"/>
+                      <a:round/>
+                      <a:headEnd type="none" w="med" len="med"/>
+                      <a:tailEnd type="none" w="med" len="med"/>
+                    </a:lnT>
+                    <a:lnB w="6350" cap="flat" cmpd="sng" algn="ctr">
+                      <a:solidFill>
+                        <a:srgbClr val="DEDCD7"/>
+                      </a:solidFill>
+                      <a:prstDash val="solid"/>
+                      <a:round/>
+                      <a:headEnd type="none" w="med" len="med"/>
+                      <a:tailEnd type="none" w="med" len="med"/>
+                    </a:lnB>
+                  </a:tcPr>
+                </a:tc>
+                <a:tc>
+                  <a:txBody>
+                    <a:bodyPr/>
+                    <a:lstStyle/>
+                    <a:p>
+                      <a:pPr algn="ctr" indent="0" marL="0">
+                        <a:buNone/>
+                      </a:pPr>
+                      <a:r>
+                        <a:rPr lang="en-US" sz="1050" dirty="0">
+                          <a:solidFill>
+                            <a:srgbClr val="1A1A1A"/>
+                          </a:solidFill>
+                          <a:latin typeface="Calibri" pitchFamily="34" charset="0"/>
+                          <a:ea typeface="Calibri" pitchFamily="34" charset="-122"/>
+                          <a:cs typeface="Calibri" pitchFamily="34" charset="-120"/>
+                        </a:rPr>
+                        <a:t>2.74%</a:t>
                       </a:r>
                       <a:endParaRPr lang="en-US" sz="1050" dirty="0">
                         <a:latin typeface="Calibri" charset="0"/>
@@ -15312,14 +22468,53 @@
       </p:graphicFrame>
       <p:sp>
         <p:nvSpPr>
-          <p:cNvPr id="7" name="Shape 4"/>
+          <p:cNvPr id="7" name="Text 4"/>
           <p:cNvSpPr/>
           <p:nvPr/>
         </p:nvSpPr>
         <p:spPr>
           <a:xfrm>
-            <a:off x="777240" y="4114800"/>
-            <a:ext cx="5577840" cy="1417320"/>
+            <a:off x="777240" y="3913632"/>
+            <a:ext cx="10637215" cy="274320"/>
+          </a:xfrm>
+          <a:prstGeom prst="rect">
+            <a:avLst/>
+          </a:prstGeom>
+          <a:noFill/>
+          <a:ln/>
+        </p:spPr>
+        <p:txBody>
+          <a:bodyPr wrap="square" lIns="0" tIns="0" rIns="0" bIns="0" rtlCol="0" anchor="ctr"/>
+          <a:lstStyle/>
+          <a:p>
+            <a:pPr indent="0" marL="0">
+              <a:buNone/>
+            </a:pPr>
+            <a:r>
+              <a:rPr lang="en-US" sz="1050" dirty="0">
+                <a:solidFill>
+                  <a:srgbClr val="6E6E6E"/>
+                </a:solidFill>
+                <a:latin typeface="Calibri" pitchFamily="34" charset="0"/>
+                <a:ea typeface="Calibri" pitchFamily="34" charset="-122"/>
+                <a:cs typeface="Calibri" pitchFamily="34" charset="-120"/>
+              </a:rPr>
+              <a:t>True changed area is 9.58%, so at 0.5 the model over-predicts slightly.</a:t>
+            </a:r>
+            <a:endParaRPr lang="en-US" sz="1050" dirty="0"/>
+          </a:p>
+        </p:txBody>
+      </p:sp>
+      <p:sp>
+        <p:nvSpPr>
+          <p:cNvPr id="8" name="Shape 5"/>
+          <p:cNvSpPr/>
+          <p:nvPr/>
+        </p:nvSpPr>
+        <p:spPr>
+          <a:xfrm>
+            <a:off x="777240" y="4261104"/>
+            <a:ext cx="10637215" cy="1207008"/>
           </a:xfrm>
           <a:prstGeom prst="rect">
             <a:avLst/>
@@ -15332,14 +22527,14 @@
       </p:sp>
       <p:sp>
         <p:nvSpPr>
-          <p:cNvPr id="8" name="Text 5"/>
+          <p:cNvPr id="9" name="Text 6"/>
           <p:cNvSpPr/>
           <p:nvPr/>
         </p:nvSpPr>
         <p:spPr>
           <a:xfrm>
-            <a:off x="1051560" y="4297680"/>
-            <a:ext cx="5029200" cy="201168"/>
+            <a:off x="1069848" y="4425696"/>
+            <a:ext cx="7315200" cy="201168"/>
           </a:xfrm>
           <a:prstGeom prst="rect">
             <a:avLst/>
@@ -15363,7 +22558,7 @@
                 <a:ea typeface="Calibri" pitchFamily="34" charset="-122"/>
                 <a:cs typeface="Calibri" pitchFamily="34" charset="-120"/>
               </a:rPr>
-              <a:t>The premise holds</a:t>
+              <a:t>Selected honestly, on the train-val slice</a:t>
             </a:r>
             <a:endParaRPr lang="en-US" sz="1050" dirty="0"/>
           </a:p>
@@ -15371,14 +22566,14 @@
       </p:sp>
       <p:sp>
         <p:nvSpPr>
-          <p:cNvPr id="9" name="Text 6"/>
+          <p:cNvPr id="10" name="Text 7"/>
           <p:cNvSpPr/>
           <p:nvPr/>
         </p:nvSpPr>
         <p:spPr>
           <a:xfrm>
-            <a:off x="1051560" y="4553712"/>
-            <a:ext cx="5029200" cy="822960"/>
+            <a:off x="1069848" y="4681728"/>
+            <a:ext cx="10051999" cy="694944"/>
           </a:xfrm>
           <a:prstGeom prst="rect">
             <a:avLst/>
@@ -15405,7 +22600,7 @@
                 <a:ea typeface="Calibri" pitchFamily="34" charset="-122"/>
                 <a:cs typeface="Calibri" pitchFamily="34" charset="-120"/>
               </a:rPr>
-              <a:t>Editing inside the correct region is worth 3.3× — net +30.1% against +9.1% for editing the whole frame. Our tuned mask reaches +14.2%, 1.56× better than the status quo.</a:t>
+              <a:t>v2 picks 0.3 (×7) or 0.2 (×5) → dev 0.2185 ± 0.0051, +0.0120 over fixed 0.5 (paired p = 2.9e-07). Insertion rises to 0.134, 63% of its ceiling.</a:t>
             </a:r>
             <a:endParaRPr lang="en-US" sz="1100" dirty="0"/>
           </a:p>
@@ -15413,34 +22608,34 @@
       </p:sp>
       <p:sp>
         <p:nvSpPr>
-          <p:cNvPr id="10" name="Shape 7"/>
+          <p:cNvPr id="11" name="Shape 8"/>
           <p:cNvSpPr/>
           <p:nvPr/>
         </p:nvSpPr>
         <p:spPr>
           <a:xfrm>
-            <a:off x="6629400" y="4114800"/>
-            <a:ext cx="4785055" cy="1417320"/>
+            <a:off x="777240" y="5577840"/>
+            <a:ext cx="10637215" cy="896112"/>
           </a:xfrm>
           <a:prstGeom prst="rect">
             <a:avLst/>
           </a:prstGeom>
           <a:solidFill>
-            <a:srgbClr val="F6F5F2"/>
+            <a:srgbClr val="FBEAEA"/>
           </a:solidFill>
           <a:ln/>
         </p:spPr>
       </p:sp>
       <p:sp>
         <p:nvSpPr>
-          <p:cNvPr id="11" name="Text 8"/>
+          <p:cNvPr id="12" name="Text 9"/>
           <p:cNvSpPr/>
           <p:nvPr/>
         </p:nvSpPr>
         <p:spPr>
           <a:xfrm>
-            <a:off x="6903720" y="4297680"/>
-            <a:ext cx="4114800" cy="201168"/>
+            <a:off x="1069848" y="5724144"/>
+            <a:ext cx="7315200" cy="201168"/>
           </a:xfrm>
           <a:prstGeom prst="rect">
             <a:avLst/>
@@ -15458,57 +22653,15 @@
             <a:r>
               <a:rPr lang="en-US" sz="1050" b="1" spc="80" kern="0" dirty="0">
                 <a:solidFill>
-                  <a:srgbClr val="8C3A1E"/>
+                  <a:srgbClr val="A33A2C"/>
                 </a:solidFill>
                 <a:latin typeface="Calibri" pitchFamily="34" charset="0"/>
                 <a:ea typeface="Calibri" pitchFamily="34" charset="-122"/>
                 <a:cs typeface="Calibri" pitchFamily="34" charset="-120"/>
               </a:rPr>
-              <a:t>And the diagnosis is precise</a:t>
+              <a:t>Why the headline still quotes 0.5</a:t>
             </a:r>
             <a:endParaRPr lang="en-US" sz="1050" dirty="0"/>
-          </a:p>
-        </p:txBody>
-      </p:sp>
-      <p:sp>
-        <p:nvSpPr>
-          <p:cNvPr id="12" name="Text 9"/>
-          <p:cNvSpPr/>
-          <p:nvPr/>
-        </p:nvSpPr>
-        <p:spPr>
-          <a:xfrm>
-            <a:off x="6903720" y="4553712"/>
-            <a:ext cx="3931920" cy="822960"/>
-          </a:xfrm>
-          <a:prstGeom prst="rect">
-            <a:avLst/>
-          </a:prstGeom>
-          <a:noFill/>
-          <a:ln/>
-        </p:spPr>
-        <p:txBody>
-          <a:bodyPr wrap="square" lIns="0" tIns="0" rIns="0" bIns="0" rtlCol="0" anchor="ctr"/>
-          <a:lstStyle/>
-          <a:p>
-            <a:pPr indent="0" marL="0">
-              <a:lnSpc>
-                <a:spcPts val="1500"/>
-              </a:lnSpc>
-              <a:buNone/>
-            </a:pPr>
-            <a:r>
-              <a:rPr lang="en-US" sz="1100" dirty="0">
-                <a:solidFill>
-                  <a:srgbClr val="1A1A1A"/>
-                </a:solidFill>
-                <a:latin typeface="Calibri" pitchFamily="34" charset="0"/>
-                <a:ea typeface="Calibri" pitchFamily="34" charset="-122"/>
-                <a:cs typeface="Calibri" pitchFamily="34" charset="-120"/>
-              </a:rPr>
-              <a:t>Our mask is precision-biased — 1.5% collateral but only 7.5% recall, so gating discarded the edit. Dilation trades precision for recall; swept to 200 px, net peaks at 64 px and falls away either side.</a:t>
-            </a:r>
-            <a:endParaRPr lang="en-US" sz="1100" dirty="0"/>
           </a:p>
         </p:txBody>
       </p:sp>
@@ -15520,8 +22673,8 @@
         </p:nvSpPr>
         <p:spPr>
           <a:xfrm>
-            <a:off x="777240" y="5687568"/>
-            <a:ext cx="10637215" cy="457200"/>
+            <a:off x="1069848" y="5961888"/>
+            <a:ext cx="10051999" cy="457200"/>
           </a:xfrm>
           <a:prstGeom prst="rect">
             <a:avLst/>
@@ -15542,13 +22695,13 @@
             <a:r>
               <a:rPr lang="en-US" sz="1050" dirty="0">
                 <a:solidFill>
-                  <a:srgbClr val="6E6E6E"/>
+                  <a:srgbClr val="A33A2C"/>
                 </a:solidFill>
                 <a:latin typeface="Calibri" pitchFamily="34" charset="0"/>
                 <a:ea typeface="Calibri" pitchFamily="34" charset="-122"/>
                 <a:cs typeface="Calibri" pitchFamily="34" charset="-120"/>
               </a:rPr>
-              <a:t>Coarse supervision costs at the editing stage too, not only on the mask metric: the MagicBrush mask — measured 9.1× too large — loses 11.6 points of net against the ground-truth region.</a:t>
+              <a:t>CLIPSeg is evaluated at its default threshold, so a tuned comparison would tilt toward us. We report the conservative number. With both heads tuned, the v2 lead narrows from +0.0158 to +0.0093.</a:t>
             </a:r>
             <a:endParaRPr lang="en-US" sz="1050" dirty="0"/>
           </a:p>
@@ -15619,7 +22772,7 @@
                 <a:ea typeface="Calibri" pitchFamily="34" charset="-122"/>
                 <a:cs typeface="Calibri" pitchFamily="34" charset="-120"/>
               </a:rPr>
-              <a:t>WHAT WE CHECKED ON OURSELVES</a:t>
+              <a:t>TRAINING DYNAMICS</a:t>
             </a:r>
             <a:endParaRPr lang="en-US" sz="1000" dirty="0"/>
           </a:p>
@@ -15658,7 +22811,7 @@
                 <a:ea typeface="Cambria" pitchFamily="34" charset="-122"/>
                 <a:cs typeface="Cambria" pitchFamily="34" charset="-120"/>
               </a:rPr>
-              <a:t>Every number here survived an attempt to break it</a:t>
+              <a:t>The best epoch is 2–7 of 60, and language carries the signal</a:t>
             </a:r>
             <a:endParaRPr lang="en-US" sz="2600" dirty="0"/>
           </a:p>
@@ -15666,13 +22819,52 @@
       </p:sp>
       <p:sp>
         <p:nvSpPr>
-          <p:cNvPr id="4" name="Shape 2"/>
+          <p:cNvPr id="4" name="Text 2"/>
           <p:cNvSpPr/>
           <p:nvPr/>
         </p:nvSpPr>
         <p:spPr>
           <a:xfrm>
-            <a:off x="777240" y="1188720"/>
+            <a:off x="777240" y="1115568"/>
+            <a:ext cx="10637215" cy="274320"/>
+          </a:xfrm>
+          <a:prstGeom prst="rect">
+            <a:avLst/>
+          </a:prstGeom>
+          <a:noFill/>
+          <a:ln/>
+        </p:spPr>
+        <p:txBody>
+          <a:bodyPr wrap="square" lIns="0" tIns="0" rIns="0" bIns="0" rtlCol="0" anchor="ctr"/>
+          <a:lstStyle/>
+          <a:p>
+            <a:pPr indent="0" marL="0">
+              <a:buNone/>
+            </a:pPr>
+            <a:r>
+              <a:rPr lang="en-US" sz="1200" dirty="0">
+                <a:solidFill>
+                  <a:srgbClr val="6E6E6E"/>
+                </a:solidFill>
+                <a:latin typeface="Calibri" pitchFamily="34" charset="0"/>
+                <a:ea typeface="Calibri" pitchFamily="34" charset="-122"/>
+                <a:cs typeface="Calibri" pitchFamily="34" charset="-120"/>
+              </a:rPr>
+              <a:t>3 seeds per head at 8,306 samples · ▼ marks the epoch actually selected</a:t>
+            </a:r>
+            <a:endParaRPr lang="en-US" sz="1200" dirty="0"/>
+          </a:p>
+        </p:txBody>
+      </p:sp>
+      <p:sp>
+        <p:nvSpPr>
+          <p:cNvPr id="5" name="Shape 3"/>
+          <p:cNvSpPr/>
+          <p:nvPr/>
+        </p:nvSpPr>
+        <p:spPr>
+          <a:xfrm>
+            <a:off x="777240" y="1444752"/>
             <a:ext cx="10637215" cy="10973"/>
           </a:xfrm>
           <a:prstGeom prst="rect">
@@ -15684,6 +22876,30 @@
           <a:ln/>
         </p:spPr>
       </p:sp>
+      <p:pic>
+        <p:nvPicPr>
+          <p:cNvPr id="6" name="Image 0" descr="img/curves.png">    </p:cNvPr>
+          <p:cNvPicPr>
+            <a:picLocks noChangeAspect="1"/>
+          </p:cNvPicPr>
+          <p:nvPr/>
+        </p:nvPicPr>
+        <p:blipFill>
+          <a:blip r:embed="rId1"/>
+          <a:stretch>
+            <a:fillRect/>
+          </a:stretch>
+        </p:blipFill>
+        <p:spPr>
+          <a:xfrm>
+            <a:off x="777240" y="1591056"/>
+            <a:ext cx="7223760" cy="4062857"/>
+          </a:xfrm>
+          <a:prstGeom prst="rect">
+            <a:avLst/>
+          </a:prstGeom>
+        </p:spPr>
+      </p:pic>
       <p:graphicFrame>
         <p:nvGraphicFramePr>
           <p:cNvPr id="10" name="Table 0"/>
@@ -15699,18 +22915,18 @@
           </p:nvPr>
         </p:nvGraphicFramePr>
         <p:xfrm>
-          <a:off x="777240" y="1298448"/>
-          <a:ext cx="10637215" cy="914400"/>
+          <a:off x="8229600" y="1700784"/>
+          <a:ext cx="3182112" cy="914400"/>
         </p:xfrm>
         <a:graphic>
           <a:graphicData uri="http://schemas.openxmlformats.org/drawingml/2006/table">
             <a:tbl>
               <a:tblPr/>
               <a:tblGrid>
-                <a:gridCol w="2651760"/>
-                <a:gridCol w="7982712"/>
+                <a:gridCol w="1143000"/>
+                <a:gridCol w="2039112"/>
               </a:tblGrid>
-              <a:tr h="566928">
+              <a:tr h="822960">
                 <a:tc>
                   <a:txBody>
                     <a:bodyPr/>
@@ -15720,17 +22936,17 @@
                         <a:buNone/>
                       </a:pPr>
                       <a:r>
-                        <a:rPr lang="en-US" sz="1050" b="1" dirty="0">
-                          <a:solidFill>
-                            <a:srgbClr val="1A1A1A"/>
-                          </a:solidFill>
-                          <a:latin typeface="Calibri" pitchFamily="34" charset="0"/>
-                          <a:ea typeface="Calibri" pitchFamily="34" charset="-122"/>
-                          <a:cs typeface="Calibri" pitchFamily="34" charset="-120"/>
-                        </a:rPr>
-                        <a:t>Check</a:t>
-                      </a:r>
-                      <a:endParaRPr lang="en-US" sz="1050" dirty="0">
+                        <a:rPr lang="en-US" sz="900" b="1" dirty="0">
+                          <a:solidFill>
+                            <a:srgbClr val="1A1A1A"/>
+                          </a:solidFill>
+                          <a:latin typeface="Calibri" pitchFamily="34" charset="0"/>
+                          <a:ea typeface="Calibri" pitchFamily="34" charset="-122"/>
+                          <a:cs typeface="Calibri" pitchFamily="34" charset="-120"/>
+                        </a:rPr>
+                        <a:t>Overfits fast</a:t>
+                      </a:r>
+                      <a:endParaRPr lang="en-US" sz="900" dirty="0">
                         <a:latin typeface="Calibri" charset="0"/>
                         <a:ea typeface="Calibri" charset="0"/>
                         <a:cs typeface="Calibri" charset="0"/>
@@ -15788,17 +23004,17 @@
                         <a:buNone/>
                       </a:pPr>
                       <a:r>
-                        <a:rPr lang="en-US" sz="1050" b="1" dirty="0">
-                          <a:solidFill>
-                            <a:srgbClr val="1A1A1A"/>
-                          </a:solidFill>
-                          <a:latin typeface="Calibri" pitchFamily="34" charset="0"/>
-                          <a:ea typeface="Calibri" pitchFamily="34" charset="-122"/>
-                          <a:cs typeface="Calibri" pitchFamily="34" charset="-120"/>
-                        </a:rPr>
-                        <a:t>What it caught</a:t>
-                      </a:r>
-                      <a:endParaRPr lang="en-US" sz="1050" dirty="0">
+                        <a:rPr lang="en-US" sz="900" b="1" dirty="0">
+                          <a:solidFill>
+                            <a:srgbClr val="1A1A1A"/>
+                          </a:solidFill>
+                          <a:latin typeface="Calibri" pitchFamily="34" charset="0"/>
+                          <a:ea typeface="Calibri" pitchFamily="34" charset="-122"/>
+                          <a:cs typeface="Calibri" pitchFamily="34" charset="-120"/>
+                        </a:rPr>
+                        <a:t>validation IoU peaks at epoch 2–7 then halves by epoch 60, while training loss falls throughout</a:t>
+                      </a:r>
+                      <a:endParaRPr lang="en-US" sz="900" dirty="0">
                         <a:latin typeface="Calibri" charset="0"/>
                         <a:ea typeface="Calibri" charset="0"/>
                         <a:cs typeface="Calibri" charset="0"/>
@@ -15848,7 +23064,7 @@
                   </a:tcPr>
                 </a:tc>
               </a:tr>
-              <a:tr h="566928">
+              <a:tr h="822960">
                 <a:tc>
                   <a:txBody>
                     <a:bodyPr/>
@@ -15858,17 +23074,17 @@
                         <a:buNone/>
                       </a:pPr>
                       <a:r>
-                        <a:rPr lang="en-US" sz="1050" dirty="0">
-                          <a:solidFill>
-                            <a:srgbClr val="1A1A1A"/>
-                          </a:solidFill>
-                          <a:latin typeface="Calibri" pitchFamily="34" charset="0"/>
-                          <a:ea typeface="Calibri" pitchFamily="34" charset="-122"/>
-                          <a:cs typeface="Calibri" pitchFamily="34" charset="-120"/>
-                        </a:rPr>
-                        <a:t>Contamination audit</a:t>
-                      </a:r>
-                      <a:endParaRPr lang="en-US" sz="1050" dirty="0">
+                        <a:rPr lang="en-US" sz="900" dirty="0">
+                          <a:solidFill>
+                            <a:srgbClr val="1A1A1A"/>
+                          </a:solidFill>
+                          <a:latin typeface="Calibri" pitchFamily="34" charset="0"/>
+                          <a:ea typeface="Calibri" pitchFamily="34" charset="-122"/>
+                          <a:cs typeface="Calibri" pitchFamily="34" charset="-120"/>
+                        </a:rPr>
+                        <a:t>Selection saved it</a:t>
+                      </a:r>
+                      <a:endParaRPr lang="en-US" sz="900" dirty="0">
                         <a:latin typeface="Calibri" charset="0"/>
                         <a:ea typeface="Calibri" charset="0"/>
                         <a:cs typeface="Calibri" charset="0"/>
@@ -15923,17 +23139,17 @@
                         <a:buNone/>
                       </a:pPr>
                       <a:r>
-                        <a:rPr lang="en-US" sz="1050" dirty="0">
-                          <a:solidFill>
-                            <a:srgbClr val="1A1A1A"/>
-                          </a:solidFill>
-                          <a:latin typeface="Calibri" pitchFamily="34" charset="0"/>
-                          <a:ea typeface="Calibri" pitchFamily="34" charset="-122"/>
-                          <a:cs typeface="Calibri" pitchFamily="34" charset="-120"/>
-                        </a:rPr>
-                        <a:t>an early headline trained on the evaluation split; retracted in the repository and re-run on disjoint shards</a:t>
-                      </a:r>
-                      <a:endParaRPr lang="en-US" sz="1050" dirty="0">
+                        <a:rPr lang="en-US" sz="900" dirty="0">
+                          <a:solidFill>
+                            <a:srgbClr val="1A1A1A"/>
+                          </a:solidFill>
+                          <a:latin typeface="Calibri" pitchFamily="34" charset="0"/>
+                          <a:ea typeface="Calibri" pitchFamily="34" charset="-122"/>
+                          <a:cs typeface="Calibri" pitchFamily="34" charset="-120"/>
+                        </a:rPr>
+                        <a:t>choosing on a held-out train slice is why the reported numbers hold; the last epoch would have reported half</a:t>
+                      </a:r>
+                      <a:endParaRPr lang="en-US" sz="900" dirty="0">
                         <a:latin typeface="Calibri" charset="0"/>
                         <a:ea typeface="Calibri" charset="0"/>
                         <a:cs typeface="Calibri" charset="0"/>
@@ -15980,7 +23196,7 @@
                   </a:tcPr>
                 </a:tc>
               </a:tr>
-              <a:tr h="566928">
+              <a:tr h="822960">
                 <a:tc>
                   <a:txBody>
                     <a:bodyPr/>
@@ -15990,17 +23206,17 @@
                         <a:buNone/>
                       </a:pPr>
                       <a:r>
-                        <a:rPr lang="en-US" sz="1050" dirty="0">
-                          <a:solidFill>
-                            <a:srgbClr val="1A1A1A"/>
-                          </a:solidFill>
-                          <a:latin typeface="Calibri" pitchFamily="34" charset="0"/>
-                          <a:ea typeface="Calibri" pitchFamily="34" charset="-122"/>
-                          <a:cs typeface="Calibri" pitchFamily="34" charset="-120"/>
-                        </a:rPr>
-                        <a:t>Selection-bias audit</a:t>
-                      </a:r>
-                      <a:endParaRPr lang="en-US" sz="1050" dirty="0">
+                        <a:rPr lang="en-US" sz="900" dirty="0">
+                          <a:solidFill>
+                            <a:srgbClr val="1A1A1A"/>
+                          </a:solidFill>
+                          <a:latin typeface="Calibri" pitchFamily="34" charset="0"/>
+                          <a:ea typeface="Calibri" pitchFamily="34" charset="-122"/>
+                          <a:cs typeface="Calibri" pitchFamily="34" charset="-120"/>
+                        </a:rPr>
+                        <a:t>Language is real</a:t>
+                      </a:r>
+                      <a:endParaRPr lang="en-US" sz="900" dirty="0">
                         <a:latin typeface="Calibri" charset="0"/>
                         <a:ea typeface="Calibri" charset="0"/>
                         <a:cs typeface="Calibri" charset="0"/>
@@ -16055,17 +23271,17 @@
                         <a:buNone/>
                       </a:pPr>
                       <a:r>
-                        <a:rPr lang="en-US" sz="1050" dirty="0">
-                          <a:solidFill>
-                            <a:srgbClr val="1A1A1A"/>
-                          </a:solidFill>
-                          <a:latin typeface="Calibri" pitchFamily="34" charset="0"/>
-                          <a:ea typeface="Calibri" pitchFamily="34" charset="-122"/>
-                          <a:cs typeface="Calibri" pitchFamily="34" charset="-120"/>
-                        </a:rPr>
-                        <a:t>choosing the best epoch by dev IoU had inverted the v1/v2 conclusion; selection moved to a held-out slice of train</a:t>
-                      </a:r>
-                      <a:endParaRPr lang="en-US" sz="1050" dirty="0">
+                        <a:rPr lang="en-US" sz="900" dirty="0">
+                          <a:solidFill>
+                            <a:srgbClr val="1A1A1A"/>
+                          </a:solidFill>
+                          <a:latin typeface="Calibri" pitchFamily="34" charset="0"/>
+                          <a:ea typeface="Calibri" pitchFamily="34" charset="-122"/>
+                          <a:cs typeface="Calibri" pitchFamily="34" charset="-120"/>
+                        </a:rPr>
+                        <a:t>zeroing the instruction collapses IoU from 0.188 to ~0.03 — a gap of +0.158</a:t>
+                      </a:r>
+                      <a:endParaRPr lang="en-US" sz="900" dirty="0">
                         <a:latin typeface="Calibri" charset="0"/>
                         <a:ea typeface="Calibri" charset="0"/>
                         <a:cs typeface="Calibri" charset="0"/>
@@ -16112,7 +23328,7 @@
                   </a:tcPr>
                 </a:tc>
               </a:tr>
-              <a:tr h="566928">
+              <a:tr h="822960">
                 <a:tc>
                   <a:txBody>
                     <a:bodyPr/>
@@ -16122,17 +23338,17 @@
                         <a:buNone/>
                       </a:pPr>
                       <a:r>
-                        <a:rPr lang="en-US" sz="1050" dirty="0">
-                          <a:solidFill>
-                            <a:srgbClr val="1A1A1A"/>
-                          </a:solidFill>
-                          <a:latin typeface="Calibri" pitchFamily="34" charset="0"/>
-                          <a:ea typeface="Calibri" pitchFamily="34" charset="-122"/>
-                          <a:cs typeface="Calibri" pitchFamily="34" charset="-120"/>
-                        </a:rPr>
-                        <a:t>Random-basis controls</a:t>
-                      </a:r>
-                      <a:endParaRPr lang="en-US" sz="1050" dirty="0">
+                        <a:rPr lang="en-US" sz="900" dirty="0">
+                          <a:solidFill>
+                            <a:srgbClr val="1A1A1A"/>
+                          </a:solidFill>
+                          <a:latin typeface="Calibri" pitchFamily="34" charset="0"/>
+                          <a:ea typeface="Calibri" pitchFamily="34" charset="-122"/>
+                          <a:cs typeface="Calibri" pitchFamily="34" charset="-120"/>
+                        </a:rPr>
+                        <a:t>Reproducible</a:t>
+                      </a:r>
+                      <a:endParaRPr lang="en-US" sz="900" dirty="0">
                         <a:latin typeface="Calibri" charset="0"/>
                         <a:ea typeface="Calibri" charset="0"/>
                         <a:cs typeface="Calibri" charset="0"/>
@@ -16187,281 +23403,17 @@
                         <a:buNone/>
                       </a:pPr>
                       <a:r>
-                        <a:rPr lang="en-US" sz="1050" dirty="0">
-                          <a:solidFill>
-                            <a:srgbClr val="1A1A1A"/>
-                          </a:solidFill>
-                          <a:latin typeface="Calibri" pitchFamily="34" charset="0"/>
-                          <a:ea typeface="Calibri" pitchFamily="34" charset="-122"/>
-                          <a:cs typeface="Calibri" pitchFamily="34" charset="-120"/>
-                        </a:rPr>
-                        <a:t>two proposed improvements — free-space and geometric bases — failed against noise and were dropped</a:t>
-                      </a:r>
-                      <a:endParaRPr lang="en-US" sz="1050" dirty="0">
-                        <a:latin typeface="Calibri" charset="0"/>
-                        <a:ea typeface="Calibri" charset="0"/>
-                        <a:cs typeface="Calibri" charset="0"/>
-                      </a:endParaRPr>
-                    </a:p>
-                  </a:txBody>
-                  <a:tcPr marL="50800" marR="50800" marT="50800" marB="50800" anchor="t">
-                    <a:lnL w="6350" cap="flat" cmpd="sng" algn="ctr">
-                      <a:solidFill>
-                        <a:srgbClr val="DEDCD7"/>
-                      </a:solidFill>
-                      <a:prstDash val="solid"/>
-                      <a:round/>
-                      <a:headEnd type="none" w="med" len="med"/>
-                      <a:tailEnd type="none" w="med" len="med"/>
-                    </a:lnL>
-                    <a:lnR w="6350" cap="flat" cmpd="sng" algn="ctr">
-                      <a:solidFill>
-                        <a:srgbClr val="DEDCD7"/>
-                      </a:solidFill>
-                      <a:prstDash val="solid"/>
-                      <a:round/>
-                      <a:headEnd type="none" w="med" len="med"/>
-                      <a:tailEnd type="none" w="med" len="med"/>
-                    </a:lnR>
-                    <a:lnT w="6350" cap="flat" cmpd="sng" algn="ctr">
-                      <a:solidFill>
-                        <a:srgbClr val="DEDCD7"/>
-                      </a:solidFill>
-                      <a:prstDash val="solid"/>
-                      <a:round/>
-                      <a:headEnd type="none" w="med" len="med"/>
-                      <a:tailEnd type="none" w="med" len="med"/>
-                    </a:lnT>
-                    <a:lnB w="6350" cap="flat" cmpd="sng" algn="ctr">
-                      <a:solidFill>
-                        <a:srgbClr val="DEDCD7"/>
-                      </a:solidFill>
-                      <a:prstDash val="solid"/>
-                      <a:round/>
-                      <a:headEnd type="none" w="med" len="med"/>
-                      <a:tailEnd type="none" w="med" len="med"/>
-                    </a:lnB>
-                  </a:tcPr>
-                </a:tc>
-              </a:tr>
-              <a:tr h="566928">
-                <a:tc>
-                  <a:txBody>
-                    <a:bodyPr/>
-                    <a:lstStyle/>
-                    <a:p>
-                      <a:pPr indent="0" marL="0">
-                        <a:buNone/>
-                      </a:pPr>
-                      <a:r>
-                        <a:rPr lang="en-US" sz="1050" dirty="0">
-                          <a:solidFill>
-                            <a:srgbClr val="1A1A1A"/>
-                          </a:solidFill>
-                          <a:latin typeface="Calibri" pitchFamily="34" charset="0"/>
-                          <a:ea typeface="Calibri" pitchFamily="34" charset="-122"/>
-                          <a:cs typeface="Calibri" pitchFamily="34" charset="-120"/>
-                        </a:rPr>
-                        <a:t>Resolution matching</a:t>
-                      </a:r>
-                      <a:endParaRPr lang="en-US" sz="1050" dirty="0">
-                        <a:latin typeface="Calibri" charset="0"/>
-                        <a:ea typeface="Calibri" charset="0"/>
-                        <a:cs typeface="Calibri" charset="0"/>
-                      </a:endParaRPr>
-                    </a:p>
-                  </a:txBody>
-                  <a:tcPr marL="50800" marR="50800" marT="50800" marB="50800" anchor="t">
-                    <a:lnL w="6350" cap="flat" cmpd="sng" algn="ctr">
-                      <a:solidFill>
-                        <a:srgbClr val="DEDCD7"/>
-                      </a:solidFill>
-                      <a:prstDash val="solid"/>
-                      <a:round/>
-                      <a:headEnd type="none" w="med" len="med"/>
-                      <a:tailEnd type="none" w="med" len="med"/>
-                    </a:lnL>
-                    <a:lnR w="6350" cap="flat" cmpd="sng" algn="ctr">
-                      <a:solidFill>
-                        <a:srgbClr val="DEDCD7"/>
-                      </a:solidFill>
-                      <a:prstDash val="solid"/>
-                      <a:round/>
-                      <a:headEnd type="none" w="med" len="med"/>
-                      <a:tailEnd type="none" w="med" len="med"/>
-                    </a:lnR>
-                    <a:lnT w="6350" cap="flat" cmpd="sng" algn="ctr">
-                      <a:solidFill>
-                        <a:srgbClr val="DEDCD7"/>
-                      </a:solidFill>
-                      <a:prstDash val="solid"/>
-                      <a:round/>
-                      <a:headEnd type="none" w="med" len="med"/>
-                      <a:tailEnd type="none" w="med" len="med"/>
-                    </a:lnT>
-                    <a:lnB w="6350" cap="flat" cmpd="sng" algn="ctr">
-                      <a:solidFill>
-                        <a:srgbClr val="DEDCD7"/>
-                      </a:solidFill>
-                      <a:prstDash val="solid"/>
-                      <a:round/>
-                      <a:headEnd type="none" w="med" len="med"/>
-                      <a:tailEnd type="none" w="med" len="med"/>
-                    </a:lnB>
-                  </a:tcPr>
-                </a:tc>
-                <a:tc>
-                  <a:txBody>
-                    <a:bodyPr/>
-                    <a:lstStyle/>
-                    <a:p>
-                      <a:pPr indent="0" marL="0">
-                        <a:buNone/>
-                      </a:pPr>
-                      <a:r>
-                        <a:rPr lang="en-US" sz="1050" dirty="0">
-                          <a:solidFill>
-                            <a:srgbClr val="1A1A1A"/>
-                          </a:solidFill>
-                          <a:latin typeface="Calibri" pitchFamily="34" charset="0"/>
-                          <a:ea typeface="Calibri" pitchFamily="34" charset="-122"/>
-                          <a:cs typeface="Calibri" pitchFamily="34" charset="-120"/>
-                        </a:rPr>
-                        <a:t>latency was measured at 640 px against CLIPSeg’s 352 px; re-measured matched, 9.7× rather than 10.8×</a:t>
-                      </a:r>
-                      <a:endParaRPr lang="en-US" sz="1050" dirty="0">
-                        <a:latin typeface="Calibri" charset="0"/>
-                        <a:ea typeface="Calibri" charset="0"/>
-                        <a:cs typeface="Calibri" charset="0"/>
-                      </a:endParaRPr>
-                    </a:p>
-                  </a:txBody>
-                  <a:tcPr marL="50800" marR="50800" marT="50800" marB="50800" anchor="t">
-                    <a:lnL w="6350" cap="flat" cmpd="sng" algn="ctr">
-                      <a:solidFill>
-                        <a:srgbClr val="DEDCD7"/>
-                      </a:solidFill>
-                      <a:prstDash val="solid"/>
-                      <a:round/>
-                      <a:headEnd type="none" w="med" len="med"/>
-                      <a:tailEnd type="none" w="med" len="med"/>
-                    </a:lnL>
-                    <a:lnR w="6350" cap="flat" cmpd="sng" algn="ctr">
-                      <a:solidFill>
-                        <a:srgbClr val="DEDCD7"/>
-                      </a:solidFill>
-                      <a:prstDash val="solid"/>
-                      <a:round/>
-                      <a:headEnd type="none" w="med" len="med"/>
-                      <a:tailEnd type="none" w="med" len="med"/>
-                    </a:lnR>
-                    <a:lnT w="6350" cap="flat" cmpd="sng" algn="ctr">
-                      <a:solidFill>
-                        <a:srgbClr val="DEDCD7"/>
-                      </a:solidFill>
-                      <a:prstDash val="solid"/>
-                      <a:round/>
-                      <a:headEnd type="none" w="med" len="med"/>
-                      <a:tailEnd type="none" w="med" len="med"/>
-                    </a:lnT>
-                    <a:lnB w="6350" cap="flat" cmpd="sng" algn="ctr">
-                      <a:solidFill>
-                        <a:srgbClr val="DEDCD7"/>
-                      </a:solidFill>
-                      <a:prstDash val="solid"/>
-                      <a:round/>
-                      <a:headEnd type="none" w="med" len="med"/>
-                      <a:tailEnd type="none" w="med" len="med"/>
-                    </a:lnB>
-                  </a:tcPr>
-                </a:tc>
-              </a:tr>
-              <a:tr h="566928">
-                <a:tc>
-                  <a:txBody>
-                    <a:bodyPr/>
-                    <a:lstStyle/>
-                    <a:p>
-                      <a:pPr indent="0" marL="0">
-                        <a:buNone/>
-                      </a:pPr>
-                      <a:r>
-                        <a:rPr lang="en-US" sz="1050" dirty="0">
-                          <a:solidFill>
-                            <a:srgbClr val="1A1A1A"/>
-                          </a:solidFill>
-                          <a:latin typeface="Calibri" pitchFamily="34" charset="0"/>
-                          <a:ea typeface="Calibri" pitchFamily="34" charset="-122"/>
-                          <a:cs typeface="Calibri" pitchFamily="34" charset="-120"/>
-                        </a:rPr>
-                        <a:t>Ceiling consistency</a:t>
-                      </a:r>
-                      <a:endParaRPr lang="en-US" sz="1050" dirty="0">
-                        <a:latin typeface="Calibri" charset="0"/>
-                        <a:ea typeface="Calibri" charset="0"/>
-                        <a:cs typeface="Calibri" charset="0"/>
-                      </a:endParaRPr>
-                    </a:p>
-                  </a:txBody>
-                  <a:tcPr marL="50800" marR="50800" marT="50800" marB="50800" anchor="t">
-                    <a:lnL w="6350" cap="flat" cmpd="sng" algn="ctr">
-                      <a:solidFill>
-                        <a:srgbClr val="DEDCD7"/>
-                      </a:solidFill>
-                      <a:prstDash val="solid"/>
-                      <a:round/>
-                      <a:headEnd type="none" w="med" len="med"/>
-                      <a:tailEnd type="none" w="med" len="med"/>
-                    </a:lnL>
-                    <a:lnR w="6350" cap="flat" cmpd="sng" algn="ctr">
-                      <a:solidFill>
-                        <a:srgbClr val="DEDCD7"/>
-                      </a:solidFill>
-                      <a:prstDash val="solid"/>
-                      <a:round/>
-                      <a:headEnd type="none" w="med" len="med"/>
-                      <a:tailEnd type="none" w="med" len="med"/>
-                    </a:lnR>
-                    <a:lnT w="6350" cap="flat" cmpd="sng" algn="ctr">
-                      <a:solidFill>
-                        <a:srgbClr val="DEDCD7"/>
-                      </a:solidFill>
-                      <a:prstDash val="solid"/>
-                      <a:round/>
-                      <a:headEnd type="none" w="med" len="med"/>
-                      <a:tailEnd type="none" w="med" len="med"/>
-                    </a:lnT>
-                    <a:lnB w="6350" cap="flat" cmpd="sng" algn="ctr">
-                      <a:solidFill>
-                        <a:srgbClr val="DEDCD7"/>
-                      </a:solidFill>
-                      <a:prstDash val="solid"/>
-                      <a:round/>
-                      <a:headEnd type="none" w="med" len="med"/>
-                      <a:tailEnd type="none" w="med" len="med"/>
-                    </a:lnB>
-                  </a:tcPr>
-                </a:tc>
-                <a:tc>
-                  <a:txBody>
-                    <a:bodyPr/>
-                    <a:lstStyle/>
-                    <a:p>
-                      <a:pPr indent="0" marL="0">
-                        <a:buNone/>
-                      </a:pPr>
-                      <a:r>
-                        <a:rPr lang="en-US" sz="1050" dirty="0">
-                          <a:solidFill>
-                            <a:srgbClr val="1A1A1A"/>
-                          </a:solidFill>
-                          <a:latin typeface="Calibri" pitchFamily="34" charset="0"/>
-                          <a:ea typeface="Calibri" pitchFamily="34" charset="-122"/>
-                          <a:cs typeface="Calibri" pitchFamily="34" charset="-120"/>
-                        </a:rPr>
-                        <a:t>the headroom figure compared a train-set bound to a dev score; recomputed on dev</a:t>
-                      </a:r>
-                      <a:endParaRPr lang="en-US" sz="1050" dirty="0">
+                        <a:rPr lang="en-US" sz="900" dirty="0">
+                          <a:solidFill>
+                            <a:srgbClr val="1A1A1A"/>
+                          </a:solidFill>
+                          <a:latin typeface="Calibri" pitchFamily="34" charset="0"/>
+                          <a:ea typeface="Calibri" pitchFamily="34" charset="-122"/>
+                          <a:cs typeface="Calibri" pitchFamily="34" charset="-120"/>
+                        </a:rPr>
+                        <a:t>all 6 curve seeds reproduced their 12-seed dev IoU exactly, to four decimals</a:t>
+                      </a:r>
+                      <a:endParaRPr lang="en-US" sz="900" dirty="0">
                         <a:latin typeface="Calibri" charset="0"/>
                         <a:ea typeface="Calibri" charset="0"/>
                         <a:cs typeface="Calibri" charset="0"/>
@@ -16514,14 +23466,14 @@
       </p:graphicFrame>
       <p:sp>
         <p:nvSpPr>
-          <p:cNvPr id="6" name="Shape 3"/>
+          <p:cNvPr id="8" name="Shape 4"/>
           <p:cNvSpPr/>
           <p:nvPr/>
         </p:nvSpPr>
         <p:spPr>
           <a:xfrm>
-            <a:off x="777240" y="4663440"/>
-            <a:ext cx="10637215" cy="868680"/>
+            <a:off x="777240" y="5687568"/>
+            <a:ext cx="10637215" cy="777240"/>
           </a:xfrm>
           <a:prstGeom prst="rect">
             <a:avLst/>
@@ -16534,14 +23486,14 @@
       </p:sp>
       <p:sp>
         <p:nvSpPr>
-          <p:cNvPr id="7" name="Text 4"/>
+          <p:cNvPr id="9" name="Text 5"/>
           <p:cNvSpPr/>
           <p:nvPr/>
         </p:nvSpPr>
         <p:spPr>
           <a:xfrm>
-            <a:off x="1069848" y="4864608"/>
-            <a:ext cx="10051999" cy="548640"/>
+            <a:off x="1069848" y="5852160"/>
+            <a:ext cx="10051999" cy="512064"/>
           </a:xfrm>
           <a:prstGeom prst="rect">
             <a:avLst/>
@@ -16555,100 +23507,22 @@
           <a:p>
             <a:pPr indent="0" marL="0">
               <a:lnSpc>
-                <a:spcPts val="1700"/>
+                <a:spcPts val="1500"/>
               </a:lnSpc>
               <a:buNone/>
             </a:pPr>
             <a:r>
-              <a:rPr lang="en-US" sz="1300" dirty="0">
+              <a:rPr lang="en-US" sz="1100" dirty="0">
                 <a:solidFill>
                   <a:srgbClr val="1A1A1A"/>
-                </a:solidFill>
-                <a:latin typeface="Cambria" pitchFamily="34" charset="0"/>
-                <a:ea typeface="Cambria" pitchFamily="34" charset="-122"/>
-                <a:cs typeface="Cambria" pitchFamily="34" charset="-120"/>
-              </a:rPr>
-              <a:t>Two claims were retracted and two proposed improvements rejected by their own controls. That is why the three results that remain are worth stating.</a:t>
-            </a:r>
-            <a:endParaRPr lang="en-US" sz="1300" dirty="0"/>
-          </a:p>
-        </p:txBody>
-      </p:sp>
-      <p:sp>
-        <p:nvSpPr>
-          <p:cNvPr id="8" name="Text 5"/>
-          <p:cNvSpPr/>
-          <p:nvPr/>
-        </p:nvSpPr>
-        <p:spPr>
-          <a:xfrm>
-            <a:off x="777240" y="5715000"/>
-            <a:ext cx="9144000" cy="201168"/>
-          </a:xfrm>
-          <a:prstGeom prst="rect">
-            <a:avLst/>
-          </a:prstGeom>
-          <a:noFill/>
-          <a:ln/>
-        </p:spPr>
-        <p:txBody>
-          <a:bodyPr wrap="square" lIns="0" tIns="0" rIns="0" bIns="0" rtlCol="0" anchor="ctr"/>
-          <a:lstStyle/>
-          <a:p>
-            <a:pPr indent="0" marL="0">
-              <a:buNone/>
-            </a:pPr>
-            <a:r>
-              <a:rPr lang="en-US" sz="1050" b="1" spc="80" kern="0" dirty="0">
-                <a:solidFill>
-                  <a:srgbClr val="8C3A1E"/>
                 </a:solidFill>
                 <a:latin typeface="Calibri" pitchFamily="34" charset="0"/>
                 <a:ea typeface="Calibri" pitchFamily="34" charset="-122"/>
                 <a:cs typeface="Calibri" pitchFamily="34" charset="-120"/>
               </a:rPr>
-              <a:t>Known limitation, not yet quantified</a:t>
+              <a:t>Latency, resolution-matched at CLIPSeg's native 352 px:  v2 per-instruction 5.30 ms vs 54.3 ms = 10.3×, at 32× fewer trainable parameters.  The backbone runs once per image (33.6 ms); each further instruction costs only the head.</a:t>
             </a:r>
-            <a:endParaRPr lang="en-US" sz="1050" dirty="0"/>
-          </a:p>
-        </p:txBody>
-      </p:sp>
-      <p:sp>
-        <p:nvSpPr>
-          <p:cNvPr id="9" name="Text 6"/>
-          <p:cNvSpPr/>
-          <p:nvPr/>
-        </p:nvSpPr>
-        <p:spPr>
-          <a:xfrm>
-            <a:off x="777240" y="5943600"/>
-            <a:ext cx="10637215" cy="365760"/>
-          </a:xfrm>
-          <a:prstGeom prst="rect">
-            <a:avLst/>
-          </a:prstGeom>
-          <a:noFill/>
-          <a:ln/>
-        </p:spPr>
-        <p:txBody>
-          <a:bodyPr wrap="square" lIns="0" tIns="0" rIns="0" bIns="0" rtlCol="0" anchor="ctr"/>
-          <a:lstStyle/>
-          <a:p>
-            <a:pPr indent="0" marL="0">
-              <a:buNone/>
-            </a:pPr>
-            <a:r>
-              <a:rPr lang="en-US" sz="1050" dirty="0">
-                <a:solidFill>
-                  <a:srgbClr val="6E6E6E"/>
-                </a:solidFill>
-                <a:latin typeface="Calibri" pitchFamily="34" charset="0"/>
-                <a:ea typeface="Calibri" pitchFamily="34" charset="-122"/>
-                <a:cs typeface="Calibri" pitchFamily="34" charset="-120"/>
-              </a:rPr>
-              <a:t>The remove ceiling on dev rests on 32 samples and carries uncertainty the figure does not show.</a:t>
-            </a:r>
-            <a:endParaRPr lang="en-US" sz="1050" dirty="0"/>
+            <a:endParaRPr lang="en-US" sz="1100" dirty="0"/>
           </a:p>
         </p:txBody>
       </p:sp>

--- a/deck/ISE_Review1_Final.pptx
+++ b/deck/ISE_Review1_Final.pptx
@@ -18,9 +18,10 @@
     <p:sldId id="266" r:id="rId12"/>
     <p:sldId id="267" r:id="rId13"/>
     <p:sldId id="268" r:id="rId14"/>
+    <p:sldId id="269" r:id="rId15"/>
   </p:sldIdLst>
   <p:notesMasterIdLst>
-    <p:notesMasterId r:id="rId15"/>
+    <p:notesMasterId r:id="rId16"/>
   </p:notesMasterIdLst>
   <p:sldSz cx="12191695" cy="6858000"/>
   <p:notesSz cx="6858000" cy="12191695"/>
@@ -698,12 +699,11 @@
           <a:p>
             <a:r>
               <a:rPr lang="en-US" dirty="0"/>
-              <a:t>This slide is the credibility slide. Do not rush it.
-"Every number in this deck survived an attempt to break it." Then pick two.
-The contamination one: an overnight script merged dev into train. We caught it because a baseline scored 0.3743 against a training-time 0.1397 — a gap too big to be a metric difference. We retracted the headline and the beats-human-annotation claim, and re-ran on disjoint shards.
-The selection one: choosing the best epoch by dev IoU had INVERTED the v1-versus-v2 conclusion. Not inflated it — inverted it.
-Also worth a sentence: two of our own proposed improvements, the free-space and geometric bases, lost to a random control of equal size and were dropped.
-Land it: two claims retracted, two ideas rejected by their own controls. That is why the results that remain are worth stating.</a:t>
+              <a:t>This is the strongest downstream result and it came from re-tuning, not from a new model.
+The first inpainting run reused 64 px of dilation from the compositing experiment, where an over-large mask costs nothing because it can only subtract. Under inpainting the mask decides what gets REGENERATED, so too much dilation destroys content that should have been preserved. Collateral came out at 39.1% — worse than whole-frame editing.
+Sweeping threshold and dilation jointly, 20 cells, found 0.3 and 32 px: +39.5% net at 22.2% collateral. That is below whole-frame's 24.2%, so we beat the status quo on both quantities now.
+The shape is the real finding. Every row has its own peak and the optimal dilation rises with the threshold. A higher threshold gives a smaller raw mask which needs more dilation to reach the same coverage, so the two trade along a ridge. That is exactly why sweeping dilation alone returned a local optimum.
+If asked why not more samples: 60 per cell, one editor, one guidance setting. Say so.</a:t>
             </a:r>
             <a:endParaRPr lang="en-US" dirty="0"/>
           </a:p>
@@ -791,11 +791,12 @@
           <a:p>
             <a:r>
               <a:rPr lang="en-US" dirty="0"/>
-              <a:t>Where this goes, and the bar each step has to clear.
-Month 1 is DONE — that is this review. All 51 shards, 8,306 turns, 24 seeded runs, 0.1718 to 0.2065.
-Month 2 is the real research problem and I want to be precise about it. We fitted coefficients directly to ground truth by least squares. That is an upper bound on what ANY predictor can do with these 32 prototypes: 0.212 for insertion, against 0.433 for removal. Insertion — the case this project exists for — has the lowest ceiling, because FastSAM's prototypes were trained to segment objects, and objects are not empty space.
-More data cannot pass that. We are at 56 percent of it. So month 2 attacks the BASIS, not the head — and any new basis must beat a random basis of equal size, because that is the test our last attempt failed.
-Month 3 is editing and evaluation for Review 2.</a:t>
+              <a:t>This slide is the credibility slide. Do not rush it.
+"Every number in this deck survived an attempt to break it." Then pick two.
+The contamination one: an overnight script merged dev into train. We caught it because a baseline scored 0.3743 against a training-time 0.1397 — a gap too big to be a metric difference. We retracted the headline and the beats-human-annotation claim, and re-ran on disjoint shards.
+The selection one: choosing the best epoch by dev IoU had INVERTED the v1-versus-v2 conclusion. Not inflated it — inverted it.
+Also worth a sentence: two of our own proposed improvements, the free-space and geometric bases, lost to a random control of equal size and were dropped.
+Land it: two claims retracted, two ideas rejected by their own controls. That is why the results that remain are worth stating.</a:t>
             </a:r>
             <a:endParaRPr lang="en-US" dirty="0"/>
           </a:p>
@@ -883,6 +884,98 @@
           <a:p>
             <a:r>
               <a:rPr lang="en-US" dirty="0"/>
+              <a:t>Where this goes, and the bar each step has to clear.
+Month 1 is DONE — that is this review. All 51 shards, 8,306 turns, 24 seeded runs, 0.1718 to 0.2065.
+Month 2 is the real research problem and I want to be precise about it. We fitted coefficients directly to ground truth by least squares. That is an upper bound on what ANY predictor can do with these 32 prototypes: 0.212 for insertion, against 0.433 for removal. Insertion — the case this project exists for — has the lowest ceiling, because FastSAM's prototypes were trained to segment objects, and objects are not empty space.
+More data cannot pass that. We are at 56 percent of it. So month 2 attacks the BASIS, not the head — and any new basis must beat a random basis of equal size, because that is the test our last attempt failed.
+Month 3 is editing and evaluation for Review 2.</a:t>
+            </a:r>
+            <a:endParaRPr lang="en-US" dirty="0"/>
+          </a:p>
+        </p:txBody>
+      </p:sp>
+      <p:sp>
+        <p:nvSpPr>
+          <p:cNvPr id="4" name="Slide Number Placeholder 3"/>
+          <p:cNvSpPr>
+            <a:spLocks noGrp="1"/>
+          </p:cNvSpPr>
+          <p:nvPr>
+            <p:ph type="sldNum" sz="quarter" idx="10"/>
+          </p:nvPr>
+        </p:nvSpPr>
+        <p:spPr/>
+        <p:txBody>
+          <a:bodyPr/>
+          <a:lstStyle/>
+          <a:p>
+            <a:fld id="{F7021451-1387-4CA6-816F-3879F97B5CBC}" type="slidenum">
+              <a:rPr lang="en-US"/>
+              <a:t>13</a:t>
+            </a:fld>
+            <a:endParaRPr lang="en-US"/>
+          </a:p>
+        </p:txBody>
+      </p:sp>
+    </p:spTree>
+    <p:extLst>
+      <p:ext uri="{BB962C8B-B14F-4D97-AF65-F5344CB8AC3E}">
+        <p14:creationId xmlns:p14="http://schemas.microsoft.com/office/powerpoint/2010/main" val="1024086991"/>
+      </p:ext>
+    </p:extLst>
+  </p:cSld>
+  <p:clrMapOvr>
+    <a:masterClrMapping/>
+  </p:clrMapOvr>
+</p:notes>
+</file>
+
+<file path=ppt/notesSlides/notesSlide14.xml><?xml version="1.0" encoding="utf-8"?>
+<p:notes xmlns:a="http://schemas.openxmlformats.org/drawingml/2006/main" xmlns:r="http://schemas.openxmlformats.org/officeDocument/2006/relationships" xmlns:p="http://schemas.openxmlformats.org/presentationml/2006/main">
+  <p:cSld>
+    <p:spTree>
+      <p:nvGrpSpPr>
+        <p:cNvPr id="1" name=""/>
+        <p:cNvGrpSpPr/>
+        <p:nvPr/>
+      </p:nvGrpSpPr>
+      <p:grpSpPr>
+        <a:xfrm>
+          <a:off x="0" y="0"/>
+          <a:ext cx="0" cy="0"/>
+          <a:chOff x="0" y="0"/>
+          <a:chExt cx="0" cy="0"/>
+        </a:xfrm>
+      </p:grpSpPr>
+      <p:sp>
+        <p:nvSpPr>
+          <p:cNvPr id="2" name="Slide Image Placeholder 1"/>
+          <p:cNvSpPr>
+            <a:spLocks noGrp="1" noRot="1" noChangeAspect="1"/>
+          </p:cNvSpPr>
+          <p:nvPr>
+            <p:ph type="sldImg"/>
+          </p:nvPr>
+        </p:nvSpPr>
+        <p:spPr/>
+      </p:sp>
+      <p:sp>
+        <p:nvSpPr>
+          <p:cNvPr id="3" name="Notes Placeholder 2"/>
+          <p:cNvSpPr>
+            <a:spLocks noGrp="1"/>
+          </p:cNvSpPr>
+          <p:nvPr>
+            <p:ph type="body" idx="1"/>
+          </p:nvPr>
+        </p:nvSpPr>
+        <p:spPr/>
+        <p:txBody>
+          <a:bodyPr/>
+          <a:lstStyle/>
+          <a:p>
+            <a:r>
+              <a:rPr lang="en-US" dirty="0"/>
               <a:t>Closing.
 "Everything reproduces. One repository, 13 experiments, every result seeded, every figure regenerated from committed JSON. It runs on a MacBook."
 Then stop talking and take questions.
@@ -913,7 +1006,7 @@
           <a:p>
             <a:fld id="{F7021451-1387-4CA6-816F-3879F97B5CBC}" type="slidenum">
               <a:rPr lang="en-US"/>
-              <a:t>13</a:t>
+              <a:t>14</a:t>
             </a:fld>
             <a:endParaRPr lang="en-US"/>
           </a:p>
@@ -4199,6 +4292,2851 @@
                 <a:ea typeface="Georgia" pitchFamily="34" charset="-122"/>
                 <a:cs typeface="Georgia" pitchFamily="34" charset="-120"/>
               </a:rPr>
+              <a:t>Stage 2, part two</a:t>
+            </a:r>
+            <a:endParaRPr lang="en-US" sz="1050" dirty="0"/>
+          </a:p>
+        </p:txBody>
+      </p:sp>
+      <p:sp>
+        <p:nvSpPr>
+          <p:cNvPr id="3" name="Text 1"/>
+          <p:cNvSpPr/>
+          <p:nvPr/>
+        </p:nvSpPr>
+        <p:spPr>
+          <a:xfrm>
+            <a:off x="777240" y="603504"/>
+            <a:ext cx="10637215" cy="493776"/>
+          </a:xfrm>
+          <a:prstGeom prst="rect">
+            <a:avLst/>
+          </a:prstGeom>
+          <a:noFill/>
+          <a:ln/>
+        </p:spPr>
+        <p:txBody>
+          <a:bodyPr wrap="square" lIns="0" tIns="0" rIns="0" bIns="0" rtlCol="0" anchor="ctr"/>
+          <a:lstStyle/>
+          <a:p>
+            <a:pPr indent="0" marL="0">
+              <a:buNone/>
+            </a:pPr>
+            <a:r>
+              <a:rPr lang="en-US" sz="2500" dirty="0">
+                <a:solidFill>
+                  <a:srgbClr val="1B1A17"/>
+                </a:solidFill>
+                <a:latin typeface="Georgia" pitchFamily="34" charset="0"/>
+                <a:ea typeface="Georgia" pitchFamily="34" charset="-122"/>
+                <a:cs typeface="Georgia" pitchFamily="34" charset="-120"/>
+              </a:rPr>
+              <a:t>With a real inpainting model, localization is worth 5.8×</a:t>
+            </a:r>
+            <a:endParaRPr lang="en-US" sz="2500" dirty="0"/>
+          </a:p>
+        </p:txBody>
+      </p:sp>
+      <p:sp>
+        <p:nvSpPr>
+          <p:cNvPr id="4" name="Text 2"/>
+          <p:cNvSpPr/>
+          <p:nvPr/>
+        </p:nvSpPr>
+        <p:spPr>
+          <a:xfrm>
+            <a:off x="777240" y="1133856"/>
+            <a:ext cx="10637215" cy="274320"/>
+          </a:xfrm>
+          <a:prstGeom prst="rect">
+            <a:avLst/>
+          </a:prstGeom>
+          <a:noFill/>
+          <a:ln/>
+        </p:spPr>
+        <p:txBody>
+          <a:bodyPr wrap="square" lIns="0" tIns="0" rIns="0" bIns="0" rtlCol="0" anchor="ctr"/>
+          <a:lstStyle/>
+          <a:p>
+            <a:pPr indent="0" marL="0">
+              <a:buNone/>
+            </a:pPr>
+            <a:r>
+              <a:rPr lang="en-US" sz="1200" dirty="0">
+                <a:solidFill>
+                  <a:srgbClr val="6B6963"/>
+                </a:solidFill>
+                <a:latin typeface="Georgia" pitchFamily="34" charset="0"/>
+                <a:ea typeface="Georgia" pitchFamily="34" charset="-122"/>
+                <a:cs typeface="Georgia" pitchFamily="34" charset="-120"/>
+              </a:rPr>
+              <a:t>60 held-out dev samples · the mask now decides what gets regenerated, not just what is kept</a:t>
+            </a:r>
+            <a:endParaRPr lang="en-US" sz="1200" dirty="0"/>
+          </a:p>
+        </p:txBody>
+      </p:sp>
+      <p:sp>
+        <p:nvSpPr>
+          <p:cNvPr id="5" name="Shape 3"/>
+          <p:cNvSpPr/>
+          <p:nvPr/>
+        </p:nvSpPr>
+        <p:spPr>
+          <a:xfrm>
+            <a:off x="777240" y="1463040"/>
+            <a:ext cx="10637215" cy="7315"/>
+          </a:xfrm>
+          <a:prstGeom prst="rect">
+            <a:avLst/>
+          </a:prstGeom>
+          <a:solidFill>
+            <a:srgbClr val="1B1A17"/>
+          </a:solidFill>
+          <a:ln/>
+        </p:spPr>
+      </p:sp>
+      <p:graphicFrame>
+        <p:nvGraphicFramePr>
+          <p:cNvPr id="12" name="Table 0"/>
+          <p:cNvGraphicFramePr>
+            <a:graphicFrameLocks noGrp="1"/>
+          </p:cNvGraphicFramePr>
+          <p:nvPr>
+            <p:extLst>
+              <p:ext uri="{D42A27DB-BD31-4B8C-83A1-F6EECF244321}">
+                <p14:modId xmlns:p14="http://schemas.microsoft.com/office/powerpoint/2010/main" val="1579011935"/>
+              </p:ext>
+            </p:extLst>
+          </p:nvPr>
+        </p:nvGraphicFramePr>
+        <p:xfrm>
+          <a:off x="777240" y="1645920"/>
+          <a:ext cx="10637215" cy="914400"/>
+        </p:xfrm>
+        <a:graphic>
+          <a:graphicData uri="http://schemas.openxmlformats.org/drawingml/2006/table">
+            <a:tbl>
+              <a:tblPr/>
+              <a:tblGrid>
+                <a:gridCol w="3840480"/>
+                <a:gridCol w="2286000"/>
+                <a:gridCol w="2286000"/>
+                <a:gridCol w="2221992"/>
+              </a:tblGrid>
+              <a:tr h="402336">
+                <a:tc>
+                  <a:txBody>
+                    <a:bodyPr/>
+                    <a:lstStyle/>
+                    <a:p>
+                      <a:pPr indent="0" marL="0">
+                        <a:buNone/>
+                      </a:pPr>
+                      <a:r>
+                        <a:rPr lang="en-US" sz="1150" b="1" dirty="0">
+                          <a:solidFill>
+                            <a:srgbClr val="1B1A17"/>
+                          </a:solidFill>
+                          <a:latin typeface="Georgia" pitchFamily="34" charset="0"/>
+                          <a:ea typeface="Georgia" pitchFamily="34" charset="-122"/>
+                          <a:cs typeface="Georgia" pitchFamily="34" charset="-120"/>
+                        </a:rPr>
+                        <a:t>gating mask</a:t>
+                      </a:r>
+                      <a:endParaRPr lang="en-US" sz="1150" dirty="0">
+                        <a:latin typeface="Georgia" charset="0"/>
+                        <a:ea typeface="Georgia" charset="0"/>
+                        <a:cs typeface="Georgia" charset="0"/>
+                      </a:endParaRPr>
+                    </a:p>
+                  </a:txBody>
+                  <a:tcPr marL="50800" marR="50800" marT="50800" marB="50800" anchor="t">
+                    <a:lnL w="0" cap="flat" cmpd="sng" algn="ctr">
+                      <a:noFill/>
+                    </a:lnL>
+                    <a:lnR w="0" cap="flat" cmpd="sng" algn="ctr">
+                      <a:noFill/>
+                    </a:lnR>
+                    <a:lnT w="13970" cap="flat" cmpd="sng" algn="ctr">
+                      <a:solidFill>
+                        <a:srgbClr val="1B1A17"/>
+                      </a:solidFill>
+                      <a:prstDash val="solid"/>
+                      <a:round/>
+                      <a:headEnd type="none" w="med" len="med"/>
+                      <a:tailEnd type="none" w="med" len="med"/>
+                    </a:lnT>
+                    <a:lnB w="7620" cap="flat" cmpd="sng" algn="ctr">
+                      <a:solidFill>
+                        <a:srgbClr val="1B1A17"/>
+                      </a:solidFill>
+                      <a:prstDash val="solid"/>
+                      <a:round/>
+                      <a:headEnd type="none" w="med" len="med"/>
+                      <a:tailEnd type="none" w="med" len="med"/>
+                    </a:lnB>
+                  </a:tcPr>
+                </a:tc>
+                <a:tc>
+                  <a:txBody>
+                    <a:bodyPr/>
+                    <a:lstStyle/>
+                    <a:p>
+                      <a:pPr algn="ctr" indent="0" marL="0">
+                        <a:buNone/>
+                      </a:pPr>
+                      <a:r>
+                        <a:rPr lang="en-US" sz="1150" b="1" dirty="0">
+                          <a:solidFill>
+                            <a:srgbClr val="1B1A17"/>
+                          </a:solidFill>
+                          <a:latin typeface="Georgia" pitchFamily="34" charset="0"/>
+                          <a:ea typeface="Georgia" pitchFamily="34" charset="-122"/>
+                          <a:cs typeface="Georgia" pitchFamily="34" charset="-120"/>
+                        </a:rPr>
+                        <a:t>recall ↑</a:t>
+                      </a:r>
+                      <a:endParaRPr lang="en-US" sz="1150" dirty="0">
+                        <a:latin typeface="Georgia" charset="0"/>
+                        <a:ea typeface="Georgia" charset="0"/>
+                        <a:cs typeface="Georgia" charset="0"/>
+                      </a:endParaRPr>
+                    </a:p>
+                  </a:txBody>
+                  <a:tcPr marL="50800" marR="50800" marT="50800" marB="50800" anchor="t">
+                    <a:lnL w="0" cap="flat" cmpd="sng" algn="ctr">
+                      <a:noFill/>
+                    </a:lnL>
+                    <a:lnR w="0" cap="flat" cmpd="sng" algn="ctr">
+                      <a:noFill/>
+                    </a:lnR>
+                    <a:lnT w="13970" cap="flat" cmpd="sng" algn="ctr">
+                      <a:solidFill>
+                        <a:srgbClr val="1B1A17"/>
+                      </a:solidFill>
+                      <a:prstDash val="solid"/>
+                      <a:round/>
+                      <a:headEnd type="none" w="med" len="med"/>
+                      <a:tailEnd type="none" w="med" len="med"/>
+                    </a:lnT>
+                    <a:lnB w="7620" cap="flat" cmpd="sng" algn="ctr">
+                      <a:solidFill>
+                        <a:srgbClr val="1B1A17"/>
+                      </a:solidFill>
+                      <a:prstDash val="solid"/>
+                      <a:round/>
+                      <a:headEnd type="none" w="med" len="med"/>
+                      <a:tailEnd type="none" w="med" len="med"/>
+                    </a:lnB>
+                  </a:tcPr>
+                </a:tc>
+                <a:tc>
+                  <a:txBody>
+                    <a:bodyPr/>
+                    <a:lstStyle/>
+                    <a:p>
+                      <a:pPr algn="ctr" indent="0" marL="0">
+                        <a:buNone/>
+                      </a:pPr>
+                      <a:r>
+                        <a:rPr lang="en-US" sz="1150" b="1" dirty="0">
+                          <a:solidFill>
+                            <a:srgbClr val="1B1A17"/>
+                          </a:solidFill>
+                          <a:latin typeface="Georgia" pitchFamily="34" charset="0"/>
+                          <a:ea typeface="Georgia" pitchFamily="34" charset="-122"/>
+                          <a:cs typeface="Georgia" pitchFamily="34" charset="-120"/>
+                        </a:rPr>
+                        <a:t>collateral ↓</a:t>
+                      </a:r>
+                      <a:endParaRPr lang="en-US" sz="1150" dirty="0">
+                        <a:latin typeface="Georgia" charset="0"/>
+                        <a:ea typeface="Georgia" charset="0"/>
+                        <a:cs typeface="Georgia" charset="0"/>
+                      </a:endParaRPr>
+                    </a:p>
+                  </a:txBody>
+                  <a:tcPr marL="50800" marR="50800" marT="50800" marB="50800" anchor="t">
+                    <a:lnL w="0" cap="flat" cmpd="sng" algn="ctr">
+                      <a:noFill/>
+                    </a:lnL>
+                    <a:lnR w="0" cap="flat" cmpd="sng" algn="ctr">
+                      <a:noFill/>
+                    </a:lnR>
+                    <a:lnT w="13970" cap="flat" cmpd="sng" algn="ctr">
+                      <a:solidFill>
+                        <a:srgbClr val="1B1A17"/>
+                      </a:solidFill>
+                      <a:prstDash val="solid"/>
+                      <a:round/>
+                      <a:headEnd type="none" w="med" len="med"/>
+                      <a:tailEnd type="none" w="med" len="med"/>
+                    </a:lnT>
+                    <a:lnB w="7620" cap="flat" cmpd="sng" algn="ctr">
+                      <a:solidFill>
+                        <a:srgbClr val="1B1A17"/>
+                      </a:solidFill>
+                      <a:prstDash val="solid"/>
+                      <a:round/>
+                      <a:headEnd type="none" w="med" len="med"/>
+                      <a:tailEnd type="none" w="med" len="med"/>
+                    </a:lnB>
+                  </a:tcPr>
+                </a:tc>
+                <a:tc>
+                  <a:txBody>
+                    <a:bodyPr/>
+                    <a:lstStyle/>
+                    <a:p>
+                      <a:pPr algn="ctr" indent="0" marL="0">
+                        <a:buNone/>
+                      </a:pPr>
+                      <a:r>
+                        <a:rPr lang="en-US" sz="1150" b="1" dirty="0">
+                          <a:solidFill>
+                            <a:srgbClr val="1B1A17"/>
+                          </a:solidFill>
+                          <a:latin typeface="Georgia" pitchFamily="34" charset="0"/>
+                          <a:ea typeface="Georgia" pitchFamily="34" charset="-122"/>
+                          <a:cs typeface="Georgia" pitchFamily="34" charset="-120"/>
+                        </a:rPr>
+                        <a:t>net ↑</a:t>
+                      </a:r>
+                      <a:endParaRPr lang="en-US" sz="1150" dirty="0">
+                        <a:latin typeface="Georgia" charset="0"/>
+                        <a:ea typeface="Georgia" charset="0"/>
+                        <a:cs typeface="Georgia" charset="0"/>
+                      </a:endParaRPr>
+                    </a:p>
+                  </a:txBody>
+                  <a:tcPr marL="50800" marR="50800" marT="50800" marB="50800" anchor="t">
+                    <a:lnL w="0" cap="flat" cmpd="sng" algn="ctr">
+                      <a:noFill/>
+                    </a:lnL>
+                    <a:lnR w="0" cap="flat" cmpd="sng" algn="ctr">
+                      <a:noFill/>
+                    </a:lnR>
+                    <a:lnT w="13970" cap="flat" cmpd="sng" algn="ctr">
+                      <a:solidFill>
+                        <a:srgbClr val="1B1A17"/>
+                      </a:solidFill>
+                      <a:prstDash val="solid"/>
+                      <a:round/>
+                      <a:headEnd type="none" w="med" len="med"/>
+                      <a:tailEnd type="none" w="med" len="med"/>
+                    </a:lnT>
+                    <a:lnB w="7620" cap="flat" cmpd="sng" algn="ctr">
+                      <a:solidFill>
+                        <a:srgbClr val="1B1A17"/>
+                      </a:solidFill>
+                      <a:prstDash val="solid"/>
+                      <a:round/>
+                      <a:headEnd type="none" w="med" len="med"/>
+                      <a:tailEnd type="none" w="med" len="med"/>
+                    </a:lnB>
+                  </a:tcPr>
+                </a:tc>
+              </a:tr>
+              <a:tr h="402336">
+                <a:tc>
+                  <a:txBody>
+                    <a:bodyPr/>
+                    <a:lstStyle/>
+                    <a:p>
+                      <a:pPr indent="0" marL="0">
+                        <a:buNone/>
+                      </a:pPr>
+                      <a:r>
+                        <a:rPr lang="en-US" sz="1150" dirty="0">
+                          <a:solidFill>
+                            <a:srgbClr val="1B1A17"/>
+                          </a:solidFill>
+                          <a:latin typeface="Georgia" pitchFamily="34" charset="0"/>
+                          <a:ea typeface="Georgia" pitchFamily="34" charset="-122"/>
+                          <a:cs typeface="Georgia" pitchFamily="34" charset="-120"/>
+                        </a:rPr>
+                        <a:t>none — whole frame</a:t>
+                      </a:r>
+                      <a:endParaRPr lang="en-US" sz="1150" dirty="0">
+                        <a:latin typeface="Georgia" charset="0"/>
+                        <a:ea typeface="Georgia" charset="0"/>
+                        <a:cs typeface="Georgia" charset="0"/>
+                      </a:endParaRPr>
+                    </a:p>
+                  </a:txBody>
+                  <a:tcPr marL="50800" marR="50800" marT="50800" marB="50800" anchor="t">
+                    <a:lnL w="0" cap="flat" cmpd="sng" algn="ctr">
+                      <a:noFill/>
+                    </a:lnL>
+                    <a:lnR w="0" cap="flat" cmpd="sng" algn="ctr">
+                      <a:noFill/>
+                    </a:lnR>
+                    <a:lnT w="0" cap="flat" cmpd="sng" algn="ctr">
+                      <a:noFill/>
+                    </a:lnT>
+                    <a:lnB w="0" cap="flat" cmpd="sng" algn="ctr">
+                      <a:solidFill>
+                        <a:srgbClr val="FFFFFF"/>
+                      </a:solidFill>
+                      <a:prstDash val="solid"/>
+                      <a:round/>
+                      <a:headEnd type="none" w="med" len="med"/>
+                      <a:tailEnd type="none" w="med" len="med"/>
+                    </a:lnB>
+                  </a:tcPr>
+                </a:tc>
+                <a:tc>
+                  <a:txBody>
+                    <a:bodyPr/>
+                    <a:lstStyle/>
+                    <a:p>
+                      <a:pPr algn="ctr" indent="0" marL="0">
+                        <a:buNone/>
+                      </a:pPr>
+                      <a:r>
+                        <a:rPr lang="en-US" sz="1150" dirty="0">
+                          <a:solidFill>
+                            <a:srgbClr val="1B1A17"/>
+                          </a:solidFill>
+                          <a:latin typeface="Georgia" pitchFamily="34" charset="0"/>
+                          <a:ea typeface="Georgia" pitchFamily="34" charset="-122"/>
+                          <a:cs typeface="Georgia" pitchFamily="34" charset="-120"/>
+                        </a:rPr>
+                        <a:t>33.3%</a:t>
+                      </a:r>
+                      <a:endParaRPr lang="en-US" sz="1150" dirty="0">
+                        <a:latin typeface="Georgia" charset="0"/>
+                        <a:ea typeface="Georgia" charset="0"/>
+                        <a:cs typeface="Georgia" charset="0"/>
+                      </a:endParaRPr>
+                    </a:p>
+                  </a:txBody>
+                  <a:tcPr marL="50800" marR="50800" marT="50800" marB="50800" anchor="t">
+                    <a:lnL w="0" cap="flat" cmpd="sng" algn="ctr">
+                      <a:noFill/>
+                    </a:lnL>
+                    <a:lnR w="0" cap="flat" cmpd="sng" algn="ctr">
+                      <a:noFill/>
+                    </a:lnR>
+                    <a:lnT w="0" cap="flat" cmpd="sng" algn="ctr">
+                      <a:noFill/>
+                    </a:lnT>
+                    <a:lnB w="0" cap="flat" cmpd="sng" algn="ctr">
+                      <a:solidFill>
+                        <a:srgbClr val="FFFFFF"/>
+                      </a:solidFill>
+                      <a:prstDash val="solid"/>
+                      <a:round/>
+                      <a:headEnd type="none" w="med" len="med"/>
+                      <a:tailEnd type="none" w="med" len="med"/>
+                    </a:lnB>
+                  </a:tcPr>
+                </a:tc>
+                <a:tc>
+                  <a:txBody>
+                    <a:bodyPr/>
+                    <a:lstStyle/>
+                    <a:p>
+                      <a:pPr algn="ctr" indent="0" marL="0">
+                        <a:buNone/>
+                      </a:pPr>
+                      <a:r>
+                        <a:rPr lang="en-US" sz="1150" dirty="0">
+                          <a:solidFill>
+                            <a:srgbClr val="1B1A17"/>
+                          </a:solidFill>
+                          <a:latin typeface="Georgia" pitchFamily="34" charset="0"/>
+                          <a:ea typeface="Georgia" pitchFamily="34" charset="-122"/>
+                          <a:cs typeface="Georgia" pitchFamily="34" charset="-120"/>
+                        </a:rPr>
+                        <a:t>24.2%</a:t>
+                      </a:r>
+                      <a:endParaRPr lang="en-US" sz="1150" dirty="0">
+                        <a:latin typeface="Georgia" charset="0"/>
+                        <a:ea typeface="Georgia" charset="0"/>
+                        <a:cs typeface="Georgia" charset="0"/>
+                      </a:endParaRPr>
+                    </a:p>
+                  </a:txBody>
+                  <a:tcPr marL="50800" marR="50800" marT="50800" marB="50800" anchor="t">
+                    <a:lnL w="0" cap="flat" cmpd="sng" algn="ctr">
+                      <a:noFill/>
+                    </a:lnL>
+                    <a:lnR w="0" cap="flat" cmpd="sng" algn="ctr">
+                      <a:noFill/>
+                    </a:lnR>
+                    <a:lnT w="0" cap="flat" cmpd="sng" algn="ctr">
+                      <a:noFill/>
+                    </a:lnT>
+                    <a:lnB w="0" cap="flat" cmpd="sng" algn="ctr">
+                      <a:solidFill>
+                        <a:srgbClr val="FFFFFF"/>
+                      </a:solidFill>
+                      <a:prstDash val="solid"/>
+                      <a:round/>
+                      <a:headEnd type="none" w="med" len="med"/>
+                      <a:tailEnd type="none" w="med" len="med"/>
+                    </a:lnB>
+                  </a:tcPr>
+                </a:tc>
+                <a:tc>
+                  <a:txBody>
+                    <a:bodyPr/>
+                    <a:lstStyle/>
+                    <a:p>
+                      <a:pPr algn="ctr" indent="0" marL="0">
+                        <a:buNone/>
+                      </a:pPr>
+                      <a:r>
+                        <a:rPr lang="en-US" sz="1150" dirty="0">
+                          <a:solidFill>
+                            <a:srgbClr val="1B1A17"/>
+                          </a:solidFill>
+                          <a:latin typeface="Georgia" pitchFamily="34" charset="0"/>
+                          <a:ea typeface="Georgia" pitchFamily="34" charset="-122"/>
+                          <a:cs typeface="Georgia" pitchFamily="34" charset="-120"/>
+                        </a:rPr>
+                        <a:t>+9.1%</a:t>
+                      </a:r>
+                      <a:endParaRPr lang="en-US" sz="1150" dirty="0">
+                        <a:latin typeface="Georgia" charset="0"/>
+                        <a:ea typeface="Georgia" charset="0"/>
+                        <a:cs typeface="Georgia" charset="0"/>
+                      </a:endParaRPr>
+                    </a:p>
+                  </a:txBody>
+                  <a:tcPr marL="50800" marR="50800" marT="50800" marB="50800" anchor="t">
+                    <a:lnL w="0" cap="flat" cmpd="sng" algn="ctr">
+                      <a:noFill/>
+                    </a:lnL>
+                    <a:lnR w="0" cap="flat" cmpd="sng" algn="ctr">
+                      <a:noFill/>
+                    </a:lnR>
+                    <a:lnT w="0" cap="flat" cmpd="sng" algn="ctr">
+                      <a:noFill/>
+                    </a:lnT>
+                    <a:lnB w="0" cap="flat" cmpd="sng" algn="ctr">
+                      <a:solidFill>
+                        <a:srgbClr val="FFFFFF"/>
+                      </a:solidFill>
+                      <a:prstDash val="solid"/>
+                      <a:round/>
+                      <a:headEnd type="none" w="med" len="med"/>
+                      <a:tailEnd type="none" w="med" len="med"/>
+                    </a:lnB>
+                  </a:tcPr>
+                </a:tc>
+              </a:tr>
+              <a:tr h="402336">
+                <a:tc>
+                  <a:txBody>
+                    <a:bodyPr/>
+                    <a:lstStyle/>
+                    <a:p>
+                      <a:pPr indent="0" marL="0">
+                        <a:buNone/>
+                      </a:pPr>
+                      <a:r>
+                        <a:rPr lang="en-US" sz="1150" b="1" dirty="0">
+                          <a:solidFill>
+                            <a:srgbClr val="1B1A17"/>
+                          </a:solidFill>
+                          <a:latin typeface="Georgia" pitchFamily="34" charset="0"/>
+                          <a:ea typeface="Georgia" pitchFamily="34" charset="-122"/>
+                          <a:cs typeface="Georgia" pitchFamily="34" charset="-120"/>
+                        </a:rPr>
+                        <a:t>ours, tuned (thr 0.3, 32 px)</a:t>
+                      </a:r>
+                      <a:endParaRPr lang="en-US" sz="1150" dirty="0">
+                        <a:latin typeface="Georgia" charset="0"/>
+                        <a:ea typeface="Georgia" charset="0"/>
+                        <a:cs typeface="Georgia" charset="0"/>
+                      </a:endParaRPr>
+                    </a:p>
+                  </a:txBody>
+                  <a:tcPr marL="50800" marR="50800" marT="50800" marB="50800" anchor="t">
+                    <a:lnL w="0" cap="flat" cmpd="sng" algn="ctr">
+                      <a:noFill/>
+                    </a:lnL>
+                    <a:lnR w="0" cap="flat" cmpd="sng" algn="ctr">
+                      <a:noFill/>
+                    </a:lnR>
+                    <a:lnT w="0" cap="flat" cmpd="sng" algn="ctr">
+                      <a:noFill/>
+                    </a:lnT>
+                    <a:lnB w="0" cap="flat" cmpd="sng" algn="ctr">
+                      <a:solidFill>
+                        <a:srgbClr val="FFFFFF"/>
+                      </a:solidFill>
+                      <a:prstDash val="solid"/>
+                      <a:round/>
+                      <a:headEnd type="none" w="med" len="med"/>
+                      <a:tailEnd type="none" w="med" len="med"/>
+                    </a:lnB>
+                  </a:tcPr>
+                </a:tc>
+                <a:tc>
+                  <a:txBody>
+                    <a:bodyPr/>
+                    <a:lstStyle/>
+                    <a:p>
+                      <a:pPr algn="ctr" indent="0" marL="0">
+                        <a:buNone/>
+                      </a:pPr>
+                      <a:r>
+                        <a:rPr lang="en-US" sz="1150" b="1" dirty="0">
+                          <a:solidFill>
+                            <a:srgbClr val="1B1A17"/>
+                          </a:solidFill>
+                          <a:latin typeface="Georgia" pitchFamily="34" charset="0"/>
+                          <a:ea typeface="Georgia" pitchFamily="34" charset="-122"/>
+                          <a:cs typeface="Georgia" pitchFamily="34" charset="-120"/>
+                        </a:rPr>
+                        <a:t>61.7%</a:t>
+                      </a:r>
+                      <a:endParaRPr lang="en-US" sz="1150" dirty="0">
+                        <a:latin typeface="Georgia" charset="0"/>
+                        <a:ea typeface="Georgia" charset="0"/>
+                        <a:cs typeface="Georgia" charset="0"/>
+                      </a:endParaRPr>
+                    </a:p>
+                  </a:txBody>
+                  <a:tcPr marL="50800" marR="50800" marT="50800" marB="50800" anchor="t">
+                    <a:lnL w="0" cap="flat" cmpd="sng" algn="ctr">
+                      <a:noFill/>
+                    </a:lnL>
+                    <a:lnR w="0" cap="flat" cmpd="sng" algn="ctr">
+                      <a:noFill/>
+                    </a:lnR>
+                    <a:lnT w="0" cap="flat" cmpd="sng" algn="ctr">
+                      <a:noFill/>
+                    </a:lnT>
+                    <a:lnB w="0" cap="flat" cmpd="sng" algn="ctr">
+                      <a:solidFill>
+                        <a:srgbClr val="FFFFFF"/>
+                      </a:solidFill>
+                      <a:prstDash val="solid"/>
+                      <a:round/>
+                      <a:headEnd type="none" w="med" len="med"/>
+                      <a:tailEnd type="none" w="med" len="med"/>
+                    </a:lnB>
+                  </a:tcPr>
+                </a:tc>
+                <a:tc>
+                  <a:txBody>
+                    <a:bodyPr/>
+                    <a:lstStyle/>
+                    <a:p>
+                      <a:pPr algn="ctr" indent="0" marL="0">
+                        <a:buNone/>
+                      </a:pPr>
+                      <a:r>
+                        <a:rPr lang="en-US" sz="1150" b="1" dirty="0">
+                          <a:solidFill>
+                            <a:srgbClr val="1B1A17"/>
+                          </a:solidFill>
+                          <a:latin typeface="Georgia" pitchFamily="34" charset="0"/>
+                          <a:ea typeface="Georgia" pitchFamily="34" charset="-122"/>
+                          <a:cs typeface="Georgia" pitchFamily="34" charset="-120"/>
+                        </a:rPr>
+                        <a:t>22.2%</a:t>
+                      </a:r>
+                      <a:endParaRPr lang="en-US" sz="1150" dirty="0">
+                        <a:latin typeface="Georgia" charset="0"/>
+                        <a:ea typeface="Georgia" charset="0"/>
+                        <a:cs typeface="Georgia" charset="0"/>
+                      </a:endParaRPr>
+                    </a:p>
+                  </a:txBody>
+                  <a:tcPr marL="50800" marR="50800" marT="50800" marB="50800" anchor="t">
+                    <a:lnL w="0" cap="flat" cmpd="sng" algn="ctr">
+                      <a:noFill/>
+                    </a:lnL>
+                    <a:lnR w="0" cap="flat" cmpd="sng" algn="ctr">
+                      <a:noFill/>
+                    </a:lnR>
+                    <a:lnT w="0" cap="flat" cmpd="sng" algn="ctr">
+                      <a:noFill/>
+                    </a:lnT>
+                    <a:lnB w="0" cap="flat" cmpd="sng" algn="ctr">
+                      <a:solidFill>
+                        <a:srgbClr val="FFFFFF"/>
+                      </a:solidFill>
+                      <a:prstDash val="solid"/>
+                      <a:round/>
+                      <a:headEnd type="none" w="med" len="med"/>
+                      <a:tailEnd type="none" w="med" len="med"/>
+                    </a:lnB>
+                  </a:tcPr>
+                </a:tc>
+                <a:tc>
+                  <a:txBody>
+                    <a:bodyPr/>
+                    <a:lstStyle/>
+                    <a:p>
+                      <a:pPr algn="ctr" indent="0" marL="0">
+                        <a:buNone/>
+                      </a:pPr>
+                      <a:r>
+                        <a:rPr lang="en-US" sz="1150" b="1" dirty="0">
+                          <a:solidFill>
+                            <a:srgbClr val="1B1A17"/>
+                          </a:solidFill>
+                          <a:latin typeface="Georgia" pitchFamily="34" charset="0"/>
+                          <a:ea typeface="Georgia" pitchFamily="34" charset="-122"/>
+                          <a:cs typeface="Georgia" pitchFamily="34" charset="-120"/>
+                        </a:rPr>
+                        <a:t>+39.5%</a:t>
+                      </a:r>
+                      <a:endParaRPr lang="en-US" sz="1150" dirty="0">
+                        <a:latin typeface="Georgia" charset="0"/>
+                        <a:ea typeface="Georgia" charset="0"/>
+                        <a:cs typeface="Georgia" charset="0"/>
+                      </a:endParaRPr>
+                    </a:p>
+                  </a:txBody>
+                  <a:tcPr marL="50800" marR="50800" marT="50800" marB="50800" anchor="t">
+                    <a:lnL w="0" cap="flat" cmpd="sng" algn="ctr">
+                      <a:noFill/>
+                    </a:lnL>
+                    <a:lnR w="0" cap="flat" cmpd="sng" algn="ctr">
+                      <a:noFill/>
+                    </a:lnR>
+                    <a:lnT w="0" cap="flat" cmpd="sng" algn="ctr">
+                      <a:noFill/>
+                    </a:lnT>
+                    <a:lnB w="0" cap="flat" cmpd="sng" algn="ctr">
+                      <a:solidFill>
+                        <a:srgbClr val="FFFFFF"/>
+                      </a:solidFill>
+                      <a:prstDash val="solid"/>
+                      <a:round/>
+                      <a:headEnd type="none" w="med" len="med"/>
+                      <a:tailEnd type="none" w="med" len="med"/>
+                    </a:lnB>
+                  </a:tcPr>
+                </a:tc>
+              </a:tr>
+              <a:tr h="402336">
+                <a:tc>
+                  <a:txBody>
+                    <a:bodyPr/>
+                    <a:lstStyle/>
+                    <a:p>
+                      <a:pPr indent="0" marL="0">
+                        <a:buNone/>
+                      </a:pPr>
+                      <a:r>
+                        <a:rPr lang="en-US" sz="1150" dirty="0">
+                          <a:solidFill>
+                            <a:srgbClr val="1B1A17"/>
+                          </a:solidFill>
+                          <a:latin typeface="Georgia" pitchFamily="34" charset="0"/>
+                          <a:ea typeface="Georgia" pitchFamily="34" charset="-122"/>
+                          <a:cs typeface="Georgia" pitchFamily="34" charset="-120"/>
+                        </a:rPr>
+                        <a:t>MagicBrush human mask</a:t>
+                      </a:r>
+                      <a:endParaRPr lang="en-US" sz="1150" dirty="0">
+                        <a:latin typeface="Georgia" charset="0"/>
+                        <a:ea typeface="Georgia" charset="0"/>
+                        <a:cs typeface="Georgia" charset="0"/>
+                      </a:endParaRPr>
+                    </a:p>
+                  </a:txBody>
+                  <a:tcPr marL="50800" marR="50800" marT="50800" marB="50800" anchor="t">
+                    <a:lnL w="0" cap="flat" cmpd="sng" algn="ctr">
+                      <a:noFill/>
+                    </a:lnL>
+                    <a:lnR w="0" cap="flat" cmpd="sng" algn="ctr">
+                      <a:noFill/>
+                    </a:lnR>
+                    <a:lnT w="0" cap="flat" cmpd="sng" algn="ctr">
+                      <a:noFill/>
+                    </a:lnT>
+                    <a:lnB w="0" cap="flat" cmpd="sng" algn="ctr">
+                      <a:solidFill>
+                        <a:srgbClr val="FFFFFF"/>
+                      </a:solidFill>
+                      <a:prstDash val="solid"/>
+                      <a:round/>
+                      <a:headEnd type="none" w="med" len="med"/>
+                      <a:tailEnd type="none" w="med" len="med"/>
+                    </a:lnB>
+                  </a:tcPr>
+                </a:tc>
+                <a:tc>
+                  <a:txBody>
+                    <a:bodyPr/>
+                    <a:lstStyle/>
+                    <a:p>
+                      <a:pPr algn="ctr" indent="0" marL="0">
+                        <a:buNone/>
+                      </a:pPr>
+                      <a:r>
+                        <a:rPr lang="en-US" sz="1150" dirty="0">
+                          <a:solidFill>
+                            <a:srgbClr val="1B1A17"/>
+                          </a:solidFill>
+                          <a:latin typeface="Georgia" pitchFamily="34" charset="0"/>
+                          <a:ea typeface="Georgia" pitchFamily="34" charset="-122"/>
+                          <a:cs typeface="Georgia" pitchFamily="34" charset="-120"/>
+                        </a:rPr>
+                        <a:t>78.4%</a:t>
+                      </a:r>
+                      <a:endParaRPr lang="en-US" sz="1150" dirty="0">
+                        <a:latin typeface="Georgia" charset="0"/>
+                        <a:ea typeface="Georgia" charset="0"/>
+                        <a:cs typeface="Georgia" charset="0"/>
+                      </a:endParaRPr>
+                    </a:p>
+                  </a:txBody>
+                  <a:tcPr marL="50800" marR="50800" marT="50800" marB="50800" anchor="t">
+                    <a:lnL w="0" cap="flat" cmpd="sng" algn="ctr">
+                      <a:noFill/>
+                    </a:lnL>
+                    <a:lnR w="0" cap="flat" cmpd="sng" algn="ctr">
+                      <a:noFill/>
+                    </a:lnR>
+                    <a:lnT w="0" cap="flat" cmpd="sng" algn="ctr">
+                      <a:noFill/>
+                    </a:lnT>
+                    <a:lnB w="0" cap="flat" cmpd="sng" algn="ctr">
+                      <a:solidFill>
+                        <a:srgbClr val="FFFFFF"/>
+                      </a:solidFill>
+                      <a:prstDash val="solid"/>
+                      <a:round/>
+                      <a:headEnd type="none" w="med" len="med"/>
+                      <a:tailEnd type="none" w="med" len="med"/>
+                    </a:lnB>
+                  </a:tcPr>
+                </a:tc>
+                <a:tc>
+                  <a:txBody>
+                    <a:bodyPr/>
+                    <a:lstStyle/>
+                    <a:p>
+                      <a:pPr algn="ctr" indent="0" marL="0">
+                        <a:buNone/>
+                      </a:pPr>
+                      <a:r>
+                        <a:rPr lang="en-US" sz="1150" dirty="0">
+                          <a:solidFill>
+                            <a:srgbClr val="1B1A17"/>
+                          </a:solidFill>
+                          <a:latin typeface="Georgia" pitchFamily="34" charset="0"/>
+                          <a:ea typeface="Georgia" pitchFamily="34" charset="-122"/>
+                          <a:cs typeface="Georgia" pitchFamily="34" charset="-120"/>
+                        </a:rPr>
+                        <a:t>51.7%</a:t>
+                      </a:r>
+                      <a:endParaRPr lang="en-US" sz="1150" dirty="0">
+                        <a:latin typeface="Georgia" charset="0"/>
+                        <a:ea typeface="Georgia" charset="0"/>
+                        <a:cs typeface="Georgia" charset="0"/>
+                      </a:endParaRPr>
+                    </a:p>
+                  </a:txBody>
+                  <a:tcPr marL="50800" marR="50800" marT="50800" marB="50800" anchor="t">
+                    <a:lnL w="0" cap="flat" cmpd="sng" algn="ctr">
+                      <a:noFill/>
+                    </a:lnL>
+                    <a:lnR w="0" cap="flat" cmpd="sng" algn="ctr">
+                      <a:noFill/>
+                    </a:lnR>
+                    <a:lnT w="0" cap="flat" cmpd="sng" algn="ctr">
+                      <a:noFill/>
+                    </a:lnT>
+                    <a:lnB w="0" cap="flat" cmpd="sng" algn="ctr">
+                      <a:solidFill>
+                        <a:srgbClr val="FFFFFF"/>
+                      </a:solidFill>
+                      <a:prstDash val="solid"/>
+                      <a:round/>
+                      <a:headEnd type="none" w="med" len="med"/>
+                      <a:tailEnd type="none" w="med" len="med"/>
+                    </a:lnB>
+                  </a:tcPr>
+                </a:tc>
+                <a:tc>
+                  <a:txBody>
+                    <a:bodyPr/>
+                    <a:lstStyle/>
+                    <a:p>
+                      <a:pPr algn="ctr" indent="0" marL="0">
+                        <a:buNone/>
+                      </a:pPr>
+                      <a:r>
+                        <a:rPr lang="en-US" sz="1150" dirty="0">
+                          <a:solidFill>
+                            <a:srgbClr val="1B1A17"/>
+                          </a:solidFill>
+                          <a:latin typeface="Georgia" pitchFamily="34" charset="0"/>
+                          <a:ea typeface="Georgia" pitchFamily="34" charset="-122"/>
+                          <a:cs typeface="Georgia" pitchFamily="34" charset="-120"/>
+                        </a:rPr>
+                        <a:t>+26.8%</a:t>
+                      </a:r>
+                      <a:endParaRPr lang="en-US" sz="1150" dirty="0">
+                        <a:latin typeface="Georgia" charset="0"/>
+                        <a:ea typeface="Georgia" charset="0"/>
+                        <a:cs typeface="Georgia" charset="0"/>
+                      </a:endParaRPr>
+                    </a:p>
+                  </a:txBody>
+                  <a:tcPr marL="50800" marR="50800" marT="50800" marB="50800" anchor="t">
+                    <a:lnL w="0" cap="flat" cmpd="sng" algn="ctr">
+                      <a:noFill/>
+                    </a:lnL>
+                    <a:lnR w="0" cap="flat" cmpd="sng" algn="ctr">
+                      <a:noFill/>
+                    </a:lnR>
+                    <a:lnT w="0" cap="flat" cmpd="sng" algn="ctr">
+                      <a:noFill/>
+                    </a:lnT>
+                    <a:lnB w="0" cap="flat" cmpd="sng" algn="ctr">
+                      <a:solidFill>
+                        <a:srgbClr val="FFFFFF"/>
+                      </a:solidFill>
+                      <a:prstDash val="solid"/>
+                      <a:round/>
+                      <a:headEnd type="none" w="med" len="med"/>
+                      <a:tailEnd type="none" w="med" len="med"/>
+                    </a:lnB>
+                  </a:tcPr>
+                </a:tc>
+              </a:tr>
+              <a:tr h="402336">
+                <a:tc>
+                  <a:txBody>
+                    <a:bodyPr/>
+                    <a:lstStyle/>
+                    <a:p>
+                      <a:pPr indent="0" marL="0">
+                        <a:buNone/>
+                      </a:pPr>
+                      <a:r>
+                        <a:rPr lang="en-US" sz="1150" dirty="0">
+                          <a:solidFill>
+                            <a:srgbClr val="1B1A17"/>
+                          </a:solidFill>
+                          <a:latin typeface="Georgia" pitchFamily="34" charset="0"/>
+                          <a:ea typeface="Georgia" pitchFamily="34" charset="-122"/>
+                          <a:cs typeface="Georgia" pitchFamily="34" charset="-120"/>
+                        </a:rPr>
+                        <a:t>ground-truth region</a:t>
+                      </a:r>
+                      <a:endParaRPr lang="en-US" sz="1150" dirty="0">
+                        <a:latin typeface="Georgia" charset="0"/>
+                        <a:ea typeface="Georgia" charset="0"/>
+                        <a:cs typeface="Georgia" charset="0"/>
+                      </a:endParaRPr>
+                    </a:p>
+                  </a:txBody>
+                  <a:tcPr marL="50800" marR="50800" marT="50800" marB="50800" anchor="t">
+                    <a:lnL w="0" cap="flat" cmpd="sng" algn="ctr">
+                      <a:noFill/>
+                    </a:lnL>
+                    <a:lnR w="0" cap="flat" cmpd="sng" algn="ctr">
+                      <a:noFill/>
+                    </a:lnR>
+                    <a:lnT w="0" cap="flat" cmpd="sng" algn="ctr">
+                      <a:noFill/>
+                    </a:lnT>
+                    <a:lnB w="13970" cap="flat" cmpd="sng" algn="ctr">
+                      <a:solidFill>
+                        <a:srgbClr val="1B1A17"/>
+                      </a:solidFill>
+                      <a:prstDash val="solid"/>
+                      <a:round/>
+                      <a:headEnd type="none" w="med" len="med"/>
+                      <a:tailEnd type="none" w="med" len="med"/>
+                    </a:lnB>
+                  </a:tcPr>
+                </a:tc>
+                <a:tc>
+                  <a:txBody>
+                    <a:bodyPr/>
+                    <a:lstStyle/>
+                    <a:p>
+                      <a:pPr algn="ctr" indent="0" marL="0">
+                        <a:buNone/>
+                      </a:pPr>
+                      <a:r>
+                        <a:rPr lang="en-US" sz="1150" dirty="0">
+                          <a:solidFill>
+                            <a:srgbClr val="1B1A17"/>
+                          </a:solidFill>
+                          <a:latin typeface="Georgia" pitchFamily="34" charset="0"/>
+                          <a:ea typeface="Georgia" pitchFamily="34" charset="-122"/>
+                          <a:cs typeface="Georgia" pitchFamily="34" charset="-120"/>
+                        </a:rPr>
+                        <a:t>59.4%</a:t>
+                      </a:r>
+                      <a:endParaRPr lang="en-US" sz="1150" dirty="0">
+                        <a:latin typeface="Georgia" charset="0"/>
+                        <a:ea typeface="Georgia" charset="0"/>
+                        <a:cs typeface="Georgia" charset="0"/>
+                      </a:endParaRPr>
+                    </a:p>
+                  </a:txBody>
+                  <a:tcPr marL="50800" marR="50800" marT="50800" marB="50800" anchor="t">
+                    <a:lnL w="0" cap="flat" cmpd="sng" algn="ctr">
+                      <a:noFill/>
+                    </a:lnL>
+                    <a:lnR w="0" cap="flat" cmpd="sng" algn="ctr">
+                      <a:noFill/>
+                    </a:lnR>
+                    <a:lnT w="0" cap="flat" cmpd="sng" algn="ctr">
+                      <a:noFill/>
+                    </a:lnT>
+                    <a:lnB w="13970" cap="flat" cmpd="sng" algn="ctr">
+                      <a:solidFill>
+                        <a:srgbClr val="1B1A17"/>
+                      </a:solidFill>
+                      <a:prstDash val="solid"/>
+                      <a:round/>
+                      <a:headEnd type="none" w="med" len="med"/>
+                      <a:tailEnd type="none" w="med" len="med"/>
+                    </a:lnB>
+                  </a:tcPr>
+                </a:tc>
+                <a:tc>
+                  <a:txBody>
+                    <a:bodyPr/>
+                    <a:lstStyle/>
+                    <a:p>
+                      <a:pPr algn="ctr" indent="0" marL="0">
+                        <a:buNone/>
+                      </a:pPr>
+                      <a:r>
+                        <a:rPr lang="en-US" sz="1150" dirty="0">
+                          <a:solidFill>
+                            <a:srgbClr val="1B1A17"/>
+                          </a:solidFill>
+                          <a:latin typeface="Georgia" pitchFamily="34" charset="0"/>
+                          <a:ea typeface="Georgia" pitchFamily="34" charset="-122"/>
+                          <a:cs typeface="Georgia" pitchFamily="34" charset="-120"/>
+                        </a:rPr>
+                        <a:t>6.4%</a:t>
+                      </a:r>
+                      <a:endParaRPr lang="en-US" sz="1150" dirty="0">
+                        <a:latin typeface="Georgia" charset="0"/>
+                        <a:ea typeface="Georgia" charset="0"/>
+                        <a:cs typeface="Georgia" charset="0"/>
+                      </a:endParaRPr>
+                    </a:p>
+                  </a:txBody>
+                  <a:tcPr marL="50800" marR="50800" marT="50800" marB="50800" anchor="t">
+                    <a:lnL w="0" cap="flat" cmpd="sng" algn="ctr">
+                      <a:noFill/>
+                    </a:lnL>
+                    <a:lnR w="0" cap="flat" cmpd="sng" algn="ctr">
+                      <a:noFill/>
+                    </a:lnR>
+                    <a:lnT w="0" cap="flat" cmpd="sng" algn="ctr">
+                      <a:noFill/>
+                    </a:lnT>
+                    <a:lnB w="13970" cap="flat" cmpd="sng" algn="ctr">
+                      <a:solidFill>
+                        <a:srgbClr val="1B1A17"/>
+                      </a:solidFill>
+                      <a:prstDash val="solid"/>
+                      <a:round/>
+                      <a:headEnd type="none" w="med" len="med"/>
+                      <a:tailEnd type="none" w="med" len="med"/>
+                    </a:lnB>
+                  </a:tcPr>
+                </a:tc>
+                <a:tc>
+                  <a:txBody>
+                    <a:bodyPr/>
+                    <a:lstStyle/>
+                    <a:p>
+                      <a:pPr algn="ctr" indent="0" marL="0">
+                        <a:buNone/>
+                      </a:pPr>
+                      <a:r>
+                        <a:rPr lang="en-US" sz="1150" dirty="0">
+                          <a:solidFill>
+                            <a:srgbClr val="1B1A17"/>
+                          </a:solidFill>
+                          <a:latin typeface="Georgia" pitchFamily="34" charset="0"/>
+                          <a:ea typeface="Georgia" pitchFamily="34" charset="-122"/>
+                          <a:cs typeface="Georgia" pitchFamily="34" charset="-120"/>
+                        </a:rPr>
+                        <a:t>+53.0%</a:t>
+                      </a:r>
+                      <a:endParaRPr lang="en-US" sz="1150" dirty="0">
+                        <a:latin typeface="Georgia" charset="0"/>
+                        <a:ea typeface="Georgia" charset="0"/>
+                        <a:cs typeface="Georgia" charset="0"/>
+                      </a:endParaRPr>
+                    </a:p>
+                  </a:txBody>
+                  <a:tcPr marL="50800" marR="50800" marT="50800" marB="50800" anchor="t">
+                    <a:lnL w="0" cap="flat" cmpd="sng" algn="ctr">
+                      <a:noFill/>
+                    </a:lnL>
+                    <a:lnR w="0" cap="flat" cmpd="sng" algn="ctr">
+                      <a:noFill/>
+                    </a:lnR>
+                    <a:lnT w="0" cap="flat" cmpd="sng" algn="ctr">
+                      <a:noFill/>
+                    </a:lnT>
+                    <a:lnB w="13970" cap="flat" cmpd="sng" algn="ctr">
+                      <a:solidFill>
+                        <a:srgbClr val="1B1A17"/>
+                      </a:solidFill>
+                      <a:prstDash val="solid"/>
+                      <a:round/>
+                      <a:headEnd type="none" w="med" len="med"/>
+                      <a:tailEnd type="none" w="med" len="med"/>
+                    </a:lnB>
+                  </a:tcPr>
+                </a:tc>
+              </a:tr>
+            </a:tbl>
+          </a:graphicData>
+        </a:graphic>
+      </p:graphicFrame>
+      <p:sp>
+        <p:nvSpPr>
+          <p:cNvPr id="7" name="Shape 4"/>
+          <p:cNvSpPr/>
+          <p:nvPr/>
+        </p:nvSpPr>
+        <p:spPr>
+          <a:xfrm>
+            <a:off x="777240" y="3794760"/>
+            <a:ext cx="10637215" cy="5486"/>
+          </a:xfrm>
+          <a:prstGeom prst="rect">
+            <a:avLst/>
+          </a:prstGeom>
+          <a:solidFill>
+            <a:srgbClr val="C9C6BD"/>
+          </a:solidFill>
+          <a:ln/>
+        </p:spPr>
+      </p:sp>
+      <p:sp>
+        <p:nvSpPr>
+          <p:cNvPr id="8" name="Text 5"/>
+          <p:cNvSpPr/>
+          <p:nvPr/>
+        </p:nvSpPr>
+        <p:spPr>
+          <a:xfrm>
+            <a:off x="1069848" y="3986784"/>
+            <a:ext cx="10051999" cy="566928"/>
+          </a:xfrm>
+          <a:prstGeom prst="rect">
+            <a:avLst/>
+          </a:prstGeom>
+          <a:noFill/>
+          <a:ln/>
+        </p:spPr>
+        <p:txBody>
+          <a:bodyPr wrap="square" lIns="0" tIns="0" rIns="0" bIns="0" rtlCol="0" anchor="ctr"/>
+          <a:lstStyle/>
+          <a:p>
+            <a:pPr indent="0" marL="0">
+              <a:lnSpc>
+                <a:spcPts val="1600"/>
+              </a:lnSpc>
+              <a:buNone/>
+            </a:pPr>
+            <a:r>
+              <a:rPr lang="en-US" sz="1150" b="1" dirty="0">
+                <a:solidFill>
+                  <a:srgbClr val="1B1A17"/>
+                </a:solidFill>
+                <a:latin typeface="Georgia" pitchFamily="34" charset="0"/>
+                <a:ea typeface="Georgia" pitchFamily="34" charset="-122"/>
+                <a:cs typeface="Georgia" pitchFamily="34" charset="-120"/>
+              </a:rPr>
+              <a:t>We now beat the human annotation</a:t>
+            </a:r>
+            <a:pPr indent="0" marL="0">
+              <a:lnSpc>
+                <a:spcPts val="1600"/>
+              </a:lnSpc>
+              <a:buNone/>
+            </a:pPr>
+            <a:r>
+              <a:rPr lang="en-US" sz="1150" dirty="0">
+                <a:solidFill>
+                  <a:srgbClr val="1B1A17"/>
+                </a:solidFill>
+                <a:latin typeface="Georgia" pitchFamily="34" charset="0"/>
+                <a:ea typeface="Georgia" pitchFamily="34" charset="-122"/>
+                <a:cs typeface="Georgia" pitchFamily="34" charset="-120"/>
+              </a:rPr>
+              <a:t>  —  +39.5% against +26.8%, reversing the one comparison the compositing test lost. And collateral 22.2% is </a:t>
+            </a:r>
+            <a:pPr indent="0" marL="0">
+              <a:lnSpc>
+                <a:spcPts val="1600"/>
+              </a:lnSpc>
+              <a:buNone/>
+            </a:pPr>
+            <a:r>
+              <a:rPr lang="en-US" sz="1150" b="1" dirty="0">
+                <a:solidFill>
+                  <a:srgbClr val="1B1A17"/>
+                </a:solidFill>
+                <a:latin typeface="Georgia" pitchFamily="34" charset="0"/>
+                <a:ea typeface="Georgia" pitchFamily="34" charset="-122"/>
+                <a:cs typeface="Georgia" pitchFamily="34" charset="-120"/>
+              </a:rPr>
+              <a:t>below</a:t>
+            </a:r>
+            <a:pPr indent="0" marL="0">
+              <a:lnSpc>
+                <a:spcPts val="1600"/>
+              </a:lnSpc>
+              <a:buNone/>
+            </a:pPr>
+            <a:r>
+              <a:rPr lang="en-US" sz="1150" dirty="0">
+                <a:solidFill>
+                  <a:srgbClr val="1B1A17"/>
+                </a:solidFill>
+                <a:latin typeface="Georgia" pitchFamily="34" charset="0"/>
+                <a:ea typeface="Georgia" pitchFamily="34" charset="-122"/>
+                <a:cs typeface="Georgia" pitchFamily="34" charset="-120"/>
+              </a:rPr>
+              <a:t> whole-frame editing's 24.2%, so we win on both quantities rather than trading one for the other.</a:t>
+            </a:r>
+            <a:endParaRPr lang="en-US" sz="1150" dirty="0"/>
+          </a:p>
+        </p:txBody>
+      </p:sp>
+      <p:sp>
+        <p:nvSpPr>
+          <p:cNvPr id="9" name="Text 6"/>
+          <p:cNvSpPr/>
+          <p:nvPr/>
+        </p:nvSpPr>
+        <p:spPr>
+          <a:xfrm>
+            <a:off x="777240" y="4754880"/>
+            <a:ext cx="9144000" cy="201168"/>
+          </a:xfrm>
+          <a:prstGeom prst="rect">
+            <a:avLst/>
+          </a:prstGeom>
+          <a:noFill/>
+          <a:ln/>
+        </p:spPr>
+        <p:txBody>
+          <a:bodyPr wrap="square" lIns="0" tIns="0" rIns="0" bIns="0" rtlCol="0" anchor="ctr"/>
+          <a:lstStyle/>
+          <a:p>
+            <a:pPr indent="0" marL="0">
+              <a:buNone/>
+            </a:pPr>
+            <a:r>
+              <a:rPr lang="en-US" sz="1050" spc="30" kern="0" dirty="0">
+                <a:solidFill>
+                  <a:srgbClr val="6B6963"/>
+                </a:solidFill>
+                <a:latin typeface="Georgia" pitchFamily="34" charset="0"/>
+                <a:ea typeface="Georgia" pitchFamily="34" charset="-122"/>
+                <a:cs typeface="Georgia" pitchFamily="34" charset="-120"/>
+              </a:rPr>
+              <a:t>The operating point had to be found jointly</a:t>
+            </a:r>
+            <a:endParaRPr lang="en-US" sz="1050" dirty="0"/>
+          </a:p>
+        </p:txBody>
+      </p:sp>
+      <p:graphicFrame>
+        <p:nvGraphicFramePr>
+          <p:cNvPr id="23" name="Table 1"/>
+          <p:cNvGraphicFramePr>
+            <a:graphicFrameLocks noGrp="1"/>
+          </p:cNvGraphicFramePr>
+          <p:nvPr>
+            <p:extLst>
+              <p:ext uri="{D42A27DB-BD31-4B8C-83A1-F6EECF244321}">
+                <p14:modId xmlns:p14="http://schemas.microsoft.com/office/powerpoint/2010/main" val="1579011935"/>
+              </p:ext>
+            </p:extLst>
+          </p:nvPr>
+        </p:nvGraphicFramePr>
+        <p:xfrm>
+          <a:off x="777240" y="5010912"/>
+          <a:ext cx="10637215" cy="914400"/>
+        </p:xfrm>
+        <a:graphic>
+          <a:graphicData uri="http://schemas.openxmlformats.org/drawingml/2006/table">
+            <a:tbl>
+              <a:tblPr/>
+              <a:tblGrid>
+                <a:gridCol w="1490472"/>
+                <a:gridCol w="1828800"/>
+                <a:gridCol w="1828800"/>
+                <a:gridCol w="1828800"/>
+                <a:gridCol w="1828800"/>
+                <a:gridCol w="1828800"/>
+              </a:tblGrid>
+              <a:tr h="274320">
+                <a:tc>
+                  <a:txBody>
+                    <a:bodyPr/>
+                    <a:lstStyle/>
+                    <a:p>
+                      <a:pPr indent="0" marL="0">
+                        <a:buNone/>
+                      </a:pPr>
+                      <a:endParaRPr lang="en-US" sz="1000" dirty="0">
+                        <a:latin typeface="Georgia" charset="0"/>
+                        <a:ea typeface="Georgia" charset="0"/>
+                        <a:cs typeface="Georgia" charset="0"/>
+                      </a:endParaRPr>
+                    </a:p>
+                  </a:txBody>
+                  <a:tcPr marL="50800" marR="50800" marT="50800" marB="50800" anchor="t">
+                    <a:lnL w="0" cap="flat" cmpd="sng" algn="ctr">
+                      <a:noFill/>
+                    </a:lnL>
+                    <a:lnR w="0" cap="flat" cmpd="sng" algn="ctr">
+                      <a:noFill/>
+                    </a:lnR>
+                    <a:lnT w="13970" cap="flat" cmpd="sng" algn="ctr">
+                      <a:solidFill>
+                        <a:srgbClr val="1B1A17"/>
+                      </a:solidFill>
+                      <a:prstDash val="solid"/>
+                      <a:round/>
+                      <a:headEnd type="none" w="med" len="med"/>
+                      <a:tailEnd type="none" w="med" len="med"/>
+                    </a:lnT>
+                    <a:lnB w="7620" cap="flat" cmpd="sng" algn="ctr">
+                      <a:solidFill>
+                        <a:srgbClr val="1B1A17"/>
+                      </a:solidFill>
+                      <a:prstDash val="solid"/>
+                      <a:round/>
+                      <a:headEnd type="none" w="med" len="med"/>
+                      <a:tailEnd type="none" w="med" len="med"/>
+                    </a:lnB>
+                  </a:tcPr>
+                </a:tc>
+                <a:tc>
+                  <a:txBody>
+                    <a:bodyPr/>
+                    <a:lstStyle/>
+                    <a:p>
+                      <a:pPr algn="ctr" indent="0" marL="0">
+                        <a:buNone/>
+                      </a:pPr>
+                      <a:r>
+                        <a:rPr lang="en-US" sz="1000" b="1" dirty="0">
+                          <a:solidFill>
+                            <a:srgbClr val="1B1A17"/>
+                          </a:solidFill>
+                          <a:latin typeface="Georgia" pitchFamily="34" charset="0"/>
+                          <a:ea typeface="Georgia" pitchFamily="34" charset="-122"/>
+                          <a:cs typeface="Georgia" pitchFamily="34" charset="-120"/>
+                        </a:rPr>
+                        <a:t>0 px</a:t>
+                      </a:r>
+                      <a:endParaRPr lang="en-US" sz="1000" dirty="0">
+                        <a:latin typeface="Georgia" charset="0"/>
+                        <a:ea typeface="Georgia" charset="0"/>
+                        <a:cs typeface="Georgia" charset="0"/>
+                      </a:endParaRPr>
+                    </a:p>
+                  </a:txBody>
+                  <a:tcPr marL="50800" marR="50800" marT="50800" marB="50800" anchor="t">
+                    <a:lnL w="0" cap="flat" cmpd="sng" algn="ctr">
+                      <a:noFill/>
+                    </a:lnL>
+                    <a:lnR w="0" cap="flat" cmpd="sng" algn="ctr">
+                      <a:noFill/>
+                    </a:lnR>
+                    <a:lnT w="13970" cap="flat" cmpd="sng" algn="ctr">
+                      <a:solidFill>
+                        <a:srgbClr val="1B1A17"/>
+                      </a:solidFill>
+                      <a:prstDash val="solid"/>
+                      <a:round/>
+                      <a:headEnd type="none" w="med" len="med"/>
+                      <a:tailEnd type="none" w="med" len="med"/>
+                    </a:lnT>
+                    <a:lnB w="7620" cap="flat" cmpd="sng" algn="ctr">
+                      <a:solidFill>
+                        <a:srgbClr val="1B1A17"/>
+                      </a:solidFill>
+                      <a:prstDash val="solid"/>
+                      <a:round/>
+                      <a:headEnd type="none" w="med" len="med"/>
+                      <a:tailEnd type="none" w="med" len="med"/>
+                    </a:lnB>
+                  </a:tcPr>
+                </a:tc>
+                <a:tc>
+                  <a:txBody>
+                    <a:bodyPr/>
+                    <a:lstStyle/>
+                    <a:p>
+                      <a:pPr algn="ctr" indent="0" marL="0">
+                        <a:buNone/>
+                      </a:pPr>
+                      <a:r>
+                        <a:rPr lang="en-US" sz="1000" b="1" dirty="0">
+                          <a:solidFill>
+                            <a:srgbClr val="1B1A17"/>
+                          </a:solidFill>
+                          <a:latin typeface="Georgia" pitchFamily="34" charset="0"/>
+                          <a:ea typeface="Georgia" pitchFamily="34" charset="-122"/>
+                          <a:cs typeface="Georgia" pitchFamily="34" charset="-120"/>
+                        </a:rPr>
+                        <a:t>16 px</a:t>
+                      </a:r>
+                      <a:endParaRPr lang="en-US" sz="1000" dirty="0">
+                        <a:latin typeface="Georgia" charset="0"/>
+                        <a:ea typeface="Georgia" charset="0"/>
+                        <a:cs typeface="Georgia" charset="0"/>
+                      </a:endParaRPr>
+                    </a:p>
+                  </a:txBody>
+                  <a:tcPr marL="50800" marR="50800" marT="50800" marB="50800" anchor="t">
+                    <a:lnL w="0" cap="flat" cmpd="sng" algn="ctr">
+                      <a:noFill/>
+                    </a:lnL>
+                    <a:lnR w="0" cap="flat" cmpd="sng" algn="ctr">
+                      <a:noFill/>
+                    </a:lnR>
+                    <a:lnT w="13970" cap="flat" cmpd="sng" algn="ctr">
+                      <a:solidFill>
+                        <a:srgbClr val="1B1A17"/>
+                      </a:solidFill>
+                      <a:prstDash val="solid"/>
+                      <a:round/>
+                      <a:headEnd type="none" w="med" len="med"/>
+                      <a:tailEnd type="none" w="med" len="med"/>
+                    </a:lnT>
+                    <a:lnB w="7620" cap="flat" cmpd="sng" algn="ctr">
+                      <a:solidFill>
+                        <a:srgbClr val="1B1A17"/>
+                      </a:solidFill>
+                      <a:prstDash val="solid"/>
+                      <a:round/>
+                      <a:headEnd type="none" w="med" len="med"/>
+                      <a:tailEnd type="none" w="med" len="med"/>
+                    </a:lnB>
+                  </a:tcPr>
+                </a:tc>
+                <a:tc>
+                  <a:txBody>
+                    <a:bodyPr/>
+                    <a:lstStyle/>
+                    <a:p>
+                      <a:pPr algn="ctr" indent="0" marL="0">
+                        <a:buNone/>
+                      </a:pPr>
+                      <a:r>
+                        <a:rPr lang="en-US" sz="1000" b="1" dirty="0">
+                          <a:solidFill>
+                            <a:srgbClr val="1B1A17"/>
+                          </a:solidFill>
+                          <a:latin typeface="Georgia" pitchFamily="34" charset="0"/>
+                          <a:ea typeface="Georgia" pitchFamily="34" charset="-122"/>
+                          <a:cs typeface="Georgia" pitchFamily="34" charset="-120"/>
+                        </a:rPr>
+                        <a:t>32 px</a:t>
+                      </a:r>
+                      <a:endParaRPr lang="en-US" sz="1000" dirty="0">
+                        <a:latin typeface="Georgia" charset="0"/>
+                        <a:ea typeface="Georgia" charset="0"/>
+                        <a:cs typeface="Georgia" charset="0"/>
+                      </a:endParaRPr>
+                    </a:p>
+                  </a:txBody>
+                  <a:tcPr marL="50800" marR="50800" marT="50800" marB="50800" anchor="t">
+                    <a:lnL w="0" cap="flat" cmpd="sng" algn="ctr">
+                      <a:noFill/>
+                    </a:lnL>
+                    <a:lnR w="0" cap="flat" cmpd="sng" algn="ctr">
+                      <a:noFill/>
+                    </a:lnR>
+                    <a:lnT w="13970" cap="flat" cmpd="sng" algn="ctr">
+                      <a:solidFill>
+                        <a:srgbClr val="1B1A17"/>
+                      </a:solidFill>
+                      <a:prstDash val="solid"/>
+                      <a:round/>
+                      <a:headEnd type="none" w="med" len="med"/>
+                      <a:tailEnd type="none" w="med" len="med"/>
+                    </a:lnT>
+                    <a:lnB w="7620" cap="flat" cmpd="sng" algn="ctr">
+                      <a:solidFill>
+                        <a:srgbClr val="1B1A17"/>
+                      </a:solidFill>
+                      <a:prstDash val="solid"/>
+                      <a:round/>
+                      <a:headEnd type="none" w="med" len="med"/>
+                      <a:tailEnd type="none" w="med" len="med"/>
+                    </a:lnB>
+                  </a:tcPr>
+                </a:tc>
+                <a:tc>
+                  <a:txBody>
+                    <a:bodyPr/>
+                    <a:lstStyle/>
+                    <a:p>
+                      <a:pPr algn="ctr" indent="0" marL="0">
+                        <a:buNone/>
+                      </a:pPr>
+                      <a:r>
+                        <a:rPr lang="en-US" sz="1000" b="1" dirty="0">
+                          <a:solidFill>
+                            <a:srgbClr val="1B1A17"/>
+                          </a:solidFill>
+                          <a:latin typeface="Georgia" pitchFamily="34" charset="0"/>
+                          <a:ea typeface="Georgia" pitchFamily="34" charset="-122"/>
+                          <a:cs typeface="Georgia" pitchFamily="34" charset="-120"/>
+                        </a:rPr>
+                        <a:t>48 px</a:t>
+                      </a:r>
+                      <a:endParaRPr lang="en-US" sz="1000" dirty="0">
+                        <a:latin typeface="Georgia" charset="0"/>
+                        <a:ea typeface="Georgia" charset="0"/>
+                        <a:cs typeface="Georgia" charset="0"/>
+                      </a:endParaRPr>
+                    </a:p>
+                  </a:txBody>
+                  <a:tcPr marL="50800" marR="50800" marT="50800" marB="50800" anchor="t">
+                    <a:lnL w="0" cap="flat" cmpd="sng" algn="ctr">
+                      <a:noFill/>
+                    </a:lnL>
+                    <a:lnR w="0" cap="flat" cmpd="sng" algn="ctr">
+                      <a:noFill/>
+                    </a:lnR>
+                    <a:lnT w="13970" cap="flat" cmpd="sng" algn="ctr">
+                      <a:solidFill>
+                        <a:srgbClr val="1B1A17"/>
+                      </a:solidFill>
+                      <a:prstDash val="solid"/>
+                      <a:round/>
+                      <a:headEnd type="none" w="med" len="med"/>
+                      <a:tailEnd type="none" w="med" len="med"/>
+                    </a:lnT>
+                    <a:lnB w="7620" cap="flat" cmpd="sng" algn="ctr">
+                      <a:solidFill>
+                        <a:srgbClr val="1B1A17"/>
+                      </a:solidFill>
+                      <a:prstDash val="solid"/>
+                      <a:round/>
+                      <a:headEnd type="none" w="med" len="med"/>
+                      <a:tailEnd type="none" w="med" len="med"/>
+                    </a:lnB>
+                  </a:tcPr>
+                </a:tc>
+                <a:tc>
+                  <a:txBody>
+                    <a:bodyPr/>
+                    <a:lstStyle/>
+                    <a:p>
+                      <a:pPr algn="ctr" indent="0" marL="0">
+                        <a:buNone/>
+                      </a:pPr>
+                      <a:r>
+                        <a:rPr lang="en-US" sz="1000" b="1" dirty="0">
+                          <a:solidFill>
+                            <a:srgbClr val="1B1A17"/>
+                          </a:solidFill>
+                          <a:latin typeface="Georgia" pitchFamily="34" charset="0"/>
+                          <a:ea typeface="Georgia" pitchFamily="34" charset="-122"/>
+                          <a:cs typeface="Georgia" pitchFamily="34" charset="-120"/>
+                        </a:rPr>
+                        <a:t>64 px</a:t>
+                      </a:r>
+                      <a:endParaRPr lang="en-US" sz="1000" dirty="0">
+                        <a:latin typeface="Georgia" charset="0"/>
+                        <a:ea typeface="Georgia" charset="0"/>
+                        <a:cs typeface="Georgia" charset="0"/>
+                      </a:endParaRPr>
+                    </a:p>
+                  </a:txBody>
+                  <a:tcPr marL="50800" marR="50800" marT="50800" marB="50800" anchor="t">
+                    <a:lnL w="0" cap="flat" cmpd="sng" algn="ctr">
+                      <a:noFill/>
+                    </a:lnL>
+                    <a:lnR w="0" cap="flat" cmpd="sng" algn="ctr">
+                      <a:noFill/>
+                    </a:lnR>
+                    <a:lnT w="13970" cap="flat" cmpd="sng" algn="ctr">
+                      <a:solidFill>
+                        <a:srgbClr val="1B1A17"/>
+                      </a:solidFill>
+                      <a:prstDash val="solid"/>
+                      <a:round/>
+                      <a:headEnd type="none" w="med" len="med"/>
+                      <a:tailEnd type="none" w="med" len="med"/>
+                    </a:lnT>
+                    <a:lnB w="7620" cap="flat" cmpd="sng" algn="ctr">
+                      <a:solidFill>
+                        <a:srgbClr val="1B1A17"/>
+                      </a:solidFill>
+                      <a:prstDash val="solid"/>
+                      <a:round/>
+                      <a:headEnd type="none" w="med" len="med"/>
+                      <a:tailEnd type="none" w="med" len="med"/>
+                    </a:lnB>
+                  </a:tcPr>
+                </a:tc>
+              </a:tr>
+              <a:tr h="274320">
+                <a:tc>
+                  <a:txBody>
+                    <a:bodyPr/>
+                    <a:lstStyle/>
+                    <a:p>
+                      <a:pPr indent="0" marL="0">
+                        <a:buNone/>
+                      </a:pPr>
+                      <a:r>
+                        <a:rPr lang="en-US" sz="1000" dirty="0">
+                          <a:solidFill>
+                            <a:srgbClr val="1B1A17"/>
+                          </a:solidFill>
+                          <a:latin typeface="Georgia" pitchFamily="34" charset="0"/>
+                          <a:ea typeface="Georgia" pitchFamily="34" charset="-122"/>
+                          <a:cs typeface="Georgia" pitchFamily="34" charset="-120"/>
+                        </a:rPr>
+                        <a:t>thr 0.2</a:t>
+                      </a:r>
+                      <a:endParaRPr lang="en-US" sz="1000" dirty="0">
+                        <a:latin typeface="Georgia" charset="0"/>
+                        <a:ea typeface="Georgia" charset="0"/>
+                        <a:cs typeface="Georgia" charset="0"/>
+                      </a:endParaRPr>
+                    </a:p>
+                  </a:txBody>
+                  <a:tcPr marL="50800" marR="50800" marT="50800" marB="50800" anchor="t">
+                    <a:lnL w="0" cap="flat" cmpd="sng" algn="ctr">
+                      <a:noFill/>
+                    </a:lnL>
+                    <a:lnR w="0" cap="flat" cmpd="sng" algn="ctr">
+                      <a:noFill/>
+                    </a:lnR>
+                    <a:lnT w="0" cap="flat" cmpd="sng" algn="ctr">
+                      <a:noFill/>
+                    </a:lnT>
+                    <a:lnB w="0" cap="flat" cmpd="sng" algn="ctr">
+                      <a:solidFill>
+                        <a:srgbClr val="FFFFFF"/>
+                      </a:solidFill>
+                      <a:prstDash val="solid"/>
+                      <a:round/>
+                      <a:headEnd type="none" w="med" len="med"/>
+                      <a:tailEnd type="none" w="med" len="med"/>
+                    </a:lnB>
+                  </a:tcPr>
+                </a:tc>
+                <a:tc>
+                  <a:txBody>
+                    <a:bodyPr/>
+                    <a:lstStyle/>
+                    <a:p>
+                      <a:pPr algn="ctr" indent="0" marL="0">
+                        <a:buNone/>
+                      </a:pPr>
+                      <a:r>
+                        <a:rPr lang="en-US" sz="1000" dirty="0">
+                          <a:solidFill>
+                            <a:srgbClr val="1B1A17"/>
+                          </a:solidFill>
+                          <a:latin typeface="Georgia" pitchFamily="34" charset="0"/>
+                          <a:ea typeface="Georgia" pitchFamily="34" charset="-122"/>
+                          <a:cs typeface="Georgia" pitchFamily="34" charset="-120"/>
+                        </a:rPr>
+                        <a:t>+31.2</a:t>
+                      </a:r>
+                      <a:endParaRPr lang="en-US" sz="1000" dirty="0">
+                        <a:latin typeface="Georgia" charset="0"/>
+                        <a:ea typeface="Georgia" charset="0"/>
+                        <a:cs typeface="Georgia" charset="0"/>
+                      </a:endParaRPr>
+                    </a:p>
+                  </a:txBody>
+                  <a:tcPr marL="50800" marR="50800" marT="50800" marB="50800" anchor="t">
+                    <a:lnL w="0" cap="flat" cmpd="sng" algn="ctr">
+                      <a:noFill/>
+                    </a:lnL>
+                    <a:lnR w="0" cap="flat" cmpd="sng" algn="ctr">
+                      <a:noFill/>
+                    </a:lnR>
+                    <a:lnT w="0" cap="flat" cmpd="sng" algn="ctr">
+                      <a:noFill/>
+                    </a:lnT>
+                    <a:lnB w="0" cap="flat" cmpd="sng" algn="ctr">
+                      <a:solidFill>
+                        <a:srgbClr val="FFFFFF"/>
+                      </a:solidFill>
+                      <a:prstDash val="solid"/>
+                      <a:round/>
+                      <a:headEnd type="none" w="med" len="med"/>
+                      <a:tailEnd type="none" w="med" len="med"/>
+                    </a:lnB>
+                  </a:tcPr>
+                </a:tc>
+                <a:tc>
+                  <a:txBody>
+                    <a:bodyPr/>
+                    <a:lstStyle/>
+                    <a:p>
+                      <a:pPr algn="ctr" indent="0" marL="0">
+                        <a:buNone/>
+                      </a:pPr>
+                      <a:r>
+                        <a:rPr lang="en-US" sz="1000" dirty="0">
+                          <a:solidFill>
+                            <a:srgbClr val="1B1A17"/>
+                          </a:solidFill>
+                          <a:latin typeface="Georgia" pitchFamily="34" charset="0"/>
+                          <a:ea typeface="Georgia" pitchFamily="34" charset="-122"/>
+                          <a:cs typeface="Georgia" pitchFamily="34" charset="-120"/>
+                        </a:rPr>
+                        <a:t>+36.9</a:t>
+                      </a:r>
+                      <a:endParaRPr lang="en-US" sz="1000" dirty="0">
+                        <a:latin typeface="Georgia" charset="0"/>
+                        <a:ea typeface="Georgia" charset="0"/>
+                        <a:cs typeface="Georgia" charset="0"/>
+                      </a:endParaRPr>
+                    </a:p>
+                  </a:txBody>
+                  <a:tcPr marL="50800" marR="50800" marT="50800" marB="50800" anchor="t">
+                    <a:lnL w="0" cap="flat" cmpd="sng" algn="ctr">
+                      <a:noFill/>
+                    </a:lnL>
+                    <a:lnR w="0" cap="flat" cmpd="sng" algn="ctr">
+                      <a:noFill/>
+                    </a:lnR>
+                    <a:lnT w="0" cap="flat" cmpd="sng" algn="ctr">
+                      <a:noFill/>
+                    </a:lnT>
+                    <a:lnB w="0" cap="flat" cmpd="sng" algn="ctr">
+                      <a:solidFill>
+                        <a:srgbClr val="FFFFFF"/>
+                      </a:solidFill>
+                      <a:prstDash val="solid"/>
+                      <a:round/>
+                      <a:headEnd type="none" w="med" len="med"/>
+                      <a:tailEnd type="none" w="med" len="med"/>
+                    </a:lnB>
+                  </a:tcPr>
+                </a:tc>
+                <a:tc>
+                  <a:txBody>
+                    <a:bodyPr/>
+                    <a:lstStyle/>
+                    <a:p>
+                      <a:pPr algn="ctr" indent="0" marL="0">
+                        <a:buNone/>
+                      </a:pPr>
+                      <a:r>
+                        <a:rPr lang="en-US" sz="1000" dirty="0">
+                          <a:solidFill>
+                            <a:srgbClr val="1B1A17"/>
+                          </a:solidFill>
+                          <a:latin typeface="Georgia" pitchFamily="34" charset="0"/>
+                          <a:ea typeface="Georgia" pitchFamily="34" charset="-122"/>
+                          <a:cs typeface="Georgia" pitchFamily="34" charset="-120"/>
+                        </a:rPr>
+                        <a:t>+36.7</a:t>
+                      </a:r>
+                      <a:endParaRPr lang="en-US" sz="1000" dirty="0">
+                        <a:latin typeface="Georgia" charset="0"/>
+                        <a:ea typeface="Georgia" charset="0"/>
+                        <a:cs typeface="Georgia" charset="0"/>
+                      </a:endParaRPr>
+                    </a:p>
+                  </a:txBody>
+                  <a:tcPr marL="50800" marR="50800" marT="50800" marB="50800" anchor="t">
+                    <a:lnL w="0" cap="flat" cmpd="sng" algn="ctr">
+                      <a:noFill/>
+                    </a:lnL>
+                    <a:lnR w="0" cap="flat" cmpd="sng" algn="ctr">
+                      <a:noFill/>
+                    </a:lnR>
+                    <a:lnT w="0" cap="flat" cmpd="sng" algn="ctr">
+                      <a:noFill/>
+                    </a:lnT>
+                    <a:lnB w="0" cap="flat" cmpd="sng" algn="ctr">
+                      <a:solidFill>
+                        <a:srgbClr val="FFFFFF"/>
+                      </a:solidFill>
+                      <a:prstDash val="solid"/>
+                      <a:round/>
+                      <a:headEnd type="none" w="med" len="med"/>
+                      <a:tailEnd type="none" w="med" len="med"/>
+                    </a:lnB>
+                  </a:tcPr>
+                </a:tc>
+                <a:tc>
+                  <a:txBody>
+                    <a:bodyPr/>
+                    <a:lstStyle/>
+                    <a:p>
+                      <a:pPr algn="ctr" indent="0" marL="0">
+                        <a:buNone/>
+                      </a:pPr>
+                      <a:r>
+                        <a:rPr lang="en-US" sz="1000" dirty="0">
+                          <a:solidFill>
+                            <a:srgbClr val="1B1A17"/>
+                          </a:solidFill>
+                          <a:latin typeface="Georgia" pitchFamily="34" charset="0"/>
+                          <a:ea typeface="Georgia" pitchFamily="34" charset="-122"/>
+                          <a:cs typeface="Georgia" pitchFamily="34" charset="-120"/>
+                        </a:rPr>
+                        <a:t>+35.7</a:t>
+                      </a:r>
+                      <a:endParaRPr lang="en-US" sz="1000" dirty="0">
+                        <a:latin typeface="Georgia" charset="0"/>
+                        <a:ea typeface="Georgia" charset="0"/>
+                        <a:cs typeface="Georgia" charset="0"/>
+                      </a:endParaRPr>
+                    </a:p>
+                  </a:txBody>
+                  <a:tcPr marL="50800" marR="50800" marT="50800" marB="50800" anchor="t">
+                    <a:lnL w="0" cap="flat" cmpd="sng" algn="ctr">
+                      <a:noFill/>
+                    </a:lnL>
+                    <a:lnR w="0" cap="flat" cmpd="sng" algn="ctr">
+                      <a:noFill/>
+                    </a:lnR>
+                    <a:lnT w="0" cap="flat" cmpd="sng" algn="ctr">
+                      <a:noFill/>
+                    </a:lnT>
+                    <a:lnB w="0" cap="flat" cmpd="sng" algn="ctr">
+                      <a:solidFill>
+                        <a:srgbClr val="FFFFFF"/>
+                      </a:solidFill>
+                      <a:prstDash val="solid"/>
+                      <a:round/>
+                      <a:headEnd type="none" w="med" len="med"/>
+                      <a:tailEnd type="none" w="med" len="med"/>
+                    </a:lnB>
+                  </a:tcPr>
+                </a:tc>
+                <a:tc>
+                  <a:txBody>
+                    <a:bodyPr/>
+                    <a:lstStyle/>
+                    <a:p>
+                      <a:pPr algn="ctr" indent="0" marL="0">
+                        <a:buNone/>
+                      </a:pPr>
+                      <a:r>
+                        <a:rPr lang="en-US" sz="1000" dirty="0">
+                          <a:solidFill>
+                            <a:srgbClr val="1B1A17"/>
+                          </a:solidFill>
+                          <a:latin typeface="Georgia" pitchFamily="34" charset="0"/>
+                          <a:ea typeface="Georgia" pitchFamily="34" charset="-122"/>
+                          <a:cs typeface="Georgia" pitchFamily="34" charset="-120"/>
+                        </a:rPr>
+                        <a:t>+32.7</a:t>
+                      </a:r>
+                      <a:endParaRPr lang="en-US" sz="1000" dirty="0">
+                        <a:latin typeface="Georgia" charset="0"/>
+                        <a:ea typeface="Georgia" charset="0"/>
+                        <a:cs typeface="Georgia" charset="0"/>
+                      </a:endParaRPr>
+                    </a:p>
+                  </a:txBody>
+                  <a:tcPr marL="50800" marR="50800" marT="50800" marB="50800" anchor="t">
+                    <a:lnL w="0" cap="flat" cmpd="sng" algn="ctr">
+                      <a:noFill/>
+                    </a:lnL>
+                    <a:lnR w="0" cap="flat" cmpd="sng" algn="ctr">
+                      <a:noFill/>
+                    </a:lnR>
+                    <a:lnT w="0" cap="flat" cmpd="sng" algn="ctr">
+                      <a:noFill/>
+                    </a:lnT>
+                    <a:lnB w="0" cap="flat" cmpd="sng" algn="ctr">
+                      <a:solidFill>
+                        <a:srgbClr val="FFFFFF"/>
+                      </a:solidFill>
+                      <a:prstDash val="solid"/>
+                      <a:round/>
+                      <a:headEnd type="none" w="med" len="med"/>
+                      <a:tailEnd type="none" w="med" len="med"/>
+                    </a:lnB>
+                  </a:tcPr>
+                </a:tc>
+              </a:tr>
+              <a:tr h="274320">
+                <a:tc>
+                  <a:txBody>
+                    <a:bodyPr/>
+                    <a:lstStyle/>
+                    <a:p>
+                      <a:pPr indent="0" marL="0">
+                        <a:buNone/>
+                      </a:pPr>
+                      <a:r>
+                        <a:rPr lang="en-US" sz="1000" b="1" dirty="0">
+                          <a:solidFill>
+                            <a:srgbClr val="1B1A17"/>
+                          </a:solidFill>
+                          <a:latin typeface="Georgia" pitchFamily="34" charset="0"/>
+                          <a:ea typeface="Georgia" pitchFamily="34" charset="-122"/>
+                          <a:cs typeface="Georgia" pitchFamily="34" charset="-120"/>
+                        </a:rPr>
+                        <a:t>thr 0.3</a:t>
+                      </a:r>
+                      <a:endParaRPr lang="en-US" sz="1000" dirty="0">
+                        <a:latin typeface="Georgia" charset="0"/>
+                        <a:ea typeface="Georgia" charset="0"/>
+                        <a:cs typeface="Georgia" charset="0"/>
+                      </a:endParaRPr>
+                    </a:p>
+                  </a:txBody>
+                  <a:tcPr marL="50800" marR="50800" marT="50800" marB="50800" anchor="t">
+                    <a:lnL w="0" cap="flat" cmpd="sng" algn="ctr">
+                      <a:noFill/>
+                    </a:lnL>
+                    <a:lnR w="0" cap="flat" cmpd="sng" algn="ctr">
+                      <a:noFill/>
+                    </a:lnR>
+                    <a:lnT w="0" cap="flat" cmpd="sng" algn="ctr">
+                      <a:noFill/>
+                    </a:lnT>
+                    <a:lnB w="0" cap="flat" cmpd="sng" algn="ctr">
+                      <a:solidFill>
+                        <a:srgbClr val="FFFFFF"/>
+                      </a:solidFill>
+                      <a:prstDash val="solid"/>
+                      <a:round/>
+                      <a:headEnd type="none" w="med" len="med"/>
+                      <a:tailEnd type="none" w="med" len="med"/>
+                    </a:lnB>
+                  </a:tcPr>
+                </a:tc>
+                <a:tc>
+                  <a:txBody>
+                    <a:bodyPr/>
+                    <a:lstStyle/>
+                    <a:p>
+                      <a:pPr algn="ctr" indent="0" marL="0">
+                        <a:buNone/>
+                      </a:pPr>
+                      <a:r>
+                        <a:rPr lang="en-US" sz="1000" b="1" dirty="0">
+                          <a:solidFill>
+                            <a:srgbClr val="1B1A17"/>
+                          </a:solidFill>
+                          <a:latin typeface="Georgia" pitchFamily="34" charset="0"/>
+                          <a:ea typeface="Georgia" pitchFamily="34" charset="-122"/>
+                          <a:cs typeface="Georgia" pitchFamily="34" charset="-120"/>
+                        </a:rPr>
+                        <a:t>+28.6</a:t>
+                      </a:r>
+                      <a:endParaRPr lang="en-US" sz="1000" dirty="0">
+                        <a:latin typeface="Georgia" charset="0"/>
+                        <a:ea typeface="Georgia" charset="0"/>
+                        <a:cs typeface="Georgia" charset="0"/>
+                      </a:endParaRPr>
+                    </a:p>
+                  </a:txBody>
+                  <a:tcPr marL="50800" marR="50800" marT="50800" marB="50800" anchor="t">
+                    <a:lnL w="0" cap="flat" cmpd="sng" algn="ctr">
+                      <a:noFill/>
+                    </a:lnL>
+                    <a:lnR w="0" cap="flat" cmpd="sng" algn="ctr">
+                      <a:noFill/>
+                    </a:lnR>
+                    <a:lnT w="0" cap="flat" cmpd="sng" algn="ctr">
+                      <a:noFill/>
+                    </a:lnT>
+                    <a:lnB w="0" cap="flat" cmpd="sng" algn="ctr">
+                      <a:solidFill>
+                        <a:srgbClr val="FFFFFF"/>
+                      </a:solidFill>
+                      <a:prstDash val="solid"/>
+                      <a:round/>
+                      <a:headEnd type="none" w="med" len="med"/>
+                      <a:tailEnd type="none" w="med" len="med"/>
+                    </a:lnB>
+                  </a:tcPr>
+                </a:tc>
+                <a:tc>
+                  <a:txBody>
+                    <a:bodyPr/>
+                    <a:lstStyle/>
+                    <a:p>
+                      <a:pPr algn="ctr" indent="0" marL="0">
+                        <a:buNone/>
+                      </a:pPr>
+                      <a:r>
+                        <a:rPr lang="en-US" sz="1000" b="1" dirty="0">
+                          <a:solidFill>
+                            <a:srgbClr val="1B1A17"/>
+                          </a:solidFill>
+                          <a:latin typeface="Georgia" pitchFamily="34" charset="0"/>
+                          <a:ea typeface="Georgia" pitchFamily="34" charset="-122"/>
+                          <a:cs typeface="Georgia" pitchFamily="34" charset="-120"/>
+                        </a:rPr>
+                        <a:t>+36.5</a:t>
+                      </a:r>
+                      <a:endParaRPr lang="en-US" sz="1000" dirty="0">
+                        <a:latin typeface="Georgia" charset="0"/>
+                        <a:ea typeface="Georgia" charset="0"/>
+                        <a:cs typeface="Georgia" charset="0"/>
+                      </a:endParaRPr>
+                    </a:p>
+                  </a:txBody>
+                  <a:tcPr marL="50800" marR="50800" marT="50800" marB="50800" anchor="t">
+                    <a:lnL w="0" cap="flat" cmpd="sng" algn="ctr">
+                      <a:noFill/>
+                    </a:lnL>
+                    <a:lnR w="0" cap="flat" cmpd="sng" algn="ctr">
+                      <a:noFill/>
+                    </a:lnR>
+                    <a:lnT w="0" cap="flat" cmpd="sng" algn="ctr">
+                      <a:noFill/>
+                    </a:lnT>
+                    <a:lnB w="0" cap="flat" cmpd="sng" algn="ctr">
+                      <a:solidFill>
+                        <a:srgbClr val="FFFFFF"/>
+                      </a:solidFill>
+                      <a:prstDash val="solid"/>
+                      <a:round/>
+                      <a:headEnd type="none" w="med" len="med"/>
+                      <a:tailEnd type="none" w="med" len="med"/>
+                    </a:lnB>
+                  </a:tcPr>
+                </a:tc>
+                <a:tc>
+                  <a:txBody>
+                    <a:bodyPr/>
+                    <a:lstStyle/>
+                    <a:p>
+                      <a:pPr algn="ctr" indent="0" marL="0">
+                        <a:buNone/>
+                      </a:pPr>
+                      <a:r>
+                        <a:rPr lang="en-US" sz="1000" b="1" dirty="0">
+                          <a:solidFill>
+                            <a:srgbClr val="1B1A17"/>
+                          </a:solidFill>
+                          <a:latin typeface="Georgia" pitchFamily="34" charset="0"/>
+                          <a:ea typeface="Georgia" pitchFamily="34" charset="-122"/>
+                          <a:cs typeface="Georgia" pitchFamily="34" charset="-120"/>
+                        </a:rPr>
+                        <a:t>+39.5</a:t>
+                      </a:r>
+                      <a:endParaRPr lang="en-US" sz="1000" dirty="0">
+                        <a:latin typeface="Georgia" charset="0"/>
+                        <a:ea typeface="Georgia" charset="0"/>
+                        <a:cs typeface="Georgia" charset="0"/>
+                      </a:endParaRPr>
+                    </a:p>
+                  </a:txBody>
+                  <a:tcPr marL="50800" marR="50800" marT="50800" marB="50800" anchor="t">
+                    <a:lnL w="0" cap="flat" cmpd="sng" algn="ctr">
+                      <a:noFill/>
+                    </a:lnL>
+                    <a:lnR w="0" cap="flat" cmpd="sng" algn="ctr">
+                      <a:noFill/>
+                    </a:lnR>
+                    <a:lnT w="0" cap="flat" cmpd="sng" algn="ctr">
+                      <a:noFill/>
+                    </a:lnT>
+                    <a:lnB w="0" cap="flat" cmpd="sng" algn="ctr">
+                      <a:solidFill>
+                        <a:srgbClr val="FFFFFF"/>
+                      </a:solidFill>
+                      <a:prstDash val="solid"/>
+                      <a:round/>
+                      <a:headEnd type="none" w="med" len="med"/>
+                      <a:tailEnd type="none" w="med" len="med"/>
+                    </a:lnB>
+                  </a:tcPr>
+                </a:tc>
+                <a:tc>
+                  <a:txBody>
+                    <a:bodyPr/>
+                    <a:lstStyle/>
+                    <a:p>
+                      <a:pPr algn="ctr" indent="0" marL="0">
+                        <a:buNone/>
+                      </a:pPr>
+                      <a:r>
+                        <a:rPr lang="en-US" sz="1000" b="1" dirty="0">
+                          <a:solidFill>
+                            <a:srgbClr val="1B1A17"/>
+                          </a:solidFill>
+                          <a:latin typeface="Georgia" pitchFamily="34" charset="0"/>
+                          <a:ea typeface="Georgia" pitchFamily="34" charset="-122"/>
+                          <a:cs typeface="Georgia" pitchFamily="34" charset="-120"/>
+                        </a:rPr>
+                        <a:t>+37.9</a:t>
+                      </a:r>
+                      <a:endParaRPr lang="en-US" sz="1000" dirty="0">
+                        <a:latin typeface="Georgia" charset="0"/>
+                        <a:ea typeface="Georgia" charset="0"/>
+                        <a:cs typeface="Georgia" charset="0"/>
+                      </a:endParaRPr>
+                    </a:p>
+                  </a:txBody>
+                  <a:tcPr marL="50800" marR="50800" marT="50800" marB="50800" anchor="t">
+                    <a:lnL w="0" cap="flat" cmpd="sng" algn="ctr">
+                      <a:noFill/>
+                    </a:lnL>
+                    <a:lnR w="0" cap="flat" cmpd="sng" algn="ctr">
+                      <a:noFill/>
+                    </a:lnR>
+                    <a:lnT w="0" cap="flat" cmpd="sng" algn="ctr">
+                      <a:noFill/>
+                    </a:lnT>
+                    <a:lnB w="0" cap="flat" cmpd="sng" algn="ctr">
+                      <a:solidFill>
+                        <a:srgbClr val="FFFFFF"/>
+                      </a:solidFill>
+                      <a:prstDash val="solid"/>
+                      <a:round/>
+                      <a:headEnd type="none" w="med" len="med"/>
+                      <a:tailEnd type="none" w="med" len="med"/>
+                    </a:lnB>
+                  </a:tcPr>
+                </a:tc>
+                <a:tc>
+                  <a:txBody>
+                    <a:bodyPr/>
+                    <a:lstStyle/>
+                    <a:p>
+                      <a:pPr algn="ctr" indent="0" marL="0">
+                        <a:buNone/>
+                      </a:pPr>
+                      <a:r>
+                        <a:rPr lang="en-US" sz="1000" b="1" dirty="0">
+                          <a:solidFill>
+                            <a:srgbClr val="1B1A17"/>
+                          </a:solidFill>
+                          <a:latin typeface="Georgia" pitchFamily="34" charset="0"/>
+                          <a:ea typeface="Georgia" pitchFamily="34" charset="-122"/>
+                          <a:cs typeface="Georgia" pitchFamily="34" charset="-120"/>
+                        </a:rPr>
+                        <a:t>+33.3</a:t>
+                      </a:r>
+                      <a:endParaRPr lang="en-US" sz="1000" dirty="0">
+                        <a:latin typeface="Georgia" charset="0"/>
+                        <a:ea typeface="Georgia" charset="0"/>
+                        <a:cs typeface="Georgia" charset="0"/>
+                      </a:endParaRPr>
+                    </a:p>
+                  </a:txBody>
+                  <a:tcPr marL="50800" marR="50800" marT="50800" marB="50800" anchor="t">
+                    <a:lnL w="0" cap="flat" cmpd="sng" algn="ctr">
+                      <a:noFill/>
+                    </a:lnL>
+                    <a:lnR w="0" cap="flat" cmpd="sng" algn="ctr">
+                      <a:noFill/>
+                    </a:lnR>
+                    <a:lnT w="0" cap="flat" cmpd="sng" algn="ctr">
+                      <a:noFill/>
+                    </a:lnT>
+                    <a:lnB w="0" cap="flat" cmpd="sng" algn="ctr">
+                      <a:solidFill>
+                        <a:srgbClr val="FFFFFF"/>
+                      </a:solidFill>
+                      <a:prstDash val="solid"/>
+                      <a:round/>
+                      <a:headEnd type="none" w="med" len="med"/>
+                      <a:tailEnd type="none" w="med" len="med"/>
+                    </a:lnB>
+                  </a:tcPr>
+                </a:tc>
+              </a:tr>
+              <a:tr h="274320">
+                <a:tc>
+                  <a:txBody>
+                    <a:bodyPr/>
+                    <a:lstStyle/>
+                    <a:p>
+                      <a:pPr indent="0" marL="0">
+                        <a:buNone/>
+                      </a:pPr>
+                      <a:r>
+                        <a:rPr lang="en-US" sz="1000" dirty="0">
+                          <a:solidFill>
+                            <a:srgbClr val="1B1A17"/>
+                          </a:solidFill>
+                          <a:latin typeface="Georgia" pitchFamily="34" charset="0"/>
+                          <a:ea typeface="Georgia" pitchFamily="34" charset="-122"/>
+                          <a:cs typeface="Georgia" pitchFamily="34" charset="-120"/>
+                        </a:rPr>
+                        <a:t>thr 0.4</a:t>
+                      </a:r>
+                      <a:endParaRPr lang="en-US" sz="1000" dirty="0">
+                        <a:latin typeface="Georgia" charset="0"/>
+                        <a:ea typeface="Georgia" charset="0"/>
+                        <a:cs typeface="Georgia" charset="0"/>
+                      </a:endParaRPr>
+                    </a:p>
+                  </a:txBody>
+                  <a:tcPr marL="50800" marR="50800" marT="50800" marB="50800" anchor="t">
+                    <a:lnL w="0" cap="flat" cmpd="sng" algn="ctr">
+                      <a:noFill/>
+                    </a:lnL>
+                    <a:lnR w="0" cap="flat" cmpd="sng" algn="ctr">
+                      <a:noFill/>
+                    </a:lnR>
+                    <a:lnT w="0" cap="flat" cmpd="sng" algn="ctr">
+                      <a:noFill/>
+                    </a:lnT>
+                    <a:lnB w="0" cap="flat" cmpd="sng" algn="ctr">
+                      <a:solidFill>
+                        <a:srgbClr val="FFFFFF"/>
+                      </a:solidFill>
+                      <a:prstDash val="solid"/>
+                      <a:round/>
+                      <a:headEnd type="none" w="med" len="med"/>
+                      <a:tailEnd type="none" w="med" len="med"/>
+                    </a:lnB>
+                  </a:tcPr>
+                </a:tc>
+                <a:tc>
+                  <a:txBody>
+                    <a:bodyPr/>
+                    <a:lstStyle/>
+                    <a:p>
+                      <a:pPr algn="ctr" indent="0" marL="0">
+                        <a:buNone/>
+                      </a:pPr>
+                      <a:r>
+                        <a:rPr lang="en-US" sz="1000" dirty="0">
+                          <a:solidFill>
+                            <a:srgbClr val="1B1A17"/>
+                          </a:solidFill>
+                          <a:latin typeface="Georgia" pitchFamily="34" charset="0"/>
+                          <a:ea typeface="Georgia" pitchFamily="34" charset="-122"/>
+                          <a:cs typeface="Georgia" pitchFamily="34" charset="-120"/>
+                        </a:rPr>
+                        <a:t>+26.5</a:t>
+                      </a:r>
+                      <a:endParaRPr lang="en-US" sz="1000" dirty="0">
+                        <a:latin typeface="Georgia" charset="0"/>
+                        <a:ea typeface="Georgia" charset="0"/>
+                        <a:cs typeface="Georgia" charset="0"/>
+                      </a:endParaRPr>
+                    </a:p>
+                  </a:txBody>
+                  <a:tcPr marL="50800" marR="50800" marT="50800" marB="50800" anchor="t">
+                    <a:lnL w="0" cap="flat" cmpd="sng" algn="ctr">
+                      <a:noFill/>
+                    </a:lnL>
+                    <a:lnR w="0" cap="flat" cmpd="sng" algn="ctr">
+                      <a:noFill/>
+                    </a:lnR>
+                    <a:lnT w="0" cap="flat" cmpd="sng" algn="ctr">
+                      <a:noFill/>
+                    </a:lnT>
+                    <a:lnB w="0" cap="flat" cmpd="sng" algn="ctr">
+                      <a:solidFill>
+                        <a:srgbClr val="FFFFFF"/>
+                      </a:solidFill>
+                      <a:prstDash val="solid"/>
+                      <a:round/>
+                      <a:headEnd type="none" w="med" len="med"/>
+                      <a:tailEnd type="none" w="med" len="med"/>
+                    </a:lnB>
+                  </a:tcPr>
+                </a:tc>
+                <a:tc>
+                  <a:txBody>
+                    <a:bodyPr/>
+                    <a:lstStyle/>
+                    <a:p>
+                      <a:pPr algn="ctr" indent="0" marL="0">
+                        <a:buNone/>
+                      </a:pPr>
+                      <a:r>
+                        <a:rPr lang="en-US" sz="1000" dirty="0">
+                          <a:solidFill>
+                            <a:srgbClr val="1B1A17"/>
+                          </a:solidFill>
+                          <a:latin typeface="Georgia" pitchFamily="34" charset="0"/>
+                          <a:ea typeface="Georgia" pitchFamily="34" charset="-122"/>
+                          <a:cs typeface="Georgia" pitchFamily="34" charset="-120"/>
+                        </a:rPr>
+                        <a:t>+34.9</a:t>
+                      </a:r>
+                      <a:endParaRPr lang="en-US" sz="1000" dirty="0">
+                        <a:latin typeface="Georgia" charset="0"/>
+                        <a:ea typeface="Georgia" charset="0"/>
+                        <a:cs typeface="Georgia" charset="0"/>
+                      </a:endParaRPr>
+                    </a:p>
+                  </a:txBody>
+                  <a:tcPr marL="50800" marR="50800" marT="50800" marB="50800" anchor="t">
+                    <a:lnL w="0" cap="flat" cmpd="sng" algn="ctr">
+                      <a:noFill/>
+                    </a:lnL>
+                    <a:lnR w="0" cap="flat" cmpd="sng" algn="ctr">
+                      <a:noFill/>
+                    </a:lnR>
+                    <a:lnT w="0" cap="flat" cmpd="sng" algn="ctr">
+                      <a:noFill/>
+                    </a:lnT>
+                    <a:lnB w="0" cap="flat" cmpd="sng" algn="ctr">
+                      <a:solidFill>
+                        <a:srgbClr val="FFFFFF"/>
+                      </a:solidFill>
+                      <a:prstDash val="solid"/>
+                      <a:round/>
+                      <a:headEnd type="none" w="med" len="med"/>
+                      <a:tailEnd type="none" w="med" len="med"/>
+                    </a:lnB>
+                  </a:tcPr>
+                </a:tc>
+                <a:tc>
+                  <a:txBody>
+                    <a:bodyPr/>
+                    <a:lstStyle/>
+                    <a:p>
+                      <a:pPr algn="ctr" indent="0" marL="0">
+                        <a:buNone/>
+                      </a:pPr>
+                      <a:r>
+                        <a:rPr lang="en-US" sz="1000" dirty="0">
+                          <a:solidFill>
+                            <a:srgbClr val="1B1A17"/>
+                          </a:solidFill>
+                          <a:latin typeface="Georgia" pitchFamily="34" charset="0"/>
+                          <a:ea typeface="Georgia" pitchFamily="34" charset="-122"/>
+                          <a:cs typeface="Georgia" pitchFamily="34" charset="-120"/>
+                        </a:rPr>
+                        <a:t>+38.4</a:t>
+                      </a:r>
+                      <a:endParaRPr lang="en-US" sz="1000" dirty="0">
+                        <a:latin typeface="Georgia" charset="0"/>
+                        <a:ea typeface="Georgia" charset="0"/>
+                        <a:cs typeface="Georgia" charset="0"/>
+                      </a:endParaRPr>
+                    </a:p>
+                  </a:txBody>
+                  <a:tcPr marL="50800" marR="50800" marT="50800" marB="50800" anchor="t">
+                    <a:lnL w="0" cap="flat" cmpd="sng" algn="ctr">
+                      <a:noFill/>
+                    </a:lnL>
+                    <a:lnR w="0" cap="flat" cmpd="sng" algn="ctr">
+                      <a:noFill/>
+                    </a:lnR>
+                    <a:lnT w="0" cap="flat" cmpd="sng" algn="ctr">
+                      <a:noFill/>
+                    </a:lnT>
+                    <a:lnB w="0" cap="flat" cmpd="sng" algn="ctr">
+                      <a:solidFill>
+                        <a:srgbClr val="FFFFFF"/>
+                      </a:solidFill>
+                      <a:prstDash val="solid"/>
+                      <a:round/>
+                      <a:headEnd type="none" w="med" len="med"/>
+                      <a:tailEnd type="none" w="med" len="med"/>
+                    </a:lnB>
+                  </a:tcPr>
+                </a:tc>
+                <a:tc>
+                  <a:txBody>
+                    <a:bodyPr/>
+                    <a:lstStyle/>
+                    <a:p>
+                      <a:pPr algn="ctr" indent="0" marL="0">
+                        <a:buNone/>
+                      </a:pPr>
+                      <a:r>
+                        <a:rPr lang="en-US" sz="1000" dirty="0">
+                          <a:solidFill>
+                            <a:srgbClr val="1B1A17"/>
+                          </a:solidFill>
+                          <a:latin typeface="Georgia" pitchFamily="34" charset="0"/>
+                          <a:ea typeface="Georgia" pitchFamily="34" charset="-122"/>
+                          <a:cs typeface="Georgia" pitchFamily="34" charset="-120"/>
+                        </a:rPr>
+                        <a:t>+39.4</a:t>
+                      </a:r>
+                      <a:endParaRPr lang="en-US" sz="1000" dirty="0">
+                        <a:latin typeface="Georgia" charset="0"/>
+                        <a:ea typeface="Georgia" charset="0"/>
+                        <a:cs typeface="Georgia" charset="0"/>
+                      </a:endParaRPr>
+                    </a:p>
+                  </a:txBody>
+                  <a:tcPr marL="50800" marR="50800" marT="50800" marB="50800" anchor="t">
+                    <a:lnL w="0" cap="flat" cmpd="sng" algn="ctr">
+                      <a:noFill/>
+                    </a:lnL>
+                    <a:lnR w="0" cap="flat" cmpd="sng" algn="ctr">
+                      <a:noFill/>
+                    </a:lnR>
+                    <a:lnT w="0" cap="flat" cmpd="sng" algn="ctr">
+                      <a:noFill/>
+                    </a:lnT>
+                    <a:lnB w="0" cap="flat" cmpd="sng" algn="ctr">
+                      <a:solidFill>
+                        <a:srgbClr val="FFFFFF"/>
+                      </a:solidFill>
+                      <a:prstDash val="solid"/>
+                      <a:round/>
+                      <a:headEnd type="none" w="med" len="med"/>
+                      <a:tailEnd type="none" w="med" len="med"/>
+                    </a:lnB>
+                  </a:tcPr>
+                </a:tc>
+                <a:tc>
+                  <a:txBody>
+                    <a:bodyPr/>
+                    <a:lstStyle/>
+                    <a:p>
+                      <a:pPr algn="ctr" indent="0" marL="0">
+                        <a:buNone/>
+                      </a:pPr>
+                      <a:r>
+                        <a:rPr lang="en-US" sz="1000" dirty="0">
+                          <a:solidFill>
+                            <a:srgbClr val="1B1A17"/>
+                          </a:solidFill>
+                          <a:latin typeface="Georgia" pitchFamily="34" charset="0"/>
+                          <a:ea typeface="Georgia" pitchFamily="34" charset="-122"/>
+                          <a:cs typeface="Georgia" pitchFamily="34" charset="-120"/>
+                        </a:rPr>
+                        <a:t>+35.9</a:t>
+                      </a:r>
+                      <a:endParaRPr lang="en-US" sz="1000" dirty="0">
+                        <a:latin typeface="Georgia" charset="0"/>
+                        <a:ea typeface="Georgia" charset="0"/>
+                        <a:cs typeface="Georgia" charset="0"/>
+                      </a:endParaRPr>
+                    </a:p>
+                  </a:txBody>
+                  <a:tcPr marL="50800" marR="50800" marT="50800" marB="50800" anchor="t">
+                    <a:lnL w="0" cap="flat" cmpd="sng" algn="ctr">
+                      <a:noFill/>
+                    </a:lnL>
+                    <a:lnR w="0" cap="flat" cmpd="sng" algn="ctr">
+                      <a:noFill/>
+                    </a:lnR>
+                    <a:lnT w="0" cap="flat" cmpd="sng" algn="ctr">
+                      <a:noFill/>
+                    </a:lnT>
+                    <a:lnB w="0" cap="flat" cmpd="sng" algn="ctr">
+                      <a:solidFill>
+                        <a:srgbClr val="FFFFFF"/>
+                      </a:solidFill>
+                      <a:prstDash val="solid"/>
+                      <a:round/>
+                      <a:headEnd type="none" w="med" len="med"/>
+                      <a:tailEnd type="none" w="med" len="med"/>
+                    </a:lnB>
+                  </a:tcPr>
+                </a:tc>
+              </a:tr>
+              <a:tr h="274320">
+                <a:tc>
+                  <a:txBody>
+                    <a:bodyPr/>
+                    <a:lstStyle/>
+                    <a:p>
+                      <a:pPr indent="0" marL="0">
+                        <a:buNone/>
+                      </a:pPr>
+                      <a:r>
+                        <a:rPr lang="en-US" sz="1000" dirty="0">
+                          <a:solidFill>
+                            <a:srgbClr val="1B1A17"/>
+                          </a:solidFill>
+                          <a:latin typeface="Georgia" pitchFamily="34" charset="0"/>
+                          <a:ea typeface="Georgia" pitchFamily="34" charset="-122"/>
+                          <a:cs typeface="Georgia" pitchFamily="34" charset="-120"/>
+                        </a:rPr>
+                        <a:t>thr 0.5</a:t>
+                      </a:r>
+                      <a:endParaRPr lang="en-US" sz="1000" dirty="0">
+                        <a:latin typeface="Georgia" charset="0"/>
+                        <a:ea typeface="Georgia" charset="0"/>
+                        <a:cs typeface="Georgia" charset="0"/>
+                      </a:endParaRPr>
+                    </a:p>
+                  </a:txBody>
+                  <a:tcPr marL="50800" marR="50800" marT="50800" marB="50800" anchor="t">
+                    <a:lnL w="0" cap="flat" cmpd="sng" algn="ctr">
+                      <a:noFill/>
+                    </a:lnL>
+                    <a:lnR w="0" cap="flat" cmpd="sng" algn="ctr">
+                      <a:noFill/>
+                    </a:lnR>
+                    <a:lnT w="0" cap="flat" cmpd="sng" algn="ctr">
+                      <a:noFill/>
+                    </a:lnT>
+                    <a:lnB w="13970" cap="flat" cmpd="sng" algn="ctr">
+                      <a:solidFill>
+                        <a:srgbClr val="1B1A17"/>
+                      </a:solidFill>
+                      <a:prstDash val="solid"/>
+                      <a:round/>
+                      <a:headEnd type="none" w="med" len="med"/>
+                      <a:tailEnd type="none" w="med" len="med"/>
+                    </a:lnB>
+                  </a:tcPr>
+                </a:tc>
+                <a:tc>
+                  <a:txBody>
+                    <a:bodyPr/>
+                    <a:lstStyle/>
+                    <a:p>
+                      <a:pPr algn="ctr" indent="0" marL="0">
+                        <a:buNone/>
+                      </a:pPr>
+                      <a:r>
+                        <a:rPr lang="en-US" sz="1000" dirty="0">
+                          <a:solidFill>
+                            <a:srgbClr val="1B1A17"/>
+                          </a:solidFill>
+                          <a:latin typeface="Georgia" pitchFamily="34" charset="0"/>
+                          <a:ea typeface="Georgia" pitchFamily="34" charset="-122"/>
+                          <a:cs typeface="Georgia" pitchFamily="34" charset="-120"/>
+                        </a:rPr>
+                        <a:t>+24.2</a:t>
+                      </a:r>
+                      <a:endParaRPr lang="en-US" sz="1000" dirty="0">
+                        <a:latin typeface="Georgia" charset="0"/>
+                        <a:ea typeface="Georgia" charset="0"/>
+                        <a:cs typeface="Georgia" charset="0"/>
+                      </a:endParaRPr>
+                    </a:p>
+                  </a:txBody>
+                  <a:tcPr marL="50800" marR="50800" marT="50800" marB="50800" anchor="t">
+                    <a:lnL w="0" cap="flat" cmpd="sng" algn="ctr">
+                      <a:noFill/>
+                    </a:lnL>
+                    <a:lnR w="0" cap="flat" cmpd="sng" algn="ctr">
+                      <a:noFill/>
+                    </a:lnR>
+                    <a:lnT w="0" cap="flat" cmpd="sng" algn="ctr">
+                      <a:noFill/>
+                    </a:lnT>
+                    <a:lnB w="13970" cap="flat" cmpd="sng" algn="ctr">
+                      <a:solidFill>
+                        <a:srgbClr val="1B1A17"/>
+                      </a:solidFill>
+                      <a:prstDash val="solid"/>
+                      <a:round/>
+                      <a:headEnd type="none" w="med" len="med"/>
+                      <a:tailEnd type="none" w="med" len="med"/>
+                    </a:lnB>
+                  </a:tcPr>
+                </a:tc>
+                <a:tc>
+                  <a:txBody>
+                    <a:bodyPr/>
+                    <a:lstStyle/>
+                    <a:p>
+                      <a:pPr algn="ctr" indent="0" marL="0">
+                        <a:buNone/>
+                      </a:pPr>
+                      <a:r>
+                        <a:rPr lang="en-US" sz="1000" dirty="0">
+                          <a:solidFill>
+                            <a:srgbClr val="1B1A17"/>
+                          </a:solidFill>
+                          <a:latin typeface="Georgia" pitchFamily="34" charset="0"/>
+                          <a:ea typeface="Georgia" pitchFamily="34" charset="-122"/>
+                          <a:cs typeface="Georgia" pitchFamily="34" charset="-120"/>
+                        </a:rPr>
+                        <a:t>+32.8</a:t>
+                      </a:r>
+                      <a:endParaRPr lang="en-US" sz="1000" dirty="0">
+                        <a:latin typeface="Georgia" charset="0"/>
+                        <a:ea typeface="Georgia" charset="0"/>
+                        <a:cs typeface="Georgia" charset="0"/>
+                      </a:endParaRPr>
+                    </a:p>
+                  </a:txBody>
+                  <a:tcPr marL="50800" marR="50800" marT="50800" marB="50800" anchor="t">
+                    <a:lnL w="0" cap="flat" cmpd="sng" algn="ctr">
+                      <a:noFill/>
+                    </a:lnL>
+                    <a:lnR w="0" cap="flat" cmpd="sng" algn="ctr">
+                      <a:noFill/>
+                    </a:lnR>
+                    <a:lnT w="0" cap="flat" cmpd="sng" algn="ctr">
+                      <a:noFill/>
+                    </a:lnT>
+                    <a:lnB w="13970" cap="flat" cmpd="sng" algn="ctr">
+                      <a:solidFill>
+                        <a:srgbClr val="1B1A17"/>
+                      </a:solidFill>
+                      <a:prstDash val="solid"/>
+                      <a:round/>
+                      <a:headEnd type="none" w="med" len="med"/>
+                      <a:tailEnd type="none" w="med" len="med"/>
+                    </a:lnB>
+                  </a:tcPr>
+                </a:tc>
+                <a:tc>
+                  <a:txBody>
+                    <a:bodyPr/>
+                    <a:lstStyle/>
+                    <a:p>
+                      <a:pPr algn="ctr" indent="0" marL="0">
+                        <a:buNone/>
+                      </a:pPr>
+                      <a:r>
+                        <a:rPr lang="en-US" sz="1000" dirty="0">
+                          <a:solidFill>
+                            <a:srgbClr val="1B1A17"/>
+                          </a:solidFill>
+                          <a:latin typeface="Georgia" pitchFamily="34" charset="0"/>
+                          <a:ea typeface="Georgia" pitchFamily="34" charset="-122"/>
+                          <a:cs typeface="Georgia" pitchFamily="34" charset="-120"/>
+                        </a:rPr>
+                        <a:t>+36.2</a:t>
+                      </a:r>
+                      <a:endParaRPr lang="en-US" sz="1000" dirty="0">
+                        <a:latin typeface="Georgia" charset="0"/>
+                        <a:ea typeface="Georgia" charset="0"/>
+                        <a:cs typeface="Georgia" charset="0"/>
+                      </a:endParaRPr>
+                    </a:p>
+                  </a:txBody>
+                  <a:tcPr marL="50800" marR="50800" marT="50800" marB="50800" anchor="t">
+                    <a:lnL w="0" cap="flat" cmpd="sng" algn="ctr">
+                      <a:noFill/>
+                    </a:lnL>
+                    <a:lnR w="0" cap="flat" cmpd="sng" algn="ctr">
+                      <a:noFill/>
+                    </a:lnR>
+                    <a:lnT w="0" cap="flat" cmpd="sng" algn="ctr">
+                      <a:noFill/>
+                    </a:lnT>
+                    <a:lnB w="13970" cap="flat" cmpd="sng" algn="ctr">
+                      <a:solidFill>
+                        <a:srgbClr val="1B1A17"/>
+                      </a:solidFill>
+                      <a:prstDash val="solid"/>
+                      <a:round/>
+                      <a:headEnd type="none" w="med" len="med"/>
+                      <a:tailEnd type="none" w="med" len="med"/>
+                    </a:lnB>
+                  </a:tcPr>
+                </a:tc>
+                <a:tc>
+                  <a:txBody>
+                    <a:bodyPr/>
+                    <a:lstStyle/>
+                    <a:p>
+                      <a:pPr algn="ctr" indent="0" marL="0">
+                        <a:buNone/>
+                      </a:pPr>
+                      <a:r>
+                        <a:rPr lang="en-US" sz="1000" dirty="0">
+                          <a:solidFill>
+                            <a:srgbClr val="1B1A17"/>
+                          </a:solidFill>
+                          <a:latin typeface="Georgia" pitchFamily="34" charset="0"/>
+                          <a:ea typeface="Georgia" pitchFamily="34" charset="-122"/>
+                          <a:cs typeface="Georgia" pitchFamily="34" charset="-120"/>
+                        </a:rPr>
+                        <a:t>+38.4</a:t>
+                      </a:r>
+                      <a:endParaRPr lang="en-US" sz="1000" dirty="0">
+                        <a:latin typeface="Georgia" charset="0"/>
+                        <a:ea typeface="Georgia" charset="0"/>
+                        <a:cs typeface="Georgia" charset="0"/>
+                      </a:endParaRPr>
+                    </a:p>
+                  </a:txBody>
+                  <a:tcPr marL="50800" marR="50800" marT="50800" marB="50800" anchor="t">
+                    <a:lnL w="0" cap="flat" cmpd="sng" algn="ctr">
+                      <a:noFill/>
+                    </a:lnL>
+                    <a:lnR w="0" cap="flat" cmpd="sng" algn="ctr">
+                      <a:noFill/>
+                    </a:lnR>
+                    <a:lnT w="0" cap="flat" cmpd="sng" algn="ctr">
+                      <a:noFill/>
+                    </a:lnT>
+                    <a:lnB w="13970" cap="flat" cmpd="sng" algn="ctr">
+                      <a:solidFill>
+                        <a:srgbClr val="1B1A17"/>
+                      </a:solidFill>
+                      <a:prstDash val="solid"/>
+                      <a:round/>
+                      <a:headEnd type="none" w="med" len="med"/>
+                      <a:tailEnd type="none" w="med" len="med"/>
+                    </a:lnB>
+                  </a:tcPr>
+                </a:tc>
+                <a:tc>
+                  <a:txBody>
+                    <a:bodyPr/>
+                    <a:lstStyle/>
+                    <a:p>
+                      <a:pPr algn="ctr" indent="0" marL="0">
+                        <a:buNone/>
+                      </a:pPr>
+                      <a:r>
+                        <a:rPr lang="en-US" sz="1000" dirty="0">
+                          <a:solidFill>
+                            <a:srgbClr val="1B1A17"/>
+                          </a:solidFill>
+                          <a:latin typeface="Georgia" pitchFamily="34" charset="0"/>
+                          <a:ea typeface="Georgia" pitchFamily="34" charset="-122"/>
+                          <a:cs typeface="Georgia" pitchFamily="34" charset="-120"/>
+                        </a:rPr>
+                        <a:t>+37.9</a:t>
+                      </a:r>
+                      <a:endParaRPr lang="en-US" sz="1000" dirty="0">
+                        <a:latin typeface="Georgia" charset="0"/>
+                        <a:ea typeface="Georgia" charset="0"/>
+                        <a:cs typeface="Georgia" charset="0"/>
+                      </a:endParaRPr>
+                    </a:p>
+                  </a:txBody>
+                  <a:tcPr marL="50800" marR="50800" marT="50800" marB="50800" anchor="t">
+                    <a:lnL w="0" cap="flat" cmpd="sng" algn="ctr">
+                      <a:noFill/>
+                    </a:lnL>
+                    <a:lnR w="0" cap="flat" cmpd="sng" algn="ctr">
+                      <a:noFill/>
+                    </a:lnR>
+                    <a:lnT w="0" cap="flat" cmpd="sng" algn="ctr">
+                      <a:noFill/>
+                    </a:lnT>
+                    <a:lnB w="13970" cap="flat" cmpd="sng" algn="ctr">
+                      <a:solidFill>
+                        <a:srgbClr val="1B1A17"/>
+                      </a:solidFill>
+                      <a:prstDash val="solid"/>
+                      <a:round/>
+                      <a:headEnd type="none" w="med" len="med"/>
+                      <a:tailEnd type="none" w="med" len="med"/>
+                    </a:lnB>
+                  </a:tcPr>
+                </a:tc>
+              </a:tr>
+            </a:tbl>
+          </a:graphicData>
+        </a:graphic>
+      </p:graphicFrame>
+      <p:sp>
+        <p:nvSpPr>
+          <p:cNvPr id="11" name="Text 7"/>
+          <p:cNvSpPr/>
+          <p:nvPr/>
+        </p:nvSpPr>
+        <p:spPr>
+          <a:xfrm>
+            <a:off x="777240" y="6263640"/>
+            <a:ext cx="10637215" cy="365760"/>
+          </a:xfrm>
+          <a:prstGeom prst="rect">
+            <a:avLst/>
+          </a:prstGeom>
+          <a:noFill/>
+          <a:ln/>
+        </p:spPr>
+        <p:txBody>
+          <a:bodyPr wrap="square" lIns="0" tIns="0" rIns="0" bIns="0" rtlCol="0" anchor="ctr"/>
+          <a:lstStyle/>
+          <a:p>
+            <a:pPr indent="0" marL="0">
+              <a:buNone/>
+            </a:pPr>
+            <a:r>
+              <a:rPr lang="en-US" sz="1050" dirty="0">
+                <a:solidFill>
+                  <a:srgbClr val="6B6963"/>
+                </a:solidFill>
+                <a:latin typeface="Georgia" pitchFamily="34" charset="0"/>
+                <a:ea typeface="Georgia" pitchFamily="34" charset="-122"/>
+                <a:cs typeface="Georgia" pitchFamily="34" charset="-120"/>
+              </a:rPr>
+              <a:t>Optimal dilation rises with threshold — 16, 32, 48, 48 px. Sweeping dilation alone found a local optimum on one slice. The peak is interior on both axes.</a:t>
+            </a:r>
+            <a:endParaRPr lang="en-US" sz="1050" dirty="0"/>
+          </a:p>
+        </p:txBody>
+      </p:sp>
+    </p:spTree>
+  </p:cSld>
+  <p:clrMapOvr>
+    <a:masterClrMapping/>
+  </p:clrMapOvr>
+</p:sld>
+</file>
+
+<file path=ppt/slides/slide12.xml><?xml version="1.0" encoding="utf-8"?>
+<p:sld xmlns:a="http://schemas.openxmlformats.org/drawingml/2006/main" xmlns:r="http://schemas.openxmlformats.org/officeDocument/2006/relationships" xmlns:p="http://schemas.openxmlformats.org/presentationml/2006/main">
+  <p:cSld name="Slide 12">
+    <p:bg>
+      <p:bgPr>
+        <a:solidFill>
+          <a:srgbClr val="FDFDFC"/>
+        </a:solidFill>
+      </p:bgPr>
+    </p:bg>
+    <p:spTree>
+      <p:nvGrpSpPr>
+        <p:cNvPr id="1" name=""/>
+        <p:cNvGrpSpPr/>
+        <p:nvPr/>
+      </p:nvGrpSpPr>
+      <p:grpSpPr>
+        <a:xfrm>
+          <a:off x="0" y="0"/>
+          <a:ext cx="0" cy="0"/>
+          <a:chOff x="0" y="0"/>
+          <a:chExt cx="0" cy="0"/>
+        </a:xfrm>
+      </p:grpSpPr>
+      <p:sp>
+        <p:nvSpPr>
+          <p:cNvPr id="2" name="Text 0"/>
+          <p:cNvSpPr/>
+          <p:nvPr/>
+        </p:nvSpPr>
+        <p:spPr>
+          <a:xfrm>
+            <a:off x="777240" y="365760"/>
+            <a:ext cx="10637215" cy="201168"/>
+          </a:xfrm>
+          <a:prstGeom prst="rect">
+            <a:avLst/>
+          </a:prstGeom>
+          <a:noFill/>
+          <a:ln/>
+        </p:spPr>
+        <p:txBody>
+          <a:bodyPr wrap="square" lIns="0" tIns="0" rIns="0" bIns="0" rtlCol="0" anchor="ctr"/>
+          <a:lstStyle/>
+          <a:p>
+            <a:pPr indent="0" marL="0">
+              <a:buNone/>
+            </a:pPr>
+            <a:r>
+              <a:rPr lang="en-US" sz="1050" spc="70" kern="0" dirty="0">
+                <a:solidFill>
+                  <a:srgbClr val="6B6963"/>
+                </a:solidFill>
+                <a:latin typeface="Georgia" pitchFamily="34" charset="0"/>
+                <a:ea typeface="Georgia" pitchFamily="34" charset="-122"/>
+                <a:cs typeface="Georgia" pitchFamily="34" charset="-120"/>
+              </a:rPr>
               <a:t>What we checked on ourselves</a:t>
             </a:r>
             <a:endParaRPr lang="en-US" sz="1050" dirty="0"/>
@@ -4266,7 +7204,7 @@
       </p:sp>
       <p:graphicFrame>
         <p:nvGraphicFramePr>
-          <p:cNvPr id="12" name="Table 0"/>
+          <p:cNvPr id="13" name="Table 0"/>
           <p:cNvGraphicFramePr>
             <a:graphicFrameLocks noGrp="1"/>
           </p:cNvGraphicFramePr>
@@ -5222,9 +8160,9 @@
 </p:sld>
 </file>
 
-<file path=ppt/slides/slide12.xml><?xml version="1.0" encoding="utf-8"?>
+<file path=ppt/slides/slide13.xml><?xml version="1.0" encoding="utf-8"?>
 <p:sld xmlns:a="http://schemas.openxmlformats.org/drawingml/2006/main" xmlns:r="http://schemas.openxmlformats.org/officeDocument/2006/relationships" xmlns:p="http://schemas.openxmlformats.org/presentationml/2006/main">
-  <p:cSld name="Slide 12">
+  <p:cSld name="Slide 13">
     <p:bg>
       <p:bgPr>
         <a:solidFill>
@@ -5346,7 +8284,7 @@
       </p:sp>
       <p:graphicFrame>
         <p:nvGraphicFramePr>
-          <p:cNvPr id="13" name="Table 0"/>
+          <p:cNvPr id="14" name="Table 0"/>
           <p:cNvGraphicFramePr>
             <a:graphicFrameLocks noGrp="1"/>
           </p:cNvGraphicFramePr>
@@ -6201,7 +9139,7 @@
       </p:sp>
       <p:graphicFrame>
         <p:nvGraphicFramePr>
-          <p:cNvPr id="25" name="Table 1"/>
+          <p:cNvPr id="27" name="Table 1"/>
           <p:cNvGraphicFramePr>
             <a:graphicFrameLocks noGrp="1"/>
           </p:cNvGraphicFramePr>
@@ -6633,9 +9571,9 @@
 </p:sld>
 </file>
 
-<file path=ppt/slides/slide13.xml><?xml version="1.0" encoding="utf-8"?>
+<file path=ppt/slides/slide14.xml><?xml version="1.0" encoding="utf-8"?>
 <p:sld xmlns:a="http://schemas.openxmlformats.org/drawingml/2006/main" xmlns:r="http://schemas.openxmlformats.org/officeDocument/2006/relationships" xmlns:p="http://schemas.openxmlformats.org/presentationml/2006/main">
-  <p:cSld name="Slide 13">
+  <p:cSld name="Slide 14">
     <p:bg>
       <p:bgPr>
         <a:solidFill>

--- a/deck/ISE_Review1_Final.pptx
+++ b/deck/ISE_Review1_Final.pptx
@@ -5509,7 +5509,7 @@
                 <a:ea typeface="Georgia" pitchFamily="34" charset="-122"/>
                 <a:cs typeface="Georgia" pitchFamily="34" charset="-120"/>
               </a:rPr>
-              <a:t> whole-frame editing's 24.2%, so we win on both quantities rather than trading one for the other.</a:t>
+              <a:t> whole-frame editing's 24.2%, so we win on both quantities rather than trading one for the other. The oracle at +53.0% bounds what a perfect region would buy.</a:t>
             </a:r>
             <a:endParaRPr lang="en-US" sz="1150" dirty="0"/>
           </a:p>
@@ -21585,10 +21585,10 @@
             <a:tbl>
               <a:tblPr/>
               <a:tblGrid>
-                <a:gridCol w="1143000"/>
-                <a:gridCol w="2039112"/>
+                <a:gridCol w="1097280"/>
+                <a:gridCol w="2084832"/>
               </a:tblGrid>
-              <a:tr h="822960">
+              <a:tr h="676656">
                 <a:tc>
                   <a:txBody>
                     <a:bodyPr/>
@@ -21598,7 +21598,7 @@
                         <a:buNone/>
                       </a:pPr>
                       <a:r>
-                        <a:rPr lang="en-US" sz="900" b="1" dirty="0">
+                        <a:rPr lang="en-US" sz="850" b="1" dirty="0">
                           <a:solidFill>
                             <a:srgbClr val="1B1A17"/>
                           </a:solidFill>
@@ -21608,7 +21608,7 @@
                         </a:rPr>
                         <a:t>Overfits fast</a:t>
                       </a:r>
-                      <a:endParaRPr lang="en-US" sz="900" dirty="0">
+                      <a:endParaRPr lang="en-US" sz="850" dirty="0">
                         <a:latin typeface="Georgia" charset="0"/>
                         <a:ea typeface="Georgia" charset="0"/>
                         <a:cs typeface="Georgia" charset="0"/>
@@ -21651,7 +21651,7 @@
                         <a:buNone/>
                       </a:pPr>
                       <a:r>
-                        <a:rPr lang="en-US" sz="900" b="1" dirty="0">
+                        <a:rPr lang="en-US" sz="850" b="1" dirty="0">
                           <a:solidFill>
                             <a:srgbClr val="1B1A17"/>
                           </a:solidFill>
@@ -21661,7 +21661,7 @@
                         </a:rPr>
                         <a:t>validation IoU peaks at epoch 2–7 then halves by epoch 60, while training loss falls throughout</a:t>
                       </a:r>
-                      <a:endParaRPr lang="en-US" sz="900" dirty="0">
+                      <a:endParaRPr lang="en-US" sz="850" dirty="0">
                         <a:latin typeface="Georgia" charset="0"/>
                         <a:ea typeface="Georgia" charset="0"/>
                         <a:cs typeface="Georgia" charset="0"/>
@@ -21696,7 +21696,7 @@
                   </a:tcPr>
                 </a:tc>
               </a:tr>
-              <a:tr h="822960">
+              <a:tr h="676656">
                 <a:tc>
                   <a:txBody>
                     <a:bodyPr/>
@@ -21706,7 +21706,7 @@
                         <a:buNone/>
                       </a:pPr>
                       <a:r>
-                        <a:rPr lang="en-US" sz="900" dirty="0">
+                        <a:rPr lang="en-US" sz="850" dirty="0">
                           <a:solidFill>
                             <a:srgbClr val="1B1A17"/>
                           </a:solidFill>
@@ -21716,7 +21716,7 @@
                         </a:rPr>
                         <a:t>Selection saved it</a:t>
                       </a:r>
-                      <a:endParaRPr lang="en-US" sz="900" dirty="0">
+                      <a:endParaRPr lang="en-US" sz="850" dirty="0">
                         <a:latin typeface="Georgia" charset="0"/>
                         <a:ea typeface="Georgia" charset="0"/>
                         <a:cs typeface="Georgia" charset="0"/>
@@ -21753,7 +21753,7 @@
                         <a:buNone/>
                       </a:pPr>
                       <a:r>
-                        <a:rPr lang="en-US" sz="900" dirty="0">
+                        <a:rPr lang="en-US" sz="850" dirty="0">
                           <a:solidFill>
                             <a:srgbClr val="1B1A17"/>
                           </a:solidFill>
@@ -21763,7 +21763,7 @@
                         </a:rPr>
                         <a:t>choosing on a held-out train slice is why the reported numbers hold; the last epoch would have reported half</a:t>
                       </a:r>
-                      <a:endParaRPr lang="en-US" sz="900" dirty="0">
+                      <a:endParaRPr lang="en-US" sz="850" dirty="0">
                         <a:latin typeface="Georgia" charset="0"/>
                         <a:ea typeface="Georgia" charset="0"/>
                         <a:cs typeface="Georgia" charset="0"/>
@@ -21792,7 +21792,7 @@
                   </a:tcPr>
                 </a:tc>
               </a:tr>
-              <a:tr h="822960">
+              <a:tr h="676656">
                 <a:tc>
                   <a:txBody>
                     <a:bodyPr/>
@@ -21802,7 +21802,7 @@
                         <a:buNone/>
                       </a:pPr>
                       <a:r>
-                        <a:rPr lang="en-US" sz="900" dirty="0">
+                        <a:rPr lang="en-US" sz="850" dirty="0">
                           <a:solidFill>
                             <a:srgbClr val="1B1A17"/>
                           </a:solidFill>
@@ -21812,7 +21812,7 @@
                         </a:rPr>
                         <a:t>Language is real</a:t>
                       </a:r>
-                      <a:endParaRPr lang="en-US" sz="900" dirty="0">
+                      <a:endParaRPr lang="en-US" sz="850" dirty="0">
                         <a:latin typeface="Georgia" charset="0"/>
                         <a:ea typeface="Georgia" charset="0"/>
                         <a:cs typeface="Georgia" charset="0"/>
@@ -21849,7 +21849,7 @@
                         <a:buNone/>
                       </a:pPr>
                       <a:r>
-                        <a:rPr lang="en-US" sz="900" dirty="0">
+                        <a:rPr lang="en-US" sz="850" dirty="0">
                           <a:solidFill>
                             <a:srgbClr val="1B1A17"/>
                           </a:solidFill>
@@ -21859,7 +21859,7 @@
                         </a:rPr>
                         <a:t>zeroing the instruction collapses IoU from 0.188 to ~0.03 — a gap of +0.158</a:t>
                       </a:r>
-                      <a:endParaRPr lang="en-US" sz="900" dirty="0">
+                      <a:endParaRPr lang="en-US" sz="850" dirty="0">
                         <a:latin typeface="Georgia" charset="0"/>
                         <a:ea typeface="Georgia" charset="0"/>
                         <a:cs typeface="Georgia" charset="0"/>
@@ -21888,7 +21888,7 @@
                   </a:tcPr>
                 </a:tc>
               </a:tr>
-              <a:tr h="822960">
+              <a:tr h="676656">
                 <a:tc>
                   <a:txBody>
                     <a:bodyPr/>
@@ -21898,7 +21898,7 @@
                         <a:buNone/>
                       </a:pPr>
                       <a:r>
-                        <a:rPr lang="en-US" sz="900" dirty="0">
+                        <a:rPr lang="en-US" sz="850" dirty="0">
                           <a:solidFill>
                             <a:srgbClr val="1B1A17"/>
                           </a:solidFill>
@@ -21908,7 +21908,103 @@
                         </a:rPr>
                         <a:t>Reproducible</a:t>
                       </a:r>
-                      <a:endParaRPr lang="en-US" sz="900" dirty="0">
+                      <a:endParaRPr lang="en-US" sz="850" dirty="0">
+                        <a:latin typeface="Georgia" charset="0"/>
+                        <a:ea typeface="Georgia" charset="0"/>
+                        <a:cs typeface="Georgia" charset="0"/>
+                      </a:endParaRPr>
+                    </a:p>
+                  </a:txBody>
+                  <a:tcPr marL="50800" marR="50800" marT="50800" marB="50800" anchor="t">
+                    <a:lnL w="0" cap="flat" cmpd="sng" algn="ctr">
+                      <a:noFill/>
+                    </a:lnL>
+                    <a:lnR w="0" cap="flat" cmpd="sng" algn="ctr">
+                      <a:noFill/>
+                    </a:lnR>
+                    <a:lnT w="0" cap="flat" cmpd="sng" algn="ctr">
+                      <a:noFill/>
+                    </a:lnT>
+                    <a:lnB w="0" cap="flat" cmpd="sng" algn="ctr">
+                      <a:solidFill>
+                        <a:srgbClr val="FFFFFF"/>
+                      </a:solidFill>
+                      <a:prstDash val="solid"/>
+                      <a:round/>
+                      <a:headEnd type="none" w="med" len="med"/>
+                      <a:tailEnd type="none" w="med" len="med"/>
+                    </a:lnB>
+                  </a:tcPr>
+                </a:tc>
+                <a:tc>
+                  <a:txBody>
+                    <a:bodyPr/>
+                    <a:lstStyle/>
+                    <a:p>
+                      <a:pPr indent="0" marL="0">
+                        <a:buNone/>
+                      </a:pPr>
+                      <a:r>
+                        <a:rPr lang="en-US" sz="850" dirty="0">
+                          <a:solidFill>
+                            <a:srgbClr val="1B1A17"/>
+                          </a:solidFill>
+                          <a:latin typeface="Georgia" pitchFamily="34" charset="0"/>
+                          <a:ea typeface="Georgia" pitchFamily="34" charset="-122"/>
+                          <a:cs typeface="Georgia" pitchFamily="34" charset="-120"/>
+                        </a:rPr>
+                        <a:t>all 6 curve seeds reproduced their 12-seed dev IoU exactly, to four decimals</a:t>
+                      </a:r>
+                      <a:endParaRPr lang="en-US" sz="850" dirty="0">
+                        <a:latin typeface="Georgia" charset="0"/>
+                        <a:ea typeface="Georgia" charset="0"/>
+                        <a:cs typeface="Georgia" charset="0"/>
+                      </a:endParaRPr>
+                    </a:p>
+                  </a:txBody>
+                  <a:tcPr marL="50800" marR="50800" marT="50800" marB="50800" anchor="t">
+                    <a:lnL w="0" cap="flat" cmpd="sng" algn="ctr">
+                      <a:noFill/>
+                    </a:lnL>
+                    <a:lnR w="0" cap="flat" cmpd="sng" algn="ctr">
+                      <a:noFill/>
+                    </a:lnR>
+                    <a:lnT w="0" cap="flat" cmpd="sng" algn="ctr">
+                      <a:noFill/>
+                    </a:lnT>
+                    <a:lnB w="0" cap="flat" cmpd="sng" algn="ctr">
+                      <a:solidFill>
+                        <a:srgbClr val="FFFFFF"/>
+                      </a:solidFill>
+                      <a:prstDash val="solid"/>
+                      <a:round/>
+                      <a:headEnd type="none" w="med" len="med"/>
+                      <a:tailEnd type="none" w="med" len="med"/>
+                    </a:lnB>
+                  </a:tcPr>
+                </a:tc>
+              </a:tr>
+              <a:tr h="676656">
+                <a:tc>
+                  <a:txBody>
+                    <a:bodyPr/>
+                    <a:lstStyle/>
+                    <a:p>
+                      <a:pPr indent="0" marL="0">
+                        <a:buNone/>
+                      </a:pPr>
+                      <a:r>
+                        <a:rPr lang="en-US" sz="850" dirty="0">
+                          <a:solidFill>
+                            <a:srgbClr val="1B1A17"/>
+                          </a:solidFill>
+                          <a:latin typeface="Georgia" pitchFamily="34" charset="0"/>
+                          <a:ea typeface="Georgia" pitchFamily="34" charset="-122"/>
+                          <a:cs typeface="Georgia" pitchFamily="34" charset="-120"/>
+                        </a:rPr>
+                        <a:t>Headroom is bounded</a:t>
+                      </a:r>
+                      <a:endParaRPr lang="en-US" sz="850" dirty="0">
                         <a:latin typeface="Georgia" charset="0"/>
                         <a:ea typeface="Georgia" charset="0"/>
                         <a:cs typeface="Georgia" charset="0"/>
@@ -21945,17 +22041,17 @@
                         <a:buNone/>
                       </a:pPr>
                       <a:r>
-                        <a:rPr lang="en-US" sz="900" dirty="0">
-                          <a:solidFill>
-                            <a:srgbClr val="1B1A17"/>
-                          </a:solidFill>
-                          <a:latin typeface="Georgia" pitchFamily="34" charset="0"/>
-                          <a:ea typeface="Georgia" pitchFamily="34" charset="-122"/>
-                          <a:cs typeface="Georgia" pitchFamily="34" charset="-120"/>
-                        </a:rPr>
-                        <a:t>all 6 curve seeds reproduced their 12-seed dev IoU exactly, to four decimals</a:t>
-                      </a:r>
-                      <a:endParaRPr lang="en-US" sz="900" dirty="0">
+                        <a:rPr lang="en-US" sz="850" dirty="0">
+                          <a:solidFill>
+                            <a:srgbClr val="1B1A17"/>
+                          </a:solidFill>
+                          <a:latin typeface="Georgia" pitchFamily="34" charset="0"/>
+                          <a:ea typeface="Georgia" pitchFamily="34" charset="-122"/>
+                          <a:cs typeface="Georgia" pitchFamily="34" charset="-120"/>
+                        </a:rPr>
+                        <a:t>least squares caps ANY predictor over this basis at 0.2119 insert / 0.3867 modify / 0.4325 remove — we reach 56% / 60% / 46%</a:t>
+                      </a:r>
+                      <a:endParaRPr lang="en-US" sz="850" dirty="0">
                         <a:latin typeface="Georgia" charset="0"/>
                         <a:ea typeface="Georgia" charset="0"/>
                         <a:cs typeface="Georgia" charset="0"/>
